--- a/presentation/MASLD_zonation.pptx
+++ b/presentation/MASLD_zonation.pptx
@@ -2459,7 +2459,7 @@
     <p:bg>
       <p:bgPr>
         <a:solidFill>
-          <a:srgbClr val="0F172A"/>
+          <a:srgbClr val="14292C"/>
         </a:solidFill>
       </p:bgPr>
     </p:bg>
@@ -2479,13 +2479,33 @@
       </p:grpSpPr>
       <p:sp>
         <p:nvSpPr>
-          <p:cNvPr id="2" name="Text 0"/>
-          <p:cNvSpPr/>
-          <p:nvPr/>
-        </p:nvSpPr>
-        <p:spPr>
-          <a:xfrm>
-            <a:off x="640080" y="1051560"/>
+          <p:cNvPr id="2" name="Shape 0"/>
+          <p:cNvSpPr/>
+          <p:nvPr/>
+        </p:nvSpPr>
+        <p:spPr>
+          <a:xfrm>
+            <a:off x="0" y="0"/>
+            <a:ext cx="201168" cy="6858000"/>
+          </a:xfrm>
+          <a:prstGeom prst="rect">
+            <a:avLst/>
+          </a:prstGeom>
+          <a:solidFill>
+            <a:srgbClr val="C0562B"/>
+          </a:solidFill>
+          <a:ln/>
+        </p:spPr>
+      </p:sp>
+      <p:sp>
+        <p:nvSpPr>
+          <p:cNvPr id="3" name="Text 1"/>
+          <p:cNvSpPr/>
+          <p:nvPr/>
+        </p:nvSpPr>
+        <p:spPr>
+          <a:xfrm>
+            <a:off x="777240" y="1051560"/>
             <a:ext cx="10881360" cy="365760"/>
           </a:xfrm>
           <a:prstGeom prst="rect">
@@ -2504,7 +2524,7 @@
             <a:r>
               <a:rPr lang="en-US" sz="1500" b="1" spc="300" kern="0" dirty="0">
                 <a:solidFill>
-                  <a:srgbClr val="5EEAD4"/>
+                  <a:srgbClr val="9CB0AC"/>
                 </a:solidFill>
               </a:rPr>
               <a:t>LIVER GENOMICS  ·  SINGLE-NUCLEUS RE-ANALYSIS</a:t>
@@ -2515,14 +2535,14 @@
       </p:sp>
       <p:sp>
         <p:nvSpPr>
-          <p:cNvPr id="3" name="Text 1"/>
-          <p:cNvSpPr/>
-          <p:nvPr/>
-        </p:nvSpPr>
-        <p:spPr>
-          <a:xfrm>
-            <a:off x="640080" y="1554480"/>
-            <a:ext cx="10881360" cy="1463040"/>
+          <p:cNvPr id="4" name="Text 2"/>
+          <p:cNvSpPr/>
+          <p:nvPr/>
+        </p:nvSpPr>
+        <p:spPr>
+          <a:xfrm>
+            <a:off x="777240" y="1554480"/>
+            <a:ext cx="10607040" cy="1554480"/>
           </a:xfrm>
           <a:prstGeom prst="rect">
             <a:avLst/>
@@ -2542,6 +2562,9 @@
                 <a:solidFill>
                   <a:srgbClr val="FFFFFF"/>
                 </a:solidFill>
+                <a:latin typeface="Georgia" pitchFamily="34" charset="0"/>
+                <a:ea typeface="Georgia" pitchFamily="34" charset="-122"/>
+                <a:cs typeface="Georgia" pitchFamily="34" charset="-120"/>
               </a:rPr>
               <a:t>Matched biopsies preserve hepatocyte transcriptional zonation in MASLD</a:t>
             </a:r>
@@ -2551,14 +2574,14 @@
       </p:sp>
       <p:sp>
         <p:nvSpPr>
-          <p:cNvPr id="4" name="Text 2"/>
-          <p:cNvSpPr/>
-          <p:nvPr/>
-        </p:nvSpPr>
-        <p:spPr>
-          <a:xfrm>
-            <a:off x="640080" y="3200400"/>
-            <a:ext cx="10881360" cy="457200"/>
+          <p:cNvPr id="5" name="Text 3"/>
+          <p:cNvSpPr/>
+          <p:nvPr/>
+        </p:nvSpPr>
+        <p:spPr>
+          <a:xfrm>
+            <a:off x="777240" y="3246120"/>
+            <a:ext cx="10607040" cy="457200"/>
           </a:xfrm>
           <a:prstGeom prst="rect">
             <a:avLst/>
@@ -2576,7 +2599,7 @@
             <a:r>
               <a:rPr lang="en-US" sz="1800" i="1" dirty="0">
                 <a:solidFill>
-                  <a:srgbClr val="CBD5E1"/>
+                  <a:srgbClr val="C9D6D3"/>
                 </a:solidFill>
               </a:rPr>
               <a:t>A critical re-analysis of the single-nucleus RNA-seq in Gribben et al., Nature 2024 (GSE202379)</a:t>
@@ -2587,13 +2610,13 @@
       </p:sp>
       <p:sp>
         <p:nvSpPr>
-          <p:cNvPr id="5" name="Shape 3"/>
-          <p:cNvSpPr/>
-          <p:nvPr/>
-        </p:nvSpPr>
-        <p:spPr>
-          <a:xfrm>
-            <a:off x="640080" y="4114800"/>
+          <p:cNvPr id="6" name="Shape 4"/>
+          <p:cNvSpPr/>
+          <p:nvPr/>
+        </p:nvSpPr>
+        <p:spPr>
+          <a:xfrm>
+            <a:off x="777240" y="4160520"/>
             <a:ext cx="4572000" cy="0"/>
           </a:xfrm>
           <a:prstGeom prst="line">
@@ -2602,7 +2625,7 @@
           <a:noFill/>
           <a:ln w="19050">
             <a:solidFill>
-              <a:srgbClr val="334155"/>
+              <a:srgbClr val="C0562B"/>
             </a:solidFill>
             <a:prstDash val="solid"/>
           </a:ln>
@@ -2610,14 +2633,14 @@
       </p:sp>
       <p:sp>
         <p:nvSpPr>
-          <p:cNvPr id="6" name="Text 4"/>
-          <p:cNvSpPr/>
-          <p:nvPr/>
-        </p:nvSpPr>
-        <p:spPr>
-          <a:xfrm>
-            <a:off x="640080" y="4297680"/>
-            <a:ext cx="10881360" cy="411480"/>
+          <p:cNvPr id="7" name="Text 5"/>
+          <p:cNvSpPr/>
+          <p:nvPr/>
+        </p:nvSpPr>
+        <p:spPr>
+          <a:xfrm>
+            <a:off x="777240" y="4343400"/>
+            <a:ext cx="10607040" cy="411480"/>
           </a:xfrm>
           <a:prstGeom prst="rect">
             <a:avLst/>
@@ -2635,7 +2658,7 @@
             <a:r>
               <a:rPr lang="en-US" sz="2000" b="1" dirty="0">
                 <a:solidFill>
-                  <a:srgbClr val="E2E8F0"/>
+                  <a:srgbClr val="EDE7DB"/>
                 </a:solidFill>
               </a:rPr>
               <a:t>Roee Tekoah</a:t>
@@ -2646,7 +2669,7 @@
             <a:r>
               <a:rPr lang="en-US" sz="2000" dirty="0">
                 <a:solidFill>
-                  <a:srgbClr val="64748B"/>
+                  <a:srgbClr val="7E8F8B"/>
                 </a:solidFill>
               </a:rPr>
               <a:t>   ·   </a:t>
@@ -2657,7 +2680,7 @@
             <a:r>
               <a:rPr lang="en-US" sz="2000" b="1" dirty="0">
                 <a:solidFill>
-                  <a:srgbClr val="E2E8F0"/>
+                  <a:srgbClr val="EDE7DB"/>
                 </a:solidFill>
               </a:rPr>
               <a:t>Shira Gelbstein</a:t>
@@ -2668,14 +2691,14 @@
       </p:sp>
       <p:sp>
         <p:nvSpPr>
-          <p:cNvPr id="7" name="Text 5"/>
-          <p:cNvSpPr/>
-          <p:nvPr/>
-        </p:nvSpPr>
-        <p:spPr>
-          <a:xfrm>
-            <a:off x="640080" y="4800600"/>
-            <a:ext cx="10881360" cy="365760"/>
+          <p:cNvPr id="8" name="Text 6"/>
+          <p:cNvSpPr/>
+          <p:nvPr/>
+        </p:nvSpPr>
+        <p:spPr>
+          <a:xfrm>
+            <a:off x="777240" y="4846320"/>
+            <a:ext cx="10607040" cy="365760"/>
           </a:xfrm>
           <a:prstGeom prst="rect">
             <a:avLst/>
@@ -2693,7 +2716,7 @@
             <a:r>
               <a:rPr lang="en-US" sz="1500" dirty="0">
                 <a:solidFill>
-                  <a:srgbClr val="94A3B8"/>
+                  <a:srgbClr val="9CB0AC"/>
                 </a:solidFill>
               </a:rPr>
               <a:t>Computational Genomics (76553)  ·  Hebrew University of Jerusalem  ·  Hackathon</a:t>
@@ -2704,14 +2727,14 @@
       </p:sp>
       <p:sp>
         <p:nvSpPr>
-          <p:cNvPr id="8" name="Text 6"/>
-          <p:cNvSpPr/>
-          <p:nvPr/>
-        </p:nvSpPr>
-        <p:spPr>
-          <a:xfrm>
-            <a:off x="640080" y="5760720"/>
-            <a:ext cx="10881360" cy="365760"/>
+          <p:cNvPr id="9" name="Text 7"/>
+          <p:cNvSpPr/>
+          <p:nvPr/>
+        </p:nvSpPr>
+        <p:spPr>
+          <a:xfrm>
+            <a:off x="777240" y="5806440"/>
+            <a:ext cx="10607040" cy="365760"/>
           </a:xfrm>
           <a:prstGeom prst="rect">
             <a:avLst/>
@@ -2729,7 +2752,7 @@
             <a:r>
               <a:rPr lang="en-US" sz="1300" dirty="0">
                 <a:solidFill>
-                  <a:srgbClr val="64748B"/>
+                  <a:srgbClr val="7E8F8B"/>
                 </a:solidFill>
               </a:rPr>
               <a:t>47 donors  ·  ~99,809 nuclei  ·  69,426 hepatocytes  ·  raw-count, donor-level analysis</a:t>
@@ -2752,7 +2775,7 @@
     <p:bg>
       <p:bgPr>
         <a:solidFill>
-          <a:srgbClr val="FFFFFF"/>
+          <a:srgbClr val="F7F3EB"/>
         </a:solidFill>
       </p:bgPr>
     </p:bg>
@@ -2772,14 +2795,34 @@
       </p:grpSpPr>
       <p:sp>
         <p:nvSpPr>
-          <p:cNvPr id="2" name="Text 0"/>
-          <p:cNvSpPr/>
-          <p:nvPr/>
-        </p:nvSpPr>
-        <p:spPr>
-          <a:xfrm>
-            <a:off x="457200" y="274320"/>
-            <a:ext cx="11247120" cy="320040"/>
+          <p:cNvPr id="2" name="Shape 0"/>
+          <p:cNvSpPr/>
+          <p:nvPr/>
+        </p:nvSpPr>
+        <p:spPr>
+          <a:xfrm>
+            <a:off x="457200" y="310896"/>
+            <a:ext cx="146304" cy="237744"/>
+          </a:xfrm>
+          <a:prstGeom prst="rect">
+            <a:avLst/>
+          </a:prstGeom>
+          <a:solidFill>
+            <a:srgbClr val="C0562B"/>
+          </a:solidFill>
+          <a:ln/>
+        </p:spPr>
+      </p:sp>
+      <p:sp>
+        <p:nvSpPr>
+          <p:cNvPr id="3" name="Text 1"/>
+          <p:cNvSpPr/>
+          <p:nvPr/>
+        </p:nvSpPr>
+        <p:spPr>
+          <a:xfrm>
+            <a:off x="676656" y="274320"/>
+            <a:ext cx="10972800" cy="320040"/>
           </a:xfrm>
           <a:prstGeom prst="rect">
             <a:avLst/>
@@ -2795,9 +2838,9 @@
               <a:buNone/>
             </a:pPr>
             <a:r>
-              <a:rPr lang="en-US" sz="1300" b="1" spc="200" kern="0" dirty="0">
-                <a:solidFill>
-                  <a:srgbClr val="0F766E"/>
+              <a:rPr lang="en-US" sz="1300" b="1" spc="300" kern="0" dirty="0">
+                <a:solidFill>
+                  <a:srgbClr val="C0562B"/>
                 </a:solidFill>
               </a:rPr>
               <a:t>SOURCE</a:t>
@@ -2808,14 +2851,14 @@
       </p:sp>
       <p:sp>
         <p:nvSpPr>
-          <p:cNvPr id="3" name="Text 1"/>
-          <p:cNvSpPr/>
-          <p:nvPr/>
-        </p:nvSpPr>
-        <p:spPr>
-          <a:xfrm>
-            <a:off x="457200" y="585216"/>
-            <a:ext cx="11247120" cy="658368"/>
+          <p:cNvPr id="4" name="Text 2"/>
+          <p:cNvSpPr/>
+          <p:nvPr/>
+        </p:nvSpPr>
+        <p:spPr>
+          <a:xfrm>
+            <a:off x="438912" y="585216"/>
+            <a:ext cx="11338560" cy="777240"/>
           </a:xfrm>
           <a:prstGeom prst="rect">
             <a:avLst/>
@@ -2831,20 +2874,23 @@
               <a:buNone/>
             </a:pPr>
             <a:r>
-              <a:rPr lang="en-US" sz="2700" b="1" dirty="0">
-                <a:solidFill>
-                  <a:srgbClr val="1E293B"/>
-                </a:solidFill>
+              <a:rPr lang="en-US" sz="2800" b="1" dirty="0">
+                <a:solidFill>
+                  <a:srgbClr val="1F3A3D"/>
+                </a:solidFill>
+                <a:latin typeface="Georgia" pitchFamily="34" charset="0"/>
+                <a:ea typeface="Georgia" pitchFamily="34" charset="-122"/>
+                <a:cs typeface="Georgia" pitchFamily="34" charset="-120"/>
               </a:rPr>
               <a:t>The biliary burden looks compositional</a:t>
             </a:r>
-            <a:endParaRPr lang="en-US" sz="2700" dirty="0"/>
+            <a:endParaRPr lang="en-US" sz="2800" dirty="0"/>
           </a:p>
         </p:txBody>
       </p:sp>
       <p:pic>
         <p:nvPicPr>
-          <p:cNvPr id="4" name="Image 0" descr="D:\CS\Genomics\Hackathon\presentation/assets/fig_compositional.png">    </p:cNvPr>
+          <p:cNvPr id="5" name="Image 0" descr="D:\CS\Genomics\Hackathon\presentation/assets/fig_compositional.png">    </p:cNvPr>
           <p:cNvPicPr>
             <a:picLocks noChangeAspect="1"/>
           </p:cNvPicPr>
@@ -2867,7 +2913,7 @@
       </p:pic>
       <p:sp>
         <p:nvSpPr>
-          <p:cNvPr id="5" name="Text 2"/>
+          <p:cNvPr id="6" name="Text 3"/>
           <p:cNvSpPr/>
           <p:nvPr/>
         </p:nvSpPr>
@@ -2892,7 +2938,7 @@
             <a:r>
               <a:rPr lang="en-US" sz="1200" i="1" dirty="0">
                 <a:solidFill>
-                  <a:srgbClr val="64748B"/>
+                  <a:srgbClr val="6B6256"/>
                 </a:solidFill>
               </a:rPr>
               <a:t>Figure 4.  Source attribution — cross-lineage abundance, decontX ambient removal, and the F4 ductular reaction.</a:t>
@@ -2903,7 +2949,7 @@
       </p:sp>
       <p:sp>
         <p:nvSpPr>
-          <p:cNvPr id="6" name="Text 3"/>
+          <p:cNvPr id="7" name="Text 4"/>
           <p:cNvSpPr/>
           <p:nvPr/>
         </p:nvSpPr>
@@ -3005,7 +3051,7 @@
       </p:sp>
       <p:sp>
         <p:nvSpPr>
-          <p:cNvPr id="7" name="Text 4"/>
+          <p:cNvPr id="8" name="Text 5"/>
           <p:cNvSpPr/>
           <p:nvPr/>
         </p:nvSpPr>
@@ -3030,7 +3076,7 @@
             <a:r>
               <a:rPr lang="en-US" sz="1050" dirty="0">
                 <a:solidFill>
-                  <a:srgbClr val="64748B"/>
+                  <a:srgbClr val="6B6256"/>
                 </a:solidFill>
               </a:rPr>
               <a:t>Computational Genomics 76553  ·  HUJI  ·  MASLD snRNA-seq hackathon</a:t>
@@ -3041,7 +3087,7 @@
       </p:sp>
       <p:sp>
         <p:nvSpPr>
-          <p:cNvPr id="8" name="Text 5"/>
+          <p:cNvPr id="9" name="Text 6"/>
           <p:cNvSpPr/>
           <p:nvPr/>
         </p:nvSpPr>
@@ -3066,7 +3112,7 @@
             <a:r>
               <a:rPr lang="en-US" sz="1050" dirty="0">
                 <a:solidFill>
-                  <a:srgbClr val="64748B"/>
+                  <a:srgbClr val="6B6256"/>
                 </a:solidFill>
               </a:rPr>
               <a:t>10</a:t>
@@ -3089,7 +3135,7 @@
     <p:bg>
       <p:bgPr>
         <a:solidFill>
-          <a:srgbClr val="0F172A"/>
+          <a:srgbClr val="14292C"/>
         </a:solidFill>
       </p:bgPr>
     </p:bg>
@@ -3109,14 +3155,54 @@
       </p:grpSpPr>
       <p:sp>
         <p:nvSpPr>
-          <p:cNvPr id="2" name="Text 0"/>
-          <p:cNvSpPr/>
-          <p:nvPr/>
-        </p:nvSpPr>
-        <p:spPr>
-          <a:xfrm>
-            <a:off x="640080" y="411480"/>
-            <a:ext cx="10881360" cy="365760"/>
+          <p:cNvPr id="2" name="Shape 0"/>
+          <p:cNvSpPr/>
+          <p:nvPr/>
+        </p:nvSpPr>
+        <p:spPr>
+          <a:xfrm>
+            <a:off x="0" y="0"/>
+            <a:ext cx="201168" cy="6858000"/>
+          </a:xfrm>
+          <a:prstGeom prst="rect">
+            <a:avLst/>
+          </a:prstGeom>
+          <a:solidFill>
+            <a:srgbClr val="C0562B"/>
+          </a:solidFill>
+          <a:ln/>
+        </p:spPr>
+      </p:sp>
+      <p:sp>
+        <p:nvSpPr>
+          <p:cNvPr id="3" name="Shape 1"/>
+          <p:cNvSpPr/>
+          <p:nvPr/>
+        </p:nvSpPr>
+        <p:spPr>
+          <a:xfrm>
+            <a:off x="777240" y="457200"/>
+            <a:ext cx="146304" cy="237744"/>
+          </a:xfrm>
+          <a:prstGeom prst="rect">
+            <a:avLst/>
+          </a:prstGeom>
+          <a:solidFill>
+            <a:srgbClr val="C0562B"/>
+          </a:solidFill>
+          <a:ln/>
+        </p:spPr>
+      </p:sp>
+      <p:sp>
+        <p:nvSpPr>
+          <p:cNvPr id="4" name="Text 2"/>
+          <p:cNvSpPr/>
+          <p:nvPr/>
+        </p:nvSpPr>
+        <p:spPr>
+          <a:xfrm>
+            <a:off x="987552" y="420624"/>
+            <a:ext cx="10515600" cy="365760"/>
           </a:xfrm>
           <a:prstGeom prst="rect">
             <a:avLst/>
@@ -3134,7 +3220,7 @@
             <a:r>
               <a:rPr lang="en-US" sz="1400" b="1" spc="300" kern="0" dirty="0">
                 <a:solidFill>
-                  <a:srgbClr val="5EEAD4"/>
+                  <a:srgbClr val="C0562B"/>
                 </a:solidFill>
               </a:rPr>
               <a:t>CONCLUSION</a:t>
@@ -3145,14 +3231,14 @@
       </p:sp>
       <p:sp>
         <p:nvSpPr>
-          <p:cNvPr id="3" name="Text 1"/>
-          <p:cNvSpPr/>
-          <p:nvPr/>
-        </p:nvSpPr>
-        <p:spPr>
-          <a:xfrm>
-            <a:off x="640080" y="777240"/>
-            <a:ext cx="10881360" cy="731520"/>
+          <p:cNvPr id="5" name="Text 3"/>
+          <p:cNvSpPr/>
+          <p:nvPr/>
+        </p:nvSpPr>
+        <p:spPr>
+          <a:xfrm>
+            <a:off x="777240" y="777240"/>
+            <a:ext cx="10607040" cy="731520"/>
           </a:xfrm>
           <a:prstGeom prst="rect">
             <a:avLst/>
@@ -3168,35 +3254,38 @@
               <a:buNone/>
             </a:pPr>
             <a:r>
-              <a:rPr lang="en-US" sz="2800" b="1" dirty="0">
+              <a:rPr lang="en-US" sz="3000" b="1" dirty="0">
                 <a:solidFill>
                   <a:srgbClr val="FFFFFF"/>
                 </a:solidFill>
+                <a:latin typeface="Georgia" pitchFamily="34" charset="0"/>
+                <a:ea typeface="Georgia" pitchFamily="34" charset="-122"/>
+                <a:cs typeface="Georgia" pitchFamily="34" charset="-120"/>
               </a:rPr>
               <a:t>Preservation, not progressive collapse</a:t>
             </a:r>
-            <a:endParaRPr lang="en-US" sz="2800" dirty="0"/>
-          </a:p>
-        </p:txBody>
-      </p:sp>
-      <p:sp>
-        <p:nvSpPr>
-          <p:cNvPr id="4" name="Shape 2"/>
-          <p:cNvSpPr/>
-          <p:nvPr/>
-        </p:nvSpPr>
-        <p:spPr>
-          <a:xfrm>
-            <a:off x="640080" y="1600200"/>
-            <a:ext cx="3566160" cy="3931920"/>
+            <a:endParaRPr lang="en-US" sz="3000" dirty="0"/>
+          </a:p>
+        </p:txBody>
+      </p:sp>
+      <p:sp>
+        <p:nvSpPr>
+          <p:cNvPr id="6" name="Shape 4"/>
+          <p:cNvSpPr/>
+          <p:nvPr/>
+        </p:nvSpPr>
+        <p:spPr>
+          <a:xfrm>
+            <a:off x="777240" y="1600200"/>
+            <a:ext cx="3520440" cy="3931920"/>
           </a:xfrm>
           <a:prstGeom prst="roundRect">
             <a:avLst>
-              <a:gd name="adj" fmla="val 2051"/>
+              <a:gd name="adj" fmla="val 2078"/>
             </a:avLst>
           </a:prstGeom>
           <a:solidFill>
-            <a:srgbClr val="1E293B"/>
+            <a:srgbClr val="1E3A3D"/>
           </a:solidFill>
           <a:ln/>
           <a:effectLst>
@@ -3210,14 +3299,14 @@
       </p:sp>
       <p:sp>
         <p:nvSpPr>
-          <p:cNvPr id="5" name="Text 3"/>
-          <p:cNvSpPr/>
-          <p:nvPr/>
-        </p:nvSpPr>
-        <p:spPr>
-          <a:xfrm>
-            <a:off x="640080" y="1737360"/>
-            <a:ext cx="3566160" cy="457200"/>
+          <p:cNvPr id="7" name="Text 5"/>
+          <p:cNvSpPr/>
+          <p:nvPr/>
+        </p:nvSpPr>
+        <p:spPr>
+          <a:xfrm>
+            <a:off x="777240" y="1737360"/>
+            <a:ext cx="3520440" cy="457200"/>
           </a:xfrm>
           <a:prstGeom prst="rect">
             <a:avLst/>
@@ -3235,8 +3324,11 @@
             <a:r>
               <a:rPr lang="en-US" sz="2000" b="1" dirty="0">
                 <a:solidFill>
-                  <a:srgbClr val="5EEAD4"/>
-                </a:solidFill>
+                  <a:srgbClr val="F0B27A"/>
+                </a:solidFill>
+                <a:latin typeface="Georgia" pitchFamily="34" charset="0"/>
+                <a:ea typeface="Georgia" pitchFamily="34" charset="-122"/>
+                <a:cs typeface="Georgia" pitchFamily="34" charset="-120"/>
               </a:rPr>
               <a:t>Conclusions</a:t>
             </a:r>
@@ -3246,14 +3338,14 @@
       </p:sp>
       <p:sp>
         <p:nvSpPr>
-          <p:cNvPr id="6" name="Text 4"/>
-          <p:cNvSpPr/>
-          <p:nvPr/>
-        </p:nvSpPr>
-        <p:spPr>
-          <a:xfrm>
-            <a:off x="868680" y="2286000"/>
-            <a:ext cx="3154680" cy="3108960"/>
+          <p:cNvPr id="8" name="Text 6"/>
+          <p:cNvSpPr/>
+          <p:nvPr/>
+        </p:nvSpPr>
+        <p:spPr>
+          <a:xfrm>
+            <a:off x="1005840" y="2286000"/>
+            <a:ext cx="3108960" cy="3108960"/>
           </a:xfrm>
           <a:prstGeom prst="rect">
             <a:avLst/>
@@ -3322,22 +3414,22 @@
       </p:sp>
       <p:sp>
         <p:nvSpPr>
-          <p:cNvPr id="7" name="Shape 5"/>
-          <p:cNvSpPr/>
-          <p:nvPr/>
-        </p:nvSpPr>
-        <p:spPr>
-          <a:xfrm>
-            <a:off x="4434840" y="1600200"/>
-            <a:ext cx="3566160" cy="3931920"/>
+          <p:cNvPr id="9" name="Shape 7"/>
+          <p:cNvSpPr/>
+          <p:nvPr/>
+        </p:nvSpPr>
+        <p:spPr>
+          <a:xfrm>
+            <a:off x="4526280" y="1600200"/>
+            <a:ext cx="3520440" cy="3931920"/>
           </a:xfrm>
           <a:prstGeom prst="roundRect">
             <a:avLst>
-              <a:gd name="adj" fmla="val 2051"/>
+              <a:gd name="adj" fmla="val 2078"/>
             </a:avLst>
           </a:prstGeom>
           <a:solidFill>
-            <a:srgbClr val="1E293B"/>
+            <a:srgbClr val="1E3A3D"/>
           </a:solidFill>
           <a:ln/>
           <a:effectLst>
@@ -3351,14 +3443,14 @@
       </p:sp>
       <p:sp>
         <p:nvSpPr>
-          <p:cNvPr id="8" name="Text 6"/>
-          <p:cNvSpPr/>
-          <p:nvPr/>
-        </p:nvSpPr>
-        <p:spPr>
-          <a:xfrm>
-            <a:off x="4434840" y="1737360"/>
-            <a:ext cx="3566160" cy="457200"/>
+          <p:cNvPr id="10" name="Text 8"/>
+          <p:cNvSpPr/>
+          <p:nvPr/>
+        </p:nvSpPr>
+        <p:spPr>
+          <a:xfrm>
+            <a:off x="4526280" y="1737360"/>
+            <a:ext cx="3520440" cy="457200"/>
           </a:xfrm>
           <a:prstGeom prst="rect">
             <a:avLst/>
@@ -3378,6 +3470,9 @@
                 <a:solidFill>
                   <a:srgbClr val="FCA5A5"/>
                 </a:solidFill>
+                <a:latin typeface="Georgia" pitchFamily="34" charset="0"/>
+                <a:ea typeface="Georgia" pitchFamily="34" charset="-122"/>
+                <a:cs typeface="Georgia" pitchFamily="34" charset="-120"/>
               </a:rPr>
               <a:t>Limits</a:t>
             </a:r>
@@ -3387,14 +3482,14 @@
       </p:sp>
       <p:sp>
         <p:nvSpPr>
-          <p:cNvPr id="9" name="Text 7"/>
-          <p:cNvSpPr/>
-          <p:nvPr/>
-        </p:nvSpPr>
-        <p:spPr>
-          <a:xfrm>
-            <a:off x="4663440" y="2286000"/>
-            <a:ext cx="3154680" cy="3108960"/>
+          <p:cNvPr id="11" name="Text 9"/>
+          <p:cNvSpPr/>
+          <p:nvPr/>
+        </p:nvSpPr>
+        <p:spPr>
+          <a:xfrm>
+            <a:off x="4754880" y="2286000"/>
+            <a:ext cx="3108960" cy="3108960"/>
           </a:xfrm>
           <a:prstGeom prst="rect">
             <a:avLst/>
@@ -3481,22 +3576,22 @@
       </p:sp>
       <p:sp>
         <p:nvSpPr>
-          <p:cNvPr id="10" name="Shape 8"/>
-          <p:cNvSpPr/>
-          <p:nvPr/>
-        </p:nvSpPr>
-        <p:spPr>
-          <a:xfrm>
-            <a:off x="8229600" y="1600200"/>
-            <a:ext cx="3566160" cy="3931920"/>
+          <p:cNvPr id="12" name="Shape 10"/>
+          <p:cNvSpPr/>
+          <p:nvPr/>
+        </p:nvSpPr>
+        <p:spPr>
+          <a:xfrm>
+            <a:off x="8275320" y="1600200"/>
+            <a:ext cx="3520440" cy="3931920"/>
           </a:xfrm>
           <a:prstGeom prst="roundRect">
             <a:avLst>
-              <a:gd name="adj" fmla="val 2051"/>
+              <a:gd name="adj" fmla="val 2078"/>
             </a:avLst>
           </a:prstGeom>
           <a:solidFill>
-            <a:srgbClr val="1E293B"/>
+            <a:srgbClr val="1E3A3D"/>
           </a:solidFill>
           <a:ln/>
           <a:effectLst>
@@ -3510,14 +3605,14 @@
       </p:sp>
       <p:sp>
         <p:nvSpPr>
-          <p:cNvPr id="11" name="Text 9"/>
-          <p:cNvSpPr/>
-          <p:nvPr/>
-        </p:nvSpPr>
-        <p:spPr>
-          <a:xfrm>
-            <a:off x="8229600" y="1737360"/>
-            <a:ext cx="3566160" cy="457200"/>
+          <p:cNvPr id="13" name="Text 11"/>
+          <p:cNvSpPr/>
+          <p:nvPr/>
+        </p:nvSpPr>
+        <p:spPr>
+          <a:xfrm>
+            <a:off x="8275320" y="1737360"/>
+            <a:ext cx="3520440" cy="457200"/>
           </a:xfrm>
           <a:prstGeom prst="rect">
             <a:avLst/>
@@ -3535,8 +3630,11 @@
             <a:r>
               <a:rPr lang="en-US" sz="2000" b="1" dirty="0">
                 <a:solidFill>
-                  <a:srgbClr val="93C5FD"/>
-                </a:solidFill>
+                  <a:srgbClr val="9CC6CC"/>
+                </a:solidFill>
+                <a:latin typeface="Georgia" pitchFamily="34" charset="0"/>
+                <a:ea typeface="Georgia" pitchFamily="34" charset="-122"/>
+                <a:cs typeface="Georgia" pitchFamily="34" charset="-120"/>
               </a:rPr>
               <a:t>Next</a:t>
             </a:r>
@@ -3546,14 +3644,14 @@
       </p:sp>
       <p:sp>
         <p:nvSpPr>
-          <p:cNvPr id="12" name="Text 10"/>
-          <p:cNvSpPr/>
-          <p:nvPr/>
-        </p:nvSpPr>
-        <p:spPr>
-          <a:xfrm>
-            <a:off x="8458200" y="2286000"/>
-            <a:ext cx="3154680" cy="3108960"/>
+          <p:cNvPr id="14" name="Text 12"/>
+          <p:cNvSpPr/>
+          <p:nvPr/>
+        </p:nvSpPr>
+        <p:spPr>
+          <a:xfrm>
+            <a:off x="8503920" y="2286000"/>
+            <a:ext cx="3108960" cy="3108960"/>
           </a:xfrm>
           <a:prstGeom prst="rect">
             <a:avLst/>
@@ -3640,7 +3738,7 @@
       </p:sp>
       <p:sp>
         <p:nvSpPr>
-          <p:cNvPr id="13" name="Text 11"/>
+          <p:cNvPr id="15" name="Text 13"/>
           <p:cNvSpPr/>
           <p:nvPr/>
         </p:nvSpPr>
@@ -3676,7 +3774,7 @@
       </p:sp>
       <p:sp>
         <p:nvSpPr>
-          <p:cNvPr id="14" name="Text 12"/>
+          <p:cNvPr id="16" name="Text 14"/>
           <p:cNvSpPr/>
           <p:nvPr/>
         </p:nvSpPr>
@@ -3701,7 +3799,7 @@
             <a:r>
               <a:rPr lang="en-US" sz="1050" dirty="0">
                 <a:solidFill>
-                  <a:srgbClr val="64748B"/>
+                  <a:srgbClr val="6B6256"/>
                 </a:solidFill>
               </a:rPr>
               <a:t>Computational Genomics 76553  ·  HUJI  ·  MASLD snRNA-seq hackathon</a:t>
@@ -3712,7 +3810,7 @@
       </p:sp>
       <p:sp>
         <p:nvSpPr>
-          <p:cNvPr id="15" name="Text 13"/>
+          <p:cNvPr id="17" name="Text 15"/>
           <p:cNvSpPr/>
           <p:nvPr/>
         </p:nvSpPr>
@@ -3737,7 +3835,7 @@
             <a:r>
               <a:rPr lang="en-US" sz="1050" dirty="0">
                 <a:solidFill>
-                  <a:srgbClr val="64748B"/>
+                  <a:srgbClr val="6B6256"/>
                 </a:solidFill>
               </a:rPr>
               <a:t>11</a:t>
@@ -3760,7 +3858,7 @@
     <p:bg>
       <p:bgPr>
         <a:solidFill>
-          <a:srgbClr val="FFFFFF"/>
+          <a:srgbClr val="F7F3EB"/>
         </a:solidFill>
       </p:bgPr>
     </p:bg>
@@ -3780,14 +3878,34 @@
       </p:grpSpPr>
       <p:sp>
         <p:nvSpPr>
-          <p:cNvPr id="2" name="Text 0"/>
-          <p:cNvSpPr/>
-          <p:nvPr/>
-        </p:nvSpPr>
-        <p:spPr>
-          <a:xfrm>
-            <a:off x="457200" y="274320"/>
-            <a:ext cx="11247120" cy="320040"/>
+          <p:cNvPr id="2" name="Shape 0"/>
+          <p:cNvSpPr/>
+          <p:nvPr/>
+        </p:nvSpPr>
+        <p:spPr>
+          <a:xfrm>
+            <a:off x="457200" y="310896"/>
+            <a:ext cx="146304" cy="237744"/>
+          </a:xfrm>
+          <a:prstGeom prst="rect">
+            <a:avLst/>
+          </a:prstGeom>
+          <a:solidFill>
+            <a:srgbClr val="C0562B"/>
+          </a:solidFill>
+          <a:ln/>
+        </p:spPr>
+      </p:sp>
+      <p:sp>
+        <p:nvSpPr>
+          <p:cNvPr id="3" name="Text 1"/>
+          <p:cNvSpPr/>
+          <p:nvPr/>
+        </p:nvSpPr>
+        <p:spPr>
+          <a:xfrm>
+            <a:off x="676656" y="274320"/>
+            <a:ext cx="10972800" cy="320040"/>
           </a:xfrm>
           <a:prstGeom prst="rect">
             <a:avLst/>
@@ -3803,9 +3921,9 @@
               <a:buNone/>
             </a:pPr>
             <a:r>
-              <a:rPr lang="en-US" sz="1300" b="1" spc="200" kern="0" dirty="0">
-                <a:solidFill>
-                  <a:srgbClr val="0D9488"/>
+              <a:rPr lang="en-US" sz="1300" b="1" spc="300" kern="0" dirty="0">
+                <a:solidFill>
+                  <a:srgbClr val="C0562B"/>
                 </a:solidFill>
               </a:rPr>
               <a:t>BACKUP  ·  DE-ZONATION MECHANISMS</a:t>
@@ -3816,14 +3934,14 @@
       </p:sp>
       <p:sp>
         <p:nvSpPr>
-          <p:cNvPr id="3" name="Text 1"/>
-          <p:cNvSpPr/>
-          <p:nvPr/>
-        </p:nvSpPr>
-        <p:spPr>
-          <a:xfrm>
-            <a:off x="457200" y="585216"/>
-            <a:ext cx="11247120" cy="658368"/>
+          <p:cNvPr id="4" name="Text 2"/>
+          <p:cNvSpPr/>
+          <p:nvPr/>
+        </p:nvSpPr>
+        <p:spPr>
+          <a:xfrm>
+            <a:off x="438912" y="585216"/>
+            <a:ext cx="11338560" cy="731520"/>
           </a:xfrm>
           <a:prstGeom prst="rect">
             <a:avLst/>
@@ -3841,8 +3959,11 @@
             <a:r>
               <a:rPr lang="en-US" sz="2600" b="1" dirty="0">
                 <a:solidFill>
-                  <a:srgbClr val="1E293B"/>
-                </a:solidFill>
+                  <a:srgbClr val="1F3A3D"/>
+                </a:solidFill>
+                <a:latin typeface="Georgia" pitchFamily="34" charset="0"/>
+                <a:ea typeface="Georgia" pitchFamily="34" charset="-122"/>
+                <a:cs typeface="Georgia" pitchFamily="34" charset="-120"/>
               </a:rPr>
               <a:t>Full four-mechanism panel (F0–F4)</a:t>
             </a:r>
@@ -3852,7 +3973,7 @@
       </p:sp>
       <p:pic>
         <p:nvPicPr>
-          <p:cNvPr id="4" name="Image 0" descr="D:\CS\Genomics\Hackathon\presentation/assets/fig_anchor2x2.png">    </p:cNvPr>
+          <p:cNvPr id="5" name="Image 0" descr="D:\CS\Genomics\Hackathon\presentation/assets/fig_anchor2x2.png">    </p:cNvPr>
           <p:cNvPicPr>
             <a:picLocks noChangeAspect="1"/>
           </p:cNvPicPr>
@@ -3875,7 +3996,7 @@
       </p:pic>
       <p:sp>
         <p:nvSpPr>
-          <p:cNvPr id="5" name="Text 2"/>
+          <p:cNvPr id="6" name="Text 3"/>
           <p:cNvSpPr/>
           <p:nvPr/>
         </p:nvSpPr>
@@ -3900,7 +4021,7 @@
             <a:r>
               <a:rPr lang="en-US" sz="1200" i="1" dirty="0">
                 <a:solidFill>
-                  <a:srgbClr val="64748B"/>
+                  <a:srgbClr val="6B6256"/>
                 </a:solidFill>
               </a:rPr>
               <a:t>Figure 5.  Depletion, co-expression, turn-off and composition across biopsy fibrosis — none shows a large monotone change.</a:t>
@@ -3911,7 +4032,7 @@
       </p:sp>
       <p:sp>
         <p:nvSpPr>
-          <p:cNvPr id="6" name="Text 3"/>
+          <p:cNvPr id="7" name="Text 4"/>
           <p:cNvSpPr/>
           <p:nvPr/>
         </p:nvSpPr>
@@ -3974,7 +4095,7 @@
     <p:bg>
       <p:bgPr>
         <a:solidFill>
-          <a:srgbClr val="FFFFFF"/>
+          <a:srgbClr val="F7F3EB"/>
         </a:solidFill>
       </p:bgPr>
     </p:bg>
@@ -3994,14 +4115,34 @@
       </p:grpSpPr>
       <p:sp>
         <p:nvSpPr>
-          <p:cNvPr id="2" name="Text 0"/>
-          <p:cNvSpPr/>
-          <p:nvPr/>
-        </p:nvSpPr>
-        <p:spPr>
-          <a:xfrm>
-            <a:off x="457200" y="274320"/>
-            <a:ext cx="11247120" cy="320040"/>
+          <p:cNvPr id="2" name="Shape 0"/>
+          <p:cNvSpPr/>
+          <p:nvPr/>
+        </p:nvSpPr>
+        <p:spPr>
+          <a:xfrm>
+            <a:off x="457200" y="310896"/>
+            <a:ext cx="146304" cy="237744"/>
+          </a:xfrm>
+          <a:prstGeom prst="rect">
+            <a:avLst/>
+          </a:prstGeom>
+          <a:solidFill>
+            <a:srgbClr val="C0562B"/>
+          </a:solidFill>
+          <a:ln/>
+        </p:spPr>
+      </p:sp>
+      <p:sp>
+        <p:nvSpPr>
+          <p:cNvPr id="3" name="Text 1"/>
+          <p:cNvSpPr/>
+          <p:nvPr/>
+        </p:nvSpPr>
+        <p:spPr>
+          <a:xfrm>
+            <a:off x="676656" y="274320"/>
+            <a:ext cx="10972800" cy="320040"/>
           </a:xfrm>
           <a:prstGeom prst="rect">
             <a:avLst/>
@@ -4017,9 +4158,9 @@
               <a:buNone/>
             </a:pPr>
             <a:r>
-              <a:rPr lang="en-US" sz="1300" b="1" spc="200" kern="0" dirty="0">
-                <a:solidFill>
-                  <a:srgbClr val="0D9488"/>
+              <a:rPr lang="en-US" sz="1300" b="1" spc="300" kern="0" dirty="0">
+                <a:solidFill>
+                  <a:srgbClr val="C0562B"/>
                 </a:solidFill>
               </a:rPr>
               <a:t>BACKUP  ·  SCOPE</a:t>
@@ -4030,14 +4171,14 @@
       </p:sp>
       <p:sp>
         <p:nvSpPr>
-          <p:cNvPr id="3" name="Text 1"/>
-          <p:cNvSpPr/>
-          <p:nvPr/>
-        </p:nvSpPr>
-        <p:spPr>
-          <a:xfrm>
-            <a:off x="457200" y="585216"/>
-            <a:ext cx="11247120" cy="658368"/>
+          <p:cNvPr id="4" name="Text 2"/>
+          <p:cNvSpPr/>
+          <p:nvPr/>
+        </p:nvSpPr>
+        <p:spPr>
+          <a:xfrm>
+            <a:off x="438912" y="585216"/>
+            <a:ext cx="11338560" cy="731520"/>
           </a:xfrm>
           <a:prstGeom prst="rect">
             <a:avLst/>
@@ -4055,8 +4196,11 @@
             <a:r>
               <a:rPr lang="en-US" sz="2600" b="1" dirty="0">
                 <a:solidFill>
-                  <a:srgbClr val="1E293B"/>
-                </a:solidFill>
+                  <a:srgbClr val="1F3A3D"/>
+                </a:solidFill>
+                <a:latin typeface="Georgia" pitchFamily="34" charset="0"/>
+                <a:ea typeface="Georgia" pitchFamily="34" charset="-122"/>
+                <a:cs typeface="Georgia" pitchFamily="34" charset="-120"/>
               </a:rPr>
               <a:t>Are you overturning the paper? No</a:t>
             </a:r>
@@ -4066,7 +4210,7 @@
       </p:sp>
       <p:sp>
         <p:nvSpPr>
-          <p:cNvPr id="4" name="Text 2"/>
+          <p:cNvPr id="5" name="Text 3"/>
           <p:cNvSpPr/>
           <p:nvPr/>
         </p:nvSpPr>
@@ -4172,7 +4316,7 @@
     <p:bg>
       <p:bgPr>
         <a:solidFill>
-          <a:srgbClr val="FFFFFF"/>
+          <a:srgbClr val="F7F3EB"/>
         </a:solidFill>
       </p:bgPr>
     </p:bg>
@@ -4192,14 +4336,34 @@
       </p:grpSpPr>
       <p:sp>
         <p:nvSpPr>
-          <p:cNvPr id="2" name="Text 0"/>
-          <p:cNvSpPr/>
-          <p:nvPr/>
-        </p:nvSpPr>
-        <p:spPr>
-          <a:xfrm>
-            <a:off x="457200" y="274320"/>
-            <a:ext cx="11247120" cy="320040"/>
+          <p:cNvPr id="2" name="Shape 0"/>
+          <p:cNvSpPr/>
+          <p:nvPr/>
+        </p:nvSpPr>
+        <p:spPr>
+          <a:xfrm>
+            <a:off x="457200" y="310896"/>
+            <a:ext cx="146304" cy="237744"/>
+          </a:xfrm>
+          <a:prstGeom prst="rect">
+            <a:avLst/>
+          </a:prstGeom>
+          <a:solidFill>
+            <a:srgbClr val="C0562B"/>
+          </a:solidFill>
+          <a:ln/>
+        </p:spPr>
+      </p:sp>
+      <p:sp>
+        <p:nvSpPr>
+          <p:cNvPr id="3" name="Text 1"/>
+          <p:cNvSpPr/>
+          <p:nvPr/>
+        </p:nvSpPr>
+        <p:spPr>
+          <a:xfrm>
+            <a:off x="676656" y="274320"/>
+            <a:ext cx="10972800" cy="320040"/>
           </a:xfrm>
           <a:prstGeom prst="rect">
             <a:avLst/>
@@ -4215,9 +4379,9 @@
               <a:buNone/>
             </a:pPr>
             <a:r>
-              <a:rPr lang="en-US" sz="1300" b="1" spc="200" kern="0" dirty="0">
-                <a:solidFill>
-                  <a:srgbClr val="0D9488"/>
+              <a:rPr lang="en-US" sz="1300" b="1" spc="300" kern="0" dirty="0">
+                <a:solidFill>
+                  <a:srgbClr val="C0562B"/>
                 </a:solidFill>
               </a:rPr>
               <a:t>BACKUP  ·  LOBE</a:t>
@@ -4228,14 +4392,14 @@
       </p:sp>
       <p:sp>
         <p:nvSpPr>
-          <p:cNvPr id="3" name="Text 1"/>
-          <p:cNvSpPr/>
-          <p:nvPr/>
-        </p:nvSpPr>
-        <p:spPr>
-          <a:xfrm>
-            <a:off x="457200" y="585216"/>
-            <a:ext cx="11247120" cy="658368"/>
+          <p:cNvPr id="4" name="Text 2"/>
+          <p:cNvSpPr/>
+          <p:nvPr/>
+        </p:nvSpPr>
+        <p:spPr>
+          <a:xfrm>
+            <a:off x="438912" y="585216"/>
+            <a:ext cx="11338560" cy="731520"/>
           </a:xfrm>
           <a:prstGeom prst="rect">
             <a:avLst/>
@@ -4253,8 +4417,11 @@
             <a:r>
               <a:rPr lang="en-US" sz="2600" b="1" dirty="0">
                 <a:solidFill>
-                  <a:srgbClr val="1E293B"/>
-                </a:solidFill>
+                  <a:srgbClr val="1F3A3D"/>
+                </a:solidFill>
+                <a:latin typeface="Georgia" pitchFamily="34" charset="0"/>
+                <a:ea typeface="Georgia" pitchFamily="34" charset="-122"/>
+                <a:cs typeface="Georgia" pitchFamily="34" charset="-120"/>
               </a:rPr>
               <a:t>Caudate lobe? Lobe-invariant</a:t>
             </a:r>
@@ -4264,7 +4431,7 @@
       </p:sp>
       <p:pic>
         <p:nvPicPr>
-          <p:cNvPr id="4" name="Image 0" descr="D:\CS\Genomics\Hackathon\presentation/assets/fig_lobe.png">    </p:cNvPr>
+          <p:cNvPr id="5" name="Image 0" descr="D:\CS\Genomics\Hackathon\presentation/assets/fig_lobe.png">    </p:cNvPr>
           <p:cNvPicPr>
             <a:picLocks noChangeAspect="1"/>
           </p:cNvPicPr>
@@ -4287,7 +4454,7 @@
       </p:pic>
       <p:sp>
         <p:nvSpPr>
-          <p:cNvPr id="5" name="Text 2"/>
+          <p:cNvPr id="6" name="Text 3"/>
           <p:cNvSpPr/>
           <p:nvPr/>
         </p:nvSpPr>
@@ -4312,7 +4479,7 @@
             <a:r>
               <a:rPr lang="en-US" sz="1200" i="1" dirty="0">
                 <a:solidFill>
-                  <a:srgbClr val="64748B"/>
+                  <a:srgbClr val="6B6256"/>
                 </a:solidFill>
               </a:rPr>
               <a:t>Figure 6.  Zonation-marker detection across Right / Caudate / Left lobes in end-stage explants.</a:t>
@@ -4323,7 +4490,7 @@
       </p:sp>
       <p:sp>
         <p:nvSpPr>
-          <p:cNvPr id="6" name="Text 3"/>
+          <p:cNvPr id="7" name="Text 4"/>
           <p:cNvSpPr/>
           <p:nvPr/>
         </p:nvSpPr>
@@ -4386,7 +4553,7 @@
     <p:bg>
       <p:bgPr>
         <a:solidFill>
-          <a:srgbClr val="FFFFFF"/>
+          <a:srgbClr val="F7F3EB"/>
         </a:solidFill>
       </p:bgPr>
     </p:bg>
@@ -4406,14 +4573,34 @@
       </p:grpSpPr>
       <p:sp>
         <p:nvSpPr>
-          <p:cNvPr id="2" name="Text 0"/>
-          <p:cNvSpPr/>
-          <p:nvPr/>
-        </p:nvSpPr>
-        <p:spPr>
-          <a:xfrm>
-            <a:off x="457200" y="274320"/>
-            <a:ext cx="11247120" cy="320040"/>
+          <p:cNvPr id="2" name="Shape 0"/>
+          <p:cNvSpPr/>
+          <p:nvPr/>
+        </p:nvSpPr>
+        <p:spPr>
+          <a:xfrm>
+            <a:off x="457200" y="310896"/>
+            <a:ext cx="146304" cy="237744"/>
+          </a:xfrm>
+          <a:prstGeom prst="rect">
+            <a:avLst/>
+          </a:prstGeom>
+          <a:solidFill>
+            <a:srgbClr val="C0562B"/>
+          </a:solidFill>
+          <a:ln/>
+        </p:spPr>
+      </p:sp>
+      <p:sp>
+        <p:nvSpPr>
+          <p:cNvPr id="3" name="Text 1"/>
+          <p:cNvSpPr/>
+          <p:nvPr/>
+        </p:nvSpPr>
+        <p:spPr>
+          <a:xfrm>
+            <a:off x="676656" y="274320"/>
+            <a:ext cx="10972800" cy="320040"/>
           </a:xfrm>
           <a:prstGeom prst="rect">
             <a:avLst/>
@@ -4429,9 +4616,9 @@
               <a:buNone/>
             </a:pPr>
             <a:r>
-              <a:rPr lang="en-US" sz="1300" b="1" spc="200" kern="0" dirty="0">
-                <a:solidFill>
-                  <a:srgbClr val="0D9488"/>
+              <a:rPr lang="en-US" sz="1300" b="1" spc="300" kern="0" dirty="0">
+                <a:solidFill>
+                  <a:srgbClr val="C0562B"/>
                 </a:solidFill>
               </a:rPr>
               <a:t>BACKUP  ·  END-STAGE</a:t>
@@ -4442,14 +4629,14 @@
       </p:sp>
       <p:sp>
         <p:nvSpPr>
-          <p:cNvPr id="3" name="Text 1"/>
-          <p:cNvSpPr/>
-          <p:nvPr/>
-        </p:nvSpPr>
-        <p:spPr>
-          <a:xfrm>
-            <a:off x="457200" y="585216"/>
-            <a:ext cx="11247120" cy="658368"/>
+          <p:cNvPr id="4" name="Text 2"/>
+          <p:cNvSpPr/>
+          <p:nvPr/>
+        </p:nvSpPr>
+        <p:spPr>
+          <a:xfrm>
+            <a:off x="438912" y="585216"/>
+            <a:ext cx="11338560" cy="731520"/>
           </a:xfrm>
           <a:prstGeom prst="rect">
             <a:avLst/>
@@ -4467,8 +4654,11 @@
             <a:r>
               <a:rPr lang="en-US" sz="2600" b="1" dirty="0">
                 <a:solidFill>
-                  <a:srgbClr val="1E293B"/>
-                </a:solidFill>
+                  <a:srgbClr val="1F3A3D"/>
+                </a:solidFill>
+                <a:latin typeface="Georgia" pitchFamily="34" charset="0"/>
+                <a:ea typeface="Georgia" pitchFamily="34" charset="-122"/>
+                <a:cs typeface="Georgia" pitchFamily="34" charset="-120"/>
               </a:rPr>
               <a:t>Five organs, five phenotypes</a:t>
             </a:r>
@@ -4478,7 +4668,7 @@
       </p:sp>
       <p:pic>
         <p:nvPicPr>
-          <p:cNvPr id="4" name="Image 0" descr="D:\CS\Genomics\Hackathon\presentation/assets/fig_explant.png">    </p:cNvPr>
+          <p:cNvPr id="5" name="Image 0" descr="D:\CS\Genomics\Hackathon\presentation/assets/fig_explant.png">    </p:cNvPr>
           <p:cNvPicPr>
             <a:picLocks noChangeAspect="1"/>
           </p:cNvPicPr>
@@ -4501,7 +4691,7 @@
       </p:pic>
       <p:sp>
         <p:nvSpPr>
-          <p:cNvPr id="5" name="Text 2"/>
+          <p:cNvPr id="6" name="Text 3"/>
           <p:cNvSpPr/>
           <p:nvPr/>
         </p:nvSpPr>
@@ -4526,7 +4716,7 @@
             <a:r>
               <a:rPr lang="en-US" sz="1200" i="1" dirty="0">
                 <a:solidFill>
-                  <a:srgbClr val="64748B"/>
+                  <a:srgbClr val="6B6256"/>
                 </a:solidFill>
               </a:rPr>
               <a:t>Figure 7.  Per-explant anchor fractions — end-stage is heterogeneous, not one coherent program.</a:t>
@@ -4537,7 +4727,7 @@
       </p:sp>
       <p:sp>
         <p:nvSpPr>
-          <p:cNvPr id="6" name="Text 3"/>
+          <p:cNvPr id="7" name="Text 4"/>
           <p:cNvSpPr/>
           <p:nvPr/>
         </p:nvSpPr>
@@ -4600,7 +4790,7 @@
     <p:bg>
       <p:bgPr>
         <a:solidFill>
-          <a:srgbClr val="FFFFFF"/>
+          <a:srgbClr val="F7F3EB"/>
         </a:solidFill>
       </p:bgPr>
     </p:bg>
@@ -4620,14 +4810,34 @@
       </p:grpSpPr>
       <p:sp>
         <p:nvSpPr>
-          <p:cNvPr id="2" name="Text 0"/>
-          <p:cNvSpPr/>
-          <p:nvPr/>
-        </p:nvSpPr>
-        <p:spPr>
-          <a:xfrm>
-            <a:off x="457200" y="274320"/>
-            <a:ext cx="11247120" cy="320040"/>
+          <p:cNvPr id="2" name="Shape 0"/>
+          <p:cNvSpPr/>
+          <p:nvPr/>
+        </p:nvSpPr>
+        <p:spPr>
+          <a:xfrm>
+            <a:off x="457200" y="310896"/>
+            <a:ext cx="146304" cy="237744"/>
+          </a:xfrm>
+          <a:prstGeom prst="rect">
+            <a:avLst/>
+          </a:prstGeom>
+          <a:solidFill>
+            <a:srgbClr val="C0562B"/>
+          </a:solidFill>
+          <a:ln/>
+        </p:spPr>
+      </p:sp>
+      <p:sp>
+        <p:nvSpPr>
+          <p:cNvPr id="3" name="Text 1"/>
+          <p:cNvSpPr/>
+          <p:nvPr/>
+        </p:nvSpPr>
+        <p:spPr>
+          <a:xfrm>
+            <a:off x="676656" y="274320"/>
+            <a:ext cx="10972800" cy="320040"/>
           </a:xfrm>
           <a:prstGeom prst="rect">
             <a:avLst/>
@@ -4643,9 +4853,9 @@
               <a:buNone/>
             </a:pPr>
             <a:r>
-              <a:rPr lang="en-US" sz="1300" b="1" spc="200" kern="0" dirty="0">
-                <a:solidFill>
-                  <a:srgbClr val="0D9488"/>
+              <a:rPr lang="en-US" sz="1300" b="1" spc="300" kern="0" dirty="0">
+                <a:solidFill>
+                  <a:srgbClr val="C0562B"/>
                 </a:solidFill>
               </a:rPr>
               <a:t>BACKUP  ·  ROBUSTNESS</a:t>
@@ -4656,14 +4866,14 @@
       </p:sp>
       <p:sp>
         <p:nvSpPr>
-          <p:cNvPr id="3" name="Text 1"/>
-          <p:cNvSpPr/>
-          <p:nvPr/>
-        </p:nvSpPr>
-        <p:spPr>
-          <a:xfrm>
-            <a:off x="457200" y="585216"/>
-            <a:ext cx="11247120" cy="658368"/>
+          <p:cNvPr id="4" name="Text 2"/>
+          <p:cNvSpPr/>
+          <p:nvPr/>
+        </p:nvSpPr>
+        <p:spPr>
+          <a:xfrm>
+            <a:off x="438912" y="585216"/>
+            <a:ext cx="11338560" cy="731520"/>
           </a:xfrm>
           <a:prstGeom prst="rect">
             <a:avLst/>
@@ -4681,8 +4891,11 @@
             <a:r>
               <a:rPr lang="en-US" sz="2600" b="1" dirty="0">
                 <a:solidFill>
-                  <a:srgbClr val="1E293B"/>
-                </a:solidFill>
+                  <a:srgbClr val="1F3A3D"/>
+                </a:solidFill>
+                <a:latin typeface="Georgia" pitchFamily="34" charset="0"/>
+                <a:ea typeface="Georgia" pitchFamily="34" charset="-122"/>
+                <a:cs typeface="Georgia" pitchFamily="34" charset="-120"/>
               </a:rPr>
               <a:t>Sensitivity grid + equivalence bound</a:t>
             </a:r>
@@ -4692,7 +4905,7 @@
       </p:sp>
       <p:pic>
         <p:nvPicPr>
-          <p:cNvPr id="4" name="Image 0" descr="D:\CS\Genomics\Hackathon\presentation/assets/fig_tost.png">    </p:cNvPr>
+          <p:cNvPr id="5" name="Image 0" descr="D:\CS\Genomics\Hackathon\presentation/assets/fig_tost.png">    </p:cNvPr>
           <p:cNvPicPr>
             <a:picLocks noChangeAspect="1"/>
           </p:cNvPicPr>
@@ -4715,7 +4928,7 @@
       </p:pic>
       <p:sp>
         <p:nvSpPr>
-          <p:cNvPr id="5" name="Text 2"/>
+          <p:cNvPr id="6" name="Text 3"/>
           <p:cNvSpPr/>
           <p:nvPr/>
         </p:nvSpPr>
@@ -4740,7 +4953,7 @@
             <a:r>
               <a:rPr lang="en-US" sz="1200" i="1" dirty="0">
                 <a:solidFill>
-                  <a:srgbClr val="64748B"/>
+                  <a:srgbClr val="6B6256"/>
                 </a:solidFill>
               </a:rPr>
               <a:t>Figure 8.  Equivalence bound on the F4-vs-F1 pericentral-anchor change.</a:t>
@@ -4751,7 +4964,7 @@
       </p:sp>
       <p:sp>
         <p:nvSpPr>
-          <p:cNvPr id="6" name="Text 3"/>
+          <p:cNvPr id="7" name="Text 4"/>
           <p:cNvSpPr/>
           <p:nvPr/>
         </p:nvSpPr>
@@ -4821,7 +5034,7 @@
             <a:r>
               <a:rPr lang="en-US" sz="1600" i="1" dirty="0">
                 <a:solidFill>
-                  <a:srgbClr val="64748B"/>
+                  <a:srgbClr val="6B6256"/>
                 </a:solidFill>
               </a:rPr>
               <a:t>Bound: large shift (~20 pp) excluded; subtle drift ≤10 pp not (F4 n=4).</a:t>
@@ -4844,7 +5057,7 @@
     <p:bg>
       <p:bgPr>
         <a:solidFill>
-          <a:srgbClr val="FFFFFF"/>
+          <a:srgbClr val="F7F3EB"/>
         </a:solidFill>
       </p:bgPr>
     </p:bg>
@@ -4864,14 +5077,34 @@
       </p:grpSpPr>
       <p:sp>
         <p:nvSpPr>
-          <p:cNvPr id="2" name="Text 0"/>
-          <p:cNvSpPr/>
-          <p:nvPr/>
-        </p:nvSpPr>
-        <p:spPr>
-          <a:xfrm>
-            <a:off x="457200" y="274320"/>
-            <a:ext cx="11247120" cy="320040"/>
+          <p:cNvPr id="2" name="Shape 0"/>
+          <p:cNvSpPr/>
+          <p:nvPr/>
+        </p:nvSpPr>
+        <p:spPr>
+          <a:xfrm>
+            <a:off x="457200" y="310896"/>
+            <a:ext cx="146304" cy="237744"/>
+          </a:xfrm>
+          <a:prstGeom prst="rect">
+            <a:avLst/>
+          </a:prstGeom>
+          <a:solidFill>
+            <a:srgbClr val="C0562B"/>
+          </a:solidFill>
+          <a:ln/>
+        </p:spPr>
+      </p:sp>
+      <p:sp>
+        <p:nvSpPr>
+          <p:cNvPr id="3" name="Text 1"/>
+          <p:cNvSpPr/>
+          <p:nvPr/>
+        </p:nvSpPr>
+        <p:spPr>
+          <a:xfrm>
+            <a:off x="676656" y="274320"/>
+            <a:ext cx="10972800" cy="320040"/>
           </a:xfrm>
           <a:prstGeom prst="rect">
             <a:avLst/>
@@ -4887,9 +5120,9 @@
               <a:buNone/>
             </a:pPr>
             <a:r>
-              <a:rPr lang="en-US" sz="1300" b="1" spc="200" kern="0" dirty="0">
-                <a:solidFill>
-                  <a:srgbClr val="0D9488"/>
+              <a:rPr lang="en-US" sz="1300" b="1" spc="300" kern="0" dirty="0">
+                <a:solidFill>
+                  <a:srgbClr val="C0562B"/>
                 </a:solidFill>
               </a:rPr>
               <a:t>BACKUP  ·  METHODS</a:t>
@@ -4900,14 +5133,14 @@
       </p:sp>
       <p:sp>
         <p:nvSpPr>
-          <p:cNvPr id="3" name="Text 1"/>
-          <p:cNvSpPr/>
-          <p:nvPr/>
-        </p:nvSpPr>
-        <p:spPr>
-          <a:xfrm>
-            <a:off x="457200" y="585216"/>
-            <a:ext cx="11247120" cy="658368"/>
+          <p:cNvPr id="4" name="Text 2"/>
+          <p:cNvSpPr/>
+          <p:nvPr/>
+        </p:nvSpPr>
+        <p:spPr>
+          <a:xfrm>
+            <a:off x="438912" y="585216"/>
+            <a:ext cx="11338560" cy="731520"/>
           </a:xfrm>
           <a:prstGeom prst="rect">
             <a:avLst/>
@@ -4925,8 +5158,11 @@
             <a:r>
               <a:rPr lang="en-US" sz="2600" b="1" dirty="0">
                 <a:solidFill>
-                  <a:srgbClr val="1E293B"/>
-                </a:solidFill>
+                  <a:srgbClr val="1F3A3D"/>
+                </a:solidFill>
+                <a:latin typeface="Georgia" pitchFamily="34" charset="0"/>
+                <a:ea typeface="Georgia" pitchFamily="34" charset="-122"/>
+                <a:cs typeface="Georgia" pitchFamily="34" charset="-120"/>
               </a:rPr>
               <a:t>Why raw counts, why pseudobulk</a:t>
             </a:r>
@@ -4936,7 +5172,7 @@
       </p:sp>
       <p:sp>
         <p:nvSpPr>
-          <p:cNvPr id="4" name="Text 2"/>
+          <p:cNvPr id="5" name="Text 3"/>
           <p:cNvSpPr/>
           <p:nvPr/>
         </p:nvSpPr>
@@ -5042,7 +5278,7 @@
     <p:bg>
       <p:bgPr>
         <a:solidFill>
-          <a:srgbClr val="FFFFFF"/>
+          <a:srgbClr val="F7F3EB"/>
         </a:solidFill>
       </p:bgPr>
     </p:bg>
@@ -5062,14 +5298,34 @@
       </p:grpSpPr>
       <p:sp>
         <p:nvSpPr>
-          <p:cNvPr id="2" name="Text 0"/>
-          <p:cNvSpPr/>
-          <p:nvPr/>
-        </p:nvSpPr>
-        <p:spPr>
-          <a:xfrm>
-            <a:off x="457200" y="274320"/>
-            <a:ext cx="11247120" cy="320040"/>
+          <p:cNvPr id="2" name="Shape 0"/>
+          <p:cNvSpPr/>
+          <p:nvPr/>
+        </p:nvSpPr>
+        <p:spPr>
+          <a:xfrm>
+            <a:off x="457200" y="310896"/>
+            <a:ext cx="146304" cy="237744"/>
+          </a:xfrm>
+          <a:prstGeom prst="rect">
+            <a:avLst/>
+          </a:prstGeom>
+          <a:solidFill>
+            <a:srgbClr val="C0562B"/>
+          </a:solidFill>
+          <a:ln/>
+        </p:spPr>
+      </p:sp>
+      <p:sp>
+        <p:nvSpPr>
+          <p:cNvPr id="3" name="Text 1"/>
+          <p:cNvSpPr/>
+          <p:nvPr/>
+        </p:nvSpPr>
+        <p:spPr>
+          <a:xfrm>
+            <a:off x="676656" y="274320"/>
+            <a:ext cx="10972800" cy="320040"/>
           </a:xfrm>
           <a:prstGeom prst="rect">
             <a:avLst/>
@@ -5085,9 +5341,9 @@
               <a:buNone/>
             </a:pPr>
             <a:r>
-              <a:rPr lang="en-US" sz="1300" b="1" spc="200" kern="0" dirty="0">
-                <a:solidFill>
-                  <a:srgbClr val="0D9488"/>
+              <a:rPr lang="en-US" sz="1300" b="1" spc="300" kern="0" dirty="0">
+                <a:solidFill>
+                  <a:srgbClr val="C0562B"/>
                 </a:solidFill>
               </a:rPr>
               <a:t>BACKUP  ·  AMBIENT</a:t>
@@ -5098,14 +5354,14 @@
       </p:sp>
       <p:sp>
         <p:nvSpPr>
-          <p:cNvPr id="3" name="Text 1"/>
-          <p:cNvSpPr/>
-          <p:nvPr/>
-        </p:nvSpPr>
-        <p:spPr>
-          <a:xfrm>
-            <a:off x="457200" y="585216"/>
-            <a:ext cx="11247120" cy="658368"/>
+          <p:cNvPr id="4" name="Text 2"/>
+          <p:cNvSpPr/>
+          <p:nvPr/>
+        </p:nvSpPr>
+        <p:spPr>
+          <a:xfrm>
+            <a:off x="438912" y="585216"/>
+            <a:ext cx="11338560" cy="731520"/>
           </a:xfrm>
           <a:prstGeom prst="rect">
             <a:avLst/>
@@ -5123,8 +5379,11 @@
             <a:r>
               <a:rPr lang="en-US" sz="2600" b="1" dirty="0">
                 <a:solidFill>
-                  <a:srgbClr val="1E293B"/>
-                </a:solidFill>
+                  <a:srgbClr val="1F3A3D"/>
+                </a:solidFill>
+                <a:latin typeface="Georgia" pitchFamily="34" charset="0"/>
+                <a:ea typeface="Georgia" pitchFamily="34" charset="-122"/>
+                <a:cs typeface="Georgia" pitchFamily="34" charset="-120"/>
               </a:rPr>
               <a:t>Does decontX prove contamination? No</a:t>
             </a:r>
@@ -5134,7 +5393,7 @@
       </p:sp>
       <p:sp>
         <p:nvSpPr>
-          <p:cNvPr id="4" name="Text 2"/>
+          <p:cNvPr id="5" name="Text 3"/>
           <p:cNvSpPr/>
           <p:nvPr/>
         </p:nvSpPr>
@@ -5240,7 +5499,7 @@
     <p:bg>
       <p:bgPr>
         <a:solidFill>
-          <a:srgbClr val="FFFFFF"/>
+          <a:srgbClr val="F7F3EB"/>
         </a:solidFill>
       </p:bgPr>
     </p:bg>
@@ -5260,14 +5519,34 @@
       </p:grpSpPr>
       <p:sp>
         <p:nvSpPr>
-          <p:cNvPr id="2" name="Text 0"/>
-          <p:cNvSpPr/>
-          <p:nvPr/>
-        </p:nvSpPr>
-        <p:spPr>
-          <a:xfrm>
-            <a:off x="457200" y="274320"/>
-            <a:ext cx="11247120" cy="320040"/>
+          <p:cNvPr id="2" name="Shape 0"/>
+          <p:cNvSpPr/>
+          <p:nvPr/>
+        </p:nvSpPr>
+        <p:spPr>
+          <a:xfrm>
+            <a:off x="457200" y="310896"/>
+            <a:ext cx="146304" cy="237744"/>
+          </a:xfrm>
+          <a:prstGeom prst="rect">
+            <a:avLst/>
+          </a:prstGeom>
+          <a:solidFill>
+            <a:srgbClr val="C0562B"/>
+          </a:solidFill>
+          <a:ln/>
+        </p:spPr>
+      </p:sp>
+      <p:sp>
+        <p:nvSpPr>
+          <p:cNvPr id="3" name="Text 1"/>
+          <p:cNvSpPr/>
+          <p:nvPr/>
+        </p:nvSpPr>
+        <p:spPr>
+          <a:xfrm>
+            <a:off x="676656" y="274320"/>
+            <a:ext cx="10972800" cy="320040"/>
           </a:xfrm>
           <a:prstGeom prst="rect">
             <a:avLst/>
@@ -5283,9 +5562,9 @@
               <a:buNone/>
             </a:pPr>
             <a:r>
-              <a:rPr lang="en-US" sz="1300" b="1" spc="200" kern="0" dirty="0">
-                <a:solidFill>
-                  <a:srgbClr val="0D9488"/>
+              <a:rPr lang="en-US" sz="1300" b="1" spc="300" kern="0" dirty="0">
+                <a:solidFill>
+                  <a:srgbClr val="C0562B"/>
                 </a:solidFill>
               </a:rPr>
               <a:t>BACKUP  ·  NEXT</a:t>
@@ -5296,14 +5575,14 @@
       </p:sp>
       <p:sp>
         <p:nvSpPr>
-          <p:cNvPr id="3" name="Text 1"/>
-          <p:cNvSpPr/>
-          <p:nvPr/>
-        </p:nvSpPr>
-        <p:spPr>
-          <a:xfrm>
-            <a:off x="457200" y="585216"/>
-            <a:ext cx="11247120" cy="658368"/>
+          <p:cNvPr id="4" name="Text 2"/>
+          <p:cNvSpPr/>
+          <p:nvPr/>
+        </p:nvSpPr>
+        <p:spPr>
+          <a:xfrm>
+            <a:off x="438912" y="585216"/>
+            <a:ext cx="11338560" cy="731520"/>
           </a:xfrm>
           <a:prstGeom prst="rect">
             <a:avLst/>
@@ -5321,8 +5600,11 @@
             <a:r>
               <a:rPr lang="en-US" sz="2600" b="1" dirty="0">
                 <a:solidFill>
-                  <a:srgbClr val="1E293B"/>
-                </a:solidFill>
+                  <a:srgbClr val="1F3A3D"/>
+                </a:solidFill>
+                <a:latin typeface="Georgia" pitchFamily="34" charset="0"/>
+                <a:ea typeface="Georgia" pitchFamily="34" charset="-122"/>
+                <a:cs typeface="Georgia" pitchFamily="34" charset="-120"/>
               </a:rPr>
               <a:t>The one analysis still owed: gene-set testing</a:t>
             </a:r>
@@ -5332,7 +5614,7 @@
       </p:sp>
       <p:sp>
         <p:nvSpPr>
-          <p:cNvPr id="4" name="Text 2"/>
+          <p:cNvPr id="5" name="Text 3"/>
           <p:cNvSpPr/>
           <p:nvPr/>
         </p:nvSpPr>
@@ -5438,7 +5720,7 @@
     <p:bg>
       <p:bgPr>
         <a:solidFill>
-          <a:srgbClr val="FFFFFF"/>
+          <a:srgbClr val="F7F3EB"/>
         </a:solidFill>
       </p:bgPr>
     </p:bg>
@@ -5458,14 +5740,34 @@
       </p:grpSpPr>
       <p:sp>
         <p:nvSpPr>
-          <p:cNvPr id="2" name="Text 0"/>
-          <p:cNvSpPr/>
-          <p:nvPr/>
-        </p:nvSpPr>
-        <p:spPr>
-          <a:xfrm>
-            <a:off x="457200" y="274320"/>
-            <a:ext cx="11247120" cy="320040"/>
+          <p:cNvPr id="2" name="Shape 0"/>
+          <p:cNvSpPr/>
+          <p:nvPr/>
+        </p:nvSpPr>
+        <p:spPr>
+          <a:xfrm>
+            <a:off x="457200" y="310896"/>
+            <a:ext cx="146304" cy="237744"/>
+          </a:xfrm>
+          <a:prstGeom prst="rect">
+            <a:avLst/>
+          </a:prstGeom>
+          <a:solidFill>
+            <a:srgbClr val="C0562B"/>
+          </a:solidFill>
+          <a:ln/>
+        </p:spPr>
+      </p:sp>
+      <p:sp>
+        <p:nvSpPr>
+          <p:cNvPr id="3" name="Text 1"/>
+          <p:cNvSpPr/>
+          <p:nvPr/>
+        </p:nvSpPr>
+        <p:spPr>
+          <a:xfrm>
+            <a:off x="676656" y="274320"/>
+            <a:ext cx="10972800" cy="320040"/>
           </a:xfrm>
           <a:prstGeom prst="rect">
             <a:avLst/>
@@ -5481,9 +5783,9 @@
               <a:buNone/>
             </a:pPr>
             <a:r>
-              <a:rPr lang="en-US" sz="1300" b="1" spc="200" kern="0" dirty="0">
-                <a:solidFill>
-                  <a:srgbClr val="0F766E"/>
+              <a:rPr lang="en-US" sz="1300" b="1" spc="300" kern="0" dirty="0">
+                <a:solidFill>
+                  <a:srgbClr val="C0562B"/>
                 </a:solidFill>
               </a:rPr>
               <a:t>BACKGROUND</a:t>
@@ -5494,14 +5796,14 @@
       </p:sp>
       <p:sp>
         <p:nvSpPr>
-          <p:cNvPr id="3" name="Text 1"/>
-          <p:cNvSpPr/>
-          <p:nvPr/>
-        </p:nvSpPr>
-        <p:spPr>
-          <a:xfrm>
-            <a:off x="457200" y="585216"/>
-            <a:ext cx="11247120" cy="658368"/>
+          <p:cNvPr id="4" name="Text 2"/>
+          <p:cNvSpPr/>
+          <p:nvPr/>
+        </p:nvSpPr>
+        <p:spPr>
+          <a:xfrm>
+            <a:off x="438912" y="585216"/>
+            <a:ext cx="11338560" cy="777240"/>
           </a:xfrm>
           <a:prstGeom prst="rect">
             <a:avLst/>
@@ -5517,20 +5819,23 @@
               <a:buNone/>
             </a:pPr>
             <a:r>
-              <a:rPr lang="en-US" sz="2700" b="1" dirty="0">
-                <a:solidFill>
-                  <a:srgbClr val="1E293B"/>
-                </a:solidFill>
+              <a:rPr lang="en-US" sz="2800" b="1" dirty="0">
+                <a:solidFill>
+                  <a:srgbClr val="1F3A3D"/>
+                </a:solidFill>
+                <a:latin typeface="Georgia" pitchFamily="34" charset="0"/>
+                <a:ea typeface="Georgia" pitchFamily="34" charset="-122"/>
+                <a:cs typeface="Georgia" pitchFamily="34" charset="-120"/>
               </a:rPr>
               <a:t>Hepatocytes are transcriptionally zonated</a:t>
             </a:r>
-            <a:endParaRPr lang="en-US" sz="2700" dirty="0"/>
-          </a:p>
-        </p:txBody>
-      </p:sp>
-      <p:sp>
-        <p:nvSpPr>
-          <p:cNvPr id="4" name="Shape 2"/>
+            <a:endParaRPr lang="en-US" sz="2800" dirty="0"/>
+          </a:p>
+        </p:txBody>
+      </p:sp>
+      <p:sp>
+        <p:nvSpPr>
+          <p:cNvPr id="5" name="Shape 3"/>
           <p:cNvSpPr/>
           <p:nvPr/>
         </p:nvSpPr>
@@ -5552,7 +5857,7 @@
       </p:sp>
       <p:sp>
         <p:nvSpPr>
-          <p:cNvPr id="5" name="Shape 3"/>
+          <p:cNvPr id="6" name="Shape 4"/>
           <p:cNvSpPr/>
           <p:nvPr/>
         </p:nvSpPr>
@@ -5574,7 +5879,7 @@
       </p:sp>
       <p:sp>
         <p:nvSpPr>
-          <p:cNvPr id="6" name="Text 4"/>
+          <p:cNvPr id="7" name="Text 5"/>
           <p:cNvSpPr/>
           <p:nvPr/>
         </p:nvSpPr>
@@ -5610,7 +5915,7 @@
       </p:sp>
       <p:sp>
         <p:nvSpPr>
-          <p:cNvPr id="7" name="Text 5"/>
+          <p:cNvPr id="8" name="Text 6"/>
           <p:cNvSpPr/>
           <p:nvPr/>
         </p:nvSpPr>
@@ -5646,7 +5951,7 @@
       </p:sp>
       <p:sp>
         <p:nvSpPr>
-          <p:cNvPr id="8" name="Text 6"/>
+          <p:cNvPr id="9" name="Text 7"/>
           <p:cNvSpPr/>
           <p:nvPr/>
         </p:nvSpPr>
@@ -5671,7 +5976,7 @@
             <a:r>
               <a:rPr lang="en-US" sz="1250" dirty="0">
                 <a:solidFill>
-                  <a:srgbClr val="64748B"/>
+                  <a:srgbClr val="6B6256"/>
                 </a:solidFill>
               </a:rPr>
               <a:t>Central vein</a:t>
@@ -5682,7 +5987,7 @@
       </p:sp>
       <p:sp>
         <p:nvSpPr>
-          <p:cNvPr id="9" name="Text 7"/>
+          <p:cNvPr id="10" name="Text 8"/>
           <p:cNvSpPr/>
           <p:nvPr/>
         </p:nvSpPr>
@@ -5707,7 +6012,7 @@
             <a:r>
               <a:rPr lang="en-US" sz="1250" dirty="0">
                 <a:solidFill>
-                  <a:srgbClr val="64748B"/>
+                  <a:srgbClr val="6B6256"/>
                 </a:solidFill>
               </a:rPr>
               <a:t>Portal tract</a:t>
@@ -5718,7 +6023,7 @@
       </p:sp>
       <p:sp>
         <p:nvSpPr>
-          <p:cNvPr id="10" name="Text 8"/>
+          <p:cNvPr id="11" name="Text 9"/>
           <p:cNvSpPr/>
           <p:nvPr/>
         </p:nvSpPr>
@@ -5765,7 +6070,7 @@
       </p:sp>
       <p:sp>
         <p:nvSpPr>
-          <p:cNvPr id="11" name="Text 9"/>
+          <p:cNvPr id="12" name="Text 10"/>
           <p:cNvSpPr/>
           <p:nvPr/>
         </p:nvSpPr>
@@ -5812,7 +6117,7 @@
       </p:sp>
       <p:sp>
         <p:nvSpPr>
-          <p:cNvPr id="12" name="Shape 10"/>
+          <p:cNvPr id="13" name="Shape 11"/>
           <p:cNvSpPr/>
           <p:nvPr/>
         </p:nvSpPr>
@@ -5841,7 +6146,7 @@
       </p:sp>
       <p:sp>
         <p:nvSpPr>
-          <p:cNvPr id="13" name="Text 11"/>
+          <p:cNvPr id="14" name="Text 12"/>
           <p:cNvSpPr/>
           <p:nvPr/>
         </p:nvSpPr>
@@ -5877,7 +6182,7 @@
       </p:sp>
       <p:sp>
         <p:nvSpPr>
-          <p:cNvPr id="14" name="Text 12"/>
+          <p:cNvPr id="15" name="Text 13"/>
           <p:cNvSpPr/>
           <p:nvPr/>
         </p:nvSpPr>
@@ -5924,7 +6229,7 @@
       </p:sp>
       <p:sp>
         <p:nvSpPr>
-          <p:cNvPr id="15" name="Text 13"/>
+          <p:cNvPr id="16" name="Text 14"/>
           <p:cNvSpPr/>
           <p:nvPr/>
         </p:nvSpPr>
@@ -5949,7 +6254,7 @@
             <a:r>
               <a:rPr lang="en-US" sz="1050" dirty="0">
                 <a:solidFill>
-                  <a:srgbClr val="64748B"/>
+                  <a:srgbClr val="6B6256"/>
                 </a:solidFill>
               </a:rPr>
               <a:t>Computational Genomics 76553  ·  HUJI  ·  MASLD snRNA-seq hackathon</a:t>
@@ -5960,7 +6265,7 @@
       </p:sp>
       <p:sp>
         <p:nvSpPr>
-          <p:cNvPr id="16" name="Text 14"/>
+          <p:cNvPr id="17" name="Text 15"/>
           <p:cNvSpPr/>
           <p:nvPr/>
         </p:nvSpPr>
@@ -5985,7 +6290,7 @@
             <a:r>
               <a:rPr lang="en-US" sz="1050" dirty="0">
                 <a:solidFill>
-                  <a:srgbClr val="64748B"/>
+                  <a:srgbClr val="6B6256"/>
                 </a:solidFill>
               </a:rPr>
               <a:t>2</a:t>
@@ -6008,7 +6313,7 @@
     <p:bg>
       <p:bgPr>
         <a:solidFill>
-          <a:srgbClr val="FFFFFF"/>
+          <a:srgbClr val="F7F3EB"/>
         </a:solidFill>
       </p:bgPr>
     </p:bg>
@@ -6028,14 +6333,34 @@
       </p:grpSpPr>
       <p:sp>
         <p:nvSpPr>
-          <p:cNvPr id="2" name="Text 0"/>
-          <p:cNvSpPr/>
-          <p:nvPr/>
-        </p:nvSpPr>
-        <p:spPr>
-          <a:xfrm>
-            <a:off x="457200" y="274320"/>
-            <a:ext cx="11247120" cy="320040"/>
+          <p:cNvPr id="2" name="Shape 0"/>
+          <p:cNvSpPr/>
+          <p:nvPr/>
+        </p:nvSpPr>
+        <p:spPr>
+          <a:xfrm>
+            <a:off x="457200" y="310896"/>
+            <a:ext cx="146304" cy="237744"/>
+          </a:xfrm>
+          <a:prstGeom prst="rect">
+            <a:avLst/>
+          </a:prstGeom>
+          <a:solidFill>
+            <a:srgbClr val="C0562B"/>
+          </a:solidFill>
+          <a:ln/>
+        </p:spPr>
+      </p:sp>
+      <p:sp>
+        <p:nvSpPr>
+          <p:cNvPr id="3" name="Text 1"/>
+          <p:cNvSpPr/>
+          <p:nvPr/>
+        </p:nvSpPr>
+        <p:spPr>
+          <a:xfrm>
+            <a:off x="676656" y="274320"/>
+            <a:ext cx="10972800" cy="320040"/>
           </a:xfrm>
           <a:prstGeom prst="rect">
             <a:avLst/>
@@ -6051,9 +6376,9 @@
               <a:buNone/>
             </a:pPr>
             <a:r>
-              <a:rPr lang="en-US" sz="1300" b="1" spc="200" kern="0" dirty="0">
-                <a:solidFill>
-                  <a:srgbClr val="0F766E"/>
+              <a:rPr lang="en-US" sz="1300" b="1" spc="300" kern="0" dirty="0">
+                <a:solidFill>
+                  <a:srgbClr val="C0562B"/>
                 </a:solidFill>
               </a:rPr>
               <a:t>THE QUESTION</a:t>
@@ -6064,14 +6389,14 @@
       </p:sp>
       <p:sp>
         <p:nvSpPr>
-          <p:cNvPr id="3" name="Text 1"/>
-          <p:cNvSpPr/>
-          <p:nvPr/>
-        </p:nvSpPr>
-        <p:spPr>
-          <a:xfrm>
-            <a:off x="457200" y="585216"/>
-            <a:ext cx="11247120" cy="658368"/>
+          <p:cNvPr id="4" name="Text 2"/>
+          <p:cNvSpPr/>
+          <p:nvPr/>
+        </p:nvSpPr>
+        <p:spPr>
+          <a:xfrm>
+            <a:off x="438912" y="585216"/>
+            <a:ext cx="11338560" cy="777240"/>
           </a:xfrm>
           <a:prstGeom prst="rect">
             <a:avLst/>
@@ -6087,20 +6412,23 @@
               <a:buNone/>
             </a:pPr>
             <a:r>
-              <a:rPr lang="en-US" sz="2700" b="1" dirty="0">
-                <a:solidFill>
-                  <a:srgbClr val="1E293B"/>
-                </a:solidFill>
+              <a:rPr lang="en-US" sz="2800" b="1" dirty="0">
+                <a:solidFill>
+                  <a:srgbClr val="1F3A3D"/>
+                </a:solidFill>
+                <a:latin typeface="Georgia" pitchFamily="34" charset="0"/>
+                <a:ea typeface="Georgia" pitchFamily="34" charset="-122"/>
+                <a:cs typeface="Georgia" pitchFamily="34" charset="-120"/>
               </a:rPr>
               <a:t>Disease — or how the tissue was taken?</a:t>
             </a:r>
-            <a:endParaRPr lang="en-US" sz="2700" dirty="0"/>
-          </a:p>
-        </p:txBody>
-      </p:sp>
-      <p:sp>
-        <p:nvSpPr>
-          <p:cNvPr id="4" name="Shape 2"/>
+            <a:endParaRPr lang="en-US" sz="2800" dirty="0"/>
+          </a:p>
+        </p:txBody>
+      </p:sp>
+      <p:sp>
+        <p:nvSpPr>
+          <p:cNvPr id="5" name="Shape 3"/>
           <p:cNvSpPr/>
           <p:nvPr/>
         </p:nvSpPr>
@@ -6115,14 +6443,14 @@
             </a:avLst>
           </a:prstGeom>
           <a:solidFill>
-            <a:srgbClr val="F1F5F9"/>
+            <a:srgbClr val="ECE6DA"/>
           </a:solidFill>
           <a:ln/>
         </p:spPr>
       </p:sp>
       <p:sp>
         <p:nvSpPr>
-          <p:cNvPr id="5" name="Text 3"/>
+          <p:cNvPr id="6" name="Text 4"/>
           <p:cNvSpPr/>
           <p:nvPr/>
         </p:nvSpPr>
@@ -6147,7 +6475,7 @@
             <a:r>
               <a:rPr lang="en-US" sz="1300" b="1" spc="200" kern="0" dirty="0">
                 <a:solidFill>
-                  <a:srgbClr val="0F766E"/>
+                  <a:srgbClr val="C0562B"/>
                 </a:solidFill>
               </a:rPr>
               <a:t>Our research question</a:t>
@@ -6158,7 +6486,7 @@
       </p:sp>
       <p:sp>
         <p:nvSpPr>
-          <p:cNvPr id="6" name="Text 4"/>
+          <p:cNvPr id="7" name="Text 5"/>
           <p:cNvSpPr/>
           <p:nvPr/>
         </p:nvSpPr>
@@ -6194,7 +6522,7 @@
       </p:sp>
       <p:sp>
         <p:nvSpPr>
-          <p:cNvPr id="7" name="Text 5"/>
+          <p:cNvPr id="8" name="Text 6"/>
           <p:cNvSpPr/>
           <p:nvPr/>
         </p:nvSpPr>
@@ -6219,7 +6547,7 @@
             <a:r>
               <a:rPr lang="en-US" sz="1300" b="1" spc="200" kern="0" dirty="0">
                 <a:solidFill>
-                  <a:srgbClr val="0F766E"/>
+                  <a:srgbClr val="C0562B"/>
                 </a:solidFill>
               </a:rPr>
               <a:t>The pivot — how we test it</a:t>
@@ -6230,7 +6558,7 @@
       </p:sp>
       <p:sp>
         <p:nvSpPr>
-          <p:cNvPr id="8" name="Text 6"/>
+          <p:cNvPr id="9" name="Text 7"/>
           <p:cNvSpPr/>
           <p:nvPr/>
         </p:nvSpPr>
@@ -6306,7 +6634,7 @@
       </p:sp>
       <p:sp>
         <p:nvSpPr>
-          <p:cNvPr id="9" name="Text 7"/>
+          <p:cNvPr id="10" name="Text 8"/>
           <p:cNvSpPr/>
           <p:nvPr/>
         </p:nvSpPr>
@@ -6331,7 +6659,7 @@
             <a:r>
               <a:rPr lang="en-US" sz="1050" dirty="0">
                 <a:solidFill>
-                  <a:srgbClr val="64748B"/>
+                  <a:srgbClr val="6B6256"/>
                 </a:solidFill>
               </a:rPr>
               <a:t>Computational Genomics 76553  ·  HUJI  ·  MASLD snRNA-seq hackathon</a:t>
@@ -6342,7 +6670,7 @@
       </p:sp>
       <p:sp>
         <p:nvSpPr>
-          <p:cNvPr id="10" name="Text 8"/>
+          <p:cNvPr id="11" name="Text 9"/>
           <p:cNvSpPr/>
           <p:nvPr/>
         </p:nvSpPr>
@@ -6367,7 +6695,7 @@
             <a:r>
               <a:rPr lang="en-US" sz="1050" dirty="0">
                 <a:solidFill>
-                  <a:srgbClr val="64748B"/>
+                  <a:srgbClr val="6B6256"/>
                 </a:solidFill>
               </a:rPr>
               <a:t>3</a:t>
@@ -6390,7 +6718,7 @@
     <p:bg>
       <p:bgPr>
         <a:solidFill>
-          <a:srgbClr val="FFFFFF"/>
+          <a:srgbClr val="F7F3EB"/>
         </a:solidFill>
       </p:bgPr>
     </p:bg>
@@ -6410,14 +6738,34 @@
       </p:grpSpPr>
       <p:sp>
         <p:nvSpPr>
-          <p:cNvPr id="2" name="Text 0"/>
-          <p:cNvSpPr/>
-          <p:nvPr/>
-        </p:nvSpPr>
-        <p:spPr>
-          <a:xfrm>
-            <a:off x="457200" y="274320"/>
-            <a:ext cx="11247120" cy="320040"/>
+          <p:cNvPr id="2" name="Shape 0"/>
+          <p:cNvSpPr/>
+          <p:nvPr/>
+        </p:nvSpPr>
+        <p:spPr>
+          <a:xfrm>
+            <a:off x="457200" y="310896"/>
+            <a:ext cx="146304" cy="237744"/>
+          </a:xfrm>
+          <a:prstGeom prst="rect">
+            <a:avLst/>
+          </a:prstGeom>
+          <a:solidFill>
+            <a:srgbClr val="C0562B"/>
+          </a:solidFill>
+          <a:ln/>
+        </p:spPr>
+      </p:sp>
+      <p:sp>
+        <p:nvSpPr>
+          <p:cNvPr id="3" name="Text 1"/>
+          <p:cNvSpPr/>
+          <p:nvPr/>
+        </p:nvSpPr>
+        <p:spPr>
+          <a:xfrm>
+            <a:off x="676656" y="274320"/>
+            <a:ext cx="10972800" cy="320040"/>
           </a:xfrm>
           <a:prstGeom prst="rect">
             <a:avLst/>
@@ -6433,9 +6781,9 @@
               <a:buNone/>
             </a:pPr>
             <a:r>
-              <a:rPr lang="en-US" sz="1300" b="1" spc="200" kern="0" dirty="0">
-                <a:solidFill>
-                  <a:srgbClr val="0F766E"/>
+              <a:rPr lang="en-US" sz="1300" b="1" spc="300" kern="0" dirty="0">
+                <a:solidFill>
+                  <a:srgbClr val="C0562B"/>
                 </a:solidFill>
               </a:rPr>
               <a:t>WHAT WE TEST</a:t>
@@ -6446,14 +6794,14 @@
       </p:sp>
       <p:sp>
         <p:nvSpPr>
-          <p:cNvPr id="3" name="Text 1"/>
-          <p:cNvSpPr/>
-          <p:nvPr/>
-        </p:nvSpPr>
-        <p:spPr>
-          <a:xfrm>
-            <a:off x="457200" y="585216"/>
-            <a:ext cx="11247120" cy="658368"/>
+          <p:cNvPr id="4" name="Text 2"/>
+          <p:cNvSpPr/>
+          <p:nvPr/>
+        </p:nvSpPr>
+        <p:spPr>
+          <a:xfrm>
+            <a:off x="438912" y="585216"/>
+            <a:ext cx="11338560" cy="777240"/>
           </a:xfrm>
           <a:prstGeom prst="rect">
             <a:avLst/>
@@ -6469,20 +6817,23 @@
               <a:buNone/>
             </a:pPr>
             <a:r>
-              <a:rPr lang="en-US" sz="2700" b="1" dirty="0">
-                <a:solidFill>
-                  <a:srgbClr val="1E293B"/>
-                </a:solidFill>
+              <a:rPr lang="en-US" sz="2800" b="1" dirty="0">
+                <a:solidFill>
+                  <a:srgbClr val="1F3A3D"/>
+                </a:solidFill>
+                <a:latin typeface="Georgia" pitchFamily="34" charset="0"/>
+                <a:ea typeface="Georgia" pitchFamily="34" charset="-122"/>
+                <a:cs typeface="Georgia" pitchFamily="34" charset="-120"/>
               </a:rPr>
               <a:t>Zonation loss is not one mechanism</a:t>
             </a:r>
-            <a:endParaRPr lang="en-US" sz="2700" dirty="0"/>
-          </a:p>
-        </p:txBody>
-      </p:sp>
-      <p:sp>
-        <p:nvSpPr>
-          <p:cNvPr id="4" name="Text 2"/>
+            <a:endParaRPr lang="en-US" sz="2800" dirty="0"/>
+          </a:p>
+        </p:txBody>
+      </p:sp>
+      <p:sp>
+        <p:nvSpPr>
+          <p:cNvPr id="5" name="Text 3"/>
           <p:cNvSpPr/>
           <p:nvPr/>
         </p:nvSpPr>
@@ -6518,7 +6869,7 @@
       </p:sp>
       <p:sp>
         <p:nvSpPr>
-          <p:cNvPr id="5" name="Shape 3"/>
+          <p:cNvPr id="6" name="Shape 4"/>
           <p:cNvSpPr/>
           <p:nvPr/>
         </p:nvSpPr>
@@ -6547,7 +6898,7 @@
       </p:sp>
       <p:sp>
         <p:nvSpPr>
-          <p:cNvPr id="6" name="Text 4"/>
+          <p:cNvPr id="7" name="Text 5"/>
           <p:cNvSpPr/>
           <p:nvPr/>
         </p:nvSpPr>
@@ -6597,7 +6948,7 @@
       </p:sp>
       <p:sp>
         <p:nvSpPr>
-          <p:cNvPr id="7" name="Shape 5"/>
+          <p:cNvPr id="8" name="Shape 6"/>
           <p:cNvSpPr/>
           <p:nvPr/>
         </p:nvSpPr>
@@ -6626,7 +6977,7 @@
       </p:sp>
       <p:sp>
         <p:nvSpPr>
-          <p:cNvPr id="8" name="Text 6"/>
+          <p:cNvPr id="9" name="Text 7"/>
           <p:cNvSpPr/>
           <p:nvPr/>
         </p:nvSpPr>
@@ -6676,7 +7027,7 @@
       </p:sp>
       <p:sp>
         <p:nvSpPr>
-          <p:cNvPr id="9" name="Shape 7"/>
+          <p:cNvPr id="10" name="Shape 8"/>
           <p:cNvSpPr/>
           <p:nvPr/>
         </p:nvSpPr>
@@ -6705,7 +7056,7 @@
       </p:sp>
       <p:sp>
         <p:nvSpPr>
-          <p:cNvPr id="10" name="Text 8"/>
+          <p:cNvPr id="11" name="Text 9"/>
           <p:cNvSpPr/>
           <p:nvPr/>
         </p:nvSpPr>
@@ -6755,7 +7106,7 @@
       </p:sp>
       <p:sp>
         <p:nvSpPr>
-          <p:cNvPr id="11" name="Shape 9"/>
+          <p:cNvPr id="12" name="Shape 10"/>
           <p:cNvSpPr/>
           <p:nvPr/>
         </p:nvSpPr>
@@ -6784,7 +7135,7 @@
       </p:sp>
       <p:sp>
         <p:nvSpPr>
-          <p:cNvPr id="12" name="Text 10"/>
+          <p:cNvPr id="13" name="Text 11"/>
           <p:cNvSpPr/>
           <p:nvPr/>
         </p:nvSpPr>
@@ -6834,7 +7185,7 @@
       </p:sp>
       <p:sp>
         <p:nvSpPr>
-          <p:cNvPr id="13" name="Text 11"/>
+          <p:cNvPr id="14" name="Text 12"/>
           <p:cNvSpPr/>
           <p:nvPr/>
         </p:nvSpPr>
@@ -6892,7 +7243,7 @@
       </p:sp>
       <p:sp>
         <p:nvSpPr>
-          <p:cNvPr id="14" name="Text 12"/>
+          <p:cNvPr id="15" name="Text 13"/>
           <p:cNvSpPr/>
           <p:nvPr/>
         </p:nvSpPr>
@@ -6917,7 +7268,7 @@
             <a:r>
               <a:rPr lang="en-US" sz="1500" i="1" dirty="0">
                 <a:solidFill>
-                  <a:srgbClr val="64748B"/>
+                  <a:srgbClr val="6B6256"/>
                 </a:solidFill>
               </a:rPr>
               <a:t>A single anti-correlation or UMAP impression conflates these — which is exactly the trap we avoid with absolute counts.</a:t>
@@ -6928,7 +7279,7 @@
       </p:sp>
       <p:sp>
         <p:nvSpPr>
-          <p:cNvPr id="15" name="Text 13"/>
+          <p:cNvPr id="16" name="Text 14"/>
           <p:cNvSpPr/>
           <p:nvPr/>
         </p:nvSpPr>
@@ -6953,7 +7304,7 @@
             <a:r>
               <a:rPr lang="en-US" sz="1050" dirty="0">
                 <a:solidFill>
-                  <a:srgbClr val="64748B"/>
+                  <a:srgbClr val="6B6256"/>
                 </a:solidFill>
               </a:rPr>
               <a:t>Computational Genomics 76553  ·  HUJI  ·  MASLD snRNA-seq hackathon</a:t>
@@ -6964,7 +7315,7 @@
       </p:sp>
       <p:sp>
         <p:nvSpPr>
-          <p:cNvPr id="16" name="Text 14"/>
+          <p:cNvPr id="17" name="Text 15"/>
           <p:cNvSpPr/>
           <p:nvPr/>
         </p:nvSpPr>
@@ -6989,7 +7340,7 @@
             <a:r>
               <a:rPr lang="en-US" sz="1050" dirty="0">
                 <a:solidFill>
-                  <a:srgbClr val="64748B"/>
+                  <a:srgbClr val="6B6256"/>
                 </a:solidFill>
               </a:rPr>
               <a:t>4</a:t>
@@ -7012,7 +7363,7 @@
     <p:bg>
       <p:bgPr>
         <a:solidFill>
-          <a:srgbClr val="FFFFFF"/>
+          <a:srgbClr val="F7F3EB"/>
         </a:solidFill>
       </p:bgPr>
     </p:bg>
@@ -7032,14 +7383,34 @@
       </p:grpSpPr>
       <p:sp>
         <p:nvSpPr>
-          <p:cNvPr id="2" name="Text 0"/>
-          <p:cNvSpPr/>
-          <p:nvPr/>
-        </p:nvSpPr>
-        <p:spPr>
-          <a:xfrm>
-            <a:off x="457200" y="274320"/>
-            <a:ext cx="11247120" cy="320040"/>
+          <p:cNvPr id="2" name="Shape 0"/>
+          <p:cNvSpPr/>
+          <p:nvPr/>
+        </p:nvSpPr>
+        <p:spPr>
+          <a:xfrm>
+            <a:off x="457200" y="310896"/>
+            <a:ext cx="146304" cy="237744"/>
+          </a:xfrm>
+          <a:prstGeom prst="rect">
+            <a:avLst/>
+          </a:prstGeom>
+          <a:solidFill>
+            <a:srgbClr val="C0562B"/>
+          </a:solidFill>
+          <a:ln/>
+        </p:spPr>
+      </p:sp>
+      <p:sp>
+        <p:nvSpPr>
+          <p:cNvPr id="3" name="Text 1"/>
+          <p:cNvSpPr/>
+          <p:nvPr/>
+        </p:nvSpPr>
+        <p:spPr>
+          <a:xfrm>
+            <a:off x="676656" y="274320"/>
+            <a:ext cx="10972800" cy="320040"/>
           </a:xfrm>
           <a:prstGeom prst="rect">
             <a:avLst/>
@@ -7055,9 +7426,9 @@
               <a:buNone/>
             </a:pPr>
             <a:r>
-              <a:rPr lang="en-US" sz="1300" b="1" spc="200" kern="0" dirty="0">
-                <a:solidFill>
-                  <a:srgbClr val="0F766E"/>
+              <a:rPr lang="en-US" sz="1300" b="1" spc="300" kern="0" dirty="0">
+                <a:solidFill>
+                  <a:srgbClr val="C0562B"/>
                 </a:solidFill>
               </a:rPr>
               <a:t>THE CONFOUND</a:t>
@@ -7068,14 +7439,14 @@
       </p:sp>
       <p:sp>
         <p:nvSpPr>
-          <p:cNvPr id="3" name="Text 1"/>
-          <p:cNvSpPr/>
-          <p:nvPr/>
-        </p:nvSpPr>
-        <p:spPr>
-          <a:xfrm>
-            <a:off x="457200" y="585216"/>
-            <a:ext cx="11247120" cy="658368"/>
+          <p:cNvPr id="4" name="Text 2"/>
+          <p:cNvSpPr/>
+          <p:nvPr/>
+        </p:nvSpPr>
+        <p:spPr>
+          <a:xfrm>
+            <a:off x="438912" y="585216"/>
+            <a:ext cx="11338560" cy="777240"/>
           </a:xfrm>
           <a:prstGeom prst="rect">
             <a:avLst/>
@@ -7091,20 +7462,23 @@
               <a:buNone/>
             </a:pPr>
             <a:r>
-              <a:rPr lang="en-US" sz="2700" b="1" dirty="0">
-                <a:solidFill>
-                  <a:srgbClr val="1E293B"/>
-                </a:solidFill>
+              <a:rPr lang="en-US" sz="2800" b="1" dirty="0">
+                <a:solidFill>
+                  <a:srgbClr val="1F3A3D"/>
+                </a:solidFill>
+                <a:latin typeface="Georgia" pitchFamily="34" charset="0"/>
+                <a:ea typeface="Georgia" pitchFamily="34" charset="-122"/>
+                <a:cs typeface="Georgia" pitchFamily="34" charset="-120"/>
               </a:rPr>
               <a:t>Stage is entangled with acquisition</a:t>
             </a:r>
-            <a:endParaRPr lang="en-US" sz="2700" dirty="0"/>
-          </a:p>
-        </p:txBody>
-      </p:sp>
-      <p:sp>
-        <p:nvSpPr>
-          <p:cNvPr id="4" name="Shape 2"/>
+            <a:endParaRPr lang="en-US" sz="2800" dirty="0"/>
+          </a:p>
+        </p:txBody>
+      </p:sp>
+      <p:sp>
+        <p:nvSpPr>
+          <p:cNvPr id="5" name="Shape 3"/>
           <p:cNvSpPr/>
           <p:nvPr/>
         </p:nvSpPr>
@@ -7133,7 +7507,7 @@
       </p:sp>
       <p:sp>
         <p:nvSpPr>
-          <p:cNvPr id="5" name="Text 3"/>
+          <p:cNvPr id="6" name="Text 4"/>
           <p:cNvSpPr/>
           <p:nvPr/>
         </p:nvSpPr>
@@ -7169,7 +7543,7 @@
       </p:sp>
       <p:sp>
         <p:nvSpPr>
-          <p:cNvPr id="6" name="Shape 4"/>
+          <p:cNvPr id="7" name="Shape 5"/>
           <p:cNvSpPr/>
           <p:nvPr/>
         </p:nvSpPr>
@@ -7198,7 +7572,7 @@
       </p:sp>
       <p:sp>
         <p:nvSpPr>
-          <p:cNvPr id="7" name="Text 5"/>
+          <p:cNvPr id="8" name="Text 6"/>
           <p:cNvSpPr/>
           <p:nvPr/>
         </p:nvSpPr>
@@ -7234,7 +7608,7 @@
       </p:sp>
       <p:sp>
         <p:nvSpPr>
-          <p:cNvPr id="8" name="Shape 6"/>
+          <p:cNvPr id="9" name="Shape 7"/>
           <p:cNvSpPr/>
           <p:nvPr/>
         </p:nvSpPr>
@@ -7263,7 +7637,7 @@
       </p:sp>
       <p:sp>
         <p:nvSpPr>
-          <p:cNvPr id="9" name="Text 7"/>
+          <p:cNvPr id="10" name="Text 8"/>
           <p:cNvSpPr/>
           <p:nvPr/>
         </p:nvSpPr>
@@ -7299,7 +7673,7 @@
       </p:sp>
       <p:sp>
         <p:nvSpPr>
-          <p:cNvPr id="10" name="Shape 8"/>
+          <p:cNvPr id="11" name="Shape 9"/>
           <p:cNvSpPr/>
           <p:nvPr/>
         </p:nvSpPr>
@@ -7328,7 +7702,7 @@
       </p:sp>
       <p:sp>
         <p:nvSpPr>
-          <p:cNvPr id="11" name="Text 9"/>
+          <p:cNvPr id="12" name="Text 10"/>
           <p:cNvSpPr/>
           <p:nvPr/>
         </p:nvSpPr>
@@ -7364,7 +7738,7 @@
       </p:sp>
       <p:sp>
         <p:nvSpPr>
-          <p:cNvPr id="12" name="Shape 10"/>
+          <p:cNvPr id="13" name="Shape 11"/>
           <p:cNvSpPr/>
           <p:nvPr/>
         </p:nvSpPr>
@@ -7393,7 +7767,7 @@
       </p:sp>
       <p:sp>
         <p:nvSpPr>
-          <p:cNvPr id="13" name="Text 11"/>
+          <p:cNvPr id="14" name="Text 12"/>
           <p:cNvSpPr/>
           <p:nvPr/>
         </p:nvSpPr>
@@ -7429,7 +7803,7 @@
       </p:sp>
       <p:sp>
         <p:nvSpPr>
-          <p:cNvPr id="14" name="Shape 12"/>
+          <p:cNvPr id="15" name="Shape 13"/>
           <p:cNvSpPr/>
           <p:nvPr/>
         </p:nvSpPr>
@@ -7458,7 +7832,7 @@
       </p:sp>
       <p:sp>
         <p:nvSpPr>
-          <p:cNvPr id="15" name="Text 13"/>
+          <p:cNvPr id="16" name="Text 14"/>
           <p:cNvSpPr/>
           <p:nvPr/>
         </p:nvSpPr>
@@ -7494,7 +7868,7 @@
       </p:sp>
       <p:sp>
         <p:nvSpPr>
-          <p:cNvPr id="16" name="Shape 14"/>
+          <p:cNvPr id="17" name="Shape 15"/>
           <p:cNvSpPr/>
           <p:nvPr/>
         </p:nvSpPr>
@@ -7523,7 +7897,7 @@
       </p:sp>
       <p:sp>
         <p:nvSpPr>
-          <p:cNvPr id="17" name="Text 15"/>
+          <p:cNvPr id="18" name="Text 16"/>
           <p:cNvSpPr/>
           <p:nvPr/>
         </p:nvSpPr>
@@ -7559,7 +7933,7 @@
       </p:sp>
       <p:sp>
         <p:nvSpPr>
-          <p:cNvPr id="18" name="Shape 16"/>
+          <p:cNvPr id="19" name="Shape 17"/>
           <p:cNvSpPr/>
           <p:nvPr/>
         </p:nvSpPr>
@@ -7574,7 +7948,7 @@
           <a:noFill/>
           <a:ln w="19050">
             <a:solidFill>
-              <a:srgbClr val="64748B"/>
+              <a:srgbClr val="6B6256"/>
             </a:solidFill>
             <a:prstDash val="solid"/>
             <a:tailEnd type="triangle"/>
@@ -7583,7 +7957,7 @@
       </p:sp>
       <p:sp>
         <p:nvSpPr>
-          <p:cNvPr id="19" name="Text 17"/>
+          <p:cNvPr id="20" name="Text 18"/>
           <p:cNvSpPr/>
           <p:nvPr/>
         </p:nvSpPr>
@@ -7633,7 +8007,7 @@
       </p:sp>
       <p:sp>
         <p:nvSpPr>
-          <p:cNvPr id="20" name="Text 18"/>
+          <p:cNvPr id="21" name="Text 19"/>
           <p:cNvSpPr/>
           <p:nvPr/>
         </p:nvSpPr>
@@ -7669,7 +8043,7 @@
       </p:sp>
       <p:sp>
         <p:nvSpPr>
-          <p:cNvPr id="21" name="Text 19"/>
+          <p:cNvPr id="22" name="Text 20"/>
           <p:cNvSpPr/>
           <p:nvPr/>
         </p:nvSpPr>
@@ -7719,7 +8093,7 @@
       </p:sp>
       <p:sp>
         <p:nvSpPr>
-          <p:cNvPr id="22" name="Shape 20"/>
+          <p:cNvPr id="23" name="Shape 21"/>
           <p:cNvSpPr/>
           <p:nvPr/>
         </p:nvSpPr>
@@ -7741,7 +8115,7 @@
       </p:sp>
       <p:sp>
         <p:nvSpPr>
-          <p:cNvPr id="23" name="Shape 21"/>
+          <p:cNvPr id="24" name="Shape 22"/>
           <p:cNvSpPr/>
           <p:nvPr/>
         </p:nvSpPr>
@@ -7763,7 +8137,7 @@
       </p:sp>
       <p:sp>
         <p:nvSpPr>
-          <p:cNvPr id="24" name="Text 22"/>
+          <p:cNvPr id="25" name="Text 23"/>
           <p:cNvSpPr/>
           <p:nvPr/>
         </p:nvSpPr>
@@ -7799,7 +8173,7 @@
       </p:sp>
       <p:sp>
         <p:nvSpPr>
-          <p:cNvPr id="25" name="Text 23"/>
+          <p:cNvPr id="26" name="Text 24"/>
           <p:cNvSpPr/>
           <p:nvPr/>
         </p:nvSpPr>
@@ -7835,7 +8209,7 @@
       </p:sp>
       <p:sp>
         <p:nvSpPr>
-          <p:cNvPr id="26" name="Text 24"/>
+          <p:cNvPr id="27" name="Text 25"/>
           <p:cNvSpPr/>
           <p:nvPr/>
         </p:nvSpPr>
@@ -7871,7 +8245,7 @@
       </p:sp>
       <p:sp>
         <p:nvSpPr>
-          <p:cNvPr id="27" name="Text 25"/>
+          <p:cNvPr id="28" name="Text 26"/>
           <p:cNvSpPr/>
           <p:nvPr/>
         </p:nvSpPr>
@@ -7929,7 +8303,7 @@
       </p:sp>
       <p:sp>
         <p:nvSpPr>
-          <p:cNvPr id="28" name="Text 26"/>
+          <p:cNvPr id="29" name="Text 27"/>
           <p:cNvSpPr/>
           <p:nvPr/>
         </p:nvSpPr>
@@ -7954,7 +8328,7 @@
             <a:r>
               <a:rPr lang="en-US" sz="1050" dirty="0">
                 <a:solidFill>
-                  <a:srgbClr val="64748B"/>
+                  <a:srgbClr val="6B6256"/>
                 </a:solidFill>
               </a:rPr>
               <a:t>Computational Genomics 76553  ·  HUJI  ·  MASLD snRNA-seq hackathon</a:t>
@@ -7965,7 +8339,7 @@
       </p:sp>
       <p:sp>
         <p:nvSpPr>
-          <p:cNvPr id="29" name="Text 27"/>
+          <p:cNvPr id="30" name="Text 28"/>
           <p:cNvSpPr/>
           <p:nvPr/>
         </p:nvSpPr>
@@ -7990,7 +8364,7 @@
             <a:r>
               <a:rPr lang="en-US" sz="1050" dirty="0">
                 <a:solidFill>
-                  <a:srgbClr val="64748B"/>
+                  <a:srgbClr val="6B6256"/>
                 </a:solidFill>
               </a:rPr>
               <a:t>5</a:t>
@@ -8013,7 +8387,7 @@
     <p:bg>
       <p:bgPr>
         <a:solidFill>
-          <a:srgbClr val="FFFFFF"/>
+          <a:srgbClr val="F7F3EB"/>
         </a:solidFill>
       </p:bgPr>
     </p:bg>
@@ -8033,14 +8407,34 @@
       </p:grpSpPr>
       <p:sp>
         <p:nvSpPr>
-          <p:cNvPr id="2" name="Text 0"/>
-          <p:cNvSpPr/>
-          <p:nvPr/>
-        </p:nvSpPr>
-        <p:spPr>
-          <a:xfrm>
-            <a:off x="457200" y="274320"/>
-            <a:ext cx="11247120" cy="320040"/>
+          <p:cNvPr id="2" name="Shape 0"/>
+          <p:cNvSpPr/>
+          <p:nvPr/>
+        </p:nvSpPr>
+        <p:spPr>
+          <a:xfrm>
+            <a:off x="457200" y="310896"/>
+            <a:ext cx="146304" cy="237744"/>
+          </a:xfrm>
+          <a:prstGeom prst="rect">
+            <a:avLst/>
+          </a:prstGeom>
+          <a:solidFill>
+            <a:srgbClr val="C0562B"/>
+          </a:solidFill>
+          <a:ln/>
+        </p:spPr>
+      </p:sp>
+      <p:sp>
+        <p:nvSpPr>
+          <p:cNvPr id="3" name="Text 1"/>
+          <p:cNvSpPr/>
+          <p:nvPr/>
+        </p:nvSpPr>
+        <p:spPr>
+          <a:xfrm>
+            <a:off x="676656" y="274320"/>
+            <a:ext cx="10972800" cy="320040"/>
           </a:xfrm>
           <a:prstGeom prst="rect">
             <a:avLst/>
@@ -8056,9 +8450,9 @@
               <a:buNone/>
             </a:pPr>
             <a:r>
-              <a:rPr lang="en-US" sz="1300" b="1" spc="200" kern="0" dirty="0">
-                <a:solidFill>
-                  <a:srgbClr val="0F766E"/>
+              <a:rPr lang="en-US" sz="1300" b="1" spc="300" kern="0" dirty="0">
+                <a:solidFill>
+                  <a:srgbClr val="C0562B"/>
                 </a:solidFill>
               </a:rPr>
               <a:t>WHY IT MATTERS</a:t>
@@ -8069,14 +8463,14 @@
       </p:sp>
       <p:sp>
         <p:nvSpPr>
-          <p:cNvPr id="3" name="Text 1"/>
-          <p:cNvSpPr/>
-          <p:nvPr/>
-        </p:nvSpPr>
-        <p:spPr>
-          <a:xfrm>
-            <a:off x="457200" y="585216"/>
-            <a:ext cx="11247120" cy="658368"/>
+          <p:cNvPr id="4" name="Text 2"/>
+          <p:cNvSpPr/>
+          <p:nvPr/>
+        </p:nvSpPr>
+        <p:spPr>
+          <a:xfrm>
+            <a:off x="438912" y="585216"/>
+            <a:ext cx="11338560" cy="777240"/>
           </a:xfrm>
           <a:prstGeom prst="rect">
             <a:avLst/>
@@ -8092,20 +8486,23 @@
               <a:buNone/>
             </a:pPr>
             <a:r>
-              <a:rPr lang="en-US" sz="2700" b="1" dirty="0">
-                <a:solidFill>
-                  <a:srgbClr val="1E293B"/>
-                </a:solidFill>
+              <a:rPr lang="en-US" sz="2800" b="1" dirty="0">
+                <a:solidFill>
+                  <a:srgbClr val="1F3A3D"/>
+                </a:solidFill>
+                <a:latin typeface="Georgia" pitchFamily="34" charset="0"/>
+                <a:ea typeface="Georgia" pitchFamily="34" charset="-122"/>
+                <a:cs typeface="Georgia" pitchFamily="34" charset="-120"/>
               </a:rPr>
               <a:t>Endpoints carry organ-wide stress</a:t>
             </a:r>
-            <a:endParaRPr lang="en-US" sz="2700" dirty="0"/>
+            <a:endParaRPr lang="en-US" sz="2800" dirty="0"/>
           </a:p>
         </p:txBody>
       </p:sp>
       <p:pic>
         <p:nvPicPr>
-          <p:cNvPr id="4" name="Image 0" descr="D:\CS\Genomics\Hackathon\presentation/assets/fig_stress.png">    </p:cNvPr>
+          <p:cNvPr id="5" name="Image 0" descr="D:\CS\Genomics\Hackathon\presentation/assets/fig_stress.png">    </p:cNvPr>
           <p:cNvPicPr>
             <a:picLocks noChangeAspect="1"/>
           </p:cNvPicPr>
@@ -8128,7 +8525,7 @@
       </p:pic>
       <p:sp>
         <p:nvSpPr>
-          <p:cNvPr id="5" name="Text 2"/>
+          <p:cNvPr id="6" name="Text 3"/>
           <p:cNvSpPr/>
           <p:nvPr/>
         </p:nvSpPr>
@@ -8153,7 +8550,7 @@
             <a:r>
               <a:rPr lang="en-US" sz="1200" i="1" dirty="0">
                 <a:solidFill>
-                  <a:srgbClr val="64748B"/>
+                  <a:srgbClr val="6B6256"/>
                 </a:solidFill>
               </a:rPr>
               <a:t>Figure 1.  Procurement-stress module by tissue source (donor-level); the same immediate-early spike appears in non-zonated endothelium.</a:t>
@@ -8164,7 +8561,7 @@
       </p:sp>
       <p:sp>
         <p:nvSpPr>
-          <p:cNvPr id="6" name="Shape 3"/>
+          <p:cNvPr id="7" name="Shape 4"/>
           <p:cNvSpPr/>
           <p:nvPr/>
         </p:nvSpPr>
@@ -8193,7 +8590,7 @@
       </p:sp>
       <p:sp>
         <p:nvSpPr>
-          <p:cNvPr id="7" name="Text 4"/>
+          <p:cNvPr id="8" name="Text 5"/>
           <p:cNvSpPr/>
           <p:nvPr/>
         </p:nvSpPr>
@@ -8229,7 +8626,7 @@
       </p:sp>
       <p:sp>
         <p:nvSpPr>
-          <p:cNvPr id="8" name="Text 5"/>
+          <p:cNvPr id="9" name="Text 6"/>
           <p:cNvSpPr/>
           <p:nvPr/>
         </p:nvSpPr>
@@ -8305,7 +8702,7 @@
       </p:sp>
       <p:sp>
         <p:nvSpPr>
-          <p:cNvPr id="9" name="Text 6"/>
+          <p:cNvPr id="10" name="Text 7"/>
           <p:cNvSpPr/>
           <p:nvPr/>
         </p:nvSpPr>
@@ -8330,7 +8727,7 @@
             <a:r>
               <a:rPr lang="en-US" sz="1050" dirty="0">
                 <a:solidFill>
-                  <a:srgbClr val="64748B"/>
+                  <a:srgbClr val="6B6256"/>
                 </a:solidFill>
               </a:rPr>
               <a:t>Computational Genomics 76553  ·  HUJI  ·  MASLD snRNA-seq hackathon</a:t>
@@ -8341,7 +8738,7 @@
       </p:sp>
       <p:sp>
         <p:nvSpPr>
-          <p:cNvPr id="10" name="Text 7"/>
+          <p:cNvPr id="11" name="Text 8"/>
           <p:cNvSpPr/>
           <p:nvPr/>
         </p:nvSpPr>
@@ -8366,7 +8763,7 @@
             <a:r>
               <a:rPr lang="en-US" sz="1050" dirty="0">
                 <a:solidFill>
-                  <a:srgbClr val="64748B"/>
+                  <a:srgbClr val="6B6256"/>
                 </a:solidFill>
               </a:rPr>
               <a:t>6</a:t>
@@ -8389,7 +8786,7 @@
     <p:bg>
       <p:bgPr>
         <a:solidFill>
-          <a:srgbClr val="FFFFFF"/>
+          <a:srgbClr val="F7F3EB"/>
         </a:solidFill>
       </p:bgPr>
     </p:bg>
@@ -8409,14 +8806,34 @@
       </p:grpSpPr>
       <p:sp>
         <p:nvSpPr>
-          <p:cNvPr id="2" name="Text 0"/>
-          <p:cNvSpPr/>
-          <p:nvPr/>
-        </p:nvSpPr>
-        <p:spPr>
-          <a:xfrm>
-            <a:off x="457200" y="274320"/>
-            <a:ext cx="11247120" cy="320040"/>
+          <p:cNvPr id="2" name="Shape 0"/>
+          <p:cNvSpPr/>
+          <p:nvPr/>
+        </p:nvSpPr>
+        <p:spPr>
+          <a:xfrm>
+            <a:off x="457200" y="310896"/>
+            <a:ext cx="146304" cy="237744"/>
+          </a:xfrm>
+          <a:prstGeom prst="rect">
+            <a:avLst/>
+          </a:prstGeom>
+          <a:solidFill>
+            <a:srgbClr val="C0562B"/>
+          </a:solidFill>
+          <a:ln/>
+        </p:spPr>
+      </p:sp>
+      <p:sp>
+        <p:nvSpPr>
+          <p:cNvPr id="3" name="Text 1"/>
+          <p:cNvSpPr/>
+          <p:nvPr/>
+        </p:nvSpPr>
+        <p:spPr>
+          <a:xfrm>
+            <a:off x="676656" y="274320"/>
+            <a:ext cx="10972800" cy="320040"/>
           </a:xfrm>
           <a:prstGeom prst="rect">
             <a:avLst/>
@@ -8432,9 +8849,9 @@
               <a:buNone/>
             </a:pPr>
             <a:r>
-              <a:rPr lang="en-US" sz="1300" b="1" spc="200" kern="0" dirty="0">
-                <a:solidFill>
-                  <a:srgbClr val="0F766E"/>
+              <a:rPr lang="en-US" sz="1300" b="1" spc="300" kern="0" dirty="0">
+                <a:solidFill>
+                  <a:srgbClr val="C0562B"/>
                 </a:solidFill>
               </a:rPr>
               <a:t>HOW WE MEASURE</a:t>
@@ -8445,14 +8862,14 @@
       </p:sp>
       <p:sp>
         <p:nvSpPr>
-          <p:cNvPr id="3" name="Text 1"/>
-          <p:cNvSpPr/>
-          <p:nvPr/>
-        </p:nvSpPr>
-        <p:spPr>
-          <a:xfrm>
-            <a:off x="457200" y="585216"/>
-            <a:ext cx="11247120" cy="658368"/>
+          <p:cNvPr id="4" name="Text 2"/>
+          <p:cNvSpPr/>
+          <p:nvPr/>
+        </p:nvSpPr>
+        <p:spPr>
+          <a:xfrm>
+            <a:off x="438912" y="585216"/>
+            <a:ext cx="11338560" cy="777240"/>
           </a:xfrm>
           <a:prstGeom prst="rect">
             <a:avLst/>
@@ -8468,20 +8885,23 @@
               <a:buNone/>
             </a:pPr>
             <a:r>
-              <a:rPr lang="en-US" sz="2700" b="1" dirty="0">
-                <a:solidFill>
-                  <a:srgbClr val="1E293B"/>
-                </a:solidFill>
+              <a:rPr lang="en-US" sz="2800" b="1" dirty="0">
+                <a:solidFill>
+                  <a:srgbClr val="1F3A3D"/>
+                </a:solidFill>
+                <a:latin typeface="Georgia" pitchFamily="34" charset="0"/>
+                <a:ea typeface="Georgia" pitchFamily="34" charset="-122"/>
+                <a:cs typeface="Georgia" pitchFamily="34" charset="-120"/>
               </a:rPr>
               <a:t>Raw-count anchor classification</a:t>
             </a:r>
-            <a:endParaRPr lang="en-US" sz="2700" dirty="0"/>
-          </a:p>
-        </p:txBody>
-      </p:sp>
-      <p:sp>
-        <p:nvSpPr>
-          <p:cNvPr id="4" name="Shape 2"/>
+            <a:endParaRPr lang="en-US" sz="2800" dirty="0"/>
+          </a:p>
+        </p:txBody>
+      </p:sp>
+      <p:sp>
+        <p:nvSpPr>
+          <p:cNvPr id="5" name="Shape 3"/>
           <p:cNvSpPr/>
           <p:nvPr/>
         </p:nvSpPr>
@@ -8496,7 +8916,7 @@
             </a:avLst>
           </a:prstGeom>
           <a:solidFill>
-            <a:srgbClr val="F1F5F9"/>
+            <a:srgbClr val="ECE6DA"/>
           </a:solidFill>
           <a:ln w="15240">
             <a:solidFill>
@@ -8508,7 +8928,7 @@
       </p:sp>
       <p:sp>
         <p:nvSpPr>
-          <p:cNvPr id="5" name="Text 3"/>
+          <p:cNvPr id="6" name="Text 4"/>
           <p:cNvSpPr/>
           <p:nvPr/>
         </p:nvSpPr>
@@ -8544,7 +8964,7 @@
       </p:sp>
       <p:sp>
         <p:nvSpPr>
-          <p:cNvPr id="6" name="Shape 4"/>
+          <p:cNvPr id="7" name="Shape 5"/>
           <p:cNvSpPr/>
           <p:nvPr/>
         </p:nvSpPr>
@@ -8559,7 +8979,7 @@
           <a:noFill/>
           <a:ln w="20320">
             <a:solidFill>
-              <a:srgbClr val="64748B"/>
+              <a:srgbClr val="6B6256"/>
             </a:solidFill>
             <a:prstDash val="solid"/>
             <a:tailEnd type="triangle"/>
@@ -8568,7 +8988,7 @@
       </p:sp>
       <p:sp>
         <p:nvSpPr>
-          <p:cNvPr id="7" name="Shape 5"/>
+          <p:cNvPr id="8" name="Shape 6"/>
           <p:cNvSpPr/>
           <p:nvPr/>
         </p:nvSpPr>
@@ -8583,7 +9003,7 @@
             </a:avLst>
           </a:prstGeom>
           <a:solidFill>
-            <a:srgbClr val="F1F5F9"/>
+            <a:srgbClr val="ECE6DA"/>
           </a:solidFill>
           <a:ln w="15240">
             <a:solidFill>
@@ -8595,7 +9015,7 @@
       </p:sp>
       <p:sp>
         <p:nvSpPr>
-          <p:cNvPr id="8" name="Text 6"/>
+          <p:cNvPr id="9" name="Text 7"/>
           <p:cNvSpPr/>
           <p:nvPr/>
         </p:nvSpPr>
@@ -8631,7 +9051,7 @@
       </p:sp>
       <p:sp>
         <p:nvSpPr>
-          <p:cNvPr id="9" name="Shape 7"/>
+          <p:cNvPr id="10" name="Shape 8"/>
           <p:cNvSpPr/>
           <p:nvPr/>
         </p:nvSpPr>
@@ -8646,7 +9066,7 @@
           <a:noFill/>
           <a:ln w="20320">
             <a:solidFill>
-              <a:srgbClr val="64748B"/>
+              <a:srgbClr val="6B6256"/>
             </a:solidFill>
             <a:prstDash val="solid"/>
             <a:tailEnd type="triangle"/>
@@ -8655,7 +9075,7 @@
       </p:sp>
       <p:sp>
         <p:nvSpPr>
-          <p:cNvPr id="10" name="Shape 8"/>
+          <p:cNvPr id="11" name="Shape 9"/>
           <p:cNvSpPr/>
           <p:nvPr/>
         </p:nvSpPr>
@@ -8682,7 +9102,7 @@
       </p:sp>
       <p:sp>
         <p:nvSpPr>
-          <p:cNvPr id="11" name="Text 9"/>
+          <p:cNvPr id="12" name="Text 10"/>
           <p:cNvSpPr/>
           <p:nvPr/>
         </p:nvSpPr>
@@ -8718,7 +9138,7 @@
       </p:sp>
       <p:sp>
         <p:nvSpPr>
-          <p:cNvPr id="12" name="Shape 10"/>
+          <p:cNvPr id="13" name="Shape 11"/>
           <p:cNvSpPr/>
           <p:nvPr/>
         </p:nvSpPr>
@@ -8733,7 +9153,7 @@
           <a:noFill/>
           <a:ln w="20320">
             <a:solidFill>
-              <a:srgbClr val="64748B"/>
+              <a:srgbClr val="6B6256"/>
             </a:solidFill>
             <a:prstDash val="solid"/>
             <a:tailEnd type="triangle"/>
@@ -8742,7 +9162,7 @@
       </p:sp>
       <p:sp>
         <p:nvSpPr>
-          <p:cNvPr id="13" name="Shape 11"/>
+          <p:cNvPr id="14" name="Shape 12"/>
           <p:cNvSpPr/>
           <p:nvPr/>
         </p:nvSpPr>
@@ -8757,7 +9177,7 @@
             </a:avLst>
           </a:prstGeom>
           <a:solidFill>
-            <a:srgbClr val="F1F5F9"/>
+            <a:srgbClr val="ECE6DA"/>
           </a:solidFill>
           <a:ln w="15240">
             <a:solidFill>
@@ -8769,7 +9189,7 @@
       </p:sp>
       <p:sp>
         <p:nvSpPr>
-          <p:cNvPr id="14" name="Text 12"/>
+          <p:cNvPr id="15" name="Text 13"/>
           <p:cNvSpPr/>
           <p:nvPr/>
         </p:nvSpPr>
@@ -8805,7 +9225,7 @@
       </p:sp>
       <p:sp>
         <p:nvSpPr>
-          <p:cNvPr id="15" name="Shape 13"/>
+          <p:cNvPr id="16" name="Shape 14"/>
           <p:cNvSpPr/>
           <p:nvPr/>
         </p:nvSpPr>
@@ -8820,7 +9240,7 @@
           <a:noFill/>
           <a:ln w="20320">
             <a:solidFill>
-              <a:srgbClr val="64748B"/>
+              <a:srgbClr val="6B6256"/>
             </a:solidFill>
             <a:prstDash val="solid"/>
             <a:tailEnd type="triangle"/>
@@ -8829,7 +9249,7 @@
       </p:sp>
       <p:sp>
         <p:nvSpPr>
-          <p:cNvPr id="16" name="Shape 14"/>
+          <p:cNvPr id="17" name="Shape 15"/>
           <p:cNvSpPr/>
           <p:nvPr/>
         </p:nvSpPr>
@@ -8844,7 +9264,7 @@
             </a:avLst>
           </a:prstGeom>
           <a:solidFill>
-            <a:srgbClr val="F1F5F9"/>
+            <a:srgbClr val="ECE6DA"/>
           </a:solidFill>
           <a:ln w="15240">
             <a:solidFill>
@@ -8856,7 +9276,7 @@
       </p:sp>
       <p:sp>
         <p:nvSpPr>
-          <p:cNvPr id="17" name="Text 15"/>
+          <p:cNvPr id="18" name="Text 16"/>
           <p:cNvSpPr/>
           <p:nvPr/>
         </p:nvSpPr>
@@ -8892,7 +9312,7 @@
       </p:sp>
       <p:sp>
         <p:nvSpPr>
-          <p:cNvPr id="18" name="Shape 16"/>
+          <p:cNvPr id="19" name="Shape 17"/>
           <p:cNvSpPr/>
           <p:nvPr/>
         </p:nvSpPr>
@@ -8921,7 +9341,7 @@
       </p:sp>
       <p:sp>
         <p:nvSpPr>
-          <p:cNvPr id="19" name="Text 17"/>
+          <p:cNvPr id="20" name="Text 18"/>
           <p:cNvSpPr/>
           <p:nvPr/>
         </p:nvSpPr>
@@ -8971,7 +9391,7 @@
       </p:sp>
       <p:sp>
         <p:nvSpPr>
-          <p:cNvPr id="20" name="Shape 18"/>
+          <p:cNvPr id="21" name="Shape 19"/>
           <p:cNvSpPr/>
           <p:nvPr/>
         </p:nvSpPr>
@@ -9000,7 +9420,7 @@
       </p:sp>
       <p:sp>
         <p:nvSpPr>
-          <p:cNvPr id="21" name="Text 19"/>
+          <p:cNvPr id="22" name="Text 20"/>
           <p:cNvSpPr/>
           <p:nvPr/>
         </p:nvSpPr>
@@ -9050,7 +9470,7 @@
       </p:sp>
       <p:sp>
         <p:nvSpPr>
-          <p:cNvPr id="22" name="Shape 20"/>
+          <p:cNvPr id="23" name="Shape 21"/>
           <p:cNvSpPr/>
           <p:nvPr/>
         </p:nvSpPr>
@@ -9079,7 +9499,7 @@
       </p:sp>
       <p:sp>
         <p:nvSpPr>
-          <p:cNvPr id="23" name="Text 21"/>
+          <p:cNvPr id="24" name="Text 22"/>
           <p:cNvSpPr/>
           <p:nvPr/>
         </p:nvSpPr>
@@ -9129,7 +9549,7 @@
       </p:sp>
       <p:sp>
         <p:nvSpPr>
-          <p:cNvPr id="24" name="Shape 22"/>
+          <p:cNvPr id="25" name="Shape 23"/>
           <p:cNvSpPr/>
           <p:nvPr/>
         </p:nvSpPr>
@@ -9158,7 +9578,7 @@
       </p:sp>
       <p:sp>
         <p:nvSpPr>
-          <p:cNvPr id="25" name="Text 23"/>
+          <p:cNvPr id="26" name="Text 24"/>
           <p:cNvSpPr/>
           <p:nvPr/>
         </p:nvSpPr>
@@ -9208,7 +9628,7 @@
       </p:sp>
       <p:sp>
         <p:nvSpPr>
-          <p:cNvPr id="26" name="Text 24"/>
+          <p:cNvPr id="27" name="Text 25"/>
           <p:cNvSpPr/>
           <p:nvPr/>
         </p:nvSpPr>
@@ -9353,7 +9773,7 @@
       </p:sp>
       <p:sp>
         <p:nvSpPr>
-          <p:cNvPr id="27" name="Text 25"/>
+          <p:cNvPr id="28" name="Text 26"/>
           <p:cNvSpPr/>
           <p:nvPr/>
         </p:nvSpPr>
@@ -9378,7 +9798,7 @@
             <a:r>
               <a:rPr lang="en-US" sz="1050" dirty="0">
                 <a:solidFill>
-                  <a:srgbClr val="64748B"/>
+                  <a:srgbClr val="6B6256"/>
                 </a:solidFill>
               </a:rPr>
               <a:t>Computational Genomics 76553  ·  HUJI  ·  MASLD snRNA-seq hackathon</a:t>
@@ -9389,7 +9809,7 @@
       </p:sp>
       <p:sp>
         <p:nvSpPr>
-          <p:cNvPr id="28" name="Text 26"/>
+          <p:cNvPr id="29" name="Text 27"/>
           <p:cNvSpPr/>
           <p:nvPr/>
         </p:nvSpPr>
@@ -9414,7 +9834,7 @@
             <a:r>
               <a:rPr lang="en-US" sz="1050" dirty="0">
                 <a:solidFill>
-                  <a:srgbClr val="64748B"/>
+                  <a:srgbClr val="6B6256"/>
                 </a:solidFill>
               </a:rPr>
               <a:t>7</a:t>
@@ -9437,7 +9857,7 @@
     <p:bg>
       <p:bgPr>
         <a:solidFill>
-          <a:srgbClr val="FFFFFF"/>
+          <a:srgbClr val="F7F3EB"/>
         </a:solidFill>
       </p:bgPr>
     </p:bg>
@@ -9457,14 +9877,34 @@
       </p:grpSpPr>
       <p:sp>
         <p:nvSpPr>
-          <p:cNvPr id="2" name="Text 0"/>
-          <p:cNvSpPr/>
-          <p:nvPr/>
-        </p:nvSpPr>
-        <p:spPr>
-          <a:xfrm>
-            <a:off x="457200" y="274320"/>
-            <a:ext cx="11247120" cy="320040"/>
+          <p:cNvPr id="2" name="Shape 0"/>
+          <p:cNvSpPr/>
+          <p:nvPr/>
+        </p:nvSpPr>
+        <p:spPr>
+          <a:xfrm>
+            <a:off x="457200" y="310896"/>
+            <a:ext cx="146304" cy="237744"/>
+          </a:xfrm>
+          <a:prstGeom prst="rect">
+            <a:avLst/>
+          </a:prstGeom>
+          <a:solidFill>
+            <a:srgbClr val="C0562B"/>
+          </a:solidFill>
+          <a:ln/>
+        </p:spPr>
+      </p:sp>
+      <p:sp>
+        <p:nvSpPr>
+          <p:cNvPr id="3" name="Text 1"/>
+          <p:cNvSpPr/>
+          <p:nvPr/>
+        </p:nvSpPr>
+        <p:spPr>
+          <a:xfrm>
+            <a:off x="676656" y="274320"/>
+            <a:ext cx="10972800" cy="320040"/>
           </a:xfrm>
           <a:prstGeom prst="rect">
             <a:avLst/>
@@ -9480,9 +9920,9 @@
               <a:buNone/>
             </a:pPr>
             <a:r>
-              <a:rPr lang="en-US" sz="1300" b="1" spc="200" kern="0" dirty="0">
-                <a:solidFill>
-                  <a:srgbClr val="0F766E"/>
+              <a:rPr lang="en-US" sz="1300" b="1" spc="300" kern="0" dirty="0">
+                <a:solidFill>
+                  <a:srgbClr val="C0562B"/>
                 </a:solidFill>
               </a:rPr>
               <a:t>THE RESULT</a:t>
@@ -9493,14 +9933,14 @@
       </p:sp>
       <p:sp>
         <p:nvSpPr>
-          <p:cNvPr id="3" name="Text 1"/>
-          <p:cNvSpPr/>
-          <p:nvPr/>
-        </p:nvSpPr>
-        <p:spPr>
-          <a:xfrm>
-            <a:off x="457200" y="585216"/>
-            <a:ext cx="11247120" cy="658368"/>
+          <p:cNvPr id="4" name="Text 2"/>
+          <p:cNvSpPr/>
+          <p:nvPr/>
+        </p:nvSpPr>
+        <p:spPr>
+          <a:xfrm>
+            <a:off x="438912" y="585216"/>
+            <a:ext cx="11338560" cy="777240"/>
           </a:xfrm>
           <a:prstGeom prst="rect">
             <a:avLst/>
@@ -9516,20 +9956,23 @@
               <a:buNone/>
             </a:pPr>
             <a:r>
-              <a:rPr lang="en-US" sz="2700" b="1" dirty="0">
-                <a:solidFill>
-                  <a:srgbClr val="1E293B"/>
-                </a:solidFill>
+              <a:rPr lang="en-US" sz="2800" b="1" dirty="0">
+                <a:solidFill>
+                  <a:srgbClr val="1F3A3D"/>
+                </a:solidFill>
+                <a:latin typeface="Georgia" pitchFamily="34" charset="0"/>
+                <a:ea typeface="Georgia" pitchFamily="34" charset="-122"/>
+                <a:cs typeface="Georgia" pitchFamily="34" charset="-120"/>
               </a:rPr>
               <a:t>Matched biopsies stay zonated</a:t>
             </a:r>
-            <a:endParaRPr lang="en-US" sz="2700" dirty="0"/>
+            <a:endParaRPr lang="en-US" sz="2800" dirty="0"/>
           </a:p>
         </p:txBody>
       </p:sp>
       <p:pic>
         <p:nvPicPr>
-          <p:cNvPr id="4" name="Image 0" descr="D:\CS\Genomics\Hackathon\presentation/assets/fig_result2.png">    </p:cNvPr>
+          <p:cNvPr id="5" name="Image 0" descr="D:\CS\Genomics\Hackathon\presentation/assets/fig_result3.png">    </p:cNvPr>
           <p:cNvPicPr>
             <a:picLocks noChangeAspect="1"/>
           </p:cNvPicPr>
@@ -9542,8 +9985,8 @@
         </p:blipFill>
         <p:spPr>
           <a:xfrm>
-            <a:off x="274320" y="1371600"/>
-            <a:ext cx="7863840" cy="3931920"/>
+            <a:off x="182880" y="1417320"/>
+            <a:ext cx="8321040" cy="3749040"/>
           </a:xfrm>
           <a:prstGeom prst="rect">
             <a:avLst/>
@@ -9552,14 +9995,14 @@
       </p:pic>
       <p:sp>
         <p:nvSpPr>
-          <p:cNvPr id="5" name="Text 2"/>
-          <p:cNvSpPr/>
-          <p:nvPr/>
-        </p:nvSpPr>
-        <p:spPr>
-          <a:xfrm>
-            <a:off x="274320" y="5349240"/>
-            <a:ext cx="7863840" cy="365760"/>
+          <p:cNvPr id="6" name="Text 3"/>
+          <p:cNvSpPr/>
+          <p:nvPr/>
+        </p:nvSpPr>
+        <p:spPr>
+          <a:xfrm>
+            <a:off x="182880" y="5257800"/>
+            <a:ext cx="8321040" cy="365760"/>
           </a:xfrm>
           <a:prstGeom prst="rect">
             <a:avLst/>
@@ -9577,10 +10020,10 @@
             <a:r>
               <a:rPr lang="en-US" sz="1200" i="1" dirty="0">
                 <a:solidFill>
-                  <a:srgbClr val="64748B"/>
-                </a:solidFill>
-              </a:rPr>
-              <a:t>Figure 2.  Donor-level pericentral-anchor (left) and dual co-expression (right) fractions across biopsy fibrosis F0–F4.</a:t>
+                  <a:srgbClr val="6B6256"/>
+                </a:solidFill>
+              </a:rPr>
+              <a:t>Figure 2.  Pericentral and periportal depletion and dual co-expression across matched biopsy F1–F4 (donor=point, value-labelled; F0 n=2 in backup).</a:t>
             </a:r>
             <a:endParaRPr lang="en-US" sz="1200" dirty="0"/>
           </a:p>
@@ -9588,14 +10031,14 @@
       </p:sp>
       <p:sp>
         <p:nvSpPr>
-          <p:cNvPr id="6" name="Text 3"/>
-          <p:cNvSpPr/>
-          <p:nvPr/>
-        </p:nvSpPr>
-        <p:spPr>
-          <a:xfrm>
-            <a:off x="8321040" y="1691640"/>
-            <a:ext cx="3657600" cy="3017520"/>
+          <p:cNvPr id="7" name="Text 4"/>
+          <p:cNvSpPr/>
+          <p:nvPr/>
+        </p:nvSpPr>
+        <p:spPr>
+          <a:xfrm>
+            <a:off x="8641080" y="1508760"/>
+            <a:ext cx="3337560" cy="3200400"/>
           </a:xfrm>
           <a:prstGeom prst="rect">
             <a:avLst/>
@@ -9611,33 +10054,48 @@
               <a:buNone/>
             </a:pPr>
             <a:r>
-              <a:rPr lang="en-US" sz="1650" b="1" dirty="0">
+              <a:rPr lang="en-US" sz="1500" b="1" dirty="0">
+                <a:solidFill>
+                  <a:srgbClr val="1F3A3D"/>
+                </a:solidFill>
+              </a:rPr>
+              <a:t>The other two mechanisms (F1→F4 donor-median):
+</a:t>
+            </a:r>
+            <a:endParaRPr lang="en-US" sz="1500" dirty="0"/>
+          </a:p>
+          <a:p>
+            <a:pPr algn="l" indent="0" marL="0">
+              <a:buNone/>
+            </a:pPr>
+            <a:r>
+              <a:rPr lang="en-US" sz="1500" b="1" dirty="0">
                 <a:solidFill>
                   <a:srgbClr val="475569"/>
                 </a:solidFill>
               </a:rPr>
-              <a:t>Null fraction (turn-off): </a:t>
+              <a:t>Null (turn-off): </a:t>
             </a:r>
             <a:pPr algn="l" indent="0" marL="0">
               <a:buNone/>
             </a:pPr>
             <a:r>
-              <a:rPr lang="en-US" sz="1650" dirty="0">
+              <a:rPr lang="en-US" sz="1500" dirty="0">
                 <a:solidFill>
                   <a:srgbClr val="1E293B"/>
                 </a:solidFill>
               </a:rPr>
-              <a:t>stable.
+              <a:t>44 / 36 / 39 / 39% — stable.
 </a:t>
             </a:r>
-            <a:endParaRPr lang="en-US" sz="1650" dirty="0"/>
+            <a:endParaRPr lang="en-US" sz="1500" dirty="0"/>
           </a:p>
           <a:p>
             <a:pPr algn="l" indent="0" marL="0">
               <a:buNone/>
             </a:pPr>
             <a:r>
-              <a:rPr lang="en-US" sz="1650" b="1" dirty="0">
+              <a:rPr lang="en-US" sz="1500" b="1" dirty="0">
                 <a:solidFill>
                   <a:srgbClr val="EA580C"/>
                 </a:solidFill>
@@ -9648,22 +10106,22 @@
               <a:buNone/>
             </a:pPr>
             <a:r>
-              <a:rPr lang="en-US" sz="1650" dirty="0">
+              <a:rPr lang="en-US" sz="1500" dirty="0">
                 <a:solidFill>
                   <a:srgbClr val="1E293B"/>
                 </a:solidFill>
               </a:rPr>
-              <a:t>non-monotone, no drift.
+              <a:t>1.16 / 1.01 / 1.10 / 1.18 — flat.
 </a:t>
             </a:r>
-            <a:endParaRPr lang="en-US" sz="1650" dirty="0"/>
+            <a:endParaRPr lang="en-US" sz="1500" dirty="0"/>
           </a:p>
           <a:p>
             <a:pPr algn="l" indent="0" marL="0">
               <a:buNone/>
             </a:pPr>
             <a:r>
-              <a:rPr lang="en-US" sz="1650" b="1" dirty="0">
+              <a:rPr lang="en-US" sz="1500" b="1" dirty="0">
                 <a:solidFill>
                   <a:srgbClr val="1D4ED8"/>
                 </a:solidFill>
@@ -9674,35 +10132,35 @@
               <a:buNone/>
             </a:pPr>
             <a:r>
-              <a:rPr lang="en-US" sz="1650" i="1" dirty="0">
-                <a:solidFill>
-                  <a:srgbClr val="64748B"/>
+              <a:rPr lang="en-US" sz="1500" i="1" dirty="0">
+                <a:solidFill>
+                  <a:srgbClr val="6B6256"/>
                 </a:solidFill>
               </a:rPr>
               <a:t>a large shift (~20 pp) is excluded; a subtle drift ≤10 pp is not (F4 n=4).</a:t>
             </a:r>
-            <a:endParaRPr lang="en-US" sz="1650" dirty="0"/>
-          </a:p>
-        </p:txBody>
-      </p:sp>
-      <p:sp>
-        <p:nvSpPr>
-          <p:cNvPr id="7" name="Shape 4"/>
-          <p:cNvSpPr/>
-          <p:nvPr/>
-        </p:nvSpPr>
-        <p:spPr>
-          <a:xfrm>
-            <a:off x="8321040" y="4434840"/>
-            <a:ext cx="3657600" cy="1143000"/>
+            <a:endParaRPr lang="en-US" sz="1500" dirty="0"/>
+          </a:p>
+        </p:txBody>
+      </p:sp>
+      <p:sp>
+        <p:nvSpPr>
+          <p:cNvPr id="8" name="Shape 5"/>
+          <p:cNvSpPr/>
+          <p:nvPr/>
+        </p:nvSpPr>
+        <p:spPr>
+          <a:xfrm>
+            <a:off x="8641080" y="4892040"/>
+            <a:ext cx="3337560" cy="868680"/>
           </a:xfrm>
           <a:prstGeom prst="roundRect">
             <a:avLst>
-              <a:gd name="adj" fmla="val 6400"/>
+              <a:gd name="adj" fmla="val 8421"/>
             </a:avLst>
           </a:prstGeom>
           <a:solidFill>
-            <a:srgbClr val="ECFDF5"/>
+            <a:srgbClr val="1F3A3D"/>
           </a:solidFill>
           <a:ln/>
           <a:effectLst>
@@ -9716,14 +10174,14 @@
       </p:sp>
       <p:sp>
         <p:nvSpPr>
-          <p:cNvPr id="8" name="Text 5"/>
-          <p:cNvSpPr/>
-          <p:nvPr/>
-        </p:nvSpPr>
-        <p:spPr>
-          <a:xfrm>
-            <a:off x="8458200" y="4498848"/>
-            <a:ext cx="3383280" cy="1005840"/>
+          <p:cNvPr id="9" name="Text 6"/>
+          <p:cNvSpPr/>
+          <p:nvPr/>
+        </p:nvSpPr>
+        <p:spPr>
+          <a:xfrm>
+            <a:off x="8778240" y="4937760"/>
+            <a:ext cx="3063240" cy="777240"/>
           </a:xfrm>
           <a:prstGeom prst="rect">
             <a:avLst/>
@@ -9739,20 +10197,20 @@
               <a:buNone/>
             </a:pPr>
             <a:r>
-              <a:rPr lang="en-US" sz="1600" b="1" dirty="0">
-                <a:solidFill>
-                  <a:srgbClr val="065F46"/>
-                </a:solidFill>
-              </a:rPr>
-              <a:t>Donor-level anchor fractions do not support large biopsy-axis de-zonation.</a:t>
-            </a:r>
-            <a:endParaRPr lang="en-US" sz="1600" dirty="0"/>
-          </a:p>
-        </p:txBody>
-      </p:sp>
-      <p:sp>
-        <p:nvSpPr>
-          <p:cNvPr id="9" name="Text 6"/>
+              <a:rPr lang="en-US" sz="1500" b="1" dirty="0">
+                <a:solidFill>
+                  <a:srgbClr val="FFFFFF"/>
+                </a:solidFill>
+              </a:rPr>
+              <a:t>Anchor fractions do not support large biopsy-axis de-zonation.</a:t>
+            </a:r>
+            <a:endParaRPr lang="en-US" sz="1500" dirty="0"/>
+          </a:p>
+        </p:txBody>
+      </p:sp>
+      <p:sp>
+        <p:nvSpPr>
+          <p:cNvPr id="10" name="Text 7"/>
           <p:cNvSpPr/>
           <p:nvPr/>
         </p:nvSpPr>
@@ -9777,7 +10235,7 @@
             <a:r>
               <a:rPr lang="en-US" sz="1050" dirty="0">
                 <a:solidFill>
-                  <a:srgbClr val="64748B"/>
+                  <a:srgbClr val="6B6256"/>
                 </a:solidFill>
               </a:rPr>
               <a:t>Computational Genomics 76553  ·  HUJI  ·  MASLD snRNA-seq hackathon</a:t>
@@ -9788,7 +10246,7 @@
       </p:sp>
       <p:sp>
         <p:nvSpPr>
-          <p:cNvPr id="10" name="Text 7"/>
+          <p:cNvPr id="11" name="Text 8"/>
           <p:cNvSpPr/>
           <p:nvPr/>
         </p:nvSpPr>
@@ -9813,7 +10271,7 @@
             <a:r>
               <a:rPr lang="en-US" sz="1050" dirty="0">
                 <a:solidFill>
-                  <a:srgbClr val="64748B"/>
+                  <a:srgbClr val="6B6256"/>
                 </a:solidFill>
               </a:rPr>
               <a:t>8</a:t>
@@ -9836,7 +10294,7 @@
     <p:bg>
       <p:bgPr>
         <a:solidFill>
-          <a:srgbClr val="FFFFFF"/>
+          <a:srgbClr val="F7F3EB"/>
         </a:solidFill>
       </p:bgPr>
     </p:bg>
@@ -9856,14 +10314,34 @@
       </p:grpSpPr>
       <p:sp>
         <p:nvSpPr>
-          <p:cNvPr id="2" name="Text 0"/>
-          <p:cNvSpPr/>
-          <p:nvPr/>
-        </p:nvSpPr>
-        <p:spPr>
-          <a:xfrm>
-            <a:off x="457200" y="274320"/>
-            <a:ext cx="11247120" cy="320040"/>
+          <p:cNvPr id="2" name="Shape 0"/>
+          <p:cNvSpPr/>
+          <p:nvPr/>
+        </p:nvSpPr>
+        <p:spPr>
+          <a:xfrm>
+            <a:off x="457200" y="310896"/>
+            <a:ext cx="146304" cy="237744"/>
+          </a:xfrm>
+          <a:prstGeom prst="rect">
+            <a:avLst/>
+          </a:prstGeom>
+          <a:solidFill>
+            <a:srgbClr val="C0562B"/>
+          </a:solidFill>
+          <a:ln/>
+        </p:spPr>
+      </p:sp>
+      <p:sp>
+        <p:nvSpPr>
+          <p:cNvPr id="3" name="Text 1"/>
+          <p:cNvSpPr/>
+          <p:nvPr/>
+        </p:nvSpPr>
+        <p:spPr>
+          <a:xfrm>
+            <a:off x="676656" y="274320"/>
+            <a:ext cx="10972800" cy="320040"/>
           </a:xfrm>
           <a:prstGeom prst="rect">
             <a:avLst/>
@@ -9879,9 +10357,9 @@
               <a:buNone/>
             </a:pPr>
             <a:r>
-              <a:rPr lang="en-US" sz="1300" b="1" spc="200" kern="0" dirty="0">
-                <a:solidFill>
-                  <a:srgbClr val="0F766E"/>
+              <a:rPr lang="en-US" sz="1300" b="1" spc="300" kern="0" dirty="0">
+                <a:solidFill>
+                  <a:srgbClr val="C0562B"/>
                 </a:solidFill>
               </a:rPr>
               <a:t>GENOME-WIDE</a:t>
@@ -9892,14 +10370,14 @@
       </p:sp>
       <p:sp>
         <p:nvSpPr>
-          <p:cNvPr id="3" name="Text 1"/>
-          <p:cNvSpPr/>
-          <p:nvPr/>
-        </p:nvSpPr>
-        <p:spPr>
-          <a:xfrm>
-            <a:off x="457200" y="585216"/>
-            <a:ext cx="11247120" cy="658368"/>
+          <p:cNvPr id="4" name="Text 2"/>
+          <p:cNvSpPr/>
+          <p:nvPr/>
+        </p:nvSpPr>
+        <p:spPr>
+          <a:xfrm>
+            <a:off x="438912" y="585216"/>
+            <a:ext cx="11338560" cy="777240"/>
           </a:xfrm>
           <a:prstGeom prst="rect">
             <a:avLst/>
@@ -9915,20 +10393,23 @@
               <a:buNone/>
             </a:pPr>
             <a:r>
-              <a:rPr lang="en-US" sz="2700" b="1" dirty="0">
-                <a:solidFill>
-                  <a:srgbClr val="1E293B"/>
-                </a:solidFill>
+              <a:rPr lang="en-US" sz="2800" b="1" dirty="0">
+                <a:solidFill>
+                  <a:srgbClr val="1F3A3D"/>
+                </a:solidFill>
+                <a:latin typeface="Georgia" pitchFamily="34" charset="0"/>
+                <a:ea typeface="Georgia" pitchFamily="34" charset="-122"/>
+                <a:cs typeface="Georgia" pitchFamily="34" charset="-120"/>
               </a:rPr>
               <a:t>One signal: biliary markers</a:t>
             </a:r>
-            <a:endParaRPr lang="en-US" sz="2700" dirty="0"/>
+            <a:endParaRPr lang="en-US" sz="2800" dirty="0"/>
           </a:p>
         </p:txBody>
       </p:sp>
       <p:pic>
         <p:nvPicPr>
-          <p:cNvPr id="4" name="Image 0" descr="D:\CS\Genomics\Hackathon\presentation/assets/fig_volcano.png">    </p:cNvPr>
+          <p:cNvPr id="5" name="Image 0" descr="D:\CS\Genomics\Hackathon\presentation/assets/fig_volcano.png">    </p:cNvPr>
           <p:cNvPicPr>
             <a:picLocks noChangeAspect="1"/>
           </p:cNvPicPr>
@@ -9951,7 +10432,7 @@
       </p:pic>
       <p:sp>
         <p:nvSpPr>
-          <p:cNvPr id="5" name="Text 2"/>
+          <p:cNvPr id="6" name="Text 3"/>
           <p:cNvSpPr/>
           <p:nvPr/>
         </p:nvSpPr>
@@ -9976,7 +10457,7 @@
             <a:r>
               <a:rPr lang="en-US" sz="1200" i="1" dirty="0">
                 <a:solidFill>
-                  <a:srgbClr val="64748B"/>
+                  <a:srgbClr val="6B6256"/>
                 </a:solidFill>
               </a:rPr>
               <a:t>Figure 3.  Genome-wide pseudobulk differential expression, cirrhotic F4 vs F1 (edgeR).</a:t>
@@ -9987,7 +10468,7 @@
       </p:sp>
       <p:sp>
         <p:nvSpPr>
-          <p:cNvPr id="6" name="Text 3"/>
+          <p:cNvPr id="7" name="Text 4"/>
           <p:cNvSpPr/>
           <p:nvPr/>
         </p:nvSpPr>
@@ -10080,7 +10561,7 @@
       </p:sp>
       <p:sp>
         <p:nvSpPr>
-          <p:cNvPr id="7" name="Shape 4"/>
+          <p:cNvPr id="8" name="Shape 5"/>
           <p:cNvSpPr/>
           <p:nvPr/>
         </p:nvSpPr>
@@ -10095,14 +10576,14 @@
             </a:avLst>
           </a:prstGeom>
           <a:solidFill>
-            <a:srgbClr val="F1F5F9"/>
+            <a:srgbClr val="ECE6DA"/>
           </a:solidFill>
           <a:ln/>
         </p:spPr>
       </p:sp>
       <p:sp>
         <p:nvSpPr>
-          <p:cNvPr id="8" name="Text 5"/>
+          <p:cNvPr id="9" name="Text 6"/>
           <p:cNvSpPr/>
           <p:nvPr/>
         </p:nvSpPr>
@@ -10127,7 +10608,7 @@
             <a:r>
               <a:rPr lang="en-US" sz="1300" i="1" dirty="0">
                 <a:solidFill>
-                  <a:srgbClr val="64748B"/>
+                  <a:srgbClr val="6B6256"/>
                 </a:solidFill>
               </a:rPr>
               <a:t>Caveat: weak coordinated pathways still need gene-set testing.</a:t>
@@ -10138,7 +10619,7 @@
       </p:sp>
       <p:sp>
         <p:nvSpPr>
-          <p:cNvPr id="9" name="Text 6"/>
+          <p:cNvPr id="10" name="Text 7"/>
           <p:cNvSpPr/>
           <p:nvPr/>
         </p:nvSpPr>
@@ -10163,7 +10644,7 @@
             <a:r>
               <a:rPr lang="en-US" sz="1050" dirty="0">
                 <a:solidFill>
-                  <a:srgbClr val="64748B"/>
+                  <a:srgbClr val="6B6256"/>
                 </a:solidFill>
               </a:rPr>
               <a:t>Computational Genomics 76553  ·  HUJI  ·  MASLD snRNA-seq hackathon</a:t>
@@ -10174,7 +10655,7 @@
       </p:sp>
       <p:sp>
         <p:nvSpPr>
-          <p:cNvPr id="10" name="Text 7"/>
+          <p:cNvPr id="11" name="Text 8"/>
           <p:cNvSpPr/>
           <p:nvPr/>
         </p:nvSpPr>
@@ -10199,7 +10680,7 @@
             <a:r>
               <a:rPr lang="en-US" sz="1050" dirty="0">
                 <a:solidFill>
-                  <a:srgbClr val="64748B"/>
+                  <a:srgbClr val="6B6256"/>
                 </a:solidFill>
               </a:rPr>
               <a:t>9</a:t>

--- a/presentation/MASLD_zonation.pptx
+++ b/presentation/MASLD_zonation.pptx
@@ -24,9 +24,11 @@
     <p:sldId id="272" r:id="rId18"/>
     <p:sldId id="273" r:id="rId19"/>
     <p:sldId id="274" r:id="rId20"/>
+    <p:sldId id="275" r:id="rId21"/>
+    <p:sldId id="276" r:id="rId22"/>
   </p:sldIdLst>
   <p:notesMasterIdLst>
-    <p:notesMasterId r:id="rId21"/>
+    <p:notesMasterId r:id="rId23"/>
   </p:notesMasterIdLst>
   <p:sldSz cx="12192000" cy="6858000"/>
   <p:notesSz cx="6858000" cy="12192000"/>
@@ -608,7 +610,7 @@
           <a:p>
             <a:r>
               <a:rPr lang="en-US" dirty="0"/>
-              <a:t>Distinguish evidence levels. Strong: the genes are 5-78x more abundant in cholangiocytes and per-cell hepatocyte co-expression is ~0.4%. Suggestive: decontX halves the hits and drops SOX4/SOX9 — supports an ambient contribution but is not proof. Open: EPCAM/SPINT2/B3GNT3 survive. So the dominant evidence points to composition/ambient RNA, but a rare intrinsic state is not excluded; CXCL10 is set aside as a candidate real inflammatory signal.</a:t>
+              <a:t>Pseudobulk per donor — donors, not cells, are the replicates. This is an independent count-based check (zonation genes flat, GLUL FDR 0.80) plus a discovery layer: only 64 of ~21,000 genes are significant, and they are biliary/ductular markers, not a broad program. Careful wording: no large single-GENE program outside the biliary burden — gene-set testing is still owed for weak coordinated pathways.</a:t>
             </a:r>
             <a:endParaRPr lang="en-US" dirty="0"/>
           </a:p>
@@ -696,7 +698,7 @@
           <a:p>
             <a:r>
               <a:rPr lang="en-US" dirty="0"/>
-              <a:t>Close on the methodological lesson: in single-cell disease atlases, acquisition matching can dominate apparent disease trajectories. Bottom line, narrow and honest: the snRNA-seq transcriptomic evidence for progressive de-zonation does not survive matched-source re-analysis; imaging/protein/organoid evidence is untouched; the biliary burden is most consistent with composition/ambient RNA, a rare intrinsic state not excluded.</a:t>
+              <a:t>Distinguish evidence levels. Strong: the genes are 5-78x more abundant in cholangiocytes and per-cell hepatocyte co-expression is ~0.4%. Suggestive: decontX halves the hits and drops SOX4/SOX9 — supports an ambient contribution but is not proof. Open: EPCAM/SPINT2/B3GNT3 survive. So the dominant evidence points to composition/ambient RNA, but a rare intrinsic state is not excluded; CXCL10 is set aside as a candidate real inflammatory signal.</a:t>
             </a:r>
             <a:endParaRPr lang="en-US" dirty="0"/>
           </a:p>
@@ -784,7 +786,7 @@
           <a:p>
             <a:r>
               <a:rPr lang="en-US" dirty="0"/>
-              <a:t/>
+              <a:t>Close on the methodological lesson: in single-cell disease atlases, acquisition matching can dominate apparent disease trajectories. Bottom line, narrow and honest: the snRNA-seq transcriptomic evidence for progressive de-zonation does not survive matched-source re-analysis; imaging/protein/organoid evidence is untouched; the biliary burden is most consistent with composition/ambient RNA, a rare intrinsic state not excluded.</a:t>
             </a:r>
             <a:endParaRPr lang="en-US" dirty="0"/>
           </a:p>
@@ -1530,6 +1532,182 @@
 </p:notes>
 </file>
 
+<file path=ppt/notesSlides/notesSlide20.xml><?xml version="1.0" encoding="utf-8"?>
+<p:notes xmlns:a="http://schemas.openxmlformats.org/drawingml/2006/main" xmlns:r="http://schemas.openxmlformats.org/officeDocument/2006/relationships" xmlns:p="http://schemas.openxmlformats.org/presentationml/2006/main">
+  <p:cSld>
+    <p:spTree>
+      <p:nvGrpSpPr>
+        <p:cNvPr id="1" name=""/>
+        <p:cNvGrpSpPr/>
+        <p:nvPr/>
+      </p:nvGrpSpPr>
+      <p:grpSpPr>
+        <a:xfrm>
+          <a:off x="0" y="0"/>
+          <a:ext cx="0" cy="0"/>
+          <a:chOff x="0" y="0"/>
+          <a:chExt cx="0" cy="0"/>
+        </a:xfrm>
+      </p:grpSpPr>
+      <p:sp>
+        <p:nvSpPr>
+          <p:cNvPr id="2" name="Slide Image Placeholder 1"/>
+          <p:cNvSpPr>
+            <a:spLocks noGrp="1" noRot="1" noChangeAspect="1"/>
+          </p:cNvSpPr>
+          <p:nvPr>
+            <p:ph type="sldImg"/>
+          </p:nvPr>
+        </p:nvSpPr>
+        <p:spPr/>
+      </p:sp>
+      <p:sp>
+        <p:nvSpPr>
+          <p:cNvPr id="3" name="Notes Placeholder 2"/>
+          <p:cNvSpPr>
+            <a:spLocks noGrp="1"/>
+          </p:cNvSpPr>
+          <p:nvPr>
+            <p:ph type="body" idx="1"/>
+          </p:nvPr>
+        </p:nvSpPr>
+        <p:spPr/>
+        <p:txBody>
+          <a:bodyPr/>
+          <a:lstStyle/>
+          <a:p>
+            <a:r>
+              <a:rPr lang="en-US" dirty="0"/>
+              <a:t/>
+            </a:r>
+            <a:endParaRPr lang="en-US" dirty="0"/>
+          </a:p>
+        </p:txBody>
+      </p:sp>
+      <p:sp>
+        <p:nvSpPr>
+          <p:cNvPr id="4" name="Slide Number Placeholder 3"/>
+          <p:cNvSpPr>
+            <a:spLocks noGrp="1"/>
+          </p:cNvSpPr>
+          <p:nvPr>
+            <p:ph type="sldNum" sz="quarter" idx="10"/>
+          </p:nvPr>
+        </p:nvSpPr>
+        <p:spPr/>
+        <p:txBody>
+          <a:bodyPr/>
+          <a:lstStyle/>
+          <a:p>
+            <a:fld id="{F7021451-1387-4CA6-816F-3879F97B5CBC}" type="slidenum">
+              <a:rPr lang="en-US"/>
+              <a:t>20</a:t>
+            </a:fld>
+            <a:endParaRPr lang="en-US"/>
+          </a:p>
+        </p:txBody>
+      </p:sp>
+    </p:spTree>
+    <p:extLst>
+      <p:ext uri="{BB962C8B-B14F-4D97-AF65-F5344CB8AC3E}">
+        <p14:creationId xmlns:p14="http://schemas.microsoft.com/office/powerpoint/2010/main" val="1024086991"/>
+      </p:ext>
+    </p:extLst>
+  </p:cSld>
+  <p:clrMapOvr>
+    <a:masterClrMapping/>
+  </p:clrMapOvr>
+</p:notes>
+</file>
+
+<file path=ppt/notesSlides/notesSlide21.xml><?xml version="1.0" encoding="utf-8"?>
+<p:notes xmlns:a="http://schemas.openxmlformats.org/drawingml/2006/main" xmlns:r="http://schemas.openxmlformats.org/officeDocument/2006/relationships" xmlns:p="http://schemas.openxmlformats.org/presentationml/2006/main">
+  <p:cSld>
+    <p:spTree>
+      <p:nvGrpSpPr>
+        <p:cNvPr id="1" name=""/>
+        <p:cNvGrpSpPr/>
+        <p:nvPr/>
+      </p:nvGrpSpPr>
+      <p:grpSpPr>
+        <a:xfrm>
+          <a:off x="0" y="0"/>
+          <a:ext cx="0" cy="0"/>
+          <a:chOff x="0" y="0"/>
+          <a:chExt cx="0" cy="0"/>
+        </a:xfrm>
+      </p:grpSpPr>
+      <p:sp>
+        <p:nvSpPr>
+          <p:cNvPr id="2" name="Slide Image Placeholder 1"/>
+          <p:cNvSpPr>
+            <a:spLocks noGrp="1" noRot="1" noChangeAspect="1"/>
+          </p:cNvSpPr>
+          <p:nvPr>
+            <p:ph type="sldImg"/>
+          </p:nvPr>
+        </p:nvSpPr>
+        <p:spPr/>
+      </p:sp>
+      <p:sp>
+        <p:nvSpPr>
+          <p:cNvPr id="3" name="Notes Placeholder 2"/>
+          <p:cNvSpPr>
+            <a:spLocks noGrp="1"/>
+          </p:cNvSpPr>
+          <p:nvPr>
+            <p:ph type="body" idx="1"/>
+          </p:nvPr>
+        </p:nvSpPr>
+        <p:spPr/>
+        <p:txBody>
+          <a:bodyPr/>
+          <a:lstStyle/>
+          <a:p>
+            <a:r>
+              <a:rPr lang="en-US" dirty="0"/>
+              <a:t/>
+            </a:r>
+            <a:endParaRPr lang="en-US" dirty="0"/>
+          </a:p>
+        </p:txBody>
+      </p:sp>
+      <p:sp>
+        <p:nvSpPr>
+          <p:cNvPr id="4" name="Slide Number Placeholder 3"/>
+          <p:cNvSpPr>
+            <a:spLocks noGrp="1"/>
+          </p:cNvSpPr>
+          <p:nvPr>
+            <p:ph type="sldNum" sz="quarter" idx="10"/>
+          </p:nvPr>
+        </p:nvSpPr>
+        <p:spPr/>
+        <p:txBody>
+          <a:bodyPr/>
+          <a:lstStyle/>
+          <a:p>
+            <a:fld id="{F7021451-1387-4CA6-816F-3879F97B5CBC}" type="slidenum">
+              <a:rPr lang="en-US"/>
+              <a:t>21</a:t>
+            </a:fld>
+            <a:endParaRPr lang="en-US"/>
+          </a:p>
+        </p:txBody>
+      </p:sp>
+    </p:spTree>
+    <p:extLst>
+      <p:ext uri="{BB962C8B-B14F-4D97-AF65-F5344CB8AC3E}">
+        <p14:creationId xmlns:p14="http://schemas.microsoft.com/office/powerpoint/2010/main" val="1024086991"/>
+      </p:ext>
+    </p:extLst>
+  </p:cSld>
+  <p:clrMapOvr>
+    <a:masterClrMapping/>
+  </p:clrMapOvr>
+</p:notes>
+</file>
+
 <file path=ppt/notesSlides/notesSlide3.xml><?xml version="1.0" encoding="utf-8"?>
 <p:notes xmlns:a="http://schemas.openxmlformats.org/drawingml/2006/main" xmlns:r="http://schemas.openxmlformats.org/officeDocument/2006/relationships" xmlns:p="http://schemas.openxmlformats.org/presentationml/2006/main">
   <p:cSld>
@@ -1664,7 +1842,7 @@
           <a:p>
             <a:r>
               <a:rPr lang="en-US" dirty="0"/>
-              <a:t>De-zonation is not one thing. Pericentral OR periportal cells could deplete; cells could co-express both poles; cells could turn both off; or the periportal-to-pericentral ratio could shift. We deliberately say 'depletion' generally — we suspected pericentral depletion and will show it is absent, but depletion is the general confounder and we test each mechanism. A single correlation score conflates them; counts separate them.</a:t>
+              <a:t>Show the legacy approach and the claim it produced, then dismantle it. We first read the data with a z-scored relative ruler and marker correlations — which produced the headline 'hepatocytes lose zonation, pericentral turns off.' But every such metric is a relative summary pooled across all samples; it hides who moved and is bent by depth, cell number and tissue source. That motivated the pivot to raw molecule counts on the matched axis.</a:t>
             </a:r>
             <a:endParaRPr lang="en-US" dirty="0"/>
           </a:p>
@@ -1752,7 +1930,7 @@
           <a:p>
             <a:r>
               <a:rPr lang="en-US" dirty="0"/>
-              <a:t>The load-bearing point. Disease stage is collinear with how the tissue was obtained: healthy and end-stage are deceased-donor organ tissue and explants; F0–F4 are needle biopsies. So a 'progressive' trajectory can be manufactured by procurement, ischemia, dissociation or batch. We restrict the disease axis to the matched biopsies, F1–F4.</a:t>
+              <a:t>De-zonation is not one thing. Pericentral OR periportal cells could deplete; cells could co-express both poles; cells could turn both off; or the periportal-to-pericentral ratio could shift. We deliberately say 'depletion' generally — we suspected pericentral depletion and will show it is absent, but depletion is the general confounder and we test each mechanism. A single correlation score conflates them; counts separate them.</a:t>
             </a:r>
             <a:endParaRPr lang="en-US" dirty="0"/>
           </a:p>
@@ -1840,7 +2018,7 @@
           <a:p>
             <a:r>
               <a:rPr lang="en-US" dirty="0"/>
-              <a:t>The decisive cross-lineage control: stress is ~22x higher in end-stage explants than biopsies — but endothelial cells, which have no zonation program, show the same ~18x immediate-early spike as hepatocytes. So this is organ-wide acute handling stress, not a hepatocyte zonation program — which justifies excluding the deceased-donor and explant endpoints.</a:t>
+              <a:t>The load-bearing point. Disease stage is collinear with how the tissue was obtained: healthy and end-stage are deceased-donor organ tissue and explants; F0–F4 are needle biopsies. So a 'progressive' trajectory can be manufactured by procurement, ischemia, dissociation or batch. We restrict the disease axis to the matched biopsies, F1–F4.</a:t>
             </a:r>
             <a:endParaRPr lang="en-US" dirty="0"/>
           </a:p>
@@ -1928,7 +2106,7 @@
           <a:p>
             <a:r>
               <a:rPr lang="en-US" dirty="0"/>
-              <a:t>Why raw counts: a single marker molecule may be ambient, so absolute molecule detection matters and SCT-normalized values are the wrong object. We down-thin every nucleus to a common 1,500-UMI budget, call a marker on only at &gt;=2 UMIs, classify each hepatocyte PC/PP/dual/null, and infer at the donor level (~47) to avoid pseudoreplication. Robust across the marker/threshold sensitivity grid.</a:t>
+              <a:t>The decisive cross-lineage control: stress is ~22x higher in end-stage explants than biopsies — but endothelial cells, which have no zonation program, show the same ~18x immediate-early spike as hepatocytes. So this is organ-wide acute handling stress, not a hepatocyte zonation program — which justifies excluding the deceased-donor and explant endpoints.</a:t>
             </a:r>
             <a:endParaRPr lang="en-US" dirty="0"/>
           </a:p>
@@ -2016,7 +2194,7 @@
           <a:p>
             <a:r>
               <a:rPr lang="en-US" dirty="0"/>
-              <a:t>The core result. Pericentral-anchor fraction is flat/non-monotone across F0-F4 — no depletion. Dual co-expression at the ambient-robust &gt;=2-UMI cut stays ~0.4% and does not trend (vs ~2.9% in the confounded explants). Null and PP:PC are also flat. The equivalence bound excludes a large ~20-percentage-point shift but cannot exclude subtle drift below ~10 points (F4 n=4).</a:t>
+              <a:t>Why raw counts: a single marker molecule may be ambient, so absolute molecule detection matters and SCT-normalized values are the wrong object. We down-thin every nucleus to a common 1,500-UMI budget, call a marker on only at &gt;=2 UMIs, classify each hepatocyte PC/PP/dual/null, and infer at the donor level (~47) to avoid pseudoreplication. Robust across the marker/threshold sensitivity grid.</a:t>
             </a:r>
             <a:endParaRPr lang="en-US" dirty="0"/>
           </a:p>
@@ -2104,7 +2282,7 @@
           <a:p>
             <a:r>
               <a:rPr lang="en-US" dirty="0"/>
-              <a:t>Pseudobulk per donor — donors, not cells, are the replicates. This is an independent count-based check (zonation genes flat, GLUL FDR 0.80) plus a discovery layer: only 64 of ~21,000 genes are significant, and they are biliary/ductular markers, not a broad program. Careful wording: no large single-GENE program outside the biliary burden — gene-set testing is still owed for weak coordinated pathways.</a:t>
+              <a:t>The core result. Pericentral-anchor fraction is flat/non-monotone across F0-F4 — no depletion. Dual co-expression at the ambient-robust &gt;=2-UMI cut stays ~0.4% and does not trend (vs ~2.9% in the confounded explants). Null and PP:PC are also flat. The equivalence bound excludes a large ~20-percentage-point shift but cannot exclude subtle drift below ~10 points (F4 n=4).</a:t>
             </a:r>
             <a:endParaRPr lang="en-US" dirty="0"/>
           </a:p>
@@ -2843,7 +3021,7 @@
                   <a:srgbClr val="C0562B"/>
                 </a:solidFill>
               </a:rPr>
-              <a:t>SOURCE</a:t>
+              <a:t>GENOME-WIDE</a:t>
             </a:r>
             <a:endParaRPr lang="en-US" sz="1300" dirty="0"/>
           </a:p>
@@ -2882,7 +3060,7 @@
                 <a:ea typeface="Georgia" pitchFamily="34" charset="-122"/>
                 <a:cs typeface="Georgia" pitchFamily="34" charset="-120"/>
               </a:rPr>
-              <a:t>The biliary burden looks compositional</a:t>
+              <a:t>One signal: biliary markers</a:t>
             </a:r>
             <a:endParaRPr lang="en-US" sz="2800" dirty="0"/>
           </a:p>
@@ -2890,7 +3068,7 @@
       </p:sp>
       <p:pic>
         <p:nvPicPr>
-          <p:cNvPr id="5" name="Image 0" descr="D:\CS\Genomics\Hackathon\presentation/assets/fig_compositional.png">    </p:cNvPr>
+          <p:cNvPr id="5" name="Image 0" descr="D:\CS\Genomics\Hackathon\presentation/assets/fig_volcano.png">    </p:cNvPr>
           <p:cNvPicPr>
             <a:picLocks noChangeAspect="1"/>
           </p:cNvPicPr>
@@ -2904,7 +3082,7 @@
         <p:spPr>
           <a:xfrm>
             <a:off x="274320" y="1371600"/>
-            <a:ext cx="11612880" cy="3566160"/>
+            <a:ext cx="7955280" cy="4114800"/>
           </a:xfrm>
           <a:prstGeom prst="rect">
             <a:avLst/>
@@ -2919,8 +3097,8 @@
         </p:nvSpPr>
         <p:spPr>
           <a:xfrm>
-            <a:off x="274320" y="4983480"/>
-            <a:ext cx="11612880" cy="365760"/>
+            <a:off x="274320" y="5532120"/>
+            <a:ext cx="7955280" cy="365760"/>
           </a:xfrm>
           <a:prstGeom prst="rect">
             <a:avLst/>
@@ -2941,7 +3119,7 @@
                   <a:srgbClr val="6B6256"/>
                 </a:solidFill>
               </a:rPr>
-              <a:t>Figure 4.  Source attribution — cross-lineage abundance, decontX ambient removal, and the F4 ductular reaction.</a:t>
+              <a:t>Figure 3.  Genome-wide pseudobulk differential expression, cirrhotic F4 vs F1 (edgeR).</a:t>
             </a:r>
             <a:endParaRPr lang="en-US" sz="1200" dirty="0"/>
           </a:p>
@@ -2955,8 +3133,123 @@
         </p:nvSpPr>
         <p:spPr>
           <a:xfrm>
-            <a:off x="548640" y="5440680"/>
-            <a:ext cx="11155680" cy="914400"/>
+            <a:off x="8412480" y="1645920"/>
+            <a:ext cx="3474720" cy="3108960"/>
+          </a:xfrm>
+          <a:prstGeom prst="rect">
+            <a:avLst/>
+          </a:prstGeom>
+          <a:noFill/>
+          <a:ln/>
+        </p:spPr>
+        <p:txBody>
+          <a:bodyPr wrap="square" rtlCol="0" anchor="t"/>
+          <a:lstStyle/>
+          <a:p>
+            <a:pPr algn="l" indent="0" marL="0">
+              <a:spcAft>
+                <a:spcPts val="800"/>
+              </a:spcAft>
+              <a:buNone/>
+            </a:pPr>
+            <a:r>
+              <a:rPr lang="en-US" sz="1600" dirty="0">
+                <a:solidFill>
+                  <a:srgbClr val="1E293B"/>
+                </a:solidFill>
+              </a:rPr>
+              <a:t>Pseudobulk per donor; edgeR TMM + NB quasi-likelihood.
+</a:t>
+            </a:r>
+            <a:endParaRPr lang="en-US" sz="1600" dirty="0"/>
+          </a:p>
+          <a:p>
+            <a:pPr algn="l" indent="0" marL="0">
+              <a:spcAft>
+                <a:spcPts val="800"/>
+              </a:spcAft>
+              <a:buNone/>
+            </a:pPr>
+            <a:r>
+              <a:rPr lang="en-US" sz="1600" b="1" dirty="0">
+                <a:solidFill>
+                  <a:srgbClr val="1E293B"/>
+                </a:solidFill>
+              </a:rPr>
+              <a:t>64 genes FDR&lt;0.05 — mostly biliary/ductular.
+</a:t>
+            </a:r>
+            <a:endParaRPr lang="en-US" sz="1600" dirty="0"/>
+          </a:p>
+          <a:p>
+            <a:pPr algn="l" indent="0" marL="0">
+              <a:spcAft>
+                <a:spcPts val="800"/>
+              </a:spcAft>
+              <a:buNone/>
+            </a:pPr>
+            <a:r>
+              <a:rPr lang="en-US" sz="1600" dirty="0">
+                <a:solidFill>
+                  <a:srgbClr val="1D4ED8"/>
+                </a:solidFill>
+              </a:rPr>
+              <a:t>Zonation genes not significant (GLUL FDR 0.80).
+</a:t>
+            </a:r>
+            <a:endParaRPr lang="en-US" sz="1600" dirty="0"/>
+          </a:p>
+          <a:p>
+            <a:pPr algn="l" indent="0" marL="0">
+              <a:spcAft>
+                <a:spcPts val="800"/>
+              </a:spcAft>
+              <a:buNone/>
+            </a:pPr>
+            <a:r>
+              <a:rPr lang="en-US" sz="1600" i="1" dirty="0">
+                <a:solidFill>
+                  <a:srgbClr val="7C3AED"/>
+                </a:solidFill>
+              </a:rPr>
+              <a:t>“No large single-gene program outside the biliary burden.”</a:t>
+            </a:r>
+            <a:endParaRPr lang="en-US" sz="1600" dirty="0"/>
+          </a:p>
+        </p:txBody>
+      </p:sp>
+      <p:sp>
+        <p:nvSpPr>
+          <p:cNvPr id="8" name="Shape 5"/>
+          <p:cNvSpPr/>
+          <p:nvPr/>
+        </p:nvSpPr>
+        <p:spPr>
+          <a:xfrm>
+            <a:off x="8412480" y="5029200"/>
+            <a:ext cx="3474720" cy="731520"/>
+          </a:xfrm>
+          <a:prstGeom prst="roundRect">
+            <a:avLst>
+              <a:gd name="adj" fmla="val 7500"/>
+            </a:avLst>
+          </a:prstGeom>
+          <a:solidFill>
+            <a:srgbClr val="ECE6DA"/>
+          </a:solidFill>
+          <a:ln/>
+        </p:spPr>
+      </p:sp>
+      <p:sp>
+        <p:nvSpPr>
+          <p:cNvPr id="9" name="Text 6"/>
+          <p:cNvSpPr/>
+          <p:nvPr/>
+        </p:nvSpPr>
+        <p:spPr>
+          <a:xfrm>
+            <a:off x="8549640" y="5074920"/>
+            <a:ext cx="3200400" cy="640080"/>
           </a:xfrm>
           <a:prstGeom prst="rect">
             <a:avLst/>
@@ -2972,86 +3265,20 @@
               <a:buNone/>
             </a:pPr>
             <a:r>
-              <a:rPr lang="en-US" sz="1500" b="1" dirty="0">
-                <a:solidFill>
-                  <a:srgbClr val="065F46"/>
-                </a:solidFill>
-              </a:rPr>
-              <a:t>Strong: </a:t>
-            </a:r>
-            <a:pPr algn="l" indent="0" marL="0">
-              <a:buNone/>
-            </a:pPr>
-            <a:r>
-              <a:rPr lang="en-US" sz="1500" dirty="0">
-                <a:solidFill>
-                  <a:srgbClr val="1E293B"/>
-                </a:solidFill>
-              </a:rPr>
-              <a:t>biliary genes far more abundant in cholangiocytes; hepatocyte co-expression rare (~0.4%).   </a:t>
-            </a:r>
-            <a:pPr algn="l" indent="0" marL="0">
-              <a:buNone/>
-            </a:pPr>
-            <a:r>
-              <a:rPr lang="en-US" sz="1500" b="1" dirty="0">
-                <a:solidFill>
-                  <a:srgbClr val="B45309"/>
-                </a:solidFill>
-              </a:rPr>
-              <a:t>Suggestive: </a:t>
-            </a:r>
-            <a:pPr algn="l" indent="0" marL="0">
-              <a:buNone/>
-            </a:pPr>
-            <a:r>
-              <a:rPr lang="en-US" sz="1500" dirty="0">
-                <a:solidFill>
-                  <a:srgbClr val="1E293B"/>
-                </a:solidFill>
-              </a:rPr>
-              <a:t>decontX halves the hits (ambient contribution — not proof).   </a:t>
-            </a:r>
-            <a:pPr algn="l" indent="0" marL="0">
-              <a:buNone/>
-            </a:pPr>
-            <a:r>
-              <a:rPr lang="en-US" sz="1500" b="1" dirty="0">
-                <a:solidFill>
-                  <a:srgbClr val="BE123C"/>
-                </a:solidFill>
-              </a:rPr>
-              <a:t>Open: </a:t>
-            </a:r>
-            <a:pPr algn="l" indent="0" marL="0">
-              <a:buNone/>
-            </a:pPr>
-            <a:r>
-              <a:rPr lang="en-US" sz="1500" dirty="0">
-                <a:solidFill>
-                  <a:srgbClr val="1E293B"/>
-                </a:solidFill>
-              </a:rPr>
-              <a:t>EPCAM/SPINT2/B3GNT3 survive.  </a:t>
-            </a:r>
-            <a:pPr algn="l" indent="0" marL="0">
-              <a:buNone/>
-            </a:pPr>
-            <a:r>
-              <a:rPr lang="en-US" sz="1500" b="1" dirty="0">
-                <a:solidFill>
-                  <a:srgbClr val="DC2626"/>
-                </a:solidFill>
-              </a:rPr>
-              <a:t>CXCL10 = possible real inflammation (does not track cholangiocytes).</a:t>
-            </a:r>
-            <a:endParaRPr lang="en-US" sz="1500" dirty="0"/>
-          </a:p>
-        </p:txBody>
-      </p:sp>
-      <p:sp>
-        <p:nvSpPr>
-          <p:cNvPr id="8" name="Text 5"/>
+              <a:rPr lang="en-US" sz="1300" i="1" dirty="0">
+                <a:solidFill>
+                  <a:srgbClr val="6B6256"/>
+                </a:solidFill>
+              </a:rPr>
+              <a:t>Caveat: weak coordinated pathways still need gene-set testing.</a:t>
+            </a:r>
+            <a:endParaRPr lang="en-US" sz="1300" dirty="0"/>
+          </a:p>
+        </p:txBody>
+      </p:sp>
+      <p:sp>
+        <p:nvSpPr>
+          <p:cNvPr id="10" name="Text 7"/>
           <p:cNvSpPr/>
           <p:nvPr/>
         </p:nvSpPr>
@@ -3087,7 +3314,7 @@
       </p:sp>
       <p:sp>
         <p:nvSpPr>
-          <p:cNvPr id="9" name="Text 6"/>
+          <p:cNvPr id="11" name="Text 8"/>
           <p:cNvSpPr/>
           <p:nvPr/>
         </p:nvSpPr>
@@ -3132,6 +3359,366 @@
 <file path=ppt/slides/slide11.xml><?xml version="1.0" encoding="utf-8"?>
 <p:sld xmlns:a="http://schemas.openxmlformats.org/drawingml/2006/main" xmlns:r="http://schemas.openxmlformats.org/officeDocument/2006/relationships" xmlns:p="http://schemas.openxmlformats.org/presentationml/2006/main">
   <p:cSld name="Slide 11">
+    <p:bg>
+      <p:bgPr>
+        <a:solidFill>
+          <a:srgbClr val="F7F3EB"/>
+        </a:solidFill>
+      </p:bgPr>
+    </p:bg>
+    <p:spTree>
+      <p:nvGrpSpPr>
+        <p:cNvPr id="1" name=""/>
+        <p:cNvGrpSpPr/>
+        <p:nvPr/>
+      </p:nvGrpSpPr>
+      <p:grpSpPr>
+        <a:xfrm>
+          <a:off x="0" y="0"/>
+          <a:ext cx="0" cy="0"/>
+          <a:chOff x="0" y="0"/>
+          <a:chExt cx="0" cy="0"/>
+        </a:xfrm>
+      </p:grpSpPr>
+      <p:sp>
+        <p:nvSpPr>
+          <p:cNvPr id="2" name="Shape 0"/>
+          <p:cNvSpPr/>
+          <p:nvPr/>
+        </p:nvSpPr>
+        <p:spPr>
+          <a:xfrm>
+            <a:off x="457200" y="310896"/>
+            <a:ext cx="146304" cy="237744"/>
+          </a:xfrm>
+          <a:prstGeom prst="rect">
+            <a:avLst/>
+          </a:prstGeom>
+          <a:solidFill>
+            <a:srgbClr val="C0562B"/>
+          </a:solidFill>
+          <a:ln/>
+        </p:spPr>
+      </p:sp>
+      <p:sp>
+        <p:nvSpPr>
+          <p:cNvPr id="3" name="Text 1"/>
+          <p:cNvSpPr/>
+          <p:nvPr/>
+        </p:nvSpPr>
+        <p:spPr>
+          <a:xfrm>
+            <a:off x="676656" y="274320"/>
+            <a:ext cx="10972800" cy="320040"/>
+          </a:xfrm>
+          <a:prstGeom prst="rect">
+            <a:avLst/>
+          </a:prstGeom>
+          <a:noFill/>
+          <a:ln/>
+        </p:spPr>
+        <p:txBody>
+          <a:bodyPr wrap="square" lIns="0" tIns="0" rIns="0" bIns="0" rtlCol="0" anchor="ctr"/>
+          <a:lstStyle/>
+          <a:p>
+            <a:pPr algn="l" indent="0" marL="0">
+              <a:buNone/>
+            </a:pPr>
+            <a:r>
+              <a:rPr lang="en-US" sz="1300" b="1" spc="300" kern="0" dirty="0">
+                <a:solidFill>
+                  <a:srgbClr val="C0562B"/>
+                </a:solidFill>
+              </a:rPr>
+              <a:t>SOURCE</a:t>
+            </a:r>
+            <a:endParaRPr lang="en-US" sz="1300" dirty="0"/>
+          </a:p>
+        </p:txBody>
+      </p:sp>
+      <p:sp>
+        <p:nvSpPr>
+          <p:cNvPr id="4" name="Text 2"/>
+          <p:cNvSpPr/>
+          <p:nvPr/>
+        </p:nvSpPr>
+        <p:spPr>
+          <a:xfrm>
+            <a:off x="438912" y="585216"/>
+            <a:ext cx="11338560" cy="777240"/>
+          </a:xfrm>
+          <a:prstGeom prst="rect">
+            <a:avLst/>
+          </a:prstGeom>
+          <a:noFill/>
+          <a:ln/>
+        </p:spPr>
+        <p:txBody>
+          <a:bodyPr wrap="square" lIns="0" tIns="0" rIns="0" bIns="0" rtlCol="0" anchor="t"/>
+          <a:lstStyle/>
+          <a:p>
+            <a:pPr algn="l" indent="0" marL="0">
+              <a:buNone/>
+            </a:pPr>
+            <a:r>
+              <a:rPr lang="en-US" sz="2800" b="1" dirty="0">
+                <a:solidFill>
+                  <a:srgbClr val="1F3A3D"/>
+                </a:solidFill>
+                <a:latin typeface="Georgia" pitchFamily="34" charset="0"/>
+                <a:ea typeface="Georgia" pitchFamily="34" charset="-122"/>
+                <a:cs typeface="Georgia" pitchFamily="34" charset="-120"/>
+              </a:rPr>
+              <a:t>The biliary burden looks compositional</a:t>
+            </a:r>
+            <a:endParaRPr lang="en-US" sz="2800" dirty="0"/>
+          </a:p>
+        </p:txBody>
+      </p:sp>
+      <p:pic>
+        <p:nvPicPr>
+          <p:cNvPr id="5" name="Image 0" descr="D:\CS\Genomics\Hackathon\presentation/assets/fig_compositional.png">    </p:cNvPr>
+          <p:cNvPicPr>
+            <a:picLocks noChangeAspect="1"/>
+          </p:cNvPicPr>
+          <p:nvPr/>
+        </p:nvPicPr>
+        <p:blipFill>
+          <a:blip r:embed="rId1"/>
+          <a:srcRect l="0" r="0" t="0" b="0"/>
+          <a:stretch/>
+        </p:blipFill>
+        <p:spPr>
+          <a:xfrm>
+            <a:off x="274320" y="1371600"/>
+            <a:ext cx="11612880" cy="3566160"/>
+          </a:xfrm>
+          <a:prstGeom prst="rect">
+            <a:avLst/>
+          </a:prstGeom>
+        </p:spPr>
+      </p:pic>
+      <p:sp>
+        <p:nvSpPr>
+          <p:cNvPr id="6" name="Text 3"/>
+          <p:cNvSpPr/>
+          <p:nvPr/>
+        </p:nvSpPr>
+        <p:spPr>
+          <a:xfrm>
+            <a:off x="274320" y="4983480"/>
+            <a:ext cx="11612880" cy="365760"/>
+          </a:xfrm>
+          <a:prstGeom prst="rect">
+            <a:avLst/>
+          </a:prstGeom>
+          <a:noFill/>
+          <a:ln/>
+        </p:spPr>
+        <p:txBody>
+          <a:bodyPr wrap="square" lIns="0" tIns="0" rIns="0" bIns="0" rtlCol="0" anchor="ctr"/>
+          <a:lstStyle/>
+          <a:p>
+            <a:pPr algn="ctr" indent="0" marL="0">
+              <a:buNone/>
+            </a:pPr>
+            <a:r>
+              <a:rPr lang="en-US" sz="1200" i="1" dirty="0">
+                <a:solidFill>
+                  <a:srgbClr val="6B6256"/>
+                </a:solidFill>
+              </a:rPr>
+              <a:t>Figure 4.  Source attribution — cross-lineage abundance, decontX ambient removal, and the F4 ductular reaction.</a:t>
+            </a:r>
+            <a:endParaRPr lang="en-US" sz="1200" dirty="0"/>
+          </a:p>
+        </p:txBody>
+      </p:sp>
+      <p:sp>
+        <p:nvSpPr>
+          <p:cNvPr id="7" name="Text 4"/>
+          <p:cNvSpPr/>
+          <p:nvPr/>
+        </p:nvSpPr>
+        <p:spPr>
+          <a:xfrm>
+            <a:off x="548640" y="5440680"/>
+            <a:ext cx="11155680" cy="914400"/>
+          </a:xfrm>
+          <a:prstGeom prst="rect">
+            <a:avLst/>
+          </a:prstGeom>
+          <a:noFill/>
+          <a:ln/>
+        </p:spPr>
+        <p:txBody>
+          <a:bodyPr wrap="square" rtlCol="0" anchor="ctr"/>
+          <a:lstStyle/>
+          <a:p>
+            <a:pPr algn="l" indent="0" marL="0">
+              <a:buNone/>
+            </a:pPr>
+            <a:r>
+              <a:rPr lang="en-US" sz="1500" b="1" dirty="0">
+                <a:solidFill>
+                  <a:srgbClr val="065F46"/>
+                </a:solidFill>
+              </a:rPr>
+              <a:t>Strong: </a:t>
+            </a:r>
+            <a:pPr algn="l" indent="0" marL="0">
+              <a:buNone/>
+            </a:pPr>
+            <a:r>
+              <a:rPr lang="en-US" sz="1500" dirty="0">
+                <a:solidFill>
+                  <a:srgbClr val="1E293B"/>
+                </a:solidFill>
+              </a:rPr>
+              <a:t>biliary genes far more abundant in cholangiocytes; hepatocyte co-expression rare (~0.4%).   </a:t>
+            </a:r>
+            <a:pPr algn="l" indent="0" marL="0">
+              <a:buNone/>
+            </a:pPr>
+            <a:r>
+              <a:rPr lang="en-US" sz="1500" b="1" dirty="0">
+                <a:solidFill>
+                  <a:srgbClr val="B45309"/>
+                </a:solidFill>
+              </a:rPr>
+              <a:t>Suggestive: </a:t>
+            </a:r>
+            <a:pPr algn="l" indent="0" marL="0">
+              <a:buNone/>
+            </a:pPr>
+            <a:r>
+              <a:rPr lang="en-US" sz="1500" dirty="0">
+                <a:solidFill>
+                  <a:srgbClr val="1E293B"/>
+                </a:solidFill>
+              </a:rPr>
+              <a:t>decontX halves the hits (ambient contribution — not proof).   </a:t>
+            </a:r>
+            <a:pPr algn="l" indent="0" marL="0">
+              <a:buNone/>
+            </a:pPr>
+            <a:r>
+              <a:rPr lang="en-US" sz="1500" b="1" dirty="0">
+                <a:solidFill>
+                  <a:srgbClr val="BE123C"/>
+                </a:solidFill>
+              </a:rPr>
+              <a:t>Open: </a:t>
+            </a:r>
+            <a:pPr algn="l" indent="0" marL="0">
+              <a:buNone/>
+            </a:pPr>
+            <a:r>
+              <a:rPr lang="en-US" sz="1500" dirty="0">
+                <a:solidFill>
+                  <a:srgbClr val="1E293B"/>
+                </a:solidFill>
+              </a:rPr>
+              <a:t>EPCAM/SPINT2/B3GNT3 survive.  </a:t>
+            </a:r>
+            <a:pPr algn="l" indent="0" marL="0">
+              <a:buNone/>
+            </a:pPr>
+            <a:r>
+              <a:rPr lang="en-US" sz="1500" b="1" dirty="0">
+                <a:solidFill>
+                  <a:srgbClr val="DC2626"/>
+                </a:solidFill>
+              </a:rPr>
+              <a:t>CXCL10 = possible real inflammation (does not track cholangiocytes).</a:t>
+            </a:r>
+            <a:endParaRPr lang="en-US" sz="1500" dirty="0"/>
+          </a:p>
+        </p:txBody>
+      </p:sp>
+      <p:sp>
+        <p:nvSpPr>
+          <p:cNvPr id="8" name="Text 5"/>
+          <p:cNvSpPr/>
+          <p:nvPr/>
+        </p:nvSpPr>
+        <p:spPr>
+          <a:xfrm>
+            <a:off x="457200" y="6510528"/>
+            <a:ext cx="9601200" cy="274320"/>
+          </a:xfrm>
+          <a:prstGeom prst="rect">
+            <a:avLst/>
+          </a:prstGeom>
+          <a:noFill/>
+          <a:ln/>
+        </p:spPr>
+        <p:txBody>
+          <a:bodyPr wrap="square" lIns="0" tIns="0" rIns="0" bIns="0" rtlCol="0" anchor="ctr"/>
+          <a:lstStyle/>
+          <a:p>
+            <a:pPr algn="l" indent="0" marL="0">
+              <a:buNone/>
+            </a:pPr>
+            <a:r>
+              <a:rPr lang="en-US" sz="1050" dirty="0">
+                <a:solidFill>
+                  <a:srgbClr val="6B6256"/>
+                </a:solidFill>
+              </a:rPr>
+              <a:t>Computational Genomics 76553  ·  HUJI  ·  MASLD snRNA-seq hackathon</a:t>
+            </a:r>
+            <a:endParaRPr lang="en-US" sz="1050" dirty="0"/>
+          </a:p>
+        </p:txBody>
+      </p:sp>
+      <p:sp>
+        <p:nvSpPr>
+          <p:cNvPr id="9" name="Text 6"/>
+          <p:cNvSpPr/>
+          <p:nvPr/>
+        </p:nvSpPr>
+        <p:spPr>
+          <a:xfrm>
+            <a:off x="11155680" y="6510528"/>
+            <a:ext cx="548640" cy="274320"/>
+          </a:xfrm>
+          <a:prstGeom prst="rect">
+            <a:avLst/>
+          </a:prstGeom>
+          <a:noFill/>
+          <a:ln/>
+        </p:spPr>
+        <p:txBody>
+          <a:bodyPr wrap="square" lIns="0" tIns="0" rIns="0" bIns="0" rtlCol="0" anchor="ctr"/>
+          <a:lstStyle/>
+          <a:p>
+            <a:pPr algn="r" indent="0" marL="0">
+              <a:buNone/>
+            </a:pPr>
+            <a:r>
+              <a:rPr lang="en-US" sz="1050" dirty="0">
+                <a:solidFill>
+                  <a:srgbClr val="6B6256"/>
+                </a:solidFill>
+              </a:rPr>
+              <a:t>11</a:t>
+            </a:r>
+            <a:endParaRPr lang="en-US" sz="1050" dirty="0"/>
+          </a:p>
+        </p:txBody>
+      </p:sp>
+    </p:spTree>
+  </p:cSld>
+  <p:clrMapOvr>
+    <a:masterClrMapping/>
+  </p:clrMapOvr>
+</p:sld>
+</file>
+
+<file path=ppt/slides/slide12.xml><?xml version="1.0" encoding="utf-8"?>
+<p:sld xmlns:a="http://schemas.openxmlformats.org/drawingml/2006/main" xmlns:r="http://schemas.openxmlformats.org/officeDocument/2006/relationships" xmlns:p="http://schemas.openxmlformats.org/presentationml/2006/main">
+  <p:cSld name="Slide 12">
     <p:bg>
       <p:bgPr>
         <a:solidFill>
@@ -3838,246 +4425,9 @@
                   <a:srgbClr val="6B6256"/>
                 </a:solidFill>
               </a:rPr>
-              <a:t>11</a:t>
+              <a:t>12</a:t>
             </a:r>
             <a:endParaRPr lang="en-US" sz="1050" dirty="0"/>
-          </a:p>
-        </p:txBody>
-      </p:sp>
-    </p:spTree>
-  </p:cSld>
-  <p:clrMapOvr>
-    <a:masterClrMapping/>
-  </p:clrMapOvr>
-</p:sld>
-</file>
-
-<file path=ppt/slides/slide12.xml><?xml version="1.0" encoding="utf-8"?>
-<p:sld xmlns:a="http://schemas.openxmlformats.org/drawingml/2006/main" xmlns:r="http://schemas.openxmlformats.org/officeDocument/2006/relationships" xmlns:p="http://schemas.openxmlformats.org/presentationml/2006/main">
-  <p:cSld name="Slide 12">
-    <p:bg>
-      <p:bgPr>
-        <a:solidFill>
-          <a:srgbClr val="F7F3EB"/>
-        </a:solidFill>
-      </p:bgPr>
-    </p:bg>
-    <p:spTree>
-      <p:nvGrpSpPr>
-        <p:cNvPr id="1" name=""/>
-        <p:cNvGrpSpPr/>
-        <p:nvPr/>
-      </p:nvGrpSpPr>
-      <p:grpSpPr>
-        <a:xfrm>
-          <a:off x="0" y="0"/>
-          <a:ext cx="0" cy="0"/>
-          <a:chOff x="0" y="0"/>
-          <a:chExt cx="0" cy="0"/>
-        </a:xfrm>
-      </p:grpSpPr>
-      <p:sp>
-        <p:nvSpPr>
-          <p:cNvPr id="2" name="Shape 0"/>
-          <p:cNvSpPr/>
-          <p:nvPr/>
-        </p:nvSpPr>
-        <p:spPr>
-          <a:xfrm>
-            <a:off x="457200" y="310896"/>
-            <a:ext cx="146304" cy="237744"/>
-          </a:xfrm>
-          <a:prstGeom prst="rect">
-            <a:avLst/>
-          </a:prstGeom>
-          <a:solidFill>
-            <a:srgbClr val="C0562B"/>
-          </a:solidFill>
-          <a:ln/>
-        </p:spPr>
-      </p:sp>
-      <p:sp>
-        <p:nvSpPr>
-          <p:cNvPr id="3" name="Text 1"/>
-          <p:cNvSpPr/>
-          <p:nvPr/>
-        </p:nvSpPr>
-        <p:spPr>
-          <a:xfrm>
-            <a:off x="676656" y="274320"/>
-            <a:ext cx="10972800" cy="320040"/>
-          </a:xfrm>
-          <a:prstGeom prst="rect">
-            <a:avLst/>
-          </a:prstGeom>
-          <a:noFill/>
-          <a:ln/>
-        </p:spPr>
-        <p:txBody>
-          <a:bodyPr wrap="square" rtlCol="0" anchor="ctr"/>
-          <a:lstStyle/>
-          <a:p>
-            <a:pPr indent="0" marL="0">
-              <a:buNone/>
-            </a:pPr>
-            <a:r>
-              <a:rPr lang="en-US" sz="1300" b="1" spc="300" kern="0" dirty="0">
-                <a:solidFill>
-                  <a:srgbClr val="C0562B"/>
-                </a:solidFill>
-              </a:rPr>
-              <a:t>BACKUP  ·  DE-ZONATION MECHANISMS</a:t>
-            </a:r>
-            <a:endParaRPr lang="en-US" sz="1300" dirty="0"/>
-          </a:p>
-        </p:txBody>
-      </p:sp>
-      <p:sp>
-        <p:nvSpPr>
-          <p:cNvPr id="4" name="Text 2"/>
-          <p:cNvSpPr/>
-          <p:nvPr/>
-        </p:nvSpPr>
-        <p:spPr>
-          <a:xfrm>
-            <a:off x="438912" y="585216"/>
-            <a:ext cx="11338560" cy="731520"/>
-          </a:xfrm>
-          <a:prstGeom prst="rect">
-            <a:avLst/>
-          </a:prstGeom>
-          <a:noFill/>
-          <a:ln/>
-        </p:spPr>
-        <p:txBody>
-          <a:bodyPr wrap="square" rtlCol="0" anchor="ctr"/>
-          <a:lstStyle/>
-          <a:p>
-            <a:pPr algn="l" indent="0" marL="0">
-              <a:buNone/>
-            </a:pPr>
-            <a:r>
-              <a:rPr lang="en-US" sz="2600" b="1" dirty="0">
-                <a:solidFill>
-                  <a:srgbClr val="1F3A3D"/>
-                </a:solidFill>
-                <a:latin typeface="Georgia" pitchFamily="34" charset="0"/>
-                <a:ea typeface="Georgia" pitchFamily="34" charset="-122"/>
-                <a:cs typeface="Georgia" pitchFamily="34" charset="-120"/>
-              </a:rPr>
-              <a:t>Full four-mechanism panel (F0–F4)</a:t>
-            </a:r>
-            <a:endParaRPr lang="en-US" sz="2600" dirty="0"/>
-          </a:p>
-        </p:txBody>
-      </p:sp>
-      <p:pic>
-        <p:nvPicPr>
-          <p:cNvPr id="5" name="Image 0" descr="D:\CS\Genomics\Hackathon\presentation/assets/fig_anchor2x2.png">    </p:cNvPr>
-          <p:cNvPicPr>
-            <a:picLocks noChangeAspect="1"/>
-          </p:cNvPicPr>
-          <p:nvPr/>
-        </p:nvPicPr>
-        <p:blipFill>
-          <a:blip r:embed="rId1"/>
-          <a:srcRect l="0" r="0" t="0" b="0"/>
-          <a:stretch/>
-        </p:blipFill>
-        <p:spPr>
-          <a:xfrm>
-            <a:off x="1188720" y="1371600"/>
-            <a:ext cx="8412480" cy="4572000"/>
-          </a:xfrm>
-          <a:prstGeom prst="rect">
-            <a:avLst/>
-          </a:prstGeom>
-        </p:spPr>
-      </p:pic>
-      <p:sp>
-        <p:nvSpPr>
-          <p:cNvPr id="6" name="Text 3"/>
-          <p:cNvSpPr/>
-          <p:nvPr/>
-        </p:nvSpPr>
-        <p:spPr>
-          <a:xfrm>
-            <a:off x="1188720" y="5943600"/>
-            <a:ext cx="8412480" cy="365760"/>
-          </a:xfrm>
-          <a:prstGeom prst="rect">
-            <a:avLst/>
-          </a:prstGeom>
-          <a:noFill/>
-          <a:ln/>
-        </p:spPr>
-        <p:txBody>
-          <a:bodyPr wrap="square" lIns="0" tIns="0" rIns="0" bIns="0" rtlCol="0" anchor="ctr"/>
-          <a:lstStyle/>
-          <a:p>
-            <a:pPr algn="ctr" indent="0" marL="0">
-              <a:buNone/>
-            </a:pPr>
-            <a:r>
-              <a:rPr lang="en-US" sz="1200" i="1" dirty="0">
-                <a:solidFill>
-                  <a:srgbClr val="6B6256"/>
-                </a:solidFill>
-              </a:rPr>
-              <a:t>Figure 5.  Depletion, co-expression, turn-off and composition across biopsy fibrosis — none shows a large monotone change.</a:t>
-            </a:r>
-            <a:endParaRPr lang="en-US" sz="1200" dirty="0"/>
-          </a:p>
-        </p:txBody>
-      </p:sp>
-      <p:sp>
-        <p:nvSpPr>
-          <p:cNvPr id="7" name="Text 4"/>
-          <p:cNvSpPr/>
-          <p:nvPr/>
-        </p:nvSpPr>
-        <p:spPr>
-          <a:xfrm>
-            <a:off x="9784080" y="2377440"/>
-            <a:ext cx="2194560" cy="2743200"/>
-          </a:xfrm>
-          <a:prstGeom prst="rect">
-            <a:avLst/>
-          </a:prstGeom>
-          <a:noFill/>
-          <a:ln/>
-        </p:spPr>
-        <p:txBody>
-          <a:bodyPr wrap="square" rtlCol="0" anchor="ctr"/>
-          <a:lstStyle/>
-          <a:p>
-            <a:pPr algn="l" indent="0" marL="0">
-              <a:buNone/>
-            </a:pPr>
-            <a:r>
-              <a:rPr lang="en-US" sz="1500" b="1" dirty="0">
-                <a:solidFill>
-                  <a:srgbClr val="1E293B"/>
-                </a:solidFill>
-              </a:rPr>
-              <a:t>None of the four routes shows a large monotone biopsy-axis change.
-</a:t>
-            </a:r>
-            <a:endParaRPr lang="en-US" sz="1500" dirty="0"/>
-          </a:p>
-          <a:p>
-            <a:pPr algn="l" indent="0" marL="0">
-              <a:buNone/>
-            </a:pPr>
-            <a:r>
-              <a:rPr lang="en-US" sz="1500" dirty="0">
-                <a:solidFill>
-                  <a:srgbClr val="BE123C"/>
-                </a:solidFill>
-              </a:rPr>
-              <a:t>Confounded explants: dual ≈ 2.9% (~7×).</a:t>
-            </a:r>
-            <a:endParaRPr lang="en-US" sz="1500" dirty="0"/>
           </a:p>
         </p:txBody>
       </p:sp>
@@ -4163,7 +4513,7 @@
                   <a:srgbClr val="C0562B"/>
                 </a:solidFill>
               </a:rPr>
-              <a:t>BACKUP  ·  SCOPE</a:t>
+              <a:t>BACKUP  ·  DE-ZONATION MECHANISMS</a:t>
             </a:r>
             <a:endParaRPr lang="en-US" sz="1300" dirty="0"/>
           </a:p>
@@ -4202,103 +4552,119 @@
                 <a:ea typeface="Georgia" pitchFamily="34" charset="-122"/>
                 <a:cs typeface="Georgia" pitchFamily="34" charset="-120"/>
               </a:rPr>
-              <a:t>Are you overturning the paper? No</a:t>
+              <a:t>Full four-mechanism panel (F0–F4)</a:t>
             </a:r>
             <a:endParaRPr lang="en-US" sz="2600" dirty="0"/>
           </a:p>
         </p:txBody>
       </p:sp>
-      <p:sp>
-        <p:nvSpPr>
-          <p:cNvPr id="5" name="Text 3"/>
-          <p:cNvSpPr/>
-          <p:nvPr/>
-        </p:nvSpPr>
-        <p:spPr>
-          <a:xfrm>
-            <a:off x="731520" y="1463040"/>
-            <a:ext cx="10607040" cy="4572000"/>
-          </a:xfrm>
-          <a:prstGeom prst="rect">
-            <a:avLst/>
-          </a:prstGeom>
-          <a:noFill/>
-          <a:ln/>
-        </p:spPr>
-        <p:txBody>
-          <a:bodyPr wrap="square" rtlCol="0" anchor="t"/>
-          <a:lstStyle/>
-          <a:p>
-            <a:pPr algn="l" marL="342900" indent="-342900">
-              <a:spcAft>
-                <a:spcPts val="900"/>
-              </a:spcAft>
-              <a:buSzPct val="100000"/>
-              <a:buChar char="•"/>
-            </a:pPr>
-            <a:r>
-              <a:rPr lang="en-US" sz="2000" dirty="0">
+      <p:pic>
+        <p:nvPicPr>
+          <p:cNvPr id="5" name="Image 0" descr="D:\CS\Genomics\Hackathon\presentation/assets/fig_anchor2x2.png">    </p:cNvPr>
+          <p:cNvPicPr>
+            <a:picLocks noChangeAspect="1"/>
+          </p:cNvPicPr>
+          <p:nvPr/>
+        </p:nvPicPr>
+        <p:blipFill>
+          <a:blip r:embed="rId1"/>
+          <a:srcRect l="0" r="0" t="0" b="0"/>
+          <a:stretch/>
+        </p:blipFill>
+        <p:spPr>
+          <a:xfrm>
+            <a:off x="1188720" y="1371600"/>
+            <a:ext cx="8412480" cy="4572000"/>
+          </a:xfrm>
+          <a:prstGeom prst="rect">
+            <a:avLst/>
+          </a:prstGeom>
+        </p:spPr>
+      </p:pic>
+      <p:sp>
+        <p:nvSpPr>
+          <p:cNvPr id="6" name="Text 3"/>
+          <p:cNvSpPr/>
+          <p:nvPr/>
+        </p:nvSpPr>
+        <p:spPr>
+          <a:xfrm>
+            <a:off x="1188720" y="5943600"/>
+            <a:ext cx="8412480" cy="365760"/>
+          </a:xfrm>
+          <a:prstGeom prst="rect">
+            <a:avLst/>
+          </a:prstGeom>
+          <a:noFill/>
+          <a:ln/>
+        </p:spPr>
+        <p:txBody>
+          <a:bodyPr wrap="square" lIns="0" tIns="0" rIns="0" bIns="0" rtlCol="0" anchor="ctr"/>
+          <a:lstStyle/>
+          <a:p>
+            <a:pPr algn="ctr" indent="0" marL="0">
+              <a:buNone/>
+            </a:pPr>
+            <a:r>
+              <a:rPr lang="en-US" sz="1200" i="1" dirty="0">
+                <a:solidFill>
+                  <a:srgbClr val="6B6256"/>
+                </a:solidFill>
+              </a:rPr>
+              <a:t>Figure 5.  Depletion, co-expression, turn-off and composition across biopsy fibrosis — none shows a large monotone change.</a:t>
+            </a:r>
+            <a:endParaRPr lang="en-US" sz="1200" dirty="0"/>
+          </a:p>
+        </p:txBody>
+      </p:sp>
+      <p:sp>
+        <p:nvSpPr>
+          <p:cNvPr id="7" name="Text 4"/>
+          <p:cNvSpPr/>
+          <p:nvPr/>
+        </p:nvSpPr>
+        <p:spPr>
+          <a:xfrm>
+            <a:off x="9784080" y="2377440"/>
+            <a:ext cx="2194560" cy="2743200"/>
+          </a:xfrm>
+          <a:prstGeom prst="rect">
+            <a:avLst/>
+          </a:prstGeom>
+          <a:noFill/>
+          <a:ln/>
+        </p:spPr>
+        <p:txBody>
+          <a:bodyPr wrap="square" rtlCol="0" anchor="ctr"/>
+          <a:lstStyle/>
+          <a:p>
+            <a:pPr algn="l" indent="0" marL="0">
+              <a:buNone/>
+            </a:pPr>
+            <a:r>
+              <a:rPr lang="en-US" sz="1500" b="1" dirty="0">
                 <a:solidFill>
                   <a:srgbClr val="1E293B"/>
                 </a:solidFill>
               </a:rPr>
-              <a:t>We re-tested only the snRNA-seq transcriptional zonation/plasticity evidence.</a:t>
-            </a:r>
-            <a:endParaRPr lang="en-US" sz="2000" dirty="0"/>
-          </a:p>
-          <a:p>
-            <a:pPr algn="l" marL="342900" indent="-342900">
-              <a:spcAft>
-                <a:spcPts val="900"/>
-              </a:spcAft>
-              <a:buSzPct val="100000"/>
-              <a:buChar char="•"/>
-            </a:pPr>
-            <a:r>
-              <a:rPr lang="en-US" sz="2000" dirty="0">
-                <a:solidFill>
-                  <a:srgbClr val="1E293B"/>
-                </a:solidFill>
-              </a:rPr>
-              <a:t>We did NOT test imaging, protein staining, organoids, or 3D architecture.</a:t>
-            </a:r>
-            <a:endParaRPr lang="en-US" sz="2000" dirty="0"/>
-          </a:p>
-          <a:p>
-            <a:pPr algn="l" marL="342900" indent="-342900">
-              <a:spcAft>
-                <a:spcPts val="900"/>
-              </a:spcAft>
-              <a:buSzPct val="100000"/>
-              <a:buChar char="•"/>
-            </a:pPr>
-            <a:r>
-              <a:rPr lang="en-US" sz="2000" dirty="0">
-                <a:solidFill>
-                  <a:srgbClr val="1E293B"/>
-                </a:solidFill>
-              </a:rPr>
-              <a:t>Claim: matched biopsy transcriptomes do not show progressive zonation loss.</a:t>
-            </a:r>
-            <a:endParaRPr lang="en-US" sz="2000" dirty="0"/>
-          </a:p>
-          <a:p>
-            <a:pPr algn="l" marL="342900" indent="-342900">
-              <a:spcAft>
-                <a:spcPts val="900"/>
-              </a:spcAft>
-              <a:buSzPct val="100000"/>
-              <a:buChar char="•"/>
-            </a:pPr>
-            <a:r>
-              <a:rPr lang="en-US" sz="2000" dirty="0">
-                <a:solidFill>
-                  <a:srgbClr val="1E293B"/>
-                </a:solidFill>
-              </a:rPr>
-              <a:t>We agree the strong signal is an end-stage phenomenon.</a:t>
-            </a:r>
-            <a:endParaRPr lang="en-US" sz="2000" dirty="0"/>
+              <a:t>None of the four routes shows a large monotone biopsy-axis change.
+</a:t>
+            </a:r>
+            <a:endParaRPr lang="en-US" sz="1500" dirty="0"/>
+          </a:p>
+          <a:p>
+            <a:pPr algn="l" indent="0" marL="0">
+              <a:buNone/>
+            </a:pPr>
+            <a:r>
+              <a:rPr lang="en-US" sz="1500" dirty="0">
+                <a:solidFill>
+                  <a:srgbClr val="BE123C"/>
+                </a:solidFill>
+              </a:rPr>
+              <a:t>Confounded explants: dual ≈ 2.9% (~7×).</a:t>
+            </a:r>
+            <a:endParaRPr lang="en-US" sz="1500" dirty="0"/>
           </a:p>
         </p:txBody>
       </p:sp>
@@ -4384,7 +4750,7 @@
                   <a:srgbClr val="C0562B"/>
                 </a:solidFill>
               </a:rPr>
-              <a:t>BACKUP  ·  LOBE</a:t>
+              <a:t>BACKUP  ·  SCOPE</a:t>
             </a:r>
             <a:endParaRPr lang="en-US" sz="1300" dirty="0"/>
           </a:p>
@@ -4423,119 +4789,103 @@
                 <a:ea typeface="Georgia" pitchFamily="34" charset="-122"/>
                 <a:cs typeface="Georgia" pitchFamily="34" charset="-120"/>
               </a:rPr>
-              <a:t>Caudate lobe? Lobe-invariant</a:t>
+              <a:t>Are you overturning the paper? No</a:t>
             </a:r>
             <a:endParaRPr lang="en-US" sz="2600" dirty="0"/>
           </a:p>
         </p:txBody>
       </p:sp>
-      <p:pic>
-        <p:nvPicPr>
-          <p:cNvPr id="5" name="Image 0" descr="D:\CS\Genomics\Hackathon\presentation/assets/fig_lobe.png">    </p:cNvPr>
-          <p:cNvPicPr>
-            <a:picLocks noChangeAspect="1"/>
-          </p:cNvPicPr>
-          <p:nvPr/>
-        </p:nvPicPr>
-        <p:blipFill>
-          <a:blip r:embed="rId1"/>
-          <a:srcRect l="0" r="0" t="0" b="0"/>
-          <a:stretch/>
-        </p:blipFill>
-        <p:spPr>
-          <a:xfrm>
-            <a:off x="731520" y="1371600"/>
-            <a:ext cx="6949440" cy="4572000"/>
-          </a:xfrm>
-          <a:prstGeom prst="rect">
-            <a:avLst/>
-          </a:prstGeom>
-        </p:spPr>
-      </p:pic>
-      <p:sp>
-        <p:nvSpPr>
-          <p:cNvPr id="6" name="Text 3"/>
-          <p:cNvSpPr/>
-          <p:nvPr/>
-        </p:nvSpPr>
-        <p:spPr>
-          <a:xfrm>
-            <a:off x="731520" y="5943600"/>
-            <a:ext cx="6949440" cy="365760"/>
-          </a:xfrm>
-          <a:prstGeom prst="rect">
-            <a:avLst/>
-          </a:prstGeom>
-          <a:noFill/>
-          <a:ln/>
-        </p:spPr>
-        <p:txBody>
-          <a:bodyPr wrap="square" lIns="0" tIns="0" rIns="0" bIns="0" rtlCol="0" anchor="ctr"/>
-          <a:lstStyle/>
-          <a:p>
-            <a:pPr algn="ctr" indent="0" marL="0">
-              <a:buNone/>
-            </a:pPr>
-            <a:r>
-              <a:rPr lang="en-US" sz="1200" i="1" dirty="0">
-                <a:solidFill>
-                  <a:srgbClr val="6B6256"/>
-                </a:solidFill>
-              </a:rPr>
-              <a:t>Figure 6.  Zonation-marker detection across Right / Caudate / Left lobes in end-stage explants.</a:t>
-            </a:r>
-            <a:endParaRPr lang="en-US" sz="1200" dirty="0"/>
-          </a:p>
-        </p:txBody>
-      </p:sp>
-      <p:sp>
-        <p:nvSpPr>
-          <p:cNvPr id="7" name="Text 4"/>
-          <p:cNvSpPr/>
-          <p:nvPr/>
-        </p:nvSpPr>
-        <p:spPr>
-          <a:xfrm>
-            <a:off x="7955280" y="2377440"/>
-            <a:ext cx="3657600" cy="2286000"/>
-          </a:xfrm>
-          <a:prstGeom prst="rect">
-            <a:avLst/>
-          </a:prstGeom>
-          <a:noFill/>
-          <a:ln/>
-        </p:spPr>
-        <p:txBody>
-          <a:bodyPr wrap="square" rtlCol="0" anchor="ctr"/>
-          <a:lstStyle/>
-          <a:p>
-            <a:pPr algn="l" indent="0" marL="0">
-              <a:buNone/>
-            </a:pPr>
-            <a:r>
-              <a:rPr lang="en-US" sz="1800" b="1" dirty="0">
+      <p:sp>
+        <p:nvSpPr>
+          <p:cNvPr id="5" name="Text 3"/>
+          <p:cNvSpPr/>
+          <p:nvPr/>
+        </p:nvSpPr>
+        <p:spPr>
+          <a:xfrm>
+            <a:off x="731520" y="1463040"/>
+            <a:ext cx="10607040" cy="4572000"/>
+          </a:xfrm>
+          <a:prstGeom prst="rect">
+            <a:avLst/>
+          </a:prstGeom>
+          <a:noFill/>
+          <a:ln/>
+        </p:spPr>
+        <p:txBody>
+          <a:bodyPr wrap="square" rtlCol="0" anchor="t"/>
+          <a:lstStyle/>
+          <a:p>
+            <a:pPr algn="l" marL="342900" indent="-342900">
+              <a:spcAft>
+                <a:spcPts val="900"/>
+              </a:spcAft>
+              <a:buSzPct val="100000"/>
+              <a:buChar char="•"/>
+            </a:pPr>
+            <a:r>
+              <a:rPr lang="en-US" sz="2000" dirty="0">
                 <a:solidFill>
                   <a:srgbClr val="1E293B"/>
                 </a:solidFill>
               </a:rPr>
-              <a:t>Detection matches across lobes.
-</a:t>
-            </a:r>
-            <a:endParaRPr lang="en-US" sz="1800" dirty="0"/>
-          </a:p>
-          <a:p>
-            <a:pPr algn="l" indent="0" marL="0">
-              <a:buNone/>
-            </a:pPr>
-            <a:r>
-              <a:rPr lang="en-US" sz="1800" dirty="0">
+              <a:t>We re-tested only the snRNA-seq transcriptional zonation/plasticity evidence.</a:t>
+            </a:r>
+            <a:endParaRPr lang="en-US" sz="2000" dirty="0"/>
+          </a:p>
+          <a:p>
+            <a:pPr algn="l" marL="342900" indent="-342900">
+              <a:spcAft>
+                <a:spcPts val="900"/>
+              </a:spcAft>
+              <a:buSzPct val="100000"/>
+              <a:buChar char="•"/>
+            </a:pPr>
+            <a:r>
+              <a:rPr lang="en-US" sz="2000" dirty="0">
                 <a:solidFill>
                   <a:srgbClr val="1E293B"/>
                 </a:solidFill>
               </a:rPr>
-              <a:t>Lobe does not explain the signal; explant-vs-biopsy acquisition still does.</a:t>
-            </a:r>
-            <a:endParaRPr lang="en-US" sz="1800" dirty="0"/>
+              <a:t>We did NOT test imaging, protein staining, organoids, or 3D architecture.</a:t>
+            </a:r>
+            <a:endParaRPr lang="en-US" sz="2000" dirty="0"/>
+          </a:p>
+          <a:p>
+            <a:pPr algn="l" marL="342900" indent="-342900">
+              <a:spcAft>
+                <a:spcPts val="900"/>
+              </a:spcAft>
+              <a:buSzPct val="100000"/>
+              <a:buChar char="•"/>
+            </a:pPr>
+            <a:r>
+              <a:rPr lang="en-US" sz="2000" dirty="0">
+                <a:solidFill>
+                  <a:srgbClr val="1E293B"/>
+                </a:solidFill>
+              </a:rPr>
+              <a:t>Claim: matched biopsy transcriptomes do not show progressive zonation loss.</a:t>
+            </a:r>
+            <a:endParaRPr lang="en-US" sz="2000" dirty="0"/>
+          </a:p>
+          <a:p>
+            <a:pPr algn="l" marL="342900" indent="-342900">
+              <a:spcAft>
+                <a:spcPts val="900"/>
+              </a:spcAft>
+              <a:buSzPct val="100000"/>
+              <a:buChar char="•"/>
+            </a:pPr>
+            <a:r>
+              <a:rPr lang="en-US" sz="2000" dirty="0">
+                <a:solidFill>
+                  <a:srgbClr val="1E293B"/>
+                </a:solidFill>
+              </a:rPr>
+              <a:t>We agree the strong signal is an end-stage phenomenon.</a:t>
+            </a:r>
+            <a:endParaRPr lang="en-US" sz="2000" dirty="0"/>
           </a:p>
         </p:txBody>
       </p:sp>
@@ -4621,7 +4971,7 @@
                   <a:srgbClr val="C0562B"/>
                 </a:solidFill>
               </a:rPr>
-              <a:t>BACKUP  ·  END-STAGE</a:t>
+              <a:t>BACKUP  ·  LOBE</a:t>
             </a:r>
             <a:endParaRPr lang="en-US" sz="1300" dirty="0"/>
           </a:p>
@@ -4660,7 +5010,7 @@
                 <a:ea typeface="Georgia" pitchFamily="34" charset="-122"/>
                 <a:cs typeface="Georgia" pitchFamily="34" charset="-120"/>
               </a:rPr>
-              <a:t>Five organs, five phenotypes</a:t>
+              <a:t>Caudate lobe? Lobe-invariant</a:t>
             </a:r>
             <a:endParaRPr lang="en-US" sz="2600" dirty="0"/>
           </a:p>
@@ -4668,7 +5018,7 @@
       </p:sp>
       <p:pic>
         <p:nvPicPr>
-          <p:cNvPr id="5" name="Image 0" descr="D:\CS\Genomics\Hackathon\presentation/assets/fig_explant.png">    </p:cNvPr>
+          <p:cNvPr id="5" name="Image 0" descr="D:\CS\Genomics\Hackathon\presentation/assets/fig_lobe.png">    </p:cNvPr>
           <p:cNvPicPr>
             <a:picLocks noChangeAspect="1"/>
           </p:cNvPicPr>
@@ -4682,7 +5032,7 @@
         <p:spPr>
           <a:xfrm>
             <a:off x="731520" y="1371600"/>
-            <a:ext cx="7498080" cy="4572000"/>
+            <a:ext cx="6949440" cy="4572000"/>
           </a:xfrm>
           <a:prstGeom prst="rect">
             <a:avLst/>
@@ -4698,7 +5048,7 @@
         <p:spPr>
           <a:xfrm>
             <a:off x="731520" y="5943600"/>
-            <a:ext cx="7498080" cy="365760"/>
+            <a:ext cx="6949440" cy="365760"/>
           </a:xfrm>
           <a:prstGeom prst="rect">
             <a:avLst/>
@@ -4719,7 +5069,7 @@
                   <a:srgbClr val="6B6256"/>
                 </a:solidFill>
               </a:rPr>
-              <a:t>Figure 7.  Per-explant anchor fractions — end-stage is heterogeneous, not one coherent program.</a:t>
+              <a:t>Figure 6.  Zonation-marker detection across Right / Caudate / Left lobes in end-stage explants.</a:t>
             </a:r>
             <a:endParaRPr lang="en-US" sz="1200" dirty="0"/>
           </a:p>
@@ -4733,8 +5083,8 @@
         </p:nvSpPr>
         <p:spPr>
           <a:xfrm>
-            <a:off x="8412480" y="2377440"/>
-            <a:ext cx="3291840" cy="2377440"/>
+            <a:off x="7955280" y="2377440"/>
+            <a:ext cx="3657600" cy="2286000"/>
           </a:xfrm>
           <a:prstGeom prst="rect">
             <a:avLst/>
@@ -4750,29 +5100,29 @@
               <a:buNone/>
             </a:pPr>
             <a:r>
-              <a:rPr lang="en-US" sz="1700" b="1" dirty="0">
+              <a:rPr lang="en-US" sz="1800" b="1" dirty="0">
                 <a:solidFill>
                   <a:srgbClr val="1E293B"/>
                 </a:solidFill>
               </a:rPr>
-              <a:t>PC-anchor 3% → 50%;  PP:PC 0.13 → 20.
+              <a:t>Detection matches across lobes.
 </a:t>
             </a:r>
-            <a:endParaRPr lang="en-US" sz="1700" dirty="0"/>
+            <a:endParaRPr lang="en-US" sz="1800" dirty="0"/>
           </a:p>
           <a:p>
             <a:pPr algn="l" indent="0" marL="0">
               <a:buNone/>
             </a:pPr>
             <a:r>
-              <a:rPr lang="en-US" sz="1700" dirty="0">
+              <a:rPr lang="en-US" sz="1800" dirty="0">
                 <a:solidFill>
                   <a:srgbClr val="1E293B"/>
                 </a:solidFill>
               </a:rPr>
-              <a:t>Dramatic but NOT one program — pooling manufactures a uniform “collapse.”</a:t>
-            </a:r>
-            <a:endParaRPr lang="en-US" sz="1700" dirty="0"/>
+              <a:t>Lobe does not explain the signal; explant-vs-biopsy acquisition still does.</a:t>
+            </a:r>
+            <a:endParaRPr lang="en-US" sz="1800" dirty="0"/>
           </a:p>
         </p:txBody>
       </p:sp>
@@ -4858,7 +5208,7 @@
                   <a:srgbClr val="C0562B"/>
                 </a:solidFill>
               </a:rPr>
-              <a:t>BACKUP  ·  ROBUSTNESS</a:t>
+              <a:t>BACKUP  ·  END-STAGE</a:t>
             </a:r>
             <a:endParaRPr lang="en-US" sz="1300" dirty="0"/>
           </a:p>
@@ -4897,7 +5247,7 @@
                 <a:ea typeface="Georgia" pitchFamily="34" charset="-122"/>
                 <a:cs typeface="Georgia" pitchFamily="34" charset="-120"/>
               </a:rPr>
-              <a:t>Sensitivity grid + equivalence bound</a:t>
+              <a:t>Five organs, five phenotypes</a:t>
             </a:r>
             <a:endParaRPr lang="en-US" sz="2600" dirty="0"/>
           </a:p>
@@ -4905,7 +5255,7 @@
       </p:sp>
       <p:pic>
         <p:nvPicPr>
-          <p:cNvPr id="5" name="Image 0" descr="D:\CS\Genomics\Hackathon\presentation/assets/fig_tost.png">    </p:cNvPr>
+          <p:cNvPr id="5" name="Image 0" descr="D:\CS\Genomics\Hackathon\presentation/assets/fig_explant.png">    </p:cNvPr>
           <p:cNvPicPr>
             <a:picLocks noChangeAspect="1"/>
           </p:cNvPicPr>
@@ -4918,8 +5268,8 @@
         </p:blipFill>
         <p:spPr>
           <a:xfrm>
-            <a:off x="6035040" y="1463040"/>
-            <a:ext cx="5852160" cy="3657600"/>
+            <a:off x="731520" y="1371600"/>
+            <a:ext cx="7498080" cy="4572000"/>
           </a:xfrm>
           <a:prstGeom prst="rect">
             <a:avLst/>
@@ -4934,8 +5284,8 @@
         </p:nvSpPr>
         <p:spPr>
           <a:xfrm>
-            <a:off x="6035040" y="5166360"/>
-            <a:ext cx="5852160" cy="365760"/>
+            <a:off x="731520" y="5943600"/>
+            <a:ext cx="7498080" cy="365760"/>
           </a:xfrm>
           <a:prstGeom prst="rect">
             <a:avLst/>
@@ -4956,7 +5306,7 @@
                   <a:srgbClr val="6B6256"/>
                 </a:solidFill>
               </a:rPr>
-              <a:t>Figure 8.  Equivalence bound on the F4-vs-F1 pericentral-anchor change.</a:t>
+              <a:t>Figure 7.  Per-explant anchor fractions — end-stage is heterogeneous, not one coherent program.</a:t>
             </a:r>
             <a:endParaRPr lang="en-US" sz="1200" dirty="0"/>
           </a:p>
@@ -4970,76 +5320,46 @@
         </p:nvSpPr>
         <p:spPr>
           <a:xfrm>
-            <a:off x="640080" y="1645920"/>
-            <a:ext cx="5212080" cy="3840480"/>
-          </a:xfrm>
-          <a:prstGeom prst="rect">
-            <a:avLst/>
-          </a:prstGeom>
-          <a:noFill/>
-          <a:ln/>
-        </p:spPr>
-        <p:txBody>
-          <a:bodyPr wrap="square" rtlCol="0" anchor="t"/>
+            <a:off x="8412480" y="2377440"/>
+            <a:ext cx="3291840" cy="2377440"/>
+          </a:xfrm>
+          <a:prstGeom prst="rect">
+            <a:avLst/>
+          </a:prstGeom>
+          <a:noFill/>
+          <a:ln/>
+        </p:spPr>
+        <p:txBody>
+          <a:bodyPr wrap="square" rtlCol="0" anchor="ctr"/>
           <a:lstStyle/>
           <a:p>
             <a:pPr algn="l" indent="0" marL="0">
               <a:buNone/>
             </a:pPr>
             <a:r>
-              <a:rPr lang="en-US" sz="1600" b="1" dirty="0">
+              <a:rPr lang="en-US" sz="1700" b="1" dirty="0">
                 <a:solidFill>
                   <a:srgbClr val="1E293B"/>
                 </a:solidFill>
               </a:rPr>
-              <a:t>Stable across every variant:
+              <a:t>PC-anchor 3% → 50%;  PP:PC 0.13 → 20.
 </a:t>
             </a:r>
-            <a:endParaRPr lang="en-US" sz="1600" dirty="0"/>
+            <a:endParaRPr lang="en-US" sz="1700" dirty="0"/>
           </a:p>
           <a:p>
             <a:pPr algn="l" indent="0" marL="0">
               <a:buNone/>
             </a:pPr>
             <a:r>
-              <a:rPr lang="en-US" sz="1600" dirty="0">
+              <a:rPr lang="en-US" sz="1700" dirty="0">
                 <a:solidFill>
                   <a:srgbClr val="1E293B"/>
                 </a:solidFill>
               </a:rPr>
-              <a:t>anchor genes, periportal rule, ALDOB in/out, CPS1-based, 1 vs 2 UMI.
-</a:t>
-            </a:r>
-            <a:endParaRPr lang="en-US" sz="1600" dirty="0"/>
-          </a:p>
-          <a:p>
-            <a:pPr algn="l" indent="0" marL="0">
-              <a:buNone/>
-            </a:pPr>
-            <a:r>
-              <a:rPr lang="en-US" sz="1600" b="1" dirty="0">
-                <a:solidFill>
-                  <a:srgbClr val="0D9488"/>
-                </a:solidFill>
-              </a:rPr>
-              <a:t>No depletion · no dual rise · no turn-off — in all.
-</a:t>
-            </a:r>
-            <a:endParaRPr lang="en-US" sz="1600" dirty="0"/>
-          </a:p>
-          <a:p>
-            <a:pPr algn="l" indent="0" marL="0">
-              <a:buNone/>
-            </a:pPr>
-            <a:r>
-              <a:rPr lang="en-US" sz="1600" i="1" dirty="0">
-                <a:solidFill>
-                  <a:srgbClr val="6B6256"/>
-                </a:solidFill>
-              </a:rPr>
-              <a:t>Bound: large shift (~20 pp) excluded; subtle drift ≤10 pp not (F4 n=4).</a:t>
-            </a:r>
-            <a:endParaRPr lang="en-US" sz="1600" dirty="0"/>
+              <a:t>Dramatic but NOT one program — pooling manufactures a uniform “collapse.”</a:t>
+            </a:r>
+            <a:endParaRPr lang="en-US" sz="1700" dirty="0"/>
           </a:p>
         </p:txBody>
       </p:sp>
@@ -5125,7 +5445,7 @@
                   <a:srgbClr val="C0562B"/>
                 </a:solidFill>
               </a:rPr>
-              <a:t>BACKUP  ·  METHODS</a:t>
+              <a:t>BACKUP  ·  ROBUSTNESS</a:t>
             </a:r>
             <a:endParaRPr lang="en-US" sz="1300" dirty="0"/>
           </a:p>
@@ -5164,22 +5484,81 @@
                 <a:ea typeface="Georgia" pitchFamily="34" charset="-122"/>
                 <a:cs typeface="Georgia" pitchFamily="34" charset="-120"/>
               </a:rPr>
-              <a:t>Why raw counts, why pseudobulk</a:t>
+              <a:t>Sensitivity grid + equivalence bound</a:t>
             </a:r>
             <a:endParaRPr lang="en-US" sz="2600" dirty="0"/>
           </a:p>
         </p:txBody>
       </p:sp>
-      <p:sp>
-        <p:nvSpPr>
-          <p:cNvPr id="5" name="Text 3"/>
-          <p:cNvSpPr/>
-          <p:nvPr/>
-        </p:nvSpPr>
-        <p:spPr>
-          <a:xfrm>
-            <a:off x="731520" y="1463040"/>
-            <a:ext cx="10607040" cy="4572000"/>
+      <p:pic>
+        <p:nvPicPr>
+          <p:cNvPr id="5" name="Image 0" descr="D:\CS\Genomics\Hackathon\presentation/assets/fig_tost.png">    </p:cNvPr>
+          <p:cNvPicPr>
+            <a:picLocks noChangeAspect="1"/>
+          </p:cNvPicPr>
+          <p:nvPr/>
+        </p:nvPicPr>
+        <p:blipFill>
+          <a:blip r:embed="rId1"/>
+          <a:srcRect l="0" r="0" t="0" b="0"/>
+          <a:stretch/>
+        </p:blipFill>
+        <p:spPr>
+          <a:xfrm>
+            <a:off x="6035040" y="1463040"/>
+            <a:ext cx="5852160" cy="3657600"/>
+          </a:xfrm>
+          <a:prstGeom prst="rect">
+            <a:avLst/>
+          </a:prstGeom>
+        </p:spPr>
+      </p:pic>
+      <p:sp>
+        <p:nvSpPr>
+          <p:cNvPr id="6" name="Text 3"/>
+          <p:cNvSpPr/>
+          <p:nvPr/>
+        </p:nvSpPr>
+        <p:spPr>
+          <a:xfrm>
+            <a:off x="6035040" y="5166360"/>
+            <a:ext cx="5852160" cy="365760"/>
+          </a:xfrm>
+          <a:prstGeom prst="rect">
+            <a:avLst/>
+          </a:prstGeom>
+          <a:noFill/>
+          <a:ln/>
+        </p:spPr>
+        <p:txBody>
+          <a:bodyPr wrap="square" lIns="0" tIns="0" rIns="0" bIns="0" rtlCol="0" anchor="ctr"/>
+          <a:lstStyle/>
+          <a:p>
+            <a:pPr algn="ctr" indent="0" marL="0">
+              <a:buNone/>
+            </a:pPr>
+            <a:r>
+              <a:rPr lang="en-US" sz="1200" i="1" dirty="0">
+                <a:solidFill>
+                  <a:srgbClr val="6B6256"/>
+                </a:solidFill>
+              </a:rPr>
+              <a:t>Figure 8.  Equivalence bound on the F4-vs-F1 pericentral-anchor change.</a:t>
+            </a:r>
+            <a:endParaRPr lang="en-US" sz="1200" dirty="0"/>
+          </a:p>
+        </p:txBody>
+      </p:sp>
+      <p:sp>
+        <p:nvSpPr>
+          <p:cNvPr id="7" name="Text 4"/>
+          <p:cNvSpPr/>
+          <p:nvPr/>
+        </p:nvSpPr>
+        <p:spPr>
+          <a:xfrm>
+            <a:off x="640080" y="1645920"/>
+            <a:ext cx="5212080" cy="3840480"/>
           </a:xfrm>
           <a:prstGeom prst="rect">
             <a:avLst/>
@@ -5191,76 +5570,63 @@
           <a:bodyPr wrap="square" rtlCol="0" anchor="t"/>
           <a:lstStyle/>
           <a:p>
-            <a:pPr algn="l" marL="342900" indent="-342900">
-              <a:spcAft>
-                <a:spcPts val="900"/>
-              </a:spcAft>
-              <a:buSzPct val="100000"/>
-              <a:buChar char="•"/>
-            </a:pPr>
-            <a:r>
-              <a:rPr lang="en-US" sz="2000" dirty="0">
+            <a:pPr algn="l" indent="0" marL="0">
+              <a:buNone/>
+            </a:pPr>
+            <a:r>
+              <a:rPr lang="en-US" sz="1600" b="1" dirty="0">
                 <a:solidFill>
                   <a:srgbClr val="1E293B"/>
                 </a:solidFill>
               </a:rPr>
-              <a:t>Raw counts: marker co-detection + ambient sensitivity need molecules, not SCT residuals.</a:t>
-            </a:r>
-            <a:endParaRPr lang="en-US" sz="2000" dirty="0"/>
-          </a:p>
-          <a:p>
-            <a:pPr algn="l" marL="342900" indent="-342900">
-              <a:spcAft>
-                <a:spcPts val="900"/>
-              </a:spcAft>
-              <a:buSzPct val="100000"/>
-              <a:buChar char="•"/>
-            </a:pPr>
-            <a:r>
-              <a:rPr lang="en-US" sz="2000" dirty="0">
+              <a:t>Stable across every variant:
+</a:t>
+            </a:r>
+            <a:endParaRPr lang="en-US" sz="1600" dirty="0"/>
+          </a:p>
+          <a:p>
+            <a:pPr algn="l" indent="0" marL="0">
+              <a:buNone/>
+            </a:pPr>
+            <a:r>
+              <a:rPr lang="en-US" sz="1600" dirty="0">
                 <a:solidFill>
                   <a:srgbClr val="1E293B"/>
                 </a:solidFill>
               </a:rPr>
-              <a:t>Pseudobulk: cells from one donor are not independent — sum per donor, then edgeR (Squair 2021).</a:t>
-            </a:r>
-            <a:endParaRPr lang="en-US" sz="2000" dirty="0"/>
-          </a:p>
-          <a:p>
-            <a:pPr algn="l" marL="342900" indent="-342900">
-              <a:spcAft>
-                <a:spcPts val="900"/>
-              </a:spcAft>
-              <a:buSzPct val="100000"/>
-              <a:buChar char="•"/>
-            </a:pPr>
-            <a:r>
-              <a:rPr lang="en-US" sz="2000" dirty="0">
-                <a:solidFill>
-                  <a:srgbClr val="1E293B"/>
-                </a:solidFill>
-              </a:rPr>
-              <a:t>edgeR: filterByExpr → 21,022 genes; TMM; NB quasi-likelihood GLM, robust dispersion; common BCV 0.405.</a:t>
-            </a:r>
-            <a:endParaRPr lang="en-US" sz="2000" dirty="0"/>
-          </a:p>
-          <a:p>
-            <a:pPr algn="l" marL="342900" indent="-342900">
-              <a:spcAft>
-                <a:spcPts val="900"/>
-              </a:spcAft>
-              <a:buSzPct val="100000"/>
-              <a:buChar char="•"/>
-            </a:pPr>
-            <a:r>
-              <a:rPr lang="en-US" sz="2000" dirty="0">
-                <a:solidFill>
-                  <a:srgbClr val="1E293B"/>
-                </a:solidFill>
-              </a:rPr>
-              <a:t>Primary signal persists in DIRECTION with a run covariate and within a single run; significance attenuates with n (not a batch artifact).</a:t>
-            </a:r>
-            <a:endParaRPr lang="en-US" sz="2000" dirty="0"/>
+              <a:t>anchor genes, periportal rule, ALDOB in/out, CPS1-based, 1 vs 2 UMI.
+</a:t>
+            </a:r>
+            <a:endParaRPr lang="en-US" sz="1600" dirty="0"/>
+          </a:p>
+          <a:p>
+            <a:pPr algn="l" indent="0" marL="0">
+              <a:buNone/>
+            </a:pPr>
+            <a:r>
+              <a:rPr lang="en-US" sz="1600" b="1" dirty="0">
+                <a:solidFill>
+                  <a:srgbClr val="0D9488"/>
+                </a:solidFill>
+              </a:rPr>
+              <a:t>No depletion · no dual rise · no turn-off — in all.
+</a:t>
+            </a:r>
+            <a:endParaRPr lang="en-US" sz="1600" dirty="0"/>
+          </a:p>
+          <a:p>
+            <a:pPr algn="l" indent="0" marL="0">
+              <a:buNone/>
+            </a:pPr>
+            <a:r>
+              <a:rPr lang="en-US" sz="1600" i="1" dirty="0">
+                <a:solidFill>
+                  <a:srgbClr val="6B6256"/>
+                </a:solidFill>
+              </a:rPr>
+              <a:t>Bound: large shift (~20 pp) excluded; subtle drift ≤10 pp not (F4 n=4).</a:t>
+            </a:r>
+            <a:endParaRPr lang="en-US" sz="1600" dirty="0"/>
           </a:p>
         </p:txBody>
       </p:sp>
@@ -5346,7 +5712,7 @@
                   <a:srgbClr val="C0562B"/>
                 </a:solidFill>
               </a:rPr>
-              <a:t>BACKUP  ·  AMBIENT</a:t>
+              <a:t>BACKUP  ·  METHODS</a:t>
             </a:r>
             <a:endParaRPr lang="en-US" sz="1300" dirty="0"/>
           </a:p>
@@ -5385,7 +5751,7 @@
                 <a:ea typeface="Georgia" pitchFamily="34" charset="-122"/>
                 <a:cs typeface="Georgia" pitchFamily="34" charset="-120"/>
               </a:rPr>
-              <a:t>Does decontX prove contamination? No</a:t>
+              <a:t>Why raw counts, why pseudobulk</a:t>
             </a:r>
             <a:endParaRPr lang="en-US" sz="2600" dirty="0"/>
           </a:p>
@@ -5425,7 +5791,7 @@
                   <a:srgbClr val="1E293B"/>
                 </a:solidFill>
               </a:rPr>
-              <a:t>decontX models a native + ambient RNA mixture and subtracts the estimate.</a:t>
+              <a:t>Raw counts: marker co-detection + ambient sensitivity need molecules, not SCT residuals.</a:t>
             </a:r>
             <a:endParaRPr lang="en-US" sz="2000" dirty="0"/>
           </a:p>
@@ -5443,7 +5809,7 @@
                   <a:srgbClr val="1E293B"/>
                 </a:solidFill>
               </a:rPr>
-              <a:t>Hits 64 → 34; SOX4/SOX9 drop below significance → supports an ambient contribution.</a:t>
+              <a:t>Pseudobulk: cells from one donor are not independent — sum per donor, then edgeR (Squair 2021).</a:t>
             </a:r>
             <a:endParaRPr lang="en-US" sz="2000" dirty="0"/>
           </a:p>
@@ -5461,7 +5827,7 @@
                   <a:srgbClr val="1E293B"/>
                 </a:solidFill>
               </a:rPr>
-              <a:t>But it can remove true hybrid signal OR leave residual contamination.</a:t>
+              <a:t>edgeR: filterByExpr → 21,022 genes; TMM; NB quasi-likelihood GLM, robust dispersion; common BCV 0.405.</a:t>
             </a:r>
             <a:endParaRPr lang="en-US" sz="2000" dirty="0"/>
           </a:p>
@@ -5479,7 +5845,7 @@
                   <a:srgbClr val="1E293B"/>
                 </a:solidFill>
               </a:rPr>
-              <a:t>Source attribution is a lead, not a closed verdict; CXCL10 is a separate candidate inflammatory signal.</a:t>
+              <a:t>Primary signal persists in DIRECTION with a run covariate and within a single run; significance attenuates with n (not a batch artifact).</a:t>
             </a:r>
             <a:endParaRPr lang="en-US" sz="2000" dirty="0"/>
           </a:p>
@@ -5567,7 +5933,7 @@
                   <a:srgbClr val="C0562B"/>
                 </a:solidFill>
               </a:rPr>
-              <a:t>BACKUP  ·  NEXT</a:t>
+              <a:t>BACKUP  ·  AMBIENT</a:t>
             </a:r>
             <a:endParaRPr lang="en-US" sz="1300" dirty="0"/>
           </a:p>
@@ -5606,7 +5972,7 @@
                 <a:ea typeface="Georgia" pitchFamily="34" charset="-122"/>
                 <a:cs typeface="Georgia" pitchFamily="34" charset="-120"/>
               </a:rPr>
-              <a:t>The one analysis still owed: gene-set testing</a:t>
+              <a:t>Does decontX prove contamination? No</a:t>
             </a:r>
             <a:endParaRPr lang="en-US" sz="2600" dirty="0"/>
           </a:p>
@@ -5646,7 +6012,7 @@
                   <a:srgbClr val="1E293B"/>
                 </a:solidFill>
               </a:rPr>
-              <a:t>Gene-level FDR can miss a coordinated WEAK program (many genes, small shifts).</a:t>
+              <a:t>decontX models a native + ambient RNA mixture and subtracts the estimate.</a:t>
             </a:r>
             <a:endParaRPr lang="en-US" sz="2000" dirty="0"/>
           </a:p>
@@ -5664,7 +6030,7 @@
                   <a:srgbClr val="1E293B"/>
                 </a:solidFill>
               </a:rPr>
-              <a:t>CAMERA + ROAST on pre-specified sets: PC, PP, detox, urea cycle, bile-acid/lipid,</a:t>
+              <a:t>Hits 64 → 34; SOX4/SOX9 drop below significance → supports an ambient contribution.</a:t>
             </a:r>
             <a:endParaRPr lang="en-US" sz="2000" dirty="0"/>
           </a:p>
@@ -5682,7 +6048,7 @@
                   <a:srgbClr val="1E293B"/>
                 </a:solidFill>
               </a:rPr>
-              <a:t>mitochondrial, ER stress, interferon, hypoxia, EMT/fetal/progenitor, cholangiocyte/ductular.</a:t>
+              <a:t>But it can remove true hybrid signal OR leave residual contamination.</a:t>
             </a:r>
             <a:endParaRPr lang="en-US" sz="2000" dirty="0"/>
           </a:p>
@@ -5700,7 +6066,7 @@
                   <a:srgbClr val="1E293B"/>
                 </a:solidFill>
               </a:rPr>
-              <a:t>Closes the caveat behind “no other large hepatocyte program.”</a:t>
+              <a:t>Source attribution is a lead, not a closed verdict; CXCL10 is a separate candidate inflammatory signal.</a:t>
             </a:r>
             <a:endParaRPr lang="en-US" sz="2000" dirty="0"/>
           </a:p>
@@ -6307,6 +6673,2390 @@
 </p:sld>
 </file>
 
+<file path=ppt/slides/slide20.xml><?xml version="1.0" encoding="utf-8"?>
+<p:sld xmlns:a="http://schemas.openxmlformats.org/drawingml/2006/main" xmlns:r="http://schemas.openxmlformats.org/officeDocument/2006/relationships" xmlns:p="http://schemas.openxmlformats.org/presentationml/2006/main">
+  <p:cSld name="Slide 20">
+    <p:bg>
+      <p:bgPr>
+        <a:solidFill>
+          <a:srgbClr val="F7F3EB"/>
+        </a:solidFill>
+      </p:bgPr>
+    </p:bg>
+    <p:spTree>
+      <p:nvGrpSpPr>
+        <p:cNvPr id="1" name=""/>
+        <p:cNvGrpSpPr/>
+        <p:nvPr/>
+      </p:nvGrpSpPr>
+      <p:grpSpPr>
+        <a:xfrm>
+          <a:off x="0" y="0"/>
+          <a:ext cx="0" cy="0"/>
+          <a:chOff x="0" y="0"/>
+          <a:chExt cx="0" cy="0"/>
+        </a:xfrm>
+      </p:grpSpPr>
+      <p:sp>
+        <p:nvSpPr>
+          <p:cNvPr id="2" name="Shape 0"/>
+          <p:cNvSpPr/>
+          <p:nvPr/>
+        </p:nvSpPr>
+        <p:spPr>
+          <a:xfrm>
+            <a:off x="457200" y="310896"/>
+            <a:ext cx="146304" cy="237744"/>
+          </a:xfrm>
+          <a:prstGeom prst="rect">
+            <a:avLst/>
+          </a:prstGeom>
+          <a:solidFill>
+            <a:srgbClr val="C0562B"/>
+          </a:solidFill>
+          <a:ln/>
+        </p:spPr>
+      </p:sp>
+      <p:sp>
+        <p:nvSpPr>
+          <p:cNvPr id="3" name="Text 1"/>
+          <p:cNvSpPr/>
+          <p:nvPr/>
+        </p:nvSpPr>
+        <p:spPr>
+          <a:xfrm>
+            <a:off x="676656" y="274320"/>
+            <a:ext cx="10972800" cy="320040"/>
+          </a:xfrm>
+          <a:prstGeom prst="rect">
+            <a:avLst/>
+          </a:prstGeom>
+          <a:noFill/>
+          <a:ln/>
+        </p:spPr>
+        <p:txBody>
+          <a:bodyPr wrap="square" rtlCol="0" anchor="ctr"/>
+          <a:lstStyle/>
+          <a:p>
+            <a:pPr indent="0" marL="0">
+              <a:buNone/>
+            </a:pPr>
+            <a:r>
+              <a:rPr lang="en-US" sz="1300" b="1" spc="300" kern="0" dirty="0">
+                <a:solidFill>
+                  <a:srgbClr val="C0562B"/>
+                </a:solidFill>
+              </a:rPr>
+              <a:t>BACKUP  ·  NEXT</a:t>
+            </a:r>
+            <a:endParaRPr lang="en-US" sz="1300" dirty="0"/>
+          </a:p>
+        </p:txBody>
+      </p:sp>
+      <p:sp>
+        <p:nvSpPr>
+          <p:cNvPr id="4" name="Text 2"/>
+          <p:cNvSpPr/>
+          <p:nvPr/>
+        </p:nvSpPr>
+        <p:spPr>
+          <a:xfrm>
+            <a:off x="438912" y="585216"/>
+            <a:ext cx="11338560" cy="731520"/>
+          </a:xfrm>
+          <a:prstGeom prst="rect">
+            <a:avLst/>
+          </a:prstGeom>
+          <a:noFill/>
+          <a:ln/>
+        </p:spPr>
+        <p:txBody>
+          <a:bodyPr wrap="square" rtlCol="0" anchor="ctr"/>
+          <a:lstStyle/>
+          <a:p>
+            <a:pPr algn="l" indent="0" marL="0">
+              <a:buNone/>
+            </a:pPr>
+            <a:r>
+              <a:rPr lang="en-US" sz="2600" b="1" dirty="0">
+                <a:solidFill>
+                  <a:srgbClr val="1F3A3D"/>
+                </a:solidFill>
+                <a:latin typeface="Georgia" pitchFamily="34" charset="0"/>
+                <a:ea typeface="Georgia" pitchFamily="34" charset="-122"/>
+                <a:cs typeface="Georgia" pitchFamily="34" charset="-120"/>
+              </a:rPr>
+              <a:t>The one analysis still owed: gene-set testing</a:t>
+            </a:r>
+            <a:endParaRPr lang="en-US" sz="2600" dirty="0"/>
+          </a:p>
+        </p:txBody>
+      </p:sp>
+      <p:sp>
+        <p:nvSpPr>
+          <p:cNvPr id="5" name="Text 3"/>
+          <p:cNvSpPr/>
+          <p:nvPr/>
+        </p:nvSpPr>
+        <p:spPr>
+          <a:xfrm>
+            <a:off x="731520" y="1463040"/>
+            <a:ext cx="10607040" cy="4572000"/>
+          </a:xfrm>
+          <a:prstGeom prst="rect">
+            <a:avLst/>
+          </a:prstGeom>
+          <a:noFill/>
+          <a:ln/>
+        </p:spPr>
+        <p:txBody>
+          <a:bodyPr wrap="square" rtlCol="0" anchor="t"/>
+          <a:lstStyle/>
+          <a:p>
+            <a:pPr algn="l" marL="342900" indent="-342900">
+              <a:spcAft>
+                <a:spcPts val="900"/>
+              </a:spcAft>
+              <a:buSzPct val="100000"/>
+              <a:buChar char="•"/>
+            </a:pPr>
+            <a:r>
+              <a:rPr lang="en-US" sz="2000" dirty="0">
+                <a:solidFill>
+                  <a:srgbClr val="1E293B"/>
+                </a:solidFill>
+              </a:rPr>
+              <a:t>Gene-level FDR can miss a coordinated WEAK program (many genes, small shifts).</a:t>
+            </a:r>
+            <a:endParaRPr lang="en-US" sz="2000" dirty="0"/>
+          </a:p>
+          <a:p>
+            <a:pPr algn="l" marL="342900" indent="-342900">
+              <a:spcAft>
+                <a:spcPts val="900"/>
+              </a:spcAft>
+              <a:buSzPct val="100000"/>
+              <a:buChar char="•"/>
+            </a:pPr>
+            <a:r>
+              <a:rPr lang="en-US" sz="2000" dirty="0">
+                <a:solidFill>
+                  <a:srgbClr val="1E293B"/>
+                </a:solidFill>
+              </a:rPr>
+              <a:t>CAMERA + ROAST on pre-specified sets: PC, PP, detox, urea cycle, bile-acid/lipid,</a:t>
+            </a:r>
+            <a:endParaRPr lang="en-US" sz="2000" dirty="0"/>
+          </a:p>
+          <a:p>
+            <a:pPr algn="l" marL="342900" indent="-342900">
+              <a:spcAft>
+                <a:spcPts val="900"/>
+              </a:spcAft>
+              <a:buSzPct val="100000"/>
+              <a:buChar char="•"/>
+            </a:pPr>
+            <a:r>
+              <a:rPr lang="en-US" sz="2000" dirty="0">
+                <a:solidFill>
+                  <a:srgbClr val="1E293B"/>
+                </a:solidFill>
+              </a:rPr>
+              <a:t>mitochondrial, ER stress, interferon, hypoxia, EMT/fetal/progenitor, cholangiocyte/ductular.</a:t>
+            </a:r>
+            <a:endParaRPr lang="en-US" sz="2000" dirty="0"/>
+          </a:p>
+          <a:p>
+            <a:pPr algn="l" marL="342900" indent="-342900">
+              <a:spcAft>
+                <a:spcPts val="900"/>
+              </a:spcAft>
+              <a:buSzPct val="100000"/>
+              <a:buChar char="•"/>
+            </a:pPr>
+            <a:r>
+              <a:rPr lang="en-US" sz="2000" dirty="0">
+                <a:solidFill>
+                  <a:srgbClr val="1E293B"/>
+                </a:solidFill>
+              </a:rPr>
+              <a:t>Closes the caveat behind “no other large hepatocyte program.”</a:t>
+            </a:r>
+            <a:endParaRPr lang="en-US" sz="2000" dirty="0"/>
+          </a:p>
+        </p:txBody>
+      </p:sp>
+    </p:spTree>
+  </p:cSld>
+  <p:clrMapOvr>
+    <a:masterClrMapping/>
+  </p:clrMapOvr>
+</p:sld>
+</file>
+
+<file path=ppt/slides/slide21.xml><?xml version="1.0" encoding="utf-8"?>
+<p:sld xmlns:a="http://schemas.openxmlformats.org/drawingml/2006/main" xmlns:r="http://schemas.openxmlformats.org/officeDocument/2006/relationships" xmlns:p="http://schemas.openxmlformats.org/presentationml/2006/main">
+  <p:cSld name="Slide 21">
+    <p:bg>
+      <p:bgPr>
+        <a:solidFill>
+          <a:srgbClr val="F7F3EB"/>
+        </a:solidFill>
+      </p:bgPr>
+    </p:bg>
+    <p:spTree>
+      <p:nvGrpSpPr>
+        <p:cNvPr id="1" name=""/>
+        <p:cNvGrpSpPr/>
+        <p:nvPr/>
+      </p:nvGrpSpPr>
+      <p:grpSpPr>
+        <a:xfrm>
+          <a:off x="0" y="0"/>
+          <a:ext cx="0" cy="0"/>
+          <a:chOff x="0" y="0"/>
+          <a:chExt cx="0" cy="0"/>
+        </a:xfrm>
+      </p:grpSpPr>
+      <p:sp>
+        <p:nvSpPr>
+          <p:cNvPr id="2" name="Shape 0"/>
+          <p:cNvSpPr/>
+          <p:nvPr/>
+        </p:nvSpPr>
+        <p:spPr>
+          <a:xfrm>
+            <a:off x="457200" y="310896"/>
+            <a:ext cx="146304" cy="237744"/>
+          </a:xfrm>
+          <a:prstGeom prst="rect">
+            <a:avLst/>
+          </a:prstGeom>
+          <a:solidFill>
+            <a:srgbClr val="C0562B"/>
+          </a:solidFill>
+          <a:ln/>
+        </p:spPr>
+      </p:sp>
+      <p:sp>
+        <p:nvSpPr>
+          <p:cNvPr id="3" name="Text 1"/>
+          <p:cNvSpPr/>
+          <p:nvPr/>
+        </p:nvSpPr>
+        <p:spPr>
+          <a:xfrm>
+            <a:off x="676656" y="274320"/>
+            <a:ext cx="10972800" cy="320040"/>
+          </a:xfrm>
+          <a:prstGeom prst="rect">
+            <a:avLst/>
+          </a:prstGeom>
+          <a:noFill/>
+          <a:ln/>
+        </p:spPr>
+        <p:txBody>
+          <a:bodyPr wrap="square" rtlCol="0" anchor="ctr"/>
+          <a:lstStyle/>
+          <a:p>
+            <a:pPr indent="0" marL="0">
+              <a:buNone/>
+            </a:pPr>
+            <a:r>
+              <a:rPr lang="en-US" sz="1300" b="1" spc="300" kern="0" dirty="0">
+                <a:solidFill>
+                  <a:srgbClr val="C0562B"/>
+                </a:solidFill>
+              </a:rPr>
+              <a:t>BACKUP  ·  SCENARIO COVERAGE</a:t>
+            </a:r>
+            <a:endParaRPr lang="en-US" sz="1300" dirty="0"/>
+          </a:p>
+        </p:txBody>
+      </p:sp>
+      <p:sp>
+        <p:nvSpPr>
+          <p:cNvPr id="4" name="Text 2"/>
+          <p:cNvSpPr/>
+          <p:nvPr/>
+        </p:nvSpPr>
+        <p:spPr>
+          <a:xfrm>
+            <a:off x="438912" y="585216"/>
+            <a:ext cx="11338560" cy="731520"/>
+          </a:xfrm>
+          <a:prstGeom prst="rect">
+            <a:avLst/>
+          </a:prstGeom>
+          <a:noFill/>
+          <a:ln/>
+        </p:spPr>
+        <p:txBody>
+          <a:bodyPr wrap="square" rtlCol="0" anchor="ctr"/>
+          <a:lstStyle/>
+          <a:p>
+            <a:pPr algn="l" indent="0" marL="0">
+              <a:buNone/>
+            </a:pPr>
+            <a:r>
+              <a:rPr lang="en-US" sz="2600" b="1" dirty="0">
+                <a:solidFill>
+                  <a:srgbClr val="1F3A3D"/>
+                </a:solidFill>
+                <a:latin typeface="Georgia" pitchFamily="34" charset="0"/>
+                <a:ea typeface="Georgia" pitchFamily="34" charset="-122"/>
+                <a:cs typeface="Georgia" pitchFamily="34" charset="-120"/>
+              </a:rPr>
+              <a:t>Every de-zonation route, tested by count signature</a:t>
+            </a:r>
+            <a:endParaRPr lang="en-US" sz="2600" dirty="0"/>
+          </a:p>
+        </p:txBody>
+      </p:sp>
+      <p:graphicFrame>
+        <p:nvGraphicFramePr>
+          <p:cNvPr id="22" name="Table 0"/>
+          <p:cNvGraphicFramePr>
+            <a:graphicFrameLocks noGrp="1"/>
+          </p:cNvGraphicFramePr>
+          <p:nvPr>
+            <p:extLst>
+              <p:ext uri="{D42A27DB-BD31-4B8C-83A1-F6EECF244321}">
+                <p14:modId xmlns:p14="http://schemas.microsoft.com/office/powerpoint/2010/main" val="1579011935"/>
+              </p:ext>
+            </p:extLst>
+          </p:nvPr>
+        </p:nvGraphicFramePr>
+        <p:xfrm>
+          <a:off x="640080" y="1554480"/>
+          <a:ext cx="10972800" cy="914400"/>
+        </p:xfrm>
+        <a:graphic>
+          <a:graphicData uri="http://schemas.openxmlformats.org/drawingml/2006/table">
+            <a:tbl>
+              <a:tblPr/>
+              <a:tblGrid>
+                <a:gridCol w="2377440"/>
+                <a:gridCol w="2743200"/>
+                <a:gridCol w="3657600"/>
+                <a:gridCol w="2194560"/>
+              </a:tblGrid>
+              <a:tr h="475488">
+                <a:tc>
+                  <a:txBody>
+                    <a:bodyPr/>
+                    <a:lstStyle/>
+                    <a:p>
+                      <a:pPr algn="l" indent="0" marL="0">
+                        <a:buNone/>
+                      </a:pPr>
+                      <a:r>
+                        <a:rPr lang="en-US" sz="1350" b="1" dirty="0">
+                          <a:solidFill>
+                            <a:srgbClr val="1E293B"/>
+                          </a:solidFill>
+                        </a:rPr>
+                        <a:t>Mechanism</a:t>
+                      </a:r>
+                      <a:endParaRPr lang="en-US" sz="1350" dirty="0"/>
+                    </a:p>
+                  </a:txBody>
+                  <a:tcPr marL="63500" marR="63500" marT="38100" marB="38100" anchor="ctr">
+                    <a:lnL w="6350" cap="flat" cmpd="sng" algn="ctr">
+                      <a:solidFill>
+                        <a:srgbClr val="C9BFAE"/>
+                      </a:solidFill>
+                      <a:prstDash val="solid"/>
+                      <a:round/>
+                      <a:headEnd type="none" w="med" len="med"/>
+                      <a:tailEnd type="none" w="med" len="med"/>
+                    </a:lnL>
+                    <a:lnR w="6350" cap="flat" cmpd="sng" algn="ctr">
+                      <a:solidFill>
+                        <a:srgbClr val="C9BFAE"/>
+                      </a:solidFill>
+                      <a:prstDash val="solid"/>
+                      <a:round/>
+                      <a:headEnd type="none" w="med" len="med"/>
+                      <a:tailEnd type="none" w="med" len="med"/>
+                    </a:lnR>
+                    <a:lnT w="6350" cap="flat" cmpd="sng" algn="ctr">
+                      <a:solidFill>
+                        <a:srgbClr val="C9BFAE"/>
+                      </a:solidFill>
+                      <a:prstDash val="solid"/>
+                      <a:round/>
+                      <a:headEnd type="none" w="med" len="med"/>
+                      <a:tailEnd type="none" w="med" len="med"/>
+                    </a:lnT>
+                    <a:lnB w="6350" cap="flat" cmpd="sng" algn="ctr">
+                      <a:solidFill>
+                        <a:srgbClr val="C9BFAE"/>
+                      </a:solidFill>
+                      <a:prstDash val="solid"/>
+                      <a:round/>
+                      <a:headEnd type="none" w="med" len="med"/>
+                      <a:tailEnd type="none" w="med" len="med"/>
+                    </a:lnB>
+                    <a:solidFill>
+                      <a:srgbClr val="FFFFFF"/>
+                    </a:solidFill>
+                  </a:tcPr>
+                </a:tc>
+                <a:tc>
+                  <a:txBody>
+                    <a:bodyPr/>
+                    <a:lstStyle/>
+                    <a:p>
+                      <a:pPr algn="l" indent="0" marL="0">
+                        <a:buNone/>
+                      </a:pPr>
+                      <a:r>
+                        <a:rPr lang="en-US" sz="1350" b="1" dirty="0">
+                          <a:solidFill>
+                            <a:srgbClr val="1E293B"/>
+                          </a:solidFill>
+                        </a:rPr>
+                        <a:t>Count signature</a:t>
+                      </a:r>
+                      <a:endParaRPr lang="en-US" sz="1350" dirty="0"/>
+                    </a:p>
+                  </a:txBody>
+                  <a:tcPr marL="63500" marR="63500" marT="38100" marB="38100" anchor="ctr">
+                    <a:lnL w="6350" cap="flat" cmpd="sng" algn="ctr">
+                      <a:solidFill>
+                        <a:srgbClr val="C9BFAE"/>
+                      </a:solidFill>
+                      <a:prstDash val="solid"/>
+                      <a:round/>
+                      <a:headEnd type="none" w="med" len="med"/>
+                      <a:tailEnd type="none" w="med" len="med"/>
+                    </a:lnL>
+                    <a:lnR w="6350" cap="flat" cmpd="sng" algn="ctr">
+                      <a:solidFill>
+                        <a:srgbClr val="C9BFAE"/>
+                      </a:solidFill>
+                      <a:prstDash val="solid"/>
+                      <a:round/>
+                      <a:headEnd type="none" w="med" len="med"/>
+                      <a:tailEnd type="none" w="med" len="med"/>
+                    </a:lnR>
+                    <a:lnT w="6350" cap="flat" cmpd="sng" algn="ctr">
+                      <a:solidFill>
+                        <a:srgbClr val="C9BFAE"/>
+                      </a:solidFill>
+                      <a:prstDash val="solid"/>
+                      <a:round/>
+                      <a:headEnd type="none" w="med" len="med"/>
+                      <a:tailEnd type="none" w="med" len="med"/>
+                    </a:lnT>
+                    <a:lnB w="6350" cap="flat" cmpd="sng" algn="ctr">
+                      <a:solidFill>
+                        <a:srgbClr val="C9BFAE"/>
+                      </a:solidFill>
+                      <a:prstDash val="solid"/>
+                      <a:round/>
+                      <a:headEnd type="none" w="med" len="med"/>
+                      <a:tailEnd type="none" w="med" len="med"/>
+                    </a:lnB>
+                    <a:solidFill>
+                      <a:srgbClr val="FFFFFF"/>
+                    </a:solidFill>
+                  </a:tcPr>
+                </a:tc>
+                <a:tc>
+                  <a:txBody>
+                    <a:bodyPr/>
+                    <a:lstStyle/>
+                    <a:p>
+                      <a:pPr algn="l" indent="0" marL="0">
+                        <a:buNone/>
+                      </a:pPr>
+                      <a:r>
+                        <a:rPr lang="en-US" sz="1350" b="1" dirty="0">
+                          <a:solidFill>
+                            <a:srgbClr val="1E293B"/>
+                          </a:solidFill>
+                        </a:rPr>
+                        <a:t>Biopsy F0→F4 (donor-median)</a:t>
+                      </a:r>
+                      <a:endParaRPr lang="en-US" sz="1350" dirty="0"/>
+                    </a:p>
+                  </a:txBody>
+                  <a:tcPr marL="63500" marR="63500" marT="38100" marB="38100" anchor="ctr">
+                    <a:lnL w="6350" cap="flat" cmpd="sng" algn="ctr">
+                      <a:solidFill>
+                        <a:srgbClr val="C9BFAE"/>
+                      </a:solidFill>
+                      <a:prstDash val="solid"/>
+                      <a:round/>
+                      <a:headEnd type="none" w="med" len="med"/>
+                      <a:tailEnd type="none" w="med" len="med"/>
+                    </a:lnL>
+                    <a:lnR w="6350" cap="flat" cmpd="sng" algn="ctr">
+                      <a:solidFill>
+                        <a:srgbClr val="C9BFAE"/>
+                      </a:solidFill>
+                      <a:prstDash val="solid"/>
+                      <a:round/>
+                      <a:headEnd type="none" w="med" len="med"/>
+                      <a:tailEnd type="none" w="med" len="med"/>
+                    </a:lnR>
+                    <a:lnT w="6350" cap="flat" cmpd="sng" algn="ctr">
+                      <a:solidFill>
+                        <a:srgbClr val="C9BFAE"/>
+                      </a:solidFill>
+                      <a:prstDash val="solid"/>
+                      <a:round/>
+                      <a:headEnd type="none" w="med" len="med"/>
+                      <a:tailEnd type="none" w="med" len="med"/>
+                    </a:lnT>
+                    <a:lnB w="6350" cap="flat" cmpd="sng" algn="ctr">
+                      <a:solidFill>
+                        <a:srgbClr val="C9BFAE"/>
+                      </a:solidFill>
+                      <a:prstDash val="solid"/>
+                      <a:round/>
+                      <a:headEnd type="none" w="med" len="med"/>
+                      <a:tailEnd type="none" w="med" len="med"/>
+                    </a:lnB>
+                    <a:solidFill>
+                      <a:srgbClr val="FFFFFF"/>
+                    </a:solidFill>
+                  </a:tcPr>
+                </a:tc>
+                <a:tc>
+                  <a:txBody>
+                    <a:bodyPr/>
+                    <a:lstStyle/>
+                    <a:p>
+                      <a:pPr algn="l" indent="0" marL="0">
+                        <a:buNone/>
+                      </a:pPr>
+                      <a:r>
+                        <a:rPr lang="en-US" sz="1350" b="1" dirty="0">
+                          <a:solidFill>
+                            <a:srgbClr val="1E293B"/>
+                          </a:solidFill>
+                        </a:rPr>
+                        <a:t>Verdict</a:t>
+                      </a:r>
+                      <a:endParaRPr lang="en-US" sz="1350" dirty="0"/>
+                    </a:p>
+                  </a:txBody>
+                  <a:tcPr marL="63500" marR="63500" marT="38100" marB="38100" anchor="ctr">
+                    <a:lnL w="6350" cap="flat" cmpd="sng" algn="ctr">
+                      <a:solidFill>
+                        <a:srgbClr val="C9BFAE"/>
+                      </a:solidFill>
+                      <a:prstDash val="solid"/>
+                      <a:round/>
+                      <a:headEnd type="none" w="med" len="med"/>
+                      <a:tailEnd type="none" w="med" len="med"/>
+                    </a:lnL>
+                    <a:lnR w="6350" cap="flat" cmpd="sng" algn="ctr">
+                      <a:solidFill>
+                        <a:srgbClr val="C9BFAE"/>
+                      </a:solidFill>
+                      <a:prstDash val="solid"/>
+                      <a:round/>
+                      <a:headEnd type="none" w="med" len="med"/>
+                      <a:tailEnd type="none" w="med" len="med"/>
+                    </a:lnR>
+                    <a:lnT w="6350" cap="flat" cmpd="sng" algn="ctr">
+                      <a:solidFill>
+                        <a:srgbClr val="C9BFAE"/>
+                      </a:solidFill>
+                      <a:prstDash val="solid"/>
+                      <a:round/>
+                      <a:headEnd type="none" w="med" len="med"/>
+                      <a:tailEnd type="none" w="med" len="med"/>
+                    </a:lnT>
+                    <a:lnB w="6350" cap="flat" cmpd="sng" algn="ctr">
+                      <a:solidFill>
+                        <a:srgbClr val="C9BFAE"/>
+                      </a:solidFill>
+                      <a:prstDash val="solid"/>
+                      <a:round/>
+                      <a:headEnd type="none" w="med" len="med"/>
+                      <a:tailEnd type="none" w="med" len="med"/>
+                    </a:lnB>
+                    <a:solidFill>
+                      <a:srgbClr val="FFFFFF"/>
+                    </a:solidFill>
+                  </a:tcPr>
+                </a:tc>
+              </a:tr>
+              <a:tr h="475488">
+                <a:tc>
+                  <a:txBody>
+                    <a:bodyPr/>
+                    <a:lstStyle/>
+                    <a:p>
+                      <a:pPr algn="l" indent="0" marL="0">
+                        <a:buNone/>
+                      </a:pPr>
+                      <a:r>
+                        <a:rPr lang="en-US" sz="1350" dirty="0">
+                          <a:solidFill>
+                            <a:srgbClr val="1E293B"/>
+                          </a:solidFill>
+                        </a:rPr>
+                        <a:t>Pericentral depletion</a:t>
+                      </a:r>
+                      <a:endParaRPr lang="en-US" sz="1350" dirty="0"/>
+                    </a:p>
+                  </a:txBody>
+                  <a:tcPr marL="63500" marR="63500" marT="38100" marB="38100" anchor="ctr">
+                    <a:lnL w="6350" cap="flat" cmpd="sng" algn="ctr">
+                      <a:solidFill>
+                        <a:srgbClr val="C9BFAE"/>
+                      </a:solidFill>
+                      <a:prstDash val="solid"/>
+                      <a:round/>
+                      <a:headEnd type="none" w="med" len="med"/>
+                      <a:tailEnd type="none" w="med" len="med"/>
+                    </a:lnL>
+                    <a:lnR w="6350" cap="flat" cmpd="sng" algn="ctr">
+                      <a:solidFill>
+                        <a:srgbClr val="C9BFAE"/>
+                      </a:solidFill>
+                      <a:prstDash val="solid"/>
+                      <a:round/>
+                      <a:headEnd type="none" w="med" len="med"/>
+                      <a:tailEnd type="none" w="med" len="med"/>
+                    </a:lnR>
+                    <a:lnT w="6350" cap="flat" cmpd="sng" algn="ctr">
+                      <a:solidFill>
+                        <a:srgbClr val="C9BFAE"/>
+                      </a:solidFill>
+                      <a:prstDash val="solid"/>
+                      <a:round/>
+                      <a:headEnd type="none" w="med" len="med"/>
+                      <a:tailEnd type="none" w="med" len="med"/>
+                    </a:lnT>
+                    <a:lnB w="6350" cap="flat" cmpd="sng" algn="ctr">
+                      <a:solidFill>
+                        <a:srgbClr val="C9BFAE"/>
+                      </a:solidFill>
+                      <a:prstDash val="solid"/>
+                      <a:round/>
+                      <a:headEnd type="none" w="med" len="med"/>
+                      <a:tailEnd type="none" w="med" len="med"/>
+                    </a:lnB>
+                    <a:solidFill>
+                      <a:srgbClr val="FFFFFF"/>
+                    </a:solidFill>
+                  </a:tcPr>
+                </a:tc>
+                <a:tc>
+                  <a:txBody>
+                    <a:bodyPr/>
+                    <a:lstStyle/>
+                    <a:p>
+                      <a:pPr algn="l" indent="0" marL="0">
+                        <a:buNone/>
+                      </a:pPr>
+                      <a:r>
+                        <a:rPr lang="en-US" sz="1350" dirty="0">
+                          <a:solidFill>
+                            <a:srgbClr val="1E293B"/>
+                          </a:solidFill>
+                        </a:rPr>
+                        <a:t>PC-anchor fraction ↓</a:t>
+                      </a:r>
+                      <a:endParaRPr lang="en-US" sz="1350" dirty="0"/>
+                    </a:p>
+                  </a:txBody>
+                  <a:tcPr marL="63500" marR="63500" marT="38100" marB="38100" anchor="ctr">
+                    <a:lnL w="6350" cap="flat" cmpd="sng" algn="ctr">
+                      <a:solidFill>
+                        <a:srgbClr val="C9BFAE"/>
+                      </a:solidFill>
+                      <a:prstDash val="solid"/>
+                      <a:round/>
+                      <a:headEnd type="none" w="med" len="med"/>
+                      <a:tailEnd type="none" w="med" len="med"/>
+                    </a:lnL>
+                    <a:lnR w="6350" cap="flat" cmpd="sng" algn="ctr">
+                      <a:solidFill>
+                        <a:srgbClr val="C9BFAE"/>
+                      </a:solidFill>
+                      <a:prstDash val="solid"/>
+                      <a:round/>
+                      <a:headEnd type="none" w="med" len="med"/>
+                      <a:tailEnd type="none" w="med" len="med"/>
+                    </a:lnR>
+                    <a:lnT w="6350" cap="flat" cmpd="sng" algn="ctr">
+                      <a:solidFill>
+                        <a:srgbClr val="C9BFAE"/>
+                      </a:solidFill>
+                      <a:prstDash val="solid"/>
+                      <a:round/>
+                      <a:headEnd type="none" w="med" len="med"/>
+                      <a:tailEnd type="none" w="med" len="med"/>
+                    </a:lnT>
+                    <a:lnB w="6350" cap="flat" cmpd="sng" algn="ctr">
+                      <a:solidFill>
+                        <a:srgbClr val="C9BFAE"/>
+                      </a:solidFill>
+                      <a:prstDash val="solid"/>
+                      <a:round/>
+                      <a:headEnd type="none" w="med" len="med"/>
+                      <a:tailEnd type="none" w="med" len="med"/>
+                    </a:lnB>
+                    <a:solidFill>
+                      <a:srgbClr val="FFFFFF"/>
+                    </a:solidFill>
+                  </a:tcPr>
+                </a:tc>
+                <a:tc>
+                  <a:txBody>
+                    <a:bodyPr/>
+                    <a:lstStyle/>
+                    <a:p>
+                      <a:pPr algn="l" indent="0" marL="0">
+                        <a:buNone/>
+                      </a:pPr>
+                      <a:r>
+                        <a:rPr lang="en-US" sz="1350" dirty="0">
+                          <a:solidFill>
+                            <a:srgbClr val="1E293B"/>
+                          </a:solidFill>
+                        </a:rPr>
+                        <a:t>36 / 19 / 23 / 22 / 21 %</a:t>
+                      </a:r>
+                      <a:endParaRPr lang="en-US" sz="1350" dirty="0"/>
+                    </a:p>
+                  </a:txBody>
+                  <a:tcPr marL="63500" marR="63500" marT="38100" marB="38100" anchor="ctr">
+                    <a:lnL w="6350" cap="flat" cmpd="sng" algn="ctr">
+                      <a:solidFill>
+                        <a:srgbClr val="C9BFAE"/>
+                      </a:solidFill>
+                      <a:prstDash val="solid"/>
+                      <a:round/>
+                      <a:headEnd type="none" w="med" len="med"/>
+                      <a:tailEnd type="none" w="med" len="med"/>
+                    </a:lnL>
+                    <a:lnR w="6350" cap="flat" cmpd="sng" algn="ctr">
+                      <a:solidFill>
+                        <a:srgbClr val="C9BFAE"/>
+                      </a:solidFill>
+                      <a:prstDash val="solid"/>
+                      <a:round/>
+                      <a:headEnd type="none" w="med" len="med"/>
+                      <a:tailEnd type="none" w="med" len="med"/>
+                    </a:lnR>
+                    <a:lnT w="6350" cap="flat" cmpd="sng" algn="ctr">
+                      <a:solidFill>
+                        <a:srgbClr val="C9BFAE"/>
+                      </a:solidFill>
+                      <a:prstDash val="solid"/>
+                      <a:round/>
+                      <a:headEnd type="none" w="med" len="med"/>
+                      <a:tailEnd type="none" w="med" len="med"/>
+                    </a:lnT>
+                    <a:lnB w="6350" cap="flat" cmpd="sng" algn="ctr">
+                      <a:solidFill>
+                        <a:srgbClr val="C9BFAE"/>
+                      </a:solidFill>
+                      <a:prstDash val="solid"/>
+                      <a:round/>
+                      <a:headEnd type="none" w="med" len="med"/>
+                      <a:tailEnd type="none" w="med" len="med"/>
+                    </a:lnB>
+                    <a:solidFill>
+                      <a:srgbClr val="FFFFFF"/>
+                    </a:solidFill>
+                  </a:tcPr>
+                </a:tc>
+                <a:tc>
+                  <a:txBody>
+                    <a:bodyPr/>
+                    <a:lstStyle/>
+                    <a:p>
+                      <a:pPr algn="l" indent="0" marL="0">
+                        <a:buNone/>
+                      </a:pPr>
+                      <a:r>
+                        <a:rPr lang="en-US" sz="1350" dirty="0">
+                          <a:solidFill>
+                            <a:srgbClr val="1E293B"/>
+                          </a:solidFill>
+                        </a:rPr>
+                        <a:t>flat → no depletion</a:t>
+                      </a:r>
+                      <a:endParaRPr lang="en-US" sz="1350" dirty="0"/>
+                    </a:p>
+                  </a:txBody>
+                  <a:tcPr marL="63500" marR="63500" marT="38100" marB="38100" anchor="ctr">
+                    <a:lnL w="6350" cap="flat" cmpd="sng" algn="ctr">
+                      <a:solidFill>
+                        <a:srgbClr val="C9BFAE"/>
+                      </a:solidFill>
+                      <a:prstDash val="solid"/>
+                      <a:round/>
+                      <a:headEnd type="none" w="med" len="med"/>
+                      <a:tailEnd type="none" w="med" len="med"/>
+                    </a:lnL>
+                    <a:lnR w="6350" cap="flat" cmpd="sng" algn="ctr">
+                      <a:solidFill>
+                        <a:srgbClr val="C9BFAE"/>
+                      </a:solidFill>
+                      <a:prstDash val="solid"/>
+                      <a:round/>
+                      <a:headEnd type="none" w="med" len="med"/>
+                      <a:tailEnd type="none" w="med" len="med"/>
+                    </a:lnR>
+                    <a:lnT w="6350" cap="flat" cmpd="sng" algn="ctr">
+                      <a:solidFill>
+                        <a:srgbClr val="C9BFAE"/>
+                      </a:solidFill>
+                      <a:prstDash val="solid"/>
+                      <a:round/>
+                      <a:headEnd type="none" w="med" len="med"/>
+                      <a:tailEnd type="none" w="med" len="med"/>
+                    </a:lnT>
+                    <a:lnB w="6350" cap="flat" cmpd="sng" algn="ctr">
+                      <a:solidFill>
+                        <a:srgbClr val="C9BFAE"/>
+                      </a:solidFill>
+                      <a:prstDash val="solid"/>
+                      <a:round/>
+                      <a:headEnd type="none" w="med" len="med"/>
+                      <a:tailEnd type="none" w="med" len="med"/>
+                    </a:lnB>
+                    <a:solidFill>
+                      <a:srgbClr val="FFFFFF"/>
+                    </a:solidFill>
+                  </a:tcPr>
+                </a:tc>
+              </a:tr>
+              <a:tr h="475488">
+                <a:tc>
+                  <a:txBody>
+                    <a:bodyPr/>
+                    <a:lstStyle/>
+                    <a:p>
+                      <a:pPr algn="l" indent="0" marL="0">
+                        <a:buNone/>
+                      </a:pPr>
+                      <a:r>
+                        <a:rPr lang="en-US" sz="1350" dirty="0">
+                          <a:solidFill>
+                            <a:srgbClr val="1E293B"/>
+                          </a:solidFill>
+                        </a:rPr>
+                        <a:t>Periportal depletion</a:t>
+                      </a:r>
+                      <a:endParaRPr lang="en-US" sz="1350" dirty="0"/>
+                    </a:p>
+                  </a:txBody>
+                  <a:tcPr marL="63500" marR="63500" marT="38100" marB="38100" anchor="ctr">
+                    <a:lnL w="6350" cap="flat" cmpd="sng" algn="ctr">
+                      <a:solidFill>
+                        <a:srgbClr val="C9BFAE"/>
+                      </a:solidFill>
+                      <a:prstDash val="solid"/>
+                      <a:round/>
+                      <a:headEnd type="none" w="med" len="med"/>
+                      <a:tailEnd type="none" w="med" len="med"/>
+                    </a:lnL>
+                    <a:lnR w="6350" cap="flat" cmpd="sng" algn="ctr">
+                      <a:solidFill>
+                        <a:srgbClr val="C9BFAE"/>
+                      </a:solidFill>
+                      <a:prstDash val="solid"/>
+                      <a:round/>
+                      <a:headEnd type="none" w="med" len="med"/>
+                      <a:tailEnd type="none" w="med" len="med"/>
+                    </a:lnR>
+                    <a:lnT w="6350" cap="flat" cmpd="sng" algn="ctr">
+                      <a:solidFill>
+                        <a:srgbClr val="C9BFAE"/>
+                      </a:solidFill>
+                      <a:prstDash val="solid"/>
+                      <a:round/>
+                      <a:headEnd type="none" w="med" len="med"/>
+                      <a:tailEnd type="none" w="med" len="med"/>
+                    </a:lnT>
+                    <a:lnB w="6350" cap="flat" cmpd="sng" algn="ctr">
+                      <a:solidFill>
+                        <a:srgbClr val="C9BFAE"/>
+                      </a:solidFill>
+                      <a:prstDash val="solid"/>
+                      <a:round/>
+                      <a:headEnd type="none" w="med" len="med"/>
+                      <a:tailEnd type="none" w="med" len="med"/>
+                    </a:lnB>
+                    <a:solidFill>
+                      <a:srgbClr val="FFFFFF"/>
+                    </a:solidFill>
+                  </a:tcPr>
+                </a:tc>
+                <a:tc>
+                  <a:txBody>
+                    <a:bodyPr/>
+                    <a:lstStyle/>
+                    <a:p>
+                      <a:pPr algn="l" indent="0" marL="0">
+                        <a:buNone/>
+                      </a:pPr>
+                      <a:r>
+                        <a:rPr lang="en-US" sz="1350" dirty="0">
+                          <a:solidFill>
+                            <a:srgbClr val="1E293B"/>
+                          </a:solidFill>
+                        </a:rPr>
+                        <a:t>PP-anchor fraction ↓</a:t>
+                      </a:r>
+                      <a:endParaRPr lang="en-US" sz="1350" dirty="0"/>
+                    </a:p>
+                  </a:txBody>
+                  <a:tcPr marL="63500" marR="63500" marT="38100" marB="38100" anchor="ctr">
+                    <a:lnL w="6350" cap="flat" cmpd="sng" algn="ctr">
+                      <a:solidFill>
+                        <a:srgbClr val="C9BFAE"/>
+                      </a:solidFill>
+                      <a:prstDash val="solid"/>
+                      <a:round/>
+                      <a:headEnd type="none" w="med" len="med"/>
+                      <a:tailEnd type="none" w="med" len="med"/>
+                    </a:lnL>
+                    <a:lnR w="6350" cap="flat" cmpd="sng" algn="ctr">
+                      <a:solidFill>
+                        <a:srgbClr val="C9BFAE"/>
+                      </a:solidFill>
+                      <a:prstDash val="solid"/>
+                      <a:round/>
+                      <a:headEnd type="none" w="med" len="med"/>
+                      <a:tailEnd type="none" w="med" len="med"/>
+                    </a:lnR>
+                    <a:lnT w="6350" cap="flat" cmpd="sng" algn="ctr">
+                      <a:solidFill>
+                        <a:srgbClr val="C9BFAE"/>
+                      </a:solidFill>
+                      <a:prstDash val="solid"/>
+                      <a:round/>
+                      <a:headEnd type="none" w="med" len="med"/>
+                      <a:tailEnd type="none" w="med" len="med"/>
+                    </a:lnT>
+                    <a:lnB w="6350" cap="flat" cmpd="sng" algn="ctr">
+                      <a:solidFill>
+                        <a:srgbClr val="C9BFAE"/>
+                      </a:solidFill>
+                      <a:prstDash val="solid"/>
+                      <a:round/>
+                      <a:headEnd type="none" w="med" len="med"/>
+                      <a:tailEnd type="none" w="med" len="med"/>
+                    </a:lnB>
+                    <a:solidFill>
+                      <a:srgbClr val="FFFFFF"/>
+                    </a:solidFill>
+                  </a:tcPr>
+                </a:tc>
+                <a:tc>
+                  <a:txBody>
+                    <a:bodyPr/>
+                    <a:lstStyle/>
+                    <a:p>
+                      <a:pPr algn="l" indent="0" marL="0">
+                        <a:buNone/>
+                      </a:pPr>
+                      <a:r>
+                        <a:rPr lang="en-US" sz="1350" dirty="0">
+                          <a:solidFill>
+                            <a:srgbClr val="1E293B"/>
+                          </a:solidFill>
+                        </a:rPr>
+                        <a:t>20 / 21 / 22 / 24 / 24 %</a:t>
+                      </a:r>
+                      <a:endParaRPr lang="en-US" sz="1350" dirty="0"/>
+                    </a:p>
+                  </a:txBody>
+                  <a:tcPr marL="63500" marR="63500" marT="38100" marB="38100" anchor="ctr">
+                    <a:lnL w="6350" cap="flat" cmpd="sng" algn="ctr">
+                      <a:solidFill>
+                        <a:srgbClr val="C9BFAE"/>
+                      </a:solidFill>
+                      <a:prstDash val="solid"/>
+                      <a:round/>
+                      <a:headEnd type="none" w="med" len="med"/>
+                      <a:tailEnd type="none" w="med" len="med"/>
+                    </a:lnL>
+                    <a:lnR w="6350" cap="flat" cmpd="sng" algn="ctr">
+                      <a:solidFill>
+                        <a:srgbClr val="C9BFAE"/>
+                      </a:solidFill>
+                      <a:prstDash val="solid"/>
+                      <a:round/>
+                      <a:headEnd type="none" w="med" len="med"/>
+                      <a:tailEnd type="none" w="med" len="med"/>
+                    </a:lnR>
+                    <a:lnT w="6350" cap="flat" cmpd="sng" algn="ctr">
+                      <a:solidFill>
+                        <a:srgbClr val="C9BFAE"/>
+                      </a:solidFill>
+                      <a:prstDash val="solid"/>
+                      <a:round/>
+                      <a:headEnd type="none" w="med" len="med"/>
+                      <a:tailEnd type="none" w="med" len="med"/>
+                    </a:lnT>
+                    <a:lnB w="6350" cap="flat" cmpd="sng" algn="ctr">
+                      <a:solidFill>
+                        <a:srgbClr val="C9BFAE"/>
+                      </a:solidFill>
+                      <a:prstDash val="solid"/>
+                      <a:round/>
+                      <a:headEnd type="none" w="med" len="med"/>
+                      <a:tailEnd type="none" w="med" len="med"/>
+                    </a:lnB>
+                    <a:solidFill>
+                      <a:srgbClr val="FFFFFF"/>
+                    </a:solidFill>
+                  </a:tcPr>
+                </a:tc>
+                <a:tc>
+                  <a:txBody>
+                    <a:bodyPr/>
+                    <a:lstStyle/>
+                    <a:p>
+                      <a:pPr algn="l" indent="0" marL="0">
+                        <a:buNone/>
+                      </a:pPr>
+                      <a:r>
+                        <a:rPr lang="en-US" sz="1350" dirty="0">
+                          <a:solidFill>
+                            <a:srgbClr val="1E293B"/>
+                          </a:solidFill>
+                        </a:rPr>
+                        <a:t>flat → no depletion</a:t>
+                      </a:r>
+                      <a:endParaRPr lang="en-US" sz="1350" dirty="0"/>
+                    </a:p>
+                  </a:txBody>
+                  <a:tcPr marL="63500" marR="63500" marT="38100" marB="38100" anchor="ctr">
+                    <a:lnL w="6350" cap="flat" cmpd="sng" algn="ctr">
+                      <a:solidFill>
+                        <a:srgbClr val="C9BFAE"/>
+                      </a:solidFill>
+                      <a:prstDash val="solid"/>
+                      <a:round/>
+                      <a:headEnd type="none" w="med" len="med"/>
+                      <a:tailEnd type="none" w="med" len="med"/>
+                    </a:lnL>
+                    <a:lnR w="6350" cap="flat" cmpd="sng" algn="ctr">
+                      <a:solidFill>
+                        <a:srgbClr val="C9BFAE"/>
+                      </a:solidFill>
+                      <a:prstDash val="solid"/>
+                      <a:round/>
+                      <a:headEnd type="none" w="med" len="med"/>
+                      <a:tailEnd type="none" w="med" len="med"/>
+                    </a:lnR>
+                    <a:lnT w="6350" cap="flat" cmpd="sng" algn="ctr">
+                      <a:solidFill>
+                        <a:srgbClr val="C9BFAE"/>
+                      </a:solidFill>
+                      <a:prstDash val="solid"/>
+                      <a:round/>
+                      <a:headEnd type="none" w="med" len="med"/>
+                      <a:tailEnd type="none" w="med" len="med"/>
+                    </a:lnT>
+                    <a:lnB w="6350" cap="flat" cmpd="sng" algn="ctr">
+                      <a:solidFill>
+                        <a:srgbClr val="C9BFAE"/>
+                      </a:solidFill>
+                      <a:prstDash val="solid"/>
+                      <a:round/>
+                      <a:headEnd type="none" w="med" len="med"/>
+                      <a:tailEnd type="none" w="med" len="med"/>
+                    </a:lnB>
+                    <a:solidFill>
+                      <a:srgbClr val="FFFFFF"/>
+                    </a:solidFill>
+                  </a:tcPr>
+                </a:tc>
+              </a:tr>
+              <a:tr h="475488">
+                <a:tc>
+                  <a:txBody>
+                    <a:bodyPr/>
+                    <a:lstStyle/>
+                    <a:p>
+                      <a:pPr algn="l" indent="0" marL="0">
+                        <a:buNone/>
+                      </a:pPr>
+                      <a:r>
+                        <a:rPr lang="en-US" sz="1350" dirty="0">
+                          <a:solidFill>
+                            <a:srgbClr val="1E293B"/>
+                          </a:solidFill>
+                        </a:rPr>
+                        <a:t>Co-expression</a:t>
+                      </a:r>
+                      <a:endParaRPr lang="en-US" sz="1350" dirty="0"/>
+                    </a:p>
+                  </a:txBody>
+                  <a:tcPr marL="63500" marR="63500" marT="38100" marB="38100" anchor="ctr">
+                    <a:lnL w="6350" cap="flat" cmpd="sng" algn="ctr">
+                      <a:solidFill>
+                        <a:srgbClr val="C9BFAE"/>
+                      </a:solidFill>
+                      <a:prstDash val="solid"/>
+                      <a:round/>
+                      <a:headEnd type="none" w="med" len="med"/>
+                      <a:tailEnd type="none" w="med" len="med"/>
+                    </a:lnL>
+                    <a:lnR w="6350" cap="flat" cmpd="sng" algn="ctr">
+                      <a:solidFill>
+                        <a:srgbClr val="C9BFAE"/>
+                      </a:solidFill>
+                      <a:prstDash val="solid"/>
+                      <a:round/>
+                      <a:headEnd type="none" w="med" len="med"/>
+                      <a:tailEnd type="none" w="med" len="med"/>
+                    </a:lnR>
+                    <a:lnT w="6350" cap="flat" cmpd="sng" algn="ctr">
+                      <a:solidFill>
+                        <a:srgbClr val="C9BFAE"/>
+                      </a:solidFill>
+                      <a:prstDash val="solid"/>
+                      <a:round/>
+                      <a:headEnd type="none" w="med" len="med"/>
+                      <a:tailEnd type="none" w="med" len="med"/>
+                    </a:lnT>
+                    <a:lnB w="6350" cap="flat" cmpd="sng" algn="ctr">
+                      <a:solidFill>
+                        <a:srgbClr val="C9BFAE"/>
+                      </a:solidFill>
+                      <a:prstDash val="solid"/>
+                      <a:round/>
+                      <a:headEnd type="none" w="med" len="med"/>
+                      <a:tailEnd type="none" w="med" len="med"/>
+                    </a:lnB>
+                    <a:solidFill>
+                      <a:srgbClr val="FFFFFF"/>
+                    </a:solidFill>
+                  </a:tcPr>
+                </a:tc>
+                <a:tc>
+                  <a:txBody>
+                    <a:bodyPr/>
+                    <a:lstStyle/>
+                    <a:p>
+                      <a:pPr algn="l" indent="0" marL="0">
+                        <a:buNone/>
+                      </a:pPr>
+                      <a:r>
+                        <a:rPr lang="en-US" sz="1350" dirty="0">
+                          <a:solidFill>
+                            <a:srgbClr val="1E293B"/>
+                          </a:solidFill>
+                        </a:rPr>
+                        <a:t>dual (≥2 UMI) fraction ↑</a:t>
+                      </a:r>
+                      <a:endParaRPr lang="en-US" sz="1350" dirty="0"/>
+                    </a:p>
+                  </a:txBody>
+                  <a:tcPr marL="63500" marR="63500" marT="38100" marB="38100" anchor="ctr">
+                    <a:lnL w="6350" cap="flat" cmpd="sng" algn="ctr">
+                      <a:solidFill>
+                        <a:srgbClr val="C9BFAE"/>
+                      </a:solidFill>
+                      <a:prstDash val="solid"/>
+                      <a:round/>
+                      <a:headEnd type="none" w="med" len="med"/>
+                      <a:tailEnd type="none" w="med" len="med"/>
+                    </a:lnL>
+                    <a:lnR w="6350" cap="flat" cmpd="sng" algn="ctr">
+                      <a:solidFill>
+                        <a:srgbClr val="C9BFAE"/>
+                      </a:solidFill>
+                      <a:prstDash val="solid"/>
+                      <a:round/>
+                      <a:headEnd type="none" w="med" len="med"/>
+                      <a:tailEnd type="none" w="med" len="med"/>
+                    </a:lnR>
+                    <a:lnT w="6350" cap="flat" cmpd="sng" algn="ctr">
+                      <a:solidFill>
+                        <a:srgbClr val="C9BFAE"/>
+                      </a:solidFill>
+                      <a:prstDash val="solid"/>
+                      <a:round/>
+                      <a:headEnd type="none" w="med" len="med"/>
+                      <a:tailEnd type="none" w="med" len="med"/>
+                    </a:lnT>
+                    <a:lnB w="6350" cap="flat" cmpd="sng" algn="ctr">
+                      <a:solidFill>
+                        <a:srgbClr val="C9BFAE"/>
+                      </a:solidFill>
+                      <a:prstDash val="solid"/>
+                      <a:round/>
+                      <a:headEnd type="none" w="med" len="med"/>
+                      <a:tailEnd type="none" w="med" len="med"/>
+                    </a:lnB>
+                    <a:solidFill>
+                      <a:srgbClr val="FFFFFF"/>
+                    </a:solidFill>
+                  </a:tcPr>
+                </a:tc>
+                <a:tc>
+                  <a:txBody>
+                    <a:bodyPr/>
+                    <a:lstStyle/>
+                    <a:p>
+                      <a:pPr algn="l" indent="0" marL="0">
+                        <a:buNone/>
+                      </a:pPr>
+                      <a:r>
+                        <a:rPr lang="en-US" sz="1350" dirty="0">
+                          <a:solidFill>
+                            <a:srgbClr val="1E293B"/>
+                          </a:solidFill>
+                        </a:rPr>
+                        <a:t>~0.0 / 0.2 / 0.4 / 0.2 / 0.2 %</a:t>
+                      </a:r>
+                      <a:endParaRPr lang="en-US" sz="1350" dirty="0"/>
+                    </a:p>
+                  </a:txBody>
+                  <a:tcPr marL="63500" marR="63500" marT="38100" marB="38100" anchor="ctr">
+                    <a:lnL w="6350" cap="flat" cmpd="sng" algn="ctr">
+                      <a:solidFill>
+                        <a:srgbClr val="C9BFAE"/>
+                      </a:solidFill>
+                      <a:prstDash val="solid"/>
+                      <a:round/>
+                      <a:headEnd type="none" w="med" len="med"/>
+                      <a:tailEnd type="none" w="med" len="med"/>
+                    </a:lnL>
+                    <a:lnR w="6350" cap="flat" cmpd="sng" algn="ctr">
+                      <a:solidFill>
+                        <a:srgbClr val="C9BFAE"/>
+                      </a:solidFill>
+                      <a:prstDash val="solid"/>
+                      <a:round/>
+                      <a:headEnd type="none" w="med" len="med"/>
+                      <a:tailEnd type="none" w="med" len="med"/>
+                    </a:lnR>
+                    <a:lnT w="6350" cap="flat" cmpd="sng" algn="ctr">
+                      <a:solidFill>
+                        <a:srgbClr val="C9BFAE"/>
+                      </a:solidFill>
+                      <a:prstDash val="solid"/>
+                      <a:round/>
+                      <a:headEnd type="none" w="med" len="med"/>
+                      <a:tailEnd type="none" w="med" len="med"/>
+                    </a:lnT>
+                    <a:lnB w="6350" cap="flat" cmpd="sng" algn="ctr">
+                      <a:solidFill>
+                        <a:srgbClr val="C9BFAE"/>
+                      </a:solidFill>
+                      <a:prstDash val="solid"/>
+                      <a:round/>
+                      <a:headEnd type="none" w="med" len="med"/>
+                      <a:tailEnd type="none" w="med" len="med"/>
+                    </a:lnB>
+                    <a:solidFill>
+                      <a:srgbClr val="FFFFFF"/>
+                    </a:solidFill>
+                  </a:tcPr>
+                </a:tc>
+                <a:tc>
+                  <a:txBody>
+                    <a:bodyPr/>
+                    <a:lstStyle/>
+                    <a:p>
+                      <a:pPr algn="l" indent="0" marL="0">
+                        <a:buNone/>
+                      </a:pPr>
+                      <a:r>
+                        <a:rPr lang="en-US" sz="1350" dirty="0">
+                          <a:solidFill>
+                            <a:srgbClr val="1E293B"/>
+                          </a:solidFill>
+                        </a:rPr>
+                        <a:t>ambient soup → no</a:t>
+                      </a:r>
+                      <a:endParaRPr lang="en-US" sz="1350" dirty="0"/>
+                    </a:p>
+                  </a:txBody>
+                  <a:tcPr marL="63500" marR="63500" marT="38100" marB="38100" anchor="ctr">
+                    <a:lnL w="6350" cap="flat" cmpd="sng" algn="ctr">
+                      <a:solidFill>
+                        <a:srgbClr val="C9BFAE"/>
+                      </a:solidFill>
+                      <a:prstDash val="solid"/>
+                      <a:round/>
+                      <a:headEnd type="none" w="med" len="med"/>
+                      <a:tailEnd type="none" w="med" len="med"/>
+                    </a:lnL>
+                    <a:lnR w="6350" cap="flat" cmpd="sng" algn="ctr">
+                      <a:solidFill>
+                        <a:srgbClr val="C9BFAE"/>
+                      </a:solidFill>
+                      <a:prstDash val="solid"/>
+                      <a:round/>
+                      <a:headEnd type="none" w="med" len="med"/>
+                      <a:tailEnd type="none" w="med" len="med"/>
+                    </a:lnR>
+                    <a:lnT w="6350" cap="flat" cmpd="sng" algn="ctr">
+                      <a:solidFill>
+                        <a:srgbClr val="C9BFAE"/>
+                      </a:solidFill>
+                      <a:prstDash val="solid"/>
+                      <a:round/>
+                      <a:headEnd type="none" w="med" len="med"/>
+                      <a:tailEnd type="none" w="med" len="med"/>
+                    </a:lnT>
+                    <a:lnB w="6350" cap="flat" cmpd="sng" algn="ctr">
+                      <a:solidFill>
+                        <a:srgbClr val="C9BFAE"/>
+                      </a:solidFill>
+                      <a:prstDash val="solid"/>
+                      <a:round/>
+                      <a:headEnd type="none" w="med" len="med"/>
+                      <a:tailEnd type="none" w="med" len="med"/>
+                    </a:lnB>
+                    <a:solidFill>
+                      <a:srgbClr val="FFFFFF"/>
+                    </a:solidFill>
+                  </a:tcPr>
+                </a:tc>
+              </a:tr>
+              <a:tr h="475488">
+                <a:tc>
+                  <a:txBody>
+                    <a:bodyPr/>
+                    <a:lstStyle/>
+                    <a:p>
+                      <a:pPr algn="l" indent="0" marL="0">
+                        <a:buNone/>
+                      </a:pPr>
+                      <a:r>
+                        <a:rPr lang="en-US" sz="1350" dirty="0">
+                          <a:solidFill>
+                            <a:srgbClr val="1E293B"/>
+                          </a:solidFill>
+                        </a:rPr>
+                        <a:t>Gradient compression</a:t>
+                      </a:r>
+                      <a:endParaRPr lang="en-US" sz="1350" dirty="0"/>
+                    </a:p>
+                  </a:txBody>
+                  <a:tcPr marL="63500" marR="63500" marT="38100" marB="38100" anchor="ctr">
+                    <a:lnL w="6350" cap="flat" cmpd="sng" algn="ctr">
+                      <a:solidFill>
+                        <a:srgbClr val="C9BFAE"/>
+                      </a:solidFill>
+                      <a:prstDash val="solid"/>
+                      <a:round/>
+                      <a:headEnd type="none" w="med" len="med"/>
+                      <a:tailEnd type="none" w="med" len="med"/>
+                    </a:lnL>
+                    <a:lnR w="6350" cap="flat" cmpd="sng" algn="ctr">
+                      <a:solidFill>
+                        <a:srgbClr val="C9BFAE"/>
+                      </a:solidFill>
+                      <a:prstDash val="solid"/>
+                      <a:round/>
+                      <a:headEnd type="none" w="med" len="med"/>
+                      <a:tailEnd type="none" w="med" len="med"/>
+                    </a:lnR>
+                    <a:lnT w="6350" cap="flat" cmpd="sng" algn="ctr">
+                      <a:solidFill>
+                        <a:srgbClr val="C9BFAE"/>
+                      </a:solidFill>
+                      <a:prstDash val="solid"/>
+                      <a:round/>
+                      <a:headEnd type="none" w="med" len="med"/>
+                      <a:tailEnd type="none" w="med" len="med"/>
+                    </a:lnT>
+                    <a:lnB w="6350" cap="flat" cmpd="sng" algn="ctr">
+                      <a:solidFill>
+                        <a:srgbClr val="C9BFAE"/>
+                      </a:solidFill>
+                      <a:prstDash val="solid"/>
+                      <a:round/>
+                      <a:headEnd type="none" w="med" len="med"/>
+                      <a:tailEnd type="none" w="med" len="med"/>
+                    </a:lnB>
+                    <a:solidFill>
+                      <a:srgbClr val="FFFFFF"/>
+                    </a:solidFill>
+                  </a:tcPr>
+                </a:tc>
+                <a:tc>
+                  <a:txBody>
+                    <a:bodyPr/>
+                    <a:lstStyle/>
+                    <a:p>
+                      <a:pPr algn="l" indent="0" marL="0">
+                        <a:buNone/>
+                      </a:pPr>
+                      <a:r>
+                        <a:rPr lang="en-US" sz="1350" dirty="0">
+                          <a:solidFill>
+                            <a:srgbClr val="1E293B"/>
+                          </a:solidFill>
+                        </a:rPr>
+                        <a:t>per-cell balance → middle</a:t>
+                      </a:r>
+                      <a:endParaRPr lang="en-US" sz="1350" dirty="0"/>
+                    </a:p>
+                  </a:txBody>
+                  <a:tcPr marL="63500" marR="63500" marT="38100" marB="38100" anchor="ctr">
+                    <a:lnL w="6350" cap="flat" cmpd="sng" algn="ctr">
+                      <a:solidFill>
+                        <a:srgbClr val="C9BFAE"/>
+                      </a:solidFill>
+                      <a:prstDash val="solid"/>
+                      <a:round/>
+                      <a:headEnd type="none" w="med" len="med"/>
+                      <a:tailEnd type="none" w="med" len="med"/>
+                    </a:lnL>
+                    <a:lnR w="6350" cap="flat" cmpd="sng" algn="ctr">
+                      <a:solidFill>
+                        <a:srgbClr val="C9BFAE"/>
+                      </a:solidFill>
+                      <a:prstDash val="solid"/>
+                      <a:round/>
+                      <a:headEnd type="none" w="med" len="med"/>
+                      <a:tailEnd type="none" w="med" len="med"/>
+                    </a:lnR>
+                    <a:lnT w="6350" cap="flat" cmpd="sng" algn="ctr">
+                      <a:solidFill>
+                        <a:srgbClr val="C9BFAE"/>
+                      </a:solidFill>
+                      <a:prstDash val="solid"/>
+                      <a:round/>
+                      <a:headEnd type="none" w="med" len="med"/>
+                      <a:tailEnd type="none" w="med" len="med"/>
+                    </a:lnT>
+                    <a:lnB w="6350" cap="flat" cmpd="sng" algn="ctr">
+                      <a:solidFill>
+                        <a:srgbClr val="C9BFAE"/>
+                      </a:solidFill>
+                      <a:prstDash val="solid"/>
+                      <a:round/>
+                      <a:headEnd type="none" w="med" len="med"/>
+                      <a:tailEnd type="none" w="med" len="med"/>
+                    </a:lnB>
+                    <a:solidFill>
+                      <a:srgbClr val="FFFFFF"/>
+                    </a:solidFill>
+                  </a:tcPr>
+                </a:tc>
+                <a:tc>
+                  <a:txBody>
+                    <a:bodyPr/>
+                    <a:lstStyle/>
+                    <a:p>
+                      <a:pPr algn="l" indent="0" marL="0">
+                        <a:buNone/>
+                      </a:pPr>
+                      <a:r>
+                        <a:rPr lang="en-US" sz="1350" dirty="0">
+                          <a:solidFill>
+                            <a:srgbClr val="1E293B"/>
+                          </a:solidFill>
+                        </a:rPr>
+                        <a:t>mild, non-monotone (peak F3)</a:t>
+                      </a:r>
+                      <a:endParaRPr lang="en-US" sz="1350" dirty="0"/>
+                    </a:p>
+                  </a:txBody>
+                  <a:tcPr marL="63500" marR="63500" marT="38100" marB="38100" anchor="ctr">
+                    <a:lnL w="6350" cap="flat" cmpd="sng" algn="ctr">
+                      <a:solidFill>
+                        <a:srgbClr val="C9BFAE"/>
+                      </a:solidFill>
+                      <a:prstDash val="solid"/>
+                      <a:round/>
+                      <a:headEnd type="none" w="med" len="med"/>
+                      <a:tailEnd type="none" w="med" len="med"/>
+                    </a:lnL>
+                    <a:lnR w="6350" cap="flat" cmpd="sng" algn="ctr">
+                      <a:solidFill>
+                        <a:srgbClr val="C9BFAE"/>
+                      </a:solidFill>
+                      <a:prstDash val="solid"/>
+                      <a:round/>
+                      <a:headEnd type="none" w="med" len="med"/>
+                      <a:tailEnd type="none" w="med" len="med"/>
+                    </a:lnR>
+                    <a:lnT w="6350" cap="flat" cmpd="sng" algn="ctr">
+                      <a:solidFill>
+                        <a:srgbClr val="C9BFAE"/>
+                      </a:solidFill>
+                      <a:prstDash val="solid"/>
+                      <a:round/>
+                      <a:headEnd type="none" w="med" len="med"/>
+                      <a:tailEnd type="none" w="med" len="med"/>
+                    </a:lnT>
+                    <a:lnB w="6350" cap="flat" cmpd="sng" algn="ctr">
+                      <a:solidFill>
+                        <a:srgbClr val="C9BFAE"/>
+                      </a:solidFill>
+                      <a:prstDash val="solid"/>
+                      <a:round/>
+                      <a:headEnd type="none" w="med" len="med"/>
+                      <a:tailEnd type="none" w="med" len="med"/>
+                    </a:lnB>
+                    <a:solidFill>
+                      <a:srgbClr val="FFFFFF"/>
+                    </a:solidFill>
+                  </a:tcPr>
+                </a:tc>
+                <a:tc>
+                  <a:txBody>
+                    <a:bodyPr/>
+                    <a:lstStyle/>
+                    <a:p>
+                      <a:pPr algn="l" indent="0" marL="0">
+                        <a:buNone/>
+                      </a:pPr>
+                      <a:r>
+                        <a:rPr lang="en-US" sz="1350" dirty="0">
+                          <a:solidFill>
+                            <a:srgbClr val="1E293B"/>
+                          </a:solidFill>
+                        </a:rPr>
+                        <a:t>gradient present</a:t>
+                      </a:r>
+                      <a:endParaRPr lang="en-US" sz="1350" dirty="0"/>
+                    </a:p>
+                  </a:txBody>
+                  <a:tcPr marL="63500" marR="63500" marT="38100" marB="38100" anchor="ctr">
+                    <a:lnL w="6350" cap="flat" cmpd="sng" algn="ctr">
+                      <a:solidFill>
+                        <a:srgbClr val="C9BFAE"/>
+                      </a:solidFill>
+                      <a:prstDash val="solid"/>
+                      <a:round/>
+                      <a:headEnd type="none" w="med" len="med"/>
+                      <a:tailEnd type="none" w="med" len="med"/>
+                    </a:lnL>
+                    <a:lnR w="6350" cap="flat" cmpd="sng" algn="ctr">
+                      <a:solidFill>
+                        <a:srgbClr val="C9BFAE"/>
+                      </a:solidFill>
+                      <a:prstDash val="solid"/>
+                      <a:round/>
+                      <a:headEnd type="none" w="med" len="med"/>
+                      <a:tailEnd type="none" w="med" len="med"/>
+                    </a:lnR>
+                    <a:lnT w="6350" cap="flat" cmpd="sng" algn="ctr">
+                      <a:solidFill>
+                        <a:srgbClr val="C9BFAE"/>
+                      </a:solidFill>
+                      <a:prstDash val="solid"/>
+                      <a:round/>
+                      <a:headEnd type="none" w="med" len="med"/>
+                      <a:tailEnd type="none" w="med" len="med"/>
+                    </a:lnT>
+                    <a:lnB w="6350" cap="flat" cmpd="sng" algn="ctr">
+                      <a:solidFill>
+                        <a:srgbClr val="C9BFAE"/>
+                      </a:solidFill>
+                      <a:prstDash val="solid"/>
+                      <a:round/>
+                      <a:headEnd type="none" w="med" len="med"/>
+                      <a:tailEnd type="none" w="med" len="med"/>
+                    </a:lnB>
+                    <a:solidFill>
+                      <a:srgbClr val="FFFFFF"/>
+                    </a:solidFill>
+                  </a:tcPr>
+                </a:tc>
+              </a:tr>
+              <a:tr h="475488">
+                <a:tc>
+                  <a:txBody>
+                    <a:bodyPr/>
+                    <a:lstStyle/>
+                    <a:p>
+                      <a:pPr algn="l" indent="0" marL="0">
+                        <a:buNone/>
+                      </a:pPr>
+                      <a:r>
+                        <a:rPr lang="en-US" sz="1350" dirty="0">
+                          <a:solidFill>
+                            <a:srgbClr val="1E293B"/>
+                          </a:solidFill>
+                        </a:rPr>
+                        <a:t>Turn-off</a:t>
+                      </a:r>
+                      <a:endParaRPr lang="en-US" sz="1350" dirty="0"/>
+                    </a:p>
+                  </a:txBody>
+                  <a:tcPr marL="63500" marR="63500" marT="38100" marB="38100" anchor="ctr">
+                    <a:lnL w="6350" cap="flat" cmpd="sng" algn="ctr">
+                      <a:solidFill>
+                        <a:srgbClr val="C9BFAE"/>
+                      </a:solidFill>
+                      <a:prstDash val="solid"/>
+                      <a:round/>
+                      <a:headEnd type="none" w="med" len="med"/>
+                      <a:tailEnd type="none" w="med" len="med"/>
+                    </a:lnL>
+                    <a:lnR w="6350" cap="flat" cmpd="sng" algn="ctr">
+                      <a:solidFill>
+                        <a:srgbClr val="C9BFAE"/>
+                      </a:solidFill>
+                      <a:prstDash val="solid"/>
+                      <a:round/>
+                      <a:headEnd type="none" w="med" len="med"/>
+                      <a:tailEnd type="none" w="med" len="med"/>
+                    </a:lnR>
+                    <a:lnT w="6350" cap="flat" cmpd="sng" algn="ctr">
+                      <a:solidFill>
+                        <a:srgbClr val="C9BFAE"/>
+                      </a:solidFill>
+                      <a:prstDash val="solid"/>
+                      <a:round/>
+                      <a:headEnd type="none" w="med" len="med"/>
+                      <a:tailEnd type="none" w="med" len="med"/>
+                    </a:lnT>
+                    <a:lnB w="6350" cap="flat" cmpd="sng" algn="ctr">
+                      <a:solidFill>
+                        <a:srgbClr val="C9BFAE"/>
+                      </a:solidFill>
+                      <a:prstDash val="solid"/>
+                      <a:round/>
+                      <a:headEnd type="none" w="med" len="med"/>
+                      <a:tailEnd type="none" w="med" len="med"/>
+                    </a:lnB>
+                    <a:solidFill>
+                      <a:srgbClr val="FFFFFF"/>
+                    </a:solidFill>
+                  </a:tcPr>
+                </a:tc>
+                <a:tc>
+                  <a:txBody>
+                    <a:bodyPr/>
+                    <a:lstStyle/>
+                    <a:p>
+                      <a:pPr algn="l" indent="0" marL="0">
+                        <a:buNone/>
+                      </a:pPr>
+                      <a:r>
+                        <a:rPr lang="en-US" sz="1350" dirty="0">
+                          <a:solidFill>
+                            <a:srgbClr val="1E293B"/>
+                          </a:solidFill>
+                        </a:rPr>
+                        <a:t>null (double-neg) fraction ↑</a:t>
+                      </a:r>
+                      <a:endParaRPr lang="en-US" sz="1350" dirty="0"/>
+                    </a:p>
+                  </a:txBody>
+                  <a:tcPr marL="63500" marR="63500" marT="38100" marB="38100" anchor="ctr">
+                    <a:lnL w="6350" cap="flat" cmpd="sng" algn="ctr">
+                      <a:solidFill>
+                        <a:srgbClr val="C9BFAE"/>
+                      </a:solidFill>
+                      <a:prstDash val="solid"/>
+                      <a:round/>
+                      <a:headEnd type="none" w="med" len="med"/>
+                      <a:tailEnd type="none" w="med" len="med"/>
+                    </a:lnL>
+                    <a:lnR w="6350" cap="flat" cmpd="sng" algn="ctr">
+                      <a:solidFill>
+                        <a:srgbClr val="C9BFAE"/>
+                      </a:solidFill>
+                      <a:prstDash val="solid"/>
+                      <a:round/>
+                      <a:headEnd type="none" w="med" len="med"/>
+                      <a:tailEnd type="none" w="med" len="med"/>
+                    </a:lnR>
+                    <a:lnT w="6350" cap="flat" cmpd="sng" algn="ctr">
+                      <a:solidFill>
+                        <a:srgbClr val="C9BFAE"/>
+                      </a:solidFill>
+                      <a:prstDash val="solid"/>
+                      <a:round/>
+                      <a:headEnd type="none" w="med" len="med"/>
+                      <a:tailEnd type="none" w="med" len="med"/>
+                    </a:lnT>
+                    <a:lnB w="6350" cap="flat" cmpd="sng" algn="ctr">
+                      <a:solidFill>
+                        <a:srgbClr val="C9BFAE"/>
+                      </a:solidFill>
+                      <a:prstDash val="solid"/>
+                      <a:round/>
+                      <a:headEnd type="none" w="med" len="med"/>
+                      <a:tailEnd type="none" w="med" len="med"/>
+                    </a:lnB>
+                    <a:solidFill>
+                      <a:srgbClr val="FFFFFF"/>
+                    </a:solidFill>
+                  </a:tcPr>
+                </a:tc>
+                <a:tc>
+                  <a:txBody>
+                    <a:bodyPr/>
+                    <a:lstStyle/>
+                    <a:p>
+                      <a:pPr algn="l" indent="0" marL="0">
+                        <a:buNone/>
+                      </a:pPr>
+                      <a:r>
+                        <a:rPr lang="en-US" sz="1350" dirty="0">
+                          <a:solidFill>
+                            <a:srgbClr val="1E293B"/>
+                          </a:solidFill>
+                        </a:rPr>
+                        <a:t>34 / 44 / 36 / 39 / 39 %</a:t>
+                      </a:r>
+                      <a:endParaRPr lang="en-US" sz="1350" dirty="0"/>
+                    </a:p>
+                  </a:txBody>
+                  <a:tcPr marL="63500" marR="63500" marT="38100" marB="38100" anchor="ctr">
+                    <a:lnL w="6350" cap="flat" cmpd="sng" algn="ctr">
+                      <a:solidFill>
+                        <a:srgbClr val="C9BFAE"/>
+                      </a:solidFill>
+                      <a:prstDash val="solid"/>
+                      <a:round/>
+                      <a:headEnd type="none" w="med" len="med"/>
+                      <a:tailEnd type="none" w="med" len="med"/>
+                    </a:lnL>
+                    <a:lnR w="6350" cap="flat" cmpd="sng" algn="ctr">
+                      <a:solidFill>
+                        <a:srgbClr val="C9BFAE"/>
+                      </a:solidFill>
+                      <a:prstDash val="solid"/>
+                      <a:round/>
+                      <a:headEnd type="none" w="med" len="med"/>
+                      <a:tailEnd type="none" w="med" len="med"/>
+                    </a:lnR>
+                    <a:lnT w="6350" cap="flat" cmpd="sng" algn="ctr">
+                      <a:solidFill>
+                        <a:srgbClr val="C9BFAE"/>
+                      </a:solidFill>
+                      <a:prstDash val="solid"/>
+                      <a:round/>
+                      <a:headEnd type="none" w="med" len="med"/>
+                      <a:tailEnd type="none" w="med" len="med"/>
+                    </a:lnT>
+                    <a:lnB w="6350" cap="flat" cmpd="sng" algn="ctr">
+                      <a:solidFill>
+                        <a:srgbClr val="C9BFAE"/>
+                      </a:solidFill>
+                      <a:prstDash val="solid"/>
+                      <a:round/>
+                      <a:headEnd type="none" w="med" len="med"/>
+                      <a:tailEnd type="none" w="med" len="med"/>
+                    </a:lnB>
+                    <a:solidFill>
+                      <a:srgbClr val="FFFFFF"/>
+                    </a:solidFill>
+                  </a:tcPr>
+                </a:tc>
+                <a:tc>
+                  <a:txBody>
+                    <a:bodyPr/>
+                    <a:lstStyle/>
+                    <a:p>
+                      <a:pPr algn="l" indent="0" marL="0">
+                        <a:buNone/>
+                      </a:pPr>
+                      <a:r>
+                        <a:rPr lang="en-US" sz="1350" dirty="0">
+                          <a:solidFill>
+                            <a:srgbClr val="1E293B"/>
+                          </a:solidFill>
+                        </a:rPr>
+                        <a:t>flat → no turn-off</a:t>
+                      </a:r>
+                      <a:endParaRPr lang="en-US" sz="1350" dirty="0"/>
+                    </a:p>
+                  </a:txBody>
+                  <a:tcPr marL="63500" marR="63500" marT="38100" marB="38100" anchor="ctr">
+                    <a:lnL w="6350" cap="flat" cmpd="sng" algn="ctr">
+                      <a:solidFill>
+                        <a:srgbClr val="C9BFAE"/>
+                      </a:solidFill>
+                      <a:prstDash val="solid"/>
+                      <a:round/>
+                      <a:headEnd type="none" w="med" len="med"/>
+                      <a:tailEnd type="none" w="med" len="med"/>
+                    </a:lnL>
+                    <a:lnR w="6350" cap="flat" cmpd="sng" algn="ctr">
+                      <a:solidFill>
+                        <a:srgbClr val="C9BFAE"/>
+                      </a:solidFill>
+                      <a:prstDash val="solid"/>
+                      <a:round/>
+                      <a:headEnd type="none" w="med" len="med"/>
+                      <a:tailEnd type="none" w="med" len="med"/>
+                    </a:lnR>
+                    <a:lnT w="6350" cap="flat" cmpd="sng" algn="ctr">
+                      <a:solidFill>
+                        <a:srgbClr val="C9BFAE"/>
+                      </a:solidFill>
+                      <a:prstDash val="solid"/>
+                      <a:round/>
+                      <a:headEnd type="none" w="med" len="med"/>
+                      <a:tailEnd type="none" w="med" len="med"/>
+                    </a:lnT>
+                    <a:lnB w="6350" cap="flat" cmpd="sng" algn="ctr">
+                      <a:solidFill>
+                        <a:srgbClr val="C9BFAE"/>
+                      </a:solidFill>
+                      <a:prstDash val="solid"/>
+                      <a:round/>
+                      <a:headEnd type="none" w="med" len="med"/>
+                      <a:tailEnd type="none" w="med" len="med"/>
+                    </a:lnB>
+                    <a:solidFill>
+                      <a:srgbClr val="FFFFFF"/>
+                    </a:solidFill>
+                  </a:tcPr>
+                </a:tc>
+              </a:tr>
+              <a:tr h="475488">
+                <a:tc>
+                  <a:txBody>
+                    <a:bodyPr/>
+                    <a:lstStyle/>
+                    <a:p>
+                      <a:pPr algn="l" indent="0" marL="0">
+                        <a:buNone/>
+                      </a:pPr>
+                      <a:r>
+                        <a:rPr lang="en-US" sz="1350" dirty="0">
+                          <a:solidFill>
+                            <a:srgbClr val="1E293B"/>
+                          </a:solidFill>
+                        </a:rPr>
+                        <a:t>Composition shift</a:t>
+                      </a:r>
+                      <a:endParaRPr lang="en-US" sz="1350" dirty="0"/>
+                    </a:p>
+                  </a:txBody>
+                  <a:tcPr marL="63500" marR="63500" marT="38100" marB="38100" anchor="ctr">
+                    <a:lnL w="6350" cap="flat" cmpd="sng" algn="ctr">
+                      <a:solidFill>
+                        <a:srgbClr val="C9BFAE"/>
+                      </a:solidFill>
+                      <a:prstDash val="solid"/>
+                      <a:round/>
+                      <a:headEnd type="none" w="med" len="med"/>
+                      <a:tailEnd type="none" w="med" len="med"/>
+                    </a:lnL>
+                    <a:lnR w="6350" cap="flat" cmpd="sng" algn="ctr">
+                      <a:solidFill>
+                        <a:srgbClr val="C9BFAE"/>
+                      </a:solidFill>
+                      <a:prstDash val="solid"/>
+                      <a:round/>
+                      <a:headEnd type="none" w="med" len="med"/>
+                      <a:tailEnd type="none" w="med" len="med"/>
+                    </a:lnR>
+                    <a:lnT w="6350" cap="flat" cmpd="sng" algn="ctr">
+                      <a:solidFill>
+                        <a:srgbClr val="C9BFAE"/>
+                      </a:solidFill>
+                      <a:prstDash val="solid"/>
+                      <a:round/>
+                      <a:headEnd type="none" w="med" len="med"/>
+                      <a:tailEnd type="none" w="med" len="med"/>
+                    </a:lnT>
+                    <a:lnB w="6350" cap="flat" cmpd="sng" algn="ctr">
+                      <a:solidFill>
+                        <a:srgbClr val="C9BFAE"/>
+                      </a:solidFill>
+                      <a:prstDash val="solid"/>
+                      <a:round/>
+                      <a:headEnd type="none" w="med" len="med"/>
+                      <a:tailEnd type="none" w="med" len="med"/>
+                    </a:lnB>
+                    <a:solidFill>
+                      <a:srgbClr val="FFFFFF"/>
+                    </a:solidFill>
+                  </a:tcPr>
+                </a:tc>
+                <a:tc>
+                  <a:txBody>
+                    <a:bodyPr/>
+                    <a:lstStyle/>
+                    <a:p>
+                      <a:pPr algn="l" indent="0" marL="0">
+                        <a:buNone/>
+                      </a:pPr>
+                      <a:r>
+                        <a:rPr lang="en-US" sz="1350" dirty="0">
+                          <a:solidFill>
+                            <a:srgbClr val="1E293B"/>
+                          </a:solidFill>
+                        </a:rPr>
+                        <a:t>PP : PC anchor ratio</a:t>
+                      </a:r>
+                      <a:endParaRPr lang="en-US" sz="1350" dirty="0"/>
+                    </a:p>
+                  </a:txBody>
+                  <a:tcPr marL="63500" marR="63500" marT="38100" marB="38100" anchor="ctr">
+                    <a:lnL w="6350" cap="flat" cmpd="sng" algn="ctr">
+                      <a:solidFill>
+                        <a:srgbClr val="C9BFAE"/>
+                      </a:solidFill>
+                      <a:prstDash val="solid"/>
+                      <a:round/>
+                      <a:headEnd type="none" w="med" len="med"/>
+                      <a:tailEnd type="none" w="med" len="med"/>
+                    </a:lnL>
+                    <a:lnR w="6350" cap="flat" cmpd="sng" algn="ctr">
+                      <a:solidFill>
+                        <a:srgbClr val="C9BFAE"/>
+                      </a:solidFill>
+                      <a:prstDash val="solid"/>
+                      <a:round/>
+                      <a:headEnd type="none" w="med" len="med"/>
+                      <a:tailEnd type="none" w="med" len="med"/>
+                    </a:lnR>
+                    <a:lnT w="6350" cap="flat" cmpd="sng" algn="ctr">
+                      <a:solidFill>
+                        <a:srgbClr val="C9BFAE"/>
+                      </a:solidFill>
+                      <a:prstDash val="solid"/>
+                      <a:round/>
+                      <a:headEnd type="none" w="med" len="med"/>
+                      <a:tailEnd type="none" w="med" len="med"/>
+                    </a:lnT>
+                    <a:lnB w="6350" cap="flat" cmpd="sng" algn="ctr">
+                      <a:solidFill>
+                        <a:srgbClr val="C9BFAE"/>
+                      </a:solidFill>
+                      <a:prstDash val="solid"/>
+                      <a:round/>
+                      <a:headEnd type="none" w="med" len="med"/>
+                      <a:tailEnd type="none" w="med" len="med"/>
+                    </a:lnB>
+                    <a:solidFill>
+                      <a:srgbClr val="FFFFFF"/>
+                    </a:solidFill>
+                  </a:tcPr>
+                </a:tc>
+                <a:tc>
+                  <a:txBody>
+                    <a:bodyPr/>
+                    <a:lstStyle/>
+                    <a:p>
+                      <a:pPr algn="l" indent="0" marL="0">
+                        <a:buNone/>
+                      </a:pPr>
+                      <a:r>
+                        <a:rPr lang="en-US" sz="1350" dirty="0">
+                          <a:solidFill>
+                            <a:srgbClr val="1E293B"/>
+                          </a:solidFill>
+                        </a:rPr>
+                        <a:t>0.62 / 1.16 / 1.01 / 1.10 / 1.18</a:t>
+                      </a:r>
+                      <a:endParaRPr lang="en-US" sz="1350" dirty="0"/>
+                    </a:p>
+                  </a:txBody>
+                  <a:tcPr marL="63500" marR="63500" marT="38100" marB="38100" anchor="ctr">
+                    <a:lnL w="6350" cap="flat" cmpd="sng" algn="ctr">
+                      <a:solidFill>
+                        <a:srgbClr val="C9BFAE"/>
+                      </a:solidFill>
+                      <a:prstDash val="solid"/>
+                      <a:round/>
+                      <a:headEnd type="none" w="med" len="med"/>
+                      <a:tailEnd type="none" w="med" len="med"/>
+                    </a:lnL>
+                    <a:lnR w="6350" cap="flat" cmpd="sng" algn="ctr">
+                      <a:solidFill>
+                        <a:srgbClr val="C9BFAE"/>
+                      </a:solidFill>
+                      <a:prstDash val="solid"/>
+                      <a:round/>
+                      <a:headEnd type="none" w="med" len="med"/>
+                      <a:tailEnd type="none" w="med" len="med"/>
+                    </a:lnR>
+                    <a:lnT w="6350" cap="flat" cmpd="sng" algn="ctr">
+                      <a:solidFill>
+                        <a:srgbClr val="C9BFAE"/>
+                      </a:solidFill>
+                      <a:prstDash val="solid"/>
+                      <a:round/>
+                      <a:headEnd type="none" w="med" len="med"/>
+                      <a:tailEnd type="none" w="med" len="med"/>
+                    </a:lnT>
+                    <a:lnB w="6350" cap="flat" cmpd="sng" algn="ctr">
+                      <a:solidFill>
+                        <a:srgbClr val="C9BFAE"/>
+                      </a:solidFill>
+                      <a:prstDash val="solid"/>
+                      <a:round/>
+                      <a:headEnd type="none" w="med" len="med"/>
+                      <a:tailEnd type="none" w="med" len="med"/>
+                    </a:lnB>
+                    <a:solidFill>
+                      <a:srgbClr val="FFFFFF"/>
+                    </a:solidFill>
+                  </a:tcPr>
+                </a:tc>
+                <a:tc>
+                  <a:txBody>
+                    <a:bodyPr/>
+                    <a:lstStyle/>
+                    <a:p>
+                      <a:pPr algn="l" indent="0" marL="0">
+                        <a:buNone/>
+                      </a:pPr>
+                      <a:r>
+                        <a:rPr lang="en-US" sz="1350" dirty="0">
+                          <a:solidFill>
+                            <a:srgbClr val="1E293B"/>
+                          </a:solidFill>
+                        </a:rPr>
+                        <a:t>~flat → no shift</a:t>
+                      </a:r>
+                      <a:endParaRPr lang="en-US" sz="1350" dirty="0"/>
+                    </a:p>
+                  </a:txBody>
+                  <a:tcPr marL="63500" marR="63500" marT="38100" marB="38100" anchor="ctr">
+                    <a:lnL w="6350" cap="flat" cmpd="sng" algn="ctr">
+                      <a:solidFill>
+                        <a:srgbClr val="C9BFAE"/>
+                      </a:solidFill>
+                      <a:prstDash val="solid"/>
+                      <a:round/>
+                      <a:headEnd type="none" w="med" len="med"/>
+                      <a:tailEnd type="none" w="med" len="med"/>
+                    </a:lnL>
+                    <a:lnR w="6350" cap="flat" cmpd="sng" algn="ctr">
+                      <a:solidFill>
+                        <a:srgbClr val="C9BFAE"/>
+                      </a:solidFill>
+                      <a:prstDash val="solid"/>
+                      <a:round/>
+                      <a:headEnd type="none" w="med" len="med"/>
+                      <a:tailEnd type="none" w="med" len="med"/>
+                    </a:lnR>
+                    <a:lnT w="6350" cap="flat" cmpd="sng" algn="ctr">
+                      <a:solidFill>
+                        <a:srgbClr val="C9BFAE"/>
+                      </a:solidFill>
+                      <a:prstDash val="solid"/>
+                      <a:round/>
+                      <a:headEnd type="none" w="med" len="med"/>
+                      <a:tailEnd type="none" w="med" len="med"/>
+                    </a:lnT>
+                    <a:lnB w="6350" cap="flat" cmpd="sng" algn="ctr">
+                      <a:solidFill>
+                        <a:srgbClr val="C9BFAE"/>
+                      </a:solidFill>
+                      <a:prstDash val="solid"/>
+                      <a:round/>
+                      <a:headEnd type="none" w="med" len="med"/>
+                      <a:tailEnd type="none" w="med" len="med"/>
+                    </a:lnB>
+                    <a:solidFill>
+                      <a:srgbClr val="FFFFFF"/>
+                    </a:solidFill>
+                  </a:tcPr>
+                </a:tc>
+              </a:tr>
+              <a:tr h="475488">
+                <a:tc>
+                  <a:txBody>
+                    <a:bodyPr/>
+                    <a:lstStyle/>
+                    <a:p>
+                      <a:pPr algn="l" indent="0" marL="0">
+                        <a:buNone/>
+                      </a:pPr>
+                      <a:r>
+                        <a:rPr lang="en-US" sz="1350" dirty="0">
+                          <a:solidFill>
+                            <a:srgbClr val="1E293B"/>
+                          </a:solidFill>
+                        </a:rPr>
+                        <a:t>Induction</a:t>
+                      </a:r>
+                      <a:endParaRPr lang="en-US" sz="1350" dirty="0"/>
+                    </a:p>
+                  </a:txBody>
+                  <a:tcPr marL="63500" marR="63500" marT="38100" marB="38100" anchor="ctr">
+                    <a:lnL w="6350" cap="flat" cmpd="sng" algn="ctr">
+                      <a:solidFill>
+                        <a:srgbClr val="C9BFAE"/>
+                      </a:solidFill>
+                      <a:prstDash val="solid"/>
+                      <a:round/>
+                      <a:headEnd type="none" w="med" len="med"/>
+                      <a:tailEnd type="none" w="med" len="med"/>
+                    </a:lnL>
+                    <a:lnR w="6350" cap="flat" cmpd="sng" algn="ctr">
+                      <a:solidFill>
+                        <a:srgbClr val="C9BFAE"/>
+                      </a:solidFill>
+                      <a:prstDash val="solid"/>
+                      <a:round/>
+                      <a:headEnd type="none" w="med" len="med"/>
+                      <a:tailEnd type="none" w="med" len="med"/>
+                    </a:lnR>
+                    <a:lnT w="6350" cap="flat" cmpd="sng" algn="ctr">
+                      <a:solidFill>
+                        <a:srgbClr val="C9BFAE"/>
+                      </a:solidFill>
+                      <a:prstDash val="solid"/>
+                      <a:round/>
+                      <a:headEnd type="none" w="med" len="med"/>
+                      <a:tailEnd type="none" w="med" len="med"/>
+                    </a:lnT>
+                    <a:lnB w="6350" cap="flat" cmpd="sng" algn="ctr">
+                      <a:solidFill>
+                        <a:srgbClr val="C9BFAE"/>
+                      </a:solidFill>
+                      <a:prstDash val="solid"/>
+                      <a:round/>
+                      <a:headEnd type="none" w="med" len="med"/>
+                      <a:tailEnd type="none" w="med" len="med"/>
+                    </a:lnB>
+                    <a:solidFill>
+                      <a:srgbClr val="FFFFFF"/>
+                    </a:solidFill>
+                  </a:tcPr>
+                </a:tc>
+                <a:tc>
+                  <a:txBody>
+                    <a:bodyPr/>
+                    <a:lstStyle/>
+                    <a:p>
+                      <a:pPr algn="l" indent="0" marL="0">
+                        <a:buNone/>
+                      </a:pPr>
+                      <a:r>
+                        <a:rPr lang="en-US" sz="1350" dirty="0">
+                          <a:solidFill>
+                            <a:srgbClr val="1E293B"/>
+                          </a:solidFill>
+                        </a:rPr>
+                        <a:t>program burden ↑</a:t>
+                      </a:r>
+                      <a:endParaRPr lang="en-US" sz="1350" dirty="0"/>
+                    </a:p>
+                  </a:txBody>
+                  <a:tcPr marL="63500" marR="63500" marT="38100" marB="38100" anchor="ctr">
+                    <a:lnL w="6350" cap="flat" cmpd="sng" algn="ctr">
+                      <a:solidFill>
+                        <a:srgbClr val="C9BFAE"/>
+                      </a:solidFill>
+                      <a:prstDash val="solid"/>
+                      <a:round/>
+                      <a:headEnd type="none" w="med" len="med"/>
+                      <a:tailEnd type="none" w="med" len="med"/>
+                    </a:lnL>
+                    <a:lnR w="6350" cap="flat" cmpd="sng" algn="ctr">
+                      <a:solidFill>
+                        <a:srgbClr val="C9BFAE"/>
+                      </a:solidFill>
+                      <a:prstDash val="solid"/>
+                      <a:round/>
+                      <a:headEnd type="none" w="med" len="med"/>
+                      <a:tailEnd type="none" w="med" len="med"/>
+                    </a:lnR>
+                    <a:lnT w="6350" cap="flat" cmpd="sng" algn="ctr">
+                      <a:solidFill>
+                        <a:srgbClr val="C9BFAE"/>
+                      </a:solidFill>
+                      <a:prstDash val="solid"/>
+                      <a:round/>
+                      <a:headEnd type="none" w="med" len="med"/>
+                      <a:tailEnd type="none" w="med" len="med"/>
+                    </a:lnT>
+                    <a:lnB w="6350" cap="flat" cmpd="sng" algn="ctr">
+                      <a:solidFill>
+                        <a:srgbClr val="C9BFAE"/>
+                      </a:solidFill>
+                      <a:prstDash val="solid"/>
+                      <a:round/>
+                      <a:headEnd type="none" w="med" len="med"/>
+                      <a:tailEnd type="none" w="med" len="med"/>
+                    </a:lnB>
+                    <a:solidFill>
+                      <a:srgbClr val="FFFFFF"/>
+                    </a:solidFill>
+                  </a:tcPr>
+                </a:tc>
+                <a:tc>
+                  <a:txBody>
+                    <a:bodyPr/>
+                    <a:lstStyle/>
+                    <a:p>
+                      <a:pPr algn="l" indent="0" marL="0">
+                        <a:buNone/>
+                      </a:pPr>
+                      <a:r>
+                        <a:rPr lang="en-US" sz="1350" dirty="0">
+                          <a:solidFill>
+                            <a:srgbClr val="1E293B"/>
+                          </a:solidFill>
+                        </a:rPr>
+                        <a:t>flat in biopsy; rises only end-stage</a:t>
+                      </a:r>
+                      <a:endParaRPr lang="en-US" sz="1350" dirty="0"/>
+                    </a:p>
+                  </a:txBody>
+                  <a:tcPr marL="63500" marR="63500" marT="38100" marB="38100" anchor="ctr">
+                    <a:lnL w="6350" cap="flat" cmpd="sng" algn="ctr">
+                      <a:solidFill>
+                        <a:srgbClr val="C9BFAE"/>
+                      </a:solidFill>
+                      <a:prstDash val="solid"/>
+                      <a:round/>
+                      <a:headEnd type="none" w="med" len="med"/>
+                      <a:tailEnd type="none" w="med" len="med"/>
+                    </a:lnL>
+                    <a:lnR w="6350" cap="flat" cmpd="sng" algn="ctr">
+                      <a:solidFill>
+                        <a:srgbClr val="C9BFAE"/>
+                      </a:solidFill>
+                      <a:prstDash val="solid"/>
+                      <a:round/>
+                      <a:headEnd type="none" w="med" len="med"/>
+                      <a:tailEnd type="none" w="med" len="med"/>
+                    </a:lnR>
+                    <a:lnT w="6350" cap="flat" cmpd="sng" algn="ctr">
+                      <a:solidFill>
+                        <a:srgbClr val="C9BFAE"/>
+                      </a:solidFill>
+                      <a:prstDash val="solid"/>
+                      <a:round/>
+                      <a:headEnd type="none" w="med" len="med"/>
+                      <a:tailEnd type="none" w="med" len="med"/>
+                    </a:lnT>
+                    <a:lnB w="6350" cap="flat" cmpd="sng" algn="ctr">
+                      <a:solidFill>
+                        <a:srgbClr val="C9BFAE"/>
+                      </a:solidFill>
+                      <a:prstDash val="solid"/>
+                      <a:round/>
+                      <a:headEnd type="none" w="med" len="med"/>
+                      <a:tailEnd type="none" w="med" len="med"/>
+                    </a:lnB>
+                    <a:solidFill>
+                      <a:srgbClr val="FFFFFF"/>
+                    </a:solidFill>
+                  </a:tcPr>
+                </a:tc>
+                <a:tc>
+                  <a:txBody>
+                    <a:bodyPr/>
+                    <a:lstStyle/>
+                    <a:p>
+                      <a:pPr algn="l" indent="0" marL="0">
+                        <a:buNone/>
+                      </a:pPr>
+                      <a:r>
+                        <a:rPr lang="en-US" sz="1350" dirty="0">
+                          <a:solidFill>
+                            <a:srgbClr val="1E293B"/>
+                          </a:solidFill>
+                        </a:rPr>
+                        <a:t>explant-only</a:t>
+                      </a:r>
+                      <a:endParaRPr lang="en-US" sz="1350" dirty="0"/>
+                    </a:p>
+                  </a:txBody>
+                  <a:tcPr marL="63500" marR="63500" marT="38100" marB="38100" anchor="ctr">
+                    <a:lnL w="6350" cap="flat" cmpd="sng" algn="ctr">
+                      <a:solidFill>
+                        <a:srgbClr val="C9BFAE"/>
+                      </a:solidFill>
+                      <a:prstDash val="solid"/>
+                      <a:round/>
+                      <a:headEnd type="none" w="med" len="med"/>
+                      <a:tailEnd type="none" w="med" len="med"/>
+                    </a:lnL>
+                    <a:lnR w="6350" cap="flat" cmpd="sng" algn="ctr">
+                      <a:solidFill>
+                        <a:srgbClr val="C9BFAE"/>
+                      </a:solidFill>
+                      <a:prstDash val="solid"/>
+                      <a:round/>
+                      <a:headEnd type="none" w="med" len="med"/>
+                      <a:tailEnd type="none" w="med" len="med"/>
+                    </a:lnR>
+                    <a:lnT w="6350" cap="flat" cmpd="sng" algn="ctr">
+                      <a:solidFill>
+                        <a:srgbClr val="C9BFAE"/>
+                      </a:solidFill>
+                      <a:prstDash val="solid"/>
+                      <a:round/>
+                      <a:headEnd type="none" w="med" len="med"/>
+                      <a:tailEnd type="none" w="med" len="med"/>
+                    </a:lnT>
+                    <a:lnB w="6350" cap="flat" cmpd="sng" algn="ctr">
+                      <a:solidFill>
+                        <a:srgbClr val="C9BFAE"/>
+                      </a:solidFill>
+                      <a:prstDash val="solid"/>
+                      <a:round/>
+                      <a:headEnd type="none" w="med" len="med"/>
+                      <a:tailEnd type="none" w="med" len="med"/>
+                    </a:lnB>
+                    <a:solidFill>
+                      <a:srgbClr val="FFFFFF"/>
+                    </a:solidFill>
+                  </a:tcPr>
+                </a:tc>
+              </a:tr>
+            </a:tbl>
+          </a:graphicData>
+        </a:graphic>
+      </p:graphicFrame>
+      <p:sp>
+        <p:nvSpPr>
+          <p:cNvPr id="6" name="Text 3"/>
+          <p:cNvSpPr/>
+          <p:nvPr/>
+        </p:nvSpPr>
+        <p:spPr>
+          <a:xfrm>
+            <a:off x="640080" y="5852160"/>
+            <a:ext cx="10972800" cy="457200"/>
+          </a:xfrm>
+          <a:prstGeom prst="rect">
+            <a:avLst/>
+          </a:prstGeom>
+          <a:noFill/>
+          <a:ln/>
+        </p:spPr>
+        <p:txBody>
+          <a:bodyPr wrap="square" rtlCol="0" anchor="ctr"/>
+          <a:lstStyle/>
+          <a:p>
+            <a:pPr algn="l" indent="0" marL="0">
+              <a:buNone/>
+            </a:pPr>
+            <a:r>
+              <a:rPr lang="en-US" sz="1300" i="1" dirty="0">
+                <a:solidFill>
+                  <a:srgbClr val="6B6256"/>
+                </a:solidFill>
+              </a:rPr>
+              <a:t>Each row is a distinct way zonation could fail, mapped to an absolute-count signature on depth-normalized counts; only the null (all stable) survives across biopsy F1–F4.</a:t>
+            </a:r>
+            <a:endParaRPr lang="en-US" sz="1300" dirty="0"/>
+          </a:p>
+        </p:txBody>
+      </p:sp>
+    </p:spTree>
+  </p:cSld>
+  <p:clrMapOvr>
+    <a:masterClrMapping/>
+  </p:clrMapOvr>
+</p:sld>
+</file>
+
 <file path=ppt/slides/slide3.xml><?xml version="1.0" encoding="utf-8"?>
 <p:sld xmlns:a="http://schemas.openxmlformats.org/drawingml/2006/main" xmlns:r="http://schemas.openxmlformats.org/officeDocument/2006/relationships" xmlns:p="http://schemas.openxmlformats.org/presentationml/2006/main">
   <p:cSld name="Slide 3">
@@ -6786,7 +9536,7 @@
                   <a:srgbClr val="C0562B"/>
                 </a:solidFill>
               </a:rPr>
-              <a:t>WHAT WE TEST</a:t>
+              <a:t>THE LEGACY APPROACH</a:t>
             </a:r>
             <a:endParaRPr lang="en-US" sz="1300" dirty="0"/>
           </a:p>
@@ -6825,7 +9575,7 @@
                 <a:ea typeface="Georgia" pitchFamily="34" charset="-122"/>
                 <a:cs typeface="Georgia" pitchFamily="34" charset="-120"/>
               </a:rPr>
-              <a:t>Zonation loss is not one mechanism</a:t>
+              <a:t>The metric that produced the collapse</a:t>
             </a:r>
             <a:endParaRPr lang="en-US" sz="2800" dirty="0"/>
           </a:p>
@@ -6833,68 +9583,61 @@
       </p:sp>
       <p:sp>
         <p:nvSpPr>
-          <p:cNvPr id="5" name="Text 3"/>
-          <p:cNvSpPr/>
-          <p:nvPr/>
-        </p:nvSpPr>
-        <p:spPr>
-          <a:xfrm>
-            <a:off x="640080" y="1463040"/>
-            <a:ext cx="10972800" cy="640080"/>
-          </a:xfrm>
-          <a:prstGeom prst="rect">
-            <a:avLst/>
-          </a:prstGeom>
-          <a:noFill/>
-          <a:ln/>
-        </p:spPr>
-        <p:txBody>
-          <a:bodyPr wrap="square" rtlCol="0" anchor="ctr"/>
-          <a:lstStyle/>
-          <a:p>
-            <a:pPr algn="l" indent="0" marL="0">
-              <a:buNone/>
-            </a:pPr>
-            <a:r>
-              <a:rPr lang="en-US" sz="1700" dirty="0">
-                <a:solidFill>
-                  <a:srgbClr val="1E293B"/>
-                </a:solidFill>
-              </a:rPr>
-              <a:t>If the zonation expression signal breaks down, it can do so in distinct ways — each has its own count signature, which we test separately:</a:t>
-            </a:r>
-            <a:endParaRPr lang="en-US" sz="1700" dirty="0"/>
-          </a:p>
-        </p:txBody>
-      </p:sp>
-      <p:sp>
-        <p:nvSpPr>
-          <p:cNvPr id="6" name="Shape 4"/>
-          <p:cNvSpPr/>
-          <p:nvPr/>
-        </p:nvSpPr>
-        <p:spPr>
-          <a:xfrm>
-            <a:off x="914400" y="2377440"/>
-            <a:ext cx="2377440" cy="1097280"/>
+          <p:cNvPr id="5" name="Shape 3"/>
+          <p:cNvSpPr/>
+          <p:nvPr/>
+        </p:nvSpPr>
+        <p:spPr>
+          <a:xfrm>
+            <a:off x="640080" y="1691640"/>
+            <a:ext cx="5852160" cy="1234440"/>
           </a:xfrm>
           <a:prstGeom prst="roundRect">
             <a:avLst>
-              <a:gd name="adj" fmla="val 6667"/>
+              <a:gd name="adj" fmla="val 5185"/>
             </a:avLst>
           </a:prstGeom>
           <a:solidFill>
-            <a:srgbClr val="1D4ED8"/>
+            <a:srgbClr val="ECE6DA"/>
           </a:solidFill>
           <a:ln/>
-          <a:effectLst>
-            <a:outerShdw sx="100000" sy="100000" kx="0" ky="0" algn="bl" rotWithShape="0" blurRad="88900" dist="38100" dir="5400000">
-              <a:srgbClr val="000000">
-                <a:alpha val="12000"/>
-              </a:srgbClr>
-            </a:outerShdw>
-          </a:effectLst>
-        </p:spPr>
+        </p:spPr>
+      </p:sp>
+      <p:sp>
+        <p:nvSpPr>
+          <p:cNvPr id="6" name="Text 4"/>
+          <p:cNvSpPr/>
+          <p:nvPr/>
+        </p:nvSpPr>
+        <p:spPr>
+          <a:xfrm>
+            <a:off x="868680" y="1810512"/>
+            <a:ext cx="5394960" cy="274320"/>
+          </a:xfrm>
+          <a:prstGeom prst="rect">
+            <a:avLst/>
+          </a:prstGeom>
+          <a:noFill/>
+          <a:ln/>
+        </p:spPr>
+        <p:txBody>
+          <a:bodyPr wrap="square" rtlCol="0" anchor="ctr"/>
+          <a:lstStyle/>
+          <a:p>
+            <a:pPr algn="l" indent="0" marL="0">
+              <a:buNone/>
+            </a:pPr>
+            <a:r>
+              <a:rPr lang="en-US" sz="1200" b="1" spc="200" kern="0" dirty="0">
+                <a:solidFill>
+                  <a:srgbClr val="6B6256"/>
+                </a:solidFill>
+              </a:rPr>
+              <a:t>WHAT WE FIRST USED</a:t>
+            </a:r>
+            <a:endParaRPr lang="en-US" sz="1200" dirty="0"/>
+          </a:p>
+        </p:txBody>
       </p:sp>
       <p:sp>
         <p:nvSpPr>
@@ -6904,45 +9647,31 @@
         </p:nvSpPr>
         <p:spPr>
           <a:xfrm>
-            <a:off x="914400" y="2377440"/>
-            <a:ext cx="2377440" cy="1097280"/>
-          </a:xfrm>
-          <a:prstGeom prst="rect">
-            <a:avLst/>
-          </a:prstGeom>
-          <a:noFill/>
-          <a:ln/>
-        </p:spPr>
-        <p:txBody>
-          <a:bodyPr wrap="square" lIns="25400" tIns="25400" rIns="25400" bIns="25400" rtlCol="0" anchor="ctr"/>
-          <a:lstStyle/>
-          <a:p>
-            <a:pPr algn="ctr" indent="0" marL="0">
-              <a:buNone/>
-            </a:pPr>
-            <a:r>
-              <a:rPr lang="en-US" sz="1450" b="1" dirty="0">
-                <a:solidFill>
-                  <a:srgbClr val="FFFFFF"/>
-                </a:solidFill>
-              </a:rPr>
-              <a:t>Depletion</a:t>
-            </a:r>
-            <a:endParaRPr lang="en-US" sz="1450" dirty="0"/>
-          </a:p>
-          <a:p>
-            <a:pPr algn="ctr" indent="0" marL="0">
-              <a:buNone/>
-            </a:pPr>
-            <a:r>
-              <a:rPr lang="en-US" sz="1450" b="1" dirty="0">
-                <a:solidFill>
-                  <a:srgbClr val="FFFFFF"/>
-                </a:solidFill>
-              </a:rPr>
-              <a:t>(a pole's cells lost)</a:t>
-            </a:r>
-            <a:endParaRPr lang="en-US" sz="1450" dirty="0"/>
+            <a:off x="868680" y="2103120"/>
+            <a:ext cx="5394960" cy="777240"/>
+          </a:xfrm>
+          <a:prstGeom prst="rect">
+            <a:avLst/>
+          </a:prstGeom>
+          <a:noFill/>
+          <a:ln/>
+        </p:spPr>
+        <p:txBody>
+          <a:bodyPr wrap="square" rtlCol="0" anchor="t"/>
+          <a:lstStyle/>
+          <a:p>
+            <a:pPr algn="l" indent="0" marL="0">
+              <a:buNone/>
+            </a:pPr>
+            <a:r>
+              <a:rPr lang="en-US" sz="1500" dirty="0">
+                <a:solidFill>
+                  <a:srgbClr val="1E293B"/>
+                </a:solidFill>
+              </a:rPr>
+              <a:t>A z-scored zonation coordinate, marker–marker correlations, and spread / slope-loss plots — pooled across all samples.</a:t>
+            </a:r>
+            <a:endParaRPr lang="en-US" sz="1500" dirty="0"/>
           </a:p>
         </p:txBody>
       </p:sp>
@@ -6954,105 +9683,84 @@
         </p:nvSpPr>
         <p:spPr>
           <a:xfrm>
-            <a:off x="3520440" y="2377440"/>
-            <a:ext cx="2377440" cy="1097280"/>
+            <a:off x="3566160" y="3063240"/>
+            <a:ext cx="0" cy="320040"/>
+          </a:xfrm>
+          <a:prstGeom prst="line">
+            <a:avLst/>
+          </a:prstGeom>
+          <a:noFill/>
+          <a:ln w="20320">
+            <a:solidFill>
+              <a:srgbClr val="6B6256"/>
+            </a:solidFill>
+            <a:prstDash val="solid"/>
+            <a:tailEnd type="triangle"/>
+          </a:ln>
+        </p:spPr>
+      </p:sp>
+      <p:sp>
+        <p:nvSpPr>
+          <p:cNvPr id="9" name="Shape 7"/>
+          <p:cNvSpPr/>
+          <p:nvPr/>
+        </p:nvSpPr>
+        <p:spPr>
+          <a:xfrm>
+            <a:off x="640080" y="3520440"/>
+            <a:ext cx="5852160" cy="1371600"/>
           </a:xfrm>
           <a:prstGeom prst="roundRect">
             <a:avLst>
-              <a:gd name="adj" fmla="val 6667"/>
+              <a:gd name="adj" fmla="val 4667"/>
             </a:avLst>
           </a:prstGeom>
           <a:solidFill>
-            <a:srgbClr val="7C3AED"/>
+            <a:srgbClr val="FBEEE9"/>
           </a:solidFill>
-          <a:ln/>
-          <a:effectLst>
-            <a:outerShdw sx="100000" sy="100000" kx="0" ky="0" algn="bl" rotWithShape="0" blurRad="88900" dist="38100" dir="5400000">
-              <a:srgbClr val="000000">
-                <a:alpha val="12000"/>
-              </a:srgbClr>
-            </a:outerShdw>
-          </a:effectLst>
-        </p:spPr>
-      </p:sp>
-      <p:sp>
-        <p:nvSpPr>
-          <p:cNvPr id="9" name="Text 7"/>
-          <p:cNvSpPr/>
-          <p:nvPr/>
-        </p:nvSpPr>
-        <p:spPr>
-          <a:xfrm>
-            <a:off x="3520440" y="2377440"/>
-            <a:ext cx="2377440" cy="1097280"/>
-          </a:xfrm>
-          <a:prstGeom prst="rect">
-            <a:avLst/>
-          </a:prstGeom>
-          <a:noFill/>
-          <a:ln/>
-        </p:spPr>
-        <p:txBody>
-          <a:bodyPr wrap="square" lIns="25400" tIns="25400" rIns="25400" bIns="25400" rtlCol="0" anchor="ctr"/>
-          <a:lstStyle/>
-          <a:p>
-            <a:pPr algn="ctr" indent="0" marL="0">
-              <a:buNone/>
-            </a:pPr>
-            <a:r>
-              <a:rPr lang="en-US" sz="1450" b="1" dirty="0">
-                <a:solidFill>
-                  <a:srgbClr val="FFFFFF"/>
-                </a:solidFill>
-              </a:rPr>
-              <a:t>Co-expression</a:t>
-            </a:r>
-            <a:endParaRPr lang="en-US" sz="1450" dirty="0"/>
-          </a:p>
-          <a:p>
-            <a:pPr algn="ctr" indent="0" marL="0">
-              <a:buNone/>
-            </a:pPr>
-            <a:r>
-              <a:rPr lang="en-US" sz="1450" b="1" dirty="0">
-                <a:solidFill>
-                  <a:srgbClr val="FFFFFF"/>
-                </a:solidFill>
-              </a:rPr>
-              <a:t>(both poles on)</a:t>
-            </a:r>
-            <a:endParaRPr lang="en-US" sz="1450" dirty="0"/>
-          </a:p>
-        </p:txBody>
-      </p:sp>
-      <p:sp>
-        <p:nvSpPr>
-          <p:cNvPr id="10" name="Shape 8"/>
-          <p:cNvSpPr/>
-          <p:nvPr/>
-        </p:nvSpPr>
-        <p:spPr>
-          <a:xfrm>
-            <a:off x="6126480" y="2377440"/>
-            <a:ext cx="2377440" cy="1097280"/>
-          </a:xfrm>
-          <a:prstGeom prst="roundRect">
-            <a:avLst>
-              <a:gd name="adj" fmla="val 6667"/>
-            </a:avLst>
-          </a:prstGeom>
-          <a:solidFill>
-            <a:srgbClr val="9CA3AF"/>
-          </a:solidFill>
-          <a:ln/>
-          <a:effectLst>
-            <a:outerShdw sx="100000" sy="100000" kx="0" ky="0" algn="bl" rotWithShape="0" blurRad="88900" dist="38100" dir="5400000">
-              <a:srgbClr val="000000">
-                <a:alpha val="12000"/>
-              </a:srgbClr>
-            </a:outerShdw>
-          </a:effectLst>
-        </p:spPr>
+          <a:ln w="12700">
+            <a:solidFill>
+              <a:srgbClr val="BE123C"/>
+            </a:solidFill>
+            <a:prstDash val="solid"/>
+          </a:ln>
+        </p:spPr>
+      </p:sp>
+      <p:sp>
+        <p:nvSpPr>
+          <p:cNvPr id="10" name="Text 8"/>
+          <p:cNvSpPr/>
+          <p:nvPr/>
+        </p:nvSpPr>
+        <p:spPr>
+          <a:xfrm>
+            <a:off x="868680" y="3639312"/>
+            <a:ext cx="5394960" cy="274320"/>
+          </a:xfrm>
+          <a:prstGeom prst="rect">
+            <a:avLst/>
+          </a:prstGeom>
+          <a:noFill/>
+          <a:ln/>
+        </p:spPr>
+        <p:txBody>
+          <a:bodyPr wrap="square" rtlCol="0" anchor="ctr"/>
+          <a:lstStyle/>
+          <a:p>
+            <a:pPr algn="l" indent="0" marL="0">
+              <a:buNone/>
+            </a:pPr>
+            <a:r>
+              <a:rPr lang="en-US" sz="1200" b="1" spc="200" kern="0" dirty="0">
+                <a:solidFill>
+                  <a:srgbClr val="BE123C"/>
+                </a:solidFill>
+              </a:rPr>
+              <a:t>THE CLAIM IT PRODUCED</a:t>
+            </a:r>
+            <a:endParaRPr lang="en-US" sz="1200" dirty="0"/>
+          </a:p>
+        </p:txBody>
       </p:sp>
       <p:sp>
         <p:nvSpPr>
@@ -7062,224 +9770,167 @@
         </p:nvSpPr>
         <p:spPr>
           <a:xfrm>
-            <a:off x="6126480" y="2377440"/>
-            <a:ext cx="2377440" cy="1097280"/>
-          </a:xfrm>
-          <a:prstGeom prst="rect">
-            <a:avLst/>
-          </a:prstGeom>
-          <a:noFill/>
-          <a:ln/>
-        </p:spPr>
-        <p:txBody>
-          <a:bodyPr wrap="square" lIns="25400" tIns="25400" rIns="25400" bIns="25400" rtlCol="0" anchor="ctr"/>
-          <a:lstStyle/>
-          <a:p>
-            <a:pPr algn="ctr" indent="0" marL="0">
-              <a:buNone/>
-            </a:pPr>
-            <a:r>
-              <a:rPr lang="en-US" sz="1450" b="1" dirty="0">
+            <a:off x="868680" y="3931920"/>
+            <a:ext cx="5394960" cy="868680"/>
+          </a:xfrm>
+          <a:prstGeom prst="rect">
+            <a:avLst/>
+          </a:prstGeom>
+          <a:noFill/>
+          <a:ln/>
+        </p:spPr>
+        <p:txBody>
+          <a:bodyPr wrap="square" rtlCol="0" anchor="t"/>
+          <a:lstStyle/>
+          <a:p>
+            <a:pPr algn="l" indent="0" marL="0">
+              <a:buNone/>
+            </a:pPr>
+            <a:r>
+              <a:rPr lang="en-US" sz="1600" b="1" i="1" dirty="0">
+                <a:solidFill>
+                  <a:srgbClr val="1F3A3D"/>
+                </a:solidFill>
+              </a:rPr>
+              <a:t>“Hepatocytes lose their zonation; the pericentral program turns off, strongest at end-stage.”</a:t>
+            </a:r>
+            <a:endParaRPr lang="en-US" sz="1600" dirty="0"/>
+          </a:p>
+        </p:txBody>
+      </p:sp>
+      <p:sp>
+        <p:nvSpPr>
+          <p:cNvPr id="12" name="Text 10"/>
+          <p:cNvSpPr/>
+          <p:nvPr/>
+        </p:nvSpPr>
+        <p:spPr>
+          <a:xfrm>
+            <a:off x="6949440" y="1783080"/>
+            <a:ext cx="4572000" cy="274320"/>
+          </a:xfrm>
+          <a:prstGeom prst="rect">
+            <a:avLst/>
+          </a:prstGeom>
+          <a:noFill/>
+          <a:ln/>
+        </p:spPr>
+        <p:txBody>
+          <a:bodyPr wrap="square" rtlCol="0" anchor="ctr"/>
+          <a:lstStyle/>
+          <a:p>
+            <a:pPr algn="l" indent="0" marL="0">
+              <a:buNone/>
+            </a:pPr>
+            <a:r>
+              <a:rPr lang="en-US" sz="1300" b="1" spc="200" kern="0" dirty="0">
+                <a:solidFill>
+                  <a:srgbClr val="C0562B"/>
+                </a:solidFill>
+              </a:rPr>
+              <a:t>THE TRAP</a:t>
+            </a:r>
+            <a:endParaRPr lang="en-US" sz="1300" dirty="0"/>
+          </a:p>
+        </p:txBody>
+      </p:sp>
+      <p:sp>
+        <p:nvSpPr>
+          <p:cNvPr id="13" name="Text 11"/>
+          <p:cNvSpPr/>
+          <p:nvPr/>
+        </p:nvSpPr>
+        <p:spPr>
+          <a:xfrm>
+            <a:off x="7178040" y="2240280"/>
+            <a:ext cx="4572000" cy="2743200"/>
+          </a:xfrm>
+          <a:prstGeom prst="rect">
+            <a:avLst/>
+          </a:prstGeom>
+          <a:noFill/>
+          <a:ln/>
+        </p:spPr>
+        <p:txBody>
+          <a:bodyPr wrap="square" rtlCol="0" anchor="ctr"/>
+          <a:lstStyle/>
+          <a:p>
+            <a:pPr algn="l" marL="342900" indent="-342900">
+              <a:spcAft>
+                <a:spcPts val="900"/>
+              </a:spcAft>
+              <a:buSzPct val="100000"/>
+              <a:buChar char="•"/>
+            </a:pPr>
+            <a:r>
+              <a:rPr lang="en-US" sz="1700" dirty="0">
                 <a:solidFill>
                   <a:srgbClr val="1E293B"/>
                 </a:solidFill>
               </a:rPr>
-              <a:t>Turn-off</a:t>
-            </a:r>
-            <a:endParaRPr lang="en-US" sz="1450" dirty="0"/>
-          </a:p>
-          <a:p>
-            <a:pPr algn="ctr" indent="0" marL="0">
-              <a:buNone/>
-            </a:pPr>
-            <a:r>
-              <a:rPr lang="en-US" sz="1450" b="1" dirty="0">
+              <a:t>Every metric is a relative summary — it hides who moved, how many, and from where.</a:t>
+            </a:r>
+            <a:endParaRPr lang="en-US" sz="1700" dirty="0"/>
+          </a:p>
+          <a:p>
+            <a:pPr algn="l" marL="342900" indent="-342900">
+              <a:spcAft>
+                <a:spcPts val="900"/>
+              </a:spcAft>
+              <a:buSzPct val="100000"/>
+              <a:buChar char="•"/>
+            </a:pPr>
+            <a:r>
+              <a:rPr lang="en-US" sz="1700" dirty="0">
                 <a:solidFill>
                   <a:srgbClr val="1E293B"/>
                 </a:solidFill>
               </a:rPr>
-              <a:t>(neither pole on)</a:t>
-            </a:r>
-            <a:endParaRPr lang="en-US" sz="1450" dirty="0"/>
-          </a:p>
-        </p:txBody>
-      </p:sp>
-      <p:sp>
-        <p:nvSpPr>
-          <p:cNvPr id="12" name="Shape 10"/>
-          <p:cNvSpPr/>
-          <p:nvPr/>
-        </p:nvSpPr>
-        <p:spPr>
-          <a:xfrm>
-            <a:off x="8732520" y="2377440"/>
-            <a:ext cx="2606040" cy="1097280"/>
-          </a:xfrm>
-          <a:prstGeom prst="roundRect">
-            <a:avLst>
-              <a:gd name="adj" fmla="val 6667"/>
-            </a:avLst>
-          </a:prstGeom>
-          <a:solidFill>
-            <a:srgbClr val="EA580C"/>
-          </a:solidFill>
-          <a:ln/>
-          <a:effectLst>
-            <a:outerShdw sx="100000" sy="100000" kx="0" ky="0" algn="bl" rotWithShape="0" blurRad="88900" dist="38100" dir="5400000">
-              <a:srgbClr val="000000">
-                <a:alpha val="12000"/>
-              </a:srgbClr>
-            </a:outerShdw>
-          </a:effectLst>
-        </p:spPr>
-      </p:sp>
-      <p:sp>
-        <p:nvSpPr>
-          <p:cNvPr id="13" name="Text 11"/>
-          <p:cNvSpPr/>
-          <p:nvPr/>
-        </p:nvSpPr>
-        <p:spPr>
-          <a:xfrm>
-            <a:off x="8732520" y="2377440"/>
-            <a:ext cx="2606040" cy="1097280"/>
-          </a:xfrm>
-          <a:prstGeom prst="rect">
-            <a:avLst/>
-          </a:prstGeom>
-          <a:noFill/>
-          <a:ln/>
-        </p:spPr>
-        <p:txBody>
-          <a:bodyPr wrap="square" lIns="25400" tIns="25400" rIns="25400" bIns="25400" rtlCol="0" anchor="ctr"/>
-          <a:lstStyle/>
-          <a:p>
-            <a:pPr algn="ctr" indent="0" marL="0">
-              <a:buNone/>
-            </a:pPr>
-            <a:r>
-              <a:rPr lang="en-US" sz="1450" b="1" dirty="0">
-                <a:solidFill>
-                  <a:srgbClr val="FFFFFF"/>
-                </a:solidFill>
-              </a:rPr>
-              <a:t>Composition shift</a:t>
-            </a:r>
-            <a:endParaRPr lang="en-US" sz="1450" dirty="0"/>
-          </a:p>
-          <a:p>
-            <a:pPr algn="ctr" indent="0" marL="0">
-              <a:buNone/>
-            </a:pPr>
-            <a:r>
-              <a:rPr lang="en-US" sz="1450" b="1" dirty="0">
-                <a:solidFill>
-                  <a:srgbClr val="FFFFFF"/>
-                </a:solidFill>
-              </a:rPr>
-              <a:t>(PP : PC ratio moves)</a:t>
-            </a:r>
-            <a:endParaRPr lang="en-US" sz="1450" dirty="0"/>
+              <a:t>They pool healthy + biopsy + end-stage across a hidden sampling discontinuity.</a:t>
+            </a:r>
+            <a:endParaRPr lang="en-US" sz="1700" dirty="0"/>
+          </a:p>
+          <a:p>
+            <a:pPr algn="l" marL="342900" indent="-342900">
+              <a:spcAft>
+                <a:spcPts val="900"/>
+              </a:spcAft>
+              <a:buSzPct val="100000"/>
+              <a:buChar char="•"/>
+            </a:pPr>
+            <a:r>
+              <a:rPr lang="en-US" sz="1700" dirty="0">
+                <a:solidFill>
+                  <a:srgbClr val="1E293B"/>
+                </a:solidFill>
+              </a:rPr>
+              <a:t>Depth, cell number and tissue source all bend a z-score or correlation.</a:t>
+            </a:r>
+            <a:endParaRPr lang="en-US" sz="1700" dirty="0"/>
+          </a:p>
+          <a:p>
+            <a:pPr algn="l" marL="342900" indent="-342900">
+              <a:spcAft>
+                <a:spcPts val="900"/>
+              </a:spcAft>
+              <a:buSzPct val="100000"/>
+              <a:buChar char="•"/>
+            </a:pPr>
+            <a:r>
+              <a:rPr lang="en-US" sz="1700" b="1" dirty="0">
+                <a:solidFill>
+                  <a:srgbClr val="0D9488"/>
+                </a:solidFill>
+              </a:rPr>
+              <a:t>→ so we switched to raw molecule counts (next slide: why the samples differ).</a:t>
+            </a:r>
+            <a:endParaRPr lang="en-US" sz="1700" dirty="0"/>
           </a:p>
         </p:txBody>
       </p:sp>
       <p:sp>
         <p:nvSpPr>
           <p:cNvPr id="14" name="Text 12"/>
-          <p:cNvSpPr/>
-          <p:nvPr/>
-        </p:nvSpPr>
-        <p:spPr>
-          <a:xfrm>
-            <a:off x="914400" y="3840480"/>
-            <a:ext cx="10058400" cy="548640"/>
-          </a:xfrm>
-          <a:prstGeom prst="rect">
-            <a:avLst/>
-          </a:prstGeom>
-          <a:noFill/>
-          <a:ln/>
-        </p:spPr>
-        <p:txBody>
-          <a:bodyPr wrap="square" rtlCol="0" anchor="ctr"/>
-          <a:lstStyle/>
-          <a:p>
-            <a:pPr algn="l" indent="0" marL="0">
-              <a:buNone/>
-            </a:pPr>
-            <a:r>
-              <a:rPr lang="en-US" sz="1500" dirty="0">
-                <a:solidFill>
-                  <a:srgbClr val="334155"/>
-                </a:solidFill>
-              </a:rPr>
-              <a:t>We suspected pericentral depletion specifically — but </a:t>
-            </a:r>
-            <a:pPr algn="l" indent="0" marL="0">
-              <a:buNone/>
-            </a:pPr>
-            <a:r>
-              <a:rPr lang="en-US" sz="1500" b="1" dirty="0">
-                <a:solidFill>
-                  <a:srgbClr val="334155"/>
-                </a:solidFill>
-              </a:rPr>
-              <a:t>“depletion” is general</a:t>
-            </a:r>
-            <a:pPr algn="l" indent="0" marL="0">
-              <a:buNone/>
-            </a:pPr>
-            <a:r>
-              <a:rPr lang="en-US" sz="1500" dirty="0">
-                <a:solidFill>
-                  <a:srgbClr val="334155"/>
-                </a:solidFill>
-              </a:rPr>
-              <a:t> (either pole, or both). We test each mechanism, not just the one we expected.</a:t>
-            </a:r>
-            <a:endParaRPr lang="en-US" sz="1500" dirty="0"/>
-          </a:p>
-        </p:txBody>
-      </p:sp>
-      <p:sp>
-        <p:nvSpPr>
-          <p:cNvPr id="15" name="Text 13"/>
-          <p:cNvSpPr/>
-          <p:nvPr/>
-        </p:nvSpPr>
-        <p:spPr>
-          <a:xfrm>
-            <a:off x="914400" y="4663440"/>
-            <a:ext cx="10058400" cy="548640"/>
-          </a:xfrm>
-          <a:prstGeom prst="rect">
-            <a:avLst/>
-          </a:prstGeom>
-          <a:noFill/>
-          <a:ln/>
-        </p:spPr>
-        <p:txBody>
-          <a:bodyPr wrap="square" rtlCol="0" anchor="ctr"/>
-          <a:lstStyle/>
-          <a:p>
-            <a:pPr algn="l" indent="0" marL="0">
-              <a:buNone/>
-            </a:pPr>
-            <a:r>
-              <a:rPr lang="en-US" sz="1500" i="1" dirty="0">
-                <a:solidFill>
-                  <a:srgbClr val="6B6256"/>
-                </a:solidFill>
-              </a:rPr>
-              <a:t>A single anti-correlation or UMAP impression conflates these — which is exactly the trap we avoid with absolute counts.</a:t>
-            </a:r>
-            <a:endParaRPr lang="en-US" sz="1500" dirty="0"/>
-          </a:p>
-        </p:txBody>
-      </p:sp>
-      <p:sp>
-        <p:nvSpPr>
-          <p:cNvPr id="16" name="Text 14"/>
           <p:cNvSpPr/>
           <p:nvPr/>
         </p:nvSpPr>
@@ -7315,7 +9966,7 @@
       </p:sp>
       <p:sp>
         <p:nvSpPr>
-          <p:cNvPr id="17" name="Text 15"/>
+          <p:cNvPr id="15" name="Text 13"/>
           <p:cNvSpPr/>
           <p:nvPr/>
         </p:nvSpPr>
@@ -7431,7 +10082,7 @@
                   <a:srgbClr val="C0562B"/>
                 </a:solidFill>
               </a:rPr>
-              <a:t>THE CONFOUND</a:t>
+              <a:t>WHAT WE TEST</a:t>
             </a:r>
             <a:endParaRPr lang="en-US" sz="1300" dirty="0"/>
           </a:p>
@@ -7470,7 +10121,7 @@
                 <a:ea typeface="Georgia" pitchFamily="34" charset="-122"/>
                 <a:cs typeface="Georgia" pitchFamily="34" charset="-120"/>
               </a:rPr>
-              <a:t>Stage is entangled with acquisition</a:t>
+              <a:t>Zonation loss is not one mechanism</a:t>
             </a:r>
             <a:endParaRPr lang="en-US" sz="2800" dirty="0"/>
           </a:p>
@@ -7478,22 +10129,58 @@
       </p:sp>
       <p:sp>
         <p:nvSpPr>
-          <p:cNvPr id="5" name="Shape 3"/>
-          <p:cNvSpPr/>
-          <p:nvPr/>
-        </p:nvSpPr>
-        <p:spPr>
-          <a:xfrm>
-            <a:off x="914400" y="1783080"/>
-            <a:ext cx="1280160" cy="640080"/>
+          <p:cNvPr id="5" name="Text 3"/>
+          <p:cNvSpPr/>
+          <p:nvPr/>
+        </p:nvSpPr>
+        <p:spPr>
+          <a:xfrm>
+            <a:off x="640080" y="1463040"/>
+            <a:ext cx="10972800" cy="640080"/>
+          </a:xfrm>
+          <a:prstGeom prst="rect">
+            <a:avLst/>
+          </a:prstGeom>
+          <a:noFill/>
+          <a:ln/>
+        </p:spPr>
+        <p:txBody>
+          <a:bodyPr wrap="square" rtlCol="0" anchor="ctr"/>
+          <a:lstStyle/>
+          <a:p>
+            <a:pPr algn="l" indent="0" marL="0">
+              <a:buNone/>
+            </a:pPr>
+            <a:r>
+              <a:rPr lang="en-US" sz="1700" dirty="0">
+                <a:solidFill>
+                  <a:srgbClr val="1E293B"/>
+                </a:solidFill>
+              </a:rPr>
+              <a:t>If the zonation expression signal breaks down, it can do so in distinct ways — each has its own count signature, which we test separately:</a:t>
+            </a:r>
+            <a:endParaRPr lang="en-US" sz="1700" dirty="0"/>
+          </a:p>
+        </p:txBody>
+      </p:sp>
+      <p:sp>
+        <p:nvSpPr>
+          <p:cNvPr id="6" name="Shape 4"/>
+          <p:cNvSpPr/>
+          <p:nvPr/>
+        </p:nvSpPr>
+        <p:spPr>
+          <a:xfrm>
+            <a:off x="914400" y="2377440"/>
+            <a:ext cx="2377440" cy="1097280"/>
           </a:xfrm>
           <a:prstGeom prst="roundRect">
             <a:avLst>
-              <a:gd name="adj" fmla="val 8571"/>
+              <a:gd name="adj" fmla="val 6667"/>
             </a:avLst>
           </a:prstGeom>
           <a:solidFill>
-            <a:srgbClr val="BE123C"/>
+            <a:srgbClr val="1D4ED8"/>
           </a:solidFill>
           <a:ln/>
           <a:effectLst>
@@ -7507,58 +10194,72 @@
       </p:sp>
       <p:sp>
         <p:nvSpPr>
-          <p:cNvPr id="6" name="Text 4"/>
-          <p:cNvSpPr/>
-          <p:nvPr/>
-        </p:nvSpPr>
-        <p:spPr>
-          <a:xfrm>
-            <a:off x="914400" y="1783080"/>
-            <a:ext cx="1280160" cy="640080"/>
-          </a:xfrm>
-          <a:prstGeom prst="rect">
-            <a:avLst/>
-          </a:prstGeom>
-          <a:noFill/>
-          <a:ln/>
-        </p:spPr>
-        <p:txBody>
-          <a:bodyPr wrap="square" rtlCol="0" anchor="ctr"/>
+          <p:cNvPr id="7" name="Text 5"/>
+          <p:cNvSpPr/>
+          <p:nvPr/>
+        </p:nvSpPr>
+        <p:spPr>
+          <a:xfrm>
+            <a:off x="914400" y="2377440"/>
+            <a:ext cx="2377440" cy="1097280"/>
+          </a:xfrm>
+          <a:prstGeom prst="rect">
+            <a:avLst/>
+          </a:prstGeom>
+          <a:noFill/>
+          <a:ln/>
+        </p:spPr>
+        <p:txBody>
+          <a:bodyPr wrap="square" lIns="25400" tIns="25400" rIns="25400" bIns="25400" rtlCol="0" anchor="ctr"/>
           <a:lstStyle/>
           <a:p>
             <a:pPr algn="ctr" indent="0" marL="0">
               <a:buNone/>
             </a:pPr>
             <a:r>
-              <a:rPr lang="en-US" sz="1500" b="1" dirty="0">
+              <a:rPr lang="en-US" sz="1450" b="1" dirty="0">
                 <a:solidFill>
                   <a:srgbClr val="FFFFFF"/>
                 </a:solidFill>
               </a:rPr>
-              <a:t>Healthy</a:t>
-            </a:r>
-            <a:endParaRPr lang="en-US" sz="1500" dirty="0"/>
-          </a:p>
-        </p:txBody>
-      </p:sp>
-      <p:sp>
-        <p:nvSpPr>
-          <p:cNvPr id="7" name="Shape 5"/>
-          <p:cNvSpPr/>
-          <p:nvPr/>
-        </p:nvSpPr>
-        <p:spPr>
-          <a:xfrm>
-            <a:off x="2331720" y="1783080"/>
-            <a:ext cx="1097280" cy="640080"/>
+              <a:t>Depletion</a:t>
+            </a:r>
+            <a:endParaRPr lang="en-US" sz="1450" dirty="0"/>
+          </a:p>
+          <a:p>
+            <a:pPr algn="ctr" indent="0" marL="0">
+              <a:buNone/>
+            </a:pPr>
+            <a:r>
+              <a:rPr lang="en-US" sz="1450" b="1" dirty="0">
+                <a:solidFill>
+                  <a:srgbClr val="FFFFFF"/>
+                </a:solidFill>
+              </a:rPr>
+              <a:t>(a pole's cells lost)</a:t>
+            </a:r>
+            <a:endParaRPr lang="en-US" sz="1450" dirty="0"/>
+          </a:p>
+        </p:txBody>
+      </p:sp>
+      <p:sp>
+        <p:nvSpPr>
+          <p:cNvPr id="8" name="Shape 6"/>
+          <p:cNvSpPr/>
+          <p:nvPr/>
+        </p:nvSpPr>
+        <p:spPr>
+          <a:xfrm>
+            <a:off x="3520440" y="2377440"/>
+            <a:ext cx="2377440" cy="1097280"/>
           </a:xfrm>
           <a:prstGeom prst="roundRect">
             <a:avLst>
-              <a:gd name="adj" fmla="val 8571"/>
+              <a:gd name="adj" fmla="val 6667"/>
             </a:avLst>
           </a:prstGeom>
           <a:solidFill>
-            <a:srgbClr val="0D9488"/>
+            <a:srgbClr val="7C3AED"/>
           </a:solidFill>
           <a:ln/>
           <a:effectLst>
@@ -7572,58 +10273,72 @@
       </p:sp>
       <p:sp>
         <p:nvSpPr>
-          <p:cNvPr id="8" name="Text 6"/>
-          <p:cNvSpPr/>
-          <p:nvPr/>
-        </p:nvSpPr>
-        <p:spPr>
-          <a:xfrm>
-            <a:off x="2331720" y="1783080"/>
-            <a:ext cx="1097280" cy="640080"/>
-          </a:xfrm>
-          <a:prstGeom prst="rect">
-            <a:avLst/>
-          </a:prstGeom>
-          <a:noFill/>
-          <a:ln/>
-        </p:spPr>
-        <p:txBody>
-          <a:bodyPr wrap="square" rtlCol="0" anchor="ctr"/>
+          <p:cNvPr id="9" name="Text 7"/>
+          <p:cNvSpPr/>
+          <p:nvPr/>
+        </p:nvSpPr>
+        <p:spPr>
+          <a:xfrm>
+            <a:off x="3520440" y="2377440"/>
+            <a:ext cx="2377440" cy="1097280"/>
+          </a:xfrm>
+          <a:prstGeom prst="rect">
+            <a:avLst/>
+          </a:prstGeom>
+          <a:noFill/>
+          <a:ln/>
+        </p:spPr>
+        <p:txBody>
+          <a:bodyPr wrap="square" lIns="25400" tIns="25400" rIns="25400" bIns="25400" rtlCol="0" anchor="ctr"/>
           <a:lstStyle/>
           <a:p>
             <a:pPr algn="ctr" indent="0" marL="0">
               <a:buNone/>
             </a:pPr>
             <a:r>
-              <a:rPr lang="en-US" sz="1500" b="1" dirty="0">
+              <a:rPr lang="en-US" sz="1450" b="1" dirty="0">
                 <a:solidFill>
                   <a:srgbClr val="FFFFFF"/>
                 </a:solidFill>
               </a:rPr>
-              <a:t>F0</a:t>
-            </a:r>
-            <a:endParaRPr lang="en-US" sz="1500" dirty="0"/>
-          </a:p>
-        </p:txBody>
-      </p:sp>
-      <p:sp>
-        <p:nvSpPr>
-          <p:cNvPr id="9" name="Shape 7"/>
-          <p:cNvSpPr/>
-          <p:nvPr/>
-        </p:nvSpPr>
-        <p:spPr>
-          <a:xfrm>
-            <a:off x="3520440" y="1783080"/>
-            <a:ext cx="1097280" cy="640080"/>
+              <a:t>Co-expression</a:t>
+            </a:r>
+            <a:endParaRPr lang="en-US" sz="1450" dirty="0"/>
+          </a:p>
+          <a:p>
+            <a:pPr algn="ctr" indent="0" marL="0">
+              <a:buNone/>
+            </a:pPr>
+            <a:r>
+              <a:rPr lang="en-US" sz="1450" b="1" dirty="0">
+                <a:solidFill>
+                  <a:srgbClr val="FFFFFF"/>
+                </a:solidFill>
+              </a:rPr>
+              <a:t>(both poles on)</a:t>
+            </a:r>
+            <a:endParaRPr lang="en-US" sz="1450" dirty="0"/>
+          </a:p>
+        </p:txBody>
+      </p:sp>
+      <p:sp>
+        <p:nvSpPr>
+          <p:cNvPr id="10" name="Shape 8"/>
+          <p:cNvSpPr/>
+          <p:nvPr/>
+        </p:nvSpPr>
+        <p:spPr>
+          <a:xfrm>
+            <a:off x="6126480" y="2377440"/>
+            <a:ext cx="2377440" cy="1097280"/>
           </a:xfrm>
           <a:prstGeom prst="roundRect">
             <a:avLst>
-              <a:gd name="adj" fmla="val 8571"/>
+              <a:gd name="adj" fmla="val 6667"/>
             </a:avLst>
           </a:prstGeom>
           <a:solidFill>
-            <a:srgbClr val="0D9488"/>
+            <a:srgbClr val="9CA3AF"/>
           </a:solidFill>
           <a:ln/>
           <a:effectLst>
@@ -7637,58 +10352,72 @@
       </p:sp>
       <p:sp>
         <p:nvSpPr>
-          <p:cNvPr id="10" name="Text 8"/>
-          <p:cNvSpPr/>
-          <p:nvPr/>
-        </p:nvSpPr>
-        <p:spPr>
-          <a:xfrm>
-            <a:off x="3520440" y="1783080"/>
-            <a:ext cx="1097280" cy="640080"/>
-          </a:xfrm>
-          <a:prstGeom prst="rect">
-            <a:avLst/>
-          </a:prstGeom>
-          <a:noFill/>
-          <a:ln/>
-        </p:spPr>
-        <p:txBody>
-          <a:bodyPr wrap="square" rtlCol="0" anchor="ctr"/>
+          <p:cNvPr id="11" name="Text 9"/>
+          <p:cNvSpPr/>
+          <p:nvPr/>
+        </p:nvSpPr>
+        <p:spPr>
+          <a:xfrm>
+            <a:off x="6126480" y="2377440"/>
+            <a:ext cx="2377440" cy="1097280"/>
+          </a:xfrm>
+          <a:prstGeom prst="rect">
+            <a:avLst/>
+          </a:prstGeom>
+          <a:noFill/>
+          <a:ln/>
+        </p:spPr>
+        <p:txBody>
+          <a:bodyPr wrap="square" lIns="25400" tIns="25400" rIns="25400" bIns="25400" rtlCol="0" anchor="ctr"/>
           <a:lstStyle/>
           <a:p>
             <a:pPr algn="ctr" indent="0" marL="0">
               <a:buNone/>
             </a:pPr>
             <a:r>
-              <a:rPr lang="en-US" sz="1500" b="1" dirty="0">
-                <a:solidFill>
-                  <a:srgbClr val="FFFFFF"/>
-                </a:solidFill>
-              </a:rPr>
-              <a:t>F1</a:t>
-            </a:r>
-            <a:endParaRPr lang="en-US" sz="1500" dirty="0"/>
-          </a:p>
-        </p:txBody>
-      </p:sp>
-      <p:sp>
-        <p:nvSpPr>
-          <p:cNvPr id="11" name="Shape 9"/>
-          <p:cNvSpPr/>
-          <p:nvPr/>
-        </p:nvSpPr>
-        <p:spPr>
-          <a:xfrm>
-            <a:off x="4709160" y="1783080"/>
-            <a:ext cx="1097280" cy="640080"/>
+              <a:rPr lang="en-US" sz="1450" b="1" dirty="0">
+                <a:solidFill>
+                  <a:srgbClr val="1E293B"/>
+                </a:solidFill>
+              </a:rPr>
+              <a:t>Turn-off</a:t>
+            </a:r>
+            <a:endParaRPr lang="en-US" sz="1450" dirty="0"/>
+          </a:p>
+          <a:p>
+            <a:pPr algn="ctr" indent="0" marL="0">
+              <a:buNone/>
+            </a:pPr>
+            <a:r>
+              <a:rPr lang="en-US" sz="1450" b="1" dirty="0">
+                <a:solidFill>
+                  <a:srgbClr val="1E293B"/>
+                </a:solidFill>
+              </a:rPr>
+              <a:t>(neither pole on)</a:t>
+            </a:r>
+            <a:endParaRPr lang="en-US" sz="1450" dirty="0"/>
+          </a:p>
+        </p:txBody>
+      </p:sp>
+      <p:sp>
+        <p:nvSpPr>
+          <p:cNvPr id="12" name="Shape 10"/>
+          <p:cNvSpPr/>
+          <p:nvPr/>
+        </p:nvSpPr>
+        <p:spPr>
+          <a:xfrm>
+            <a:off x="8732520" y="2377440"/>
+            <a:ext cx="2606040" cy="1097280"/>
           </a:xfrm>
           <a:prstGeom prst="roundRect">
             <a:avLst>
-              <a:gd name="adj" fmla="val 8571"/>
+              <a:gd name="adj" fmla="val 6667"/>
             </a:avLst>
           </a:prstGeom>
           <a:solidFill>
-            <a:srgbClr val="0D9488"/>
+            <a:srgbClr val="EA580C"/>
           </a:solidFill>
           <a:ln/>
           <a:effectLst>
@@ -7702,14 +10431,64 @@
       </p:sp>
       <p:sp>
         <p:nvSpPr>
-          <p:cNvPr id="12" name="Text 10"/>
-          <p:cNvSpPr/>
-          <p:nvPr/>
-        </p:nvSpPr>
-        <p:spPr>
-          <a:xfrm>
-            <a:off x="4709160" y="1783080"/>
-            <a:ext cx="1097280" cy="640080"/>
+          <p:cNvPr id="13" name="Text 11"/>
+          <p:cNvSpPr/>
+          <p:nvPr/>
+        </p:nvSpPr>
+        <p:spPr>
+          <a:xfrm>
+            <a:off x="8732520" y="2377440"/>
+            <a:ext cx="2606040" cy="1097280"/>
+          </a:xfrm>
+          <a:prstGeom prst="rect">
+            <a:avLst/>
+          </a:prstGeom>
+          <a:noFill/>
+          <a:ln/>
+        </p:spPr>
+        <p:txBody>
+          <a:bodyPr wrap="square" lIns="25400" tIns="25400" rIns="25400" bIns="25400" rtlCol="0" anchor="ctr"/>
+          <a:lstStyle/>
+          <a:p>
+            <a:pPr algn="ctr" indent="0" marL="0">
+              <a:buNone/>
+            </a:pPr>
+            <a:r>
+              <a:rPr lang="en-US" sz="1450" b="1" dirty="0">
+                <a:solidFill>
+                  <a:srgbClr val="FFFFFF"/>
+                </a:solidFill>
+              </a:rPr>
+              <a:t>Composition shift</a:t>
+            </a:r>
+            <a:endParaRPr lang="en-US" sz="1450" dirty="0"/>
+          </a:p>
+          <a:p>
+            <a:pPr algn="ctr" indent="0" marL="0">
+              <a:buNone/>
+            </a:pPr>
+            <a:r>
+              <a:rPr lang="en-US" sz="1450" b="1" dirty="0">
+                <a:solidFill>
+                  <a:srgbClr val="FFFFFF"/>
+                </a:solidFill>
+              </a:rPr>
+              <a:t>(PP : PC ratio moves)</a:t>
+            </a:r>
+            <a:endParaRPr lang="en-US" sz="1450" dirty="0"/>
+          </a:p>
+        </p:txBody>
+      </p:sp>
+      <p:sp>
+        <p:nvSpPr>
+          <p:cNvPr id="14" name="Text 12"/>
+          <p:cNvSpPr/>
+          <p:nvPr/>
+        </p:nvSpPr>
+        <p:spPr>
+          <a:xfrm>
+            <a:off x="914400" y="3840480"/>
+            <a:ext cx="10058400" cy="548640"/>
           </a:xfrm>
           <a:prstGeom prst="rect">
             <a:avLst/>
@@ -7721,16 +10500,38 @@
           <a:bodyPr wrap="square" rtlCol="0" anchor="ctr"/>
           <a:lstStyle/>
           <a:p>
-            <a:pPr algn="ctr" indent="0" marL="0">
+            <a:pPr algn="l" indent="0" marL="0">
+              <a:buNone/>
+            </a:pPr>
+            <a:r>
+              <a:rPr lang="en-US" sz="1500" dirty="0">
+                <a:solidFill>
+                  <a:srgbClr val="334155"/>
+                </a:solidFill>
+              </a:rPr>
+              <a:t>We suspected pericentral depletion specifically — but </a:t>
+            </a:r>
+            <a:pPr algn="l" indent="0" marL="0">
               <a:buNone/>
             </a:pPr>
             <a:r>
               <a:rPr lang="en-US" sz="1500" b="1" dirty="0">
                 <a:solidFill>
-                  <a:srgbClr val="FFFFFF"/>
-                </a:solidFill>
-              </a:rPr>
-              <a:t>F2</a:t>
+                  <a:srgbClr val="334155"/>
+                </a:solidFill>
+              </a:rPr>
+              <a:t>“depletion” is general</a:t>
+            </a:r>
+            <a:pPr algn="l" indent="0" marL="0">
+              <a:buNone/>
+            </a:pPr>
+            <a:r>
+              <a:rPr lang="en-US" sz="1500" dirty="0">
+                <a:solidFill>
+                  <a:srgbClr val="334155"/>
+                </a:solidFill>
+              </a:rPr>
+              <a:t> (either pole, or both). We test each mechanism, not just the one we expected.</a:t>
             </a:r>
             <a:endParaRPr lang="en-US" sz="1500" dirty="0"/>
           </a:p>
@@ -7738,43 +10539,14 @@
       </p:sp>
       <p:sp>
         <p:nvSpPr>
-          <p:cNvPr id="13" name="Shape 11"/>
-          <p:cNvSpPr/>
-          <p:nvPr/>
-        </p:nvSpPr>
-        <p:spPr>
-          <a:xfrm>
-            <a:off x="5897880" y="1783080"/>
-            <a:ext cx="1097280" cy="640080"/>
-          </a:xfrm>
-          <a:prstGeom prst="roundRect">
-            <a:avLst>
-              <a:gd name="adj" fmla="val 8571"/>
-            </a:avLst>
-          </a:prstGeom>
-          <a:solidFill>
-            <a:srgbClr val="0D9488"/>
-          </a:solidFill>
-          <a:ln/>
-          <a:effectLst>
-            <a:outerShdw sx="100000" sy="100000" kx="0" ky="0" algn="bl" rotWithShape="0" blurRad="88900" dist="38100" dir="5400000">
-              <a:srgbClr val="000000">
-                <a:alpha val="12000"/>
-              </a:srgbClr>
-            </a:outerShdw>
-          </a:effectLst>
-        </p:spPr>
-      </p:sp>
-      <p:sp>
-        <p:nvSpPr>
-          <p:cNvPr id="14" name="Text 12"/>
-          <p:cNvSpPr/>
-          <p:nvPr/>
-        </p:nvSpPr>
-        <p:spPr>
-          <a:xfrm>
-            <a:off x="5897880" y="1783080"/>
-            <a:ext cx="1097280" cy="640080"/>
+          <p:cNvPr id="15" name="Text 13"/>
+          <p:cNvSpPr/>
+          <p:nvPr/>
+        </p:nvSpPr>
+        <p:spPr>
+          <a:xfrm>
+            <a:off x="914400" y="4663440"/>
+            <a:ext cx="10058400" cy="548640"/>
           </a:xfrm>
           <a:prstGeom prst="rect">
             <a:avLst/>
@@ -7786,16 +10558,16 @@
           <a:bodyPr wrap="square" rtlCol="0" anchor="ctr"/>
           <a:lstStyle/>
           <a:p>
-            <a:pPr algn="ctr" indent="0" marL="0">
-              <a:buNone/>
-            </a:pPr>
-            <a:r>
-              <a:rPr lang="en-US" sz="1500" b="1" dirty="0">
-                <a:solidFill>
-                  <a:srgbClr val="FFFFFF"/>
-                </a:solidFill>
-              </a:rPr>
-              <a:t>F3</a:t>
+            <a:pPr algn="l" indent="0" marL="0">
+              <a:buNone/>
+            </a:pPr>
+            <a:r>
+              <a:rPr lang="en-US" sz="1500" i="1" dirty="0">
+                <a:solidFill>
+                  <a:srgbClr val="6B6256"/>
+                </a:solidFill>
+              </a:rPr>
+              <a:t>A single anti-correlation or UMAP impression conflates these — which is exactly the trap we avoid with absolute counts.</a:t>
             </a:r>
             <a:endParaRPr lang="en-US" sz="1500" dirty="0"/>
           </a:p>
@@ -7803,507 +10575,7 @@
       </p:sp>
       <p:sp>
         <p:nvSpPr>
-          <p:cNvPr id="15" name="Shape 13"/>
-          <p:cNvSpPr/>
-          <p:nvPr/>
-        </p:nvSpPr>
-        <p:spPr>
-          <a:xfrm>
-            <a:off x="7086600" y="1783080"/>
-            <a:ext cx="1097280" cy="640080"/>
-          </a:xfrm>
-          <a:prstGeom prst="roundRect">
-            <a:avLst>
-              <a:gd name="adj" fmla="val 8571"/>
-            </a:avLst>
-          </a:prstGeom>
-          <a:solidFill>
-            <a:srgbClr val="0D9488"/>
-          </a:solidFill>
-          <a:ln/>
-          <a:effectLst>
-            <a:outerShdw sx="100000" sy="100000" kx="0" ky="0" algn="bl" rotWithShape="0" blurRad="88900" dist="38100" dir="5400000">
-              <a:srgbClr val="000000">
-                <a:alpha val="12000"/>
-              </a:srgbClr>
-            </a:outerShdw>
-          </a:effectLst>
-        </p:spPr>
-      </p:sp>
-      <p:sp>
-        <p:nvSpPr>
           <p:cNvPr id="16" name="Text 14"/>
-          <p:cNvSpPr/>
-          <p:nvPr/>
-        </p:nvSpPr>
-        <p:spPr>
-          <a:xfrm>
-            <a:off x="7086600" y="1783080"/>
-            <a:ext cx="1097280" cy="640080"/>
-          </a:xfrm>
-          <a:prstGeom prst="rect">
-            <a:avLst/>
-          </a:prstGeom>
-          <a:noFill/>
-          <a:ln/>
-        </p:spPr>
-        <p:txBody>
-          <a:bodyPr wrap="square" rtlCol="0" anchor="ctr"/>
-          <a:lstStyle/>
-          <a:p>
-            <a:pPr algn="ctr" indent="0" marL="0">
-              <a:buNone/>
-            </a:pPr>
-            <a:r>
-              <a:rPr lang="en-US" sz="1500" b="1" dirty="0">
-                <a:solidFill>
-                  <a:srgbClr val="FFFFFF"/>
-                </a:solidFill>
-              </a:rPr>
-              <a:t>F4</a:t>
-            </a:r>
-            <a:endParaRPr lang="en-US" sz="1500" dirty="0"/>
-          </a:p>
-        </p:txBody>
-      </p:sp>
-      <p:sp>
-        <p:nvSpPr>
-          <p:cNvPr id="17" name="Shape 15"/>
-          <p:cNvSpPr/>
-          <p:nvPr/>
-        </p:nvSpPr>
-        <p:spPr>
-          <a:xfrm>
-            <a:off x="8686800" y="1783080"/>
-            <a:ext cx="2011680" cy="640080"/>
-          </a:xfrm>
-          <a:prstGeom prst="roundRect">
-            <a:avLst>
-              <a:gd name="adj" fmla="val 8571"/>
-            </a:avLst>
-          </a:prstGeom>
-          <a:solidFill>
-            <a:srgbClr val="86198F"/>
-          </a:solidFill>
-          <a:ln/>
-          <a:effectLst>
-            <a:outerShdw sx="100000" sy="100000" kx="0" ky="0" algn="bl" rotWithShape="0" blurRad="88900" dist="38100" dir="5400000">
-              <a:srgbClr val="000000">
-                <a:alpha val="12000"/>
-              </a:srgbClr>
-            </a:outerShdw>
-          </a:effectLst>
-        </p:spPr>
-      </p:sp>
-      <p:sp>
-        <p:nvSpPr>
-          <p:cNvPr id="18" name="Text 16"/>
-          <p:cNvSpPr/>
-          <p:nvPr/>
-        </p:nvSpPr>
-        <p:spPr>
-          <a:xfrm>
-            <a:off x="8686800" y="1783080"/>
-            <a:ext cx="2011680" cy="640080"/>
-          </a:xfrm>
-          <a:prstGeom prst="rect">
-            <a:avLst/>
-          </a:prstGeom>
-          <a:noFill/>
-          <a:ln/>
-        </p:spPr>
-        <p:txBody>
-          <a:bodyPr wrap="square" rtlCol="0" anchor="ctr"/>
-          <a:lstStyle/>
-          <a:p>
-            <a:pPr algn="ctr" indent="0" marL="0">
-              <a:buNone/>
-            </a:pPr>
-            <a:r>
-              <a:rPr lang="en-US" sz="1500" b="1" dirty="0">
-                <a:solidFill>
-                  <a:srgbClr val="FFFFFF"/>
-                </a:solidFill>
-              </a:rPr>
-              <a:t>End-stage</a:t>
-            </a:r>
-            <a:endParaRPr lang="en-US" sz="1500" dirty="0"/>
-          </a:p>
-        </p:txBody>
-      </p:sp>
-      <p:sp>
-        <p:nvSpPr>
-          <p:cNvPr id="19" name="Shape 17"/>
-          <p:cNvSpPr/>
-          <p:nvPr/>
-        </p:nvSpPr>
-        <p:spPr>
-          <a:xfrm>
-            <a:off x="914400" y="1581912"/>
-            <a:ext cx="9784080" cy="0"/>
-          </a:xfrm>
-          <a:prstGeom prst="line">
-            <a:avLst/>
-          </a:prstGeom>
-          <a:noFill/>
-          <a:ln w="19050">
-            <a:solidFill>
-              <a:srgbClr val="6B6256"/>
-            </a:solidFill>
-            <a:prstDash val="solid"/>
-            <a:tailEnd type="triangle"/>
-          </a:ln>
-        </p:spPr>
-      </p:sp>
-      <p:sp>
-        <p:nvSpPr>
-          <p:cNvPr id="20" name="Text 18"/>
-          <p:cNvSpPr/>
-          <p:nvPr/>
-        </p:nvSpPr>
-        <p:spPr>
-          <a:xfrm>
-            <a:off x="640080" y="2606040"/>
-            <a:ext cx="1828800" cy="640080"/>
-          </a:xfrm>
-          <a:prstGeom prst="rect">
-            <a:avLst/>
-          </a:prstGeom>
-          <a:noFill/>
-          <a:ln/>
-        </p:spPr>
-        <p:txBody>
-          <a:bodyPr wrap="square" rtlCol="0" anchor="ctr"/>
-          <a:lstStyle/>
-          <a:p>
-            <a:pPr algn="ctr" indent="0" marL="0">
-              <a:buNone/>
-            </a:pPr>
-            <a:r>
-              <a:rPr lang="en-US" sz="1300" dirty="0">
-                <a:solidFill>
-                  <a:srgbClr val="BE123C"/>
-                </a:solidFill>
-              </a:rPr>
-              <a:t>deceased-donor</a:t>
-            </a:r>
-            <a:endParaRPr lang="en-US" sz="1300" dirty="0"/>
-          </a:p>
-          <a:p>
-            <a:pPr algn="ctr" indent="0" marL="0">
-              <a:buNone/>
-            </a:pPr>
-            <a:r>
-              <a:rPr lang="en-US" sz="1300" dirty="0">
-                <a:solidFill>
-                  <a:srgbClr val="BE123C"/>
-                </a:solidFill>
-              </a:rPr>
-              <a:t>organ cubes</a:t>
-            </a:r>
-            <a:endParaRPr lang="en-US" sz="1300" dirty="0"/>
-          </a:p>
-        </p:txBody>
-      </p:sp>
-      <p:sp>
-        <p:nvSpPr>
-          <p:cNvPr id="21" name="Text 19"/>
-          <p:cNvSpPr/>
-          <p:nvPr/>
-        </p:nvSpPr>
-        <p:spPr>
-          <a:xfrm>
-            <a:off x="2331720" y="2606040"/>
-            <a:ext cx="6035040" cy="365760"/>
-          </a:xfrm>
-          <a:prstGeom prst="rect">
-            <a:avLst/>
-          </a:prstGeom>
-          <a:noFill/>
-          <a:ln/>
-        </p:spPr>
-        <p:txBody>
-          <a:bodyPr wrap="square" rtlCol="0" anchor="ctr"/>
-          <a:lstStyle/>
-          <a:p>
-            <a:pPr algn="ctr" indent="0" marL="0">
-              <a:buNone/>
-            </a:pPr>
-            <a:r>
-              <a:rPr lang="en-US" sz="1400" b="1" dirty="0">
-                <a:solidFill>
-                  <a:srgbClr val="0D9488"/>
-                </a:solidFill>
-              </a:rPr>
-              <a:t>16-gauge needle biopsies, right lobe</a:t>
-            </a:r>
-            <a:endParaRPr lang="en-US" sz="1400" dirty="0"/>
-          </a:p>
-        </p:txBody>
-      </p:sp>
-      <p:sp>
-        <p:nvSpPr>
-          <p:cNvPr id="22" name="Text 20"/>
-          <p:cNvSpPr/>
-          <p:nvPr/>
-        </p:nvSpPr>
-        <p:spPr>
-          <a:xfrm>
-            <a:off x="8686800" y="2606040"/>
-            <a:ext cx="2011680" cy="640080"/>
-          </a:xfrm>
-          <a:prstGeom prst="rect">
-            <a:avLst/>
-          </a:prstGeom>
-          <a:noFill/>
-          <a:ln/>
-        </p:spPr>
-        <p:txBody>
-          <a:bodyPr wrap="square" rtlCol="0" anchor="ctr"/>
-          <a:lstStyle/>
-          <a:p>
-            <a:pPr algn="ctr" indent="0" marL="0">
-              <a:buNone/>
-            </a:pPr>
-            <a:r>
-              <a:rPr lang="en-US" sz="1300" dirty="0">
-                <a:solidFill>
-                  <a:srgbClr val="86198F"/>
-                </a:solidFill>
-              </a:rPr>
-              <a:t>explanted cirrhotic</a:t>
-            </a:r>
-            <a:endParaRPr lang="en-US" sz="1300" dirty="0"/>
-          </a:p>
-          <a:p>
-            <a:pPr algn="ctr" indent="0" marL="0">
-              <a:buNone/>
-            </a:pPr>
-            <a:r>
-              <a:rPr lang="en-US" sz="1300" dirty="0">
-                <a:solidFill>
-                  <a:srgbClr val="86198F"/>
-                </a:solidFill>
-              </a:rPr>
-              <a:t>organs, multi-lobe</a:t>
-            </a:r>
-            <a:endParaRPr lang="en-US" sz="1300" dirty="0"/>
-          </a:p>
-        </p:txBody>
-      </p:sp>
-      <p:sp>
-        <p:nvSpPr>
-          <p:cNvPr id="23" name="Shape 21"/>
-          <p:cNvSpPr/>
-          <p:nvPr/>
-        </p:nvSpPr>
-        <p:spPr>
-          <a:xfrm>
-            <a:off x="868680" y="1737360"/>
-            <a:ext cx="1371600" cy="1600200"/>
-          </a:xfrm>
-          <a:prstGeom prst="rect">
-            <a:avLst/>
-          </a:prstGeom>
-          <a:ln w="25400">
-            <a:solidFill>
-              <a:srgbClr val="BE123C"/>
-            </a:solidFill>
-            <a:prstDash val="dash"/>
-          </a:ln>
-        </p:spPr>
-      </p:sp>
-      <p:sp>
-        <p:nvSpPr>
-          <p:cNvPr id="24" name="Shape 22"/>
-          <p:cNvSpPr/>
-          <p:nvPr/>
-        </p:nvSpPr>
-        <p:spPr>
-          <a:xfrm>
-            <a:off x="8641080" y="1737360"/>
-            <a:ext cx="2103120" cy="1600200"/>
-          </a:xfrm>
-          <a:prstGeom prst="rect">
-            <a:avLst/>
-          </a:prstGeom>
-          <a:ln w="25400">
-            <a:solidFill>
-              <a:srgbClr val="BE123C"/>
-            </a:solidFill>
-            <a:prstDash val="dash"/>
-          </a:ln>
-        </p:spPr>
-      </p:sp>
-      <p:sp>
-        <p:nvSpPr>
-          <p:cNvPr id="25" name="Text 23"/>
-          <p:cNvSpPr/>
-          <p:nvPr/>
-        </p:nvSpPr>
-        <p:spPr>
-          <a:xfrm>
-            <a:off x="8046720" y="3383280"/>
-            <a:ext cx="2743200" cy="274320"/>
-          </a:xfrm>
-          <a:prstGeom prst="rect">
-            <a:avLst/>
-          </a:prstGeom>
-          <a:noFill/>
-          <a:ln/>
-        </p:spPr>
-        <p:txBody>
-          <a:bodyPr wrap="square" rtlCol="0" anchor="ctr"/>
-          <a:lstStyle/>
-          <a:p>
-            <a:pPr algn="ctr" indent="0" marL="0">
-              <a:buNone/>
-            </a:pPr>
-            <a:r>
-              <a:rPr lang="en-US" sz="1200" b="1" dirty="0">
-                <a:solidFill>
-                  <a:srgbClr val="BE123C"/>
-                </a:solidFill>
-              </a:rPr>
-              <a:t>not acquisition-matched</a:t>
-            </a:r>
-            <a:endParaRPr lang="en-US" sz="1200" dirty="0"/>
-          </a:p>
-        </p:txBody>
-      </p:sp>
-      <p:sp>
-        <p:nvSpPr>
-          <p:cNvPr id="26" name="Text 24"/>
-          <p:cNvSpPr/>
-          <p:nvPr/>
-        </p:nvSpPr>
-        <p:spPr>
-          <a:xfrm>
-            <a:off x="914400" y="3886200"/>
-            <a:ext cx="10058400" cy="365760"/>
-          </a:xfrm>
-          <a:prstGeom prst="rect">
-            <a:avLst/>
-          </a:prstGeom>
-          <a:noFill/>
-          <a:ln/>
-        </p:spPr>
-        <p:txBody>
-          <a:bodyPr wrap="square" rtlCol="0" anchor="ctr"/>
-          <a:lstStyle/>
-          <a:p>
-            <a:pPr algn="ctr" indent="0" marL="0">
-              <a:buNone/>
-            </a:pPr>
-            <a:r>
-              <a:rPr lang="en-US" sz="1600" b="1" dirty="0">
-                <a:solidFill>
-                  <a:srgbClr val="1E293B"/>
-                </a:solidFill>
-              </a:rPr>
-              <a:t>47 donors   ·   biopsy axis F0/F1/F2/F3/F4 = 2 / 8 / 12 / 12 / 4   ·   end-stage = 5   ·   healthy = 4</a:t>
-            </a:r>
-            <a:endParaRPr lang="en-US" sz="1600" dirty="0"/>
-          </a:p>
-        </p:txBody>
-      </p:sp>
-      <p:sp>
-        <p:nvSpPr>
-          <p:cNvPr id="27" name="Text 25"/>
-          <p:cNvSpPr/>
-          <p:nvPr/>
-        </p:nvSpPr>
-        <p:spPr>
-          <a:xfrm>
-            <a:off x="914400" y="4315968"/>
-            <a:ext cx="10058400" cy="320040"/>
-          </a:xfrm>
-          <a:prstGeom prst="rect">
-            <a:avLst/>
-          </a:prstGeom>
-          <a:noFill/>
-          <a:ln/>
-        </p:spPr>
-        <p:txBody>
-          <a:bodyPr wrap="square" rtlCol="0" anchor="ctr"/>
-          <a:lstStyle/>
-          <a:p>
-            <a:pPr algn="ctr" indent="0" marL="0">
-              <a:buNone/>
-            </a:pPr>
-            <a:r>
-              <a:rPr lang="en-US" sz="1400" i="1" dirty="0">
-                <a:solidFill>
-                  <a:srgbClr val="0D9488"/>
-                </a:solidFill>
-              </a:rPr>
-              <a:t>Primary inference: biopsy F1–F4 (F0 n=2 shown for context).</a:t>
-            </a:r>
-            <a:endParaRPr lang="en-US" sz="1400" dirty="0"/>
-          </a:p>
-        </p:txBody>
-      </p:sp>
-      <p:sp>
-        <p:nvSpPr>
-          <p:cNvPr id="28" name="Text 26"/>
-          <p:cNvSpPr/>
-          <p:nvPr/>
-        </p:nvSpPr>
-        <p:spPr>
-          <a:xfrm>
-            <a:off x="1554480" y="4800600"/>
-            <a:ext cx="9144000" cy="1097280"/>
-          </a:xfrm>
-          <a:prstGeom prst="rect">
-            <a:avLst/>
-          </a:prstGeom>
-          <a:noFill/>
-          <a:ln/>
-        </p:spPr>
-        <p:txBody>
-          <a:bodyPr wrap="square" rtlCol="0" anchor="ctr"/>
-          <a:lstStyle/>
-          <a:p>
-            <a:pPr algn="l" marL="342900" indent="-342900">
-              <a:spcAft>
-                <a:spcPts val="500"/>
-              </a:spcAft>
-              <a:buSzPct val="100000"/>
-              <a:buChar char="•"/>
-            </a:pPr>
-            <a:r>
-              <a:rPr lang="en-US" sz="1800" dirty="0">
-                <a:solidFill>
-                  <a:srgbClr val="1E293B"/>
-                </a:solidFill>
-              </a:rPr>
-              <a:t>The full trajectory is also an acquisition trajectory.</a:t>
-            </a:r>
-            <a:endParaRPr lang="en-US" sz="1800" dirty="0"/>
-          </a:p>
-          <a:p>
-            <a:pPr algn="l" marL="342900" indent="-342900">
-              <a:spcAft>
-                <a:spcPts val="500"/>
-              </a:spcAft>
-              <a:buSzPct val="100000"/>
-              <a:buChar char="•"/>
-            </a:pPr>
-            <a:r>
-              <a:rPr lang="en-US" sz="1800" b="1" dirty="0">
-                <a:solidFill>
-                  <a:srgbClr val="0D9488"/>
-                </a:solidFill>
-              </a:rPr>
-              <a:t>So healthy / end-stage comparisons cannot cleanly isolate disease biology — we use biopsy-only F1–F4.</a:t>
-            </a:r>
-            <a:endParaRPr lang="en-US" sz="1800" dirty="0"/>
-          </a:p>
-        </p:txBody>
-      </p:sp>
-      <p:sp>
-        <p:nvSpPr>
-          <p:cNvPr id="29" name="Text 27"/>
           <p:cNvSpPr/>
           <p:nvPr/>
         </p:nvSpPr>
@@ -8339,7 +10611,7 @@
       </p:sp>
       <p:sp>
         <p:nvSpPr>
-          <p:cNvPr id="30" name="Text 28"/>
+          <p:cNvPr id="17" name="Text 15"/>
           <p:cNvSpPr/>
           <p:nvPr/>
         </p:nvSpPr>
@@ -8455,7 +10727,7 @@
                   <a:srgbClr val="C0562B"/>
                 </a:solidFill>
               </a:rPr>
-              <a:t>WHY IT MATTERS</a:t>
+              <a:t>THE CONFOUND</a:t>
             </a:r>
             <a:endParaRPr lang="en-US" sz="1300" dirty="0"/>
           </a:p>
@@ -8494,89 +10766,30 @@
                 <a:ea typeface="Georgia" pitchFamily="34" charset="-122"/>
                 <a:cs typeface="Georgia" pitchFamily="34" charset="-120"/>
               </a:rPr>
-              <a:t>Endpoints carry organ-wide stress</a:t>
+              <a:t>Stage is entangled with acquisition</a:t>
             </a:r>
             <a:endParaRPr lang="en-US" sz="2800" dirty="0"/>
           </a:p>
         </p:txBody>
       </p:sp>
-      <p:pic>
-        <p:nvPicPr>
-          <p:cNvPr id="5" name="Image 0" descr="D:\CS\Genomics\Hackathon\presentation/assets/fig_stress.png">    </p:cNvPr>
-          <p:cNvPicPr>
-            <a:picLocks noChangeAspect="1"/>
-          </p:cNvPicPr>
-          <p:nvPr/>
-        </p:nvPicPr>
-        <p:blipFill>
-          <a:blip r:embed="rId1"/>
-          <a:srcRect l="0" r="0" t="0" b="0"/>
-          <a:stretch/>
-        </p:blipFill>
-        <p:spPr>
-          <a:xfrm>
-            <a:off x="274320" y="1371600"/>
-            <a:ext cx="8229600" cy="3931920"/>
-          </a:xfrm>
-          <a:prstGeom prst="rect">
-            <a:avLst/>
-          </a:prstGeom>
-        </p:spPr>
-      </p:pic>
-      <p:sp>
-        <p:nvSpPr>
-          <p:cNvPr id="6" name="Text 3"/>
-          <p:cNvSpPr/>
-          <p:nvPr/>
-        </p:nvSpPr>
-        <p:spPr>
-          <a:xfrm>
-            <a:off x="274320" y="5349240"/>
-            <a:ext cx="8229600" cy="365760"/>
-          </a:xfrm>
-          <a:prstGeom prst="rect">
-            <a:avLst/>
-          </a:prstGeom>
-          <a:noFill/>
-          <a:ln/>
-        </p:spPr>
-        <p:txBody>
-          <a:bodyPr wrap="square" lIns="0" tIns="0" rIns="0" bIns="0" rtlCol="0" anchor="ctr"/>
-          <a:lstStyle/>
-          <a:p>
-            <a:pPr algn="ctr" indent="0" marL="0">
-              <a:buNone/>
-            </a:pPr>
-            <a:r>
-              <a:rPr lang="en-US" sz="1200" i="1" dirty="0">
-                <a:solidFill>
-                  <a:srgbClr val="6B6256"/>
-                </a:solidFill>
-              </a:rPr>
-              <a:t>Figure 1.  Procurement-stress module by tissue source (donor-level); the same immediate-early spike appears in non-zonated endothelium.</a:t>
-            </a:r>
-            <a:endParaRPr lang="en-US" sz="1200" dirty="0"/>
-          </a:p>
-        </p:txBody>
-      </p:sp>
-      <p:sp>
-        <p:nvSpPr>
-          <p:cNvPr id="7" name="Shape 4"/>
-          <p:cNvSpPr/>
-          <p:nvPr/>
-        </p:nvSpPr>
-        <p:spPr>
-          <a:xfrm>
-            <a:off x="8686800" y="1508760"/>
-            <a:ext cx="3200400" cy="1325880"/>
+      <p:sp>
+        <p:nvSpPr>
+          <p:cNvPr id="5" name="Shape 3"/>
+          <p:cNvSpPr/>
+          <p:nvPr/>
+        </p:nvSpPr>
+        <p:spPr>
+          <a:xfrm>
+            <a:off x="914400" y="1783080"/>
+            <a:ext cx="1280160" cy="640080"/>
           </a:xfrm>
           <a:prstGeom prst="roundRect">
             <a:avLst>
-              <a:gd name="adj" fmla="val 5517"/>
+              <a:gd name="adj" fmla="val 8571"/>
             </a:avLst>
           </a:prstGeom>
           <a:solidFill>
-            <a:srgbClr val="FEF2F2"/>
+            <a:srgbClr val="BE123C"/>
           </a:solidFill>
           <a:ln/>
           <a:effectLst>
@@ -8590,14 +10803,14 @@
       </p:sp>
       <p:sp>
         <p:nvSpPr>
-          <p:cNvPr id="8" name="Text 5"/>
-          <p:cNvSpPr/>
-          <p:nvPr/>
-        </p:nvSpPr>
-        <p:spPr>
-          <a:xfrm>
-            <a:off x="8778240" y="1572768"/>
-            <a:ext cx="3017520" cy="1188720"/>
+          <p:cNvPr id="6" name="Text 4"/>
+          <p:cNvSpPr/>
+          <p:nvPr/>
+        </p:nvSpPr>
+        <p:spPr>
+          <a:xfrm>
+            <a:off x="914400" y="1783080"/>
+            <a:ext cx="1280160" cy="640080"/>
           </a:xfrm>
           <a:prstGeom prst="rect">
             <a:avLst/>
@@ -8609,16 +10822,682 @@
           <a:bodyPr wrap="square" rtlCol="0" anchor="ctr"/>
           <a:lstStyle/>
           <a:p>
-            <a:pPr algn="l" indent="0" marL="0">
+            <a:pPr algn="ctr" indent="0" marL="0">
+              <a:buNone/>
+            </a:pPr>
+            <a:r>
+              <a:rPr lang="en-US" sz="1500" b="1" dirty="0">
+                <a:solidFill>
+                  <a:srgbClr val="FFFFFF"/>
+                </a:solidFill>
+              </a:rPr>
+              <a:t>Healthy</a:t>
+            </a:r>
+            <a:endParaRPr lang="en-US" sz="1500" dirty="0"/>
+          </a:p>
+        </p:txBody>
+      </p:sp>
+      <p:sp>
+        <p:nvSpPr>
+          <p:cNvPr id="7" name="Shape 5"/>
+          <p:cNvSpPr/>
+          <p:nvPr/>
+        </p:nvSpPr>
+        <p:spPr>
+          <a:xfrm>
+            <a:off x="2331720" y="1783080"/>
+            <a:ext cx="1097280" cy="640080"/>
+          </a:xfrm>
+          <a:prstGeom prst="roundRect">
+            <a:avLst>
+              <a:gd name="adj" fmla="val 8571"/>
+            </a:avLst>
+          </a:prstGeom>
+          <a:solidFill>
+            <a:srgbClr val="0D9488"/>
+          </a:solidFill>
+          <a:ln/>
+          <a:effectLst>
+            <a:outerShdw sx="100000" sy="100000" kx="0" ky="0" algn="bl" rotWithShape="0" blurRad="88900" dist="38100" dir="5400000">
+              <a:srgbClr val="000000">
+                <a:alpha val="12000"/>
+              </a:srgbClr>
+            </a:outerShdw>
+          </a:effectLst>
+        </p:spPr>
+      </p:sp>
+      <p:sp>
+        <p:nvSpPr>
+          <p:cNvPr id="8" name="Text 6"/>
+          <p:cNvSpPr/>
+          <p:nvPr/>
+        </p:nvSpPr>
+        <p:spPr>
+          <a:xfrm>
+            <a:off x="2331720" y="1783080"/>
+            <a:ext cx="1097280" cy="640080"/>
+          </a:xfrm>
+          <a:prstGeom prst="rect">
+            <a:avLst/>
+          </a:prstGeom>
+          <a:noFill/>
+          <a:ln/>
+        </p:spPr>
+        <p:txBody>
+          <a:bodyPr wrap="square" rtlCol="0" anchor="ctr"/>
+          <a:lstStyle/>
+          <a:p>
+            <a:pPr algn="ctr" indent="0" marL="0">
+              <a:buNone/>
+            </a:pPr>
+            <a:r>
+              <a:rPr lang="en-US" sz="1500" b="1" dirty="0">
+                <a:solidFill>
+                  <a:srgbClr val="FFFFFF"/>
+                </a:solidFill>
+              </a:rPr>
+              <a:t>F0</a:t>
+            </a:r>
+            <a:endParaRPr lang="en-US" sz="1500" dirty="0"/>
+          </a:p>
+        </p:txBody>
+      </p:sp>
+      <p:sp>
+        <p:nvSpPr>
+          <p:cNvPr id="9" name="Shape 7"/>
+          <p:cNvSpPr/>
+          <p:nvPr/>
+        </p:nvSpPr>
+        <p:spPr>
+          <a:xfrm>
+            <a:off x="3520440" y="1783080"/>
+            <a:ext cx="1097280" cy="640080"/>
+          </a:xfrm>
+          <a:prstGeom prst="roundRect">
+            <a:avLst>
+              <a:gd name="adj" fmla="val 8571"/>
+            </a:avLst>
+          </a:prstGeom>
+          <a:solidFill>
+            <a:srgbClr val="0D9488"/>
+          </a:solidFill>
+          <a:ln/>
+          <a:effectLst>
+            <a:outerShdw sx="100000" sy="100000" kx="0" ky="0" algn="bl" rotWithShape="0" blurRad="88900" dist="38100" dir="5400000">
+              <a:srgbClr val="000000">
+                <a:alpha val="12000"/>
+              </a:srgbClr>
+            </a:outerShdw>
+          </a:effectLst>
+        </p:spPr>
+      </p:sp>
+      <p:sp>
+        <p:nvSpPr>
+          <p:cNvPr id="10" name="Text 8"/>
+          <p:cNvSpPr/>
+          <p:nvPr/>
+        </p:nvSpPr>
+        <p:spPr>
+          <a:xfrm>
+            <a:off x="3520440" y="1783080"/>
+            <a:ext cx="1097280" cy="640080"/>
+          </a:xfrm>
+          <a:prstGeom prst="rect">
+            <a:avLst/>
+          </a:prstGeom>
+          <a:noFill/>
+          <a:ln/>
+        </p:spPr>
+        <p:txBody>
+          <a:bodyPr wrap="square" rtlCol="0" anchor="ctr"/>
+          <a:lstStyle/>
+          <a:p>
+            <a:pPr algn="ctr" indent="0" marL="0">
+              <a:buNone/>
+            </a:pPr>
+            <a:r>
+              <a:rPr lang="en-US" sz="1500" b="1" dirty="0">
+                <a:solidFill>
+                  <a:srgbClr val="FFFFFF"/>
+                </a:solidFill>
+              </a:rPr>
+              <a:t>F1</a:t>
+            </a:r>
+            <a:endParaRPr lang="en-US" sz="1500" dirty="0"/>
+          </a:p>
+        </p:txBody>
+      </p:sp>
+      <p:sp>
+        <p:nvSpPr>
+          <p:cNvPr id="11" name="Shape 9"/>
+          <p:cNvSpPr/>
+          <p:nvPr/>
+        </p:nvSpPr>
+        <p:spPr>
+          <a:xfrm>
+            <a:off x="4709160" y="1783080"/>
+            <a:ext cx="1097280" cy="640080"/>
+          </a:xfrm>
+          <a:prstGeom prst="roundRect">
+            <a:avLst>
+              <a:gd name="adj" fmla="val 8571"/>
+            </a:avLst>
+          </a:prstGeom>
+          <a:solidFill>
+            <a:srgbClr val="0D9488"/>
+          </a:solidFill>
+          <a:ln/>
+          <a:effectLst>
+            <a:outerShdw sx="100000" sy="100000" kx="0" ky="0" algn="bl" rotWithShape="0" blurRad="88900" dist="38100" dir="5400000">
+              <a:srgbClr val="000000">
+                <a:alpha val="12000"/>
+              </a:srgbClr>
+            </a:outerShdw>
+          </a:effectLst>
+        </p:spPr>
+      </p:sp>
+      <p:sp>
+        <p:nvSpPr>
+          <p:cNvPr id="12" name="Text 10"/>
+          <p:cNvSpPr/>
+          <p:nvPr/>
+        </p:nvSpPr>
+        <p:spPr>
+          <a:xfrm>
+            <a:off x="4709160" y="1783080"/>
+            <a:ext cx="1097280" cy="640080"/>
+          </a:xfrm>
+          <a:prstGeom prst="rect">
+            <a:avLst/>
+          </a:prstGeom>
+          <a:noFill/>
+          <a:ln/>
+        </p:spPr>
+        <p:txBody>
+          <a:bodyPr wrap="square" rtlCol="0" anchor="ctr"/>
+          <a:lstStyle/>
+          <a:p>
+            <a:pPr algn="ctr" indent="0" marL="0">
+              <a:buNone/>
+            </a:pPr>
+            <a:r>
+              <a:rPr lang="en-US" sz="1500" b="1" dirty="0">
+                <a:solidFill>
+                  <a:srgbClr val="FFFFFF"/>
+                </a:solidFill>
+              </a:rPr>
+              <a:t>F2</a:t>
+            </a:r>
+            <a:endParaRPr lang="en-US" sz="1500" dirty="0"/>
+          </a:p>
+        </p:txBody>
+      </p:sp>
+      <p:sp>
+        <p:nvSpPr>
+          <p:cNvPr id="13" name="Shape 11"/>
+          <p:cNvSpPr/>
+          <p:nvPr/>
+        </p:nvSpPr>
+        <p:spPr>
+          <a:xfrm>
+            <a:off x="5897880" y="1783080"/>
+            <a:ext cx="1097280" cy="640080"/>
+          </a:xfrm>
+          <a:prstGeom prst="roundRect">
+            <a:avLst>
+              <a:gd name="adj" fmla="val 8571"/>
+            </a:avLst>
+          </a:prstGeom>
+          <a:solidFill>
+            <a:srgbClr val="0D9488"/>
+          </a:solidFill>
+          <a:ln/>
+          <a:effectLst>
+            <a:outerShdw sx="100000" sy="100000" kx="0" ky="0" algn="bl" rotWithShape="0" blurRad="88900" dist="38100" dir="5400000">
+              <a:srgbClr val="000000">
+                <a:alpha val="12000"/>
+              </a:srgbClr>
+            </a:outerShdw>
+          </a:effectLst>
+        </p:spPr>
+      </p:sp>
+      <p:sp>
+        <p:nvSpPr>
+          <p:cNvPr id="14" name="Text 12"/>
+          <p:cNvSpPr/>
+          <p:nvPr/>
+        </p:nvSpPr>
+        <p:spPr>
+          <a:xfrm>
+            <a:off x="5897880" y="1783080"/>
+            <a:ext cx="1097280" cy="640080"/>
+          </a:xfrm>
+          <a:prstGeom prst="rect">
+            <a:avLst/>
+          </a:prstGeom>
+          <a:noFill/>
+          <a:ln/>
+        </p:spPr>
+        <p:txBody>
+          <a:bodyPr wrap="square" rtlCol="0" anchor="ctr"/>
+          <a:lstStyle/>
+          <a:p>
+            <a:pPr algn="ctr" indent="0" marL="0">
+              <a:buNone/>
+            </a:pPr>
+            <a:r>
+              <a:rPr lang="en-US" sz="1500" b="1" dirty="0">
+                <a:solidFill>
+                  <a:srgbClr val="FFFFFF"/>
+                </a:solidFill>
+              </a:rPr>
+              <a:t>F3</a:t>
+            </a:r>
+            <a:endParaRPr lang="en-US" sz="1500" dirty="0"/>
+          </a:p>
+        </p:txBody>
+      </p:sp>
+      <p:sp>
+        <p:nvSpPr>
+          <p:cNvPr id="15" name="Shape 13"/>
+          <p:cNvSpPr/>
+          <p:nvPr/>
+        </p:nvSpPr>
+        <p:spPr>
+          <a:xfrm>
+            <a:off x="7086600" y="1783080"/>
+            <a:ext cx="1097280" cy="640080"/>
+          </a:xfrm>
+          <a:prstGeom prst="roundRect">
+            <a:avLst>
+              <a:gd name="adj" fmla="val 8571"/>
+            </a:avLst>
+          </a:prstGeom>
+          <a:solidFill>
+            <a:srgbClr val="0D9488"/>
+          </a:solidFill>
+          <a:ln/>
+          <a:effectLst>
+            <a:outerShdw sx="100000" sy="100000" kx="0" ky="0" algn="bl" rotWithShape="0" blurRad="88900" dist="38100" dir="5400000">
+              <a:srgbClr val="000000">
+                <a:alpha val="12000"/>
+              </a:srgbClr>
+            </a:outerShdw>
+          </a:effectLst>
+        </p:spPr>
+      </p:sp>
+      <p:sp>
+        <p:nvSpPr>
+          <p:cNvPr id="16" name="Text 14"/>
+          <p:cNvSpPr/>
+          <p:nvPr/>
+        </p:nvSpPr>
+        <p:spPr>
+          <a:xfrm>
+            <a:off x="7086600" y="1783080"/>
+            <a:ext cx="1097280" cy="640080"/>
+          </a:xfrm>
+          <a:prstGeom prst="rect">
+            <a:avLst/>
+          </a:prstGeom>
+          <a:noFill/>
+          <a:ln/>
+        </p:spPr>
+        <p:txBody>
+          <a:bodyPr wrap="square" rtlCol="0" anchor="ctr"/>
+          <a:lstStyle/>
+          <a:p>
+            <a:pPr algn="ctr" indent="0" marL="0">
+              <a:buNone/>
+            </a:pPr>
+            <a:r>
+              <a:rPr lang="en-US" sz="1500" b="1" dirty="0">
+                <a:solidFill>
+                  <a:srgbClr val="FFFFFF"/>
+                </a:solidFill>
+              </a:rPr>
+              <a:t>F4</a:t>
+            </a:r>
+            <a:endParaRPr lang="en-US" sz="1500" dirty="0"/>
+          </a:p>
+        </p:txBody>
+      </p:sp>
+      <p:sp>
+        <p:nvSpPr>
+          <p:cNvPr id="17" name="Shape 15"/>
+          <p:cNvSpPr/>
+          <p:nvPr/>
+        </p:nvSpPr>
+        <p:spPr>
+          <a:xfrm>
+            <a:off x="8686800" y="1783080"/>
+            <a:ext cx="2011680" cy="640080"/>
+          </a:xfrm>
+          <a:prstGeom prst="roundRect">
+            <a:avLst>
+              <a:gd name="adj" fmla="val 8571"/>
+            </a:avLst>
+          </a:prstGeom>
+          <a:solidFill>
+            <a:srgbClr val="86198F"/>
+          </a:solidFill>
+          <a:ln/>
+          <a:effectLst>
+            <a:outerShdw sx="100000" sy="100000" kx="0" ky="0" algn="bl" rotWithShape="0" blurRad="88900" dist="38100" dir="5400000">
+              <a:srgbClr val="000000">
+                <a:alpha val="12000"/>
+              </a:srgbClr>
+            </a:outerShdw>
+          </a:effectLst>
+        </p:spPr>
+      </p:sp>
+      <p:sp>
+        <p:nvSpPr>
+          <p:cNvPr id="18" name="Text 16"/>
+          <p:cNvSpPr/>
+          <p:nvPr/>
+        </p:nvSpPr>
+        <p:spPr>
+          <a:xfrm>
+            <a:off x="8686800" y="1783080"/>
+            <a:ext cx="2011680" cy="640080"/>
+          </a:xfrm>
+          <a:prstGeom prst="rect">
+            <a:avLst/>
+          </a:prstGeom>
+          <a:noFill/>
+          <a:ln/>
+        </p:spPr>
+        <p:txBody>
+          <a:bodyPr wrap="square" rtlCol="0" anchor="ctr"/>
+          <a:lstStyle/>
+          <a:p>
+            <a:pPr algn="ctr" indent="0" marL="0">
+              <a:buNone/>
+            </a:pPr>
+            <a:r>
+              <a:rPr lang="en-US" sz="1500" b="1" dirty="0">
+                <a:solidFill>
+                  <a:srgbClr val="FFFFFF"/>
+                </a:solidFill>
+              </a:rPr>
+              <a:t>End-stage</a:t>
+            </a:r>
+            <a:endParaRPr lang="en-US" sz="1500" dirty="0"/>
+          </a:p>
+        </p:txBody>
+      </p:sp>
+      <p:sp>
+        <p:nvSpPr>
+          <p:cNvPr id="19" name="Shape 17"/>
+          <p:cNvSpPr/>
+          <p:nvPr/>
+        </p:nvSpPr>
+        <p:spPr>
+          <a:xfrm>
+            <a:off x="914400" y="1581912"/>
+            <a:ext cx="9784080" cy="0"/>
+          </a:xfrm>
+          <a:prstGeom prst="line">
+            <a:avLst/>
+          </a:prstGeom>
+          <a:noFill/>
+          <a:ln w="19050">
+            <a:solidFill>
+              <a:srgbClr val="6B6256"/>
+            </a:solidFill>
+            <a:prstDash val="solid"/>
+            <a:tailEnd type="triangle"/>
+          </a:ln>
+        </p:spPr>
+      </p:sp>
+      <p:sp>
+        <p:nvSpPr>
+          <p:cNvPr id="20" name="Text 18"/>
+          <p:cNvSpPr/>
+          <p:nvPr/>
+        </p:nvSpPr>
+        <p:spPr>
+          <a:xfrm>
+            <a:off x="640080" y="2606040"/>
+            <a:ext cx="1828800" cy="640080"/>
+          </a:xfrm>
+          <a:prstGeom prst="rect">
+            <a:avLst/>
+          </a:prstGeom>
+          <a:noFill/>
+          <a:ln/>
+        </p:spPr>
+        <p:txBody>
+          <a:bodyPr wrap="square" rtlCol="0" anchor="ctr"/>
+          <a:lstStyle/>
+          <a:p>
+            <a:pPr algn="ctr" indent="0" marL="0">
+              <a:buNone/>
+            </a:pPr>
+            <a:r>
+              <a:rPr lang="en-US" sz="1300" dirty="0">
+                <a:solidFill>
+                  <a:srgbClr val="BE123C"/>
+                </a:solidFill>
+              </a:rPr>
+              <a:t>deceased-donor</a:t>
+            </a:r>
+            <a:endParaRPr lang="en-US" sz="1300" dirty="0"/>
+          </a:p>
+          <a:p>
+            <a:pPr algn="ctr" indent="0" marL="0">
+              <a:buNone/>
+            </a:pPr>
+            <a:r>
+              <a:rPr lang="en-US" sz="1300" dirty="0">
+                <a:solidFill>
+                  <a:srgbClr val="BE123C"/>
+                </a:solidFill>
+              </a:rPr>
+              <a:t>organ cubes</a:t>
+            </a:r>
+            <a:endParaRPr lang="en-US" sz="1300" dirty="0"/>
+          </a:p>
+        </p:txBody>
+      </p:sp>
+      <p:sp>
+        <p:nvSpPr>
+          <p:cNvPr id="21" name="Text 19"/>
+          <p:cNvSpPr/>
+          <p:nvPr/>
+        </p:nvSpPr>
+        <p:spPr>
+          <a:xfrm>
+            <a:off x="2331720" y="2606040"/>
+            <a:ext cx="6035040" cy="365760"/>
+          </a:xfrm>
+          <a:prstGeom prst="rect">
+            <a:avLst/>
+          </a:prstGeom>
+          <a:noFill/>
+          <a:ln/>
+        </p:spPr>
+        <p:txBody>
+          <a:bodyPr wrap="square" rtlCol="0" anchor="ctr"/>
+          <a:lstStyle/>
+          <a:p>
+            <a:pPr algn="ctr" indent="0" marL="0">
+              <a:buNone/>
+            </a:pPr>
+            <a:r>
+              <a:rPr lang="en-US" sz="1400" b="1" dirty="0">
+                <a:solidFill>
+                  <a:srgbClr val="0D9488"/>
+                </a:solidFill>
+              </a:rPr>
+              <a:t>16-gauge needle biopsies, right lobe</a:t>
+            </a:r>
+            <a:endParaRPr lang="en-US" sz="1400" dirty="0"/>
+          </a:p>
+        </p:txBody>
+      </p:sp>
+      <p:sp>
+        <p:nvSpPr>
+          <p:cNvPr id="22" name="Text 20"/>
+          <p:cNvSpPr/>
+          <p:nvPr/>
+        </p:nvSpPr>
+        <p:spPr>
+          <a:xfrm>
+            <a:off x="8686800" y="2606040"/>
+            <a:ext cx="2011680" cy="640080"/>
+          </a:xfrm>
+          <a:prstGeom prst="rect">
+            <a:avLst/>
+          </a:prstGeom>
+          <a:noFill/>
+          <a:ln/>
+        </p:spPr>
+        <p:txBody>
+          <a:bodyPr wrap="square" rtlCol="0" anchor="ctr"/>
+          <a:lstStyle/>
+          <a:p>
+            <a:pPr algn="ctr" indent="0" marL="0">
+              <a:buNone/>
+            </a:pPr>
+            <a:r>
+              <a:rPr lang="en-US" sz="1300" dirty="0">
+                <a:solidFill>
+                  <a:srgbClr val="86198F"/>
+                </a:solidFill>
+              </a:rPr>
+              <a:t>explanted cirrhotic</a:t>
+            </a:r>
+            <a:endParaRPr lang="en-US" sz="1300" dirty="0"/>
+          </a:p>
+          <a:p>
+            <a:pPr algn="ctr" indent="0" marL="0">
+              <a:buNone/>
+            </a:pPr>
+            <a:r>
+              <a:rPr lang="en-US" sz="1300" dirty="0">
+                <a:solidFill>
+                  <a:srgbClr val="86198F"/>
+                </a:solidFill>
+              </a:rPr>
+              <a:t>organs, multi-lobe</a:t>
+            </a:r>
+            <a:endParaRPr lang="en-US" sz="1300" dirty="0"/>
+          </a:p>
+        </p:txBody>
+      </p:sp>
+      <p:sp>
+        <p:nvSpPr>
+          <p:cNvPr id="23" name="Shape 21"/>
+          <p:cNvSpPr/>
+          <p:nvPr/>
+        </p:nvSpPr>
+        <p:spPr>
+          <a:xfrm>
+            <a:off x="868680" y="1737360"/>
+            <a:ext cx="1371600" cy="1600200"/>
+          </a:xfrm>
+          <a:prstGeom prst="rect">
+            <a:avLst/>
+          </a:prstGeom>
+          <a:ln w="25400">
+            <a:solidFill>
+              <a:srgbClr val="BE123C"/>
+            </a:solidFill>
+            <a:prstDash val="dash"/>
+          </a:ln>
+        </p:spPr>
+      </p:sp>
+      <p:sp>
+        <p:nvSpPr>
+          <p:cNvPr id="24" name="Shape 22"/>
+          <p:cNvSpPr/>
+          <p:nvPr/>
+        </p:nvSpPr>
+        <p:spPr>
+          <a:xfrm>
+            <a:off x="8641080" y="1737360"/>
+            <a:ext cx="2103120" cy="1600200"/>
+          </a:xfrm>
+          <a:prstGeom prst="rect">
+            <a:avLst/>
+          </a:prstGeom>
+          <a:ln w="25400">
+            <a:solidFill>
+              <a:srgbClr val="BE123C"/>
+            </a:solidFill>
+            <a:prstDash val="dash"/>
+          </a:ln>
+        </p:spPr>
+      </p:sp>
+      <p:sp>
+        <p:nvSpPr>
+          <p:cNvPr id="25" name="Text 23"/>
+          <p:cNvSpPr/>
+          <p:nvPr/>
+        </p:nvSpPr>
+        <p:spPr>
+          <a:xfrm>
+            <a:off x="8046720" y="3383280"/>
+            <a:ext cx="2743200" cy="274320"/>
+          </a:xfrm>
+          <a:prstGeom prst="rect">
+            <a:avLst/>
+          </a:prstGeom>
+          <a:noFill/>
+          <a:ln/>
+        </p:spPr>
+        <p:txBody>
+          <a:bodyPr wrap="square" rtlCol="0" anchor="ctr"/>
+          <a:lstStyle/>
+          <a:p>
+            <a:pPr algn="ctr" indent="0" marL="0">
+              <a:buNone/>
+            </a:pPr>
+            <a:r>
+              <a:rPr lang="en-US" sz="1200" b="1" dirty="0">
+                <a:solidFill>
+                  <a:srgbClr val="BE123C"/>
+                </a:solidFill>
+              </a:rPr>
+              <a:t>not acquisition-matched</a:t>
+            </a:r>
+            <a:endParaRPr lang="en-US" sz="1200" dirty="0"/>
+          </a:p>
+        </p:txBody>
+      </p:sp>
+      <p:sp>
+        <p:nvSpPr>
+          <p:cNvPr id="26" name="Text 24"/>
+          <p:cNvSpPr/>
+          <p:nvPr/>
+        </p:nvSpPr>
+        <p:spPr>
+          <a:xfrm>
+            <a:off x="914400" y="3886200"/>
+            <a:ext cx="10058400" cy="365760"/>
+          </a:xfrm>
+          <a:prstGeom prst="rect">
+            <a:avLst/>
+          </a:prstGeom>
+          <a:noFill/>
+          <a:ln/>
+        </p:spPr>
+        <p:txBody>
+          <a:bodyPr wrap="square" rtlCol="0" anchor="ctr"/>
+          <a:lstStyle/>
+          <a:p>
+            <a:pPr algn="ctr" indent="0" marL="0">
               <a:buNone/>
             </a:pPr>
             <a:r>
               <a:rPr lang="en-US" sz="1600" b="1" dirty="0">
                 <a:solidFill>
-                  <a:srgbClr val="DC2626"/>
-                </a:solidFill>
-              </a:rPr>
-              <a:t>Same stress spike in hepatocytes AND endothelium</a:t>
+                  <a:srgbClr val="1E293B"/>
+                </a:solidFill>
+              </a:rPr>
+              <a:t>47 donors   ·   biopsy axis F0/F1/F2/F3/F4 = 2 / 8 / 12 / 12 / 4   ·   end-stage = 5   ·   healthy = 4</a:t>
             </a:r>
             <a:endParaRPr lang="en-US" sz="1600" dirty="0"/>
           </a:p>
@@ -8626,14 +11505,50 @@
       </p:sp>
       <p:sp>
         <p:nvSpPr>
-          <p:cNvPr id="9" name="Text 6"/>
-          <p:cNvSpPr/>
-          <p:nvPr/>
-        </p:nvSpPr>
-        <p:spPr>
-          <a:xfrm>
-            <a:off x="8732520" y="3063240"/>
-            <a:ext cx="3154680" cy="2377440"/>
+          <p:cNvPr id="27" name="Text 25"/>
+          <p:cNvSpPr/>
+          <p:nvPr/>
+        </p:nvSpPr>
+        <p:spPr>
+          <a:xfrm>
+            <a:off x="914400" y="4315968"/>
+            <a:ext cx="10058400" cy="320040"/>
+          </a:xfrm>
+          <a:prstGeom prst="rect">
+            <a:avLst/>
+          </a:prstGeom>
+          <a:noFill/>
+          <a:ln/>
+        </p:spPr>
+        <p:txBody>
+          <a:bodyPr wrap="square" rtlCol="0" anchor="ctr"/>
+          <a:lstStyle/>
+          <a:p>
+            <a:pPr algn="ctr" indent="0" marL="0">
+              <a:buNone/>
+            </a:pPr>
+            <a:r>
+              <a:rPr lang="en-US" sz="1400" i="1" dirty="0">
+                <a:solidFill>
+                  <a:srgbClr val="0D9488"/>
+                </a:solidFill>
+              </a:rPr>
+              <a:t>Primary inference: biopsy F1–F4 (F0 n=2 shown for context).</a:t>
+            </a:r>
+            <a:endParaRPr lang="en-US" sz="1400" dirty="0"/>
+          </a:p>
+        </p:txBody>
+      </p:sp>
+      <p:sp>
+        <p:nvSpPr>
+          <p:cNvPr id="28" name="Text 26"/>
+          <p:cNvSpPr/>
+          <p:nvPr/>
+        </p:nvSpPr>
+        <p:spPr>
+          <a:xfrm>
+            <a:off x="1554480" y="4800600"/>
+            <a:ext cx="9144000" cy="1097280"/>
           </a:xfrm>
           <a:prstGeom prst="rect">
             <a:avLst/>
@@ -8647,62 +11562,44 @@
           <a:p>
             <a:pPr algn="l" marL="342900" indent="-342900">
               <a:spcAft>
-                <a:spcPts val="800"/>
+                <a:spcPts val="500"/>
               </a:spcAft>
               <a:buSzPct val="100000"/>
               <a:buChar char="•"/>
             </a:pPr>
             <a:r>
-              <a:rPr lang="en-US" sz="1550" dirty="0">
+              <a:rPr lang="en-US" sz="1800" dirty="0">
                 <a:solidFill>
                   <a:srgbClr val="1E293B"/>
                 </a:solidFill>
               </a:rPr>
-              <a:t>FOS, JUN, JUNB, JUND, ATF3, DUSP1, HSPA1A/B.</a:t>
-            </a:r>
-            <a:endParaRPr lang="en-US" sz="1550" dirty="0"/>
+              <a:t>The full trajectory is also an acquisition trajectory.</a:t>
+            </a:r>
+            <a:endParaRPr lang="en-US" sz="1800" dirty="0"/>
           </a:p>
           <a:p>
             <a:pPr algn="l" marL="342900" indent="-342900">
               <a:spcAft>
-                <a:spcPts val="800"/>
+                <a:spcPts val="500"/>
               </a:spcAft>
               <a:buSzPct val="100000"/>
               <a:buChar char="•"/>
             </a:pPr>
             <a:r>
-              <a:rPr lang="en-US" sz="1550" b="1" dirty="0">
-                <a:solidFill>
-                  <a:srgbClr val="1E293B"/>
-                </a:solidFill>
-              </a:rPr>
-              <a:t>Endothelium has no zonation program.</a:t>
-            </a:r>
-            <a:endParaRPr lang="en-US" sz="1550" dirty="0"/>
-          </a:p>
-          <a:p>
-            <a:pPr algn="l" marL="342900" indent="-342900">
-              <a:spcAft>
-                <a:spcPts val="800"/>
-              </a:spcAft>
-              <a:buSzPct val="100000"/>
-              <a:buChar char="•"/>
-            </a:pPr>
-            <a:r>
-              <a:rPr lang="en-US" sz="1550" b="1" dirty="0">
-                <a:solidFill>
-                  <a:srgbClr val="DC2626"/>
-                </a:solidFill>
-              </a:rPr>
-              <a:t>→ acquisition / procurement signal, not zonation biology.</a:t>
-            </a:r>
-            <a:endParaRPr lang="en-US" sz="1550" dirty="0"/>
-          </a:p>
-        </p:txBody>
-      </p:sp>
-      <p:sp>
-        <p:nvSpPr>
-          <p:cNvPr id="10" name="Text 7"/>
+              <a:rPr lang="en-US" sz="1800" b="1" dirty="0">
+                <a:solidFill>
+                  <a:srgbClr val="0D9488"/>
+                </a:solidFill>
+              </a:rPr>
+              <a:t>So healthy / end-stage comparisons cannot cleanly isolate disease biology — we use biopsy-only F1–F4.</a:t>
+            </a:r>
+            <a:endParaRPr lang="en-US" sz="1800" dirty="0"/>
+          </a:p>
+        </p:txBody>
+      </p:sp>
+      <p:sp>
+        <p:nvSpPr>
+          <p:cNvPr id="29" name="Text 27"/>
           <p:cNvSpPr/>
           <p:nvPr/>
         </p:nvSpPr>
@@ -8738,7 +11635,7 @@
       </p:sp>
       <p:sp>
         <p:nvSpPr>
-          <p:cNvPr id="11" name="Text 8"/>
+          <p:cNvPr id="30" name="Text 28"/>
           <p:cNvSpPr/>
           <p:nvPr/>
         </p:nvSpPr>
@@ -8854,7 +11751,7 @@
                   <a:srgbClr val="C0562B"/>
                 </a:solidFill>
               </a:rPr>
-              <a:t>HOW WE MEASURE</a:t>
+              <a:t>WHY IT MATTERS</a:t>
             </a:r>
             <a:endParaRPr lang="en-US" sz="1300" dirty="0"/>
           </a:p>
@@ -8893,441 +11790,89 @@
                 <a:ea typeface="Georgia" pitchFamily="34" charset="-122"/>
                 <a:cs typeface="Georgia" pitchFamily="34" charset="-120"/>
               </a:rPr>
-              <a:t>Raw-count anchor classification</a:t>
+              <a:t>Endpoints carry organ-wide stress</a:t>
             </a:r>
             <a:endParaRPr lang="en-US" sz="2800" dirty="0"/>
           </a:p>
         </p:txBody>
       </p:sp>
-      <p:sp>
-        <p:nvSpPr>
-          <p:cNvPr id="5" name="Shape 3"/>
-          <p:cNvSpPr/>
-          <p:nvPr/>
-        </p:nvSpPr>
-        <p:spPr>
-          <a:xfrm>
-            <a:off x="548640" y="1554480"/>
-            <a:ext cx="2148840" cy="731520"/>
+      <p:pic>
+        <p:nvPicPr>
+          <p:cNvPr id="5" name="Image 0" descr="D:\CS\Genomics\Hackathon\presentation/assets/fig_stress.png">    </p:cNvPr>
+          <p:cNvPicPr>
+            <a:picLocks noChangeAspect="1"/>
+          </p:cNvPicPr>
+          <p:nvPr/>
+        </p:nvPicPr>
+        <p:blipFill>
+          <a:blip r:embed="rId1"/>
+          <a:srcRect l="0" r="0" t="0" b="0"/>
+          <a:stretch/>
+        </p:blipFill>
+        <p:spPr>
+          <a:xfrm>
+            <a:off x="274320" y="1371600"/>
+            <a:ext cx="8229600" cy="3931920"/>
+          </a:xfrm>
+          <a:prstGeom prst="rect">
+            <a:avLst/>
+          </a:prstGeom>
+        </p:spPr>
+      </p:pic>
+      <p:sp>
+        <p:nvSpPr>
+          <p:cNvPr id="6" name="Text 3"/>
+          <p:cNvSpPr/>
+          <p:nvPr/>
+        </p:nvSpPr>
+        <p:spPr>
+          <a:xfrm>
+            <a:off x="274320" y="5349240"/>
+            <a:ext cx="8229600" cy="365760"/>
+          </a:xfrm>
+          <a:prstGeom prst="rect">
+            <a:avLst/>
+          </a:prstGeom>
+          <a:noFill/>
+          <a:ln/>
+        </p:spPr>
+        <p:txBody>
+          <a:bodyPr wrap="square" lIns="0" tIns="0" rIns="0" bIns="0" rtlCol="0" anchor="ctr"/>
+          <a:lstStyle/>
+          <a:p>
+            <a:pPr algn="ctr" indent="0" marL="0">
+              <a:buNone/>
+            </a:pPr>
+            <a:r>
+              <a:rPr lang="en-US" sz="1200" i="1" dirty="0">
+                <a:solidFill>
+                  <a:srgbClr val="6B6256"/>
+                </a:solidFill>
+              </a:rPr>
+              <a:t>Figure 1.  Procurement-stress module by tissue source (donor-level); the same immediate-early spike appears in non-zonated endothelium.</a:t>
+            </a:r>
+            <a:endParaRPr lang="en-US" sz="1200" dirty="0"/>
+          </a:p>
+        </p:txBody>
+      </p:sp>
+      <p:sp>
+        <p:nvSpPr>
+          <p:cNvPr id="7" name="Shape 4"/>
+          <p:cNvSpPr/>
+          <p:nvPr/>
+        </p:nvSpPr>
+        <p:spPr>
+          <a:xfrm>
+            <a:off x="8686800" y="1508760"/>
+            <a:ext cx="3200400" cy="1325880"/>
           </a:xfrm>
           <a:prstGeom prst="roundRect">
             <a:avLst>
-              <a:gd name="adj" fmla="val 8750"/>
+              <a:gd name="adj" fmla="val 5517"/>
             </a:avLst>
           </a:prstGeom>
           <a:solidFill>
-            <a:srgbClr val="ECE6DA"/>
-          </a:solidFill>
-          <a:ln w="15240">
-            <a:solidFill>
-              <a:srgbClr val="CBD5E1"/>
-            </a:solidFill>
-            <a:prstDash val="solid"/>
-          </a:ln>
-        </p:spPr>
-      </p:sp>
-      <p:sp>
-        <p:nvSpPr>
-          <p:cNvPr id="6" name="Text 4"/>
-          <p:cNvSpPr/>
-          <p:nvPr/>
-        </p:nvSpPr>
-        <p:spPr>
-          <a:xfrm>
-            <a:off x="548640" y="1554480"/>
-            <a:ext cx="2148840" cy="731520"/>
-          </a:xfrm>
-          <a:prstGeom prst="rect">
-            <a:avLst/>
-          </a:prstGeom>
-          <a:noFill/>
-          <a:ln/>
-        </p:spPr>
-        <p:txBody>
-          <a:bodyPr wrap="square" lIns="38100" tIns="38100" rIns="38100" bIns="38100" rtlCol="0" anchor="ctr"/>
-          <a:lstStyle/>
-          <a:p>
-            <a:pPr algn="ctr" indent="0" marL="0">
-              <a:buNone/>
-            </a:pPr>
-            <a:r>
-              <a:rPr lang="en-US" sz="1400" dirty="0">
-                <a:solidFill>
-                  <a:srgbClr val="1E293B"/>
-                </a:solidFill>
-              </a:rPr>
-              <a:t>raw UMI counts</a:t>
-            </a:r>
-            <a:endParaRPr lang="en-US" sz="1400" dirty="0"/>
-          </a:p>
-        </p:txBody>
-      </p:sp>
-      <p:sp>
-        <p:nvSpPr>
-          <p:cNvPr id="7" name="Shape 5"/>
-          <p:cNvSpPr/>
-          <p:nvPr/>
-        </p:nvSpPr>
-        <p:spPr>
-          <a:xfrm>
-            <a:off x="2697480" y="1920240"/>
-            <a:ext cx="201168" cy="0"/>
-          </a:xfrm>
-          <a:prstGeom prst="line">
-            <a:avLst/>
-          </a:prstGeom>
-          <a:noFill/>
-          <a:ln w="20320">
-            <a:solidFill>
-              <a:srgbClr val="6B6256"/>
-            </a:solidFill>
-            <a:prstDash val="solid"/>
-            <a:tailEnd type="triangle"/>
-          </a:ln>
-        </p:spPr>
-      </p:sp>
-      <p:sp>
-        <p:nvSpPr>
-          <p:cNvPr id="8" name="Shape 6"/>
-          <p:cNvSpPr/>
-          <p:nvPr/>
-        </p:nvSpPr>
-        <p:spPr>
-          <a:xfrm>
-            <a:off x="2898648" y="1554480"/>
-            <a:ext cx="2148840" cy="731520"/>
-          </a:xfrm>
-          <a:prstGeom prst="roundRect">
-            <a:avLst>
-              <a:gd name="adj" fmla="val 8750"/>
-            </a:avLst>
-          </a:prstGeom>
-          <a:solidFill>
-            <a:srgbClr val="ECE6DA"/>
-          </a:solidFill>
-          <a:ln w="15240">
-            <a:solidFill>
-              <a:srgbClr val="CBD5E1"/>
-            </a:solidFill>
-            <a:prstDash val="solid"/>
-          </a:ln>
-        </p:spPr>
-      </p:sp>
-      <p:sp>
-        <p:nvSpPr>
-          <p:cNvPr id="9" name="Text 7"/>
-          <p:cNvSpPr/>
-          <p:nvPr/>
-        </p:nvSpPr>
-        <p:spPr>
-          <a:xfrm>
-            <a:off x="2898648" y="1554480"/>
-            <a:ext cx="2148840" cy="731520"/>
-          </a:xfrm>
-          <a:prstGeom prst="rect">
-            <a:avLst/>
-          </a:prstGeom>
-          <a:noFill/>
-          <a:ln/>
-        </p:spPr>
-        <p:txBody>
-          <a:bodyPr wrap="square" lIns="38100" tIns="38100" rIns="38100" bIns="38100" rtlCol="0" anchor="ctr"/>
-          <a:lstStyle/>
-          <a:p>
-            <a:pPr algn="ctr" indent="0" marL="0">
-              <a:buNone/>
-            </a:pPr>
-            <a:r>
-              <a:rPr lang="en-US" sz="1400" dirty="0">
-                <a:solidFill>
-                  <a:srgbClr val="1E293B"/>
-                </a:solidFill>
-              </a:rPr>
-              <a:t>down-thin to 1,500</a:t>
-            </a:r>
-            <a:endParaRPr lang="en-US" sz="1400" dirty="0"/>
-          </a:p>
-        </p:txBody>
-      </p:sp>
-      <p:sp>
-        <p:nvSpPr>
-          <p:cNvPr id="10" name="Shape 8"/>
-          <p:cNvSpPr/>
-          <p:nvPr/>
-        </p:nvSpPr>
-        <p:spPr>
-          <a:xfrm>
-            <a:off x="5047488" y="1920240"/>
-            <a:ext cx="201168" cy="0"/>
-          </a:xfrm>
-          <a:prstGeom prst="line">
-            <a:avLst/>
-          </a:prstGeom>
-          <a:noFill/>
-          <a:ln w="20320">
-            <a:solidFill>
-              <a:srgbClr val="6B6256"/>
-            </a:solidFill>
-            <a:prstDash val="solid"/>
-            <a:tailEnd type="triangle"/>
-          </a:ln>
-        </p:spPr>
-      </p:sp>
-      <p:sp>
-        <p:nvSpPr>
-          <p:cNvPr id="11" name="Shape 9"/>
-          <p:cNvSpPr/>
-          <p:nvPr/>
-        </p:nvSpPr>
-        <p:spPr>
-          <a:xfrm>
-            <a:off x="5248656" y="1554480"/>
-            <a:ext cx="2148840" cy="731520"/>
-          </a:xfrm>
-          <a:prstGeom prst="roundRect">
-            <a:avLst>
-              <a:gd name="adj" fmla="val 8750"/>
-            </a:avLst>
-          </a:prstGeom>
-          <a:solidFill>
-            <a:srgbClr val="EDE9FE"/>
-          </a:solidFill>
-          <a:ln w="15240">
-            <a:solidFill>
-              <a:srgbClr val="7C3AED"/>
-            </a:solidFill>
-            <a:prstDash val="solid"/>
-          </a:ln>
-        </p:spPr>
-      </p:sp>
-      <p:sp>
-        <p:nvSpPr>
-          <p:cNvPr id="12" name="Text 10"/>
-          <p:cNvSpPr/>
-          <p:nvPr/>
-        </p:nvSpPr>
-        <p:spPr>
-          <a:xfrm>
-            <a:off x="5248656" y="1554480"/>
-            <a:ext cx="2148840" cy="731520"/>
-          </a:xfrm>
-          <a:prstGeom prst="rect">
-            <a:avLst/>
-          </a:prstGeom>
-          <a:noFill/>
-          <a:ln/>
-        </p:spPr>
-        <p:txBody>
-          <a:bodyPr wrap="square" lIns="38100" tIns="38100" rIns="38100" bIns="38100" rtlCol="0" anchor="ctr"/>
-          <a:lstStyle/>
-          <a:p>
-            <a:pPr algn="ctr" indent="0" marL="0">
-              <a:buNone/>
-            </a:pPr>
-            <a:r>
-              <a:rPr lang="en-US" sz="1400" b="1" dirty="0">
-                <a:solidFill>
-                  <a:srgbClr val="7C3AED"/>
-                </a:solidFill>
-              </a:rPr>
-              <a:t>marker ON if ≥ 2 UMI</a:t>
-            </a:r>
-            <a:endParaRPr lang="en-US" sz="1400" dirty="0"/>
-          </a:p>
-        </p:txBody>
-      </p:sp>
-      <p:sp>
-        <p:nvSpPr>
-          <p:cNvPr id="13" name="Shape 11"/>
-          <p:cNvSpPr/>
-          <p:nvPr/>
-        </p:nvSpPr>
-        <p:spPr>
-          <a:xfrm>
-            <a:off x="7397496" y="1920240"/>
-            <a:ext cx="201168" cy="0"/>
-          </a:xfrm>
-          <a:prstGeom prst="line">
-            <a:avLst/>
-          </a:prstGeom>
-          <a:noFill/>
-          <a:ln w="20320">
-            <a:solidFill>
-              <a:srgbClr val="6B6256"/>
-            </a:solidFill>
-            <a:prstDash val="solid"/>
-            <a:tailEnd type="triangle"/>
-          </a:ln>
-        </p:spPr>
-      </p:sp>
-      <p:sp>
-        <p:nvSpPr>
-          <p:cNvPr id="14" name="Shape 12"/>
-          <p:cNvSpPr/>
-          <p:nvPr/>
-        </p:nvSpPr>
-        <p:spPr>
-          <a:xfrm>
-            <a:off x="7598664" y="1554480"/>
-            <a:ext cx="2148840" cy="731520"/>
-          </a:xfrm>
-          <a:prstGeom prst="roundRect">
-            <a:avLst>
-              <a:gd name="adj" fmla="val 8750"/>
-            </a:avLst>
-          </a:prstGeom>
-          <a:solidFill>
-            <a:srgbClr val="ECE6DA"/>
-          </a:solidFill>
-          <a:ln w="15240">
-            <a:solidFill>
-              <a:srgbClr val="CBD5E1"/>
-            </a:solidFill>
-            <a:prstDash val="solid"/>
-          </a:ln>
-        </p:spPr>
-      </p:sp>
-      <p:sp>
-        <p:nvSpPr>
-          <p:cNvPr id="15" name="Text 13"/>
-          <p:cNvSpPr/>
-          <p:nvPr/>
-        </p:nvSpPr>
-        <p:spPr>
-          <a:xfrm>
-            <a:off x="7598664" y="1554480"/>
-            <a:ext cx="2148840" cy="731520"/>
-          </a:xfrm>
-          <a:prstGeom prst="rect">
-            <a:avLst/>
-          </a:prstGeom>
-          <a:noFill/>
-          <a:ln/>
-        </p:spPr>
-        <p:txBody>
-          <a:bodyPr wrap="square" lIns="38100" tIns="38100" rIns="38100" bIns="38100" rtlCol="0" anchor="ctr"/>
-          <a:lstStyle/>
-          <a:p>
-            <a:pPr algn="ctr" indent="0" marL="0">
-              <a:buNone/>
-            </a:pPr>
-            <a:r>
-              <a:rPr lang="en-US" sz="1400" dirty="0">
-                <a:solidFill>
-                  <a:srgbClr val="1E293B"/>
-                </a:solidFill>
-              </a:rPr>
-              <a:t>classify nucleus</a:t>
-            </a:r>
-            <a:endParaRPr lang="en-US" sz="1400" dirty="0"/>
-          </a:p>
-        </p:txBody>
-      </p:sp>
-      <p:sp>
-        <p:nvSpPr>
-          <p:cNvPr id="16" name="Shape 14"/>
-          <p:cNvSpPr/>
-          <p:nvPr/>
-        </p:nvSpPr>
-        <p:spPr>
-          <a:xfrm>
-            <a:off x="9747504" y="1920240"/>
-            <a:ext cx="201168" cy="0"/>
-          </a:xfrm>
-          <a:prstGeom prst="line">
-            <a:avLst/>
-          </a:prstGeom>
-          <a:noFill/>
-          <a:ln w="20320">
-            <a:solidFill>
-              <a:srgbClr val="6B6256"/>
-            </a:solidFill>
-            <a:prstDash val="solid"/>
-            <a:tailEnd type="triangle"/>
-          </a:ln>
-        </p:spPr>
-      </p:sp>
-      <p:sp>
-        <p:nvSpPr>
-          <p:cNvPr id="17" name="Shape 15"/>
-          <p:cNvSpPr/>
-          <p:nvPr/>
-        </p:nvSpPr>
-        <p:spPr>
-          <a:xfrm>
-            <a:off x="9948672" y="1554480"/>
-            <a:ext cx="2148840" cy="731520"/>
-          </a:xfrm>
-          <a:prstGeom prst="roundRect">
-            <a:avLst>
-              <a:gd name="adj" fmla="val 8750"/>
-            </a:avLst>
-          </a:prstGeom>
-          <a:solidFill>
-            <a:srgbClr val="ECE6DA"/>
-          </a:solidFill>
-          <a:ln w="15240">
-            <a:solidFill>
-              <a:srgbClr val="CBD5E1"/>
-            </a:solidFill>
-            <a:prstDash val="solid"/>
-          </a:ln>
-        </p:spPr>
-      </p:sp>
-      <p:sp>
-        <p:nvSpPr>
-          <p:cNvPr id="18" name="Text 16"/>
-          <p:cNvSpPr/>
-          <p:nvPr/>
-        </p:nvSpPr>
-        <p:spPr>
-          <a:xfrm>
-            <a:off x="9948672" y="1554480"/>
-            <a:ext cx="2148840" cy="731520"/>
-          </a:xfrm>
-          <a:prstGeom prst="rect">
-            <a:avLst/>
-          </a:prstGeom>
-          <a:noFill/>
-          <a:ln/>
-        </p:spPr>
-        <p:txBody>
-          <a:bodyPr wrap="square" lIns="38100" tIns="38100" rIns="38100" bIns="38100" rtlCol="0" anchor="ctr"/>
-          <a:lstStyle/>
-          <a:p>
-            <a:pPr algn="ctr" indent="0" marL="0">
-              <a:buNone/>
-            </a:pPr>
-            <a:r>
-              <a:rPr lang="en-US" sz="1400" dirty="0">
-                <a:solidFill>
-                  <a:srgbClr val="1E293B"/>
-                </a:solidFill>
-              </a:rPr>
-              <a:t>fraction per donor</a:t>
-            </a:r>
-            <a:endParaRPr lang="en-US" sz="1400" dirty="0"/>
-          </a:p>
-        </p:txBody>
-      </p:sp>
-      <p:sp>
-        <p:nvSpPr>
-          <p:cNvPr id="19" name="Shape 17"/>
-          <p:cNvSpPr/>
-          <p:nvPr/>
-        </p:nvSpPr>
-        <p:spPr>
-          <a:xfrm>
-            <a:off x="914400" y="2834640"/>
-            <a:ext cx="2468880" cy="914400"/>
-          </a:xfrm>
-          <a:prstGeom prst="roundRect">
-            <a:avLst>
-              <a:gd name="adj" fmla="val 8000"/>
-            </a:avLst>
-          </a:prstGeom>
-          <a:solidFill>
-            <a:srgbClr val="1D4ED8"/>
+            <a:srgbClr val="FEF2F2"/>
           </a:solidFill>
           <a:ln/>
           <a:effectLst>
@@ -9341,439 +11886,119 @@
       </p:sp>
       <p:sp>
         <p:nvSpPr>
-          <p:cNvPr id="20" name="Text 18"/>
-          <p:cNvSpPr/>
-          <p:nvPr/>
-        </p:nvSpPr>
-        <p:spPr>
-          <a:xfrm>
-            <a:off x="914400" y="2834640"/>
-            <a:ext cx="2468880" cy="914400"/>
-          </a:xfrm>
-          <a:prstGeom prst="rect">
-            <a:avLst/>
-          </a:prstGeom>
-          <a:noFill/>
-          <a:ln/>
-        </p:spPr>
-        <p:txBody>
-          <a:bodyPr wrap="square" lIns="25400" tIns="25400" rIns="25400" bIns="25400" rtlCol="0" anchor="ctr"/>
-          <a:lstStyle/>
-          <a:p>
-            <a:pPr algn="ctr" indent="0" marL="0">
-              <a:buNone/>
-            </a:pPr>
-            <a:r>
-              <a:rPr lang="en-US" sz="1450" b="1" dirty="0">
-                <a:solidFill>
-                  <a:srgbClr val="FFFFFF"/>
-                </a:solidFill>
-              </a:rPr>
-              <a:t>PC-anchor</a:t>
-            </a:r>
-            <a:endParaRPr lang="en-US" sz="1450" dirty="0"/>
-          </a:p>
-          <a:p>
-            <a:pPr algn="ctr" indent="0" marL="0">
-              <a:buNone/>
-            </a:pPr>
-            <a:r>
-              <a:rPr lang="en-US" sz="1450" b="1" dirty="0">
-                <a:solidFill>
-                  <a:srgbClr val="FFFFFF"/>
-                </a:solidFill>
-              </a:rPr>
-              <a:t>PC on / PP off</a:t>
-            </a:r>
-            <a:endParaRPr lang="en-US" sz="1450" dirty="0"/>
-          </a:p>
-        </p:txBody>
-      </p:sp>
-      <p:sp>
-        <p:nvSpPr>
-          <p:cNvPr id="21" name="Shape 19"/>
-          <p:cNvSpPr/>
-          <p:nvPr/>
-        </p:nvSpPr>
-        <p:spPr>
-          <a:xfrm>
-            <a:off x="3657600" y="2834640"/>
-            <a:ext cx="2468880" cy="914400"/>
-          </a:xfrm>
-          <a:prstGeom prst="roundRect">
-            <a:avLst>
-              <a:gd name="adj" fmla="val 8000"/>
-            </a:avLst>
-          </a:prstGeom>
-          <a:solidFill>
-            <a:srgbClr val="EA580C"/>
-          </a:solidFill>
-          <a:ln/>
-          <a:effectLst>
-            <a:outerShdw sx="100000" sy="100000" kx="0" ky="0" algn="bl" rotWithShape="0" blurRad="88900" dist="38100" dir="5400000">
-              <a:srgbClr val="000000">
-                <a:alpha val="12000"/>
-              </a:srgbClr>
-            </a:outerShdw>
-          </a:effectLst>
-        </p:spPr>
-      </p:sp>
-      <p:sp>
-        <p:nvSpPr>
-          <p:cNvPr id="22" name="Text 20"/>
-          <p:cNvSpPr/>
-          <p:nvPr/>
-        </p:nvSpPr>
-        <p:spPr>
-          <a:xfrm>
-            <a:off x="3657600" y="2834640"/>
-            <a:ext cx="2468880" cy="914400"/>
-          </a:xfrm>
-          <a:prstGeom prst="rect">
-            <a:avLst/>
-          </a:prstGeom>
-          <a:noFill/>
-          <a:ln/>
-        </p:spPr>
-        <p:txBody>
-          <a:bodyPr wrap="square" lIns="25400" tIns="25400" rIns="25400" bIns="25400" rtlCol="0" anchor="ctr"/>
-          <a:lstStyle/>
-          <a:p>
-            <a:pPr algn="ctr" indent="0" marL="0">
-              <a:buNone/>
-            </a:pPr>
-            <a:r>
-              <a:rPr lang="en-US" sz="1450" b="1" dirty="0">
-                <a:solidFill>
-                  <a:srgbClr val="FFFFFF"/>
-                </a:solidFill>
-              </a:rPr>
-              <a:t>PP-anchor</a:t>
-            </a:r>
-            <a:endParaRPr lang="en-US" sz="1450" dirty="0"/>
-          </a:p>
-          <a:p>
-            <a:pPr algn="ctr" indent="0" marL="0">
-              <a:buNone/>
-            </a:pPr>
-            <a:r>
-              <a:rPr lang="en-US" sz="1450" b="1" dirty="0">
-                <a:solidFill>
-                  <a:srgbClr val="FFFFFF"/>
-                </a:solidFill>
-              </a:rPr>
-              <a:t>PP on / PC off</a:t>
-            </a:r>
-            <a:endParaRPr lang="en-US" sz="1450" dirty="0"/>
-          </a:p>
-        </p:txBody>
-      </p:sp>
-      <p:sp>
-        <p:nvSpPr>
-          <p:cNvPr id="23" name="Shape 21"/>
-          <p:cNvSpPr/>
-          <p:nvPr/>
-        </p:nvSpPr>
-        <p:spPr>
-          <a:xfrm>
-            <a:off x="6400800" y="2834640"/>
-            <a:ext cx="2468880" cy="914400"/>
-          </a:xfrm>
-          <a:prstGeom prst="roundRect">
-            <a:avLst>
-              <a:gd name="adj" fmla="val 8000"/>
-            </a:avLst>
-          </a:prstGeom>
-          <a:solidFill>
-            <a:srgbClr val="7C3AED"/>
-          </a:solidFill>
-          <a:ln/>
-          <a:effectLst>
-            <a:outerShdw sx="100000" sy="100000" kx="0" ky="0" algn="bl" rotWithShape="0" blurRad="88900" dist="38100" dir="5400000">
-              <a:srgbClr val="000000">
-                <a:alpha val="12000"/>
-              </a:srgbClr>
-            </a:outerShdw>
-          </a:effectLst>
-        </p:spPr>
-      </p:sp>
-      <p:sp>
-        <p:nvSpPr>
-          <p:cNvPr id="24" name="Text 22"/>
-          <p:cNvSpPr/>
-          <p:nvPr/>
-        </p:nvSpPr>
-        <p:spPr>
-          <a:xfrm>
-            <a:off x="6400800" y="2834640"/>
-            <a:ext cx="2468880" cy="914400"/>
-          </a:xfrm>
-          <a:prstGeom prst="rect">
-            <a:avLst/>
-          </a:prstGeom>
-          <a:noFill/>
-          <a:ln/>
-        </p:spPr>
-        <p:txBody>
-          <a:bodyPr wrap="square" lIns="25400" tIns="25400" rIns="25400" bIns="25400" rtlCol="0" anchor="ctr"/>
-          <a:lstStyle/>
-          <a:p>
-            <a:pPr algn="ctr" indent="0" marL="0">
-              <a:buNone/>
-            </a:pPr>
-            <a:r>
-              <a:rPr lang="en-US" sz="1450" b="1" dirty="0">
-                <a:solidFill>
-                  <a:srgbClr val="FFFFFF"/>
-                </a:solidFill>
-              </a:rPr>
-              <a:t>Dual</a:t>
-            </a:r>
-            <a:endParaRPr lang="en-US" sz="1450" dirty="0"/>
-          </a:p>
-          <a:p>
-            <a:pPr algn="ctr" indent="0" marL="0">
-              <a:buNone/>
-            </a:pPr>
-            <a:r>
-              <a:rPr lang="en-US" sz="1450" b="1" dirty="0">
-                <a:solidFill>
-                  <a:srgbClr val="FFFFFF"/>
-                </a:solidFill>
-              </a:rPr>
-              <a:t>both programs on</a:t>
-            </a:r>
-            <a:endParaRPr lang="en-US" sz="1450" dirty="0"/>
-          </a:p>
-        </p:txBody>
-      </p:sp>
-      <p:sp>
-        <p:nvSpPr>
-          <p:cNvPr id="25" name="Shape 23"/>
-          <p:cNvSpPr/>
-          <p:nvPr/>
-        </p:nvSpPr>
-        <p:spPr>
-          <a:xfrm>
-            <a:off x="9144000" y="2834640"/>
-            <a:ext cx="2103120" cy="914400"/>
-          </a:xfrm>
-          <a:prstGeom prst="roundRect">
-            <a:avLst>
-              <a:gd name="adj" fmla="val 8000"/>
-            </a:avLst>
-          </a:prstGeom>
-          <a:solidFill>
-            <a:srgbClr val="9CA3AF"/>
-          </a:solidFill>
-          <a:ln/>
-          <a:effectLst>
-            <a:outerShdw sx="100000" sy="100000" kx="0" ky="0" algn="bl" rotWithShape="0" blurRad="88900" dist="38100" dir="5400000">
-              <a:srgbClr val="000000">
-                <a:alpha val="12000"/>
-              </a:srgbClr>
-            </a:outerShdw>
-          </a:effectLst>
-        </p:spPr>
-      </p:sp>
-      <p:sp>
-        <p:nvSpPr>
-          <p:cNvPr id="26" name="Text 24"/>
-          <p:cNvSpPr/>
-          <p:nvPr/>
-        </p:nvSpPr>
-        <p:spPr>
-          <a:xfrm>
-            <a:off x="9144000" y="2834640"/>
-            <a:ext cx="2103120" cy="914400"/>
-          </a:xfrm>
-          <a:prstGeom prst="rect">
-            <a:avLst/>
-          </a:prstGeom>
-          <a:noFill/>
-          <a:ln/>
-        </p:spPr>
-        <p:txBody>
-          <a:bodyPr wrap="square" lIns="25400" tIns="25400" rIns="25400" bIns="25400" rtlCol="0" anchor="ctr"/>
-          <a:lstStyle/>
-          <a:p>
-            <a:pPr algn="ctr" indent="0" marL="0">
-              <a:buNone/>
-            </a:pPr>
-            <a:r>
-              <a:rPr lang="en-US" sz="1450" b="1" dirty="0">
+          <p:cNvPr id="8" name="Text 5"/>
+          <p:cNvSpPr/>
+          <p:nvPr/>
+        </p:nvSpPr>
+        <p:spPr>
+          <a:xfrm>
+            <a:off x="8778240" y="1572768"/>
+            <a:ext cx="3017520" cy="1188720"/>
+          </a:xfrm>
+          <a:prstGeom prst="rect">
+            <a:avLst/>
+          </a:prstGeom>
+          <a:noFill/>
+          <a:ln/>
+        </p:spPr>
+        <p:txBody>
+          <a:bodyPr wrap="square" rtlCol="0" anchor="ctr"/>
+          <a:lstStyle/>
+          <a:p>
+            <a:pPr algn="l" indent="0" marL="0">
+              <a:buNone/>
+            </a:pPr>
+            <a:r>
+              <a:rPr lang="en-US" sz="1600" b="1" dirty="0">
+                <a:solidFill>
+                  <a:srgbClr val="DC2626"/>
+                </a:solidFill>
+              </a:rPr>
+              <a:t>Same stress spike in hepatocytes AND endothelium</a:t>
+            </a:r>
+            <a:endParaRPr lang="en-US" sz="1600" dirty="0"/>
+          </a:p>
+        </p:txBody>
+      </p:sp>
+      <p:sp>
+        <p:nvSpPr>
+          <p:cNvPr id="9" name="Text 6"/>
+          <p:cNvSpPr/>
+          <p:nvPr/>
+        </p:nvSpPr>
+        <p:spPr>
+          <a:xfrm>
+            <a:off x="8732520" y="3063240"/>
+            <a:ext cx="3154680" cy="2377440"/>
+          </a:xfrm>
+          <a:prstGeom prst="rect">
+            <a:avLst/>
+          </a:prstGeom>
+          <a:noFill/>
+          <a:ln/>
+        </p:spPr>
+        <p:txBody>
+          <a:bodyPr wrap="square" rtlCol="0" anchor="ctr"/>
+          <a:lstStyle/>
+          <a:p>
+            <a:pPr algn="l" marL="342900" indent="-342900">
+              <a:spcAft>
+                <a:spcPts val="800"/>
+              </a:spcAft>
+              <a:buSzPct val="100000"/>
+              <a:buChar char="•"/>
+            </a:pPr>
+            <a:r>
+              <a:rPr lang="en-US" sz="1550" dirty="0">
                 <a:solidFill>
                   <a:srgbClr val="1E293B"/>
                 </a:solidFill>
               </a:rPr>
-              <a:t>Null</a:t>
-            </a:r>
-            <a:endParaRPr lang="en-US" sz="1450" dirty="0"/>
-          </a:p>
-          <a:p>
-            <a:pPr algn="ctr" indent="0" marL="0">
-              <a:buNone/>
-            </a:pPr>
-            <a:r>
-              <a:rPr lang="en-US" sz="1450" b="1" dirty="0">
+              <a:t>FOS, JUN, JUNB, JUND, ATF3, DUSP1, HSPA1A/B.</a:t>
+            </a:r>
+            <a:endParaRPr lang="en-US" sz="1550" dirty="0"/>
+          </a:p>
+          <a:p>
+            <a:pPr algn="l" marL="342900" indent="-342900">
+              <a:spcAft>
+                <a:spcPts val="800"/>
+              </a:spcAft>
+              <a:buSzPct val="100000"/>
+              <a:buChar char="•"/>
+            </a:pPr>
+            <a:r>
+              <a:rPr lang="en-US" sz="1550" b="1" dirty="0">
                 <a:solidFill>
                   <a:srgbClr val="1E293B"/>
                 </a:solidFill>
               </a:rPr>
-              <a:t>neither on</a:t>
-            </a:r>
-            <a:endParaRPr lang="en-US" sz="1450" dirty="0"/>
-          </a:p>
-        </p:txBody>
-      </p:sp>
-      <p:sp>
-        <p:nvSpPr>
-          <p:cNvPr id="27" name="Text 25"/>
-          <p:cNvSpPr/>
-          <p:nvPr/>
-        </p:nvSpPr>
-        <p:spPr>
-          <a:xfrm>
-            <a:off x="914400" y="4114800"/>
-            <a:ext cx="10607040" cy="1737360"/>
-          </a:xfrm>
-          <a:prstGeom prst="rect">
-            <a:avLst/>
-          </a:prstGeom>
-          <a:noFill/>
-          <a:ln/>
-        </p:spPr>
-        <p:txBody>
-          <a:bodyPr wrap="square" rtlCol="0" anchor="t"/>
-          <a:lstStyle/>
-          <a:p>
-            <a:pPr algn="l" indent="0" marL="0">
+              <a:t>Endothelium has no zonation program.</a:t>
+            </a:r>
+            <a:endParaRPr lang="en-US" sz="1550" dirty="0"/>
+          </a:p>
+          <a:p>
+            <a:pPr algn="l" marL="342900" indent="-342900">
               <a:spcAft>
-                <a:spcPts val="700"/>
+                <a:spcPts val="800"/>
               </a:spcAft>
-              <a:buNone/>
-            </a:pPr>
-            <a:r>
-              <a:rPr lang="en-US" sz="1600" b="1" dirty="0">
-                <a:solidFill>
-                  <a:srgbClr val="1E293B"/>
-                </a:solidFill>
-              </a:rPr>
-              <a:t>Why raw counts: </a:t>
-            </a:r>
-            <a:pPr algn="l" indent="0" marL="0">
-              <a:spcAft>
-                <a:spcPts val="700"/>
-              </a:spcAft>
-              <a:buNone/>
-            </a:pPr>
-            <a:r>
-              <a:rPr lang="en-US" sz="1600" dirty="0">
-                <a:solidFill>
-                  <a:srgbClr val="1E293B"/>
-                </a:solidFill>
-              </a:rPr>
-              <a:t>a single KRT19 or GLUL molecule may be ambient — absolute detection matters, so SCT-normalized values are the wrong object.
-</a:t>
-            </a:r>
-            <a:endParaRPr lang="en-US" sz="1600" dirty="0"/>
-          </a:p>
-          <a:p>
-            <a:pPr algn="l" indent="0" marL="0">
-              <a:spcAft>
-                <a:spcPts val="700"/>
-              </a:spcAft>
-              <a:buNone/>
-            </a:pPr>
-            <a:r>
-              <a:rPr lang="en-US" sz="1600" b="1" dirty="0">
-                <a:solidFill>
-                  <a:srgbClr val="7C3AED"/>
-                </a:solidFill>
-              </a:rPr>
-              <a:t>≥2-UMI threshold </a:t>
-            </a:r>
-            <a:pPr algn="l" indent="0" marL="0">
-              <a:spcAft>
-                <a:spcPts val="700"/>
-              </a:spcAft>
-              <a:buNone/>
-            </a:pPr>
-            <a:r>
-              <a:rPr lang="en-US" sz="1600" dirty="0">
-                <a:solidFill>
-                  <a:srgbClr val="1E293B"/>
-                </a:solidFill>
-              </a:rPr>
-              <a:t>suppresses single-molecule ambient.    </a:t>
-            </a:r>
-            <a:pPr algn="l" indent="0" marL="0">
-              <a:spcAft>
-                <a:spcPts val="700"/>
-              </a:spcAft>
-              <a:buNone/>
-            </a:pPr>
-            <a:r>
-              <a:rPr lang="en-US" sz="1600" b="1" dirty="0">
-                <a:solidFill>
-                  <a:srgbClr val="0D9488"/>
-                </a:solidFill>
-              </a:rPr>
-              <a:t>Unit = donor (~47), never the nucleus </a:t>
-            </a:r>
-            <a:pPr algn="l" indent="0" marL="0">
-              <a:spcAft>
-                <a:spcPts val="700"/>
-              </a:spcAft>
-              <a:buNone/>
-            </a:pPr>
-            <a:r>
-              <a:rPr lang="en-US" sz="1600" dirty="0">
-                <a:solidFill>
-                  <a:srgbClr val="1E293B"/>
-                </a:solidFill>
-              </a:rPr>
-              <a:t>→ no pseudoreplication.
-</a:t>
-            </a:r>
-            <a:endParaRPr lang="en-US" sz="1600" dirty="0"/>
-          </a:p>
-          <a:p>
-            <a:pPr algn="l" indent="0" marL="0">
-              <a:spcAft>
-                <a:spcPts val="700"/>
-              </a:spcAft>
-              <a:buNone/>
-            </a:pPr>
-            <a:r>
-              <a:rPr lang="en-US" sz="1600" b="1" dirty="0">
-                <a:solidFill>
-                  <a:srgbClr val="1E293B"/>
-                </a:solidFill>
-              </a:rPr>
-              <a:t>Robust across the sensitivity grid </a:t>
-            </a:r>
-            <a:pPr algn="l" indent="0" marL="0">
-              <a:spcAft>
-                <a:spcPts val="700"/>
-              </a:spcAft>
-              <a:buNone/>
-            </a:pPr>
-            <a:r>
-              <a:rPr lang="en-US" sz="1600" dirty="0">
-                <a:solidFill>
-                  <a:srgbClr val="1E293B"/>
-                </a:solidFill>
-              </a:rPr>
-              <a:t>(anchor genes, periportal rule, ALDOB in/out, 1 vs 2 UMI).</a:t>
-            </a:r>
-            <a:endParaRPr lang="en-US" sz="1600" dirty="0"/>
-          </a:p>
-        </p:txBody>
-      </p:sp>
-      <p:sp>
-        <p:nvSpPr>
-          <p:cNvPr id="28" name="Text 26"/>
+              <a:buSzPct val="100000"/>
+              <a:buChar char="•"/>
+            </a:pPr>
+            <a:r>
+              <a:rPr lang="en-US" sz="1550" b="1" dirty="0">
+                <a:solidFill>
+                  <a:srgbClr val="DC2626"/>
+                </a:solidFill>
+              </a:rPr>
+              <a:t>→ acquisition / procurement signal, not zonation biology.</a:t>
+            </a:r>
+            <a:endParaRPr lang="en-US" sz="1550" dirty="0"/>
+          </a:p>
+        </p:txBody>
+      </p:sp>
+      <p:sp>
+        <p:nvSpPr>
+          <p:cNvPr id="10" name="Text 7"/>
           <p:cNvSpPr/>
           <p:nvPr/>
         </p:nvSpPr>
@@ -9809,7 +12034,7 @@
       </p:sp>
       <p:sp>
         <p:nvSpPr>
-          <p:cNvPr id="29" name="Text 27"/>
+          <p:cNvPr id="11" name="Text 8"/>
           <p:cNvSpPr/>
           <p:nvPr/>
         </p:nvSpPr>
@@ -9925,7 +12150,7 @@
                   <a:srgbClr val="C0562B"/>
                 </a:solidFill>
               </a:rPr>
-              <a:t>THE RESULT</a:t>
+              <a:t>HOW WE MEASURE</a:t>
             </a:r>
             <a:endParaRPr lang="en-US" sz="1300" dirty="0"/>
           </a:p>
@@ -9964,203 +12189,441 @@
                 <a:ea typeface="Georgia" pitchFamily="34" charset="-122"/>
                 <a:cs typeface="Georgia" pitchFamily="34" charset="-120"/>
               </a:rPr>
-              <a:t>Matched biopsies stay zonated</a:t>
+              <a:t>Raw-count anchor classification</a:t>
             </a:r>
             <a:endParaRPr lang="en-US" sz="2800" dirty="0"/>
           </a:p>
         </p:txBody>
       </p:sp>
-      <p:pic>
-        <p:nvPicPr>
-          <p:cNvPr id="5" name="Image 0" descr="D:\CS\Genomics\Hackathon\presentation/assets/fig_result3.png">    </p:cNvPr>
-          <p:cNvPicPr>
-            <a:picLocks noChangeAspect="1"/>
-          </p:cNvPicPr>
-          <p:nvPr/>
-        </p:nvPicPr>
-        <p:blipFill>
-          <a:blip r:embed="rId1"/>
-          <a:srcRect l="0" r="0" t="0" b="0"/>
-          <a:stretch/>
-        </p:blipFill>
-        <p:spPr>
-          <a:xfrm>
-            <a:off x="182880" y="1417320"/>
-            <a:ext cx="8321040" cy="3749040"/>
-          </a:xfrm>
-          <a:prstGeom prst="rect">
-            <a:avLst/>
-          </a:prstGeom>
-        </p:spPr>
-      </p:pic>
-      <p:sp>
-        <p:nvSpPr>
-          <p:cNvPr id="6" name="Text 3"/>
-          <p:cNvSpPr/>
-          <p:nvPr/>
-        </p:nvSpPr>
-        <p:spPr>
-          <a:xfrm>
-            <a:off x="182880" y="5257800"/>
-            <a:ext cx="8321040" cy="365760"/>
-          </a:xfrm>
-          <a:prstGeom prst="rect">
-            <a:avLst/>
-          </a:prstGeom>
-          <a:noFill/>
-          <a:ln/>
-        </p:spPr>
-        <p:txBody>
-          <a:bodyPr wrap="square" lIns="0" tIns="0" rIns="0" bIns="0" rtlCol="0" anchor="ctr"/>
-          <a:lstStyle/>
-          <a:p>
-            <a:pPr algn="ctr" indent="0" marL="0">
-              <a:buNone/>
-            </a:pPr>
-            <a:r>
-              <a:rPr lang="en-US" sz="1200" i="1" dirty="0">
-                <a:solidFill>
-                  <a:srgbClr val="6B6256"/>
-                </a:solidFill>
-              </a:rPr>
-              <a:t>Figure 2.  Pericentral and periportal depletion and dual co-expression across matched biopsy F1–F4 (donor=point, value-labelled; F0 n=2 in backup).</a:t>
-            </a:r>
-            <a:endParaRPr lang="en-US" sz="1200" dirty="0"/>
-          </a:p>
-        </p:txBody>
-      </p:sp>
-      <p:sp>
-        <p:nvSpPr>
-          <p:cNvPr id="7" name="Text 4"/>
-          <p:cNvSpPr/>
-          <p:nvPr/>
-        </p:nvSpPr>
-        <p:spPr>
-          <a:xfrm>
-            <a:off x="8641080" y="1508760"/>
-            <a:ext cx="3337560" cy="3200400"/>
-          </a:xfrm>
-          <a:prstGeom prst="rect">
-            <a:avLst/>
-          </a:prstGeom>
-          <a:noFill/>
-          <a:ln/>
-        </p:spPr>
-        <p:txBody>
-          <a:bodyPr wrap="square" rtlCol="0" anchor="t"/>
-          <a:lstStyle/>
-          <a:p>
-            <a:pPr algn="l" indent="0" marL="0">
-              <a:buNone/>
-            </a:pPr>
-            <a:r>
-              <a:rPr lang="en-US" sz="1500" b="1" dirty="0">
-                <a:solidFill>
-                  <a:srgbClr val="1F3A3D"/>
-                </a:solidFill>
-              </a:rPr>
-              <a:t>The other two mechanisms (F1→F4 donor-median):
-</a:t>
-            </a:r>
-            <a:endParaRPr lang="en-US" sz="1500" dirty="0"/>
-          </a:p>
-          <a:p>
-            <a:pPr algn="l" indent="0" marL="0">
-              <a:buNone/>
-            </a:pPr>
-            <a:r>
-              <a:rPr lang="en-US" sz="1500" b="1" dirty="0">
-                <a:solidFill>
-                  <a:srgbClr val="475569"/>
-                </a:solidFill>
-              </a:rPr>
-              <a:t>Null (turn-off): </a:t>
-            </a:r>
-            <a:pPr algn="l" indent="0" marL="0">
-              <a:buNone/>
-            </a:pPr>
-            <a:r>
-              <a:rPr lang="en-US" sz="1500" dirty="0">
-                <a:solidFill>
-                  <a:srgbClr val="1E293B"/>
-                </a:solidFill>
-              </a:rPr>
-              <a:t>44 / 36 / 39 / 39% — stable.
-</a:t>
-            </a:r>
-            <a:endParaRPr lang="en-US" sz="1500" dirty="0"/>
-          </a:p>
-          <a:p>
-            <a:pPr algn="l" indent="0" marL="0">
-              <a:buNone/>
-            </a:pPr>
-            <a:r>
-              <a:rPr lang="en-US" sz="1500" b="1" dirty="0">
-                <a:solidFill>
-                  <a:srgbClr val="EA580C"/>
-                </a:solidFill>
-              </a:rPr>
-              <a:t>PP : PC ratio: </a:t>
-            </a:r>
-            <a:pPr algn="l" indent="0" marL="0">
-              <a:buNone/>
-            </a:pPr>
-            <a:r>
-              <a:rPr lang="en-US" sz="1500" dirty="0">
-                <a:solidFill>
-                  <a:srgbClr val="1E293B"/>
-                </a:solidFill>
-              </a:rPr>
-              <a:t>1.16 / 1.01 / 1.10 / 1.18 — flat.
-</a:t>
-            </a:r>
-            <a:endParaRPr lang="en-US" sz="1500" dirty="0"/>
-          </a:p>
-          <a:p>
-            <a:pPr algn="l" indent="0" marL="0">
-              <a:buNone/>
-            </a:pPr>
-            <a:r>
-              <a:rPr lang="en-US" sz="1500" b="1" dirty="0">
-                <a:solidFill>
-                  <a:srgbClr val="1D4ED8"/>
-                </a:solidFill>
-              </a:rPr>
-              <a:t>Bound: </a:t>
-            </a:r>
-            <a:pPr algn="l" indent="0" marL="0">
-              <a:buNone/>
-            </a:pPr>
-            <a:r>
-              <a:rPr lang="en-US" sz="1500" i="1" dirty="0">
-                <a:solidFill>
-                  <a:srgbClr val="6B6256"/>
-                </a:solidFill>
-              </a:rPr>
-              <a:t>a large shift (~20 pp) is excluded; a subtle drift ≤10 pp is not (F4 n=4).</a:t>
-            </a:r>
-            <a:endParaRPr lang="en-US" sz="1500" dirty="0"/>
-          </a:p>
-        </p:txBody>
-      </p:sp>
-      <p:sp>
-        <p:nvSpPr>
-          <p:cNvPr id="8" name="Shape 5"/>
-          <p:cNvSpPr/>
-          <p:nvPr/>
-        </p:nvSpPr>
-        <p:spPr>
-          <a:xfrm>
-            <a:off x="8641080" y="4892040"/>
-            <a:ext cx="3337560" cy="868680"/>
+      <p:sp>
+        <p:nvSpPr>
+          <p:cNvPr id="5" name="Shape 3"/>
+          <p:cNvSpPr/>
+          <p:nvPr/>
+        </p:nvSpPr>
+        <p:spPr>
+          <a:xfrm>
+            <a:off x="548640" y="1554480"/>
+            <a:ext cx="2148840" cy="731520"/>
           </a:xfrm>
           <a:prstGeom prst="roundRect">
             <a:avLst>
-              <a:gd name="adj" fmla="val 8421"/>
+              <a:gd name="adj" fmla="val 8750"/>
             </a:avLst>
           </a:prstGeom>
           <a:solidFill>
-            <a:srgbClr val="1F3A3D"/>
+            <a:srgbClr val="ECE6DA"/>
+          </a:solidFill>
+          <a:ln w="15240">
+            <a:solidFill>
+              <a:srgbClr val="CBD5E1"/>
+            </a:solidFill>
+            <a:prstDash val="solid"/>
+          </a:ln>
+        </p:spPr>
+      </p:sp>
+      <p:sp>
+        <p:nvSpPr>
+          <p:cNvPr id="6" name="Text 4"/>
+          <p:cNvSpPr/>
+          <p:nvPr/>
+        </p:nvSpPr>
+        <p:spPr>
+          <a:xfrm>
+            <a:off x="548640" y="1554480"/>
+            <a:ext cx="2148840" cy="731520"/>
+          </a:xfrm>
+          <a:prstGeom prst="rect">
+            <a:avLst/>
+          </a:prstGeom>
+          <a:noFill/>
+          <a:ln/>
+        </p:spPr>
+        <p:txBody>
+          <a:bodyPr wrap="square" lIns="38100" tIns="38100" rIns="38100" bIns="38100" rtlCol="0" anchor="ctr"/>
+          <a:lstStyle/>
+          <a:p>
+            <a:pPr algn="ctr" indent="0" marL="0">
+              <a:buNone/>
+            </a:pPr>
+            <a:r>
+              <a:rPr lang="en-US" sz="1400" dirty="0">
+                <a:solidFill>
+                  <a:srgbClr val="1E293B"/>
+                </a:solidFill>
+              </a:rPr>
+              <a:t>raw UMI counts</a:t>
+            </a:r>
+            <a:endParaRPr lang="en-US" sz="1400" dirty="0"/>
+          </a:p>
+        </p:txBody>
+      </p:sp>
+      <p:sp>
+        <p:nvSpPr>
+          <p:cNvPr id="7" name="Shape 5"/>
+          <p:cNvSpPr/>
+          <p:nvPr/>
+        </p:nvSpPr>
+        <p:spPr>
+          <a:xfrm>
+            <a:off x="2697480" y="1920240"/>
+            <a:ext cx="201168" cy="0"/>
+          </a:xfrm>
+          <a:prstGeom prst="line">
+            <a:avLst/>
+          </a:prstGeom>
+          <a:noFill/>
+          <a:ln w="20320">
+            <a:solidFill>
+              <a:srgbClr val="6B6256"/>
+            </a:solidFill>
+            <a:prstDash val="solid"/>
+            <a:tailEnd type="triangle"/>
+          </a:ln>
+        </p:spPr>
+      </p:sp>
+      <p:sp>
+        <p:nvSpPr>
+          <p:cNvPr id="8" name="Shape 6"/>
+          <p:cNvSpPr/>
+          <p:nvPr/>
+        </p:nvSpPr>
+        <p:spPr>
+          <a:xfrm>
+            <a:off x="2898648" y="1554480"/>
+            <a:ext cx="2148840" cy="731520"/>
+          </a:xfrm>
+          <a:prstGeom prst="roundRect">
+            <a:avLst>
+              <a:gd name="adj" fmla="val 8750"/>
+            </a:avLst>
+          </a:prstGeom>
+          <a:solidFill>
+            <a:srgbClr val="ECE6DA"/>
+          </a:solidFill>
+          <a:ln w="15240">
+            <a:solidFill>
+              <a:srgbClr val="CBD5E1"/>
+            </a:solidFill>
+            <a:prstDash val="solid"/>
+          </a:ln>
+        </p:spPr>
+      </p:sp>
+      <p:sp>
+        <p:nvSpPr>
+          <p:cNvPr id="9" name="Text 7"/>
+          <p:cNvSpPr/>
+          <p:nvPr/>
+        </p:nvSpPr>
+        <p:spPr>
+          <a:xfrm>
+            <a:off x="2898648" y="1554480"/>
+            <a:ext cx="2148840" cy="731520"/>
+          </a:xfrm>
+          <a:prstGeom prst="rect">
+            <a:avLst/>
+          </a:prstGeom>
+          <a:noFill/>
+          <a:ln/>
+        </p:spPr>
+        <p:txBody>
+          <a:bodyPr wrap="square" lIns="38100" tIns="38100" rIns="38100" bIns="38100" rtlCol="0" anchor="ctr"/>
+          <a:lstStyle/>
+          <a:p>
+            <a:pPr algn="ctr" indent="0" marL="0">
+              <a:buNone/>
+            </a:pPr>
+            <a:r>
+              <a:rPr lang="en-US" sz="1400" dirty="0">
+                <a:solidFill>
+                  <a:srgbClr val="1E293B"/>
+                </a:solidFill>
+              </a:rPr>
+              <a:t>down-thin to 1,500</a:t>
+            </a:r>
+            <a:endParaRPr lang="en-US" sz="1400" dirty="0"/>
+          </a:p>
+        </p:txBody>
+      </p:sp>
+      <p:sp>
+        <p:nvSpPr>
+          <p:cNvPr id="10" name="Shape 8"/>
+          <p:cNvSpPr/>
+          <p:nvPr/>
+        </p:nvSpPr>
+        <p:spPr>
+          <a:xfrm>
+            <a:off x="5047488" y="1920240"/>
+            <a:ext cx="201168" cy="0"/>
+          </a:xfrm>
+          <a:prstGeom prst="line">
+            <a:avLst/>
+          </a:prstGeom>
+          <a:noFill/>
+          <a:ln w="20320">
+            <a:solidFill>
+              <a:srgbClr val="6B6256"/>
+            </a:solidFill>
+            <a:prstDash val="solid"/>
+            <a:tailEnd type="triangle"/>
+          </a:ln>
+        </p:spPr>
+      </p:sp>
+      <p:sp>
+        <p:nvSpPr>
+          <p:cNvPr id="11" name="Shape 9"/>
+          <p:cNvSpPr/>
+          <p:nvPr/>
+        </p:nvSpPr>
+        <p:spPr>
+          <a:xfrm>
+            <a:off x="5248656" y="1554480"/>
+            <a:ext cx="2148840" cy="731520"/>
+          </a:xfrm>
+          <a:prstGeom prst="roundRect">
+            <a:avLst>
+              <a:gd name="adj" fmla="val 8750"/>
+            </a:avLst>
+          </a:prstGeom>
+          <a:solidFill>
+            <a:srgbClr val="EDE9FE"/>
+          </a:solidFill>
+          <a:ln w="15240">
+            <a:solidFill>
+              <a:srgbClr val="7C3AED"/>
+            </a:solidFill>
+            <a:prstDash val="solid"/>
+          </a:ln>
+        </p:spPr>
+      </p:sp>
+      <p:sp>
+        <p:nvSpPr>
+          <p:cNvPr id="12" name="Text 10"/>
+          <p:cNvSpPr/>
+          <p:nvPr/>
+        </p:nvSpPr>
+        <p:spPr>
+          <a:xfrm>
+            <a:off x="5248656" y="1554480"/>
+            <a:ext cx="2148840" cy="731520"/>
+          </a:xfrm>
+          <a:prstGeom prst="rect">
+            <a:avLst/>
+          </a:prstGeom>
+          <a:noFill/>
+          <a:ln/>
+        </p:spPr>
+        <p:txBody>
+          <a:bodyPr wrap="square" lIns="38100" tIns="38100" rIns="38100" bIns="38100" rtlCol="0" anchor="ctr"/>
+          <a:lstStyle/>
+          <a:p>
+            <a:pPr algn="ctr" indent="0" marL="0">
+              <a:buNone/>
+            </a:pPr>
+            <a:r>
+              <a:rPr lang="en-US" sz="1400" b="1" dirty="0">
+                <a:solidFill>
+                  <a:srgbClr val="7C3AED"/>
+                </a:solidFill>
+              </a:rPr>
+              <a:t>marker ON if ≥ 2 UMI</a:t>
+            </a:r>
+            <a:endParaRPr lang="en-US" sz="1400" dirty="0"/>
+          </a:p>
+        </p:txBody>
+      </p:sp>
+      <p:sp>
+        <p:nvSpPr>
+          <p:cNvPr id="13" name="Shape 11"/>
+          <p:cNvSpPr/>
+          <p:nvPr/>
+        </p:nvSpPr>
+        <p:spPr>
+          <a:xfrm>
+            <a:off x="7397496" y="1920240"/>
+            <a:ext cx="201168" cy="0"/>
+          </a:xfrm>
+          <a:prstGeom prst="line">
+            <a:avLst/>
+          </a:prstGeom>
+          <a:noFill/>
+          <a:ln w="20320">
+            <a:solidFill>
+              <a:srgbClr val="6B6256"/>
+            </a:solidFill>
+            <a:prstDash val="solid"/>
+            <a:tailEnd type="triangle"/>
+          </a:ln>
+        </p:spPr>
+      </p:sp>
+      <p:sp>
+        <p:nvSpPr>
+          <p:cNvPr id="14" name="Shape 12"/>
+          <p:cNvSpPr/>
+          <p:nvPr/>
+        </p:nvSpPr>
+        <p:spPr>
+          <a:xfrm>
+            <a:off x="7598664" y="1554480"/>
+            <a:ext cx="2148840" cy="731520"/>
+          </a:xfrm>
+          <a:prstGeom prst="roundRect">
+            <a:avLst>
+              <a:gd name="adj" fmla="val 8750"/>
+            </a:avLst>
+          </a:prstGeom>
+          <a:solidFill>
+            <a:srgbClr val="ECE6DA"/>
+          </a:solidFill>
+          <a:ln w="15240">
+            <a:solidFill>
+              <a:srgbClr val="CBD5E1"/>
+            </a:solidFill>
+            <a:prstDash val="solid"/>
+          </a:ln>
+        </p:spPr>
+      </p:sp>
+      <p:sp>
+        <p:nvSpPr>
+          <p:cNvPr id="15" name="Text 13"/>
+          <p:cNvSpPr/>
+          <p:nvPr/>
+        </p:nvSpPr>
+        <p:spPr>
+          <a:xfrm>
+            <a:off x="7598664" y="1554480"/>
+            <a:ext cx="2148840" cy="731520"/>
+          </a:xfrm>
+          <a:prstGeom prst="rect">
+            <a:avLst/>
+          </a:prstGeom>
+          <a:noFill/>
+          <a:ln/>
+        </p:spPr>
+        <p:txBody>
+          <a:bodyPr wrap="square" lIns="38100" tIns="38100" rIns="38100" bIns="38100" rtlCol="0" anchor="ctr"/>
+          <a:lstStyle/>
+          <a:p>
+            <a:pPr algn="ctr" indent="0" marL="0">
+              <a:buNone/>
+            </a:pPr>
+            <a:r>
+              <a:rPr lang="en-US" sz="1400" dirty="0">
+                <a:solidFill>
+                  <a:srgbClr val="1E293B"/>
+                </a:solidFill>
+              </a:rPr>
+              <a:t>classify nucleus</a:t>
+            </a:r>
+            <a:endParaRPr lang="en-US" sz="1400" dirty="0"/>
+          </a:p>
+        </p:txBody>
+      </p:sp>
+      <p:sp>
+        <p:nvSpPr>
+          <p:cNvPr id="16" name="Shape 14"/>
+          <p:cNvSpPr/>
+          <p:nvPr/>
+        </p:nvSpPr>
+        <p:spPr>
+          <a:xfrm>
+            <a:off x="9747504" y="1920240"/>
+            <a:ext cx="201168" cy="0"/>
+          </a:xfrm>
+          <a:prstGeom prst="line">
+            <a:avLst/>
+          </a:prstGeom>
+          <a:noFill/>
+          <a:ln w="20320">
+            <a:solidFill>
+              <a:srgbClr val="6B6256"/>
+            </a:solidFill>
+            <a:prstDash val="solid"/>
+            <a:tailEnd type="triangle"/>
+          </a:ln>
+        </p:spPr>
+      </p:sp>
+      <p:sp>
+        <p:nvSpPr>
+          <p:cNvPr id="17" name="Shape 15"/>
+          <p:cNvSpPr/>
+          <p:nvPr/>
+        </p:nvSpPr>
+        <p:spPr>
+          <a:xfrm>
+            <a:off x="9948672" y="1554480"/>
+            <a:ext cx="2148840" cy="731520"/>
+          </a:xfrm>
+          <a:prstGeom prst="roundRect">
+            <a:avLst>
+              <a:gd name="adj" fmla="val 8750"/>
+            </a:avLst>
+          </a:prstGeom>
+          <a:solidFill>
+            <a:srgbClr val="ECE6DA"/>
+          </a:solidFill>
+          <a:ln w="15240">
+            <a:solidFill>
+              <a:srgbClr val="CBD5E1"/>
+            </a:solidFill>
+            <a:prstDash val="solid"/>
+          </a:ln>
+        </p:spPr>
+      </p:sp>
+      <p:sp>
+        <p:nvSpPr>
+          <p:cNvPr id="18" name="Text 16"/>
+          <p:cNvSpPr/>
+          <p:nvPr/>
+        </p:nvSpPr>
+        <p:spPr>
+          <a:xfrm>
+            <a:off x="9948672" y="1554480"/>
+            <a:ext cx="2148840" cy="731520"/>
+          </a:xfrm>
+          <a:prstGeom prst="rect">
+            <a:avLst/>
+          </a:prstGeom>
+          <a:noFill/>
+          <a:ln/>
+        </p:spPr>
+        <p:txBody>
+          <a:bodyPr wrap="square" lIns="38100" tIns="38100" rIns="38100" bIns="38100" rtlCol="0" anchor="ctr"/>
+          <a:lstStyle/>
+          <a:p>
+            <a:pPr algn="ctr" indent="0" marL="0">
+              <a:buNone/>
+            </a:pPr>
+            <a:r>
+              <a:rPr lang="en-US" sz="1400" dirty="0">
+                <a:solidFill>
+                  <a:srgbClr val="1E293B"/>
+                </a:solidFill>
+              </a:rPr>
+              <a:t>fraction per donor</a:t>
+            </a:r>
+            <a:endParaRPr lang="en-US" sz="1400" dirty="0"/>
+          </a:p>
+        </p:txBody>
+      </p:sp>
+      <p:sp>
+        <p:nvSpPr>
+          <p:cNvPr id="19" name="Shape 17"/>
+          <p:cNvSpPr/>
+          <p:nvPr/>
+        </p:nvSpPr>
+        <p:spPr>
+          <a:xfrm>
+            <a:off x="914400" y="2834640"/>
+            <a:ext cx="2468880" cy="914400"/>
+          </a:xfrm>
+          <a:prstGeom prst="roundRect">
+            <a:avLst>
+              <a:gd name="adj" fmla="val 8000"/>
+            </a:avLst>
+          </a:prstGeom>
+          <a:solidFill>
+            <a:srgbClr val="1D4ED8"/>
           </a:solidFill>
           <a:ln/>
           <a:effectLst>
@@ -10174,43 +12637,439 @@
       </p:sp>
       <p:sp>
         <p:nvSpPr>
-          <p:cNvPr id="9" name="Text 6"/>
-          <p:cNvSpPr/>
-          <p:nvPr/>
-        </p:nvSpPr>
-        <p:spPr>
-          <a:xfrm>
-            <a:off x="8778240" y="4937760"/>
-            <a:ext cx="3063240" cy="777240"/>
-          </a:xfrm>
-          <a:prstGeom prst="rect">
-            <a:avLst/>
-          </a:prstGeom>
-          <a:noFill/>
-          <a:ln/>
-        </p:spPr>
-        <p:txBody>
-          <a:bodyPr wrap="square" rtlCol="0" anchor="ctr"/>
+          <p:cNvPr id="20" name="Text 18"/>
+          <p:cNvSpPr/>
+          <p:nvPr/>
+        </p:nvSpPr>
+        <p:spPr>
+          <a:xfrm>
+            <a:off x="914400" y="2834640"/>
+            <a:ext cx="2468880" cy="914400"/>
+          </a:xfrm>
+          <a:prstGeom prst="rect">
+            <a:avLst/>
+          </a:prstGeom>
+          <a:noFill/>
+          <a:ln/>
+        </p:spPr>
+        <p:txBody>
+          <a:bodyPr wrap="square" lIns="25400" tIns="25400" rIns="25400" bIns="25400" rtlCol="0" anchor="ctr"/>
+          <a:lstStyle/>
+          <a:p>
+            <a:pPr algn="ctr" indent="0" marL="0">
+              <a:buNone/>
+            </a:pPr>
+            <a:r>
+              <a:rPr lang="en-US" sz="1450" b="1" dirty="0">
+                <a:solidFill>
+                  <a:srgbClr val="FFFFFF"/>
+                </a:solidFill>
+              </a:rPr>
+              <a:t>PC-anchor</a:t>
+            </a:r>
+            <a:endParaRPr lang="en-US" sz="1450" dirty="0"/>
+          </a:p>
+          <a:p>
+            <a:pPr algn="ctr" indent="0" marL="0">
+              <a:buNone/>
+            </a:pPr>
+            <a:r>
+              <a:rPr lang="en-US" sz="1450" b="1" dirty="0">
+                <a:solidFill>
+                  <a:srgbClr val="FFFFFF"/>
+                </a:solidFill>
+              </a:rPr>
+              <a:t>PC on / PP off</a:t>
+            </a:r>
+            <a:endParaRPr lang="en-US" sz="1450" dirty="0"/>
+          </a:p>
+        </p:txBody>
+      </p:sp>
+      <p:sp>
+        <p:nvSpPr>
+          <p:cNvPr id="21" name="Shape 19"/>
+          <p:cNvSpPr/>
+          <p:nvPr/>
+        </p:nvSpPr>
+        <p:spPr>
+          <a:xfrm>
+            <a:off x="3657600" y="2834640"/>
+            <a:ext cx="2468880" cy="914400"/>
+          </a:xfrm>
+          <a:prstGeom prst="roundRect">
+            <a:avLst>
+              <a:gd name="adj" fmla="val 8000"/>
+            </a:avLst>
+          </a:prstGeom>
+          <a:solidFill>
+            <a:srgbClr val="EA580C"/>
+          </a:solidFill>
+          <a:ln/>
+          <a:effectLst>
+            <a:outerShdw sx="100000" sy="100000" kx="0" ky="0" algn="bl" rotWithShape="0" blurRad="88900" dist="38100" dir="5400000">
+              <a:srgbClr val="000000">
+                <a:alpha val="12000"/>
+              </a:srgbClr>
+            </a:outerShdw>
+          </a:effectLst>
+        </p:spPr>
+      </p:sp>
+      <p:sp>
+        <p:nvSpPr>
+          <p:cNvPr id="22" name="Text 20"/>
+          <p:cNvSpPr/>
+          <p:nvPr/>
+        </p:nvSpPr>
+        <p:spPr>
+          <a:xfrm>
+            <a:off x="3657600" y="2834640"/>
+            <a:ext cx="2468880" cy="914400"/>
+          </a:xfrm>
+          <a:prstGeom prst="rect">
+            <a:avLst/>
+          </a:prstGeom>
+          <a:noFill/>
+          <a:ln/>
+        </p:spPr>
+        <p:txBody>
+          <a:bodyPr wrap="square" lIns="25400" tIns="25400" rIns="25400" bIns="25400" rtlCol="0" anchor="ctr"/>
+          <a:lstStyle/>
+          <a:p>
+            <a:pPr algn="ctr" indent="0" marL="0">
+              <a:buNone/>
+            </a:pPr>
+            <a:r>
+              <a:rPr lang="en-US" sz="1450" b="1" dirty="0">
+                <a:solidFill>
+                  <a:srgbClr val="FFFFFF"/>
+                </a:solidFill>
+              </a:rPr>
+              <a:t>PP-anchor</a:t>
+            </a:r>
+            <a:endParaRPr lang="en-US" sz="1450" dirty="0"/>
+          </a:p>
+          <a:p>
+            <a:pPr algn="ctr" indent="0" marL="0">
+              <a:buNone/>
+            </a:pPr>
+            <a:r>
+              <a:rPr lang="en-US" sz="1450" b="1" dirty="0">
+                <a:solidFill>
+                  <a:srgbClr val="FFFFFF"/>
+                </a:solidFill>
+              </a:rPr>
+              <a:t>PP on / PC off</a:t>
+            </a:r>
+            <a:endParaRPr lang="en-US" sz="1450" dirty="0"/>
+          </a:p>
+        </p:txBody>
+      </p:sp>
+      <p:sp>
+        <p:nvSpPr>
+          <p:cNvPr id="23" name="Shape 21"/>
+          <p:cNvSpPr/>
+          <p:nvPr/>
+        </p:nvSpPr>
+        <p:spPr>
+          <a:xfrm>
+            <a:off x="6400800" y="2834640"/>
+            <a:ext cx="2468880" cy="914400"/>
+          </a:xfrm>
+          <a:prstGeom prst="roundRect">
+            <a:avLst>
+              <a:gd name="adj" fmla="val 8000"/>
+            </a:avLst>
+          </a:prstGeom>
+          <a:solidFill>
+            <a:srgbClr val="7C3AED"/>
+          </a:solidFill>
+          <a:ln/>
+          <a:effectLst>
+            <a:outerShdw sx="100000" sy="100000" kx="0" ky="0" algn="bl" rotWithShape="0" blurRad="88900" dist="38100" dir="5400000">
+              <a:srgbClr val="000000">
+                <a:alpha val="12000"/>
+              </a:srgbClr>
+            </a:outerShdw>
+          </a:effectLst>
+        </p:spPr>
+      </p:sp>
+      <p:sp>
+        <p:nvSpPr>
+          <p:cNvPr id="24" name="Text 22"/>
+          <p:cNvSpPr/>
+          <p:nvPr/>
+        </p:nvSpPr>
+        <p:spPr>
+          <a:xfrm>
+            <a:off x="6400800" y="2834640"/>
+            <a:ext cx="2468880" cy="914400"/>
+          </a:xfrm>
+          <a:prstGeom prst="rect">
+            <a:avLst/>
+          </a:prstGeom>
+          <a:noFill/>
+          <a:ln/>
+        </p:spPr>
+        <p:txBody>
+          <a:bodyPr wrap="square" lIns="25400" tIns="25400" rIns="25400" bIns="25400" rtlCol="0" anchor="ctr"/>
+          <a:lstStyle/>
+          <a:p>
+            <a:pPr algn="ctr" indent="0" marL="0">
+              <a:buNone/>
+            </a:pPr>
+            <a:r>
+              <a:rPr lang="en-US" sz="1450" b="1" dirty="0">
+                <a:solidFill>
+                  <a:srgbClr val="FFFFFF"/>
+                </a:solidFill>
+              </a:rPr>
+              <a:t>Dual</a:t>
+            </a:r>
+            <a:endParaRPr lang="en-US" sz="1450" dirty="0"/>
+          </a:p>
+          <a:p>
+            <a:pPr algn="ctr" indent="0" marL="0">
+              <a:buNone/>
+            </a:pPr>
+            <a:r>
+              <a:rPr lang="en-US" sz="1450" b="1" dirty="0">
+                <a:solidFill>
+                  <a:srgbClr val="FFFFFF"/>
+                </a:solidFill>
+              </a:rPr>
+              <a:t>both programs on</a:t>
+            </a:r>
+            <a:endParaRPr lang="en-US" sz="1450" dirty="0"/>
+          </a:p>
+        </p:txBody>
+      </p:sp>
+      <p:sp>
+        <p:nvSpPr>
+          <p:cNvPr id="25" name="Shape 23"/>
+          <p:cNvSpPr/>
+          <p:nvPr/>
+        </p:nvSpPr>
+        <p:spPr>
+          <a:xfrm>
+            <a:off x="9144000" y="2834640"/>
+            <a:ext cx="2103120" cy="914400"/>
+          </a:xfrm>
+          <a:prstGeom prst="roundRect">
+            <a:avLst>
+              <a:gd name="adj" fmla="val 8000"/>
+            </a:avLst>
+          </a:prstGeom>
+          <a:solidFill>
+            <a:srgbClr val="9CA3AF"/>
+          </a:solidFill>
+          <a:ln/>
+          <a:effectLst>
+            <a:outerShdw sx="100000" sy="100000" kx="0" ky="0" algn="bl" rotWithShape="0" blurRad="88900" dist="38100" dir="5400000">
+              <a:srgbClr val="000000">
+                <a:alpha val="12000"/>
+              </a:srgbClr>
+            </a:outerShdw>
+          </a:effectLst>
+        </p:spPr>
+      </p:sp>
+      <p:sp>
+        <p:nvSpPr>
+          <p:cNvPr id="26" name="Text 24"/>
+          <p:cNvSpPr/>
+          <p:nvPr/>
+        </p:nvSpPr>
+        <p:spPr>
+          <a:xfrm>
+            <a:off x="9144000" y="2834640"/>
+            <a:ext cx="2103120" cy="914400"/>
+          </a:xfrm>
+          <a:prstGeom prst="rect">
+            <a:avLst/>
+          </a:prstGeom>
+          <a:noFill/>
+          <a:ln/>
+        </p:spPr>
+        <p:txBody>
+          <a:bodyPr wrap="square" lIns="25400" tIns="25400" rIns="25400" bIns="25400" rtlCol="0" anchor="ctr"/>
+          <a:lstStyle/>
+          <a:p>
+            <a:pPr algn="ctr" indent="0" marL="0">
+              <a:buNone/>
+            </a:pPr>
+            <a:r>
+              <a:rPr lang="en-US" sz="1450" b="1" dirty="0">
+                <a:solidFill>
+                  <a:srgbClr val="1E293B"/>
+                </a:solidFill>
+              </a:rPr>
+              <a:t>Null</a:t>
+            </a:r>
+            <a:endParaRPr lang="en-US" sz="1450" dirty="0"/>
+          </a:p>
+          <a:p>
+            <a:pPr algn="ctr" indent="0" marL="0">
+              <a:buNone/>
+            </a:pPr>
+            <a:r>
+              <a:rPr lang="en-US" sz="1450" b="1" dirty="0">
+                <a:solidFill>
+                  <a:srgbClr val="1E293B"/>
+                </a:solidFill>
+              </a:rPr>
+              <a:t>neither on</a:t>
+            </a:r>
+            <a:endParaRPr lang="en-US" sz="1450" dirty="0"/>
+          </a:p>
+        </p:txBody>
+      </p:sp>
+      <p:sp>
+        <p:nvSpPr>
+          <p:cNvPr id="27" name="Text 25"/>
+          <p:cNvSpPr/>
+          <p:nvPr/>
+        </p:nvSpPr>
+        <p:spPr>
+          <a:xfrm>
+            <a:off x="914400" y="4114800"/>
+            <a:ext cx="10607040" cy="1737360"/>
+          </a:xfrm>
+          <a:prstGeom prst="rect">
+            <a:avLst/>
+          </a:prstGeom>
+          <a:noFill/>
+          <a:ln/>
+        </p:spPr>
+        <p:txBody>
+          <a:bodyPr wrap="square" rtlCol="0" anchor="t"/>
           <a:lstStyle/>
           <a:p>
             <a:pPr algn="l" indent="0" marL="0">
-              <a:buNone/>
-            </a:pPr>
-            <a:r>
-              <a:rPr lang="en-US" sz="1500" b="1" dirty="0">
-                <a:solidFill>
-                  <a:srgbClr val="FFFFFF"/>
-                </a:solidFill>
-              </a:rPr>
-              <a:t>Anchor fractions do not support large biopsy-axis de-zonation.</a:t>
-            </a:r>
-            <a:endParaRPr lang="en-US" sz="1500" dirty="0"/>
-          </a:p>
-        </p:txBody>
-      </p:sp>
-      <p:sp>
-        <p:nvSpPr>
-          <p:cNvPr id="10" name="Text 7"/>
+              <a:spcAft>
+                <a:spcPts val="700"/>
+              </a:spcAft>
+              <a:buNone/>
+            </a:pPr>
+            <a:r>
+              <a:rPr lang="en-US" sz="1600" b="1" dirty="0">
+                <a:solidFill>
+                  <a:srgbClr val="1E293B"/>
+                </a:solidFill>
+              </a:rPr>
+              <a:t>Why raw counts: </a:t>
+            </a:r>
+            <a:pPr algn="l" indent="0" marL="0">
+              <a:spcAft>
+                <a:spcPts val="700"/>
+              </a:spcAft>
+              <a:buNone/>
+            </a:pPr>
+            <a:r>
+              <a:rPr lang="en-US" sz="1600" dirty="0">
+                <a:solidFill>
+                  <a:srgbClr val="1E293B"/>
+                </a:solidFill>
+              </a:rPr>
+              <a:t>a single KRT19 or GLUL molecule may be ambient — absolute detection matters, so SCT-normalized values are the wrong object.
+</a:t>
+            </a:r>
+            <a:endParaRPr lang="en-US" sz="1600" dirty="0"/>
+          </a:p>
+          <a:p>
+            <a:pPr algn="l" indent="0" marL="0">
+              <a:spcAft>
+                <a:spcPts val="700"/>
+              </a:spcAft>
+              <a:buNone/>
+            </a:pPr>
+            <a:r>
+              <a:rPr lang="en-US" sz="1600" b="1" dirty="0">
+                <a:solidFill>
+                  <a:srgbClr val="7C3AED"/>
+                </a:solidFill>
+              </a:rPr>
+              <a:t>≥2-UMI threshold </a:t>
+            </a:r>
+            <a:pPr algn="l" indent="0" marL="0">
+              <a:spcAft>
+                <a:spcPts val="700"/>
+              </a:spcAft>
+              <a:buNone/>
+            </a:pPr>
+            <a:r>
+              <a:rPr lang="en-US" sz="1600" dirty="0">
+                <a:solidFill>
+                  <a:srgbClr val="1E293B"/>
+                </a:solidFill>
+              </a:rPr>
+              <a:t>suppresses single-molecule ambient.    </a:t>
+            </a:r>
+            <a:pPr algn="l" indent="0" marL="0">
+              <a:spcAft>
+                <a:spcPts val="700"/>
+              </a:spcAft>
+              <a:buNone/>
+            </a:pPr>
+            <a:r>
+              <a:rPr lang="en-US" sz="1600" b="1" dirty="0">
+                <a:solidFill>
+                  <a:srgbClr val="0D9488"/>
+                </a:solidFill>
+              </a:rPr>
+              <a:t>Unit = donor (~47), never the nucleus </a:t>
+            </a:r>
+            <a:pPr algn="l" indent="0" marL="0">
+              <a:spcAft>
+                <a:spcPts val="700"/>
+              </a:spcAft>
+              <a:buNone/>
+            </a:pPr>
+            <a:r>
+              <a:rPr lang="en-US" sz="1600" dirty="0">
+                <a:solidFill>
+                  <a:srgbClr val="1E293B"/>
+                </a:solidFill>
+              </a:rPr>
+              <a:t>→ no pseudoreplication.
+</a:t>
+            </a:r>
+            <a:endParaRPr lang="en-US" sz="1600" dirty="0"/>
+          </a:p>
+          <a:p>
+            <a:pPr algn="l" indent="0" marL="0">
+              <a:spcAft>
+                <a:spcPts val="700"/>
+              </a:spcAft>
+              <a:buNone/>
+            </a:pPr>
+            <a:r>
+              <a:rPr lang="en-US" sz="1600" b="1" dirty="0">
+                <a:solidFill>
+                  <a:srgbClr val="1E293B"/>
+                </a:solidFill>
+              </a:rPr>
+              <a:t>Robust across the sensitivity grid </a:t>
+            </a:r>
+            <a:pPr algn="l" indent="0" marL="0">
+              <a:spcAft>
+                <a:spcPts val="700"/>
+              </a:spcAft>
+              <a:buNone/>
+            </a:pPr>
+            <a:r>
+              <a:rPr lang="en-US" sz="1600" dirty="0">
+                <a:solidFill>
+                  <a:srgbClr val="1E293B"/>
+                </a:solidFill>
+              </a:rPr>
+              <a:t>(anchor genes, periportal rule, ALDOB in/out, 1 vs 2 UMI).</a:t>
+            </a:r>
+            <a:endParaRPr lang="en-US" sz="1600" dirty="0"/>
+          </a:p>
+        </p:txBody>
+      </p:sp>
+      <p:sp>
+        <p:nvSpPr>
+          <p:cNvPr id="28" name="Text 26"/>
           <p:cNvSpPr/>
           <p:nvPr/>
         </p:nvSpPr>
@@ -10246,7 +13105,7 @@
       </p:sp>
       <p:sp>
         <p:nvSpPr>
-          <p:cNvPr id="11" name="Text 8"/>
+          <p:cNvPr id="29" name="Text 27"/>
           <p:cNvSpPr/>
           <p:nvPr/>
         </p:nvSpPr>
@@ -10362,7 +13221,7 @@
                   <a:srgbClr val="C0562B"/>
                 </a:solidFill>
               </a:rPr>
-              <a:t>GENOME-WIDE</a:t>
+              <a:t>THE RESULT</a:t>
             </a:r>
             <a:endParaRPr lang="en-US" sz="1300" dirty="0"/>
           </a:p>
@@ -10401,7 +13260,7 @@
                 <a:ea typeface="Georgia" pitchFamily="34" charset="-122"/>
                 <a:cs typeface="Georgia" pitchFamily="34" charset="-120"/>
               </a:rPr>
-              <a:t>One signal: biliary markers</a:t>
+              <a:t>Matched biopsies stay zonated</a:t>
             </a:r>
             <a:endParaRPr lang="en-US" sz="2800" dirty="0"/>
           </a:p>
@@ -10409,7 +13268,7 @@
       </p:sp>
       <p:pic>
         <p:nvPicPr>
-          <p:cNvPr id="5" name="Image 0" descr="D:\CS\Genomics\Hackathon\presentation/assets/fig_volcano.png">    </p:cNvPr>
+          <p:cNvPr id="5" name="Image 0" descr="D:\CS\Genomics\Hackathon\presentation/assets/fig_result3.png">    </p:cNvPr>
           <p:cNvPicPr>
             <a:picLocks noChangeAspect="1"/>
           </p:cNvPicPr>
@@ -10422,8 +13281,8 @@
         </p:blipFill>
         <p:spPr>
           <a:xfrm>
-            <a:off x="274320" y="1371600"/>
-            <a:ext cx="7955280" cy="4114800"/>
+            <a:off x="182880" y="1417320"/>
+            <a:ext cx="8321040" cy="3749040"/>
           </a:xfrm>
           <a:prstGeom prst="rect">
             <a:avLst/>
@@ -10438,8 +13297,8 @@
         </p:nvSpPr>
         <p:spPr>
           <a:xfrm>
-            <a:off x="274320" y="5532120"/>
-            <a:ext cx="7955280" cy="365760"/>
+            <a:off x="182880" y="5257800"/>
+            <a:ext cx="8321040" cy="365760"/>
           </a:xfrm>
           <a:prstGeom prst="rect">
             <a:avLst/>
@@ -10460,7 +13319,7 @@
                   <a:srgbClr val="6B6256"/>
                 </a:solidFill>
               </a:rPr>
-              <a:t>Figure 3.  Genome-wide pseudobulk differential expression, cirrhotic F4 vs F1 (edgeR).</a:t>
+              <a:t>Figure 2.  Pericentral and periportal depletion and dual co-expression across matched biopsy F1–F4 (donor=point, value-labelled; F0 n=2 in backup).</a:t>
             </a:r>
             <a:endParaRPr lang="en-US" sz="1200" dirty="0"/>
           </a:p>
@@ -10474,8 +13333,8 @@
         </p:nvSpPr>
         <p:spPr>
           <a:xfrm>
-            <a:off x="8412480" y="1645920"/>
-            <a:ext cx="3474720" cy="3108960"/>
+            <a:off x="8641080" y="1508760"/>
+            <a:ext cx="3337560" cy="3200400"/>
           </a:xfrm>
           <a:prstGeom prst="rect">
             <a:avLst/>
@@ -10488,74 +13347,95 @@
           <a:lstStyle/>
           <a:p>
             <a:pPr algn="l" indent="0" marL="0">
-              <a:spcAft>
-                <a:spcPts val="800"/>
-              </a:spcAft>
-              <a:buNone/>
-            </a:pPr>
-            <a:r>
-              <a:rPr lang="en-US" sz="1600" dirty="0">
+              <a:buNone/>
+            </a:pPr>
+            <a:r>
+              <a:rPr lang="en-US" sz="1500" b="1" dirty="0">
+                <a:solidFill>
+                  <a:srgbClr val="1F3A3D"/>
+                </a:solidFill>
+              </a:rPr>
+              <a:t>The other two mechanisms (F1→F4 donor-median):
+</a:t>
+            </a:r>
+            <a:endParaRPr lang="en-US" sz="1500" dirty="0"/>
+          </a:p>
+          <a:p>
+            <a:pPr algn="l" indent="0" marL="0">
+              <a:buNone/>
+            </a:pPr>
+            <a:r>
+              <a:rPr lang="en-US" sz="1500" b="1" dirty="0">
+                <a:solidFill>
+                  <a:srgbClr val="475569"/>
+                </a:solidFill>
+              </a:rPr>
+              <a:t>Null (turn-off): </a:t>
+            </a:r>
+            <a:pPr algn="l" indent="0" marL="0">
+              <a:buNone/>
+            </a:pPr>
+            <a:r>
+              <a:rPr lang="en-US" sz="1500" dirty="0">
                 <a:solidFill>
                   <a:srgbClr val="1E293B"/>
                 </a:solidFill>
               </a:rPr>
-              <a:t>Pseudobulk per donor; edgeR TMM + NB quasi-likelihood.
+              <a:t>44 / 36 / 39 / 39% — stable.
 </a:t>
             </a:r>
-            <a:endParaRPr lang="en-US" sz="1600" dirty="0"/>
+            <a:endParaRPr lang="en-US" sz="1500" dirty="0"/>
           </a:p>
           <a:p>
             <a:pPr algn="l" indent="0" marL="0">
-              <a:spcAft>
-                <a:spcPts val="800"/>
-              </a:spcAft>
-              <a:buNone/>
-            </a:pPr>
-            <a:r>
-              <a:rPr lang="en-US" sz="1600" b="1" dirty="0">
+              <a:buNone/>
+            </a:pPr>
+            <a:r>
+              <a:rPr lang="en-US" sz="1500" b="1" dirty="0">
+                <a:solidFill>
+                  <a:srgbClr val="EA580C"/>
+                </a:solidFill>
+              </a:rPr>
+              <a:t>PP : PC ratio: </a:t>
+            </a:r>
+            <a:pPr algn="l" indent="0" marL="0">
+              <a:buNone/>
+            </a:pPr>
+            <a:r>
+              <a:rPr lang="en-US" sz="1500" dirty="0">
                 <a:solidFill>
                   <a:srgbClr val="1E293B"/>
                 </a:solidFill>
               </a:rPr>
-              <a:t>64 genes FDR&lt;0.05 — mostly biliary/ductular.
+              <a:t>1.16 / 1.01 / 1.10 / 1.18 — flat.
 </a:t>
             </a:r>
-            <a:endParaRPr lang="en-US" sz="1600" dirty="0"/>
+            <a:endParaRPr lang="en-US" sz="1500" dirty="0"/>
           </a:p>
           <a:p>
             <a:pPr algn="l" indent="0" marL="0">
-              <a:spcAft>
-                <a:spcPts val="800"/>
-              </a:spcAft>
-              <a:buNone/>
-            </a:pPr>
-            <a:r>
-              <a:rPr lang="en-US" sz="1600" dirty="0">
+              <a:buNone/>
+            </a:pPr>
+            <a:r>
+              <a:rPr lang="en-US" sz="1500" b="1" dirty="0">
                 <a:solidFill>
                   <a:srgbClr val="1D4ED8"/>
                 </a:solidFill>
               </a:rPr>
-              <a:t>Zonation genes not significant (GLUL FDR 0.80).
-</a:t>
-            </a:r>
-            <a:endParaRPr lang="en-US" sz="1600" dirty="0"/>
-          </a:p>
-          <a:p>
+              <a:t>Bound: </a:t>
+            </a:r>
             <a:pPr algn="l" indent="0" marL="0">
-              <a:spcAft>
-                <a:spcPts val="800"/>
-              </a:spcAft>
-              <a:buNone/>
-            </a:pPr>
-            <a:r>
-              <a:rPr lang="en-US" sz="1600" i="1" dirty="0">
-                <a:solidFill>
-                  <a:srgbClr val="7C3AED"/>
-                </a:solidFill>
-              </a:rPr>
-              <a:t>“No large single-gene program outside the biliary burden.”</a:t>
-            </a:r>
-            <a:endParaRPr lang="en-US" sz="1600" dirty="0"/>
+              <a:buNone/>
+            </a:pPr>
+            <a:r>
+              <a:rPr lang="en-US" sz="1500" i="1" dirty="0">
+                <a:solidFill>
+                  <a:srgbClr val="6B6256"/>
+                </a:solidFill>
+              </a:rPr>
+              <a:t>a large shift (~20 pp) is excluded; a subtle drift ≤10 pp is not (F4 n=4).</a:t>
+            </a:r>
+            <a:endParaRPr lang="en-US" sz="1500" dirty="0"/>
           </a:p>
         </p:txBody>
       </p:sp>
@@ -10567,18 +13447,25 @@
         </p:nvSpPr>
         <p:spPr>
           <a:xfrm>
-            <a:off x="8412480" y="5029200"/>
-            <a:ext cx="3474720" cy="731520"/>
+            <a:off x="8641080" y="4892040"/>
+            <a:ext cx="3337560" cy="868680"/>
           </a:xfrm>
           <a:prstGeom prst="roundRect">
             <a:avLst>
-              <a:gd name="adj" fmla="val 7500"/>
+              <a:gd name="adj" fmla="val 8421"/>
             </a:avLst>
           </a:prstGeom>
           <a:solidFill>
-            <a:srgbClr val="ECE6DA"/>
+            <a:srgbClr val="1F3A3D"/>
           </a:solidFill>
           <a:ln/>
+          <a:effectLst>
+            <a:outerShdw sx="100000" sy="100000" kx="0" ky="0" algn="bl" rotWithShape="0" blurRad="88900" dist="38100" dir="5400000">
+              <a:srgbClr val="000000">
+                <a:alpha val="12000"/>
+              </a:srgbClr>
+            </a:outerShdw>
+          </a:effectLst>
         </p:spPr>
       </p:sp>
       <p:sp>
@@ -10589,8 +13476,8 @@
         </p:nvSpPr>
         <p:spPr>
           <a:xfrm>
-            <a:off x="8549640" y="5074920"/>
-            <a:ext cx="3200400" cy="640080"/>
+            <a:off x="8778240" y="4937760"/>
+            <a:ext cx="3063240" cy="777240"/>
           </a:xfrm>
           <a:prstGeom prst="rect">
             <a:avLst/>
@@ -10606,14 +13493,14 @@
               <a:buNone/>
             </a:pPr>
             <a:r>
-              <a:rPr lang="en-US" sz="1300" i="1" dirty="0">
-                <a:solidFill>
-                  <a:srgbClr val="6B6256"/>
-                </a:solidFill>
-              </a:rPr>
-              <a:t>Caveat: weak coordinated pathways still need gene-set testing.</a:t>
-            </a:r>
-            <a:endParaRPr lang="en-US" sz="1300" dirty="0"/>
+              <a:rPr lang="en-US" sz="1500" b="1" dirty="0">
+                <a:solidFill>
+                  <a:srgbClr val="FFFFFF"/>
+                </a:solidFill>
+              </a:rPr>
+              <a:t>Anchor fractions do not support large biopsy-axis de-zonation.</a:t>
+            </a:r>
+            <a:endParaRPr lang="en-US" sz="1500" dirty="0"/>
           </a:p>
         </p:txBody>
       </p:sp>

--- a/presentation/MASLD_zonation.pptx
+++ b/presentation/MASLD_zonation.pptx
@@ -26,9 +26,10 @@
     <p:sldId id="274" r:id="rId20"/>
     <p:sldId id="275" r:id="rId21"/>
     <p:sldId id="276" r:id="rId22"/>
+    <p:sldId id="277" r:id="rId23"/>
   </p:sldIdLst>
   <p:notesMasterIdLst>
-    <p:notesMasterId r:id="rId23"/>
+    <p:notesMasterId r:id="rId24"/>
   </p:notesMasterIdLst>
   <p:sldSz cx="12192000" cy="6858000"/>
   <p:notesSz cx="6858000" cy="12192000"/>
@@ -610,7 +611,7 @@
           <a:p>
             <a:r>
               <a:rPr lang="en-US" dirty="0"/>
-              <a:t>Pseudobulk per donor — donors, not cells, are the replicates. This is an independent count-based check (zonation genes flat, GLUL FDR 0.80) plus a discovery layer: only 64 of ~21,000 genes are significant, and they are biliary/ductular markers, not a broad program. Careful wording: no large single-GENE program outside the biliary burden — gene-set testing is still owed for weak coordinated pathways.</a:t>
+              <a:t>Show the full extent of the confounder work. Top four are the structural confounds that make the original full-trajectory comparison uninterpretable (source, stress, batch, lobe). The remaining six are within-biopsy checks that our preserved-zonation null is not an artifact — depth, ambient RNA, cholangiocyte mis-annotation, ploidy, the depth-match discard, and clinical covariates. Every one was tested in counts at the donor level; none manufactures the result. Batch at the single-experiment-label level is perfectly confounded and we flag it as untestable rather than absent.</a:t>
             </a:r>
             <a:endParaRPr lang="en-US" dirty="0"/>
           </a:p>
@@ -698,7 +699,7 @@
           <a:p>
             <a:r>
               <a:rPr lang="en-US" dirty="0"/>
-              <a:t>Distinguish evidence levels. Strong: the genes are 5-78x more abundant in cholangiocytes and per-cell hepatocyte co-expression is ~0.4%. Suggestive: decontX halves the hits and drops SOX4/SOX9 — supports an ambient contribution but is not proof. Open: EPCAM/SPINT2/B3GNT3 survive. So the dominant evidence points to composition/ambient RNA, but a rare intrinsic state is not excluded; CXCL10 is set aside as a candidate real inflammatory signal.</a:t>
+              <a:t>Pseudobulk per donor — donors, not cells, are the replicates. This is an independent count-based check (zonation genes flat, GLUL FDR 0.80) plus a discovery layer: only 64 of ~21,000 genes are significant, and they are biliary/ductular markers, not a broad program. Careful wording: no large single-GENE program outside the biliary burden — gene-set testing is still owed for weak coordinated pathways.</a:t>
             </a:r>
             <a:endParaRPr lang="en-US" dirty="0"/>
           </a:p>
@@ -786,7 +787,7 @@
           <a:p>
             <a:r>
               <a:rPr lang="en-US" dirty="0"/>
-              <a:t>Close on the methodological lesson: in single-cell disease atlases, acquisition matching can dominate apparent disease trajectories. Bottom line, narrow and honest: the snRNA-seq transcriptomic evidence for progressive de-zonation does not survive matched-source re-analysis; imaging/protein/organoid evidence is untouched; the biliary burden is most consistent with composition/ambient RNA, a rare intrinsic state not excluded.</a:t>
+              <a:t>Distinguish evidence levels. Strong: the genes are 5-78x more abundant in cholangiocytes and per-cell hepatocyte co-expression is ~0.4%. Suggestive: decontX halves the hits and drops SOX4/SOX9 — supports an ambient contribution but is not proof. Open: EPCAM/SPINT2/B3GNT3 survive. So the dominant evidence points to composition/ambient RNA, but a rare intrinsic state is not excluded; CXCL10 is set aside as a candidate real inflammatory signal.</a:t>
             </a:r>
             <a:endParaRPr lang="en-US" dirty="0"/>
           </a:p>
@@ -874,7 +875,7 @@
           <a:p>
             <a:r>
               <a:rPr lang="en-US" dirty="0"/>
-              <a:t/>
+              <a:t>Close on the methodological lesson: in single-cell disease atlases, acquisition matching can dominate apparent disease trajectories. Bottom line, narrow and honest: the snRNA-seq transcriptomic evidence for progressive de-zonation does not survive matched-source re-analysis; imaging/protein/organoid evidence is untouched; the biliary burden is most consistent with composition/ambient RNA, a rare intrinsic state not excluded.</a:t>
             </a:r>
             <a:endParaRPr lang="en-US" dirty="0"/>
           </a:p>
@@ -1690,6 +1691,94 @@
             <a:fld id="{F7021451-1387-4CA6-816F-3879F97B5CBC}" type="slidenum">
               <a:rPr lang="en-US"/>
               <a:t>21</a:t>
+            </a:fld>
+            <a:endParaRPr lang="en-US"/>
+          </a:p>
+        </p:txBody>
+      </p:sp>
+    </p:spTree>
+    <p:extLst>
+      <p:ext uri="{BB962C8B-B14F-4D97-AF65-F5344CB8AC3E}">
+        <p14:creationId xmlns:p14="http://schemas.microsoft.com/office/powerpoint/2010/main" val="1024086991"/>
+      </p:ext>
+    </p:extLst>
+  </p:cSld>
+  <p:clrMapOvr>
+    <a:masterClrMapping/>
+  </p:clrMapOvr>
+</p:notes>
+</file>
+
+<file path=ppt/notesSlides/notesSlide22.xml><?xml version="1.0" encoding="utf-8"?>
+<p:notes xmlns:a="http://schemas.openxmlformats.org/drawingml/2006/main" xmlns:r="http://schemas.openxmlformats.org/officeDocument/2006/relationships" xmlns:p="http://schemas.openxmlformats.org/presentationml/2006/main">
+  <p:cSld>
+    <p:spTree>
+      <p:nvGrpSpPr>
+        <p:cNvPr id="1" name=""/>
+        <p:cNvGrpSpPr/>
+        <p:nvPr/>
+      </p:nvGrpSpPr>
+      <p:grpSpPr>
+        <a:xfrm>
+          <a:off x="0" y="0"/>
+          <a:ext cx="0" cy="0"/>
+          <a:chOff x="0" y="0"/>
+          <a:chExt cx="0" cy="0"/>
+        </a:xfrm>
+      </p:grpSpPr>
+      <p:sp>
+        <p:nvSpPr>
+          <p:cNvPr id="2" name="Slide Image Placeholder 1"/>
+          <p:cNvSpPr>
+            <a:spLocks noGrp="1" noRot="1" noChangeAspect="1"/>
+          </p:cNvSpPr>
+          <p:nvPr>
+            <p:ph type="sldImg"/>
+          </p:nvPr>
+        </p:nvSpPr>
+        <p:spPr/>
+      </p:sp>
+      <p:sp>
+        <p:nvSpPr>
+          <p:cNvPr id="3" name="Notes Placeholder 2"/>
+          <p:cNvSpPr>
+            <a:spLocks noGrp="1"/>
+          </p:cNvSpPr>
+          <p:nvPr>
+            <p:ph type="body" idx="1"/>
+          </p:nvPr>
+        </p:nvSpPr>
+        <p:spPr/>
+        <p:txBody>
+          <a:bodyPr/>
+          <a:lstStyle/>
+          <a:p>
+            <a:r>
+              <a:rPr lang="en-US" dirty="0"/>
+              <a:t/>
+            </a:r>
+            <a:endParaRPr lang="en-US" dirty="0"/>
+          </a:p>
+        </p:txBody>
+      </p:sp>
+      <p:sp>
+        <p:nvSpPr>
+          <p:cNvPr id="4" name="Slide Number Placeholder 3"/>
+          <p:cNvSpPr>
+            <a:spLocks noGrp="1"/>
+          </p:cNvSpPr>
+          <p:nvPr>
+            <p:ph type="sldNum" sz="quarter" idx="10"/>
+          </p:nvPr>
+        </p:nvSpPr>
+        <p:spPr/>
+        <p:txBody>
+          <a:bodyPr/>
+          <a:lstStyle/>
+          <a:p>
+            <a:fld id="{F7021451-1387-4CA6-816F-3879F97B5CBC}" type="slidenum">
+              <a:rPr lang="en-US"/>
+              <a:t>22</a:t>
             </a:fld>
             <a:endParaRPr lang="en-US"/>
           </a:p>
@@ -2637,7 +2726,7 @@
     <p:bg>
       <p:bgPr>
         <a:solidFill>
-          <a:srgbClr val="14292C"/>
+          <a:srgbClr val="16242B"/>
         </a:solidFill>
       </p:bgPr>
     </p:bg>
@@ -2664,20 +2753,40 @@
         <p:spPr>
           <a:xfrm>
             <a:off x="0" y="0"/>
-            <a:ext cx="201168" cy="6858000"/>
+            <a:ext cx="256032" cy="6858000"/>
           </a:xfrm>
           <a:prstGeom prst="rect">
             <a:avLst/>
           </a:prstGeom>
           <a:solidFill>
-            <a:srgbClr val="C0562B"/>
+            <a:srgbClr val="1B6E78"/>
           </a:solidFill>
           <a:ln/>
         </p:spPr>
       </p:sp>
       <p:sp>
         <p:nvSpPr>
-          <p:cNvPr id="3" name="Text 1"/>
+          <p:cNvPr id="3" name="Shape 1"/>
+          <p:cNvSpPr/>
+          <p:nvPr/>
+        </p:nvSpPr>
+        <p:spPr>
+          <a:xfrm>
+            <a:off x="256032" y="0"/>
+            <a:ext cx="109728" cy="6858000"/>
+          </a:xfrm>
+          <a:prstGeom prst="rect">
+            <a:avLst/>
+          </a:prstGeom>
+          <a:solidFill>
+            <a:srgbClr val="C0561B"/>
+          </a:solidFill>
+          <a:ln/>
+        </p:spPr>
+      </p:sp>
+      <p:sp>
+        <p:nvSpPr>
+          <p:cNvPr id="4" name="Text 2"/>
           <p:cNvSpPr/>
           <p:nvPr/>
         </p:nvSpPr>
@@ -2702,7 +2811,7 @@
             <a:r>
               <a:rPr lang="en-US" sz="1500" b="1" spc="300" kern="0" dirty="0">
                 <a:solidFill>
-                  <a:srgbClr val="9CB0AC"/>
+                  <a:srgbClr val="9FC0C4"/>
                 </a:solidFill>
               </a:rPr>
               <a:t>LIVER GENOMICS  ·  SINGLE-NUCLEUS RE-ANALYSIS</a:t>
@@ -2713,7 +2822,7 @@
       </p:sp>
       <p:sp>
         <p:nvSpPr>
-          <p:cNvPr id="4" name="Text 2"/>
+          <p:cNvPr id="5" name="Text 3"/>
           <p:cNvSpPr/>
           <p:nvPr/>
         </p:nvSpPr>
@@ -2752,7 +2861,7 @@
       </p:sp>
       <p:sp>
         <p:nvSpPr>
-          <p:cNvPr id="5" name="Text 3"/>
+          <p:cNvPr id="6" name="Text 4"/>
           <p:cNvSpPr/>
           <p:nvPr/>
         </p:nvSpPr>
@@ -2788,7 +2897,7 @@
       </p:sp>
       <p:sp>
         <p:nvSpPr>
-          <p:cNvPr id="6" name="Shape 4"/>
+          <p:cNvPr id="7" name="Shape 5"/>
           <p:cNvSpPr/>
           <p:nvPr/>
         </p:nvSpPr>
@@ -2803,7 +2912,7 @@
           <a:noFill/>
           <a:ln w="19050">
             <a:solidFill>
-              <a:srgbClr val="C0562B"/>
+              <a:srgbClr val="C0561B"/>
             </a:solidFill>
             <a:prstDash val="solid"/>
           </a:ln>
@@ -2811,7 +2920,7 @@
       </p:sp>
       <p:sp>
         <p:nvSpPr>
-          <p:cNvPr id="7" name="Text 5"/>
+          <p:cNvPr id="8" name="Text 6"/>
           <p:cNvSpPr/>
           <p:nvPr/>
         </p:nvSpPr>
@@ -2869,7 +2978,7 @@
       </p:sp>
       <p:sp>
         <p:nvSpPr>
-          <p:cNvPr id="8" name="Text 6"/>
+          <p:cNvPr id="9" name="Text 7"/>
           <p:cNvSpPr/>
           <p:nvPr/>
         </p:nvSpPr>
@@ -2905,7 +3014,7 @@
       </p:sp>
       <p:sp>
         <p:nvSpPr>
-          <p:cNvPr id="9" name="Text 7"/>
+          <p:cNvPr id="10" name="Text 8"/>
           <p:cNvSpPr/>
           <p:nvPr/>
         </p:nvSpPr>
@@ -2953,7 +3062,7 @@
     <p:bg>
       <p:bgPr>
         <a:solidFill>
-          <a:srgbClr val="F7F3EB"/>
+          <a:srgbClr val="F7F5F1"/>
         </a:solidFill>
       </p:bgPr>
     </p:bg>
@@ -2986,7 +3095,7 @@
             <a:avLst/>
           </a:prstGeom>
           <a:solidFill>
-            <a:srgbClr val="C0562B"/>
+            <a:srgbClr val="C0561B"/>
           </a:solidFill>
           <a:ln/>
         </p:spPr>
@@ -3018,10 +3127,10 @@
             <a:r>
               <a:rPr lang="en-US" sz="1300" b="1" spc="300" kern="0" dirty="0">
                 <a:solidFill>
-                  <a:srgbClr val="C0562B"/>
-                </a:solidFill>
-              </a:rPr>
-              <a:t>GENOME-WIDE</a:t>
+                  <a:srgbClr val="C0561B"/>
+                </a:solidFill>
+              </a:rPr>
+              <a:t>THE CONFOUNDER AUDIT</a:t>
             </a:r>
             <a:endParaRPr lang="en-US" sz="1300" dirty="0"/>
           </a:p>
@@ -3054,51 +3163,28 @@
             <a:r>
               <a:rPr lang="en-US" sz="2800" b="1" dirty="0">
                 <a:solidFill>
-                  <a:srgbClr val="1F3A3D"/>
+                  <a:srgbClr val="1B2B31"/>
                 </a:solidFill>
                 <a:latin typeface="Georgia" pitchFamily="34" charset="0"/>
                 <a:ea typeface="Georgia" pitchFamily="34" charset="-122"/>
                 <a:cs typeface="Georgia" pitchFamily="34" charset="-120"/>
               </a:rPr>
-              <a:t>One signal: biliary markers</a:t>
+              <a:t>Every confounder we could test, tested in counts</a:t>
             </a:r>
             <a:endParaRPr lang="en-US" sz="2800" dirty="0"/>
           </a:p>
         </p:txBody>
       </p:sp>
-      <p:pic>
-        <p:nvPicPr>
-          <p:cNvPr id="5" name="Image 0" descr="D:\CS\Genomics\Hackathon\presentation/assets/fig_volcano.png">    </p:cNvPr>
-          <p:cNvPicPr>
-            <a:picLocks noChangeAspect="1"/>
-          </p:cNvPicPr>
-          <p:nvPr/>
-        </p:nvPicPr>
-        <p:blipFill>
-          <a:blip r:embed="rId1"/>
-          <a:srcRect l="0" r="0" t="0" b="0"/>
-          <a:stretch/>
-        </p:blipFill>
-        <p:spPr>
-          <a:xfrm>
-            <a:off x="274320" y="1371600"/>
-            <a:ext cx="7955280" cy="4114800"/>
-          </a:xfrm>
-          <a:prstGeom prst="rect">
-            <a:avLst/>
-          </a:prstGeom>
-        </p:spPr>
-      </p:pic>
-      <p:sp>
-        <p:nvSpPr>
-          <p:cNvPr id="6" name="Text 3"/>
-          <p:cNvSpPr/>
-          <p:nvPr/>
-        </p:nvSpPr>
-        <p:spPr>
-          <a:xfrm>
-            <a:off x="274320" y="5532120"/>
-            <a:ext cx="7955280" cy="365760"/>
+      <p:sp>
+        <p:nvSpPr>
+          <p:cNvPr id="5" name="Text 3"/>
+          <p:cNvSpPr/>
+          <p:nvPr/>
+        </p:nvSpPr>
+        <p:spPr>
+          <a:xfrm>
+            <a:off x="640080" y="1417320"/>
+            <a:ext cx="11155680" cy="502920"/>
           </a:xfrm>
           <a:prstGeom prst="rect">
             <a:avLst/>
@@ -3107,178 +3193,2093 @@
           <a:ln/>
         </p:spPr>
         <p:txBody>
-          <a:bodyPr wrap="square" lIns="0" tIns="0" rIns="0" bIns="0" rtlCol="0" anchor="ctr"/>
-          <a:lstStyle/>
-          <a:p>
-            <a:pPr algn="ctr" indent="0" marL="0">
-              <a:buNone/>
-            </a:pPr>
-            <a:r>
-              <a:rPr lang="en-US" sz="1200" i="1" dirty="0">
-                <a:solidFill>
-                  <a:srgbClr val="6B6256"/>
-                </a:solidFill>
-              </a:rPr>
-              <a:t>Figure 3.  Genome-wide pseudobulk differential expression, cirrhotic F4 vs F1 (edgeR).</a:t>
-            </a:r>
-            <a:endParaRPr lang="en-US" sz="1200" dirty="0"/>
-          </a:p>
-        </p:txBody>
-      </p:sp>
+          <a:bodyPr wrap="square" rtlCol="0" anchor="ctr"/>
+          <a:lstStyle/>
+          <a:p>
+            <a:pPr algn="l" indent="0" marL="0">
+              <a:buNone/>
+            </a:pPr>
+            <a:r>
+              <a:rPr lang="en-US" sz="1400" i="1" dirty="0">
+                <a:solidFill>
+                  <a:srgbClr val="5C6E73"/>
+                </a:solidFill>
+              </a:rPr>
+              <a:t>Two jobs: (a) the structural confounds that make the original trajectory uninterpretable, and (b) the within-biopsy checks that the preserved-zonation null is not itself an artifact.</a:t>
+            </a:r>
+            <a:endParaRPr lang="en-US" sz="1400" dirty="0"/>
+          </a:p>
+        </p:txBody>
+      </p:sp>
+      <p:graphicFrame>
+        <p:nvGraphicFramePr>
+          <p:cNvPr id="11" name="Table 0"/>
+          <p:cNvGraphicFramePr>
+            <a:graphicFrameLocks noGrp="1"/>
+          </p:cNvGraphicFramePr>
+          <p:nvPr>
+            <p:extLst>
+              <p:ext uri="{D42A27DB-BD31-4B8C-83A1-F6EECF244321}">
+                <p14:modId xmlns:p14="http://schemas.microsoft.com/office/powerpoint/2010/main" val="1579011935"/>
+              </p:ext>
+            </p:extLst>
+          </p:nvPr>
+        </p:nvGraphicFramePr>
+        <p:xfrm>
+          <a:off x="640080" y="2011680"/>
+          <a:ext cx="11155680" cy="914400"/>
+        </p:xfrm>
+        <a:graphic>
+          <a:graphicData uri="http://schemas.openxmlformats.org/drawingml/2006/table">
+            <a:tbl>
+              <a:tblPr/>
+              <a:tblGrid>
+                <a:gridCol w="2468880"/>
+                <a:gridCol w="6035040"/>
+                <a:gridCol w="2651760"/>
+              </a:tblGrid>
+              <a:tr h="365760">
+                <a:tc>
+                  <a:txBody>
+                    <a:bodyPr/>
+                    <a:lstStyle/>
+                    <a:p>
+                      <a:pPr algn="l" indent="0" marL="0">
+                        <a:buNone/>
+                      </a:pPr>
+                      <a:r>
+                        <a:rPr lang="en-US" sz="1100" b="1" dirty="0">
+                          <a:solidFill>
+                            <a:srgbClr val="1B2B31"/>
+                          </a:solidFill>
+                        </a:rPr>
+                        <a:t>Confounder</a:t>
+                      </a:r>
+                      <a:endParaRPr lang="en-US" sz="1100" dirty="0"/>
+                    </a:p>
+                  </a:txBody>
+                  <a:tcPr marL="63500" marR="63500" marT="25400" marB="25400" anchor="ctr">
+                    <a:lnL w="6350" cap="flat" cmpd="sng" algn="ctr">
+                      <a:solidFill>
+                        <a:srgbClr val="D7D0C4"/>
+                      </a:solidFill>
+                      <a:prstDash val="solid"/>
+                      <a:round/>
+                      <a:headEnd type="none" w="med" len="med"/>
+                      <a:tailEnd type="none" w="med" len="med"/>
+                    </a:lnL>
+                    <a:lnR w="6350" cap="flat" cmpd="sng" algn="ctr">
+                      <a:solidFill>
+                        <a:srgbClr val="D7D0C4"/>
+                      </a:solidFill>
+                      <a:prstDash val="solid"/>
+                      <a:round/>
+                      <a:headEnd type="none" w="med" len="med"/>
+                      <a:tailEnd type="none" w="med" len="med"/>
+                    </a:lnR>
+                    <a:lnT w="6350" cap="flat" cmpd="sng" algn="ctr">
+                      <a:solidFill>
+                        <a:srgbClr val="D7D0C4"/>
+                      </a:solidFill>
+                      <a:prstDash val="solid"/>
+                      <a:round/>
+                      <a:headEnd type="none" w="med" len="med"/>
+                      <a:tailEnd type="none" w="med" len="med"/>
+                    </a:lnT>
+                    <a:lnB w="6350" cap="flat" cmpd="sng" algn="ctr">
+                      <a:solidFill>
+                        <a:srgbClr val="D7D0C4"/>
+                      </a:solidFill>
+                      <a:prstDash val="solid"/>
+                      <a:round/>
+                      <a:headEnd type="none" w="med" len="med"/>
+                      <a:tailEnd type="none" w="med" len="med"/>
+                    </a:lnB>
+                    <a:solidFill>
+                      <a:srgbClr val="FFFFFF"/>
+                    </a:solidFill>
+                  </a:tcPr>
+                </a:tc>
+                <a:tc>
+                  <a:txBody>
+                    <a:bodyPr/>
+                    <a:lstStyle/>
+                    <a:p>
+                      <a:pPr algn="l" indent="0" marL="0">
+                        <a:buNone/>
+                      </a:pPr>
+                      <a:r>
+                        <a:rPr lang="en-US" sz="1100" b="1" dirty="0">
+                          <a:solidFill>
+                            <a:srgbClr val="1B2B31"/>
+                          </a:solidFill>
+                        </a:rPr>
+                        <a:t>What we did  (test · numbers)</a:t>
+                      </a:r>
+                      <a:endParaRPr lang="en-US" sz="1100" dirty="0"/>
+                    </a:p>
+                  </a:txBody>
+                  <a:tcPr marL="63500" marR="63500" marT="25400" marB="25400" anchor="ctr">
+                    <a:lnL w="6350" cap="flat" cmpd="sng" algn="ctr">
+                      <a:solidFill>
+                        <a:srgbClr val="D7D0C4"/>
+                      </a:solidFill>
+                      <a:prstDash val="solid"/>
+                      <a:round/>
+                      <a:headEnd type="none" w="med" len="med"/>
+                      <a:tailEnd type="none" w="med" len="med"/>
+                    </a:lnL>
+                    <a:lnR w="6350" cap="flat" cmpd="sng" algn="ctr">
+                      <a:solidFill>
+                        <a:srgbClr val="D7D0C4"/>
+                      </a:solidFill>
+                      <a:prstDash val="solid"/>
+                      <a:round/>
+                      <a:headEnd type="none" w="med" len="med"/>
+                      <a:tailEnd type="none" w="med" len="med"/>
+                    </a:lnR>
+                    <a:lnT w="6350" cap="flat" cmpd="sng" algn="ctr">
+                      <a:solidFill>
+                        <a:srgbClr val="D7D0C4"/>
+                      </a:solidFill>
+                      <a:prstDash val="solid"/>
+                      <a:round/>
+                      <a:headEnd type="none" w="med" len="med"/>
+                      <a:tailEnd type="none" w="med" len="med"/>
+                    </a:lnT>
+                    <a:lnB w="6350" cap="flat" cmpd="sng" algn="ctr">
+                      <a:solidFill>
+                        <a:srgbClr val="D7D0C4"/>
+                      </a:solidFill>
+                      <a:prstDash val="solid"/>
+                      <a:round/>
+                      <a:headEnd type="none" w="med" len="med"/>
+                      <a:tailEnd type="none" w="med" len="med"/>
+                    </a:lnB>
+                    <a:solidFill>
+                      <a:srgbClr val="FFFFFF"/>
+                    </a:solidFill>
+                  </a:tcPr>
+                </a:tc>
+                <a:tc>
+                  <a:txBody>
+                    <a:bodyPr/>
+                    <a:lstStyle/>
+                    <a:p>
+                      <a:pPr algn="l" indent="0" marL="0">
+                        <a:buNone/>
+                      </a:pPr>
+                      <a:r>
+                        <a:rPr lang="en-US" sz="1100" b="1" dirty="0">
+                          <a:solidFill>
+                            <a:srgbClr val="1B2B31"/>
+                          </a:solidFill>
+                        </a:rPr>
+                        <a:t>Verdict</a:t>
+                      </a:r>
+                      <a:endParaRPr lang="en-US" sz="1100" dirty="0"/>
+                    </a:p>
+                  </a:txBody>
+                  <a:tcPr marL="63500" marR="63500" marT="25400" marB="25400" anchor="ctr">
+                    <a:lnL w="6350" cap="flat" cmpd="sng" algn="ctr">
+                      <a:solidFill>
+                        <a:srgbClr val="D7D0C4"/>
+                      </a:solidFill>
+                      <a:prstDash val="solid"/>
+                      <a:round/>
+                      <a:headEnd type="none" w="med" len="med"/>
+                      <a:tailEnd type="none" w="med" len="med"/>
+                    </a:lnL>
+                    <a:lnR w="6350" cap="flat" cmpd="sng" algn="ctr">
+                      <a:solidFill>
+                        <a:srgbClr val="D7D0C4"/>
+                      </a:solidFill>
+                      <a:prstDash val="solid"/>
+                      <a:round/>
+                      <a:headEnd type="none" w="med" len="med"/>
+                      <a:tailEnd type="none" w="med" len="med"/>
+                    </a:lnR>
+                    <a:lnT w="6350" cap="flat" cmpd="sng" algn="ctr">
+                      <a:solidFill>
+                        <a:srgbClr val="D7D0C4"/>
+                      </a:solidFill>
+                      <a:prstDash val="solid"/>
+                      <a:round/>
+                      <a:headEnd type="none" w="med" len="med"/>
+                      <a:tailEnd type="none" w="med" len="med"/>
+                    </a:lnT>
+                    <a:lnB w="6350" cap="flat" cmpd="sng" algn="ctr">
+                      <a:solidFill>
+                        <a:srgbClr val="D7D0C4"/>
+                      </a:solidFill>
+                      <a:prstDash val="solid"/>
+                      <a:round/>
+                      <a:headEnd type="none" w="med" len="med"/>
+                      <a:tailEnd type="none" w="med" len="med"/>
+                    </a:lnB>
+                    <a:solidFill>
+                      <a:srgbClr val="FFFFFF"/>
+                    </a:solidFill>
+                  </a:tcPr>
+                </a:tc>
+              </a:tr>
+              <a:tr h="365760">
+                <a:tc>
+                  <a:txBody>
+                    <a:bodyPr/>
+                    <a:lstStyle/>
+                    <a:p>
+                      <a:pPr algn="l" indent="0" marL="0">
+                        <a:buNone/>
+                      </a:pPr>
+                      <a:r>
+                        <a:rPr lang="en-US" sz="1100" dirty="0">
+                          <a:solidFill>
+                            <a:srgbClr val="1B2B31"/>
+                          </a:solidFill>
+                        </a:rPr>
+                        <a:t>Tissue source</a:t>
+                      </a:r>
+                      <a:endParaRPr lang="en-US" sz="1100" dirty="0"/>
+                    </a:p>
+                  </a:txBody>
+                  <a:tcPr marL="63500" marR="63500" marT="25400" marB="25400" anchor="ctr">
+                    <a:lnL w="6350" cap="flat" cmpd="sng" algn="ctr">
+                      <a:solidFill>
+                        <a:srgbClr val="D7D0C4"/>
+                      </a:solidFill>
+                      <a:prstDash val="solid"/>
+                      <a:round/>
+                      <a:headEnd type="none" w="med" len="med"/>
+                      <a:tailEnd type="none" w="med" len="med"/>
+                    </a:lnL>
+                    <a:lnR w="6350" cap="flat" cmpd="sng" algn="ctr">
+                      <a:solidFill>
+                        <a:srgbClr val="D7D0C4"/>
+                      </a:solidFill>
+                      <a:prstDash val="solid"/>
+                      <a:round/>
+                      <a:headEnd type="none" w="med" len="med"/>
+                      <a:tailEnd type="none" w="med" len="med"/>
+                    </a:lnR>
+                    <a:lnT w="6350" cap="flat" cmpd="sng" algn="ctr">
+                      <a:solidFill>
+                        <a:srgbClr val="D7D0C4"/>
+                      </a:solidFill>
+                      <a:prstDash val="solid"/>
+                      <a:round/>
+                      <a:headEnd type="none" w="med" len="med"/>
+                      <a:tailEnd type="none" w="med" len="med"/>
+                    </a:lnT>
+                    <a:lnB w="6350" cap="flat" cmpd="sng" algn="ctr">
+                      <a:solidFill>
+                        <a:srgbClr val="D7D0C4"/>
+                      </a:solidFill>
+                      <a:prstDash val="solid"/>
+                      <a:round/>
+                      <a:headEnd type="none" w="med" len="med"/>
+                      <a:tailEnd type="none" w="med" len="med"/>
+                    </a:lnB>
+                    <a:solidFill>
+                      <a:srgbClr val="FFFFFF"/>
+                    </a:solidFill>
+                  </a:tcPr>
+                </a:tc>
+                <a:tc>
+                  <a:txBody>
+                    <a:bodyPr/>
+                    <a:lstStyle/>
+                    <a:p>
+                      <a:pPr algn="l" indent="0" marL="0">
+                        <a:buNone/>
+                      </a:pPr>
+                      <a:r>
+                        <a:rPr lang="en-US" sz="1100" dirty="0">
+                          <a:solidFill>
+                            <a:srgbClr val="1B2B31"/>
+                          </a:solidFill>
+                        </a:rPr>
+                        <a:t>organ-cube / explant ends are not acquisition-matched to needle biopsy</a:t>
+                      </a:r>
+                      <a:endParaRPr lang="en-US" sz="1100" dirty="0"/>
+                    </a:p>
+                  </a:txBody>
+                  <a:tcPr marL="63500" marR="63500" marT="25400" marB="25400" anchor="ctr">
+                    <a:lnL w="6350" cap="flat" cmpd="sng" algn="ctr">
+                      <a:solidFill>
+                        <a:srgbClr val="D7D0C4"/>
+                      </a:solidFill>
+                      <a:prstDash val="solid"/>
+                      <a:round/>
+                      <a:headEnd type="none" w="med" len="med"/>
+                      <a:tailEnd type="none" w="med" len="med"/>
+                    </a:lnL>
+                    <a:lnR w="6350" cap="flat" cmpd="sng" algn="ctr">
+                      <a:solidFill>
+                        <a:srgbClr val="D7D0C4"/>
+                      </a:solidFill>
+                      <a:prstDash val="solid"/>
+                      <a:round/>
+                      <a:headEnd type="none" w="med" len="med"/>
+                      <a:tailEnd type="none" w="med" len="med"/>
+                    </a:lnR>
+                    <a:lnT w="6350" cap="flat" cmpd="sng" algn="ctr">
+                      <a:solidFill>
+                        <a:srgbClr val="D7D0C4"/>
+                      </a:solidFill>
+                      <a:prstDash val="solid"/>
+                      <a:round/>
+                      <a:headEnd type="none" w="med" len="med"/>
+                      <a:tailEnd type="none" w="med" len="med"/>
+                    </a:lnT>
+                    <a:lnB w="6350" cap="flat" cmpd="sng" algn="ctr">
+                      <a:solidFill>
+                        <a:srgbClr val="D7D0C4"/>
+                      </a:solidFill>
+                      <a:prstDash val="solid"/>
+                      <a:round/>
+                      <a:headEnd type="none" w="med" len="med"/>
+                      <a:tailEnd type="none" w="med" len="med"/>
+                    </a:lnB>
+                    <a:solidFill>
+                      <a:srgbClr val="FFFFFF"/>
+                    </a:solidFill>
+                  </a:tcPr>
+                </a:tc>
+                <a:tc>
+                  <a:txBody>
+                    <a:bodyPr/>
+                    <a:lstStyle/>
+                    <a:p>
+                      <a:pPr algn="l" indent="0" marL="0">
+                        <a:buNone/>
+                      </a:pPr>
+                      <a:r>
+                        <a:rPr lang="en-US" sz="1100" dirty="0">
+                          <a:solidFill>
+                            <a:srgbClr val="1B2B31"/>
+                          </a:solidFill>
+                        </a:rPr>
+                        <a:t>excluded → biopsy-only F1–F4</a:t>
+                      </a:r>
+                      <a:endParaRPr lang="en-US" sz="1100" dirty="0"/>
+                    </a:p>
+                  </a:txBody>
+                  <a:tcPr marL="63500" marR="63500" marT="25400" marB="25400" anchor="ctr">
+                    <a:lnL w="6350" cap="flat" cmpd="sng" algn="ctr">
+                      <a:solidFill>
+                        <a:srgbClr val="D7D0C4"/>
+                      </a:solidFill>
+                      <a:prstDash val="solid"/>
+                      <a:round/>
+                      <a:headEnd type="none" w="med" len="med"/>
+                      <a:tailEnd type="none" w="med" len="med"/>
+                    </a:lnL>
+                    <a:lnR w="6350" cap="flat" cmpd="sng" algn="ctr">
+                      <a:solidFill>
+                        <a:srgbClr val="D7D0C4"/>
+                      </a:solidFill>
+                      <a:prstDash val="solid"/>
+                      <a:round/>
+                      <a:headEnd type="none" w="med" len="med"/>
+                      <a:tailEnd type="none" w="med" len="med"/>
+                    </a:lnR>
+                    <a:lnT w="6350" cap="flat" cmpd="sng" algn="ctr">
+                      <a:solidFill>
+                        <a:srgbClr val="D7D0C4"/>
+                      </a:solidFill>
+                      <a:prstDash val="solid"/>
+                      <a:round/>
+                      <a:headEnd type="none" w="med" len="med"/>
+                      <a:tailEnd type="none" w="med" len="med"/>
+                    </a:lnT>
+                    <a:lnB w="6350" cap="flat" cmpd="sng" algn="ctr">
+                      <a:solidFill>
+                        <a:srgbClr val="D7D0C4"/>
+                      </a:solidFill>
+                      <a:prstDash val="solid"/>
+                      <a:round/>
+                      <a:headEnd type="none" w="med" len="med"/>
+                      <a:tailEnd type="none" w="med" len="med"/>
+                    </a:lnB>
+                    <a:solidFill>
+                      <a:srgbClr val="FFFFFF"/>
+                    </a:solidFill>
+                  </a:tcPr>
+                </a:tc>
+              </a:tr>
+              <a:tr h="365760">
+                <a:tc>
+                  <a:txBody>
+                    <a:bodyPr/>
+                    <a:lstStyle/>
+                    <a:p>
+                      <a:pPr algn="l" indent="0" marL="0">
+                        <a:buNone/>
+                      </a:pPr>
+                      <a:r>
+                        <a:rPr lang="en-US" sz="1100" dirty="0">
+                          <a:solidFill>
+                            <a:srgbClr val="1B2B31"/>
+                          </a:solidFill>
+                        </a:rPr>
+                        <a:t>Procurement stress</a:t>
+                      </a:r>
+                      <a:endParaRPr lang="en-US" sz="1100" dirty="0"/>
+                    </a:p>
+                  </a:txBody>
+                  <a:tcPr marL="63500" marR="63500" marT="25400" marB="25400" anchor="ctr">
+                    <a:lnL w="6350" cap="flat" cmpd="sng" algn="ctr">
+                      <a:solidFill>
+                        <a:srgbClr val="D7D0C4"/>
+                      </a:solidFill>
+                      <a:prstDash val="solid"/>
+                      <a:round/>
+                      <a:headEnd type="none" w="med" len="med"/>
+                      <a:tailEnd type="none" w="med" len="med"/>
+                    </a:lnL>
+                    <a:lnR w="6350" cap="flat" cmpd="sng" algn="ctr">
+                      <a:solidFill>
+                        <a:srgbClr val="D7D0C4"/>
+                      </a:solidFill>
+                      <a:prstDash val="solid"/>
+                      <a:round/>
+                      <a:headEnd type="none" w="med" len="med"/>
+                      <a:tailEnd type="none" w="med" len="med"/>
+                    </a:lnR>
+                    <a:lnT w="6350" cap="flat" cmpd="sng" algn="ctr">
+                      <a:solidFill>
+                        <a:srgbClr val="D7D0C4"/>
+                      </a:solidFill>
+                      <a:prstDash val="solid"/>
+                      <a:round/>
+                      <a:headEnd type="none" w="med" len="med"/>
+                      <a:tailEnd type="none" w="med" len="med"/>
+                    </a:lnT>
+                    <a:lnB w="6350" cap="flat" cmpd="sng" algn="ctr">
+                      <a:solidFill>
+                        <a:srgbClr val="D7D0C4"/>
+                      </a:solidFill>
+                      <a:prstDash val="solid"/>
+                      <a:round/>
+                      <a:headEnd type="none" w="med" len="med"/>
+                      <a:tailEnd type="none" w="med" len="med"/>
+                    </a:lnB>
+                    <a:solidFill>
+                      <a:srgbClr val="FFFFFF"/>
+                    </a:solidFill>
+                  </a:tcPr>
+                </a:tc>
+                <a:tc>
+                  <a:txBody>
+                    <a:bodyPr/>
+                    <a:lstStyle/>
+                    <a:p>
+                      <a:pPr algn="l" indent="0" marL="0">
+                        <a:buNone/>
+                      </a:pPr>
+                      <a:r>
+                        <a:rPr lang="en-US" sz="1100" dirty="0">
+                          <a:solidFill>
+                            <a:srgbClr val="1B2B31"/>
+                          </a:solidFill>
+                        </a:rPr>
+                        <a:t>IEG+HSP across 6 lineages; hep 18× ≈ endothelial 18× (no zonation)</a:t>
+                      </a:r>
+                      <a:endParaRPr lang="en-US" sz="1100" dirty="0"/>
+                    </a:p>
+                  </a:txBody>
+                  <a:tcPr marL="63500" marR="63500" marT="25400" marB="25400" anchor="ctr">
+                    <a:lnL w="6350" cap="flat" cmpd="sng" algn="ctr">
+                      <a:solidFill>
+                        <a:srgbClr val="D7D0C4"/>
+                      </a:solidFill>
+                      <a:prstDash val="solid"/>
+                      <a:round/>
+                      <a:headEnd type="none" w="med" len="med"/>
+                      <a:tailEnd type="none" w="med" len="med"/>
+                    </a:lnL>
+                    <a:lnR w="6350" cap="flat" cmpd="sng" algn="ctr">
+                      <a:solidFill>
+                        <a:srgbClr val="D7D0C4"/>
+                      </a:solidFill>
+                      <a:prstDash val="solid"/>
+                      <a:round/>
+                      <a:headEnd type="none" w="med" len="med"/>
+                      <a:tailEnd type="none" w="med" len="med"/>
+                    </a:lnR>
+                    <a:lnT w="6350" cap="flat" cmpd="sng" algn="ctr">
+                      <a:solidFill>
+                        <a:srgbClr val="D7D0C4"/>
+                      </a:solidFill>
+                      <a:prstDash val="solid"/>
+                      <a:round/>
+                      <a:headEnd type="none" w="med" len="med"/>
+                      <a:tailEnd type="none" w="med" len="med"/>
+                    </a:lnT>
+                    <a:lnB w="6350" cap="flat" cmpd="sng" algn="ctr">
+                      <a:solidFill>
+                        <a:srgbClr val="D7D0C4"/>
+                      </a:solidFill>
+                      <a:prstDash val="solid"/>
+                      <a:round/>
+                      <a:headEnd type="none" w="med" len="med"/>
+                      <a:tailEnd type="none" w="med" len="med"/>
+                    </a:lnB>
+                    <a:solidFill>
+                      <a:srgbClr val="FFFFFF"/>
+                    </a:solidFill>
+                  </a:tcPr>
+                </a:tc>
+                <a:tc>
+                  <a:txBody>
+                    <a:bodyPr/>
+                    <a:lstStyle/>
+                    <a:p>
+                      <a:pPr algn="l" indent="0" marL="0">
+                        <a:buNone/>
+                      </a:pPr>
+                      <a:r>
+                        <a:rPr lang="en-US" sz="1100" dirty="0">
+                          <a:solidFill>
+                            <a:srgbClr val="1B2B31"/>
+                          </a:solidFill>
+                        </a:rPr>
+                        <a:t>organ-wide handling, not zonation</a:t>
+                      </a:r>
+                      <a:endParaRPr lang="en-US" sz="1100" dirty="0"/>
+                    </a:p>
+                  </a:txBody>
+                  <a:tcPr marL="63500" marR="63500" marT="25400" marB="25400" anchor="ctr">
+                    <a:lnL w="6350" cap="flat" cmpd="sng" algn="ctr">
+                      <a:solidFill>
+                        <a:srgbClr val="D7D0C4"/>
+                      </a:solidFill>
+                      <a:prstDash val="solid"/>
+                      <a:round/>
+                      <a:headEnd type="none" w="med" len="med"/>
+                      <a:tailEnd type="none" w="med" len="med"/>
+                    </a:lnL>
+                    <a:lnR w="6350" cap="flat" cmpd="sng" algn="ctr">
+                      <a:solidFill>
+                        <a:srgbClr val="D7D0C4"/>
+                      </a:solidFill>
+                      <a:prstDash val="solid"/>
+                      <a:round/>
+                      <a:headEnd type="none" w="med" len="med"/>
+                      <a:tailEnd type="none" w="med" len="med"/>
+                    </a:lnR>
+                    <a:lnT w="6350" cap="flat" cmpd="sng" algn="ctr">
+                      <a:solidFill>
+                        <a:srgbClr val="D7D0C4"/>
+                      </a:solidFill>
+                      <a:prstDash val="solid"/>
+                      <a:round/>
+                      <a:headEnd type="none" w="med" len="med"/>
+                      <a:tailEnd type="none" w="med" len="med"/>
+                    </a:lnT>
+                    <a:lnB w="6350" cap="flat" cmpd="sng" algn="ctr">
+                      <a:solidFill>
+                        <a:srgbClr val="D7D0C4"/>
+                      </a:solidFill>
+                      <a:prstDash val="solid"/>
+                      <a:round/>
+                      <a:headEnd type="none" w="med" len="med"/>
+                      <a:tailEnd type="none" w="med" len="med"/>
+                    </a:lnB>
+                    <a:solidFill>
+                      <a:srgbClr val="FFFFFF"/>
+                    </a:solidFill>
+                  </a:tcPr>
+                </a:tc>
+              </a:tr>
+              <a:tr h="365760">
+                <a:tc>
+                  <a:txBody>
+                    <a:bodyPr/>
+                    <a:lstStyle/>
+                    <a:p>
+                      <a:pPr algn="l" indent="0" marL="0">
+                        <a:buNone/>
+                      </a:pPr>
+                      <a:r>
+                        <a:rPr lang="en-US" sz="1100" dirty="0">
+                          <a:solidFill>
+                            <a:srgbClr val="1B2B31"/>
+                          </a:solidFill>
+                        </a:rPr>
+                        <a:t>Sequencing batch</a:t>
+                      </a:r>
+                      <a:endParaRPr lang="en-US" sz="1100" dirty="0"/>
+                    </a:p>
+                  </a:txBody>
+                  <a:tcPr marL="63500" marR="63500" marT="25400" marB="25400" anchor="ctr">
+                    <a:lnL w="6350" cap="flat" cmpd="sng" algn="ctr">
+                      <a:solidFill>
+                        <a:srgbClr val="D7D0C4"/>
+                      </a:solidFill>
+                      <a:prstDash val="solid"/>
+                      <a:round/>
+                      <a:headEnd type="none" w="med" len="med"/>
+                      <a:tailEnd type="none" w="med" len="med"/>
+                    </a:lnL>
+                    <a:lnR w="6350" cap="flat" cmpd="sng" algn="ctr">
+                      <a:solidFill>
+                        <a:srgbClr val="D7D0C4"/>
+                      </a:solidFill>
+                      <a:prstDash val="solid"/>
+                      <a:round/>
+                      <a:headEnd type="none" w="med" len="med"/>
+                      <a:tailEnd type="none" w="med" len="med"/>
+                    </a:lnR>
+                    <a:lnT w="6350" cap="flat" cmpd="sng" algn="ctr">
+                      <a:solidFill>
+                        <a:srgbClr val="D7D0C4"/>
+                      </a:solidFill>
+                      <a:prstDash val="solid"/>
+                      <a:round/>
+                      <a:headEnd type="none" w="med" len="med"/>
+                      <a:tailEnd type="none" w="med" len="med"/>
+                    </a:lnT>
+                    <a:lnB w="6350" cap="flat" cmpd="sng" algn="ctr">
+                      <a:solidFill>
+                        <a:srgbClr val="D7D0C4"/>
+                      </a:solidFill>
+                      <a:prstDash val="solid"/>
+                      <a:round/>
+                      <a:headEnd type="none" w="med" len="med"/>
+                      <a:tailEnd type="none" w="med" len="med"/>
+                    </a:lnB>
+                    <a:solidFill>
+                      <a:srgbClr val="FFFFFF"/>
+                    </a:solidFill>
+                  </a:tcPr>
+                </a:tc>
+                <a:tc>
+                  <a:txBody>
+                    <a:bodyPr/>
+                    <a:lstStyle/>
+                    <a:p>
+                      <a:pPr algn="l" indent="0" marL="0">
+                        <a:buNone/>
+                      </a:pPr>
+                      <a:r>
+                        <a:rPr lang="en-US" sz="1100" dirty="0">
+                          <a:solidFill>
+                            <a:srgbClr val="1B2B31"/>
+                          </a:solidFill>
+                        </a:rPr>
+                        <a:t>run × source Cramér’s V = 0.84; run × F (biopsy) = 0.40</a:t>
+                      </a:r>
+                      <a:endParaRPr lang="en-US" sz="1100" dirty="0"/>
+                    </a:p>
+                  </a:txBody>
+                  <a:tcPr marL="63500" marR="63500" marT="25400" marB="25400" anchor="ctr">
+                    <a:lnL w="6350" cap="flat" cmpd="sng" algn="ctr">
+                      <a:solidFill>
+                        <a:srgbClr val="D7D0C4"/>
+                      </a:solidFill>
+                      <a:prstDash val="solid"/>
+                      <a:round/>
+                      <a:headEnd type="none" w="med" len="med"/>
+                      <a:tailEnd type="none" w="med" len="med"/>
+                    </a:lnL>
+                    <a:lnR w="6350" cap="flat" cmpd="sng" algn="ctr">
+                      <a:solidFill>
+                        <a:srgbClr val="D7D0C4"/>
+                      </a:solidFill>
+                      <a:prstDash val="solid"/>
+                      <a:round/>
+                      <a:headEnd type="none" w="med" len="med"/>
+                      <a:tailEnd type="none" w="med" len="med"/>
+                    </a:lnR>
+                    <a:lnT w="6350" cap="flat" cmpd="sng" algn="ctr">
+                      <a:solidFill>
+                        <a:srgbClr val="D7D0C4"/>
+                      </a:solidFill>
+                      <a:prstDash val="solid"/>
+                      <a:round/>
+                      <a:headEnd type="none" w="med" len="med"/>
+                      <a:tailEnd type="none" w="med" len="med"/>
+                    </a:lnT>
+                    <a:lnB w="6350" cap="flat" cmpd="sng" algn="ctr">
+                      <a:solidFill>
+                        <a:srgbClr val="D7D0C4"/>
+                      </a:solidFill>
+                      <a:prstDash val="solid"/>
+                      <a:round/>
+                      <a:headEnd type="none" w="med" len="med"/>
+                      <a:tailEnd type="none" w="med" len="med"/>
+                    </a:lnB>
+                    <a:solidFill>
+                      <a:srgbClr val="FFFFFF"/>
+                    </a:solidFill>
+                  </a:tcPr>
+                </a:tc>
+                <a:tc>
+                  <a:txBody>
+                    <a:bodyPr/>
+                    <a:lstStyle/>
+                    <a:p>
+                      <a:pPr algn="l" indent="0" marL="0">
+                        <a:buNone/>
+                      </a:pPr>
+                      <a:r>
+                        <a:rPr lang="en-US" sz="1100" dirty="0">
+                          <a:solidFill>
+                            <a:srgbClr val="1B2B31"/>
+                          </a:solidFill>
+                        </a:rPr>
+                        <a:t>ends confounded; biopsy estimable</a:t>
+                      </a:r>
+                      <a:endParaRPr lang="en-US" sz="1100" dirty="0"/>
+                    </a:p>
+                  </a:txBody>
+                  <a:tcPr marL="63500" marR="63500" marT="25400" marB="25400" anchor="ctr">
+                    <a:lnL w="6350" cap="flat" cmpd="sng" algn="ctr">
+                      <a:solidFill>
+                        <a:srgbClr val="D7D0C4"/>
+                      </a:solidFill>
+                      <a:prstDash val="solid"/>
+                      <a:round/>
+                      <a:headEnd type="none" w="med" len="med"/>
+                      <a:tailEnd type="none" w="med" len="med"/>
+                    </a:lnL>
+                    <a:lnR w="6350" cap="flat" cmpd="sng" algn="ctr">
+                      <a:solidFill>
+                        <a:srgbClr val="D7D0C4"/>
+                      </a:solidFill>
+                      <a:prstDash val="solid"/>
+                      <a:round/>
+                      <a:headEnd type="none" w="med" len="med"/>
+                      <a:tailEnd type="none" w="med" len="med"/>
+                    </a:lnR>
+                    <a:lnT w="6350" cap="flat" cmpd="sng" algn="ctr">
+                      <a:solidFill>
+                        <a:srgbClr val="D7D0C4"/>
+                      </a:solidFill>
+                      <a:prstDash val="solid"/>
+                      <a:round/>
+                      <a:headEnd type="none" w="med" len="med"/>
+                      <a:tailEnd type="none" w="med" len="med"/>
+                    </a:lnT>
+                    <a:lnB w="6350" cap="flat" cmpd="sng" algn="ctr">
+                      <a:solidFill>
+                        <a:srgbClr val="D7D0C4"/>
+                      </a:solidFill>
+                      <a:prstDash val="solid"/>
+                      <a:round/>
+                      <a:headEnd type="none" w="med" len="med"/>
+                      <a:tailEnd type="none" w="med" len="med"/>
+                    </a:lnB>
+                    <a:solidFill>
+                      <a:srgbClr val="FFFFFF"/>
+                    </a:solidFill>
+                  </a:tcPr>
+                </a:tc>
+              </a:tr>
+              <a:tr h="365760">
+                <a:tc>
+                  <a:txBody>
+                    <a:bodyPr/>
+                    <a:lstStyle/>
+                    <a:p>
+                      <a:pPr algn="l" indent="0" marL="0">
+                        <a:buNone/>
+                      </a:pPr>
+                      <a:r>
+                        <a:rPr lang="en-US" sz="1100" dirty="0">
+                          <a:solidFill>
+                            <a:srgbClr val="1B2B31"/>
+                          </a:solidFill>
+                        </a:rPr>
+                        <a:t>Lobe (caudate)</a:t>
+                      </a:r>
+                      <a:endParaRPr lang="en-US" sz="1100" dirty="0"/>
+                    </a:p>
+                  </a:txBody>
+                  <a:tcPr marL="63500" marR="63500" marT="25400" marB="25400" anchor="ctr">
+                    <a:lnL w="6350" cap="flat" cmpd="sng" algn="ctr">
+                      <a:solidFill>
+                        <a:srgbClr val="D7D0C4"/>
+                      </a:solidFill>
+                      <a:prstDash val="solid"/>
+                      <a:round/>
+                      <a:headEnd type="none" w="med" len="med"/>
+                      <a:tailEnd type="none" w="med" len="med"/>
+                    </a:lnL>
+                    <a:lnR w="6350" cap="flat" cmpd="sng" algn="ctr">
+                      <a:solidFill>
+                        <a:srgbClr val="D7D0C4"/>
+                      </a:solidFill>
+                      <a:prstDash val="solid"/>
+                      <a:round/>
+                      <a:headEnd type="none" w="med" len="med"/>
+                      <a:tailEnd type="none" w="med" len="med"/>
+                    </a:lnR>
+                    <a:lnT w="6350" cap="flat" cmpd="sng" algn="ctr">
+                      <a:solidFill>
+                        <a:srgbClr val="D7D0C4"/>
+                      </a:solidFill>
+                      <a:prstDash val="solid"/>
+                      <a:round/>
+                      <a:headEnd type="none" w="med" len="med"/>
+                      <a:tailEnd type="none" w="med" len="med"/>
+                    </a:lnT>
+                    <a:lnB w="6350" cap="flat" cmpd="sng" algn="ctr">
+                      <a:solidFill>
+                        <a:srgbClr val="D7D0C4"/>
+                      </a:solidFill>
+                      <a:prstDash val="solid"/>
+                      <a:round/>
+                      <a:headEnd type="none" w="med" len="med"/>
+                      <a:tailEnd type="none" w="med" len="med"/>
+                    </a:lnB>
+                    <a:solidFill>
+                      <a:srgbClr val="FFFFFF"/>
+                    </a:solidFill>
+                  </a:tcPr>
+                </a:tc>
+                <a:tc>
+                  <a:txBody>
+                    <a:bodyPr/>
+                    <a:lstStyle/>
+                    <a:p>
+                      <a:pPr algn="l" indent="0" marL="0">
+                        <a:buNone/>
+                      </a:pPr>
+                      <a:r>
+                        <a:rPr lang="en-US" sz="1100" dirty="0">
+                          <a:solidFill>
+                            <a:srgbClr val="1B2B31"/>
+                          </a:solidFill>
+                        </a:rPr>
+                        <a:t>marker detection R / C / L within explants</a:t>
+                      </a:r>
+                      <a:endParaRPr lang="en-US" sz="1100" dirty="0"/>
+                    </a:p>
+                  </a:txBody>
+                  <a:tcPr marL="63500" marR="63500" marT="25400" marB="25400" anchor="ctr">
+                    <a:lnL w="6350" cap="flat" cmpd="sng" algn="ctr">
+                      <a:solidFill>
+                        <a:srgbClr val="D7D0C4"/>
+                      </a:solidFill>
+                      <a:prstDash val="solid"/>
+                      <a:round/>
+                      <a:headEnd type="none" w="med" len="med"/>
+                      <a:tailEnd type="none" w="med" len="med"/>
+                    </a:lnL>
+                    <a:lnR w="6350" cap="flat" cmpd="sng" algn="ctr">
+                      <a:solidFill>
+                        <a:srgbClr val="D7D0C4"/>
+                      </a:solidFill>
+                      <a:prstDash val="solid"/>
+                      <a:round/>
+                      <a:headEnd type="none" w="med" len="med"/>
+                      <a:tailEnd type="none" w="med" len="med"/>
+                    </a:lnR>
+                    <a:lnT w="6350" cap="flat" cmpd="sng" algn="ctr">
+                      <a:solidFill>
+                        <a:srgbClr val="D7D0C4"/>
+                      </a:solidFill>
+                      <a:prstDash val="solid"/>
+                      <a:round/>
+                      <a:headEnd type="none" w="med" len="med"/>
+                      <a:tailEnd type="none" w="med" len="med"/>
+                    </a:lnT>
+                    <a:lnB w="6350" cap="flat" cmpd="sng" algn="ctr">
+                      <a:solidFill>
+                        <a:srgbClr val="D7D0C4"/>
+                      </a:solidFill>
+                      <a:prstDash val="solid"/>
+                      <a:round/>
+                      <a:headEnd type="none" w="med" len="med"/>
+                      <a:tailEnd type="none" w="med" len="med"/>
+                    </a:lnB>
+                    <a:solidFill>
+                      <a:srgbClr val="FFFFFF"/>
+                    </a:solidFill>
+                  </a:tcPr>
+                </a:tc>
+                <a:tc>
+                  <a:txBody>
+                    <a:bodyPr/>
+                    <a:lstStyle/>
+                    <a:p>
+                      <a:pPr algn="l" indent="0" marL="0">
+                        <a:buNone/>
+                      </a:pPr>
+                      <a:r>
+                        <a:rPr lang="en-US" sz="1100" dirty="0">
+                          <a:solidFill>
+                            <a:srgbClr val="1B2B31"/>
+                          </a:solidFill>
+                        </a:rPr>
+                        <a:t>lobe-invariant</a:t>
+                      </a:r>
+                      <a:endParaRPr lang="en-US" sz="1100" dirty="0"/>
+                    </a:p>
+                  </a:txBody>
+                  <a:tcPr marL="63500" marR="63500" marT="25400" marB="25400" anchor="ctr">
+                    <a:lnL w="6350" cap="flat" cmpd="sng" algn="ctr">
+                      <a:solidFill>
+                        <a:srgbClr val="D7D0C4"/>
+                      </a:solidFill>
+                      <a:prstDash val="solid"/>
+                      <a:round/>
+                      <a:headEnd type="none" w="med" len="med"/>
+                      <a:tailEnd type="none" w="med" len="med"/>
+                    </a:lnL>
+                    <a:lnR w="6350" cap="flat" cmpd="sng" algn="ctr">
+                      <a:solidFill>
+                        <a:srgbClr val="D7D0C4"/>
+                      </a:solidFill>
+                      <a:prstDash val="solid"/>
+                      <a:round/>
+                      <a:headEnd type="none" w="med" len="med"/>
+                      <a:tailEnd type="none" w="med" len="med"/>
+                    </a:lnR>
+                    <a:lnT w="6350" cap="flat" cmpd="sng" algn="ctr">
+                      <a:solidFill>
+                        <a:srgbClr val="D7D0C4"/>
+                      </a:solidFill>
+                      <a:prstDash val="solid"/>
+                      <a:round/>
+                      <a:headEnd type="none" w="med" len="med"/>
+                      <a:tailEnd type="none" w="med" len="med"/>
+                    </a:lnT>
+                    <a:lnB w="6350" cap="flat" cmpd="sng" algn="ctr">
+                      <a:solidFill>
+                        <a:srgbClr val="D7D0C4"/>
+                      </a:solidFill>
+                      <a:prstDash val="solid"/>
+                      <a:round/>
+                      <a:headEnd type="none" w="med" len="med"/>
+                      <a:tailEnd type="none" w="med" len="med"/>
+                    </a:lnB>
+                    <a:solidFill>
+                      <a:srgbClr val="FFFFFF"/>
+                    </a:solidFill>
+                  </a:tcPr>
+                </a:tc>
+              </a:tr>
+              <a:tr h="365760">
+                <a:tc>
+                  <a:txBody>
+                    <a:bodyPr/>
+                    <a:lstStyle/>
+                    <a:p>
+                      <a:pPr algn="l" indent="0" marL="0">
+                        <a:buNone/>
+                      </a:pPr>
+                      <a:r>
+                        <a:rPr lang="en-US" sz="1100" dirty="0">
+                          <a:solidFill>
+                            <a:srgbClr val="1B2B31"/>
+                          </a:solidFill>
+                        </a:rPr>
+                        <a:t>Sequencing depth</a:t>
+                      </a:r>
+                      <a:endParaRPr lang="en-US" sz="1100" dirty="0"/>
+                    </a:p>
+                  </a:txBody>
+                  <a:tcPr marL="63500" marR="63500" marT="25400" marB="25400" anchor="ctr">
+                    <a:lnL w="6350" cap="flat" cmpd="sng" algn="ctr">
+                      <a:solidFill>
+                        <a:srgbClr val="D7D0C4"/>
+                      </a:solidFill>
+                      <a:prstDash val="solid"/>
+                      <a:round/>
+                      <a:headEnd type="none" w="med" len="med"/>
+                      <a:tailEnd type="none" w="med" len="med"/>
+                    </a:lnL>
+                    <a:lnR w="6350" cap="flat" cmpd="sng" algn="ctr">
+                      <a:solidFill>
+                        <a:srgbClr val="D7D0C4"/>
+                      </a:solidFill>
+                      <a:prstDash val="solid"/>
+                      <a:round/>
+                      <a:headEnd type="none" w="med" len="med"/>
+                      <a:tailEnd type="none" w="med" len="med"/>
+                    </a:lnR>
+                    <a:lnT w="6350" cap="flat" cmpd="sng" algn="ctr">
+                      <a:solidFill>
+                        <a:srgbClr val="D7D0C4"/>
+                      </a:solidFill>
+                      <a:prstDash val="solid"/>
+                      <a:round/>
+                      <a:headEnd type="none" w="med" len="med"/>
+                      <a:tailEnd type="none" w="med" len="med"/>
+                    </a:lnT>
+                    <a:lnB w="6350" cap="flat" cmpd="sng" algn="ctr">
+                      <a:solidFill>
+                        <a:srgbClr val="D7D0C4"/>
+                      </a:solidFill>
+                      <a:prstDash val="solid"/>
+                      <a:round/>
+                      <a:headEnd type="none" w="med" len="med"/>
+                      <a:tailEnd type="none" w="med" len="med"/>
+                    </a:lnB>
+                    <a:solidFill>
+                      <a:srgbClr val="FFFFFF"/>
+                    </a:solidFill>
+                  </a:tcPr>
+                </a:tc>
+                <a:tc>
+                  <a:txBody>
+                    <a:bodyPr/>
+                    <a:lstStyle/>
+                    <a:p>
+                      <a:pPr algn="l" indent="0" marL="0">
+                        <a:buNone/>
+                      </a:pPr>
+                      <a:r>
+                        <a:rPr lang="en-US" sz="1100" dirty="0">
+                          <a:solidFill>
+                            <a:srgbClr val="1B2B31"/>
+                          </a:solidFill>
+                        </a:rPr>
+                        <a:t>binomial down-thin to B = 1,000 / 1,500 / 3,000 UMIs</a:t>
+                      </a:r>
+                      <a:endParaRPr lang="en-US" sz="1100" dirty="0"/>
+                    </a:p>
+                  </a:txBody>
+                  <a:tcPr marL="63500" marR="63500" marT="25400" marB="25400" anchor="ctr">
+                    <a:lnL w="6350" cap="flat" cmpd="sng" algn="ctr">
+                      <a:solidFill>
+                        <a:srgbClr val="D7D0C4"/>
+                      </a:solidFill>
+                      <a:prstDash val="solid"/>
+                      <a:round/>
+                      <a:headEnd type="none" w="med" len="med"/>
+                      <a:tailEnd type="none" w="med" len="med"/>
+                    </a:lnL>
+                    <a:lnR w="6350" cap="flat" cmpd="sng" algn="ctr">
+                      <a:solidFill>
+                        <a:srgbClr val="D7D0C4"/>
+                      </a:solidFill>
+                      <a:prstDash val="solid"/>
+                      <a:round/>
+                      <a:headEnd type="none" w="med" len="med"/>
+                      <a:tailEnd type="none" w="med" len="med"/>
+                    </a:lnR>
+                    <a:lnT w="6350" cap="flat" cmpd="sng" algn="ctr">
+                      <a:solidFill>
+                        <a:srgbClr val="D7D0C4"/>
+                      </a:solidFill>
+                      <a:prstDash val="solid"/>
+                      <a:round/>
+                      <a:headEnd type="none" w="med" len="med"/>
+                      <a:tailEnd type="none" w="med" len="med"/>
+                    </a:lnT>
+                    <a:lnB w="6350" cap="flat" cmpd="sng" algn="ctr">
+                      <a:solidFill>
+                        <a:srgbClr val="D7D0C4"/>
+                      </a:solidFill>
+                      <a:prstDash val="solid"/>
+                      <a:round/>
+                      <a:headEnd type="none" w="med" len="med"/>
+                      <a:tailEnd type="none" w="med" len="med"/>
+                    </a:lnB>
+                    <a:solidFill>
+                      <a:srgbClr val="FFFFFF"/>
+                    </a:solidFill>
+                  </a:tcPr>
+                </a:tc>
+                <a:tc>
+                  <a:txBody>
+                    <a:bodyPr/>
+                    <a:lstStyle/>
+                    <a:p>
+                      <a:pPr algn="l" indent="0" marL="0">
+                        <a:buNone/>
+                      </a:pPr>
+                      <a:r>
+                        <a:rPr lang="en-US" sz="1100" dirty="0">
+                          <a:solidFill>
+                            <a:srgbClr val="1B2B31"/>
+                          </a:solidFill>
+                        </a:rPr>
+                        <a:t>PC-share flat at every B (SD 0.006–0.010)</a:t>
+                      </a:r>
+                      <a:endParaRPr lang="en-US" sz="1100" dirty="0"/>
+                    </a:p>
+                  </a:txBody>
+                  <a:tcPr marL="63500" marR="63500" marT="25400" marB="25400" anchor="ctr">
+                    <a:lnL w="6350" cap="flat" cmpd="sng" algn="ctr">
+                      <a:solidFill>
+                        <a:srgbClr val="D7D0C4"/>
+                      </a:solidFill>
+                      <a:prstDash val="solid"/>
+                      <a:round/>
+                      <a:headEnd type="none" w="med" len="med"/>
+                      <a:tailEnd type="none" w="med" len="med"/>
+                    </a:lnL>
+                    <a:lnR w="6350" cap="flat" cmpd="sng" algn="ctr">
+                      <a:solidFill>
+                        <a:srgbClr val="D7D0C4"/>
+                      </a:solidFill>
+                      <a:prstDash val="solid"/>
+                      <a:round/>
+                      <a:headEnd type="none" w="med" len="med"/>
+                      <a:tailEnd type="none" w="med" len="med"/>
+                    </a:lnR>
+                    <a:lnT w="6350" cap="flat" cmpd="sng" algn="ctr">
+                      <a:solidFill>
+                        <a:srgbClr val="D7D0C4"/>
+                      </a:solidFill>
+                      <a:prstDash val="solid"/>
+                      <a:round/>
+                      <a:headEnd type="none" w="med" len="med"/>
+                      <a:tailEnd type="none" w="med" len="med"/>
+                    </a:lnT>
+                    <a:lnB w="6350" cap="flat" cmpd="sng" algn="ctr">
+                      <a:solidFill>
+                        <a:srgbClr val="D7D0C4"/>
+                      </a:solidFill>
+                      <a:prstDash val="solid"/>
+                      <a:round/>
+                      <a:headEnd type="none" w="med" len="med"/>
+                      <a:tailEnd type="none" w="med" len="med"/>
+                    </a:lnB>
+                    <a:solidFill>
+                      <a:srgbClr val="FFFFFF"/>
+                    </a:solidFill>
+                  </a:tcPr>
+                </a:tc>
+              </a:tr>
+              <a:tr h="365760">
+                <a:tc>
+                  <a:txBody>
+                    <a:bodyPr/>
+                    <a:lstStyle/>
+                    <a:p>
+                      <a:pPr algn="l" indent="0" marL="0">
+                        <a:buNone/>
+                      </a:pPr>
+                      <a:r>
+                        <a:rPr lang="en-US" sz="1100" dirty="0">
+                          <a:solidFill>
+                            <a:srgbClr val="1B2B31"/>
+                          </a:solidFill>
+                        </a:rPr>
+                        <a:t>Ambient RNA (“soup”)</a:t>
+                      </a:r>
+                      <a:endParaRPr lang="en-US" sz="1100" dirty="0"/>
+                    </a:p>
+                  </a:txBody>
+                  <a:tcPr marL="63500" marR="63500" marT="25400" marB="25400" anchor="ctr">
+                    <a:lnL w="6350" cap="flat" cmpd="sng" algn="ctr">
+                      <a:solidFill>
+                        <a:srgbClr val="D7D0C4"/>
+                      </a:solidFill>
+                      <a:prstDash val="solid"/>
+                      <a:round/>
+                      <a:headEnd type="none" w="med" len="med"/>
+                      <a:tailEnd type="none" w="med" len="med"/>
+                    </a:lnL>
+                    <a:lnR w="6350" cap="flat" cmpd="sng" algn="ctr">
+                      <a:solidFill>
+                        <a:srgbClr val="D7D0C4"/>
+                      </a:solidFill>
+                      <a:prstDash val="solid"/>
+                      <a:round/>
+                      <a:headEnd type="none" w="med" len="med"/>
+                      <a:tailEnd type="none" w="med" len="med"/>
+                    </a:lnR>
+                    <a:lnT w="6350" cap="flat" cmpd="sng" algn="ctr">
+                      <a:solidFill>
+                        <a:srgbClr val="D7D0C4"/>
+                      </a:solidFill>
+                      <a:prstDash val="solid"/>
+                      <a:round/>
+                      <a:headEnd type="none" w="med" len="med"/>
+                      <a:tailEnd type="none" w="med" len="med"/>
+                    </a:lnT>
+                    <a:lnB w="6350" cap="flat" cmpd="sng" algn="ctr">
+                      <a:solidFill>
+                        <a:srgbClr val="D7D0C4"/>
+                      </a:solidFill>
+                      <a:prstDash val="solid"/>
+                      <a:round/>
+                      <a:headEnd type="none" w="med" len="med"/>
+                      <a:tailEnd type="none" w="med" len="med"/>
+                    </a:lnB>
+                    <a:solidFill>
+                      <a:srgbClr val="FFFFFF"/>
+                    </a:solidFill>
+                  </a:tcPr>
+                </a:tc>
+                <a:tc>
+                  <a:txBody>
+                    <a:bodyPr/>
+                    <a:lstStyle/>
+                    <a:p>
+                      <a:pPr algn="l" indent="0" marL="0">
+                        <a:buNone/>
+                      </a:pPr>
+                      <a:r>
+                        <a:rPr lang="en-US" sz="1100" dirty="0">
+                          <a:solidFill>
+                            <a:srgbClr val="1B2B31"/>
+                          </a:solidFill>
+                        </a:rPr>
+                        <a:t>corr( ALB burden , dual fraction ) across 38 donors = +0.04</a:t>
+                      </a:r>
+                      <a:endParaRPr lang="en-US" sz="1100" dirty="0"/>
+                    </a:p>
+                  </a:txBody>
+                  <a:tcPr marL="63500" marR="63500" marT="25400" marB="25400" anchor="ctr">
+                    <a:lnL w="6350" cap="flat" cmpd="sng" algn="ctr">
+                      <a:solidFill>
+                        <a:srgbClr val="D7D0C4"/>
+                      </a:solidFill>
+                      <a:prstDash val="solid"/>
+                      <a:round/>
+                      <a:headEnd type="none" w="med" len="med"/>
+                      <a:tailEnd type="none" w="med" len="med"/>
+                    </a:lnL>
+                    <a:lnR w="6350" cap="flat" cmpd="sng" algn="ctr">
+                      <a:solidFill>
+                        <a:srgbClr val="D7D0C4"/>
+                      </a:solidFill>
+                      <a:prstDash val="solid"/>
+                      <a:round/>
+                      <a:headEnd type="none" w="med" len="med"/>
+                      <a:tailEnd type="none" w="med" len="med"/>
+                    </a:lnR>
+                    <a:lnT w="6350" cap="flat" cmpd="sng" algn="ctr">
+                      <a:solidFill>
+                        <a:srgbClr val="D7D0C4"/>
+                      </a:solidFill>
+                      <a:prstDash val="solid"/>
+                      <a:round/>
+                      <a:headEnd type="none" w="med" len="med"/>
+                      <a:tailEnd type="none" w="med" len="med"/>
+                    </a:lnT>
+                    <a:lnB w="6350" cap="flat" cmpd="sng" algn="ctr">
+                      <a:solidFill>
+                        <a:srgbClr val="D7D0C4"/>
+                      </a:solidFill>
+                      <a:prstDash val="solid"/>
+                      <a:round/>
+                      <a:headEnd type="none" w="med" len="med"/>
+                      <a:tailEnd type="none" w="med" len="med"/>
+                    </a:lnB>
+                    <a:solidFill>
+                      <a:srgbClr val="FFFFFF"/>
+                    </a:solidFill>
+                  </a:tcPr>
+                </a:tc>
+                <a:tc>
+                  <a:txBody>
+                    <a:bodyPr/>
+                    <a:lstStyle/>
+                    <a:p>
+                      <a:pPr algn="l" indent="0" marL="0">
+                        <a:buNone/>
+                      </a:pPr>
+                      <a:r>
+                        <a:rPr lang="en-US" sz="1100" dirty="0">
+                          <a:solidFill>
+                            <a:srgbClr val="1B2B31"/>
+                          </a:solidFill>
+                        </a:rPr>
+                        <a:t>does not drive co-expression</a:t>
+                      </a:r>
+                      <a:endParaRPr lang="en-US" sz="1100" dirty="0"/>
+                    </a:p>
+                  </a:txBody>
+                  <a:tcPr marL="63500" marR="63500" marT="25400" marB="25400" anchor="ctr">
+                    <a:lnL w="6350" cap="flat" cmpd="sng" algn="ctr">
+                      <a:solidFill>
+                        <a:srgbClr val="D7D0C4"/>
+                      </a:solidFill>
+                      <a:prstDash val="solid"/>
+                      <a:round/>
+                      <a:headEnd type="none" w="med" len="med"/>
+                      <a:tailEnd type="none" w="med" len="med"/>
+                    </a:lnL>
+                    <a:lnR w="6350" cap="flat" cmpd="sng" algn="ctr">
+                      <a:solidFill>
+                        <a:srgbClr val="D7D0C4"/>
+                      </a:solidFill>
+                      <a:prstDash val="solid"/>
+                      <a:round/>
+                      <a:headEnd type="none" w="med" len="med"/>
+                      <a:tailEnd type="none" w="med" len="med"/>
+                    </a:lnR>
+                    <a:lnT w="6350" cap="flat" cmpd="sng" algn="ctr">
+                      <a:solidFill>
+                        <a:srgbClr val="D7D0C4"/>
+                      </a:solidFill>
+                      <a:prstDash val="solid"/>
+                      <a:round/>
+                      <a:headEnd type="none" w="med" len="med"/>
+                      <a:tailEnd type="none" w="med" len="med"/>
+                    </a:lnT>
+                    <a:lnB w="6350" cap="flat" cmpd="sng" algn="ctr">
+                      <a:solidFill>
+                        <a:srgbClr val="D7D0C4"/>
+                      </a:solidFill>
+                      <a:prstDash val="solid"/>
+                      <a:round/>
+                      <a:headEnd type="none" w="med" len="med"/>
+                      <a:tailEnd type="none" w="med" len="med"/>
+                    </a:lnB>
+                    <a:solidFill>
+                      <a:srgbClr val="FFFFFF"/>
+                    </a:solidFill>
+                  </a:tcPr>
+                </a:tc>
+              </a:tr>
+              <a:tr h="365760">
+                <a:tc>
+                  <a:txBody>
+                    <a:bodyPr/>
+                    <a:lstStyle/>
+                    <a:p>
+                      <a:pPr algn="l" indent="0" marL="0">
+                        <a:buNone/>
+                      </a:pPr>
+                      <a:r>
+                        <a:rPr lang="en-US" sz="1100" dirty="0">
+                          <a:solidFill>
+                            <a:srgbClr val="1B2B31"/>
+                          </a:solidFill>
+                        </a:rPr>
+                        <a:t>Cholangiocyte mis-annotation</a:t>
+                      </a:r>
+                      <a:endParaRPr lang="en-US" sz="1100" dirty="0"/>
+                    </a:p>
+                  </a:txBody>
+                  <a:tcPr marL="63500" marR="63500" marT="25400" marB="25400" anchor="ctr">
+                    <a:lnL w="6350" cap="flat" cmpd="sng" algn="ctr">
+                      <a:solidFill>
+                        <a:srgbClr val="D7D0C4"/>
+                      </a:solidFill>
+                      <a:prstDash val="solid"/>
+                      <a:round/>
+                      <a:headEnd type="none" w="med" len="med"/>
+                      <a:tailEnd type="none" w="med" len="med"/>
+                    </a:lnL>
+                    <a:lnR w="6350" cap="flat" cmpd="sng" algn="ctr">
+                      <a:solidFill>
+                        <a:srgbClr val="D7D0C4"/>
+                      </a:solidFill>
+                      <a:prstDash val="solid"/>
+                      <a:round/>
+                      <a:headEnd type="none" w="med" len="med"/>
+                      <a:tailEnd type="none" w="med" len="med"/>
+                    </a:lnR>
+                    <a:lnT w="6350" cap="flat" cmpd="sng" algn="ctr">
+                      <a:solidFill>
+                        <a:srgbClr val="D7D0C4"/>
+                      </a:solidFill>
+                      <a:prstDash val="solid"/>
+                      <a:round/>
+                      <a:headEnd type="none" w="med" len="med"/>
+                      <a:tailEnd type="none" w="med" len="med"/>
+                    </a:lnT>
+                    <a:lnB w="6350" cap="flat" cmpd="sng" algn="ctr">
+                      <a:solidFill>
+                        <a:srgbClr val="D7D0C4"/>
+                      </a:solidFill>
+                      <a:prstDash val="solid"/>
+                      <a:round/>
+                      <a:headEnd type="none" w="med" len="med"/>
+                      <a:tailEnd type="none" w="med" len="med"/>
+                    </a:lnB>
+                    <a:solidFill>
+                      <a:srgbClr val="FFFFFF"/>
+                    </a:solidFill>
+                  </a:tcPr>
+                </a:tc>
+                <a:tc>
+                  <a:txBody>
+                    <a:bodyPr/>
+                    <a:lstStyle/>
+                    <a:p>
+                      <a:pPr algn="l" indent="0" marL="0">
+                        <a:buNone/>
+                      </a:pPr>
+                      <a:r>
+                        <a:rPr lang="en-US" sz="1100" dirty="0">
+                          <a:solidFill>
+                            <a:srgbClr val="1B2B31"/>
+                          </a:solidFill>
+                        </a:rPr>
+                        <a:t>KRT19⁺ ≤ 0.001, EPCAM⁺ ≤ 0.003 in every anchor class</a:t>
+                      </a:r>
+                      <a:endParaRPr lang="en-US" sz="1100" dirty="0"/>
+                    </a:p>
+                  </a:txBody>
+                  <a:tcPr marL="63500" marR="63500" marT="25400" marB="25400" anchor="ctr">
+                    <a:lnL w="6350" cap="flat" cmpd="sng" algn="ctr">
+                      <a:solidFill>
+                        <a:srgbClr val="D7D0C4"/>
+                      </a:solidFill>
+                      <a:prstDash val="solid"/>
+                      <a:round/>
+                      <a:headEnd type="none" w="med" len="med"/>
+                      <a:tailEnd type="none" w="med" len="med"/>
+                    </a:lnL>
+                    <a:lnR w="6350" cap="flat" cmpd="sng" algn="ctr">
+                      <a:solidFill>
+                        <a:srgbClr val="D7D0C4"/>
+                      </a:solidFill>
+                      <a:prstDash val="solid"/>
+                      <a:round/>
+                      <a:headEnd type="none" w="med" len="med"/>
+                      <a:tailEnd type="none" w="med" len="med"/>
+                    </a:lnR>
+                    <a:lnT w="6350" cap="flat" cmpd="sng" algn="ctr">
+                      <a:solidFill>
+                        <a:srgbClr val="D7D0C4"/>
+                      </a:solidFill>
+                      <a:prstDash val="solid"/>
+                      <a:round/>
+                      <a:headEnd type="none" w="med" len="med"/>
+                      <a:tailEnd type="none" w="med" len="med"/>
+                    </a:lnT>
+                    <a:lnB w="6350" cap="flat" cmpd="sng" algn="ctr">
+                      <a:solidFill>
+                        <a:srgbClr val="D7D0C4"/>
+                      </a:solidFill>
+                      <a:prstDash val="solid"/>
+                      <a:round/>
+                      <a:headEnd type="none" w="med" len="med"/>
+                      <a:tailEnd type="none" w="med" len="med"/>
+                    </a:lnB>
+                    <a:solidFill>
+                      <a:srgbClr val="FFFFFF"/>
+                    </a:solidFill>
+                  </a:tcPr>
+                </a:tc>
+                <a:tc>
+                  <a:txBody>
+                    <a:bodyPr/>
+                    <a:lstStyle/>
+                    <a:p>
+                      <a:pPr algn="l" indent="0" marL="0">
+                        <a:buNone/>
+                      </a:pPr>
+                      <a:r>
+                        <a:rPr lang="en-US" sz="1100" dirty="0">
+                          <a:solidFill>
+                            <a:srgbClr val="1B2B31"/>
+                          </a:solidFill>
+                        </a:rPr>
+                        <a:t>not contaminating cholangiocytes</a:t>
+                      </a:r>
+                      <a:endParaRPr lang="en-US" sz="1100" dirty="0"/>
+                    </a:p>
+                  </a:txBody>
+                  <a:tcPr marL="63500" marR="63500" marT="25400" marB="25400" anchor="ctr">
+                    <a:lnL w="6350" cap="flat" cmpd="sng" algn="ctr">
+                      <a:solidFill>
+                        <a:srgbClr val="D7D0C4"/>
+                      </a:solidFill>
+                      <a:prstDash val="solid"/>
+                      <a:round/>
+                      <a:headEnd type="none" w="med" len="med"/>
+                      <a:tailEnd type="none" w="med" len="med"/>
+                    </a:lnL>
+                    <a:lnR w="6350" cap="flat" cmpd="sng" algn="ctr">
+                      <a:solidFill>
+                        <a:srgbClr val="D7D0C4"/>
+                      </a:solidFill>
+                      <a:prstDash val="solid"/>
+                      <a:round/>
+                      <a:headEnd type="none" w="med" len="med"/>
+                      <a:tailEnd type="none" w="med" len="med"/>
+                    </a:lnR>
+                    <a:lnT w="6350" cap="flat" cmpd="sng" algn="ctr">
+                      <a:solidFill>
+                        <a:srgbClr val="D7D0C4"/>
+                      </a:solidFill>
+                      <a:prstDash val="solid"/>
+                      <a:round/>
+                      <a:headEnd type="none" w="med" len="med"/>
+                      <a:tailEnd type="none" w="med" len="med"/>
+                    </a:lnT>
+                    <a:lnB w="6350" cap="flat" cmpd="sng" algn="ctr">
+                      <a:solidFill>
+                        <a:srgbClr val="D7D0C4"/>
+                      </a:solidFill>
+                      <a:prstDash val="solid"/>
+                      <a:round/>
+                      <a:headEnd type="none" w="med" len="med"/>
+                      <a:tailEnd type="none" w="med" len="med"/>
+                    </a:lnB>
+                    <a:solidFill>
+                      <a:srgbClr val="FFFFFF"/>
+                    </a:solidFill>
+                  </a:tcPr>
+                </a:tc>
+              </a:tr>
+              <a:tr h="365760">
+                <a:tc>
+                  <a:txBody>
+                    <a:bodyPr/>
+                    <a:lstStyle/>
+                    <a:p>
+                      <a:pPr algn="l" indent="0" marL="0">
+                        <a:buNone/>
+                      </a:pPr>
+                      <a:r>
+                        <a:rPr lang="en-US" sz="1100" dirty="0">
+                          <a:solidFill>
+                            <a:srgbClr val="1B2B31"/>
+                          </a:solidFill>
+                        </a:rPr>
+                        <a:t>Ploidy / complexity</a:t>
+                      </a:r>
+                      <a:endParaRPr lang="en-US" sz="1100" dirty="0"/>
+                    </a:p>
+                  </a:txBody>
+                  <a:tcPr marL="63500" marR="63500" marT="25400" marB="25400" anchor="ctr">
+                    <a:lnL w="6350" cap="flat" cmpd="sng" algn="ctr">
+                      <a:solidFill>
+                        <a:srgbClr val="D7D0C4"/>
+                      </a:solidFill>
+                      <a:prstDash val="solid"/>
+                      <a:round/>
+                      <a:headEnd type="none" w="med" len="med"/>
+                      <a:tailEnd type="none" w="med" len="med"/>
+                    </a:lnL>
+                    <a:lnR w="6350" cap="flat" cmpd="sng" algn="ctr">
+                      <a:solidFill>
+                        <a:srgbClr val="D7D0C4"/>
+                      </a:solidFill>
+                      <a:prstDash val="solid"/>
+                      <a:round/>
+                      <a:headEnd type="none" w="med" len="med"/>
+                      <a:tailEnd type="none" w="med" len="med"/>
+                    </a:lnR>
+                    <a:lnT w="6350" cap="flat" cmpd="sng" algn="ctr">
+                      <a:solidFill>
+                        <a:srgbClr val="D7D0C4"/>
+                      </a:solidFill>
+                      <a:prstDash val="solid"/>
+                      <a:round/>
+                      <a:headEnd type="none" w="med" len="med"/>
+                      <a:tailEnd type="none" w="med" len="med"/>
+                    </a:lnT>
+                    <a:lnB w="6350" cap="flat" cmpd="sng" algn="ctr">
+                      <a:solidFill>
+                        <a:srgbClr val="D7D0C4"/>
+                      </a:solidFill>
+                      <a:prstDash val="solid"/>
+                      <a:round/>
+                      <a:headEnd type="none" w="med" len="med"/>
+                      <a:tailEnd type="none" w="med" len="med"/>
+                    </a:lnB>
+                    <a:solidFill>
+                      <a:srgbClr val="FFFFFF"/>
+                    </a:solidFill>
+                  </a:tcPr>
+                </a:tc>
+                <a:tc>
+                  <a:txBody>
+                    <a:bodyPr/>
+                    <a:lstStyle/>
+                    <a:p>
+                      <a:pPr algn="l" indent="0" marL="0">
+                        <a:buNone/>
+                      </a:pPr>
+                      <a:r>
+                        <a:rPr lang="en-US" sz="1100" dirty="0">
+                          <a:solidFill>
+                            <a:srgbClr val="1B2B31"/>
+                          </a:solidFill>
+                        </a:rPr>
+                        <a:t>nFeatures by stage: 2218 / 3063 / 3169 / 2641 / 1984</a:t>
+                      </a:r>
+                      <a:endParaRPr lang="en-US" sz="1100" dirty="0"/>
+                    </a:p>
+                  </a:txBody>
+                  <a:tcPr marL="63500" marR="63500" marT="25400" marB="25400" anchor="ctr">
+                    <a:lnL w="6350" cap="flat" cmpd="sng" algn="ctr">
+                      <a:solidFill>
+                        <a:srgbClr val="D7D0C4"/>
+                      </a:solidFill>
+                      <a:prstDash val="solid"/>
+                      <a:round/>
+                      <a:headEnd type="none" w="med" len="med"/>
+                      <a:tailEnd type="none" w="med" len="med"/>
+                    </a:lnL>
+                    <a:lnR w="6350" cap="flat" cmpd="sng" algn="ctr">
+                      <a:solidFill>
+                        <a:srgbClr val="D7D0C4"/>
+                      </a:solidFill>
+                      <a:prstDash val="solid"/>
+                      <a:round/>
+                      <a:headEnd type="none" w="med" len="med"/>
+                      <a:tailEnd type="none" w="med" len="med"/>
+                    </a:lnR>
+                    <a:lnT w="6350" cap="flat" cmpd="sng" algn="ctr">
+                      <a:solidFill>
+                        <a:srgbClr val="D7D0C4"/>
+                      </a:solidFill>
+                      <a:prstDash val="solid"/>
+                      <a:round/>
+                      <a:headEnd type="none" w="med" len="med"/>
+                      <a:tailEnd type="none" w="med" len="med"/>
+                    </a:lnT>
+                    <a:lnB w="6350" cap="flat" cmpd="sng" algn="ctr">
+                      <a:solidFill>
+                        <a:srgbClr val="D7D0C4"/>
+                      </a:solidFill>
+                      <a:prstDash val="solid"/>
+                      <a:round/>
+                      <a:headEnd type="none" w="med" len="med"/>
+                      <a:tailEnd type="none" w="med" len="med"/>
+                    </a:lnB>
+                    <a:solidFill>
+                      <a:srgbClr val="FFFFFF"/>
+                    </a:solidFill>
+                  </a:tcPr>
+                </a:tc>
+                <a:tc>
+                  <a:txBody>
+                    <a:bodyPr/>
+                    <a:lstStyle/>
+                    <a:p>
+                      <a:pPr algn="l" indent="0" marL="0">
+                        <a:buNone/>
+                      </a:pPr>
+                      <a:r>
+                        <a:rPr lang="en-US" sz="1100" dirty="0">
+                          <a:solidFill>
+                            <a:srgbClr val="1B2B31"/>
+                          </a:solidFill>
+                        </a:rPr>
+                        <a:t>non-monotone — does not track stage</a:t>
+                      </a:r>
+                      <a:endParaRPr lang="en-US" sz="1100" dirty="0"/>
+                    </a:p>
+                  </a:txBody>
+                  <a:tcPr marL="63500" marR="63500" marT="25400" marB="25400" anchor="ctr">
+                    <a:lnL w="6350" cap="flat" cmpd="sng" algn="ctr">
+                      <a:solidFill>
+                        <a:srgbClr val="D7D0C4"/>
+                      </a:solidFill>
+                      <a:prstDash val="solid"/>
+                      <a:round/>
+                      <a:headEnd type="none" w="med" len="med"/>
+                      <a:tailEnd type="none" w="med" len="med"/>
+                    </a:lnL>
+                    <a:lnR w="6350" cap="flat" cmpd="sng" algn="ctr">
+                      <a:solidFill>
+                        <a:srgbClr val="D7D0C4"/>
+                      </a:solidFill>
+                      <a:prstDash val="solid"/>
+                      <a:round/>
+                      <a:headEnd type="none" w="med" len="med"/>
+                      <a:tailEnd type="none" w="med" len="med"/>
+                    </a:lnR>
+                    <a:lnT w="6350" cap="flat" cmpd="sng" algn="ctr">
+                      <a:solidFill>
+                        <a:srgbClr val="D7D0C4"/>
+                      </a:solidFill>
+                      <a:prstDash val="solid"/>
+                      <a:round/>
+                      <a:headEnd type="none" w="med" len="med"/>
+                      <a:tailEnd type="none" w="med" len="med"/>
+                    </a:lnT>
+                    <a:lnB w="6350" cap="flat" cmpd="sng" algn="ctr">
+                      <a:solidFill>
+                        <a:srgbClr val="D7D0C4"/>
+                      </a:solidFill>
+                      <a:prstDash val="solid"/>
+                      <a:round/>
+                      <a:headEnd type="none" w="med" len="med"/>
+                      <a:tailEnd type="none" w="med" len="med"/>
+                    </a:lnB>
+                    <a:solidFill>
+                      <a:srgbClr val="FFFFFF"/>
+                    </a:solidFill>
+                  </a:tcPr>
+                </a:tc>
+              </a:tr>
+              <a:tr h="365760">
+                <a:tc>
+                  <a:txBody>
+                    <a:bodyPr/>
+                    <a:lstStyle/>
+                    <a:p>
+                      <a:pPr algn="l" indent="0" marL="0">
+                        <a:buNone/>
+                      </a:pPr>
+                      <a:r>
+                        <a:rPr lang="en-US" sz="1100" dirty="0">
+                          <a:solidFill>
+                            <a:srgbClr val="1B2B31"/>
+                          </a:solidFill>
+                        </a:rPr>
+                        <a:t>Depth-match discard</a:t>
+                      </a:r>
+                      <a:endParaRPr lang="en-US" sz="1100" dirty="0"/>
+                    </a:p>
+                  </a:txBody>
+                  <a:tcPr marL="63500" marR="63500" marT="25400" marB="25400" anchor="ctr">
+                    <a:lnL w="6350" cap="flat" cmpd="sng" algn="ctr">
+                      <a:solidFill>
+                        <a:srgbClr val="D7D0C4"/>
+                      </a:solidFill>
+                      <a:prstDash val="solid"/>
+                      <a:round/>
+                      <a:headEnd type="none" w="med" len="med"/>
+                      <a:tailEnd type="none" w="med" len="med"/>
+                    </a:lnL>
+                    <a:lnR w="6350" cap="flat" cmpd="sng" algn="ctr">
+                      <a:solidFill>
+                        <a:srgbClr val="D7D0C4"/>
+                      </a:solidFill>
+                      <a:prstDash val="solid"/>
+                      <a:round/>
+                      <a:headEnd type="none" w="med" len="med"/>
+                      <a:tailEnd type="none" w="med" len="med"/>
+                    </a:lnR>
+                    <a:lnT w="6350" cap="flat" cmpd="sng" algn="ctr">
+                      <a:solidFill>
+                        <a:srgbClr val="D7D0C4"/>
+                      </a:solidFill>
+                      <a:prstDash val="solid"/>
+                      <a:round/>
+                      <a:headEnd type="none" w="med" len="med"/>
+                      <a:tailEnd type="none" w="med" len="med"/>
+                    </a:lnT>
+                    <a:lnB w="6350" cap="flat" cmpd="sng" algn="ctr">
+                      <a:solidFill>
+                        <a:srgbClr val="D7D0C4"/>
+                      </a:solidFill>
+                      <a:prstDash val="solid"/>
+                      <a:round/>
+                      <a:headEnd type="none" w="med" len="med"/>
+                      <a:tailEnd type="none" w="med" len="med"/>
+                    </a:lnB>
+                    <a:solidFill>
+                      <a:srgbClr val="FFFFFF"/>
+                    </a:solidFill>
+                  </a:tcPr>
+                </a:tc>
+                <a:tc>
+                  <a:txBody>
+                    <a:bodyPr/>
+                    <a:lstStyle/>
+                    <a:p>
+                      <a:pPr algn="l" indent="0" marL="0">
+                        <a:buNone/>
+                      </a:pPr>
+                      <a:r>
+                        <a:rPr lang="en-US" sz="1100" dirty="0">
+                          <a:solidFill>
+                            <a:srgbClr val="1B2B31"/>
+                          </a:solidFill>
+                        </a:rPr>
+                        <a:t>3.5–7.8 % dropped below B, uniformly lower-detection</a:t>
+                      </a:r>
+                      <a:endParaRPr lang="en-US" sz="1100" dirty="0"/>
+                    </a:p>
+                  </a:txBody>
+                  <a:tcPr marL="63500" marR="63500" marT="25400" marB="25400" anchor="ctr">
+                    <a:lnL w="6350" cap="flat" cmpd="sng" algn="ctr">
+                      <a:solidFill>
+                        <a:srgbClr val="D7D0C4"/>
+                      </a:solidFill>
+                      <a:prstDash val="solid"/>
+                      <a:round/>
+                      <a:headEnd type="none" w="med" len="med"/>
+                      <a:tailEnd type="none" w="med" len="med"/>
+                    </a:lnL>
+                    <a:lnR w="6350" cap="flat" cmpd="sng" algn="ctr">
+                      <a:solidFill>
+                        <a:srgbClr val="D7D0C4"/>
+                      </a:solidFill>
+                      <a:prstDash val="solid"/>
+                      <a:round/>
+                      <a:headEnd type="none" w="med" len="med"/>
+                      <a:tailEnd type="none" w="med" len="med"/>
+                    </a:lnR>
+                    <a:lnT w="6350" cap="flat" cmpd="sng" algn="ctr">
+                      <a:solidFill>
+                        <a:srgbClr val="D7D0C4"/>
+                      </a:solidFill>
+                      <a:prstDash val="solid"/>
+                      <a:round/>
+                      <a:headEnd type="none" w="med" len="med"/>
+                      <a:tailEnd type="none" w="med" len="med"/>
+                    </a:lnT>
+                    <a:lnB w="6350" cap="flat" cmpd="sng" algn="ctr">
+                      <a:solidFill>
+                        <a:srgbClr val="D7D0C4"/>
+                      </a:solidFill>
+                      <a:prstDash val="solid"/>
+                      <a:round/>
+                      <a:headEnd type="none" w="med" len="med"/>
+                      <a:tailEnd type="none" w="med" len="med"/>
+                    </a:lnB>
+                    <a:solidFill>
+                      <a:srgbClr val="FFFFFF"/>
+                    </a:solidFill>
+                  </a:tcPr>
+                </a:tc>
+                <a:tc>
+                  <a:txBody>
+                    <a:bodyPr/>
+                    <a:lstStyle/>
+                    <a:p>
+                      <a:pPr algn="l" indent="0" marL="0">
+                        <a:buNone/>
+                      </a:pPr>
+                      <a:r>
+                        <a:rPr lang="en-US" sz="1100" dirty="0">
+                          <a:solidFill>
+                            <a:srgbClr val="1B2B31"/>
+                          </a:solidFill>
+                        </a:rPr>
+                        <a:t>depth-driven, not PC-biased</a:t>
+                      </a:r>
+                      <a:endParaRPr lang="en-US" sz="1100" dirty="0"/>
+                    </a:p>
+                  </a:txBody>
+                  <a:tcPr marL="63500" marR="63500" marT="25400" marB="25400" anchor="ctr">
+                    <a:lnL w="6350" cap="flat" cmpd="sng" algn="ctr">
+                      <a:solidFill>
+                        <a:srgbClr val="D7D0C4"/>
+                      </a:solidFill>
+                      <a:prstDash val="solid"/>
+                      <a:round/>
+                      <a:headEnd type="none" w="med" len="med"/>
+                      <a:tailEnd type="none" w="med" len="med"/>
+                    </a:lnL>
+                    <a:lnR w="6350" cap="flat" cmpd="sng" algn="ctr">
+                      <a:solidFill>
+                        <a:srgbClr val="D7D0C4"/>
+                      </a:solidFill>
+                      <a:prstDash val="solid"/>
+                      <a:round/>
+                      <a:headEnd type="none" w="med" len="med"/>
+                      <a:tailEnd type="none" w="med" len="med"/>
+                    </a:lnR>
+                    <a:lnT w="6350" cap="flat" cmpd="sng" algn="ctr">
+                      <a:solidFill>
+                        <a:srgbClr val="D7D0C4"/>
+                      </a:solidFill>
+                      <a:prstDash val="solid"/>
+                      <a:round/>
+                      <a:headEnd type="none" w="med" len="med"/>
+                      <a:tailEnd type="none" w="med" len="med"/>
+                    </a:lnT>
+                    <a:lnB w="6350" cap="flat" cmpd="sng" algn="ctr">
+                      <a:solidFill>
+                        <a:srgbClr val="D7D0C4"/>
+                      </a:solidFill>
+                      <a:prstDash val="solid"/>
+                      <a:round/>
+                      <a:headEnd type="none" w="med" len="med"/>
+                      <a:tailEnd type="none" w="med" len="med"/>
+                    </a:lnB>
+                    <a:solidFill>
+                      <a:srgbClr val="FFFFFF"/>
+                    </a:solidFill>
+                  </a:tcPr>
+                </a:tc>
+              </a:tr>
+              <a:tr h="365760">
+                <a:tc>
+                  <a:txBody>
+                    <a:bodyPr/>
+                    <a:lstStyle/>
+                    <a:p>
+                      <a:pPr algn="l" indent="0" marL="0">
+                        <a:buNone/>
+                      </a:pPr>
+                      <a:r>
+                        <a:rPr lang="en-US" sz="1100" dirty="0">
+                          <a:solidFill>
+                            <a:srgbClr val="1B2B31"/>
+                          </a:solidFill>
+                        </a:rPr>
+                        <a:t>Clinical covariates</a:t>
+                      </a:r>
+                      <a:endParaRPr lang="en-US" sz="1100" dirty="0"/>
+                    </a:p>
+                  </a:txBody>
+                  <a:tcPr marL="63500" marR="63500" marT="25400" marB="25400" anchor="ctr">
+                    <a:lnL w="6350" cap="flat" cmpd="sng" algn="ctr">
+                      <a:solidFill>
+                        <a:srgbClr val="D7D0C4"/>
+                      </a:solidFill>
+                      <a:prstDash val="solid"/>
+                      <a:round/>
+                      <a:headEnd type="none" w="med" len="med"/>
+                      <a:tailEnd type="none" w="med" len="med"/>
+                    </a:lnL>
+                    <a:lnR w="6350" cap="flat" cmpd="sng" algn="ctr">
+                      <a:solidFill>
+                        <a:srgbClr val="D7D0C4"/>
+                      </a:solidFill>
+                      <a:prstDash val="solid"/>
+                      <a:round/>
+                      <a:headEnd type="none" w="med" len="med"/>
+                      <a:tailEnd type="none" w="med" len="med"/>
+                    </a:lnR>
+                    <a:lnT w="6350" cap="flat" cmpd="sng" algn="ctr">
+                      <a:solidFill>
+                        <a:srgbClr val="D7D0C4"/>
+                      </a:solidFill>
+                      <a:prstDash val="solid"/>
+                      <a:round/>
+                      <a:headEnd type="none" w="med" len="med"/>
+                      <a:tailEnd type="none" w="med" len="med"/>
+                    </a:lnT>
+                    <a:lnB w="6350" cap="flat" cmpd="sng" algn="ctr">
+                      <a:solidFill>
+                        <a:srgbClr val="D7D0C4"/>
+                      </a:solidFill>
+                      <a:prstDash val="solid"/>
+                      <a:round/>
+                      <a:headEnd type="none" w="med" len="med"/>
+                      <a:tailEnd type="none" w="med" len="med"/>
+                    </a:lnB>
+                    <a:solidFill>
+                      <a:srgbClr val="FFFFFF"/>
+                    </a:solidFill>
+                  </a:tcPr>
+                </a:tc>
+                <a:tc>
+                  <a:txBody>
+                    <a:bodyPr/>
+                    <a:lstStyle/>
+                    <a:p>
+                      <a:pPr algn="l" indent="0" marL="0">
+                        <a:buNone/>
+                      </a:pPr>
+                      <a:r>
+                        <a:rPr lang="en-US" sz="1100" dirty="0">
+                          <a:solidFill>
+                            <a:srgbClr val="1B2B31"/>
+                          </a:solidFill>
+                        </a:rPr>
+                        <a:t>partial corr( detox , F | Age ) = −0.32; Age–F = +0.43</a:t>
+                      </a:r>
+                      <a:endParaRPr lang="en-US" sz="1100" dirty="0"/>
+                    </a:p>
+                  </a:txBody>
+                  <a:tcPr marL="63500" marR="63500" marT="25400" marB="25400" anchor="ctr">
+                    <a:lnL w="6350" cap="flat" cmpd="sng" algn="ctr">
+                      <a:solidFill>
+                        <a:srgbClr val="D7D0C4"/>
+                      </a:solidFill>
+                      <a:prstDash val="solid"/>
+                      <a:round/>
+                      <a:headEnd type="none" w="med" len="med"/>
+                      <a:tailEnd type="none" w="med" len="med"/>
+                    </a:lnL>
+                    <a:lnR w="6350" cap="flat" cmpd="sng" algn="ctr">
+                      <a:solidFill>
+                        <a:srgbClr val="D7D0C4"/>
+                      </a:solidFill>
+                      <a:prstDash val="solid"/>
+                      <a:round/>
+                      <a:headEnd type="none" w="med" len="med"/>
+                      <a:tailEnd type="none" w="med" len="med"/>
+                    </a:lnR>
+                    <a:lnT w="6350" cap="flat" cmpd="sng" algn="ctr">
+                      <a:solidFill>
+                        <a:srgbClr val="D7D0C4"/>
+                      </a:solidFill>
+                      <a:prstDash val="solid"/>
+                      <a:round/>
+                      <a:headEnd type="none" w="med" len="med"/>
+                      <a:tailEnd type="none" w="med" len="med"/>
+                    </a:lnT>
+                    <a:lnB w="6350" cap="flat" cmpd="sng" algn="ctr">
+                      <a:solidFill>
+                        <a:srgbClr val="D7D0C4"/>
+                      </a:solidFill>
+                      <a:prstDash val="solid"/>
+                      <a:round/>
+                      <a:headEnd type="none" w="med" len="med"/>
+                      <a:tailEnd type="none" w="med" len="med"/>
+                    </a:lnB>
+                    <a:solidFill>
+                      <a:srgbClr val="FFFFFF"/>
+                    </a:solidFill>
+                  </a:tcPr>
+                </a:tc>
+                <a:tc>
+                  <a:txBody>
+                    <a:bodyPr/>
+                    <a:lstStyle/>
+                    <a:p>
+                      <a:pPr algn="l" indent="0" marL="0">
+                        <a:buNone/>
+                      </a:pPr>
+                      <a:r>
+                        <a:rPr lang="en-US" sz="1100" dirty="0">
+                          <a:solidFill>
+                            <a:srgbClr val="1B2B31"/>
+                          </a:solidFill>
+                        </a:rPr>
+                        <a:t>demographics do not explain trends</a:t>
+                      </a:r>
+                      <a:endParaRPr lang="en-US" sz="1100" dirty="0"/>
+                    </a:p>
+                  </a:txBody>
+                  <a:tcPr marL="63500" marR="63500" marT="25400" marB="25400" anchor="ctr">
+                    <a:lnL w="6350" cap="flat" cmpd="sng" algn="ctr">
+                      <a:solidFill>
+                        <a:srgbClr val="D7D0C4"/>
+                      </a:solidFill>
+                      <a:prstDash val="solid"/>
+                      <a:round/>
+                      <a:headEnd type="none" w="med" len="med"/>
+                      <a:tailEnd type="none" w="med" len="med"/>
+                    </a:lnL>
+                    <a:lnR w="6350" cap="flat" cmpd="sng" algn="ctr">
+                      <a:solidFill>
+                        <a:srgbClr val="D7D0C4"/>
+                      </a:solidFill>
+                      <a:prstDash val="solid"/>
+                      <a:round/>
+                      <a:headEnd type="none" w="med" len="med"/>
+                      <a:tailEnd type="none" w="med" len="med"/>
+                    </a:lnR>
+                    <a:lnT w="6350" cap="flat" cmpd="sng" algn="ctr">
+                      <a:solidFill>
+                        <a:srgbClr val="D7D0C4"/>
+                      </a:solidFill>
+                      <a:prstDash val="solid"/>
+                      <a:round/>
+                      <a:headEnd type="none" w="med" len="med"/>
+                      <a:tailEnd type="none" w="med" len="med"/>
+                    </a:lnT>
+                    <a:lnB w="6350" cap="flat" cmpd="sng" algn="ctr">
+                      <a:solidFill>
+                        <a:srgbClr val="D7D0C4"/>
+                      </a:solidFill>
+                      <a:prstDash val="solid"/>
+                      <a:round/>
+                      <a:headEnd type="none" w="med" len="med"/>
+                      <a:tailEnd type="none" w="med" len="med"/>
+                    </a:lnB>
+                    <a:solidFill>
+                      <a:srgbClr val="FFFFFF"/>
+                    </a:solidFill>
+                  </a:tcPr>
+                </a:tc>
+              </a:tr>
+            </a:tbl>
+          </a:graphicData>
+        </a:graphic>
+      </p:graphicFrame>
       <p:sp>
         <p:nvSpPr>
           <p:cNvPr id="7" name="Text 4"/>
-          <p:cNvSpPr/>
-          <p:nvPr/>
-        </p:nvSpPr>
-        <p:spPr>
-          <a:xfrm>
-            <a:off x="8412480" y="1645920"/>
-            <a:ext cx="3474720" cy="3108960"/>
-          </a:xfrm>
-          <a:prstGeom prst="rect">
-            <a:avLst/>
-          </a:prstGeom>
-          <a:noFill/>
-          <a:ln/>
-        </p:spPr>
-        <p:txBody>
-          <a:bodyPr wrap="square" rtlCol="0" anchor="t"/>
-          <a:lstStyle/>
-          <a:p>
-            <a:pPr algn="l" indent="0" marL="0">
-              <a:spcAft>
-                <a:spcPts val="800"/>
-              </a:spcAft>
-              <a:buNone/>
-            </a:pPr>
-            <a:r>
-              <a:rPr lang="en-US" sz="1600" dirty="0">
-                <a:solidFill>
-                  <a:srgbClr val="1E293B"/>
-                </a:solidFill>
-              </a:rPr>
-              <a:t>Pseudobulk per donor; edgeR TMM + NB quasi-likelihood.
-</a:t>
-            </a:r>
-            <a:endParaRPr lang="en-US" sz="1600" dirty="0"/>
-          </a:p>
-          <a:p>
-            <a:pPr algn="l" indent="0" marL="0">
-              <a:spcAft>
-                <a:spcPts val="800"/>
-              </a:spcAft>
-              <a:buNone/>
-            </a:pPr>
-            <a:r>
-              <a:rPr lang="en-US" sz="1600" b="1" dirty="0">
-                <a:solidFill>
-                  <a:srgbClr val="1E293B"/>
-                </a:solidFill>
-              </a:rPr>
-              <a:t>64 genes FDR&lt;0.05 — mostly biliary/ductular.
-</a:t>
-            </a:r>
-            <a:endParaRPr lang="en-US" sz="1600" dirty="0"/>
-          </a:p>
-          <a:p>
-            <a:pPr algn="l" indent="0" marL="0">
-              <a:spcAft>
-                <a:spcPts val="800"/>
-              </a:spcAft>
-              <a:buNone/>
-            </a:pPr>
-            <a:r>
-              <a:rPr lang="en-US" sz="1600" dirty="0">
-                <a:solidFill>
-                  <a:srgbClr val="1D4ED8"/>
-                </a:solidFill>
-              </a:rPr>
-              <a:t>Zonation genes not significant (GLUL FDR 0.80).
-</a:t>
-            </a:r>
-            <a:endParaRPr lang="en-US" sz="1600" dirty="0"/>
-          </a:p>
-          <a:p>
-            <a:pPr algn="l" indent="0" marL="0">
-              <a:spcAft>
-                <a:spcPts val="800"/>
-              </a:spcAft>
-              <a:buNone/>
-            </a:pPr>
-            <a:r>
-              <a:rPr lang="en-US" sz="1600" i="1" dirty="0">
-                <a:solidFill>
-                  <a:srgbClr val="7C3AED"/>
-                </a:solidFill>
-              </a:rPr>
-              <a:t>“No large single-gene program outside the biliary burden.”</a:t>
-            </a:r>
-            <a:endParaRPr lang="en-US" sz="1600" dirty="0"/>
-          </a:p>
-        </p:txBody>
-      </p:sp>
-      <p:sp>
-        <p:nvSpPr>
-          <p:cNvPr id="8" name="Shape 5"/>
-          <p:cNvSpPr/>
-          <p:nvPr/>
-        </p:nvSpPr>
-        <p:spPr>
-          <a:xfrm>
-            <a:off x="8412480" y="5029200"/>
-            <a:ext cx="3474720" cy="731520"/>
-          </a:xfrm>
-          <a:prstGeom prst="roundRect">
-            <a:avLst>
-              <a:gd name="adj" fmla="val 7500"/>
-            </a:avLst>
-          </a:prstGeom>
-          <a:solidFill>
-            <a:srgbClr val="ECE6DA"/>
-          </a:solidFill>
-          <a:ln/>
-        </p:spPr>
-      </p:sp>
-      <p:sp>
-        <p:nvSpPr>
-          <p:cNvPr id="9" name="Text 6"/>
-          <p:cNvSpPr/>
-          <p:nvPr/>
-        </p:nvSpPr>
-        <p:spPr>
-          <a:xfrm>
-            <a:off x="8549640" y="5074920"/>
-            <a:ext cx="3200400" cy="640080"/>
-          </a:xfrm>
-          <a:prstGeom prst="rect">
-            <a:avLst/>
-          </a:prstGeom>
-          <a:noFill/>
-          <a:ln/>
-        </p:spPr>
-        <p:txBody>
-          <a:bodyPr wrap="square" rtlCol="0" anchor="ctr"/>
-          <a:lstStyle/>
-          <a:p>
-            <a:pPr algn="l" indent="0" marL="0">
-              <a:buNone/>
-            </a:pPr>
-            <a:r>
-              <a:rPr lang="en-US" sz="1300" i="1" dirty="0">
-                <a:solidFill>
-                  <a:srgbClr val="6B6256"/>
-                </a:solidFill>
-              </a:rPr>
-              <a:t>Caveat: weak coordinated pathways still need gene-set testing.</a:t>
-            </a:r>
-            <a:endParaRPr lang="en-US" sz="1300" dirty="0"/>
-          </a:p>
-        </p:txBody>
-      </p:sp>
-      <p:sp>
-        <p:nvSpPr>
-          <p:cNvPr id="10" name="Text 7"/>
           <p:cNvSpPr/>
           <p:nvPr/>
         </p:nvSpPr>
@@ -3303,7 +5304,7 @@
             <a:r>
               <a:rPr lang="en-US" sz="1050" dirty="0">
                 <a:solidFill>
-                  <a:srgbClr val="6B6256"/>
+                  <a:srgbClr val="5C6E73"/>
                 </a:solidFill>
               </a:rPr>
               <a:t>Computational Genomics 76553  ·  HUJI  ·  MASLD snRNA-seq hackathon</a:t>
@@ -3314,7 +5315,7 @@
       </p:sp>
       <p:sp>
         <p:nvSpPr>
-          <p:cNvPr id="11" name="Text 8"/>
+          <p:cNvPr id="8" name="Text 5"/>
           <p:cNvSpPr/>
           <p:nvPr/>
         </p:nvSpPr>
@@ -3339,7 +5340,7 @@
             <a:r>
               <a:rPr lang="en-US" sz="1050" dirty="0">
                 <a:solidFill>
-                  <a:srgbClr val="6B6256"/>
+                  <a:srgbClr val="5C6E73"/>
                 </a:solidFill>
               </a:rPr>
               <a:t>10</a:t>
@@ -3362,7 +5363,7 @@
     <p:bg>
       <p:bgPr>
         <a:solidFill>
-          <a:srgbClr val="F7F3EB"/>
+          <a:srgbClr val="F7F5F1"/>
         </a:solidFill>
       </p:bgPr>
     </p:bg>
@@ -3395,7 +5396,7 @@
             <a:avLst/>
           </a:prstGeom>
           <a:solidFill>
-            <a:srgbClr val="C0562B"/>
+            <a:srgbClr val="C0561B"/>
           </a:solidFill>
           <a:ln/>
         </p:spPr>
@@ -3427,10 +5428,10 @@
             <a:r>
               <a:rPr lang="en-US" sz="1300" b="1" spc="300" kern="0" dirty="0">
                 <a:solidFill>
-                  <a:srgbClr val="C0562B"/>
-                </a:solidFill>
-              </a:rPr>
-              <a:t>SOURCE</a:t>
+                  <a:srgbClr val="C0561B"/>
+                </a:solidFill>
+              </a:rPr>
+              <a:t>GENOME-WIDE</a:t>
             </a:r>
             <a:endParaRPr lang="en-US" sz="1300" dirty="0"/>
           </a:p>
@@ -3463,13 +5464,13 @@
             <a:r>
               <a:rPr lang="en-US" sz="2800" b="1" dirty="0">
                 <a:solidFill>
-                  <a:srgbClr val="1F3A3D"/>
+                  <a:srgbClr val="1B2B31"/>
                 </a:solidFill>
                 <a:latin typeface="Georgia" pitchFamily="34" charset="0"/>
                 <a:ea typeface="Georgia" pitchFamily="34" charset="-122"/>
                 <a:cs typeface="Georgia" pitchFamily="34" charset="-120"/>
               </a:rPr>
-              <a:t>The biliary burden looks compositional</a:t>
+              <a:t>One signal: biliary markers</a:t>
             </a:r>
             <a:endParaRPr lang="en-US" sz="2800" dirty="0"/>
           </a:p>
@@ -3477,7 +5478,7 @@
       </p:sp>
       <p:pic>
         <p:nvPicPr>
-          <p:cNvPr id="5" name="Image 0" descr="D:\CS\Genomics\Hackathon\presentation/assets/fig_compositional.png">    </p:cNvPr>
+          <p:cNvPr id="5" name="Image 0" descr="D:\CS\Genomics\Hackathon\presentation/assets/fig_volcano.png">    </p:cNvPr>
           <p:cNvPicPr>
             <a:picLocks noChangeAspect="1"/>
           </p:cNvPicPr>
@@ -3491,7 +5492,7 @@
         <p:spPr>
           <a:xfrm>
             <a:off x="274320" y="1371600"/>
-            <a:ext cx="11612880" cy="3566160"/>
+            <a:ext cx="7955280" cy="4114800"/>
           </a:xfrm>
           <a:prstGeom prst="rect">
             <a:avLst/>
@@ -3506,8 +5507,8 @@
         </p:nvSpPr>
         <p:spPr>
           <a:xfrm>
-            <a:off x="274320" y="4983480"/>
-            <a:ext cx="11612880" cy="365760"/>
+            <a:off x="274320" y="5532120"/>
+            <a:ext cx="7955280" cy="365760"/>
           </a:xfrm>
           <a:prstGeom prst="rect">
             <a:avLst/>
@@ -3525,10 +5526,10 @@
             <a:r>
               <a:rPr lang="en-US" sz="1200" i="1" dirty="0">
                 <a:solidFill>
-                  <a:srgbClr val="6B6256"/>
-                </a:solidFill>
-              </a:rPr>
-              <a:t>Figure 4.  Source attribution — cross-lineage abundance, decontX ambient removal, and the F4 ductular reaction.</a:t>
+                  <a:srgbClr val="5C6E73"/>
+                </a:solidFill>
+              </a:rPr>
+              <a:t>Figure 3.  Genome-wide pseudobulk differential expression, cirrhotic F4 vs F1 (edgeR).</a:t>
             </a:r>
             <a:endParaRPr lang="en-US" sz="1200" dirty="0"/>
           </a:p>
@@ -3542,8 +5543,8 @@
         </p:nvSpPr>
         <p:spPr>
           <a:xfrm>
-            <a:off x="548640" y="5440680"/>
-            <a:ext cx="11155680" cy="914400"/>
+            <a:off x="8412480" y="1645920"/>
+            <a:ext cx="3474720" cy="3108960"/>
           </a:xfrm>
           <a:prstGeom prst="rect">
             <a:avLst/>
@@ -3552,6 +5553,121 @@
           <a:ln/>
         </p:spPr>
         <p:txBody>
+          <a:bodyPr wrap="square" rtlCol="0" anchor="t"/>
+          <a:lstStyle/>
+          <a:p>
+            <a:pPr algn="l" indent="0" marL="0">
+              <a:spcAft>
+                <a:spcPts val="800"/>
+              </a:spcAft>
+              <a:buNone/>
+            </a:pPr>
+            <a:r>
+              <a:rPr lang="en-US" sz="1600" dirty="0">
+                <a:solidFill>
+                  <a:srgbClr val="1B2B31"/>
+                </a:solidFill>
+              </a:rPr>
+              <a:t>Pseudobulk per donor; edgeR TMM + NB quasi-likelihood.
+</a:t>
+            </a:r>
+            <a:endParaRPr lang="en-US" sz="1600" dirty="0"/>
+          </a:p>
+          <a:p>
+            <a:pPr algn="l" indent="0" marL="0">
+              <a:spcAft>
+                <a:spcPts val="800"/>
+              </a:spcAft>
+              <a:buNone/>
+            </a:pPr>
+            <a:r>
+              <a:rPr lang="en-US" sz="1600" b="1" dirty="0">
+                <a:solidFill>
+                  <a:srgbClr val="1B2B31"/>
+                </a:solidFill>
+              </a:rPr>
+              <a:t>64 genes FDR&lt;0.05 — mostly biliary/ductular.
+</a:t>
+            </a:r>
+            <a:endParaRPr lang="en-US" sz="1600" dirty="0"/>
+          </a:p>
+          <a:p>
+            <a:pPr algn="l" indent="0" marL="0">
+              <a:spcAft>
+                <a:spcPts val="800"/>
+              </a:spcAft>
+              <a:buNone/>
+            </a:pPr>
+            <a:r>
+              <a:rPr lang="en-US" sz="1600" dirty="0">
+                <a:solidFill>
+                  <a:srgbClr val="1D4ED8"/>
+                </a:solidFill>
+              </a:rPr>
+              <a:t>Zonation genes not significant (GLUL FDR 0.80).
+</a:t>
+            </a:r>
+            <a:endParaRPr lang="en-US" sz="1600" dirty="0"/>
+          </a:p>
+          <a:p>
+            <a:pPr algn="l" indent="0" marL="0">
+              <a:spcAft>
+                <a:spcPts val="800"/>
+              </a:spcAft>
+              <a:buNone/>
+            </a:pPr>
+            <a:r>
+              <a:rPr lang="en-US" sz="1600" i="1" dirty="0">
+                <a:solidFill>
+                  <a:srgbClr val="7C3AED"/>
+                </a:solidFill>
+              </a:rPr>
+              <a:t>“No large single-gene program outside the biliary burden.”</a:t>
+            </a:r>
+            <a:endParaRPr lang="en-US" sz="1600" dirty="0"/>
+          </a:p>
+        </p:txBody>
+      </p:sp>
+      <p:sp>
+        <p:nvSpPr>
+          <p:cNvPr id="8" name="Shape 5"/>
+          <p:cNvSpPr/>
+          <p:nvPr/>
+        </p:nvSpPr>
+        <p:spPr>
+          <a:xfrm>
+            <a:off x="8412480" y="5029200"/>
+            <a:ext cx="3474720" cy="731520"/>
+          </a:xfrm>
+          <a:prstGeom prst="roundRect">
+            <a:avLst>
+              <a:gd name="adj" fmla="val 7500"/>
+            </a:avLst>
+          </a:prstGeom>
+          <a:solidFill>
+            <a:srgbClr val="ECF1F1"/>
+          </a:solidFill>
+          <a:ln/>
+        </p:spPr>
+      </p:sp>
+      <p:sp>
+        <p:nvSpPr>
+          <p:cNvPr id="9" name="Text 6"/>
+          <p:cNvSpPr/>
+          <p:nvPr/>
+        </p:nvSpPr>
+        <p:spPr>
+          <a:xfrm>
+            <a:off x="8549640" y="5074920"/>
+            <a:ext cx="3200400" cy="640080"/>
+          </a:xfrm>
+          <a:prstGeom prst="rect">
+            <a:avLst/>
+          </a:prstGeom>
+          <a:noFill/>
+          <a:ln/>
+        </p:spPr>
+        <p:txBody>
           <a:bodyPr wrap="square" rtlCol="0" anchor="ctr"/>
           <a:lstStyle/>
           <a:p>
@@ -3559,86 +5675,20 @@
               <a:buNone/>
             </a:pPr>
             <a:r>
-              <a:rPr lang="en-US" sz="1500" b="1" dirty="0">
-                <a:solidFill>
-                  <a:srgbClr val="065F46"/>
-                </a:solidFill>
-              </a:rPr>
-              <a:t>Strong: </a:t>
-            </a:r>
-            <a:pPr algn="l" indent="0" marL="0">
-              <a:buNone/>
-            </a:pPr>
-            <a:r>
-              <a:rPr lang="en-US" sz="1500" dirty="0">
-                <a:solidFill>
-                  <a:srgbClr val="1E293B"/>
-                </a:solidFill>
-              </a:rPr>
-              <a:t>biliary genes far more abundant in cholangiocytes; hepatocyte co-expression rare (~0.4%).   </a:t>
-            </a:r>
-            <a:pPr algn="l" indent="0" marL="0">
-              <a:buNone/>
-            </a:pPr>
-            <a:r>
-              <a:rPr lang="en-US" sz="1500" b="1" dirty="0">
-                <a:solidFill>
-                  <a:srgbClr val="B45309"/>
-                </a:solidFill>
-              </a:rPr>
-              <a:t>Suggestive: </a:t>
-            </a:r>
-            <a:pPr algn="l" indent="0" marL="0">
-              <a:buNone/>
-            </a:pPr>
-            <a:r>
-              <a:rPr lang="en-US" sz="1500" dirty="0">
-                <a:solidFill>
-                  <a:srgbClr val="1E293B"/>
-                </a:solidFill>
-              </a:rPr>
-              <a:t>decontX halves the hits (ambient contribution — not proof).   </a:t>
-            </a:r>
-            <a:pPr algn="l" indent="0" marL="0">
-              <a:buNone/>
-            </a:pPr>
-            <a:r>
-              <a:rPr lang="en-US" sz="1500" b="1" dirty="0">
-                <a:solidFill>
-                  <a:srgbClr val="BE123C"/>
-                </a:solidFill>
-              </a:rPr>
-              <a:t>Open: </a:t>
-            </a:r>
-            <a:pPr algn="l" indent="0" marL="0">
-              <a:buNone/>
-            </a:pPr>
-            <a:r>
-              <a:rPr lang="en-US" sz="1500" dirty="0">
-                <a:solidFill>
-                  <a:srgbClr val="1E293B"/>
-                </a:solidFill>
-              </a:rPr>
-              <a:t>EPCAM/SPINT2/B3GNT3 survive.  </a:t>
-            </a:r>
-            <a:pPr algn="l" indent="0" marL="0">
-              <a:buNone/>
-            </a:pPr>
-            <a:r>
-              <a:rPr lang="en-US" sz="1500" b="1" dirty="0">
-                <a:solidFill>
-                  <a:srgbClr val="DC2626"/>
-                </a:solidFill>
-              </a:rPr>
-              <a:t>CXCL10 = possible real inflammation (does not track cholangiocytes).</a:t>
-            </a:r>
-            <a:endParaRPr lang="en-US" sz="1500" dirty="0"/>
-          </a:p>
-        </p:txBody>
-      </p:sp>
-      <p:sp>
-        <p:nvSpPr>
-          <p:cNvPr id="8" name="Text 5"/>
+              <a:rPr lang="en-US" sz="1300" i="1" dirty="0">
+                <a:solidFill>
+                  <a:srgbClr val="5C6E73"/>
+                </a:solidFill>
+              </a:rPr>
+              <a:t>Caveat: weak coordinated pathways still need gene-set testing.</a:t>
+            </a:r>
+            <a:endParaRPr lang="en-US" sz="1300" dirty="0"/>
+          </a:p>
+        </p:txBody>
+      </p:sp>
+      <p:sp>
+        <p:nvSpPr>
+          <p:cNvPr id="10" name="Text 7"/>
           <p:cNvSpPr/>
           <p:nvPr/>
         </p:nvSpPr>
@@ -3663,7 +5713,7 @@
             <a:r>
               <a:rPr lang="en-US" sz="1050" dirty="0">
                 <a:solidFill>
-                  <a:srgbClr val="6B6256"/>
+                  <a:srgbClr val="5C6E73"/>
                 </a:solidFill>
               </a:rPr>
               <a:t>Computational Genomics 76553  ·  HUJI  ·  MASLD snRNA-seq hackathon</a:t>
@@ -3674,7 +5724,7 @@
       </p:sp>
       <p:sp>
         <p:nvSpPr>
-          <p:cNvPr id="9" name="Text 6"/>
+          <p:cNvPr id="11" name="Text 8"/>
           <p:cNvSpPr/>
           <p:nvPr/>
         </p:nvSpPr>
@@ -3699,7 +5749,7 @@
             <a:r>
               <a:rPr lang="en-US" sz="1050" dirty="0">
                 <a:solidFill>
-                  <a:srgbClr val="6B6256"/>
+                  <a:srgbClr val="5C6E73"/>
                 </a:solidFill>
               </a:rPr>
               <a:t>11</a:t>
@@ -3722,7 +5772,7 @@
     <p:bg>
       <p:bgPr>
         <a:solidFill>
-          <a:srgbClr val="14292C"/>
+          <a:srgbClr val="F7F5F1"/>
         </a:solidFill>
       </p:bgPr>
     </p:bg>
@@ -3748,37 +5798,53 @@
         </p:nvSpPr>
         <p:spPr>
           <a:xfrm>
-            <a:off x="0" y="0"/>
-            <a:ext cx="201168" cy="6858000"/>
+            <a:off x="457200" y="310896"/>
+            <a:ext cx="146304" cy="237744"/>
           </a:xfrm>
           <a:prstGeom prst="rect">
             <a:avLst/>
           </a:prstGeom>
           <a:solidFill>
-            <a:srgbClr val="C0562B"/>
+            <a:srgbClr val="C0561B"/>
           </a:solidFill>
           <a:ln/>
         </p:spPr>
       </p:sp>
       <p:sp>
         <p:nvSpPr>
-          <p:cNvPr id="3" name="Shape 1"/>
-          <p:cNvSpPr/>
-          <p:nvPr/>
-        </p:nvSpPr>
-        <p:spPr>
-          <a:xfrm>
-            <a:off x="777240" y="457200"/>
-            <a:ext cx="146304" cy="237744"/>
-          </a:xfrm>
-          <a:prstGeom prst="rect">
-            <a:avLst/>
-          </a:prstGeom>
-          <a:solidFill>
-            <a:srgbClr val="C0562B"/>
-          </a:solidFill>
-          <a:ln/>
-        </p:spPr>
+          <p:cNvPr id="3" name="Text 1"/>
+          <p:cNvSpPr/>
+          <p:nvPr/>
+        </p:nvSpPr>
+        <p:spPr>
+          <a:xfrm>
+            <a:off x="676656" y="274320"/>
+            <a:ext cx="10972800" cy="320040"/>
+          </a:xfrm>
+          <a:prstGeom prst="rect">
+            <a:avLst/>
+          </a:prstGeom>
+          <a:noFill/>
+          <a:ln/>
+        </p:spPr>
+        <p:txBody>
+          <a:bodyPr wrap="square" lIns="0" tIns="0" rIns="0" bIns="0" rtlCol="0" anchor="ctr"/>
+          <a:lstStyle/>
+          <a:p>
+            <a:pPr algn="l" indent="0" marL="0">
+              <a:buNone/>
+            </a:pPr>
+            <a:r>
+              <a:rPr lang="en-US" sz="1300" b="1" spc="300" kern="0" dirty="0">
+                <a:solidFill>
+                  <a:srgbClr val="C0561B"/>
+                </a:solidFill>
+              </a:rPr>
+              <a:t>SOURCE</a:t>
+            </a:r>
+            <a:endParaRPr lang="en-US" sz="1300" dirty="0"/>
+          </a:p>
+        </p:txBody>
       </p:sp>
       <p:sp>
         <p:nvSpPr>
@@ -3788,8 +5854,8 @@
         </p:nvSpPr>
         <p:spPr>
           <a:xfrm>
-            <a:off x="987552" y="420624"/>
-            <a:ext cx="10515600" cy="365760"/>
+            <a:off x="438912" y="585216"/>
+            <a:ext cx="11338560" cy="777240"/>
           </a:xfrm>
           <a:prstGeom prst="rect">
             <a:avLst/>
@@ -3798,102 +5864,60 @@
           <a:ln/>
         </p:spPr>
         <p:txBody>
-          <a:bodyPr wrap="square" rtlCol="0" anchor="ctr"/>
+          <a:bodyPr wrap="square" lIns="0" tIns="0" rIns="0" bIns="0" rtlCol="0" anchor="t"/>
           <a:lstStyle/>
           <a:p>
             <a:pPr algn="l" indent="0" marL="0">
               <a:buNone/>
             </a:pPr>
             <a:r>
-              <a:rPr lang="en-US" sz="1400" b="1" spc="300" kern="0" dirty="0">
-                <a:solidFill>
-                  <a:srgbClr val="C0562B"/>
-                </a:solidFill>
-              </a:rPr>
-              <a:t>CONCLUSION</a:t>
-            </a:r>
-            <a:endParaRPr lang="en-US" sz="1400" dirty="0"/>
-          </a:p>
-        </p:txBody>
-      </p:sp>
-      <p:sp>
-        <p:nvSpPr>
-          <p:cNvPr id="5" name="Text 3"/>
-          <p:cNvSpPr/>
-          <p:nvPr/>
-        </p:nvSpPr>
-        <p:spPr>
-          <a:xfrm>
-            <a:off x="777240" y="777240"/>
-            <a:ext cx="10607040" cy="731520"/>
-          </a:xfrm>
-          <a:prstGeom prst="rect">
-            <a:avLst/>
-          </a:prstGeom>
-          <a:noFill/>
-          <a:ln/>
-        </p:spPr>
-        <p:txBody>
-          <a:bodyPr wrap="square" rtlCol="0" anchor="ctr"/>
-          <a:lstStyle/>
-          <a:p>
-            <a:pPr algn="l" indent="0" marL="0">
-              <a:buNone/>
-            </a:pPr>
-            <a:r>
-              <a:rPr lang="en-US" sz="3000" b="1" dirty="0">
-                <a:solidFill>
-                  <a:srgbClr val="FFFFFF"/>
+              <a:rPr lang="en-US" sz="2800" b="1" dirty="0">
+                <a:solidFill>
+                  <a:srgbClr val="1B2B31"/>
                 </a:solidFill>
                 <a:latin typeface="Georgia" pitchFamily="34" charset="0"/>
                 <a:ea typeface="Georgia" pitchFamily="34" charset="-122"/>
                 <a:cs typeface="Georgia" pitchFamily="34" charset="-120"/>
               </a:rPr>
-              <a:t>Preservation, not progressive collapse</a:t>
-            </a:r>
-            <a:endParaRPr lang="en-US" sz="3000" dirty="0"/>
-          </a:p>
-        </p:txBody>
-      </p:sp>
-      <p:sp>
-        <p:nvSpPr>
-          <p:cNvPr id="6" name="Shape 4"/>
-          <p:cNvSpPr/>
-          <p:nvPr/>
-        </p:nvSpPr>
-        <p:spPr>
-          <a:xfrm>
-            <a:off x="777240" y="1600200"/>
-            <a:ext cx="3520440" cy="3931920"/>
-          </a:xfrm>
-          <a:prstGeom prst="roundRect">
-            <a:avLst>
-              <a:gd name="adj" fmla="val 2078"/>
-            </a:avLst>
-          </a:prstGeom>
-          <a:solidFill>
-            <a:srgbClr val="1E3A3D"/>
-          </a:solidFill>
-          <a:ln/>
-          <a:effectLst>
-            <a:outerShdw sx="100000" sy="100000" kx="0" ky="0" algn="bl" rotWithShape="0" blurRad="88900" dist="38100" dir="5400000">
-              <a:srgbClr val="000000">
-                <a:alpha val="12000"/>
-              </a:srgbClr>
-            </a:outerShdw>
-          </a:effectLst>
-        </p:spPr>
-      </p:sp>
-      <p:sp>
-        <p:nvSpPr>
-          <p:cNvPr id="7" name="Text 5"/>
-          <p:cNvSpPr/>
-          <p:nvPr/>
-        </p:nvSpPr>
-        <p:spPr>
-          <a:xfrm>
-            <a:off x="777240" y="1737360"/>
-            <a:ext cx="3520440" cy="457200"/>
+              <a:t>The biliary burden looks compositional</a:t>
+            </a:r>
+            <a:endParaRPr lang="en-US" sz="2800" dirty="0"/>
+          </a:p>
+        </p:txBody>
+      </p:sp>
+      <p:pic>
+        <p:nvPicPr>
+          <p:cNvPr id="5" name="Image 0" descr="D:\CS\Genomics\Hackathon\presentation/assets/fig_compositional.png">    </p:cNvPr>
+          <p:cNvPicPr>
+            <a:picLocks noChangeAspect="1"/>
+          </p:cNvPicPr>
+          <p:nvPr/>
+        </p:nvPicPr>
+        <p:blipFill>
+          <a:blip r:embed="rId1"/>
+          <a:srcRect l="0" r="0" t="0" b="0"/>
+          <a:stretch/>
+        </p:blipFill>
+        <p:spPr>
+          <a:xfrm>
+            <a:off x="274320" y="1371600"/>
+            <a:ext cx="11612880" cy="3566160"/>
+          </a:xfrm>
+          <a:prstGeom prst="rect">
+            <a:avLst/>
+          </a:prstGeom>
+        </p:spPr>
+      </p:pic>
+      <p:sp>
+        <p:nvSpPr>
+          <p:cNvPr id="6" name="Text 3"/>
+          <p:cNvSpPr/>
+          <p:nvPr/>
+        </p:nvSpPr>
+        <p:spPr>
+          <a:xfrm>
+            <a:off x="274320" y="4983480"/>
+            <a:ext cx="11612880" cy="365760"/>
           </a:xfrm>
           <a:prstGeom prst="rect">
             <a:avLst/>
@@ -3902,466 +5926,129 @@
           <a:ln/>
         </p:spPr>
         <p:txBody>
+          <a:bodyPr wrap="square" lIns="0" tIns="0" rIns="0" bIns="0" rtlCol="0" anchor="ctr"/>
+          <a:lstStyle/>
+          <a:p>
+            <a:pPr algn="ctr" indent="0" marL="0">
+              <a:buNone/>
+            </a:pPr>
+            <a:r>
+              <a:rPr lang="en-US" sz="1200" i="1" dirty="0">
+                <a:solidFill>
+                  <a:srgbClr val="5C6E73"/>
+                </a:solidFill>
+              </a:rPr>
+              <a:t>Figure 4.  Source attribution — cross-lineage abundance, decontX ambient removal, and the F4 ductular reaction.</a:t>
+            </a:r>
+            <a:endParaRPr lang="en-US" sz="1200" dirty="0"/>
+          </a:p>
+        </p:txBody>
+      </p:sp>
+      <p:sp>
+        <p:nvSpPr>
+          <p:cNvPr id="7" name="Text 4"/>
+          <p:cNvSpPr/>
+          <p:nvPr/>
+        </p:nvSpPr>
+        <p:spPr>
+          <a:xfrm>
+            <a:off x="548640" y="5440680"/>
+            <a:ext cx="11155680" cy="914400"/>
+          </a:xfrm>
+          <a:prstGeom prst="rect">
+            <a:avLst/>
+          </a:prstGeom>
+          <a:noFill/>
+          <a:ln/>
+        </p:spPr>
+        <p:txBody>
           <a:bodyPr wrap="square" rtlCol="0" anchor="ctr"/>
           <a:lstStyle/>
           <a:p>
-            <a:pPr algn="ctr" indent="0" marL="0">
-              <a:buNone/>
-            </a:pPr>
-            <a:r>
-              <a:rPr lang="en-US" sz="2000" b="1" dirty="0">
-                <a:solidFill>
-                  <a:srgbClr val="F0B27A"/>
-                </a:solidFill>
-                <a:latin typeface="Georgia" pitchFamily="34" charset="0"/>
-                <a:ea typeface="Georgia" pitchFamily="34" charset="-122"/>
-                <a:cs typeface="Georgia" pitchFamily="34" charset="-120"/>
-              </a:rPr>
-              <a:t>Conclusions</a:t>
-            </a:r>
-            <a:endParaRPr lang="en-US" sz="2000" dirty="0"/>
-          </a:p>
-        </p:txBody>
-      </p:sp>
-      <p:sp>
-        <p:nvSpPr>
-          <p:cNvPr id="8" name="Text 6"/>
-          <p:cNvSpPr/>
-          <p:nvPr/>
-        </p:nvSpPr>
-        <p:spPr>
-          <a:xfrm>
-            <a:off x="1005840" y="2286000"/>
-            <a:ext cx="3108960" cy="3108960"/>
-          </a:xfrm>
-          <a:prstGeom prst="rect">
-            <a:avLst/>
-          </a:prstGeom>
-          <a:noFill/>
-          <a:ln/>
-        </p:spPr>
-        <p:txBody>
-          <a:bodyPr wrap="square" rtlCol="0" anchor="t"/>
-          <a:lstStyle/>
-          <a:p>
-            <a:pPr algn="l" marL="342900" indent="-342900">
-              <a:spcAft>
-                <a:spcPts val="900"/>
-              </a:spcAft>
-              <a:buSzPct val="100000"/>
-              <a:buChar char="•"/>
-            </a:pPr>
-            <a:r>
-              <a:rPr lang="en-US" sz="1450" dirty="0">
-                <a:solidFill>
-                  <a:srgbClr val="E2E8F0"/>
-                </a:solidFill>
-              </a:rPr>
-              <a:t>Full healthy→end-stage trajectory is source-confounded.</a:t>
-            </a:r>
-            <a:endParaRPr lang="en-US" sz="1450" dirty="0"/>
-          </a:p>
-          <a:p>
-            <a:pPr algn="l" marL="342900" indent="-342900">
-              <a:spcAft>
-                <a:spcPts val="900"/>
-              </a:spcAft>
-              <a:buSzPct val="100000"/>
-              <a:buChar char="•"/>
-            </a:pPr>
-            <a:r>
-              <a:rPr lang="en-US" sz="1450" dirty="0">
-                <a:solidFill>
-                  <a:srgbClr val="E2E8F0"/>
-                </a:solidFill>
-              </a:rPr>
-              <a:t>In biopsy F1–F4, hepatocyte transcriptional zonation is preserved.</a:t>
-            </a:r>
-            <a:endParaRPr lang="en-US" sz="1450" dirty="0"/>
-          </a:p>
-          <a:p>
-            <a:pPr algn="l" marL="342900" indent="-342900">
-              <a:spcAft>
-                <a:spcPts val="900"/>
-              </a:spcAft>
-              <a:buSzPct val="100000"/>
-              <a:buChar char="•"/>
-            </a:pPr>
-            <a:r>
-              <a:rPr lang="en-US" sz="1450" dirty="0">
-                <a:solidFill>
-                  <a:srgbClr val="E2E8F0"/>
-                </a:solidFill>
-              </a:rPr>
-              <a:t>Main DGE signal = biliary/ductular burden, most consistent with composition / ambient RNA.</a:t>
-            </a:r>
-            <a:endParaRPr lang="en-US" sz="1450" dirty="0"/>
-          </a:p>
-        </p:txBody>
-      </p:sp>
-      <p:sp>
-        <p:nvSpPr>
-          <p:cNvPr id="9" name="Shape 7"/>
-          <p:cNvSpPr/>
-          <p:nvPr/>
-        </p:nvSpPr>
-        <p:spPr>
-          <a:xfrm>
-            <a:off x="4526280" y="1600200"/>
-            <a:ext cx="3520440" cy="3931920"/>
-          </a:xfrm>
-          <a:prstGeom prst="roundRect">
-            <a:avLst>
-              <a:gd name="adj" fmla="val 2078"/>
-            </a:avLst>
-          </a:prstGeom>
-          <a:solidFill>
-            <a:srgbClr val="1E3A3D"/>
-          </a:solidFill>
-          <a:ln/>
-          <a:effectLst>
-            <a:outerShdw sx="100000" sy="100000" kx="0" ky="0" algn="bl" rotWithShape="0" blurRad="88900" dist="38100" dir="5400000">
-              <a:srgbClr val="000000">
-                <a:alpha val="12000"/>
-              </a:srgbClr>
-            </a:outerShdw>
-          </a:effectLst>
-        </p:spPr>
-      </p:sp>
-      <p:sp>
-        <p:nvSpPr>
-          <p:cNvPr id="10" name="Text 8"/>
-          <p:cNvSpPr/>
-          <p:nvPr/>
-        </p:nvSpPr>
-        <p:spPr>
-          <a:xfrm>
-            <a:off x="4526280" y="1737360"/>
-            <a:ext cx="3520440" cy="457200"/>
-          </a:xfrm>
-          <a:prstGeom prst="rect">
-            <a:avLst/>
-          </a:prstGeom>
-          <a:noFill/>
-          <a:ln/>
-        </p:spPr>
-        <p:txBody>
-          <a:bodyPr wrap="square" rtlCol="0" anchor="ctr"/>
-          <a:lstStyle/>
-          <a:p>
-            <a:pPr algn="ctr" indent="0" marL="0">
-              <a:buNone/>
-            </a:pPr>
-            <a:r>
-              <a:rPr lang="en-US" sz="2000" b="1" dirty="0">
-                <a:solidFill>
-                  <a:srgbClr val="FCA5A5"/>
-                </a:solidFill>
-                <a:latin typeface="Georgia" pitchFamily="34" charset="0"/>
-                <a:ea typeface="Georgia" pitchFamily="34" charset="-122"/>
-                <a:cs typeface="Georgia" pitchFamily="34" charset="-120"/>
-              </a:rPr>
-              <a:t>Limits</a:t>
-            </a:r>
-            <a:endParaRPr lang="en-US" sz="2000" dirty="0"/>
-          </a:p>
-        </p:txBody>
-      </p:sp>
-      <p:sp>
-        <p:nvSpPr>
-          <p:cNvPr id="11" name="Text 9"/>
-          <p:cNvSpPr/>
-          <p:nvPr/>
-        </p:nvSpPr>
-        <p:spPr>
-          <a:xfrm>
-            <a:off x="4754880" y="2286000"/>
-            <a:ext cx="3108960" cy="3108960"/>
-          </a:xfrm>
-          <a:prstGeom prst="rect">
-            <a:avLst/>
-          </a:prstGeom>
-          <a:noFill/>
-          <a:ln/>
-        </p:spPr>
-        <p:txBody>
-          <a:bodyPr wrap="square" rtlCol="0" anchor="t"/>
-          <a:lstStyle/>
-          <a:p>
-            <a:pPr algn="l" marL="342900" indent="-342900">
-              <a:spcAft>
-                <a:spcPts val="900"/>
-              </a:spcAft>
-              <a:buSzPct val="100000"/>
-              <a:buChar char="•"/>
-            </a:pPr>
-            <a:r>
-              <a:rPr lang="en-US" sz="1450" dirty="0">
-                <a:solidFill>
-                  <a:srgbClr val="E2E8F0"/>
-                </a:solidFill>
-              </a:rPr>
-              <a:t>snRNA-seq ≠ lobule geometry / spatial architecture.</a:t>
-            </a:r>
-            <a:endParaRPr lang="en-US" sz="1450" dirty="0"/>
-          </a:p>
-          <a:p>
-            <a:pPr algn="l" marL="342900" indent="-342900">
-              <a:spcAft>
-                <a:spcPts val="900"/>
-              </a:spcAft>
-              <a:buSzPct val="100000"/>
-              <a:buChar char="•"/>
-            </a:pPr>
-            <a:r>
-              <a:rPr lang="en-US" sz="1450" dirty="0">
-                <a:solidFill>
-                  <a:srgbClr val="E2E8F0"/>
-                </a:solidFill>
-              </a:rPr>
-              <a:t>Imaging / protein / organoid evidence not re-analyzed.</a:t>
-            </a:r>
-            <a:endParaRPr lang="en-US" sz="1450" dirty="0"/>
-          </a:p>
-          <a:p>
-            <a:pPr algn="l" marL="342900" indent="-342900">
-              <a:spcAft>
-                <a:spcPts val="900"/>
-              </a:spcAft>
-              <a:buSzPct val="100000"/>
-              <a:buChar char="•"/>
-            </a:pPr>
-            <a:r>
-              <a:rPr lang="en-US" sz="1450" dirty="0">
-                <a:solidFill>
-                  <a:srgbClr val="E2E8F0"/>
-                </a:solidFill>
-              </a:rPr>
-              <a:t>F4 has only 4 biopsy donors.</a:t>
-            </a:r>
-            <a:endParaRPr lang="en-US" sz="1450" dirty="0"/>
-          </a:p>
-          <a:p>
-            <a:pPr algn="l" marL="342900" indent="-342900">
-              <a:spcAft>
-                <a:spcPts val="900"/>
-              </a:spcAft>
-              <a:buSzPct val="100000"/>
-              <a:buChar char="•"/>
-            </a:pPr>
-            <a:r>
-              <a:rPr lang="en-US" sz="1450" dirty="0">
-                <a:solidFill>
-                  <a:srgbClr val="E2E8F0"/>
-                </a:solidFill>
-              </a:rPr>
-              <a:t>Gene-level DGE can miss weak coordinated pathways.</a:t>
-            </a:r>
-            <a:endParaRPr lang="en-US" sz="1450" dirty="0"/>
-          </a:p>
-        </p:txBody>
-      </p:sp>
-      <p:sp>
-        <p:nvSpPr>
-          <p:cNvPr id="12" name="Shape 10"/>
-          <p:cNvSpPr/>
-          <p:nvPr/>
-        </p:nvSpPr>
-        <p:spPr>
-          <a:xfrm>
-            <a:off x="8275320" y="1600200"/>
-            <a:ext cx="3520440" cy="3931920"/>
-          </a:xfrm>
-          <a:prstGeom prst="roundRect">
-            <a:avLst>
-              <a:gd name="adj" fmla="val 2078"/>
-            </a:avLst>
-          </a:prstGeom>
-          <a:solidFill>
-            <a:srgbClr val="1E3A3D"/>
-          </a:solidFill>
-          <a:ln/>
-          <a:effectLst>
-            <a:outerShdw sx="100000" sy="100000" kx="0" ky="0" algn="bl" rotWithShape="0" blurRad="88900" dist="38100" dir="5400000">
-              <a:srgbClr val="000000">
-                <a:alpha val="12000"/>
-              </a:srgbClr>
-            </a:outerShdw>
-          </a:effectLst>
-        </p:spPr>
-      </p:sp>
-      <p:sp>
-        <p:nvSpPr>
-          <p:cNvPr id="13" name="Text 11"/>
-          <p:cNvSpPr/>
-          <p:nvPr/>
-        </p:nvSpPr>
-        <p:spPr>
-          <a:xfrm>
-            <a:off x="8275320" y="1737360"/>
-            <a:ext cx="3520440" cy="457200"/>
-          </a:xfrm>
-          <a:prstGeom prst="rect">
-            <a:avLst/>
-          </a:prstGeom>
-          <a:noFill/>
-          <a:ln/>
-        </p:spPr>
-        <p:txBody>
-          <a:bodyPr wrap="square" rtlCol="0" anchor="ctr"/>
-          <a:lstStyle/>
-          <a:p>
-            <a:pPr algn="ctr" indent="0" marL="0">
-              <a:buNone/>
-            </a:pPr>
-            <a:r>
-              <a:rPr lang="en-US" sz="2000" b="1" dirty="0">
-                <a:solidFill>
-                  <a:srgbClr val="9CC6CC"/>
-                </a:solidFill>
-                <a:latin typeface="Georgia" pitchFamily="34" charset="0"/>
-                <a:ea typeface="Georgia" pitchFamily="34" charset="-122"/>
-                <a:cs typeface="Georgia" pitchFamily="34" charset="-120"/>
-              </a:rPr>
-              <a:t>Next</a:t>
-            </a:r>
-            <a:endParaRPr lang="en-US" sz="2000" dirty="0"/>
-          </a:p>
-        </p:txBody>
-      </p:sp>
-      <p:sp>
-        <p:nvSpPr>
-          <p:cNvPr id="14" name="Text 12"/>
-          <p:cNvSpPr/>
-          <p:nvPr/>
-        </p:nvSpPr>
-        <p:spPr>
-          <a:xfrm>
-            <a:off x="8503920" y="2286000"/>
-            <a:ext cx="3108960" cy="3108960"/>
-          </a:xfrm>
-          <a:prstGeom prst="rect">
-            <a:avLst/>
-          </a:prstGeom>
-          <a:noFill/>
-          <a:ln/>
-        </p:spPr>
-        <p:txBody>
-          <a:bodyPr wrap="square" rtlCol="0" anchor="t"/>
-          <a:lstStyle/>
-          <a:p>
-            <a:pPr algn="l" marL="342900" indent="-342900">
-              <a:spcAft>
-                <a:spcPts val="900"/>
-              </a:spcAft>
-              <a:buSzPct val="100000"/>
-              <a:buChar char="•"/>
-            </a:pPr>
-            <a:r>
-              <a:rPr lang="en-US" sz="1450" dirty="0">
-                <a:solidFill>
-                  <a:srgbClr val="E2E8F0"/>
-                </a:solidFill>
-              </a:rPr>
-              <a:t>CAMERA / ROAST gene-set tests.</a:t>
-            </a:r>
-            <a:endParaRPr lang="en-US" sz="1450" dirty="0"/>
-          </a:p>
-          <a:p>
-            <a:pPr algn="l" marL="342900" indent="-342900">
-              <a:spcAft>
-                <a:spcPts val="900"/>
-              </a:spcAft>
-              <a:buSzPct val="100000"/>
-              <a:buChar char="•"/>
-            </a:pPr>
-            <a:r>
-              <a:rPr lang="en-US" sz="1450" dirty="0">
-                <a:solidFill>
-                  <a:srgbClr val="E2E8F0"/>
-                </a:solidFill>
-              </a:rPr>
-              <a:t>Leave-one-F4-donor-out DGE.</a:t>
-            </a:r>
-            <a:endParaRPr lang="en-US" sz="1450" dirty="0"/>
-          </a:p>
-          <a:p>
-            <a:pPr algn="l" marL="342900" indent="-342900">
-              <a:spcAft>
-                <a:spcPts val="900"/>
-              </a:spcAft>
-              <a:buSzPct val="100000"/>
-              <a:buChar char="•"/>
-            </a:pPr>
-            <a:r>
-              <a:rPr lang="en-US" sz="1450" dirty="0">
-                <a:solidFill>
-                  <a:srgbClr val="E2E8F0"/>
-                </a:solidFill>
-              </a:rPr>
-              <a:t>Quantitative contamination model.</a:t>
-            </a:r>
-            <a:endParaRPr lang="en-US" sz="1450" dirty="0"/>
-          </a:p>
-          <a:p>
-            <a:pPr algn="l" marL="342900" indent="-342900">
-              <a:spcAft>
-                <a:spcPts val="900"/>
-              </a:spcAft>
-              <a:buSzPct val="100000"/>
-              <a:buChar char="•"/>
-            </a:pPr>
-            <a:r>
-              <a:rPr lang="en-US" sz="1450" dirty="0">
-                <a:solidFill>
-                  <a:srgbClr val="E2E8F0"/>
-                </a:solidFill>
-              </a:rPr>
-              <a:t>Spatial / independent biopsy validation.</a:t>
-            </a:r>
-            <a:endParaRPr lang="en-US" sz="1450" dirty="0"/>
-          </a:p>
-        </p:txBody>
-      </p:sp>
-      <p:sp>
-        <p:nvSpPr>
-          <p:cNvPr id="15" name="Text 13"/>
-          <p:cNvSpPr/>
-          <p:nvPr/>
-        </p:nvSpPr>
-        <p:spPr>
-          <a:xfrm>
-            <a:off x="640080" y="5852160"/>
-            <a:ext cx="10881360" cy="594360"/>
-          </a:xfrm>
-          <a:prstGeom prst="rect">
-            <a:avLst/>
-          </a:prstGeom>
-          <a:noFill/>
-          <a:ln/>
-        </p:spPr>
-        <p:txBody>
-          <a:bodyPr wrap="square" rtlCol="0" anchor="ctr"/>
-          <a:lstStyle/>
-          <a:p>
-            <a:pPr algn="ctr" indent="0" marL="0">
-              <a:buNone/>
-            </a:pPr>
-            <a:r>
-              <a:rPr lang="en-US" sz="1700" b="1" i="1" dirty="0">
-                <a:solidFill>
-                  <a:srgbClr val="FFFFFF"/>
-                </a:solidFill>
-              </a:rPr>
-              <a:t>The snRNA-seq transcriptomic evidence for progressive de-zonation does not survive matched-source re-analysis.</a:t>
-            </a:r>
-            <a:endParaRPr lang="en-US" sz="1700" dirty="0"/>
-          </a:p>
-        </p:txBody>
-      </p:sp>
-      <p:sp>
-        <p:nvSpPr>
-          <p:cNvPr id="16" name="Text 14"/>
+            <a:pPr algn="l" indent="0" marL="0">
+              <a:buNone/>
+            </a:pPr>
+            <a:r>
+              <a:rPr lang="en-US" sz="1500" b="1" dirty="0">
+                <a:solidFill>
+                  <a:srgbClr val="065F46"/>
+                </a:solidFill>
+              </a:rPr>
+              <a:t>Strong: </a:t>
+            </a:r>
+            <a:pPr algn="l" indent="0" marL="0">
+              <a:buNone/>
+            </a:pPr>
+            <a:r>
+              <a:rPr lang="en-US" sz="1500" dirty="0">
+                <a:solidFill>
+                  <a:srgbClr val="1B2B31"/>
+                </a:solidFill>
+              </a:rPr>
+              <a:t>biliary genes far more abundant in cholangiocytes; hepatocyte co-expression rare (~0.4%).   </a:t>
+            </a:r>
+            <a:pPr algn="l" indent="0" marL="0">
+              <a:buNone/>
+            </a:pPr>
+            <a:r>
+              <a:rPr lang="en-US" sz="1500" b="1" dirty="0">
+                <a:solidFill>
+                  <a:srgbClr val="B45309"/>
+                </a:solidFill>
+              </a:rPr>
+              <a:t>Suggestive: </a:t>
+            </a:r>
+            <a:pPr algn="l" indent="0" marL="0">
+              <a:buNone/>
+            </a:pPr>
+            <a:r>
+              <a:rPr lang="en-US" sz="1500" dirty="0">
+                <a:solidFill>
+                  <a:srgbClr val="1B2B31"/>
+                </a:solidFill>
+              </a:rPr>
+              <a:t>decontX halves the hits (ambient contribution — not proof).   </a:t>
+            </a:r>
+            <a:pPr algn="l" indent="0" marL="0">
+              <a:buNone/>
+            </a:pPr>
+            <a:r>
+              <a:rPr lang="en-US" sz="1500" b="1" dirty="0">
+                <a:solidFill>
+                  <a:srgbClr val="BE123C"/>
+                </a:solidFill>
+              </a:rPr>
+              <a:t>Open: </a:t>
+            </a:r>
+            <a:pPr algn="l" indent="0" marL="0">
+              <a:buNone/>
+            </a:pPr>
+            <a:r>
+              <a:rPr lang="en-US" sz="1500" dirty="0">
+                <a:solidFill>
+                  <a:srgbClr val="1B2B31"/>
+                </a:solidFill>
+              </a:rPr>
+              <a:t>EPCAM/SPINT2/B3GNT3 survive.  </a:t>
+            </a:r>
+            <a:pPr algn="l" indent="0" marL="0">
+              <a:buNone/>
+            </a:pPr>
+            <a:r>
+              <a:rPr lang="en-US" sz="1500" b="1" dirty="0">
+                <a:solidFill>
+                  <a:srgbClr val="DC2626"/>
+                </a:solidFill>
+              </a:rPr>
+              <a:t>CXCL10 = possible real inflammation (does not track cholangiocytes).</a:t>
+            </a:r>
+            <a:endParaRPr lang="en-US" sz="1500" dirty="0"/>
+          </a:p>
+        </p:txBody>
+      </p:sp>
+      <p:sp>
+        <p:nvSpPr>
+          <p:cNvPr id="8" name="Text 5"/>
           <p:cNvSpPr/>
           <p:nvPr/>
         </p:nvSpPr>
@@ -4386,7 +6073,7 @@
             <a:r>
               <a:rPr lang="en-US" sz="1050" dirty="0">
                 <a:solidFill>
-                  <a:srgbClr val="6B6256"/>
+                  <a:srgbClr val="5C6E73"/>
                 </a:solidFill>
               </a:rPr>
               <a:t>Computational Genomics 76553  ·  HUJI  ·  MASLD snRNA-seq hackathon</a:t>
@@ -4397,7 +6084,7 @@
       </p:sp>
       <p:sp>
         <p:nvSpPr>
-          <p:cNvPr id="17" name="Text 15"/>
+          <p:cNvPr id="9" name="Text 6"/>
           <p:cNvSpPr/>
           <p:nvPr/>
         </p:nvSpPr>
@@ -4422,7 +6109,7 @@
             <a:r>
               <a:rPr lang="en-US" sz="1050" dirty="0">
                 <a:solidFill>
-                  <a:srgbClr val="6B6256"/>
+                  <a:srgbClr val="5C6E73"/>
                 </a:solidFill>
               </a:rPr>
               <a:t>12</a:t>
@@ -4445,7 +6132,7 @@
     <p:bg>
       <p:bgPr>
         <a:solidFill>
-          <a:srgbClr val="F7F3EB"/>
+          <a:srgbClr val="16242B"/>
         </a:solidFill>
       </p:bgPr>
     </p:bg>
@@ -4471,28 +6158,68 @@
         </p:nvSpPr>
         <p:spPr>
           <a:xfrm>
-            <a:off x="457200" y="310896"/>
+            <a:off x="0" y="0"/>
+            <a:ext cx="256032" cy="6858000"/>
+          </a:xfrm>
+          <a:prstGeom prst="rect">
+            <a:avLst/>
+          </a:prstGeom>
+          <a:solidFill>
+            <a:srgbClr val="1B6E78"/>
+          </a:solidFill>
+          <a:ln/>
+        </p:spPr>
+      </p:sp>
+      <p:sp>
+        <p:nvSpPr>
+          <p:cNvPr id="3" name="Shape 1"/>
+          <p:cNvSpPr/>
+          <p:nvPr/>
+        </p:nvSpPr>
+        <p:spPr>
+          <a:xfrm>
+            <a:off x="256032" y="0"/>
+            <a:ext cx="109728" cy="6858000"/>
+          </a:xfrm>
+          <a:prstGeom prst="rect">
+            <a:avLst/>
+          </a:prstGeom>
+          <a:solidFill>
+            <a:srgbClr val="C0561B"/>
+          </a:solidFill>
+          <a:ln/>
+        </p:spPr>
+      </p:sp>
+      <p:sp>
+        <p:nvSpPr>
+          <p:cNvPr id="4" name="Shape 2"/>
+          <p:cNvSpPr/>
+          <p:nvPr/>
+        </p:nvSpPr>
+        <p:spPr>
+          <a:xfrm>
+            <a:off x="777240" y="457200"/>
             <a:ext cx="146304" cy="237744"/>
           </a:xfrm>
           <a:prstGeom prst="rect">
             <a:avLst/>
           </a:prstGeom>
           <a:solidFill>
-            <a:srgbClr val="C0562B"/>
+            <a:srgbClr val="C0561B"/>
           </a:solidFill>
           <a:ln/>
         </p:spPr>
       </p:sp>
       <p:sp>
         <p:nvSpPr>
-          <p:cNvPr id="3" name="Text 1"/>
-          <p:cNvSpPr/>
-          <p:nvPr/>
-        </p:nvSpPr>
-        <p:spPr>
-          <a:xfrm>
-            <a:off x="676656" y="274320"/>
-            <a:ext cx="10972800" cy="320040"/>
+          <p:cNvPr id="5" name="Text 3"/>
+          <p:cNvSpPr/>
+          <p:nvPr/>
+        </p:nvSpPr>
+        <p:spPr>
+          <a:xfrm>
+            <a:off x="987552" y="420624"/>
+            <a:ext cx="10515600" cy="365760"/>
           </a:xfrm>
           <a:prstGeom prst="rect">
             <a:avLst/>
@@ -4504,31 +6231,31 @@
           <a:bodyPr wrap="square" rtlCol="0" anchor="ctr"/>
           <a:lstStyle/>
           <a:p>
-            <a:pPr indent="0" marL="0">
-              <a:buNone/>
-            </a:pPr>
-            <a:r>
-              <a:rPr lang="en-US" sz="1300" b="1" spc="300" kern="0" dirty="0">
-                <a:solidFill>
-                  <a:srgbClr val="C0562B"/>
-                </a:solidFill>
-              </a:rPr>
-              <a:t>BACKUP  ·  DE-ZONATION MECHANISMS</a:t>
-            </a:r>
-            <a:endParaRPr lang="en-US" sz="1300" dirty="0"/>
-          </a:p>
-        </p:txBody>
-      </p:sp>
-      <p:sp>
-        <p:nvSpPr>
-          <p:cNvPr id="4" name="Text 2"/>
-          <p:cNvSpPr/>
-          <p:nvPr/>
-        </p:nvSpPr>
-        <p:spPr>
-          <a:xfrm>
-            <a:off x="438912" y="585216"/>
-            <a:ext cx="11338560" cy="731520"/>
+            <a:pPr algn="l" indent="0" marL="0">
+              <a:buNone/>
+            </a:pPr>
+            <a:r>
+              <a:rPr lang="en-US" sz="1400" b="1" spc="300" kern="0" dirty="0">
+                <a:solidFill>
+                  <a:srgbClr val="C0561B"/>
+                </a:solidFill>
+              </a:rPr>
+              <a:t>CONCLUSION</a:t>
+            </a:r>
+            <a:endParaRPr lang="en-US" sz="1400" dirty="0"/>
+          </a:p>
+        </p:txBody>
+      </p:sp>
+      <p:sp>
+        <p:nvSpPr>
+          <p:cNvPr id="6" name="Text 4"/>
+          <p:cNvSpPr/>
+          <p:nvPr/>
+        </p:nvSpPr>
+        <p:spPr>
+          <a:xfrm>
+            <a:off x="777240" y="777240"/>
+            <a:ext cx="10607040" cy="731520"/>
           </a:xfrm>
           <a:prstGeom prst="rect">
             <a:avLst/>
@@ -4544,53 +6271,59 @@
               <a:buNone/>
             </a:pPr>
             <a:r>
-              <a:rPr lang="en-US" sz="2600" b="1" dirty="0">
-                <a:solidFill>
-                  <a:srgbClr val="1F3A3D"/>
+              <a:rPr lang="en-US" sz="3000" b="1" dirty="0">
+                <a:solidFill>
+                  <a:srgbClr val="FFFFFF"/>
                 </a:solidFill>
                 <a:latin typeface="Georgia" pitchFamily="34" charset="0"/>
                 <a:ea typeface="Georgia" pitchFamily="34" charset="-122"/>
                 <a:cs typeface="Georgia" pitchFamily="34" charset="-120"/>
               </a:rPr>
-              <a:t>Full four-mechanism panel (F0–F4)</a:t>
-            </a:r>
-            <a:endParaRPr lang="en-US" sz="2600" dirty="0"/>
-          </a:p>
-        </p:txBody>
-      </p:sp>
-      <p:pic>
-        <p:nvPicPr>
-          <p:cNvPr id="5" name="Image 0" descr="D:\CS\Genomics\Hackathon\presentation/assets/fig_anchor2x2.png">    </p:cNvPr>
-          <p:cNvPicPr>
-            <a:picLocks noChangeAspect="1"/>
-          </p:cNvPicPr>
-          <p:nvPr/>
-        </p:nvPicPr>
-        <p:blipFill>
-          <a:blip r:embed="rId1"/>
-          <a:srcRect l="0" r="0" t="0" b="0"/>
-          <a:stretch/>
-        </p:blipFill>
-        <p:spPr>
-          <a:xfrm>
-            <a:off x="1188720" y="1371600"/>
-            <a:ext cx="8412480" cy="4572000"/>
-          </a:xfrm>
-          <a:prstGeom prst="rect">
-            <a:avLst/>
-          </a:prstGeom>
-        </p:spPr>
-      </p:pic>
-      <p:sp>
-        <p:nvSpPr>
-          <p:cNvPr id="6" name="Text 3"/>
-          <p:cNvSpPr/>
-          <p:nvPr/>
-        </p:nvSpPr>
-        <p:spPr>
-          <a:xfrm>
-            <a:off x="1188720" y="5943600"/>
-            <a:ext cx="8412480" cy="365760"/>
+              <a:t>Preservation, not progressive collapse</a:t>
+            </a:r>
+            <a:endParaRPr lang="en-US" sz="3000" dirty="0"/>
+          </a:p>
+        </p:txBody>
+      </p:sp>
+      <p:sp>
+        <p:nvSpPr>
+          <p:cNvPr id="7" name="Shape 5"/>
+          <p:cNvSpPr/>
+          <p:nvPr/>
+        </p:nvSpPr>
+        <p:spPr>
+          <a:xfrm>
+            <a:off x="777240" y="1600200"/>
+            <a:ext cx="3520440" cy="3931920"/>
+          </a:xfrm>
+          <a:prstGeom prst="roundRect">
+            <a:avLst>
+              <a:gd name="adj" fmla="val 2078"/>
+            </a:avLst>
+          </a:prstGeom>
+          <a:solidFill>
+            <a:srgbClr val="1E3A3D"/>
+          </a:solidFill>
+          <a:ln/>
+          <a:effectLst>
+            <a:outerShdw sx="100000" sy="100000" kx="0" ky="0" algn="bl" rotWithShape="0" blurRad="88900" dist="38100" dir="5400000">
+              <a:srgbClr val="000000">
+                <a:alpha val="12000"/>
+              </a:srgbClr>
+            </a:outerShdw>
+          </a:effectLst>
+        </p:spPr>
+      </p:sp>
+      <p:sp>
+        <p:nvSpPr>
+          <p:cNvPr id="8" name="Text 6"/>
+          <p:cNvSpPr/>
+          <p:nvPr/>
+        </p:nvSpPr>
+        <p:spPr>
+          <a:xfrm>
+            <a:off x="777240" y="1737360"/>
+            <a:ext cx="3520440" cy="457200"/>
           </a:xfrm>
           <a:prstGeom prst="rect">
             <a:avLst/>
@@ -4599,34 +6332,509 @@
           <a:ln/>
         </p:spPr>
         <p:txBody>
+          <a:bodyPr wrap="square" rtlCol="0" anchor="ctr"/>
+          <a:lstStyle/>
+          <a:p>
+            <a:pPr algn="ctr" indent="0" marL="0">
+              <a:buNone/>
+            </a:pPr>
+            <a:r>
+              <a:rPr lang="en-US" sz="2000" b="1" dirty="0">
+                <a:solidFill>
+                  <a:srgbClr val="F0B27A"/>
+                </a:solidFill>
+                <a:latin typeface="Georgia" pitchFamily="34" charset="0"/>
+                <a:ea typeface="Georgia" pitchFamily="34" charset="-122"/>
+                <a:cs typeface="Georgia" pitchFamily="34" charset="-120"/>
+              </a:rPr>
+              <a:t>Conclusions</a:t>
+            </a:r>
+            <a:endParaRPr lang="en-US" sz="2000" dirty="0"/>
+          </a:p>
+        </p:txBody>
+      </p:sp>
+      <p:sp>
+        <p:nvSpPr>
+          <p:cNvPr id="9" name="Text 7"/>
+          <p:cNvSpPr/>
+          <p:nvPr/>
+        </p:nvSpPr>
+        <p:spPr>
+          <a:xfrm>
+            <a:off x="1005840" y="2286000"/>
+            <a:ext cx="3108960" cy="3108960"/>
+          </a:xfrm>
+          <a:prstGeom prst="rect">
+            <a:avLst/>
+          </a:prstGeom>
+          <a:noFill/>
+          <a:ln/>
+        </p:spPr>
+        <p:txBody>
+          <a:bodyPr wrap="square" rtlCol="0" anchor="t"/>
+          <a:lstStyle/>
+          <a:p>
+            <a:pPr algn="l" marL="342900" indent="-342900">
+              <a:spcAft>
+                <a:spcPts val="900"/>
+              </a:spcAft>
+              <a:buSzPct val="100000"/>
+              <a:buChar char="•"/>
+            </a:pPr>
+            <a:r>
+              <a:rPr lang="en-US" sz="1450" dirty="0">
+                <a:solidFill>
+                  <a:srgbClr val="E2E8F0"/>
+                </a:solidFill>
+              </a:rPr>
+              <a:t>Full healthy→end-stage trajectory is source-confounded.</a:t>
+            </a:r>
+            <a:endParaRPr lang="en-US" sz="1450" dirty="0"/>
+          </a:p>
+          <a:p>
+            <a:pPr algn="l" marL="342900" indent="-342900">
+              <a:spcAft>
+                <a:spcPts val="900"/>
+              </a:spcAft>
+              <a:buSzPct val="100000"/>
+              <a:buChar char="•"/>
+            </a:pPr>
+            <a:r>
+              <a:rPr lang="en-US" sz="1450" dirty="0">
+                <a:solidFill>
+                  <a:srgbClr val="E2E8F0"/>
+                </a:solidFill>
+              </a:rPr>
+              <a:t>In biopsy F1–F4, hepatocyte transcriptional zonation is preserved.</a:t>
+            </a:r>
+            <a:endParaRPr lang="en-US" sz="1450" dirty="0"/>
+          </a:p>
+          <a:p>
+            <a:pPr algn="l" marL="342900" indent="-342900">
+              <a:spcAft>
+                <a:spcPts val="900"/>
+              </a:spcAft>
+              <a:buSzPct val="100000"/>
+              <a:buChar char="•"/>
+            </a:pPr>
+            <a:r>
+              <a:rPr lang="en-US" sz="1450" dirty="0">
+                <a:solidFill>
+                  <a:srgbClr val="E2E8F0"/>
+                </a:solidFill>
+              </a:rPr>
+              <a:t>Main DGE signal = biliary/ductular burden, most consistent with composition / ambient RNA.</a:t>
+            </a:r>
+            <a:endParaRPr lang="en-US" sz="1450" dirty="0"/>
+          </a:p>
+        </p:txBody>
+      </p:sp>
+      <p:sp>
+        <p:nvSpPr>
+          <p:cNvPr id="10" name="Shape 8"/>
+          <p:cNvSpPr/>
+          <p:nvPr/>
+        </p:nvSpPr>
+        <p:spPr>
+          <a:xfrm>
+            <a:off x="4526280" y="1600200"/>
+            <a:ext cx="3520440" cy="3931920"/>
+          </a:xfrm>
+          <a:prstGeom prst="roundRect">
+            <a:avLst>
+              <a:gd name="adj" fmla="val 2078"/>
+            </a:avLst>
+          </a:prstGeom>
+          <a:solidFill>
+            <a:srgbClr val="1E3A3D"/>
+          </a:solidFill>
+          <a:ln/>
+          <a:effectLst>
+            <a:outerShdw sx="100000" sy="100000" kx="0" ky="0" algn="bl" rotWithShape="0" blurRad="88900" dist="38100" dir="5400000">
+              <a:srgbClr val="000000">
+                <a:alpha val="12000"/>
+              </a:srgbClr>
+            </a:outerShdw>
+          </a:effectLst>
+        </p:spPr>
+      </p:sp>
+      <p:sp>
+        <p:nvSpPr>
+          <p:cNvPr id="11" name="Text 9"/>
+          <p:cNvSpPr/>
+          <p:nvPr/>
+        </p:nvSpPr>
+        <p:spPr>
+          <a:xfrm>
+            <a:off x="4526280" y="1737360"/>
+            <a:ext cx="3520440" cy="457200"/>
+          </a:xfrm>
+          <a:prstGeom prst="rect">
+            <a:avLst/>
+          </a:prstGeom>
+          <a:noFill/>
+          <a:ln/>
+        </p:spPr>
+        <p:txBody>
+          <a:bodyPr wrap="square" rtlCol="0" anchor="ctr"/>
+          <a:lstStyle/>
+          <a:p>
+            <a:pPr algn="ctr" indent="0" marL="0">
+              <a:buNone/>
+            </a:pPr>
+            <a:r>
+              <a:rPr lang="en-US" sz="2000" b="1" dirty="0">
+                <a:solidFill>
+                  <a:srgbClr val="FCA5A5"/>
+                </a:solidFill>
+                <a:latin typeface="Georgia" pitchFamily="34" charset="0"/>
+                <a:ea typeface="Georgia" pitchFamily="34" charset="-122"/>
+                <a:cs typeface="Georgia" pitchFamily="34" charset="-120"/>
+              </a:rPr>
+              <a:t>Limits</a:t>
+            </a:r>
+            <a:endParaRPr lang="en-US" sz="2000" dirty="0"/>
+          </a:p>
+        </p:txBody>
+      </p:sp>
+      <p:sp>
+        <p:nvSpPr>
+          <p:cNvPr id="12" name="Text 10"/>
+          <p:cNvSpPr/>
+          <p:nvPr/>
+        </p:nvSpPr>
+        <p:spPr>
+          <a:xfrm>
+            <a:off x="4754880" y="2286000"/>
+            <a:ext cx="3108960" cy="3108960"/>
+          </a:xfrm>
+          <a:prstGeom prst="rect">
+            <a:avLst/>
+          </a:prstGeom>
+          <a:noFill/>
+          <a:ln/>
+        </p:spPr>
+        <p:txBody>
+          <a:bodyPr wrap="square" rtlCol="0" anchor="t"/>
+          <a:lstStyle/>
+          <a:p>
+            <a:pPr algn="l" marL="342900" indent="-342900">
+              <a:spcAft>
+                <a:spcPts val="900"/>
+              </a:spcAft>
+              <a:buSzPct val="100000"/>
+              <a:buChar char="•"/>
+            </a:pPr>
+            <a:r>
+              <a:rPr lang="en-US" sz="1450" dirty="0">
+                <a:solidFill>
+                  <a:srgbClr val="E2E8F0"/>
+                </a:solidFill>
+              </a:rPr>
+              <a:t>snRNA-seq ≠ lobule geometry / spatial architecture.</a:t>
+            </a:r>
+            <a:endParaRPr lang="en-US" sz="1450" dirty="0"/>
+          </a:p>
+          <a:p>
+            <a:pPr algn="l" marL="342900" indent="-342900">
+              <a:spcAft>
+                <a:spcPts val="900"/>
+              </a:spcAft>
+              <a:buSzPct val="100000"/>
+              <a:buChar char="•"/>
+            </a:pPr>
+            <a:r>
+              <a:rPr lang="en-US" sz="1450" dirty="0">
+                <a:solidFill>
+                  <a:srgbClr val="E2E8F0"/>
+                </a:solidFill>
+              </a:rPr>
+              <a:t>Imaging / protein / organoid evidence not re-analyzed.</a:t>
+            </a:r>
+            <a:endParaRPr lang="en-US" sz="1450" dirty="0"/>
+          </a:p>
+          <a:p>
+            <a:pPr algn="l" marL="342900" indent="-342900">
+              <a:spcAft>
+                <a:spcPts val="900"/>
+              </a:spcAft>
+              <a:buSzPct val="100000"/>
+              <a:buChar char="•"/>
+            </a:pPr>
+            <a:r>
+              <a:rPr lang="en-US" sz="1450" dirty="0">
+                <a:solidFill>
+                  <a:srgbClr val="E2E8F0"/>
+                </a:solidFill>
+              </a:rPr>
+              <a:t>F4 has only 4 biopsy donors.</a:t>
+            </a:r>
+            <a:endParaRPr lang="en-US" sz="1450" dirty="0"/>
+          </a:p>
+          <a:p>
+            <a:pPr algn="l" marL="342900" indent="-342900">
+              <a:spcAft>
+                <a:spcPts val="900"/>
+              </a:spcAft>
+              <a:buSzPct val="100000"/>
+              <a:buChar char="•"/>
+            </a:pPr>
+            <a:r>
+              <a:rPr lang="en-US" sz="1450" dirty="0">
+                <a:solidFill>
+                  <a:srgbClr val="E2E8F0"/>
+                </a:solidFill>
+              </a:rPr>
+              <a:t>Gene-level DGE can miss weak coordinated pathways.</a:t>
+            </a:r>
+            <a:endParaRPr lang="en-US" sz="1450" dirty="0"/>
+          </a:p>
+        </p:txBody>
+      </p:sp>
+      <p:sp>
+        <p:nvSpPr>
+          <p:cNvPr id="13" name="Shape 11"/>
+          <p:cNvSpPr/>
+          <p:nvPr/>
+        </p:nvSpPr>
+        <p:spPr>
+          <a:xfrm>
+            <a:off x="8275320" y="1600200"/>
+            <a:ext cx="3520440" cy="3931920"/>
+          </a:xfrm>
+          <a:prstGeom prst="roundRect">
+            <a:avLst>
+              <a:gd name="adj" fmla="val 2078"/>
+            </a:avLst>
+          </a:prstGeom>
+          <a:solidFill>
+            <a:srgbClr val="1E3A3D"/>
+          </a:solidFill>
+          <a:ln/>
+          <a:effectLst>
+            <a:outerShdw sx="100000" sy="100000" kx="0" ky="0" algn="bl" rotWithShape="0" blurRad="88900" dist="38100" dir="5400000">
+              <a:srgbClr val="000000">
+                <a:alpha val="12000"/>
+              </a:srgbClr>
+            </a:outerShdw>
+          </a:effectLst>
+        </p:spPr>
+      </p:sp>
+      <p:sp>
+        <p:nvSpPr>
+          <p:cNvPr id="14" name="Text 12"/>
+          <p:cNvSpPr/>
+          <p:nvPr/>
+        </p:nvSpPr>
+        <p:spPr>
+          <a:xfrm>
+            <a:off x="8275320" y="1737360"/>
+            <a:ext cx="3520440" cy="457200"/>
+          </a:xfrm>
+          <a:prstGeom prst="rect">
+            <a:avLst/>
+          </a:prstGeom>
+          <a:noFill/>
+          <a:ln/>
+        </p:spPr>
+        <p:txBody>
+          <a:bodyPr wrap="square" rtlCol="0" anchor="ctr"/>
+          <a:lstStyle/>
+          <a:p>
+            <a:pPr algn="ctr" indent="0" marL="0">
+              <a:buNone/>
+            </a:pPr>
+            <a:r>
+              <a:rPr lang="en-US" sz="2000" b="1" dirty="0">
+                <a:solidFill>
+                  <a:srgbClr val="9CC6CC"/>
+                </a:solidFill>
+                <a:latin typeface="Georgia" pitchFamily="34" charset="0"/>
+                <a:ea typeface="Georgia" pitchFamily="34" charset="-122"/>
+                <a:cs typeface="Georgia" pitchFamily="34" charset="-120"/>
+              </a:rPr>
+              <a:t>Next</a:t>
+            </a:r>
+            <a:endParaRPr lang="en-US" sz="2000" dirty="0"/>
+          </a:p>
+        </p:txBody>
+      </p:sp>
+      <p:sp>
+        <p:nvSpPr>
+          <p:cNvPr id="15" name="Text 13"/>
+          <p:cNvSpPr/>
+          <p:nvPr/>
+        </p:nvSpPr>
+        <p:spPr>
+          <a:xfrm>
+            <a:off x="8503920" y="2286000"/>
+            <a:ext cx="3108960" cy="3108960"/>
+          </a:xfrm>
+          <a:prstGeom prst="rect">
+            <a:avLst/>
+          </a:prstGeom>
+          <a:noFill/>
+          <a:ln/>
+        </p:spPr>
+        <p:txBody>
+          <a:bodyPr wrap="square" rtlCol="0" anchor="t"/>
+          <a:lstStyle/>
+          <a:p>
+            <a:pPr algn="l" marL="342900" indent="-342900">
+              <a:spcAft>
+                <a:spcPts val="900"/>
+              </a:spcAft>
+              <a:buSzPct val="100000"/>
+              <a:buChar char="•"/>
+            </a:pPr>
+            <a:r>
+              <a:rPr lang="en-US" sz="1450" dirty="0">
+                <a:solidFill>
+                  <a:srgbClr val="E2E8F0"/>
+                </a:solidFill>
+              </a:rPr>
+              <a:t>CAMERA / ROAST gene-set tests.</a:t>
+            </a:r>
+            <a:endParaRPr lang="en-US" sz="1450" dirty="0"/>
+          </a:p>
+          <a:p>
+            <a:pPr algn="l" marL="342900" indent="-342900">
+              <a:spcAft>
+                <a:spcPts val="900"/>
+              </a:spcAft>
+              <a:buSzPct val="100000"/>
+              <a:buChar char="•"/>
+            </a:pPr>
+            <a:r>
+              <a:rPr lang="en-US" sz="1450" dirty="0">
+                <a:solidFill>
+                  <a:srgbClr val="E2E8F0"/>
+                </a:solidFill>
+              </a:rPr>
+              <a:t>Leave-one-F4-donor-out DGE.</a:t>
+            </a:r>
+            <a:endParaRPr lang="en-US" sz="1450" dirty="0"/>
+          </a:p>
+          <a:p>
+            <a:pPr algn="l" marL="342900" indent="-342900">
+              <a:spcAft>
+                <a:spcPts val="900"/>
+              </a:spcAft>
+              <a:buSzPct val="100000"/>
+              <a:buChar char="•"/>
+            </a:pPr>
+            <a:r>
+              <a:rPr lang="en-US" sz="1450" dirty="0">
+                <a:solidFill>
+                  <a:srgbClr val="E2E8F0"/>
+                </a:solidFill>
+              </a:rPr>
+              <a:t>Quantitative contamination model.</a:t>
+            </a:r>
+            <a:endParaRPr lang="en-US" sz="1450" dirty="0"/>
+          </a:p>
+          <a:p>
+            <a:pPr algn="l" marL="342900" indent="-342900">
+              <a:spcAft>
+                <a:spcPts val="900"/>
+              </a:spcAft>
+              <a:buSzPct val="100000"/>
+              <a:buChar char="•"/>
+            </a:pPr>
+            <a:r>
+              <a:rPr lang="en-US" sz="1450" dirty="0">
+                <a:solidFill>
+                  <a:srgbClr val="E2E8F0"/>
+                </a:solidFill>
+              </a:rPr>
+              <a:t>Spatial / independent biopsy validation.</a:t>
+            </a:r>
+            <a:endParaRPr lang="en-US" sz="1450" dirty="0"/>
+          </a:p>
+        </p:txBody>
+      </p:sp>
+      <p:sp>
+        <p:nvSpPr>
+          <p:cNvPr id="16" name="Text 14"/>
+          <p:cNvSpPr/>
+          <p:nvPr/>
+        </p:nvSpPr>
+        <p:spPr>
+          <a:xfrm>
+            <a:off x="640080" y="5852160"/>
+            <a:ext cx="10881360" cy="594360"/>
+          </a:xfrm>
+          <a:prstGeom prst="rect">
+            <a:avLst/>
+          </a:prstGeom>
+          <a:noFill/>
+          <a:ln/>
+        </p:spPr>
+        <p:txBody>
+          <a:bodyPr wrap="square" rtlCol="0" anchor="ctr"/>
+          <a:lstStyle/>
+          <a:p>
+            <a:pPr algn="ctr" indent="0" marL="0">
+              <a:buNone/>
+            </a:pPr>
+            <a:r>
+              <a:rPr lang="en-US" sz="1700" b="1" i="1" dirty="0">
+                <a:solidFill>
+                  <a:srgbClr val="FFFFFF"/>
+                </a:solidFill>
+              </a:rPr>
+              <a:t>The snRNA-seq transcriptomic evidence for progressive de-zonation does not survive matched-source re-analysis.</a:t>
+            </a:r>
+            <a:endParaRPr lang="en-US" sz="1700" dirty="0"/>
+          </a:p>
+        </p:txBody>
+      </p:sp>
+      <p:sp>
+        <p:nvSpPr>
+          <p:cNvPr id="17" name="Text 15"/>
+          <p:cNvSpPr/>
+          <p:nvPr/>
+        </p:nvSpPr>
+        <p:spPr>
+          <a:xfrm>
+            <a:off x="457200" y="6510528"/>
+            <a:ext cx="9601200" cy="274320"/>
+          </a:xfrm>
+          <a:prstGeom prst="rect">
+            <a:avLst/>
+          </a:prstGeom>
+          <a:noFill/>
+          <a:ln/>
+        </p:spPr>
+        <p:txBody>
           <a:bodyPr wrap="square" lIns="0" tIns="0" rIns="0" bIns="0" rtlCol="0" anchor="ctr"/>
           <a:lstStyle/>
           <a:p>
-            <a:pPr algn="ctr" indent="0" marL="0">
-              <a:buNone/>
-            </a:pPr>
-            <a:r>
-              <a:rPr lang="en-US" sz="1200" i="1" dirty="0">
-                <a:solidFill>
-                  <a:srgbClr val="6B6256"/>
-                </a:solidFill>
-              </a:rPr>
-              <a:t>Figure 5.  Depletion, co-expression, turn-off and composition across biopsy fibrosis — none shows a large monotone change.</a:t>
-            </a:r>
-            <a:endParaRPr lang="en-US" sz="1200" dirty="0"/>
-          </a:p>
-        </p:txBody>
-      </p:sp>
-      <p:sp>
-        <p:nvSpPr>
-          <p:cNvPr id="7" name="Text 4"/>
-          <p:cNvSpPr/>
-          <p:nvPr/>
-        </p:nvSpPr>
-        <p:spPr>
-          <a:xfrm>
-            <a:off x="9784080" y="2377440"/>
-            <a:ext cx="2194560" cy="2743200"/>
+            <a:pPr algn="l" indent="0" marL="0">
+              <a:buNone/>
+            </a:pPr>
+            <a:r>
+              <a:rPr lang="en-US" sz="1050" dirty="0">
+                <a:solidFill>
+                  <a:srgbClr val="5C6E73"/>
+                </a:solidFill>
+              </a:rPr>
+              <a:t>Computational Genomics 76553  ·  HUJI  ·  MASLD snRNA-seq hackathon</a:t>
+            </a:r>
+            <a:endParaRPr lang="en-US" sz="1050" dirty="0"/>
+          </a:p>
+        </p:txBody>
+      </p:sp>
+      <p:sp>
+        <p:nvSpPr>
+          <p:cNvPr id="18" name="Text 16"/>
+          <p:cNvSpPr/>
+          <p:nvPr/>
+        </p:nvSpPr>
+        <p:spPr>
+          <a:xfrm>
+            <a:off x="11155680" y="6510528"/>
+            <a:ext cx="548640" cy="274320"/>
           </a:xfrm>
           <a:prstGeom prst="rect">
             <a:avLst/>
@@ -4635,36 +6843,21 @@
           <a:ln/>
         </p:spPr>
         <p:txBody>
-          <a:bodyPr wrap="square" rtlCol="0" anchor="ctr"/>
-          <a:lstStyle/>
-          <a:p>
-            <a:pPr algn="l" indent="0" marL="0">
-              <a:buNone/>
-            </a:pPr>
-            <a:r>
-              <a:rPr lang="en-US" sz="1500" b="1" dirty="0">
-                <a:solidFill>
-                  <a:srgbClr val="1E293B"/>
-                </a:solidFill>
-              </a:rPr>
-              <a:t>None of the four routes shows a large monotone biopsy-axis change.
-</a:t>
-            </a:r>
-            <a:endParaRPr lang="en-US" sz="1500" dirty="0"/>
-          </a:p>
-          <a:p>
-            <a:pPr algn="l" indent="0" marL="0">
-              <a:buNone/>
-            </a:pPr>
-            <a:r>
-              <a:rPr lang="en-US" sz="1500" dirty="0">
-                <a:solidFill>
-                  <a:srgbClr val="BE123C"/>
-                </a:solidFill>
-              </a:rPr>
-              <a:t>Confounded explants: dual ≈ 2.9% (~7×).</a:t>
-            </a:r>
-            <a:endParaRPr lang="en-US" sz="1500" dirty="0"/>
+          <a:bodyPr wrap="square" lIns="0" tIns="0" rIns="0" bIns="0" rtlCol="0" anchor="ctr"/>
+          <a:lstStyle/>
+          <a:p>
+            <a:pPr algn="r" indent="0" marL="0">
+              <a:buNone/>
+            </a:pPr>
+            <a:r>
+              <a:rPr lang="en-US" sz="1050" dirty="0">
+                <a:solidFill>
+                  <a:srgbClr val="5C6E73"/>
+                </a:solidFill>
+              </a:rPr>
+              <a:t>13</a:t>
+            </a:r>
+            <a:endParaRPr lang="en-US" sz="1050" dirty="0"/>
           </a:p>
         </p:txBody>
       </p:sp>
@@ -4682,7 +6875,7 @@
     <p:bg>
       <p:bgPr>
         <a:solidFill>
-          <a:srgbClr val="F7F3EB"/>
+          <a:srgbClr val="F7F5F1"/>
         </a:solidFill>
       </p:bgPr>
     </p:bg>
@@ -4715,7 +6908,7 @@
             <a:avLst/>
           </a:prstGeom>
           <a:solidFill>
-            <a:srgbClr val="C0562B"/>
+            <a:srgbClr val="C0561B"/>
           </a:solidFill>
           <a:ln/>
         </p:spPr>
@@ -4747,10 +6940,10 @@
             <a:r>
               <a:rPr lang="en-US" sz="1300" b="1" spc="300" kern="0" dirty="0">
                 <a:solidFill>
-                  <a:srgbClr val="C0562B"/>
-                </a:solidFill>
-              </a:rPr>
-              <a:t>BACKUP  ·  SCOPE</a:t>
+                  <a:srgbClr val="C0561B"/>
+                </a:solidFill>
+              </a:rPr>
+              <a:t>BACKUP  ·  DE-ZONATION MECHANISMS</a:t>
             </a:r>
             <a:endParaRPr lang="en-US" sz="1300" dirty="0"/>
           </a:p>
@@ -4783,28 +6976,51 @@
             <a:r>
               <a:rPr lang="en-US" sz="2600" b="1" dirty="0">
                 <a:solidFill>
-                  <a:srgbClr val="1F3A3D"/>
+                  <a:srgbClr val="123F47"/>
                 </a:solidFill>
                 <a:latin typeface="Georgia" pitchFamily="34" charset="0"/>
                 <a:ea typeface="Georgia" pitchFamily="34" charset="-122"/>
                 <a:cs typeface="Georgia" pitchFamily="34" charset="-120"/>
               </a:rPr>
-              <a:t>Are you overturning the paper? No</a:t>
+              <a:t>Full four-mechanism panel (F0–F4)</a:t>
             </a:r>
             <a:endParaRPr lang="en-US" sz="2600" dirty="0"/>
           </a:p>
         </p:txBody>
       </p:sp>
-      <p:sp>
-        <p:nvSpPr>
-          <p:cNvPr id="5" name="Text 3"/>
-          <p:cNvSpPr/>
-          <p:nvPr/>
-        </p:nvSpPr>
-        <p:spPr>
-          <a:xfrm>
-            <a:off x="731520" y="1463040"/>
-            <a:ext cx="10607040" cy="4572000"/>
+      <p:pic>
+        <p:nvPicPr>
+          <p:cNvPr id="5" name="Image 0" descr="D:\CS\Genomics\Hackathon\presentation/assets/fig_anchor2x2.png">    </p:cNvPr>
+          <p:cNvPicPr>
+            <a:picLocks noChangeAspect="1"/>
+          </p:cNvPicPr>
+          <p:nvPr/>
+        </p:nvPicPr>
+        <p:blipFill>
+          <a:blip r:embed="rId1"/>
+          <a:srcRect l="0" r="0" t="0" b="0"/>
+          <a:stretch/>
+        </p:blipFill>
+        <p:spPr>
+          <a:xfrm>
+            <a:off x="1188720" y="1371600"/>
+            <a:ext cx="8412480" cy="4572000"/>
+          </a:xfrm>
+          <a:prstGeom prst="rect">
+            <a:avLst/>
+          </a:prstGeom>
+        </p:spPr>
+      </p:pic>
+      <p:sp>
+        <p:nvSpPr>
+          <p:cNvPr id="6" name="Text 3"/>
+          <p:cNvSpPr/>
+          <p:nvPr/>
+        </p:nvSpPr>
+        <p:spPr>
+          <a:xfrm>
+            <a:off x="1188720" y="5943600"/>
+            <a:ext cx="8412480" cy="365760"/>
           </a:xfrm>
           <a:prstGeom prst="rect">
             <a:avLst/>
@@ -4813,79 +7029,72 @@
           <a:ln/>
         </p:spPr>
         <p:txBody>
-          <a:bodyPr wrap="square" rtlCol="0" anchor="t"/>
-          <a:lstStyle/>
-          <a:p>
-            <a:pPr algn="l" marL="342900" indent="-342900">
-              <a:spcAft>
-                <a:spcPts val="900"/>
-              </a:spcAft>
-              <a:buSzPct val="100000"/>
-              <a:buChar char="•"/>
-            </a:pPr>
-            <a:r>
-              <a:rPr lang="en-US" sz="2000" dirty="0">
-                <a:solidFill>
-                  <a:srgbClr val="1E293B"/>
-                </a:solidFill>
-              </a:rPr>
-              <a:t>We re-tested only the snRNA-seq transcriptional zonation/plasticity evidence.</a:t>
-            </a:r>
-            <a:endParaRPr lang="en-US" sz="2000" dirty="0"/>
-          </a:p>
-          <a:p>
-            <a:pPr algn="l" marL="342900" indent="-342900">
-              <a:spcAft>
-                <a:spcPts val="900"/>
-              </a:spcAft>
-              <a:buSzPct val="100000"/>
-              <a:buChar char="•"/>
-            </a:pPr>
-            <a:r>
-              <a:rPr lang="en-US" sz="2000" dirty="0">
-                <a:solidFill>
-                  <a:srgbClr val="1E293B"/>
-                </a:solidFill>
-              </a:rPr>
-              <a:t>We did NOT test imaging, protein staining, organoids, or 3D architecture.</a:t>
-            </a:r>
-            <a:endParaRPr lang="en-US" sz="2000" dirty="0"/>
-          </a:p>
-          <a:p>
-            <a:pPr algn="l" marL="342900" indent="-342900">
-              <a:spcAft>
-                <a:spcPts val="900"/>
-              </a:spcAft>
-              <a:buSzPct val="100000"/>
-              <a:buChar char="•"/>
-            </a:pPr>
-            <a:r>
-              <a:rPr lang="en-US" sz="2000" dirty="0">
-                <a:solidFill>
-                  <a:srgbClr val="1E293B"/>
-                </a:solidFill>
-              </a:rPr>
-              <a:t>Claim: matched biopsy transcriptomes do not show progressive zonation loss.</a:t>
-            </a:r>
-            <a:endParaRPr lang="en-US" sz="2000" dirty="0"/>
-          </a:p>
-          <a:p>
-            <a:pPr algn="l" marL="342900" indent="-342900">
-              <a:spcAft>
-                <a:spcPts val="900"/>
-              </a:spcAft>
-              <a:buSzPct val="100000"/>
-              <a:buChar char="•"/>
-            </a:pPr>
-            <a:r>
-              <a:rPr lang="en-US" sz="2000" dirty="0">
-                <a:solidFill>
-                  <a:srgbClr val="1E293B"/>
-                </a:solidFill>
-              </a:rPr>
-              <a:t>We agree the strong signal is an end-stage phenomenon.</a:t>
-            </a:r>
-            <a:endParaRPr lang="en-US" sz="2000" dirty="0"/>
+          <a:bodyPr wrap="square" lIns="0" tIns="0" rIns="0" bIns="0" rtlCol="0" anchor="ctr"/>
+          <a:lstStyle/>
+          <a:p>
+            <a:pPr algn="ctr" indent="0" marL="0">
+              <a:buNone/>
+            </a:pPr>
+            <a:r>
+              <a:rPr lang="en-US" sz="1200" i="1" dirty="0">
+                <a:solidFill>
+                  <a:srgbClr val="5C6E73"/>
+                </a:solidFill>
+              </a:rPr>
+              <a:t>Figure 5.  Depletion, co-expression, turn-off and composition across biopsy fibrosis — none shows a large monotone change.</a:t>
+            </a:r>
+            <a:endParaRPr lang="en-US" sz="1200" dirty="0"/>
+          </a:p>
+        </p:txBody>
+      </p:sp>
+      <p:sp>
+        <p:nvSpPr>
+          <p:cNvPr id="7" name="Text 4"/>
+          <p:cNvSpPr/>
+          <p:nvPr/>
+        </p:nvSpPr>
+        <p:spPr>
+          <a:xfrm>
+            <a:off x="9784080" y="2377440"/>
+            <a:ext cx="2194560" cy="2743200"/>
+          </a:xfrm>
+          <a:prstGeom prst="rect">
+            <a:avLst/>
+          </a:prstGeom>
+          <a:noFill/>
+          <a:ln/>
+        </p:spPr>
+        <p:txBody>
+          <a:bodyPr wrap="square" rtlCol="0" anchor="ctr"/>
+          <a:lstStyle/>
+          <a:p>
+            <a:pPr algn="l" indent="0" marL="0">
+              <a:buNone/>
+            </a:pPr>
+            <a:r>
+              <a:rPr lang="en-US" sz="1500" b="1" dirty="0">
+                <a:solidFill>
+                  <a:srgbClr val="1B2B31"/>
+                </a:solidFill>
+              </a:rPr>
+              <a:t>None of the four routes shows a large monotone biopsy-axis change.
+</a:t>
+            </a:r>
+            <a:endParaRPr lang="en-US" sz="1500" dirty="0"/>
+          </a:p>
+          <a:p>
+            <a:pPr algn="l" indent="0" marL="0">
+              <a:buNone/>
+            </a:pPr>
+            <a:r>
+              <a:rPr lang="en-US" sz="1500" dirty="0">
+                <a:solidFill>
+                  <a:srgbClr val="BE123C"/>
+                </a:solidFill>
+              </a:rPr>
+              <a:t>Confounded explants: dual ≈ 2.9% (~7×).</a:t>
+            </a:r>
+            <a:endParaRPr lang="en-US" sz="1500" dirty="0"/>
           </a:p>
         </p:txBody>
       </p:sp>
@@ -4903,7 +7112,7 @@
     <p:bg>
       <p:bgPr>
         <a:solidFill>
-          <a:srgbClr val="F7F3EB"/>
+          <a:srgbClr val="F7F5F1"/>
         </a:solidFill>
       </p:bgPr>
     </p:bg>
@@ -4936,7 +7145,7 @@
             <a:avLst/>
           </a:prstGeom>
           <a:solidFill>
-            <a:srgbClr val="C0562B"/>
+            <a:srgbClr val="C0561B"/>
           </a:solidFill>
           <a:ln/>
         </p:spPr>
@@ -4968,10 +7177,10 @@
             <a:r>
               <a:rPr lang="en-US" sz="1300" b="1" spc="300" kern="0" dirty="0">
                 <a:solidFill>
-                  <a:srgbClr val="C0562B"/>
-                </a:solidFill>
-              </a:rPr>
-              <a:t>BACKUP  ·  LOBE</a:t>
+                  <a:srgbClr val="C0561B"/>
+                </a:solidFill>
+              </a:rPr>
+              <a:t>BACKUP  ·  SCOPE</a:t>
             </a:r>
             <a:endParaRPr lang="en-US" sz="1300" dirty="0"/>
           </a:p>
@@ -5004,51 +7213,28 @@
             <a:r>
               <a:rPr lang="en-US" sz="2600" b="1" dirty="0">
                 <a:solidFill>
-                  <a:srgbClr val="1F3A3D"/>
+                  <a:srgbClr val="123F47"/>
                 </a:solidFill>
                 <a:latin typeface="Georgia" pitchFamily="34" charset="0"/>
                 <a:ea typeface="Georgia" pitchFamily="34" charset="-122"/>
                 <a:cs typeface="Georgia" pitchFamily="34" charset="-120"/>
               </a:rPr>
-              <a:t>Caudate lobe? Lobe-invariant</a:t>
+              <a:t>Are you overturning the paper? No</a:t>
             </a:r>
             <a:endParaRPr lang="en-US" sz="2600" dirty="0"/>
           </a:p>
         </p:txBody>
       </p:sp>
-      <p:pic>
-        <p:nvPicPr>
-          <p:cNvPr id="5" name="Image 0" descr="D:\CS\Genomics\Hackathon\presentation/assets/fig_lobe.png">    </p:cNvPr>
-          <p:cNvPicPr>
-            <a:picLocks noChangeAspect="1"/>
-          </p:cNvPicPr>
-          <p:nvPr/>
-        </p:nvPicPr>
-        <p:blipFill>
-          <a:blip r:embed="rId1"/>
-          <a:srcRect l="0" r="0" t="0" b="0"/>
-          <a:stretch/>
-        </p:blipFill>
-        <p:spPr>
-          <a:xfrm>
-            <a:off x="731520" y="1371600"/>
-            <a:ext cx="6949440" cy="4572000"/>
-          </a:xfrm>
-          <a:prstGeom prst="rect">
-            <a:avLst/>
-          </a:prstGeom>
-        </p:spPr>
-      </p:pic>
-      <p:sp>
-        <p:nvSpPr>
-          <p:cNvPr id="6" name="Text 3"/>
-          <p:cNvSpPr/>
-          <p:nvPr/>
-        </p:nvSpPr>
-        <p:spPr>
-          <a:xfrm>
-            <a:off x="731520" y="5943600"/>
-            <a:ext cx="6949440" cy="365760"/>
+      <p:sp>
+        <p:nvSpPr>
+          <p:cNvPr id="5" name="Text 3"/>
+          <p:cNvSpPr/>
+          <p:nvPr/>
+        </p:nvSpPr>
+        <p:spPr>
+          <a:xfrm>
+            <a:off x="731520" y="1463040"/>
+            <a:ext cx="10607040" cy="4572000"/>
           </a:xfrm>
           <a:prstGeom prst="rect">
             <a:avLst/>
@@ -5057,72 +7243,79 @@
           <a:ln/>
         </p:spPr>
         <p:txBody>
-          <a:bodyPr wrap="square" lIns="0" tIns="0" rIns="0" bIns="0" rtlCol="0" anchor="ctr"/>
-          <a:lstStyle/>
-          <a:p>
-            <a:pPr algn="ctr" indent="0" marL="0">
-              <a:buNone/>
-            </a:pPr>
-            <a:r>
-              <a:rPr lang="en-US" sz="1200" i="1" dirty="0">
-                <a:solidFill>
-                  <a:srgbClr val="6B6256"/>
-                </a:solidFill>
-              </a:rPr>
-              <a:t>Figure 6.  Zonation-marker detection across Right / Caudate / Left lobes in end-stage explants.</a:t>
-            </a:r>
-            <a:endParaRPr lang="en-US" sz="1200" dirty="0"/>
-          </a:p>
-        </p:txBody>
-      </p:sp>
-      <p:sp>
-        <p:nvSpPr>
-          <p:cNvPr id="7" name="Text 4"/>
-          <p:cNvSpPr/>
-          <p:nvPr/>
-        </p:nvSpPr>
-        <p:spPr>
-          <a:xfrm>
-            <a:off x="7955280" y="2377440"/>
-            <a:ext cx="3657600" cy="2286000"/>
-          </a:xfrm>
-          <a:prstGeom prst="rect">
-            <a:avLst/>
-          </a:prstGeom>
-          <a:noFill/>
-          <a:ln/>
-        </p:spPr>
-        <p:txBody>
-          <a:bodyPr wrap="square" rtlCol="0" anchor="ctr"/>
-          <a:lstStyle/>
-          <a:p>
-            <a:pPr algn="l" indent="0" marL="0">
-              <a:buNone/>
-            </a:pPr>
-            <a:r>
-              <a:rPr lang="en-US" sz="1800" b="1" dirty="0">
-                <a:solidFill>
-                  <a:srgbClr val="1E293B"/>
-                </a:solidFill>
-              </a:rPr>
-              <a:t>Detection matches across lobes.
-</a:t>
-            </a:r>
-            <a:endParaRPr lang="en-US" sz="1800" dirty="0"/>
-          </a:p>
-          <a:p>
-            <a:pPr algn="l" indent="0" marL="0">
-              <a:buNone/>
-            </a:pPr>
-            <a:r>
-              <a:rPr lang="en-US" sz="1800" dirty="0">
-                <a:solidFill>
-                  <a:srgbClr val="1E293B"/>
-                </a:solidFill>
-              </a:rPr>
-              <a:t>Lobe does not explain the signal; explant-vs-biopsy acquisition still does.</a:t>
-            </a:r>
-            <a:endParaRPr lang="en-US" sz="1800" dirty="0"/>
+          <a:bodyPr wrap="square" rtlCol="0" anchor="t"/>
+          <a:lstStyle/>
+          <a:p>
+            <a:pPr algn="l" marL="342900" indent="-342900">
+              <a:spcAft>
+                <a:spcPts val="900"/>
+              </a:spcAft>
+              <a:buSzPct val="100000"/>
+              <a:buChar char="•"/>
+            </a:pPr>
+            <a:r>
+              <a:rPr lang="en-US" sz="2000" dirty="0">
+                <a:solidFill>
+                  <a:srgbClr val="1B2B31"/>
+                </a:solidFill>
+              </a:rPr>
+              <a:t>We re-tested only the snRNA-seq transcriptional zonation/plasticity evidence.</a:t>
+            </a:r>
+            <a:endParaRPr lang="en-US" sz="2000" dirty="0"/>
+          </a:p>
+          <a:p>
+            <a:pPr algn="l" marL="342900" indent="-342900">
+              <a:spcAft>
+                <a:spcPts val="900"/>
+              </a:spcAft>
+              <a:buSzPct val="100000"/>
+              <a:buChar char="•"/>
+            </a:pPr>
+            <a:r>
+              <a:rPr lang="en-US" sz="2000" dirty="0">
+                <a:solidFill>
+                  <a:srgbClr val="1B2B31"/>
+                </a:solidFill>
+              </a:rPr>
+              <a:t>We did NOT test imaging, protein staining, organoids, or 3D architecture.</a:t>
+            </a:r>
+            <a:endParaRPr lang="en-US" sz="2000" dirty="0"/>
+          </a:p>
+          <a:p>
+            <a:pPr algn="l" marL="342900" indent="-342900">
+              <a:spcAft>
+                <a:spcPts val="900"/>
+              </a:spcAft>
+              <a:buSzPct val="100000"/>
+              <a:buChar char="•"/>
+            </a:pPr>
+            <a:r>
+              <a:rPr lang="en-US" sz="2000" dirty="0">
+                <a:solidFill>
+                  <a:srgbClr val="1B2B31"/>
+                </a:solidFill>
+              </a:rPr>
+              <a:t>Claim: matched biopsy transcriptomes do not show progressive zonation loss.</a:t>
+            </a:r>
+            <a:endParaRPr lang="en-US" sz="2000" dirty="0"/>
+          </a:p>
+          <a:p>
+            <a:pPr algn="l" marL="342900" indent="-342900">
+              <a:spcAft>
+                <a:spcPts val="900"/>
+              </a:spcAft>
+              <a:buSzPct val="100000"/>
+              <a:buChar char="•"/>
+            </a:pPr>
+            <a:r>
+              <a:rPr lang="en-US" sz="2000" dirty="0">
+                <a:solidFill>
+                  <a:srgbClr val="1B2B31"/>
+                </a:solidFill>
+              </a:rPr>
+              <a:t>We agree the strong signal is an end-stage phenomenon.</a:t>
+            </a:r>
+            <a:endParaRPr lang="en-US" sz="2000" dirty="0"/>
           </a:p>
         </p:txBody>
       </p:sp>
@@ -5140,7 +7333,7 @@
     <p:bg>
       <p:bgPr>
         <a:solidFill>
-          <a:srgbClr val="F7F3EB"/>
+          <a:srgbClr val="F7F5F1"/>
         </a:solidFill>
       </p:bgPr>
     </p:bg>
@@ -5173,7 +7366,7 @@
             <a:avLst/>
           </a:prstGeom>
           <a:solidFill>
-            <a:srgbClr val="C0562B"/>
+            <a:srgbClr val="C0561B"/>
           </a:solidFill>
           <a:ln/>
         </p:spPr>
@@ -5205,10 +7398,10 @@
             <a:r>
               <a:rPr lang="en-US" sz="1300" b="1" spc="300" kern="0" dirty="0">
                 <a:solidFill>
-                  <a:srgbClr val="C0562B"/>
-                </a:solidFill>
-              </a:rPr>
-              <a:t>BACKUP  ·  END-STAGE</a:t>
+                  <a:srgbClr val="C0561B"/>
+                </a:solidFill>
+              </a:rPr>
+              <a:t>BACKUP  ·  LOBE</a:t>
             </a:r>
             <a:endParaRPr lang="en-US" sz="1300" dirty="0"/>
           </a:p>
@@ -5241,13 +7434,13 @@
             <a:r>
               <a:rPr lang="en-US" sz="2600" b="1" dirty="0">
                 <a:solidFill>
-                  <a:srgbClr val="1F3A3D"/>
+                  <a:srgbClr val="123F47"/>
                 </a:solidFill>
                 <a:latin typeface="Georgia" pitchFamily="34" charset="0"/>
                 <a:ea typeface="Georgia" pitchFamily="34" charset="-122"/>
                 <a:cs typeface="Georgia" pitchFamily="34" charset="-120"/>
               </a:rPr>
-              <a:t>Five organs, five phenotypes</a:t>
+              <a:t>Caudate lobe? Lobe-invariant</a:t>
             </a:r>
             <a:endParaRPr lang="en-US" sz="2600" dirty="0"/>
           </a:p>
@@ -5255,7 +7448,7 @@
       </p:sp>
       <p:pic>
         <p:nvPicPr>
-          <p:cNvPr id="5" name="Image 0" descr="D:\CS\Genomics\Hackathon\presentation/assets/fig_explant.png">    </p:cNvPr>
+          <p:cNvPr id="5" name="Image 0" descr="D:\CS\Genomics\Hackathon\presentation/assets/fig_lobe.png">    </p:cNvPr>
           <p:cNvPicPr>
             <a:picLocks noChangeAspect="1"/>
           </p:cNvPicPr>
@@ -5269,7 +7462,7 @@
         <p:spPr>
           <a:xfrm>
             <a:off x="731520" y="1371600"/>
-            <a:ext cx="7498080" cy="4572000"/>
+            <a:ext cx="6949440" cy="4572000"/>
           </a:xfrm>
           <a:prstGeom prst="rect">
             <a:avLst/>
@@ -5285,7 +7478,7 @@
         <p:spPr>
           <a:xfrm>
             <a:off x="731520" y="5943600"/>
-            <a:ext cx="7498080" cy="365760"/>
+            <a:ext cx="6949440" cy="365760"/>
           </a:xfrm>
           <a:prstGeom prst="rect">
             <a:avLst/>
@@ -5303,10 +7496,10 @@
             <a:r>
               <a:rPr lang="en-US" sz="1200" i="1" dirty="0">
                 <a:solidFill>
-                  <a:srgbClr val="6B6256"/>
-                </a:solidFill>
-              </a:rPr>
-              <a:t>Figure 7.  Per-explant anchor fractions — end-stage is heterogeneous, not one coherent program.</a:t>
+                  <a:srgbClr val="5C6E73"/>
+                </a:solidFill>
+              </a:rPr>
+              <a:t>Figure 6.  Zonation-marker detection across Right / Caudate / Left lobes in end-stage explants.</a:t>
             </a:r>
             <a:endParaRPr lang="en-US" sz="1200" dirty="0"/>
           </a:p>
@@ -5320,8 +7513,8 @@
         </p:nvSpPr>
         <p:spPr>
           <a:xfrm>
-            <a:off x="8412480" y="2377440"/>
-            <a:ext cx="3291840" cy="2377440"/>
+            <a:off x="7955280" y="2377440"/>
+            <a:ext cx="3657600" cy="2286000"/>
           </a:xfrm>
           <a:prstGeom prst="rect">
             <a:avLst/>
@@ -5337,29 +7530,29 @@
               <a:buNone/>
             </a:pPr>
             <a:r>
-              <a:rPr lang="en-US" sz="1700" b="1" dirty="0">
-                <a:solidFill>
-                  <a:srgbClr val="1E293B"/>
-                </a:solidFill>
-              </a:rPr>
-              <a:t>PC-anchor 3% → 50%;  PP:PC 0.13 → 20.
+              <a:rPr lang="en-US" sz="1800" b="1" dirty="0">
+                <a:solidFill>
+                  <a:srgbClr val="1B2B31"/>
+                </a:solidFill>
+              </a:rPr>
+              <a:t>Detection matches across lobes.
 </a:t>
             </a:r>
-            <a:endParaRPr lang="en-US" sz="1700" dirty="0"/>
+            <a:endParaRPr lang="en-US" sz="1800" dirty="0"/>
           </a:p>
           <a:p>
             <a:pPr algn="l" indent="0" marL="0">
               <a:buNone/>
             </a:pPr>
             <a:r>
-              <a:rPr lang="en-US" sz="1700" dirty="0">
-                <a:solidFill>
-                  <a:srgbClr val="1E293B"/>
-                </a:solidFill>
-              </a:rPr>
-              <a:t>Dramatic but NOT one program — pooling manufactures a uniform “collapse.”</a:t>
-            </a:r>
-            <a:endParaRPr lang="en-US" sz="1700" dirty="0"/>
+              <a:rPr lang="en-US" sz="1800" dirty="0">
+                <a:solidFill>
+                  <a:srgbClr val="1B2B31"/>
+                </a:solidFill>
+              </a:rPr>
+              <a:t>Lobe does not explain the signal; explant-vs-biopsy acquisition still does.</a:t>
+            </a:r>
+            <a:endParaRPr lang="en-US" sz="1800" dirty="0"/>
           </a:p>
         </p:txBody>
       </p:sp>
@@ -5377,7 +7570,7 @@
     <p:bg>
       <p:bgPr>
         <a:solidFill>
-          <a:srgbClr val="F7F3EB"/>
+          <a:srgbClr val="F7F5F1"/>
         </a:solidFill>
       </p:bgPr>
     </p:bg>
@@ -5410,7 +7603,7 @@
             <a:avLst/>
           </a:prstGeom>
           <a:solidFill>
-            <a:srgbClr val="C0562B"/>
+            <a:srgbClr val="C0561B"/>
           </a:solidFill>
           <a:ln/>
         </p:spPr>
@@ -5442,10 +7635,10 @@
             <a:r>
               <a:rPr lang="en-US" sz="1300" b="1" spc="300" kern="0" dirty="0">
                 <a:solidFill>
-                  <a:srgbClr val="C0562B"/>
-                </a:solidFill>
-              </a:rPr>
-              <a:t>BACKUP  ·  ROBUSTNESS</a:t>
+                  <a:srgbClr val="C0561B"/>
+                </a:solidFill>
+              </a:rPr>
+              <a:t>BACKUP  ·  END-STAGE</a:t>
             </a:r>
             <a:endParaRPr lang="en-US" sz="1300" dirty="0"/>
           </a:p>
@@ -5478,13 +7671,13 @@
             <a:r>
               <a:rPr lang="en-US" sz="2600" b="1" dirty="0">
                 <a:solidFill>
-                  <a:srgbClr val="1F3A3D"/>
+                  <a:srgbClr val="123F47"/>
                 </a:solidFill>
                 <a:latin typeface="Georgia" pitchFamily="34" charset="0"/>
                 <a:ea typeface="Georgia" pitchFamily="34" charset="-122"/>
                 <a:cs typeface="Georgia" pitchFamily="34" charset="-120"/>
               </a:rPr>
-              <a:t>Sensitivity grid + equivalence bound</a:t>
+              <a:t>Five organs, five phenotypes</a:t>
             </a:r>
             <a:endParaRPr lang="en-US" sz="2600" dirty="0"/>
           </a:p>
@@ -5492,7 +7685,7 @@
       </p:sp>
       <p:pic>
         <p:nvPicPr>
-          <p:cNvPr id="5" name="Image 0" descr="D:\CS\Genomics\Hackathon\presentation/assets/fig_tost.png">    </p:cNvPr>
+          <p:cNvPr id="5" name="Image 0" descr="D:\CS\Genomics\Hackathon\presentation/assets/fig_explant.png">    </p:cNvPr>
           <p:cNvPicPr>
             <a:picLocks noChangeAspect="1"/>
           </p:cNvPicPr>
@@ -5505,8 +7698,8 @@
         </p:blipFill>
         <p:spPr>
           <a:xfrm>
-            <a:off x="6035040" y="1463040"/>
-            <a:ext cx="5852160" cy="3657600"/>
+            <a:off x="731520" y="1371600"/>
+            <a:ext cx="7498080" cy="4572000"/>
           </a:xfrm>
           <a:prstGeom prst="rect">
             <a:avLst/>
@@ -5521,8 +7714,8 @@
         </p:nvSpPr>
         <p:spPr>
           <a:xfrm>
-            <a:off x="6035040" y="5166360"/>
-            <a:ext cx="5852160" cy="365760"/>
+            <a:off x="731520" y="5943600"/>
+            <a:ext cx="7498080" cy="365760"/>
           </a:xfrm>
           <a:prstGeom prst="rect">
             <a:avLst/>
@@ -5540,10 +7733,10 @@
             <a:r>
               <a:rPr lang="en-US" sz="1200" i="1" dirty="0">
                 <a:solidFill>
-                  <a:srgbClr val="6B6256"/>
-                </a:solidFill>
-              </a:rPr>
-              <a:t>Figure 8.  Equivalence bound on the F4-vs-F1 pericentral-anchor change.</a:t>
+                  <a:srgbClr val="5C6E73"/>
+                </a:solidFill>
+              </a:rPr>
+              <a:t>Figure 7.  Per-explant anchor fractions — end-stage is heterogeneous, not one coherent program.</a:t>
             </a:r>
             <a:endParaRPr lang="en-US" sz="1200" dirty="0"/>
           </a:p>
@@ -5557,8 +7750,8 @@
         </p:nvSpPr>
         <p:spPr>
           <a:xfrm>
-            <a:off x="640080" y="1645920"/>
-            <a:ext cx="5212080" cy="3840480"/>
+            <a:off x="8412480" y="2377440"/>
+            <a:ext cx="3291840" cy="2377440"/>
           </a:xfrm>
           <a:prstGeom prst="rect">
             <a:avLst/>
@@ -5567,66 +7760,36 @@
           <a:ln/>
         </p:spPr>
         <p:txBody>
-          <a:bodyPr wrap="square" rtlCol="0" anchor="t"/>
+          <a:bodyPr wrap="square" rtlCol="0" anchor="ctr"/>
           <a:lstStyle/>
           <a:p>
             <a:pPr algn="l" indent="0" marL="0">
               <a:buNone/>
             </a:pPr>
             <a:r>
-              <a:rPr lang="en-US" sz="1600" b="1" dirty="0">
-                <a:solidFill>
-                  <a:srgbClr val="1E293B"/>
-                </a:solidFill>
-              </a:rPr>
-              <a:t>Stable across every variant:
+              <a:rPr lang="en-US" sz="1700" b="1" dirty="0">
+                <a:solidFill>
+                  <a:srgbClr val="1B2B31"/>
+                </a:solidFill>
+              </a:rPr>
+              <a:t>PC-anchor 3% → 50%;  PP:PC 0.13 → 20.
 </a:t>
             </a:r>
-            <a:endParaRPr lang="en-US" sz="1600" dirty="0"/>
+            <a:endParaRPr lang="en-US" sz="1700" dirty="0"/>
           </a:p>
           <a:p>
             <a:pPr algn="l" indent="0" marL="0">
               <a:buNone/>
             </a:pPr>
             <a:r>
-              <a:rPr lang="en-US" sz="1600" dirty="0">
-                <a:solidFill>
-                  <a:srgbClr val="1E293B"/>
-                </a:solidFill>
-              </a:rPr>
-              <a:t>anchor genes, periportal rule, ALDOB in/out, CPS1-based, 1 vs 2 UMI.
-</a:t>
-            </a:r>
-            <a:endParaRPr lang="en-US" sz="1600" dirty="0"/>
-          </a:p>
-          <a:p>
-            <a:pPr algn="l" indent="0" marL="0">
-              <a:buNone/>
-            </a:pPr>
-            <a:r>
-              <a:rPr lang="en-US" sz="1600" b="1" dirty="0">
-                <a:solidFill>
-                  <a:srgbClr val="0D9488"/>
-                </a:solidFill>
-              </a:rPr>
-              <a:t>No depletion · no dual rise · no turn-off — in all.
-</a:t>
-            </a:r>
-            <a:endParaRPr lang="en-US" sz="1600" dirty="0"/>
-          </a:p>
-          <a:p>
-            <a:pPr algn="l" indent="0" marL="0">
-              <a:buNone/>
-            </a:pPr>
-            <a:r>
-              <a:rPr lang="en-US" sz="1600" i="1" dirty="0">
-                <a:solidFill>
-                  <a:srgbClr val="6B6256"/>
-                </a:solidFill>
-              </a:rPr>
-              <a:t>Bound: large shift (~20 pp) excluded; subtle drift ≤10 pp not (F4 n=4).</a:t>
-            </a:r>
-            <a:endParaRPr lang="en-US" sz="1600" dirty="0"/>
+              <a:rPr lang="en-US" sz="1700" dirty="0">
+                <a:solidFill>
+                  <a:srgbClr val="1B2B31"/>
+                </a:solidFill>
+              </a:rPr>
+              <a:t>Dramatic but NOT one program — pooling manufactures a uniform “collapse.”</a:t>
+            </a:r>
+            <a:endParaRPr lang="en-US" sz="1700" dirty="0"/>
           </a:p>
         </p:txBody>
       </p:sp>
@@ -5644,7 +7807,7 @@
     <p:bg>
       <p:bgPr>
         <a:solidFill>
-          <a:srgbClr val="F7F3EB"/>
+          <a:srgbClr val="F7F5F1"/>
         </a:solidFill>
       </p:bgPr>
     </p:bg>
@@ -5677,7 +7840,7 @@
             <a:avLst/>
           </a:prstGeom>
           <a:solidFill>
-            <a:srgbClr val="C0562B"/>
+            <a:srgbClr val="C0561B"/>
           </a:solidFill>
           <a:ln/>
         </p:spPr>
@@ -5709,10 +7872,10 @@
             <a:r>
               <a:rPr lang="en-US" sz="1300" b="1" spc="300" kern="0" dirty="0">
                 <a:solidFill>
-                  <a:srgbClr val="C0562B"/>
-                </a:solidFill>
-              </a:rPr>
-              <a:t>BACKUP  ·  METHODS</a:t>
+                  <a:srgbClr val="C0561B"/>
+                </a:solidFill>
+              </a:rPr>
+              <a:t>BACKUP  ·  ROBUSTNESS</a:t>
             </a:r>
             <a:endParaRPr lang="en-US" sz="1300" dirty="0"/>
           </a:p>
@@ -5745,28 +7908,51 @@
             <a:r>
               <a:rPr lang="en-US" sz="2600" b="1" dirty="0">
                 <a:solidFill>
-                  <a:srgbClr val="1F3A3D"/>
+                  <a:srgbClr val="123F47"/>
                 </a:solidFill>
                 <a:latin typeface="Georgia" pitchFamily="34" charset="0"/>
                 <a:ea typeface="Georgia" pitchFamily="34" charset="-122"/>
                 <a:cs typeface="Georgia" pitchFamily="34" charset="-120"/>
               </a:rPr>
-              <a:t>Why raw counts, why pseudobulk</a:t>
+              <a:t>Sensitivity grid + equivalence bound</a:t>
             </a:r>
             <a:endParaRPr lang="en-US" sz="2600" dirty="0"/>
           </a:p>
         </p:txBody>
       </p:sp>
-      <p:sp>
-        <p:nvSpPr>
-          <p:cNvPr id="5" name="Text 3"/>
-          <p:cNvSpPr/>
-          <p:nvPr/>
-        </p:nvSpPr>
-        <p:spPr>
-          <a:xfrm>
-            <a:off x="731520" y="1463040"/>
-            <a:ext cx="10607040" cy="4572000"/>
+      <p:pic>
+        <p:nvPicPr>
+          <p:cNvPr id="5" name="Image 0" descr="D:\CS\Genomics\Hackathon\presentation/assets/fig_tost.png">    </p:cNvPr>
+          <p:cNvPicPr>
+            <a:picLocks noChangeAspect="1"/>
+          </p:cNvPicPr>
+          <p:nvPr/>
+        </p:nvPicPr>
+        <p:blipFill>
+          <a:blip r:embed="rId1"/>
+          <a:srcRect l="0" r="0" t="0" b="0"/>
+          <a:stretch/>
+        </p:blipFill>
+        <p:spPr>
+          <a:xfrm>
+            <a:off x="6035040" y="1463040"/>
+            <a:ext cx="5852160" cy="3657600"/>
+          </a:xfrm>
+          <a:prstGeom prst="rect">
+            <a:avLst/>
+          </a:prstGeom>
+        </p:spPr>
+      </p:pic>
+      <p:sp>
+        <p:nvSpPr>
+          <p:cNvPr id="6" name="Text 3"/>
+          <p:cNvSpPr/>
+          <p:nvPr/>
+        </p:nvSpPr>
+        <p:spPr>
+          <a:xfrm>
+            <a:off x="6035040" y="5166360"/>
+            <a:ext cx="5852160" cy="365760"/>
           </a:xfrm>
           <a:prstGeom prst="rect">
             <a:avLst/>
@@ -5775,79 +7961,102 @@
           <a:ln/>
         </p:spPr>
         <p:txBody>
+          <a:bodyPr wrap="square" lIns="0" tIns="0" rIns="0" bIns="0" rtlCol="0" anchor="ctr"/>
+          <a:lstStyle/>
+          <a:p>
+            <a:pPr algn="ctr" indent="0" marL="0">
+              <a:buNone/>
+            </a:pPr>
+            <a:r>
+              <a:rPr lang="en-US" sz="1200" i="1" dirty="0">
+                <a:solidFill>
+                  <a:srgbClr val="5C6E73"/>
+                </a:solidFill>
+              </a:rPr>
+              <a:t>Figure 8.  Equivalence bound on the F4-vs-F1 pericentral-anchor change.</a:t>
+            </a:r>
+            <a:endParaRPr lang="en-US" sz="1200" dirty="0"/>
+          </a:p>
+        </p:txBody>
+      </p:sp>
+      <p:sp>
+        <p:nvSpPr>
+          <p:cNvPr id="7" name="Text 4"/>
+          <p:cNvSpPr/>
+          <p:nvPr/>
+        </p:nvSpPr>
+        <p:spPr>
+          <a:xfrm>
+            <a:off x="640080" y="1645920"/>
+            <a:ext cx="5212080" cy="3840480"/>
+          </a:xfrm>
+          <a:prstGeom prst="rect">
+            <a:avLst/>
+          </a:prstGeom>
+          <a:noFill/>
+          <a:ln/>
+        </p:spPr>
+        <p:txBody>
           <a:bodyPr wrap="square" rtlCol="0" anchor="t"/>
           <a:lstStyle/>
           <a:p>
-            <a:pPr algn="l" marL="342900" indent="-342900">
-              <a:spcAft>
-                <a:spcPts val="900"/>
-              </a:spcAft>
-              <a:buSzPct val="100000"/>
-              <a:buChar char="•"/>
-            </a:pPr>
-            <a:r>
-              <a:rPr lang="en-US" sz="2000" dirty="0">
-                <a:solidFill>
-                  <a:srgbClr val="1E293B"/>
-                </a:solidFill>
-              </a:rPr>
-              <a:t>Raw counts: marker co-detection + ambient sensitivity need molecules, not SCT residuals.</a:t>
-            </a:r>
-            <a:endParaRPr lang="en-US" sz="2000" dirty="0"/>
-          </a:p>
-          <a:p>
-            <a:pPr algn="l" marL="342900" indent="-342900">
-              <a:spcAft>
-                <a:spcPts val="900"/>
-              </a:spcAft>
-              <a:buSzPct val="100000"/>
-              <a:buChar char="•"/>
-            </a:pPr>
-            <a:r>
-              <a:rPr lang="en-US" sz="2000" dirty="0">
-                <a:solidFill>
-                  <a:srgbClr val="1E293B"/>
-                </a:solidFill>
-              </a:rPr>
-              <a:t>Pseudobulk: cells from one donor are not independent — sum per donor, then edgeR (Squair 2021).</a:t>
-            </a:r>
-            <a:endParaRPr lang="en-US" sz="2000" dirty="0"/>
-          </a:p>
-          <a:p>
-            <a:pPr algn="l" marL="342900" indent="-342900">
-              <a:spcAft>
-                <a:spcPts val="900"/>
-              </a:spcAft>
-              <a:buSzPct val="100000"/>
-              <a:buChar char="•"/>
-            </a:pPr>
-            <a:r>
-              <a:rPr lang="en-US" sz="2000" dirty="0">
-                <a:solidFill>
-                  <a:srgbClr val="1E293B"/>
-                </a:solidFill>
-              </a:rPr>
-              <a:t>edgeR: filterByExpr → 21,022 genes; TMM; NB quasi-likelihood GLM, robust dispersion; common BCV 0.405.</a:t>
-            </a:r>
-            <a:endParaRPr lang="en-US" sz="2000" dirty="0"/>
-          </a:p>
-          <a:p>
-            <a:pPr algn="l" marL="342900" indent="-342900">
-              <a:spcAft>
-                <a:spcPts val="900"/>
-              </a:spcAft>
-              <a:buSzPct val="100000"/>
-              <a:buChar char="•"/>
-            </a:pPr>
-            <a:r>
-              <a:rPr lang="en-US" sz="2000" dirty="0">
-                <a:solidFill>
-                  <a:srgbClr val="1E293B"/>
-                </a:solidFill>
-              </a:rPr>
-              <a:t>Primary signal persists in DIRECTION with a run covariate and within a single run; significance attenuates with n (not a batch artifact).</a:t>
-            </a:r>
-            <a:endParaRPr lang="en-US" sz="2000" dirty="0"/>
+            <a:pPr algn="l" indent="0" marL="0">
+              <a:buNone/>
+            </a:pPr>
+            <a:r>
+              <a:rPr lang="en-US" sz="1600" b="1" dirty="0">
+                <a:solidFill>
+                  <a:srgbClr val="1B2B31"/>
+                </a:solidFill>
+              </a:rPr>
+              <a:t>Stable across every variant:
+</a:t>
+            </a:r>
+            <a:endParaRPr lang="en-US" sz="1600" dirty="0"/>
+          </a:p>
+          <a:p>
+            <a:pPr algn="l" indent="0" marL="0">
+              <a:buNone/>
+            </a:pPr>
+            <a:r>
+              <a:rPr lang="en-US" sz="1600" dirty="0">
+                <a:solidFill>
+                  <a:srgbClr val="1B2B31"/>
+                </a:solidFill>
+              </a:rPr>
+              <a:t>anchor genes, periportal rule, ALDOB in/out, CPS1-based, 1 vs 2 UMI.
+</a:t>
+            </a:r>
+            <a:endParaRPr lang="en-US" sz="1600" dirty="0"/>
+          </a:p>
+          <a:p>
+            <a:pPr algn="l" indent="0" marL="0">
+              <a:buNone/>
+            </a:pPr>
+            <a:r>
+              <a:rPr lang="en-US" sz="1600" b="1" dirty="0">
+                <a:solidFill>
+                  <a:srgbClr val="0D9488"/>
+                </a:solidFill>
+              </a:rPr>
+              <a:t>No depletion · no dual rise · no turn-off — in all.
+</a:t>
+            </a:r>
+            <a:endParaRPr lang="en-US" sz="1600" dirty="0"/>
+          </a:p>
+          <a:p>
+            <a:pPr algn="l" indent="0" marL="0">
+              <a:buNone/>
+            </a:pPr>
+            <a:r>
+              <a:rPr lang="en-US" sz="1600" i="1" dirty="0">
+                <a:solidFill>
+                  <a:srgbClr val="5C6E73"/>
+                </a:solidFill>
+              </a:rPr>
+              <a:t>Bound: large shift (~20 pp) excluded; subtle drift ≤10 pp not (F4 n=4).</a:t>
+            </a:r>
+            <a:endParaRPr lang="en-US" sz="1600" dirty="0"/>
           </a:p>
         </p:txBody>
       </p:sp>
@@ -5865,7 +8074,7 @@
     <p:bg>
       <p:bgPr>
         <a:solidFill>
-          <a:srgbClr val="F7F3EB"/>
+          <a:srgbClr val="F7F5F1"/>
         </a:solidFill>
       </p:bgPr>
     </p:bg>
@@ -5898,7 +8107,7 @@
             <a:avLst/>
           </a:prstGeom>
           <a:solidFill>
-            <a:srgbClr val="C0562B"/>
+            <a:srgbClr val="C0561B"/>
           </a:solidFill>
           <a:ln/>
         </p:spPr>
@@ -5930,10 +8139,10 @@
             <a:r>
               <a:rPr lang="en-US" sz="1300" b="1" spc="300" kern="0" dirty="0">
                 <a:solidFill>
-                  <a:srgbClr val="C0562B"/>
-                </a:solidFill>
-              </a:rPr>
-              <a:t>BACKUP  ·  AMBIENT</a:t>
+                  <a:srgbClr val="C0561B"/>
+                </a:solidFill>
+              </a:rPr>
+              <a:t>BACKUP  ·  METHODS</a:t>
             </a:r>
             <a:endParaRPr lang="en-US" sz="1300" dirty="0"/>
           </a:p>
@@ -5966,13 +8175,13 @@
             <a:r>
               <a:rPr lang="en-US" sz="2600" b="1" dirty="0">
                 <a:solidFill>
-                  <a:srgbClr val="1F3A3D"/>
+                  <a:srgbClr val="123F47"/>
                 </a:solidFill>
                 <a:latin typeface="Georgia" pitchFamily="34" charset="0"/>
                 <a:ea typeface="Georgia" pitchFamily="34" charset="-122"/>
                 <a:cs typeface="Georgia" pitchFamily="34" charset="-120"/>
               </a:rPr>
-              <a:t>Does decontX prove contamination? No</a:t>
+              <a:t>Why raw counts, why pseudobulk</a:t>
             </a:r>
             <a:endParaRPr lang="en-US" sz="2600" dirty="0"/>
           </a:p>
@@ -6009,10 +8218,10 @@
             <a:r>
               <a:rPr lang="en-US" sz="2000" dirty="0">
                 <a:solidFill>
-                  <a:srgbClr val="1E293B"/>
-                </a:solidFill>
-              </a:rPr>
-              <a:t>decontX models a native + ambient RNA mixture and subtracts the estimate.</a:t>
+                  <a:srgbClr val="1B2B31"/>
+                </a:solidFill>
+              </a:rPr>
+              <a:t>Raw counts: marker co-detection + ambient sensitivity need molecules, not SCT residuals.</a:t>
             </a:r>
             <a:endParaRPr lang="en-US" sz="2000" dirty="0"/>
           </a:p>
@@ -6027,10 +8236,10 @@
             <a:r>
               <a:rPr lang="en-US" sz="2000" dirty="0">
                 <a:solidFill>
-                  <a:srgbClr val="1E293B"/>
-                </a:solidFill>
-              </a:rPr>
-              <a:t>Hits 64 → 34; SOX4/SOX9 drop below significance → supports an ambient contribution.</a:t>
+                  <a:srgbClr val="1B2B31"/>
+                </a:solidFill>
+              </a:rPr>
+              <a:t>Pseudobulk: cells from one donor are not independent — sum per donor, then edgeR (Squair 2021).</a:t>
             </a:r>
             <a:endParaRPr lang="en-US" sz="2000" dirty="0"/>
           </a:p>
@@ -6045,10 +8254,10 @@
             <a:r>
               <a:rPr lang="en-US" sz="2000" dirty="0">
                 <a:solidFill>
-                  <a:srgbClr val="1E293B"/>
-                </a:solidFill>
-              </a:rPr>
-              <a:t>But it can remove true hybrid signal OR leave residual contamination.</a:t>
+                  <a:srgbClr val="1B2B31"/>
+                </a:solidFill>
+              </a:rPr>
+              <a:t>edgeR: filterByExpr → 21,022 genes; TMM; NB quasi-likelihood GLM, robust dispersion; common BCV 0.405.</a:t>
             </a:r>
             <a:endParaRPr lang="en-US" sz="2000" dirty="0"/>
           </a:p>
@@ -6063,10 +8272,10 @@
             <a:r>
               <a:rPr lang="en-US" sz="2000" dirty="0">
                 <a:solidFill>
-                  <a:srgbClr val="1E293B"/>
-                </a:solidFill>
-              </a:rPr>
-              <a:t>Source attribution is a lead, not a closed verdict; CXCL10 is a separate candidate inflammatory signal.</a:t>
+                  <a:srgbClr val="1B2B31"/>
+                </a:solidFill>
+              </a:rPr>
+              <a:t>Primary signal persists in DIRECTION with a run covariate and within a single run; significance attenuates with n (not a batch artifact).</a:t>
             </a:r>
             <a:endParaRPr lang="en-US" sz="2000" dirty="0"/>
           </a:p>
@@ -6086,7 +8295,7 @@
     <p:bg>
       <p:bgPr>
         <a:solidFill>
-          <a:srgbClr val="F7F3EB"/>
+          <a:srgbClr val="F7F5F1"/>
         </a:solidFill>
       </p:bgPr>
     </p:bg>
@@ -6119,7 +8328,7 @@
             <a:avLst/>
           </a:prstGeom>
           <a:solidFill>
-            <a:srgbClr val="C0562B"/>
+            <a:srgbClr val="C0561B"/>
           </a:solidFill>
           <a:ln/>
         </p:spPr>
@@ -6151,7 +8360,7 @@
             <a:r>
               <a:rPr lang="en-US" sz="1300" b="1" spc="300" kern="0" dirty="0">
                 <a:solidFill>
-                  <a:srgbClr val="C0562B"/>
+                  <a:srgbClr val="C0561B"/>
                 </a:solidFill>
               </a:rPr>
               <a:t>BACKGROUND</a:t>
@@ -6187,7 +8396,7 @@
             <a:r>
               <a:rPr lang="en-US" sz="2800" b="1" dirty="0">
                 <a:solidFill>
-                  <a:srgbClr val="1F3A3D"/>
+                  <a:srgbClr val="1B2B31"/>
                 </a:solidFill>
                 <a:latin typeface="Georgia" pitchFamily="34" charset="0"/>
                 <a:ea typeface="Georgia" pitchFamily="34" charset="-122"/>
@@ -6342,7 +8551,7 @@
             <a:r>
               <a:rPr lang="en-US" sz="1250" dirty="0">
                 <a:solidFill>
-                  <a:srgbClr val="6B6256"/>
+                  <a:srgbClr val="5C6E73"/>
                 </a:solidFill>
               </a:rPr>
               <a:t>Central vein</a:t>
@@ -6378,7 +8587,7 @@
             <a:r>
               <a:rPr lang="en-US" sz="1250" dirty="0">
                 <a:solidFill>
-                  <a:srgbClr val="6B6256"/>
+                  <a:srgbClr val="5C6E73"/>
                 </a:solidFill>
               </a:rPr>
               <a:t>Portal tract</a:t>
@@ -6425,7 +8634,7 @@
             <a:r>
               <a:rPr lang="en-US" sz="1400" dirty="0">
                 <a:solidFill>
-                  <a:srgbClr val="1E293B"/>
+                  <a:srgbClr val="1B2B31"/>
                 </a:solidFill>
               </a:rPr>
               <a:t>— drug metabolism (Wnt-driven)</a:t>
@@ -6472,7 +8681,7 @@
             <a:r>
               <a:rPr lang="en-US" sz="1400" dirty="0">
                 <a:solidFill>
-                  <a:srgbClr val="1E293B"/>
+                  <a:srgbClr val="1B2B31"/>
                 </a:solidFill>
               </a:rPr>
               <a:t>— urea cycle</a:t>
@@ -6573,7 +8782,7 @@
             <a:r>
               <a:rPr lang="en-US" sz="1900" b="1" dirty="0">
                 <a:solidFill>
-                  <a:srgbClr val="1E293B"/>
+                  <a:srgbClr val="1B2B31"/>
                 </a:solidFill>
               </a:rPr>
               <a:t>“Hepatocytes lose their zonation.”  </a:t>
@@ -6620,7 +8829,7 @@
             <a:r>
               <a:rPr lang="en-US" sz="1050" dirty="0">
                 <a:solidFill>
-                  <a:srgbClr val="6B6256"/>
+                  <a:srgbClr val="5C6E73"/>
                 </a:solidFill>
               </a:rPr>
               <a:t>Computational Genomics 76553  ·  HUJI  ·  MASLD snRNA-seq hackathon</a:t>
@@ -6656,7 +8865,7 @@
             <a:r>
               <a:rPr lang="en-US" sz="1050" dirty="0">
                 <a:solidFill>
-                  <a:srgbClr val="6B6256"/>
+                  <a:srgbClr val="5C6E73"/>
                 </a:solidFill>
               </a:rPr>
               <a:t>2</a:t>
@@ -6679,7 +8888,7 @@
     <p:bg>
       <p:bgPr>
         <a:solidFill>
-          <a:srgbClr val="F7F3EB"/>
+          <a:srgbClr val="F7F5F1"/>
         </a:solidFill>
       </p:bgPr>
     </p:bg>
@@ -6712,7 +8921,7 @@
             <a:avLst/>
           </a:prstGeom>
           <a:solidFill>
-            <a:srgbClr val="C0562B"/>
+            <a:srgbClr val="C0561B"/>
           </a:solidFill>
           <a:ln/>
         </p:spPr>
@@ -6744,10 +8953,10 @@
             <a:r>
               <a:rPr lang="en-US" sz="1300" b="1" spc="300" kern="0" dirty="0">
                 <a:solidFill>
-                  <a:srgbClr val="C0562B"/>
-                </a:solidFill>
-              </a:rPr>
-              <a:t>BACKUP  ·  NEXT</a:t>
+                  <a:srgbClr val="C0561B"/>
+                </a:solidFill>
+              </a:rPr>
+              <a:t>BACKUP  ·  AMBIENT</a:t>
             </a:r>
             <a:endParaRPr lang="en-US" sz="1300" dirty="0"/>
           </a:p>
@@ -6780,13 +8989,13 @@
             <a:r>
               <a:rPr lang="en-US" sz="2600" b="1" dirty="0">
                 <a:solidFill>
-                  <a:srgbClr val="1F3A3D"/>
+                  <a:srgbClr val="123F47"/>
                 </a:solidFill>
                 <a:latin typeface="Georgia" pitchFamily="34" charset="0"/>
                 <a:ea typeface="Georgia" pitchFamily="34" charset="-122"/>
                 <a:cs typeface="Georgia" pitchFamily="34" charset="-120"/>
               </a:rPr>
-              <a:t>The one analysis still owed: gene-set testing</a:t>
+              <a:t>Does decontX prove contamination? No</a:t>
             </a:r>
             <a:endParaRPr lang="en-US" sz="2600" dirty="0"/>
           </a:p>
@@ -6823,10 +9032,10 @@
             <a:r>
               <a:rPr lang="en-US" sz="2000" dirty="0">
                 <a:solidFill>
-                  <a:srgbClr val="1E293B"/>
-                </a:solidFill>
-              </a:rPr>
-              <a:t>Gene-level FDR can miss a coordinated WEAK program (many genes, small shifts).</a:t>
+                  <a:srgbClr val="1B2B31"/>
+                </a:solidFill>
+              </a:rPr>
+              <a:t>decontX models a native + ambient RNA mixture and subtracts the estimate.</a:t>
             </a:r>
             <a:endParaRPr lang="en-US" sz="2000" dirty="0"/>
           </a:p>
@@ -6841,10 +9050,10 @@
             <a:r>
               <a:rPr lang="en-US" sz="2000" dirty="0">
                 <a:solidFill>
-                  <a:srgbClr val="1E293B"/>
-                </a:solidFill>
-              </a:rPr>
-              <a:t>CAMERA + ROAST on pre-specified sets: PC, PP, detox, urea cycle, bile-acid/lipid,</a:t>
+                  <a:srgbClr val="1B2B31"/>
+                </a:solidFill>
+              </a:rPr>
+              <a:t>Hits 64 → 34; SOX4/SOX9 drop below significance → supports an ambient contribution.</a:t>
             </a:r>
             <a:endParaRPr lang="en-US" sz="2000" dirty="0"/>
           </a:p>
@@ -6859,10 +9068,10 @@
             <a:r>
               <a:rPr lang="en-US" sz="2000" dirty="0">
                 <a:solidFill>
-                  <a:srgbClr val="1E293B"/>
-                </a:solidFill>
-              </a:rPr>
-              <a:t>mitochondrial, ER stress, interferon, hypoxia, EMT/fetal/progenitor, cholangiocyte/ductular.</a:t>
+                  <a:srgbClr val="1B2B31"/>
+                </a:solidFill>
+              </a:rPr>
+              <a:t>But it can remove true hybrid signal OR leave residual contamination.</a:t>
             </a:r>
             <a:endParaRPr lang="en-US" sz="2000" dirty="0"/>
           </a:p>
@@ -6877,10 +9086,10 @@
             <a:r>
               <a:rPr lang="en-US" sz="2000" dirty="0">
                 <a:solidFill>
-                  <a:srgbClr val="1E293B"/>
-                </a:solidFill>
-              </a:rPr>
-              <a:t>Closes the caveat behind “no other large hepatocyte program.”</a:t>
+                  <a:srgbClr val="1B2B31"/>
+                </a:solidFill>
+              </a:rPr>
+              <a:t>Source attribution is a lead, not a closed verdict; CXCL10 is a separate candidate inflammatory signal.</a:t>
             </a:r>
             <a:endParaRPr lang="en-US" sz="2000" dirty="0"/>
           </a:p>
@@ -6900,7 +9109,7 @@
     <p:bg>
       <p:bgPr>
         <a:solidFill>
-          <a:srgbClr val="F7F3EB"/>
+          <a:srgbClr val="F7F5F1"/>
         </a:solidFill>
       </p:bgPr>
     </p:bg>
@@ -6933,7 +9142,7 @@
             <a:avLst/>
           </a:prstGeom>
           <a:solidFill>
-            <a:srgbClr val="C0562B"/>
+            <a:srgbClr val="C0561B"/>
           </a:solidFill>
           <a:ln/>
         </p:spPr>
@@ -6965,10 +9174,10 @@
             <a:r>
               <a:rPr lang="en-US" sz="1300" b="1" spc="300" kern="0" dirty="0">
                 <a:solidFill>
-                  <a:srgbClr val="C0562B"/>
-                </a:solidFill>
-              </a:rPr>
-              <a:t>BACKUP  ·  SCENARIO COVERAGE</a:t>
+                  <a:srgbClr val="C0561B"/>
+                </a:solidFill>
+              </a:rPr>
+              <a:t>BACKUP  ·  NEXT</a:t>
             </a:r>
             <a:endParaRPr lang="en-US" sz="1300" dirty="0"/>
           </a:p>
@@ -7001,12 +9210,233 @@
             <a:r>
               <a:rPr lang="en-US" sz="2600" b="1" dirty="0">
                 <a:solidFill>
-                  <a:srgbClr val="1F3A3D"/>
+                  <a:srgbClr val="123F47"/>
                 </a:solidFill>
                 <a:latin typeface="Georgia" pitchFamily="34" charset="0"/>
                 <a:ea typeface="Georgia" pitchFamily="34" charset="-122"/>
                 <a:cs typeface="Georgia" pitchFamily="34" charset="-120"/>
               </a:rPr>
+              <a:t>The one analysis still owed: gene-set testing</a:t>
+            </a:r>
+            <a:endParaRPr lang="en-US" sz="2600" dirty="0"/>
+          </a:p>
+        </p:txBody>
+      </p:sp>
+      <p:sp>
+        <p:nvSpPr>
+          <p:cNvPr id="5" name="Text 3"/>
+          <p:cNvSpPr/>
+          <p:nvPr/>
+        </p:nvSpPr>
+        <p:spPr>
+          <a:xfrm>
+            <a:off x="731520" y="1463040"/>
+            <a:ext cx="10607040" cy="4572000"/>
+          </a:xfrm>
+          <a:prstGeom prst="rect">
+            <a:avLst/>
+          </a:prstGeom>
+          <a:noFill/>
+          <a:ln/>
+        </p:spPr>
+        <p:txBody>
+          <a:bodyPr wrap="square" rtlCol="0" anchor="t"/>
+          <a:lstStyle/>
+          <a:p>
+            <a:pPr algn="l" marL="342900" indent="-342900">
+              <a:spcAft>
+                <a:spcPts val="900"/>
+              </a:spcAft>
+              <a:buSzPct val="100000"/>
+              <a:buChar char="•"/>
+            </a:pPr>
+            <a:r>
+              <a:rPr lang="en-US" sz="2000" dirty="0">
+                <a:solidFill>
+                  <a:srgbClr val="1B2B31"/>
+                </a:solidFill>
+              </a:rPr>
+              <a:t>Gene-level FDR can miss a coordinated WEAK program (many genes, small shifts).</a:t>
+            </a:r>
+            <a:endParaRPr lang="en-US" sz="2000" dirty="0"/>
+          </a:p>
+          <a:p>
+            <a:pPr algn="l" marL="342900" indent="-342900">
+              <a:spcAft>
+                <a:spcPts val="900"/>
+              </a:spcAft>
+              <a:buSzPct val="100000"/>
+              <a:buChar char="•"/>
+            </a:pPr>
+            <a:r>
+              <a:rPr lang="en-US" sz="2000" dirty="0">
+                <a:solidFill>
+                  <a:srgbClr val="1B2B31"/>
+                </a:solidFill>
+              </a:rPr>
+              <a:t>CAMERA + ROAST on pre-specified sets: PC, PP, detox, urea cycle, bile-acid/lipid,</a:t>
+            </a:r>
+            <a:endParaRPr lang="en-US" sz="2000" dirty="0"/>
+          </a:p>
+          <a:p>
+            <a:pPr algn="l" marL="342900" indent="-342900">
+              <a:spcAft>
+                <a:spcPts val="900"/>
+              </a:spcAft>
+              <a:buSzPct val="100000"/>
+              <a:buChar char="•"/>
+            </a:pPr>
+            <a:r>
+              <a:rPr lang="en-US" sz="2000" dirty="0">
+                <a:solidFill>
+                  <a:srgbClr val="1B2B31"/>
+                </a:solidFill>
+              </a:rPr>
+              <a:t>mitochondrial, ER stress, interferon, hypoxia, EMT/fetal/progenitor, cholangiocyte/ductular.</a:t>
+            </a:r>
+            <a:endParaRPr lang="en-US" sz="2000" dirty="0"/>
+          </a:p>
+          <a:p>
+            <a:pPr algn="l" marL="342900" indent="-342900">
+              <a:spcAft>
+                <a:spcPts val="900"/>
+              </a:spcAft>
+              <a:buSzPct val="100000"/>
+              <a:buChar char="•"/>
+            </a:pPr>
+            <a:r>
+              <a:rPr lang="en-US" sz="2000" dirty="0">
+                <a:solidFill>
+                  <a:srgbClr val="1B2B31"/>
+                </a:solidFill>
+              </a:rPr>
+              <a:t>Closes the caveat behind “no other large hepatocyte program.”</a:t>
+            </a:r>
+            <a:endParaRPr lang="en-US" sz="2000" dirty="0"/>
+          </a:p>
+        </p:txBody>
+      </p:sp>
+    </p:spTree>
+  </p:cSld>
+  <p:clrMapOvr>
+    <a:masterClrMapping/>
+  </p:clrMapOvr>
+</p:sld>
+</file>
+
+<file path=ppt/slides/slide22.xml><?xml version="1.0" encoding="utf-8"?>
+<p:sld xmlns:a="http://schemas.openxmlformats.org/drawingml/2006/main" xmlns:r="http://schemas.openxmlformats.org/officeDocument/2006/relationships" xmlns:p="http://schemas.openxmlformats.org/presentationml/2006/main">
+  <p:cSld name="Slide 22">
+    <p:bg>
+      <p:bgPr>
+        <a:solidFill>
+          <a:srgbClr val="F7F5F1"/>
+        </a:solidFill>
+      </p:bgPr>
+    </p:bg>
+    <p:spTree>
+      <p:nvGrpSpPr>
+        <p:cNvPr id="1" name=""/>
+        <p:cNvGrpSpPr/>
+        <p:nvPr/>
+      </p:nvGrpSpPr>
+      <p:grpSpPr>
+        <a:xfrm>
+          <a:off x="0" y="0"/>
+          <a:ext cx="0" cy="0"/>
+          <a:chOff x="0" y="0"/>
+          <a:chExt cx="0" cy="0"/>
+        </a:xfrm>
+      </p:grpSpPr>
+      <p:sp>
+        <p:nvSpPr>
+          <p:cNvPr id="2" name="Shape 0"/>
+          <p:cNvSpPr/>
+          <p:nvPr/>
+        </p:nvSpPr>
+        <p:spPr>
+          <a:xfrm>
+            <a:off x="457200" y="310896"/>
+            <a:ext cx="146304" cy="237744"/>
+          </a:xfrm>
+          <a:prstGeom prst="rect">
+            <a:avLst/>
+          </a:prstGeom>
+          <a:solidFill>
+            <a:srgbClr val="C0561B"/>
+          </a:solidFill>
+          <a:ln/>
+        </p:spPr>
+      </p:sp>
+      <p:sp>
+        <p:nvSpPr>
+          <p:cNvPr id="3" name="Text 1"/>
+          <p:cNvSpPr/>
+          <p:nvPr/>
+        </p:nvSpPr>
+        <p:spPr>
+          <a:xfrm>
+            <a:off x="676656" y="274320"/>
+            <a:ext cx="10972800" cy="320040"/>
+          </a:xfrm>
+          <a:prstGeom prst="rect">
+            <a:avLst/>
+          </a:prstGeom>
+          <a:noFill/>
+          <a:ln/>
+        </p:spPr>
+        <p:txBody>
+          <a:bodyPr wrap="square" rtlCol="0" anchor="ctr"/>
+          <a:lstStyle/>
+          <a:p>
+            <a:pPr indent="0" marL="0">
+              <a:buNone/>
+            </a:pPr>
+            <a:r>
+              <a:rPr lang="en-US" sz="1300" b="1" spc="300" kern="0" dirty="0">
+                <a:solidFill>
+                  <a:srgbClr val="C0561B"/>
+                </a:solidFill>
+              </a:rPr>
+              <a:t>BACKUP  ·  SCENARIO COVERAGE</a:t>
+            </a:r>
+            <a:endParaRPr lang="en-US" sz="1300" dirty="0"/>
+          </a:p>
+        </p:txBody>
+      </p:sp>
+      <p:sp>
+        <p:nvSpPr>
+          <p:cNvPr id="4" name="Text 2"/>
+          <p:cNvSpPr/>
+          <p:nvPr/>
+        </p:nvSpPr>
+        <p:spPr>
+          <a:xfrm>
+            <a:off x="438912" y="585216"/>
+            <a:ext cx="11338560" cy="731520"/>
+          </a:xfrm>
+          <a:prstGeom prst="rect">
+            <a:avLst/>
+          </a:prstGeom>
+          <a:noFill/>
+          <a:ln/>
+        </p:spPr>
+        <p:txBody>
+          <a:bodyPr wrap="square" rtlCol="0" anchor="ctr"/>
+          <a:lstStyle/>
+          <a:p>
+            <a:pPr algn="l" indent="0" marL="0">
+              <a:buNone/>
+            </a:pPr>
+            <a:r>
+              <a:rPr lang="en-US" sz="2600" b="1" dirty="0">
+                <a:solidFill>
+                  <a:srgbClr val="123F47"/>
+                </a:solidFill>
+                <a:latin typeface="Georgia" pitchFamily="34" charset="0"/>
+                <a:ea typeface="Georgia" pitchFamily="34" charset="-122"/>
+                <a:cs typeface="Georgia" pitchFamily="34" charset="-120"/>
+              </a:rPr>
               <a:t>Every de-zonation route, tested by count signature</a:t>
             </a:r>
             <a:endParaRPr lang="en-US" sz="2600" dirty="0"/>
@@ -7015,7 +9445,7 @@
       </p:sp>
       <p:graphicFrame>
         <p:nvGraphicFramePr>
-          <p:cNvPr id="22" name="Table 0"/>
+          <p:cNvPr id="23" name="Table 0"/>
           <p:cNvGraphicFramePr>
             <a:graphicFrameLocks noGrp="1"/>
           </p:cNvGraphicFramePr>
@@ -7053,7 +9483,7 @@
                       <a:r>
                         <a:rPr lang="en-US" sz="1350" b="1" dirty="0">
                           <a:solidFill>
-                            <a:srgbClr val="1E293B"/>
+                            <a:srgbClr val="1B2B31"/>
                           </a:solidFill>
                         </a:rPr>
                         <a:t>Mechanism</a:t>
@@ -7114,7 +9544,7 @@
                       <a:r>
                         <a:rPr lang="en-US" sz="1350" b="1" dirty="0">
                           <a:solidFill>
-                            <a:srgbClr val="1E293B"/>
+                            <a:srgbClr val="1B2B31"/>
                           </a:solidFill>
                         </a:rPr>
                         <a:t>Count signature</a:t>
@@ -7175,7 +9605,7 @@
                       <a:r>
                         <a:rPr lang="en-US" sz="1350" b="1" dirty="0">
                           <a:solidFill>
-                            <a:srgbClr val="1E293B"/>
+                            <a:srgbClr val="1B2B31"/>
                           </a:solidFill>
                         </a:rPr>
                         <a:t>Biopsy F0→F4 (donor-median)</a:t>
@@ -7236,7 +9666,7 @@
                       <a:r>
                         <a:rPr lang="en-US" sz="1350" b="1" dirty="0">
                           <a:solidFill>
-                            <a:srgbClr val="1E293B"/>
+                            <a:srgbClr val="1B2B31"/>
                           </a:solidFill>
                         </a:rPr>
                         <a:t>Verdict</a:t>
@@ -7299,7 +9729,7 @@
                       <a:r>
                         <a:rPr lang="en-US" sz="1350" dirty="0">
                           <a:solidFill>
-                            <a:srgbClr val="1E293B"/>
+                            <a:srgbClr val="1B2B31"/>
                           </a:solidFill>
                         </a:rPr>
                         <a:t>Pericentral depletion</a:t>
@@ -7360,7 +9790,7 @@
                       <a:r>
                         <a:rPr lang="en-US" sz="1350" dirty="0">
                           <a:solidFill>
-                            <a:srgbClr val="1E293B"/>
+                            <a:srgbClr val="1B2B31"/>
                           </a:solidFill>
                         </a:rPr>
                         <a:t>PC-anchor fraction ↓</a:t>
@@ -7421,7 +9851,7 @@
                       <a:r>
                         <a:rPr lang="en-US" sz="1350" dirty="0">
                           <a:solidFill>
-                            <a:srgbClr val="1E293B"/>
+                            <a:srgbClr val="1B2B31"/>
                           </a:solidFill>
                         </a:rPr>
                         <a:t>36 / 19 / 23 / 22 / 21 %</a:t>
@@ -7482,7 +9912,7 @@
                       <a:r>
                         <a:rPr lang="en-US" sz="1350" dirty="0">
                           <a:solidFill>
-                            <a:srgbClr val="1E293B"/>
+                            <a:srgbClr val="1B2B31"/>
                           </a:solidFill>
                         </a:rPr>
                         <a:t>flat → no depletion</a:t>
@@ -7545,7 +9975,7 @@
                       <a:r>
                         <a:rPr lang="en-US" sz="1350" dirty="0">
                           <a:solidFill>
-                            <a:srgbClr val="1E293B"/>
+                            <a:srgbClr val="1B2B31"/>
                           </a:solidFill>
                         </a:rPr>
                         <a:t>Periportal depletion</a:t>
@@ -7606,7 +10036,7 @@
                       <a:r>
                         <a:rPr lang="en-US" sz="1350" dirty="0">
                           <a:solidFill>
-                            <a:srgbClr val="1E293B"/>
+                            <a:srgbClr val="1B2B31"/>
                           </a:solidFill>
                         </a:rPr>
                         <a:t>PP-anchor fraction ↓</a:t>
@@ -7667,7 +10097,7 @@
                       <a:r>
                         <a:rPr lang="en-US" sz="1350" dirty="0">
                           <a:solidFill>
-                            <a:srgbClr val="1E293B"/>
+                            <a:srgbClr val="1B2B31"/>
                           </a:solidFill>
                         </a:rPr>
                         <a:t>20 / 21 / 22 / 24 / 24 %</a:t>
@@ -7728,7 +10158,7 @@
                       <a:r>
                         <a:rPr lang="en-US" sz="1350" dirty="0">
                           <a:solidFill>
-                            <a:srgbClr val="1E293B"/>
+                            <a:srgbClr val="1B2B31"/>
                           </a:solidFill>
                         </a:rPr>
                         <a:t>flat → no depletion</a:t>
@@ -7791,7 +10221,7 @@
                       <a:r>
                         <a:rPr lang="en-US" sz="1350" dirty="0">
                           <a:solidFill>
-                            <a:srgbClr val="1E293B"/>
+                            <a:srgbClr val="1B2B31"/>
                           </a:solidFill>
                         </a:rPr>
                         <a:t>Co-expression</a:t>
@@ -7852,7 +10282,7 @@
                       <a:r>
                         <a:rPr lang="en-US" sz="1350" dirty="0">
                           <a:solidFill>
-                            <a:srgbClr val="1E293B"/>
+                            <a:srgbClr val="1B2B31"/>
                           </a:solidFill>
                         </a:rPr>
                         <a:t>dual (≥2 UMI) fraction ↑</a:t>
@@ -7913,7 +10343,7 @@
                       <a:r>
                         <a:rPr lang="en-US" sz="1350" dirty="0">
                           <a:solidFill>
-                            <a:srgbClr val="1E293B"/>
+                            <a:srgbClr val="1B2B31"/>
                           </a:solidFill>
                         </a:rPr>
                         <a:t>~0.0 / 0.2 / 0.4 / 0.2 / 0.2 %</a:t>
@@ -7974,7 +10404,7 @@
                       <a:r>
                         <a:rPr lang="en-US" sz="1350" dirty="0">
                           <a:solidFill>
-                            <a:srgbClr val="1E293B"/>
+                            <a:srgbClr val="1B2B31"/>
                           </a:solidFill>
                         </a:rPr>
                         <a:t>ambient soup → no</a:t>
@@ -8037,7 +10467,7 @@
                       <a:r>
                         <a:rPr lang="en-US" sz="1350" dirty="0">
                           <a:solidFill>
-                            <a:srgbClr val="1E293B"/>
+                            <a:srgbClr val="1B2B31"/>
                           </a:solidFill>
                         </a:rPr>
                         <a:t>Gradient compression</a:t>
@@ -8098,7 +10528,7 @@
                       <a:r>
                         <a:rPr lang="en-US" sz="1350" dirty="0">
                           <a:solidFill>
-                            <a:srgbClr val="1E293B"/>
+                            <a:srgbClr val="1B2B31"/>
                           </a:solidFill>
                         </a:rPr>
                         <a:t>per-cell balance → middle</a:t>
@@ -8159,7 +10589,7 @@
                       <a:r>
                         <a:rPr lang="en-US" sz="1350" dirty="0">
                           <a:solidFill>
-                            <a:srgbClr val="1E293B"/>
+                            <a:srgbClr val="1B2B31"/>
                           </a:solidFill>
                         </a:rPr>
                         <a:t>mild, non-monotone (peak F3)</a:t>
@@ -8220,7 +10650,7 @@
                       <a:r>
                         <a:rPr lang="en-US" sz="1350" dirty="0">
                           <a:solidFill>
-                            <a:srgbClr val="1E293B"/>
+                            <a:srgbClr val="1B2B31"/>
                           </a:solidFill>
                         </a:rPr>
                         <a:t>gradient present</a:t>
@@ -8283,7 +10713,7 @@
                       <a:r>
                         <a:rPr lang="en-US" sz="1350" dirty="0">
                           <a:solidFill>
-                            <a:srgbClr val="1E293B"/>
+                            <a:srgbClr val="1B2B31"/>
                           </a:solidFill>
                         </a:rPr>
                         <a:t>Turn-off</a:t>
@@ -8344,7 +10774,7 @@
                       <a:r>
                         <a:rPr lang="en-US" sz="1350" dirty="0">
                           <a:solidFill>
-                            <a:srgbClr val="1E293B"/>
+                            <a:srgbClr val="1B2B31"/>
                           </a:solidFill>
                         </a:rPr>
                         <a:t>null (double-neg) fraction ↑</a:t>
@@ -8405,7 +10835,7 @@
                       <a:r>
                         <a:rPr lang="en-US" sz="1350" dirty="0">
                           <a:solidFill>
-                            <a:srgbClr val="1E293B"/>
+                            <a:srgbClr val="1B2B31"/>
                           </a:solidFill>
                         </a:rPr>
                         <a:t>34 / 44 / 36 / 39 / 39 %</a:t>
@@ -8466,7 +10896,7 @@
                       <a:r>
                         <a:rPr lang="en-US" sz="1350" dirty="0">
                           <a:solidFill>
-                            <a:srgbClr val="1E293B"/>
+                            <a:srgbClr val="1B2B31"/>
                           </a:solidFill>
                         </a:rPr>
                         <a:t>flat → no turn-off</a:t>
@@ -8529,7 +10959,7 @@
                       <a:r>
                         <a:rPr lang="en-US" sz="1350" dirty="0">
                           <a:solidFill>
-                            <a:srgbClr val="1E293B"/>
+                            <a:srgbClr val="1B2B31"/>
                           </a:solidFill>
                         </a:rPr>
                         <a:t>Composition shift</a:t>
@@ -8590,7 +11020,7 @@
                       <a:r>
                         <a:rPr lang="en-US" sz="1350" dirty="0">
                           <a:solidFill>
-                            <a:srgbClr val="1E293B"/>
+                            <a:srgbClr val="1B2B31"/>
                           </a:solidFill>
                         </a:rPr>
                         <a:t>PP : PC anchor ratio</a:t>
@@ -8651,7 +11081,7 @@
                       <a:r>
                         <a:rPr lang="en-US" sz="1350" dirty="0">
                           <a:solidFill>
-                            <a:srgbClr val="1E293B"/>
+                            <a:srgbClr val="1B2B31"/>
                           </a:solidFill>
                         </a:rPr>
                         <a:t>0.62 / 1.16 / 1.01 / 1.10 / 1.18</a:t>
@@ -8712,7 +11142,7 @@
                       <a:r>
                         <a:rPr lang="en-US" sz="1350" dirty="0">
                           <a:solidFill>
-                            <a:srgbClr val="1E293B"/>
+                            <a:srgbClr val="1B2B31"/>
                           </a:solidFill>
                         </a:rPr>
                         <a:t>~flat → no shift</a:t>
@@ -8775,7 +11205,7 @@
                       <a:r>
                         <a:rPr lang="en-US" sz="1350" dirty="0">
                           <a:solidFill>
-                            <a:srgbClr val="1E293B"/>
+                            <a:srgbClr val="1B2B31"/>
                           </a:solidFill>
                         </a:rPr>
                         <a:t>Induction</a:t>
@@ -8836,7 +11266,7 @@
                       <a:r>
                         <a:rPr lang="en-US" sz="1350" dirty="0">
                           <a:solidFill>
-                            <a:srgbClr val="1E293B"/>
+                            <a:srgbClr val="1B2B31"/>
                           </a:solidFill>
                         </a:rPr>
                         <a:t>program burden ↑</a:t>
@@ -8897,7 +11327,7 @@
                       <a:r>
                         <a:rPr lang="en-US" sz="1350" dirty="0">
                           <a:solidFill>
-                            <a:srgbClr val="1E293B"/>
+                            <a:srgbClr val="1B2B31"/>
                           </a:solidFill>
                         </a:rPr>
                         <a:t>flat in biopsy; rises only end-stage</a:t>
@@ -8958,7 +11388,7 @@
                       <a:r>
                         <a:rPr lang="en-US" sz="1350" dirty="0">
                           <a:solidFill>
-                            <a:srgbClr val="1E293B"/>
+                            <a:srgbClr val="1B2B31"/>
                           </a:solidFill>
                         </a:rPr>
                         <a:t>explant-only</a:t>
@@ -9040,7 +11470,7 @@
             <a:r>
               <a:rPr lang="en-US" sz="1300" i="1" dirty="0">
                 <a:solidFill>
-                  <a:srgbClr val="6B6256"/>
+                  <a:srgbClr val="5C6E73"/>
                 </a:solidFill>
               </a:rPr>
               <a:t>Each row is a distinct way zonation could fail, mapped to an absolute-count signature on depth-normalized counts; only the null (all stable) survives across biopsy F1–F4.</a:t>
@@ -9063,7 +11493,7 @@
     <p:bg>
       <p:bgPr>
         <a:solidFill>
-          <a:srgbClr val="F7F3EB"/>
+          <a:srgbClr val="F7F5F1"/>
         </a:solidFill>
       </p:bgPr>
     </p:bg>
@@ -9096,7 +11526,7 @@
             <a:avLst/>
           </a:prstGeom>
           <a:solidFill>
-            <a:srgbClr val="C0562B"/>
+            <a:srgbClr val="C0561B"/>
           </a:solidFill>
           <a:ln/>
         </p:spPr>
@@ -9128,7 +11558,7 @@
             <a:r>
               <a:rPr lang="en-US" sz="1300" b="1" spc="300" kern="0" dirty="0">
                 <a:solidFill>
-                  <a:srgbClr val="C0562B"/>
+                  <a:srgbClr val="C0561B"/>
                 </a:solidFill>
               </a:rPr>
               <a:t>THE QUESTION</a:t>
@@ -9164,7 +11594,7 @@
             <a:r>
               <a:rPr lang="en-US" sz="2800" b="1" dirty="0">
                 <a:solidFill>
-                  <a:srgbClr val="1F3A3D"/>
+                  <a:srgbClr val="1B2B31"/>
                 </a:solidFill>
                 <a:latin typeface="Georgia" pitchFamily="34" charset="0"/>
                 <a:ea typeface="Georgia" pitchFamily="34" charset="-122"/>
@@ -9193,7 +11623,7 @@
             </a:avLst>
           </a:prstGeom>
           <a:solidFill>
-            <a:srgbClr val="ECE6DA"/>
+            <a:srgbClr val="ECF1F1"/>
           </a:solidFill>
           <a:ln/>
         </p:spPr>
@@ -9225,7 +11655,7 @@
             <a:r>
               <a:rPr lang="en-US" sz="1300" b="1" spc="200" kern="0" dirty="0">
                 <a:solidFill>
-                  <a:srgbClr val="C0562B"/>
+                  <a:srgbClr val="C0561B"/>
                 </a:solidFill>
               </a:rPr>
               <a:t>Our research question</a:t>
@@ -9261,7 +11691,7 @@
             <a:r>
               <a:rPr lang="en-US" sz="1800" i="1" dirty="0">
                 <a:solidFill>
-                  <a:srgbClr val="1E293B"/>
+                  <a:srgbClr val="1B2B31"/>
                 </a:solidFill>
               </a:rPr>
               <a:t>Does hepatocyte zonation degrade across MASLD progression — and is that degradation linked to the hepatocyte→cholangiocyte transdifferentiation Paper 1 reported?</a:t>
@@ -9297,7 +11727,7 @@
             <a:r>
               <a:rPr lang="en-US" sz="1300" b="1" spc="200" kern="0" dirty="0">
                 <a:solidFill>
-                  <a:srgbClr val="C0562B"/>
+                  <a:srgbClr val="C0561B"/>
                 </a:solidFill>
               </a:rPr>
               <a:t>The pivot — how we test it</a:t>
@@ -9337,7 +11767,7 @@
             <a:r>
               <a:rPr lang="en-US" sz="1800" dirty="0">
                 <a:solidFill>
-                  <a:srgbClr val="1E293B"/>
+                  <a:srgbClr val="1B2B31"/>
                 </a:solidFill>
               </a:rPr>
               <a:t>Earlier, a relative / correlation ruler suggested a collapse — but it conflates sequencing depth, tissue source and biology.</a:t>
@@ -9373,7 +11803,7 @@
             <a:r>
               <a:rPr lang="en-US" sz="1800" dirty="0">
                 <a:solidFill>
-                  <a:srgbClr val="1E293B"/>
+                  <a:srgbClr val="1B2B31"/>
                 </a:solidFill>
               </a:rPr>
               <a:t>And we test on the acquisition-matched needle-biopsy axis only (next slide explains why).</a:t>
@@ -9409,7 +11839,7 @@
             <a:r>
               <a:rPr lang="en-US" sz="1050" dirty="0">
                 <a:solidFill>
-                  <a:srgbClr val="6B6256"/>
+                  <a:srgbClr val="5C6E73"/>
                 </a:solidFill>
               </a:rPr>
               <a:t>Computational Genomics 76553  ·  HUJI  ·  MASLD snRNA-seq hackathon</a:t>
@@ -9445,7 +11875,7 @@
             <a:r>
               <a:rPr lang="en-US" sz="1050" dirty="0">
                 <a:solidFill>
-                  <a:srgbClr val="6B6256"/>
+                  <a:srgbClr val="5C6E73"/>
                 </a:solidFill>
               </a:rPr>
               <a:t>3</a:t>
@@ -9468,7 +11898,7 @@
     <p:bg>
       <p:bgPr>
         <a:solidFill>
-          <a:srgbClr val="F7F3EB"/>
+          <a:srgbClr val="F7F5F1"/>
         </a:solidFill>
       </p:bgPr>
     </p:bg>
@@ -9501,7 +11931,7 @@
             <a:avLst/>
           </a:prstGeom>
           <a:solidFill>
-            <a:srgbClr val="C0562B"/>
+            <a:srgbClr val="C0561B"/>
           </a:solidFill>
           <a:ln/>
         </p:spPr>
@@ -9533,7 +11963,7 @@
             <a:r>
               <a:rPr lang="en-US" sz="1300" b="1" spc="300" kern="0" dirty="0">
                 <a:solidFill>
-                  <a:srgbClr val="C0562B"/>
+                  <a:srgbClr val="C0561B"/>
                 </a:solidFill>
               </a:rPr>
               <a:t>THE LEGACY APPROACH</a:t>
@@ -9569,7 +11999,7 @@
             <a:r>
               <a:rPr lang="en-US" sz="2800" b="1" dirty="0">
                 <a:solidFill>
-                  <a:srgbClr val="1F3A3D"/>
+                  <a:srgbClr val="1B2B31"/>
                 </a:solidFill>
                 <a:latin typeface="Georgia" pitchFamily="34" charset="0"/>
                 <a:ea typeface="Georgia" pitchFamily="34" charset="-122"/>
@@ -9598,7 +12028,7 @@
             </a:avLst>
           </a:prstGeom>
           <a:solidFill>
-            <a:srgbClr val="ECE6DA"/>
+            <a:srgbClr val="ECF1F1"/>
           </a:solidFill>
           <a:ln/>
         </p:spPr>
@@ -9630,7 +12060,7 @@
             <a:r>
               <a:rPr lang="en-US" sz="1200" b="1" spc="200" kern="0" dirty="0">
                 <a:solidFill>
-                  <a:srgbClr val="6B6256"/>
+                  <a:srgbClr val="5C6E73"/>
                 </a:solidFill>
               </a:rPr>
               <a:t>WHAT WE FIRST USED</a:t>
@@ -9666,7 +12096,7 @@
             <a:r>
               <a:rPr lang="en-US" sz="1500" dirty="0">
                 <a:solidFill>
-                  <a:srgbClr val="1E293B"/>
+                  <a:srgbClr val="1B2B31"/>
                 </a:solidFill>
               </a:rPr>
               <a:t>A z-scored zonation coordinate, marker–marker correlations, and spread / slope-loss plots — pooled across all samples.</a:t>
@@ -9692,7 +12122,7 @@
           <a:noFill/>
           <a:ln w="20320">
             <a:solidFill>
-              <a:srgbClr val="6B6256"/>
+              <a:srgbClr val="5C6E73"/>
             </a:solidFill>
             <a:prstDash val="solid"/>
             <a:tailEnd type="triangle"/>
@@ -9789,7 +12219,7 @@
             <a:r>
               <a:rPr lang="en-US" sz="1600" b="1" i="1" dirty="0">
                 <a:solidFill>
-                  <a:srgbClr val="1F3A3D"/>
+                  <a:srgbClr val="123F47"/>
                 </a:solidFill>
               </a:rPr>
               <a:t>“Hepatocytes lose their zonation; the pericentral program turns off, strongest at end-stage.”</a:t>
@@ -9825,7 +12255,7 @@
             <a:r>
               <a:rPr lang="en-US" sz="1300" b="1" spc="200" kern="0" dirty="0">
                 <a:solidFill>
-                  <a:srgbClr val="C0562B"/>
+                  <a:srgbClr val="C0561B"/>
                 </a:solidFill>
               </a:rPr>
               <a:t>THE TRAP</a:t>
@@ -9865,7 +12295,7 @@
             <a:r>
               <a:rPr lang="en-US" sz="1700" dirty="0">
                 <a:solidFill>
-                  <a:srgbClr val="1E293B"/>
+                  <a:srgbClr val="1B2B31"/>
                 </a:solidFill>
               </a:rPr>
               <a:t>Every metric is a relative summary — it hides who moved, how many, and from where.</a:t>
@@ -9883,7 +12313,7 @@
             <a:r>
               <a:rPr lang="en-US" sz="1700" dirty="0">
                 <a:solidFill>
-                  <a:srgbClr val="1E293B"/>
+                  <a:srgbClr val="1B2B31"/>
                 </a:solidFill>
               </a:rPr>
               <a:t>They pool healthy + biopsy + end-stage across a hidden sampling discontinuity.</a:t>
@@ -9901,7 +12331,7 @@
             <a:r>
               <a:rPr lang="en-US" sz="1700" dirty="0">
                 <a:solidFill>
-                  <a:srgbClr val="1E293B"/>
+                  <a:srgbClr val="1B2B31"/>
                 </a:solidFill>
               </a:rPr>
               <a:t>Depth, cell number and tissue source all bend a z-score or correlation.</a:t>
@@ -9955,7 +12385,7 @@
             <a:r>
               <a:rPr lang="en-US" sz="1050" dirty="0">
                 <a:solidFill>
-                  <a:srgbClr val="6B6256"/>
+                  <a:srgbClr val="5C6E73"/>
                 </a:solidFill>
               </a:rPr>
               <a:t>Computational Genomics 76553  ·  HUJI  ·  MASLD snRNA-seq hackathon</a:t>
@@ -9991,7 +12421,7 @@
             <a:r>
               <a:rPr lang="en-US" sz="1050" dirty="0">
                 <a:solidFill>
-                  <a:srgbClr val="6B6256"/>
+                  <a:srgbClr val="5C6E73"/>
                 </a:solidFill>
               </a:rPr>
               <a:t>4</a:t>
@@ -10014,7 +12444,7 @@
     <p:bg>
       <p:bgPr>
         <a:solidFill>
-          <a:srgbClr val="F7F3EB"/>
+          <a:srgbClr val="F7F5F1"/>
         </a:solidFill>
       </p:bgPr>
     </p:bg>
@@ -10047,7 +12477,7 @@
             <a:avLst/>
           </a:prstGeom>
           <a:solidFill>
-            <a:srgbClr val="C0562B"/>
+            <a:srgbClr val="C0561B"/>
           </a:solidFill>
           <a:ln/>
         </p:spPr>
@@ -10079,7 +12509,7 @@
             <a:r>
               <a:rPr lang="en-US" sz="1300" b="1" spc="300" kern="0" dirty="0">
                 <a:solidFill>
-                  <a:srgbClr val="C0562B"/>
+                  <a:srgbClr val="C0561B"/>
                 </a:solidFill>
               </a:rPr>
               <a:t>WHAT WE TEST</a:t>
@@ -10115,7 +12545,7 @@
             <a:r>
               <a:rPr lang="en-US" sz="2800" b="1" dirty="0">
                 <a:solidFill>
-                  <a:srgbClr val="1F3A3D"/>
+                  <a:srgbClr val="1B2B31"/>
                 </a:solidFill>
                 <a:latin typeface="Georgia" pitchFamily="34" charset="0"/>
                 <a:ea typeface="Georgia" pitchFamily="34" charset="-122"/>
@@ -10154,7 +12584,7 @@
             <a:r>
               <a:rPr lang="en-US" sz="1700" dirty="0">
                 <a:solidFill>
-                  <a:srgbClr val="1E293B"/>
+                  <a:srgbClr val="1B2B31"/>
                 </a:solidFill>
               </a:rPr>
               <a:t>If the zonation expression signal breaks down, it can do so in distinct ways — each has its own count signature, which we test separately:</a:t>
@@ -10377,7 +12807,7 @@
             <a:r>
               <a:rPr lang="en-US" sz="1450" b="1" dirty="0">
                 <a:solidFill>
-                  <a:srgbClr val="1E293B"/>
+                  <a:srgbClr val="1B2B31"/>
                 </a:solidFill>
               </a:rPr>
               <a:t>Turn-off</a:t>
@@ -10391,7 +12821,7 @@
             <a:r>
               <a:rPr lang="en-US" sz="1450" b="1" dirty="0">
                 <a:solidFill>
-                  <a:srgbClr val="1E293B"/>
+                  <a:srgbClr val="1B2B31"/>
                 </a:solidFill>
               </a:rPr>
               <a:t>(neither pole on)</a:t>
@@ -10564,7 +12994,7 @@
             <a:r>
               <a:rPr lang="en-US" sz="1500" i="1" dirty="0">
                 <a:solidFill>
-                  <a:srgbClr val="6B6256"/>
+                  <a:srgbClr val="5C6E73"/>
                 </a:solidFill>
               </a:rPr>
               <a:t>A single anti-correlation or UMAP impression conflates these — which is exactly the trap we avoid with absolute counts.</a:t>
@@ -10600,7 +13030,7 @@
             <a:r>
               <a:rPr lang="en-US" sz="1050" dirty="0">
                 <a:solidFill>
-                  <a:srgbClr val="6B6256"/>
+                  <a:srgbClr val="5C6E73"/>
                 </a:solidFill>
               </a:rPr>
               <a:t>Computational Genomics 76553  ·  HUJI  ·  MASLD snRNA-seq hackathon</a:t>
@@ -10636,7 +13066,7 @@
             <a:r>
               <a:rPr lang="en-US" sz="1050" dirty="0">
                 <a:solidFill>
-                  <a:srgbClr val="6B6256"/>
+                  <a:srgbClr val="5C6E73"/>
                 </a:solidFill>
               </a:rPr>
               <a:t>5</a:t>
@@ -10659,7 +13089,7 @@
     <p:bg>
       <p:bgPr>
         <a:solidFill>
-          <a:srgbClr val="F7F3EB"/>
+          <a:srgbClr val="F7F5F1"/>
         </a:solidFill>
       </p:bgPr>
     </p:bg>
@@ -10692,7 +13122,7 @@
             <a:avLst/>
           </a:prstGeom>
           <a:solidFill>
-            <a:srgbClr val="C0562B"/>
+            <a:srgbClr val="C0561B"/>
           </a:solidFill>
           <a:ln/>
         </p:spPr>
@@ -10724,7 +13154,7 @@
             <a:r>
               <a:rPr lang="en-US" sz="1300" b="1" spc="300" kern="0" dirty="0">
                 <a:solidFill>
-                  <a:srgbClr val="C0562B"/>
+                  <a:srgbClr val="C0561B"/>
                 </a:solidFill>
               </a:rPr>
               <a:t>THE CONFOUND</a:t>
@@ -10760,7 +13190,7 @@
             <a:r>
               <a:rPr lang="en-US" sz="2800" b="1" dirty="0">
                 <a:solidFill>
-                  <a:srgbClr val="1F3A3D"/>
+                  <a:srgbClr val="1B2B31"/>
                 </a:solidFill>
                 <a:latin typeface="Georgia" pitchFamily="34" charset="0"/>
                 <a:ea typeface="Georgia" pitchFamily="34" charset="-122"/>
@@ -11244,7 +13674,7 @@
           <a:noFill/>
           <a:ln w="19050">
             <a:solidFill>
-              <a:srgbClr val="6B6256"/>
+              <a:srgbClr val="5C6E73"/>
             </a:solidFill>
             <a:prstDash val="solid"/>
             <a:tailEnd type="triangle"/>
@@ -11494,7 +13924,7 @@
             <a:r>
               <a:rPr lang="en-US" sz="1600" b="1" dirty="0">
                 <a:solidFill>
-                  <a:srgbClr val="1E293B"/>
+                  <a:srgbClr val="1B2B31"/>
                 </a:solidFill>
               </a:rPr>
               <a:t>47 donors   ·   biopsy axis F0/F1/F2/F3/F4 = 2 / 8 / 12 / 12 / 4   ·   end-stage = 5   ·   healthy = 4</a:t>
@@ -11570,7 +14000,7 @@
             <a:r>
               <a:rPr lang="en-US" sz="1800" dirty="0">
                 <a:solidFill>
-                  <a:srgbClr val="1E293B"/>
+                  <a:srgbClr val="1B2B31"/>
                 </a:solidFill>
               </a:rPr>
               <a:t>The full trajectory is also an acquisition trajectory.</a:t>
@@ -11624,7 +14054,7 @@
             <a:r>
               <a:rPr lang="en-US" sz="1050" dirty="0">
                 <a:solidFill>
-                  <a:srgbClr val="6B6256"/>
+                  <a:srgbClr val="5C6E73"/>
                 </a:solidFill>
               </a:rPr>
               <a:t>Computational Genomics 76553  ·  HUJI  ·  MASLD snRNA-seq hackathon</a:t>
@@ -11660,7 +14090,7 @@
             <a:r>
               <a:rPr lang="en-US" sz="1050" dirty="0">
                 <a:solidFill>
-                  <a:srgbClr val="6B6256"/>
+                  <a:srgbClr val="5C6E73"/>
                 </a:solidFill>
               </a:rPr>
               <a:t>6</a:t>
@@ -11683,7 +14113,7 @@
     <p:bg>
       <p:bgPr>
         <a:solidFill>
-          <a:srgbClr val="F7F3EB"/>
+          <a:srgbClr val="F7F5F1"/>
         </a:solidFill>
       </p:bgPr>
     </p:bg>
@@ -11716,7 +14146,7 @@
             <a:avLst/>
           </a:prstGeom>
           <a:solidFill>
-            <a:srgbClr val="C0562B"/>
+            <a:srgbClr val="C0561B"/>
           </a:solidFill>
           <a:ln/>
         </p:spPr>
@@ -11748,7 +14178,7 @@
             <a:r>
               <a:rPr lang="en-US" sz="1300" b="1" spc="300" kern="0" dirty="0">
                 <a:solidFill>
-                  <a:srgbClr val="C0562B"/>
+                  <a:srgbClr val="C0561B"/>
                 </a:solidFill>
               </a:rPr>
               <a:t>WHY IT MATTERS</a:t>
@@ -11784,7 +14214,7 @@
             <a:r>
               <a:rPr lang="en-US" sz="2800" b="1" dirty="0">
                 <a:solidFill>
-                  <a:srgbClr val="1F3A3D"/>
+                  <a:srgbClr val="1B2B31"/>
                 </a:solidFill>
                 <a:latin typeface="Georgia" pitchFamily="34" charset="0"/>
                 <a:ea typeface="Georgia" pitchFamily="34" charset="-122"/>
@@ -11846,7 +14276,7 @@
             <a:r>
               <a:rPr lang="en-US" sz="1200" i="1" dirty="0">
                 <a:solidFill>
-                  <a:srgbClr val="6B6256"/>
+                  <a:srgbClr val="5C6E73"/>
                 </a:solidFill>
               </a:rPr>
               <a:t>Figure 1.  Procurement-stress module by tissue source (donor-level); the same immediate-early spike appears in non-zonated endothelium.</a:t>
@@ -11951,7 +14381,7 @@
             <a:r>
               <a:rPr lang="en-US" sz="1550" dirty="0">
                 <a:solidFill>
-                  <a:srgbClr val="1E293B"/>
+                  <a:srgbClr val="1B2B31"/>
                 </a:solidFill>
               </a:rPr>
               <a:t>FOS, JUN, JUNB, JUND, ATF3, DUSP1, HSPA1A/B.</a:t>
@@ -11969,7 +14399,7 @@
             <a:r>
               <a:rPr lang="en-US" sz="1550" b="1" dirty="0">
                 <a:solidFill>
-                  <a:srgbClr val="1E293B"/>
+                  <a:srgbClr val="1B2B31"/>
                 </a:solidFill>
               </a:rPr>
               <a:t>Endothelium has no zonation program.</a:t>
@@ -12023,7 +14453,7 @@
             <a:r>
               <a:rPr lang="en-US" sz="1050" dirty="0">
                 <a:solidFill>
-                  <a:srgbClr val="6B6256"/>
+                  <a:srgbClr val="5C6E73"/>
                 </a:solidFill>
               </a:rPr>
               <a:t>Computational Genomics 76553  ·  HUJI  ·  MASLD snRNA-seq hackathon</a:t>
@@ -12059,7 +14489,7 @@
             <a:r>
               <a:rPr lang="en-US" sz="1050" dirty="0">
                 <a:solidFill>
-                  <a:srgbClr val="6B6256"/>
+                  <a:srgbClr val="5C6E73"/>
                 </a:solidFill>
               </a:rPr>
               <a:t>7</a:t>
@@ -12082,7 +14512,7 @@
     <p:bg>
       <p:bgPr>
         <a:solidFill>
-          <a:srgbClr val="F7F3EB"/>
+          <a:srgbClr val="F7F5F1"/>
         </a:solidFill>
       </p:bgPr>
     </p:bg>
@@ -12115,7 +14545,7 @@
             <a:avLst/>
           </a:prstGeom>
           <a:solidFill>
-            <a:srgbClr val="C0562B"/>
+            <a:srgbClr val="C0561B"/>
           </a:solidFill>
           <a:ln/>
         </p:spPr>
@@ -12147,7 +14577,7 @@
             <a:r>
               <a:rPr lang="en-US" sz="1300" b="1" spc="300" kern="0" dirty="0">
                 <a:solidFill>
-                  <a:srgbClr val="C0562B"/>
+                  <a:srgbClr val="C0561B"/>
                 </a:solidFill>
               </a:rPr>
               <a:t>HOW WE MEASURE</a:t>
@@ -12183,7 +14613,7 @@
             <a:r>
               <a:rPr lang="en-US" sz="2800" b="1" dirty="0">
                 <a:solidFill>
-                  <a:srgbClr val="1F3A3D"/>
+                  <a:srgbClr val="1B2B31"/>
                 </a:solidFill>
                 <a:latin typeface="Georgia" pitchFamily="34" charset="0"/>
                 <a:ea typeface="Georgia" pitchFamily="34" charset="-122"/>
@@ -12212,7 +14642,7 @@
             </a:avLst>
           </a:prstGeom>
           <a:solidFill>
-            <a:srgbClr val="ECE6DA"/>
+            <a:srgbClr val="ECF1F1"/>
           </a:solidFill>
           <a:ln w="15240">
             <a:solidFill>
@@ -12249,7 +14679,7 @@
             <a:r>
               <a:rPr lang="en-US" sz="1400" dirty="0">
                 <a:solidFill>
-                  <a:srgbClr val="1E293B"/>
+                  <a:srgbClr val="1B2B31"/>
                 </a:solidFill>
               </a:rPr>
               <a:t>raw UMI counts</a:t>
@@ -12275,7 +14705,7 @@
           <a:noFill/>
           <a:ln w="20320">
             <a:solidFill>
-              <a:srgbClr val="6B6256"/>
+              <a:srgbClr val="5C6E73"/>
             </a:solidFill>
             <a:prstDash val="solid"/>
             <a:tailEnd type="triangle"/>
@@ -12299,7 +14729,7 @@
             </a:avLst>
           </a:prstGeom>
           <a:solidFill>
-            <a:srgbClr val="ECE6DA"/>
+            <a:srgbClr val="ECF1F1"/>
           </a:solidFill>
           <a:ln w="15240">
             <a:solidFill>
@@ -12336,7 +14766,7 @@
             <a:r>
               <a:rPr lang="en-US" sz="1400" dirty="0">
                 <a:solidFill>
-                  <a:srgbClr val="1E293B"/>
+                  <a:srgbClr val="1B2B31"/>
                 </a:solidFill>
               </a:rPr>
               <a:t>down-thin to 1,500</a:t>
@@ -12362,7 +14792,7 @@
           <a:noFill/>
           <a:ln w="20320">
             <a:solidFill>
-              <a:srgbClr val="6B6256"/>
+              <a:srgbClr val="5C6E73"/>
             </a:solidFill>
             <a:prstDash val="solid"/>
             <a:tailEnd type="triangle"/>
@@ -12449,7 +14879,7 @@
           <a:noFill/>
           <a:ln w="20320">
             <a:solidFill>
-              <a:srgbClr val="6B6256"/>
+              <a:srgbClr val="5C6E73"/>
             </a:solidFill>
             <a:prstDash val="solid"/>
             <a:tailEnd type="triangle"/>
@@ -12473,7 +14903,7 @@
             </a:avLst>
           </a:prstGeom>
           <a:solidFill>
-            <a:srgbClr val="ECE6DA"/>
+            <a:srgbClr val="ECF1F1"/>
           </a:solidFill>
           <a:ln w="15240">
             <a:solidFill>
@@ -12510,7 +14940,7 @@
             <a:r>
               <a:rPr lang="en-US" sz="1400" dirty="0">
                 <a:solidFill>
-                  <a:srgbClr val="1E293B"/>
+                  <a:srgbClr val="1B2B31"/>
                 </a:solidFill>
               </a:rPr>
               <a:t>classify nucleus</a:t>
@@ -12536,7 +14966,7 @@
           <a:noFill/>
           <a:ln w="20320">
             <a:solidFill>
-              <a:srgbClr val="6B6256"/>
+              <a:srgbClr val="5C6E73"/>
             </a:solidFill>
             <a:prstDash val="solid"/>
             <a:tailEnd type="triangle"/>
@@ -12560,7 +14990,7 @@
             </a:avLst>
           </a:prstGeom>
           <a:solidFill>
-            <a:srgbClr val="ECE6DA"/>
+            <a:srgbClr val="ECF1F1"/>
           </a:solidFill>
           <a:ln w="15240">
             <a:solidFill>
@@ -12597,7 +15027,7 @@
             <a:r>
               <a:rPr lang="en-US" sz="1400" dirty="0">
                 <a:solidFill>
-                  <a:srgbClr val="1E293B"/>
+                  <a:srgbClr val="1B2B31"/>
                 </a:solidFill>
               </a:rPr>
               <a:t>fraction per donor</a:t>
@@ -12899,7 +15329,7 @@
             <a:r>
               <a:rPr lang="en-US" sz="1450" b="1" dirty="0">
                 <a:solidFill>
-                  <a:srgbClr val="1E293B"/>
+                  <a:srgbClr val="1B2B31"/>
                 </a:solidFill>
               </a:rPr>
               <a:t>Null</a:t>
@@ -12913,7 +15343,7 @@
             <a:r>
               <a:rPr lang="en-US" sz="1450" b="1" dirty="0">
                 <a:solidFill>
-                  <a:srgbClr val="1E293B"/>
+                  <a:srgbClr val="1B2B31"/>
                 </a:solidFill>
               </a:rPr>
               <a:t>neither on</a:t>
@@ -12952,7 +15382,7 @@
             <a:r>
               <a:rPr lang="en-US" sz="1600" b="1" dirty="0">
                 <a:solidFill>
-                  <a:srgbClr val="1E293B"/>
+                  <a:srgbClr val="1B2B31"/>
                 </a:solidFill>
               </a:rPr>
               <a:t>Why raw counts: </a:t>
@@ -12966,7 +15396,7 @@
             <a:r>
               <a:rPr lang="en-US" sz="1600" dirty="0">
                 <a:solidFill>
-                  <a:srgbClr val="1E293B"/>
+                  <a:srgbClr val="1B2B31"/>
                 </a:solidFill>
               </a:rPr>
               <a:t>a single KRT19 or GLUL molecule may be ambient — absolute detection matters, so SCT-normalized values are the wrong object.
@@ -12998,7 +15428,7 @@
             <a:r>
               <a:rPr lang="en-US" sz="1600" dirty="0">
                 <a:solidFill>
-                  <a:srgbClr val="1E293B"/>
+                  <a:srgbClr val="1B2B31"/>
                 </a:solidFill>
               </a:rPr>
               <a:t>suppresses single-molecule ambient.    </a:t>
@@ -13026,7 +15456,7 @@
             <a:r>
               <a:rPr lang="en-US" sz="1600" dirty="0">
                 <a:solidFill>
-                  <a:srgbClr val="1E293B"/>
+                  <a:srgbClr val="1B2B31"/>
                 </a:solidFill>
               </a:rPr>
               <a:t>→ no pseudoreplication.
@@ -13044,7 +15474,7 @@
             <a:r>
               <a:rPr lang="en-US" sz="1600" b="1" dirty="0">
                 <a:solidFill>
-                  <a:srgbClr val="1E293B"/>
+                  <a:srgbClr val="1B2B31"/>
                 </a:solidFill>
               </a:rPr>
               <a:t>Robust across the sensitivity grid </a:t>
@@ -13058,7 +15488,7 @@
             <a:r>
               <a:rPr lang="en-US" sz="1600" dirty="0">
                 <a:solidFill>
-                  <a:srgbClr val="1E293B"/>
+                  <a:srgbClr val="1B2B31"/>
                 </a:solidFill>
               </a:rPr>
               <a:t>(anchor genes, periportal rule, ALDOB in/out, 1 vs 2 UMI).</a:t>
@@ -13094,7 +15524,7 @@
             <a:r>
               <a:rPr lang="en-US" sz="1050" dirty="0">
                 <a:solidFill>
-                  <a:srgbClr val="6B6256"/>
+                  <a:srgbClr val="5C6E73"/>
                 </a:solidFill>
               </a:rPr>
               <a:t>Computational Genomics 76553  ·  HUJI  ·  MASLD snRNA-seq hackathon</a:t>
@@ -13130,7 +15560,7 @@
             <a:r>
               <a:rPr lang="en-US" sz="1050" dirty="0">
                 <a:solidFill>
-                  <a:srgbClr val="6B6256"/>
+                  <a:srgbClr val="5C6E73"/>
                 </a:solidFill>
               </a:rPr>
               <a:t>8</a:t>
@@ -13153,7 +15583,7 @@
     <p:bg>
       <p:bgPr>
         <a:solidFill>
-          <a:srgbClr val="F7F3EB"/>
+          <a:srgbClr val="F7F5F1"/>
         </a:solidFill>
       </p:bgPr>
     </p:bg>
@@ -13186,7 +15616,7 @@
             <a:avLst/>
           </a:prstGeom>
           <a:solidFill>
-            <a:srgbClr val="C0562B"/>
+            <a:srgbClr val="C0561B"/>
           </a:solidFill>
           <a:ln/>
         </p:spPr>
@@ -13218,7 +15648,7 @@
             <a:r>
               <a:rPr lang="en-US" sz="1300" b="1" spc="300" kern="0" dirty="0">
                 <a:solidFill>
-                  <a:srgbClr val="C0562B"/>
+                  <a:srgbClr val="C0561B"/>
                 </a:solidFill>
               </a:rPr>
               <a:t>THE RESULT</a:t>
@@ -13254,7 +15684,7 @@
             <a:r>
               <a:rPr lang="en-US" sz="2800" b="1" dirty="0">
                 <a:solidFill>
-                  <a:srgbClr val="1F3A3D"/>
+                  <a:srgbClr val="1B2B31"/>
                 </a:solidFill>
                 <a:latin typeface="Georgia" pitchFamily="34" charset="0"/>
                 <a:ea typeface="Georgia" pitchFamily="34" charset="-122"/>
@@ -13316,7 +15746,7 @@
             <a:r>
               <a:rPr lang="en-US" sz="1200" i="1" dirty="0">
                 <a:solidFill>
-                  <a:srgbClr val="6B6256"/>
+                  <a:srgbClr val="5C6E73"/>
                 </a:solidFill>
               </a:rPr>
               <a:t>Figure 2.  Pericentral and periportal depletion and dual co-expression across matched biopsy F1–F4 (donor=point, value-labelled; F0 n=2 in backup).</a:t>
@@ -13352,7 +15782,7 @@
             <a:r>
               <a:rPr lang="en-US" sz="1500" b="1" dirty="0">
                 <a:solidFill>
-                  <a:srgbClr val="1F3A3D"/>
+                  <a:srgbClr val="123F47"/>
                 </a:solidFill>
               </a:rPr>
               <a:t>The other two mechanisms (F1→F4 donor-median):
@@ -13378,7 +15808,7 @@
             <a:r>
               <a:rPr lang="en-US" sz="1500" dirty="0">
                 <a:solidFill>
-                  <a:srgbClr val="1E293B"/>
+                  <a:srgbClr val="1B2B31"/>
                 </a:solidFill>
               </a:rPr>
               <a:t>44 / 36 / 39 / 39% — stable.
@@ -13404,7 +15834,7 @@
             <a:r>
               <a:rPr lang="en-US" sz="1500" dirty="0">
                 <a:solidFill>
-                  <a:srgbClr val="1E293B"/>
+                  <a:srgbClr val="1B2B31"/>
                 </a:solidFill>
               </a:rPr>
               <a:t>1.16 / 1.01 / 1.10 / 1.18 — flat.
@@ -13430,7 +15860,7 @@
             <a:r>
               <a:rPr lang="en-US" sz="1500" i="1" dirty="0">
                 <a:solidFill>
-                  <a:srgbClr val="6B6256"/>
+                  <a:srgbClr val="5C6E73"/>
                 </a:solidFill>
               </a:rPr>
               <a:t>a large shift (~20 pp) is excluded; a subtle drift ≤10 pp is not (F4 n=4).</a:t>
@@ -13456,7 +15886,7 @@
             </a:avLst>
           </a:prstGeom>
           <a:solidFill>
-            <a:srgbClr val="1F3A3D"/>
+            <a:srgbClr val="123F47"/>
           </a:solidFill>
           <a:ln/>
           <a:effectLst>
@@ -13531,7 +15961,7 @@
             <a:r>
               <a:rPr lang="en-US" sz="1050" dirty="0">
                 <a:solidFill>
-                  <a:srgbClr val="6B6256"/>
+                  <a:srgbClr val="5C6E73"/>
                 </a:solidFill>
               </a:rPr>
               <a:t>Computational Genomics 76553  ·  HUJI  ·  MASLD snRNA-seq hackathon</a:t>
@@ -13567,7 +15997,7 @@
             <a:r>
               <a:rPr lang="en-US" sz="1050" dirty="0">
                 <a:solidFill>
-                  <a:srgbClr val="6B6256"/>
+                  <a:srgbClr val="5C6E73"/>
                 </a:solidFill>
               </a:rPr>
               <a:t>9</a:t>

--- a/presentation/MASLD_zonation.pptx
+++ b/presentation/MASLD_zonation.pptx
@@ -5486,13 +5486,14 @@
         </p:nvPicPr>
         <p:blipFill>
           <a:blip r:embed="rId1"/>
-          <a:srcRect l="0" r="0" t="0" b="0"/>
-          <a:stretch/>
+          <a:stretch>
+            <a:fillRect/>
+          </a:stretch>
         </p:blipFill>
         <p:spPr>
           <a:xfrm>
-            <a:off x="274320" y="1371600"/>
-            <a:ext cx="7955280" cy="4114800"/>
+            <a:off x="1073738" y="1371600"/>
+            <a:ext cx="6356445" cy="4114800"/>
           </a:xfrm>
           <a:prstGeom prst="rect">
             <a:avLst/>
@@ -5895,13 +5896,14 @@
         </p:nvPicPr>
         <p:blipFill>
           <a:blip r:embed="rId1"/>
-          <a:srcRect l="0" r="0" t="0" b="0"/>
-          <a:stretch/>
+          <a:stretch>
+            <a:fillRect/>
+          </a:stretch>
         </p:blipFill>
         <p:spPr>
           <a:xfrm>
-            <a:off x="274320" y="1371600"/>
-            <a:ext cx="11612880" cy="3566160"/>
+            <a:off x="1598379" y="1371600"/>
+            <a:ext cx="8964763" cy="3566160"/>
           </a:xfrm>
           <a:prstGeom prst="rect">
             <a:avLst/>
@@ -6998,13 +7000,14 @@
         </p:nvPicPr>
         <p:blipFill>
           <a:blip r:embed="rId1"/>
-          <a:srcRect l="0" r="0" t="0" b="0"/>
-          <a:stretch/>
+          <a:stretch>
+            <a:fillRect/>
+          </a:stretch>
         </p:blipFill>
         <p:spPr>
           <a:xfrm>
-            <a:off x="1188720" y="1371600"/>
-            <a:ext cx="8412480" cy="4572000"/>
+            <a:off x="1981747" y="1371600"/>
+            <a:ext cx="6826425" cy="4572000"/>
           </a:xfrm>
           <a:prstGeom prst="rect">
             <a:avLst/>
@@ -7456,13 +7459,14 @@
         </p:nvPicPr>
         <p:blipFill>
           <a:blip r:embed="rId1"/>
-          <a:srcRect l="0" r="0" t="0" b="0"/>
-          <a:stretch/>
+          <a:stretch>
+            <a:fillRect/>
+          </a:stretch>
         </p:blipFill>
         <p:spPr>
           <a:xfrm>
             <a:off x="731520" y="1371600"/>
-            <a:ext cx="6949440" cy="4572000"/>
+            <a:ext cx="6949440" cy="4002345"/>
           </a:xfrm>
           <a:prstGeom prst="rect">
             <a:avLst/>
@@ -7693,13 +7697,14 @@
         </p:nvPicPr>
         <p:blipFill>
           <a:blip r:embed="rId1"/>
-          <a:srcRect l="0" r="0" t="0" b="0"/>
-          <a:stretch/>
+          <a:stretch>
+            <a:fillRect/>
+          </a:stretch>
         </p:blipFill>
         <p:spPr>
           <a:xfrm>
             <a:off x="731520" y="1371600"/>
-            <a:ext cx="7498080" cy="4572000"/>
+            <a:ext cx="7498080" cy="3928839"/>
           </a:xfrm>
           <a:prstGeom prst="rect">
             <a:avLst/>
@@ -7930,13 +7935,14 @@
         </p:nvPicPr>
         <p:blipFill>
           <a:blip r:embed="rId1"/>
-          <a:srcRect l="0" r="0" t="0" b="0"/>
-          <a:stretch/>
+          <a:stretch>
+            <a:fillRect/>
+          </a:stretch>
         </p:blipFill>
         <p:spPr>
           <a:xfrm>
             <a:off x="6035040" y="1463040"/>
-            <a:ext cx="5852160" cy="3657600"/>
+            <a:ext cx="5852160" cy="2859524"/>
           </a:xfrm>
           <a:prstGeom prst="rect">
             <a:avLst/>
@@ -14236,13 +14242,14 @@
         </p:nvPicPr>
         <p:blipFill>
           <a:blip r:embed="rId1"/>
-          <a:srcRect l="0" r="0" t="0" b="0"/>
-          <a:stretch/>
+          <a:stretch>
+            <a:fillRect/>
+          </a:stretch>
         </p:blipFill>
         <p:spPr>
           <a:xfrm>
             <a:off x="274320" y="1371600"/>
-            <a:ext cx="8229600" cy="3931920"/>
+            <a:ext cx="8229600" cy="3239574"/>
           </a:xfrm>
           <a:prstGeom prst="rect">
             <a:avLst/>
@@ -15706,13 +15713,14 @@
         </p:nvPicPr>
         <p:blipFill>
           <a:blip r:embed="rId1"/>
-          <a:srcRect l="0" r="0" t="0" b="0"/>
-          <a:stretch/>
+          <a:stretch>
+            <a:fillRect/>
+          </a:stretch>
         </p:blipFill>
         <p:spPr>
           <a:xfrm>
-            <a:off x="182880" y="1417320"/>
-            <a:ext cx="8321040" cy="3749040"/>
+            <a:off x="370893" y="1417320"/>
+            <a:ext cx="7945014" cy="3749040"/>
           </a:xfrm>
           <a:prstGeom prst="rect">
             <a:avLst/>

--- a/presentation/MASLD_zonation.pptx
+++ b/presentation/MASLD_zonation.pptx
@@ -5492,8 +5492,8 @@
         </p:blipFill>
         <p:spPr>
           <a:xfrm>
-            <a:off x="1073738" y="1371600"/>
-            <a:ext cx="6356445" cy="4114800"/>
+            <a:off x="1065542" y="1371600"/>
+            <a:ext cx="6372835" cy="4114800"/>
           </a:xfrm>
           <a:prstGeom prst="rect">
             <a:avLst/>
@@ -5902,8 +5902,8 @@
         </p:blipFill>
         <p:spPr>
           <a:xfrm>
-            <a:off x="1598379" y="1371600"/>
-            <a:ext cx="8964763" cy="3566160"/>
+            <a:off x="1572687" y="1371600"/>
+            <a:ext cx="9016146" cy="3566160"/>
           </a:xfrm>
           <a:prstGeom prst="rect">
             <a:avLst/>
@@ -7006,8 +7006,8 @@
         </p:blipFill>
         <p:spPr>
           <a:xfrm>
-            <a:off x="1981747" y="1371600"/>
-            <a:ext cx="6826425" cy="4572000"/>
+            <a:off x="1922867" y="1371600"/>
+            <a:ext cx="6944187" cy="4572000"/>
           </a:xfrm>
           <a:prstGeom prst="rect">
             <a:avLst/>
@@ -7466,7 +7466,7 @@
         <p:spPr>
           <a:xfrm>
             <a:off x="731520" y="1371600"/>
-            <a:ext cx="6949440" cy="4002345"/>
+            <a:ext cx="6949440" cy="3990200"/>
           </a:xfrm>
           <a:prstGeom prst="rect">
             <a:avLst/>
@@ -7704,7 +7704,7 @@
         <p:spPr>
           <a:xfrm>
             <a:off x="731520" y="1371600"/>
-            <a:ext cx="7498080" cy="3928839"/>
+            <a:ext cx="7498080" cy="3913079"/>
           </a:xfrm>
           <a:prstGeom prst="rect">
             <a:avLst/>
@@ -7942,7 +7942,7 @@
         <p:spPr>
           <a:xfrm>
             <a:off x="6035040" y="1463040"/>
-            <a:ext cx="5852160" cy="2859524"/>
+            <a:ext cx="5852160" cy="2847383"/>
           </a:xfrm>
           <a:prstGeom prst="rect">
             <a:avLst/>
@@ -14249,7 +14249,7 @@
         <p:spPr>
           <a:xfrm>
             <a:off x="274320" y="1371600"/>
-            <a:ext cx="8229600" cy="3239574"/>
+            <a:ext cx="8229600" cy="3157198"/>
           </a:xfrm>
           <a:prstGeom prst="rect">
             <a:avLst/>
@@ -15719,8 +15719,8 @@
         </p:blipFill>
         <p:spPr>
           <a:xfrm>
-            <a:off x="370893" y="1417320"/>
-            <a:ext cx="7945014" cy="3749040"/>
+            <a:off x="385961" y="1417320"/>
+            <a:ext cx="7914879" cy="3749040"/>
           </a:xfrm>
           <a:prstGeom prst="rect">
             <a:avLst/>
